--- a/plugins/gradient-cio/assets/examples/gradient-portfolio-attribution-lanes-three-lane.pptx
+++ b/plugins/gradient-cio/assets/examples/gradient-portfolio-attribution-lanes-three-lane.pptx
@@ -30,6 +30,7 @@
     <ns0:sldId id="278" ns1:id="rId29"/>
     <ns0:sldId id="279" ns1:id="rId30"/>
     <ns0:sldId id="280" ns1:id="rId31"/>
+    <ns0:sldId id="281" ns1:id="rId32"/>
   </ns0:sldIdLst>
   <ns0:sldSz cx="12191695" cy="6858000" type="screen16x9"/>
   <ns0:notesSz cx="6858000" cy="9144000"/>
@@ -6523,7 +6524,7 @@
               <a:rPr>
                 <a:latin typeface="Inter"/>
               </a:rPr>
-              <a:t>AUDIENCE</a:t>
+              <a:t>PREPARED FOR</a:t>
             </a:r>
           </a:p>
         </p:txBody>
@@ -6656,224 +6657,7 @@
       </p:sp>
       <p:sp>
         <p:nvSpPr>
-          <p:cNvPr id="17" name="Rectangle 16"/>
-          <p:cNvSpPr/>
-          <p:nvPr/>
-        </p:nvSpPr>
-        <p:spPr>
-          <a:xfrm>
-            <a:off x="685800" y="5687568"/>
-            <a:ext cx="3337560" cy="530352"/>
-          </a:xfrm>
-          <a:prstGeom prst="rect">
-            <a:avLst/>
-          </a:prstGeom>
-          <a:solidFill>
-            <a:srgbClr val="C6F432"/>
-          </a:solidFill>
-          <a:ln>
-            <a:solidFill>
-              <a:srgbClr val="C6F432"/>
-            </a:solidFill>
-          </a:ln>
-        </p:spPr>
-        <p:style>
-          <a:lnRef idx="1">
-            <a:schemeClr val="accent1"/>
-          </a:lnRef>
-          <a:fillRef idx="3">
-            <a:schemeClr val="accent1"/>
-          </a:fillRef>
-          <a:effectRef idx="2">
-            <a:schemeClr val="accent1"/>
-          </a:effectRef>
-          <a:fontRef idx="minor">
-            <a:schemeClr val="lt1"/>
-          </a:fontRef>
-        </p:style>
-        <p:txBody>
-          <a:bodyPr rtlCol="0" anchor="ctr"/>
-          <a:lstStyle/>
-          <a:p>
-            <a:pPr algn="ctr">
-              <a:defRPr>
-                <a:latin typeface="Inter"/>
-              </a:defRPr>
-            </a:pPr>
-          </a:p>
-        </p:txBody>
-      </p:sp>
-      <p:sp>
-        <p:nvSpPr>
-          <p:cNvPr id="18" name="TextBox 17"/>
-          <p:cNvSpPr txBox="1"/>
-          <p:nvPr/>
-        </p:nvSpPr>
-        <p:spPr>
-          <a:xfrm>
-            <a:off x="822960" y="5760720"/>
-            <a:ext cx="3063240" cy="128016"/>
-          </a:xfrm>
-          <a:prstGeom prst="rect">
-            <a:avLst/>
-          </a:prstGeom>
-          <a:noFill/>
-        </p:spPr>
-        <p:txBody>
-          <a:bodyPr wrap="none" lIns="9144" rIns="9144" tIns="9144" bIns="9144" anchor="t">
-            <a:spAutoFit/>
-          </a:bodyPr>
-          <a:lstStyle/>
-          <a:p>
-            <a:pPr algn="l">
-              <a:spcAft>
-                <a:spcPts val="0"/>
-              </a:spcAft>
-              <a:defRPr sz="620" b="1">
-                <a:solidFill>
-                  <a:srgbClr val="0D1117"/>
-                </a:solidFill>
-                <a:latin typeface="Inter"/>
-              </a:defRPr>
-            </a:pPr>
-            <a:r>
-              <a:rPr>
-                <a:latin typeface="Inter"/>
-              </a:rPr>
-              <a:t>OVERALL VIEW</a:t>
-            </a:r>
-          </a:p>
-        </p:txBody>
-      </p:sp>
-      <p:sp>
-        <p:nvSpPr>
-          <p:cNvPr id="19" name="TextBox 18"/>
-          <p:cNvSpPr txBox="1"/>
-          <p:nvPr/>
-        </p:nvSpPr>
-        <p:spPr>
-          <a:xfrm>
-            <a:off x="822960" y="5916168"/>
-            <a:ext cx="3063240" cy="182880"/>
-          </a:xfrm>
-          <a:prstGeom prst="rect">
-            <a:avLst/>
-          </a:prstGeom>
-          <a:noFill/>
-        </p:spPr>
-        <p:txBody>
-          <a:bodyPr wrap="none" lIns="9144" rIns="9144" tIns="9144" bIns="9144" anchor="t">
-            <a:spAutoFit/>
-          </a:bodyPr>
-          <a:lstStyle/>
-          <a:p>
-            <a:pPr algn="l">
-              <a:spcAft>
-                <a:spcPts val="0"/>
-              </a:spcAft>
-              <a:defRPr sz="900" b="1">
-                <a:solidFill>
-                  <a:srgbClr val="0D1117"/>
-                </a:solidFill>
-                <a:latin typeface="Inter"/>
-              </a:defRPr>
-            </a:pPr>
-            <a:r>
-              <a:rPr>
-                <a:latin typeface="Inter"/>
-              </a:rPr>
-              <a:t>Three compatible lanes compared</a:t>
-            </a:r>
-          </a:p>
-        </p:txBody>
-      </p:sp>
-      <p:sp>
-        <p:nvSpPr>
-          <p:cNvPr id="20" name="TextBox 19"/>
-          <p:cNvSpPr txBox="1"/>
-          <p:nvPr/>
-        </p:nvSpPr>
-        <p:spPr>
-          <a:xfrm>
-            <a:off x="4297680" y="5733288"/>
-            <a:ext cx="3108960" cy="164592"/>
-          </a:xfrm>
-          <a:prstGeom prst="rect">
-            <a:avLst/>
-          </a:prstGeom>
-          <a:noFill/>
-        </p:spPr>
-        <p:txBody>
-          <a:bodyPr wrap="none" lIns="9144" rIns="9144" tIns="9144" bIns="9144" anchor="t">
-            <a:spAutoFit/>
-          </a:bodyPr>
-          <a:lstStyle/>
-          <a:p>
-            <a:pPr algn="l">
-              <a:spcAft>
-                <a:spcPts val="0"/>
-              </a:spcAft>
-              <a:defRPr sz="650" b="1">
-                <a:solidFill>
-                  <a:srgbClr val="8A94A1"/>
-                </a:solidFill>
-                <a:latin typeface="Inter"/>
-              </a:defRPr>
-            </a:pPr>
-            <a:r>
-              <a:rPr>
-                <a:latin typeface="Inter"/>
-              </a:rPr>
-              <a:t>SCOPE REVIEWED</a:t>
-            </a:r>
-          </a:p>
-        </p:txBody>
-      </p:sp>
-      <p:sp>
-        <p:nvSpPr>
-          <p:cNvPr id="21" name="TextBox 20"/>
-          <p:cNvSpPr txBox="1"/>
-          <p:nvPr/>
-        </p:nvSpPr>
-        <p:spPr>
-          <a:xfrm>
-            <a:off x="4297680" y="5934456"/>
-            <a:ext cx="3108960" cy="201168"/>
-          </a:xfrm>
-          <a:prstGeom prst="rect">
-            <a:avLst/>
-          </a:prstGeom>
-          <a:noFill/>
-        </p:spPr>
-        <p:txBody>
-          <a:bodyPr wrap="none" lIns="9144" rIns="9144" tIns="9144" bIns="9144" anchor="t">
-            <a:spAutoFit/>
-          </a:bodyPr>
-          <a:lstStyle/>
-          <a:p>
-            <a:pPr algn="l">
-              <a:spcAft>
-                <a:spcPts val="0"/>
-              </a:spcAft>
-              <a:defRPr sz="800" b="1">
-                <a:solidFill>
-                  <a:srgbClr val="FFFFFF"/>
-                </a:solidFill>
-                <a:latin typeface="Inter"/>
-              </a:defRPr>
-            </a:pPr>
-            <a:r>
-              <a:rPr>
-                <a:latin typeface="Inter"/>
-              </a:rPr>
-              <a:t>4 of 4 · Complete</a:t>
-            </a:r>
-          </a:p>
-        </p:txBody>
-      </p:sp>
-      <p:sp>
-        <p:nvSpPr>
-          <p:cNvPr id="22" name="TextBox 21"/>
+          <p:cNvPr id="17" name="TextBox 16"/>
           <p:cNvSpPr txBox="1"/>
           <p:nvPr/>
         </p:nvSpPr>
@@ -6915,7 +6699,7 @@
       </p:sp>
       <p:sp>
         <p:nvSpPr>
-          <p:cNvPr id="23" name="TextBox 22"/>
+          <p:cNvPr id="18" name="TextBox 17"/>
           <p:cNvSpPr txBox="1"/>
           <p:nvPr/>
         </p:nvSpPr>
@@ -6957,7 +6741,7 @@
       </p:sp>
       <p:sp>
         <p:nvSpPr>
-          <p:cNvPr id="24" name="TextBox 23"/>
+          <p:cNvPr id="19" name="TextBox 18"/>
           <p:cNvSpPr txBox="1"/>
           <p:nvPr/>
         </p:nvSpPr>
@@ -7073,7 +6857,7 @@
         <p:spPr>
           <a:xfrm>
             <a:off x="640080" y="329184"/>
-            <a:ext cx="5303520" cy="182880"/>
+            <a:ext cx="9875520" cy="182880"/>
           </a:xfrm>
           <a:prstGeom prst="rect">
             <a:avLst/>
@@ -7114,48 +6898,6 @@
         </p:nvSpPr>
         <p:spPr>
           <a:xfrm>
-            <a:off x="5897880" y="310896"/>
-            <a:ext cx="4800600" cy="256032"/>
-          </a:xfrm>
-          <a:prstGeom prst="rect">
-            <a:avLst/>
-          </a:prstGeom>
-          <a:noFill/>
-        </p:spPr>
-        <p:txBody>
-          <a:bodyPr wrap="none" lIns="9144" rIns="9144" tIns="9144" bIns="9144" anchor="t">
-            <a:spAutoFit/>
-          </a:bodyPr>
-          <a:lstStyle/>
-          <a:p>
-            <a:pPr algn="r">
-              <a:spcAft>
-                <a:spcPts val="0"/>
-              </a:spcAft>
-              <a:defRPr sz="680" b="1">
-                <a:solidFill>
-                  <a:srgbClr val="4F6B00"/>
-                </a:solidFill>
-                <a:latin typeface="Inter"/>
-              </a:defRPr>
-            </a:pPr>
-            <a:r>
-              <a:rPr>
-                <a:latin typeface="Inter"/>
-              </a:rPr>
-              <a:t>Illustrative, Gradient Maintained — demo data, not the client's holdings or managers</a:t>
-            </a:r>
-          </a:p>
-        </p:txBody>
-      </p:sp>
-      <p:sp>
-        <p:nvSpPr>
-          <p:cNvPr id="5" name="TextBox 4"/>
-          <p:cNvSpPr txBox="1"/>
-          <p:nvPr/>
-        </p:nvSpPr>
-        <p:spPr>
-          <a:xfrm>
             <a:off x="640080" y="566928"/>
             <a:ext cx="10058400" cy="530352"/>
           </a:xfrm>
@@ -7192,7 +6934,7 @@
       </p:sp>
       <p:sp>
         <p:nvSpPr>
-          <p:cNvPr id="6" name="Rectangle 5"/>
+          <p:cNvPr id="5" name="Rectangle 4"/>
           <p:cNvSpPr/>
           <p:nvPr/>
         </p:nvSpPr>
@@ -7241,7 +6983,7 @@
       </p:sp>
       <p:sp>
         <p:nvSpPr>
-          <p:cNvPr id="7" name="Rectangle 6"/>
+          <p:cNvPr id="6" name="Rectangle 5"/>
           <p:cNvSpPr/>
           <p:nvPr/>
         </p:nvSpPr>
@@ -7290,7 +7032,7 @@
       </p:sp>
       <p:sp>
         <p:nvSpPr>
-          <p:cNvPr id="8" name="TextBox 7"/>
+          <p:cNvPr id="7" name="TextBox 6"/>
           <p:cNvSpPr txBox="1"/>
           <p:nvPr/>
         </p:nvSpPr>
@@ -7332,7 +7074,7 @@
       </p:sp>
       <p:sp>
         <p:nvSpPr>
-          <p:cNvPr id="9" name="TextBox 8"/>
+          <p:cNvPr id="8" name="TextBox 7"/>
           <p:cNvSpPr txBox="1"/>
           <p:nvPr/>
         </p:nvSpPr>
@@ -7374,7 +7116,7 @@
       </p:sp>
       <p:graphicFrame>
         <p:nvGraphicFramePr>
-          <p:cNvPr id="10" name="Chart 9"/>
+          <p:cNvPr id="9" name="Chart 8"/>
           <p:cNvGraphicFramePr>
             <a:graphicFrameLocks noGrp="1"/>
           </p:cNvGraphicFramePr>
@@ -7392,7 +7134,7 @@
       </p:graphicFrame>
       <p:sp>
         <p:nvSpPr>
-          <p:cNvPr id="11" name="Rectangle 10"/>
+          <p:cNvPr id="10" name="Rectangle 9"/>
           <p:cNvSpPr/>
           <p:nvPr/>
         </p:nvSpPr>
@@ -7441,7 +7183,7 @@
       </p:sp>
       <p:sp>
         <p:nvSpPr>
-          <p:cNvPr id="12" name="TextBox 11"/>
+          <p:cNvPr id="11" name="TextBox 10"/>
           <p:cNvSpPr txBox="1"/>
           <p:nvPr/>
         </p:nvSpPr>
@@ -7483,7 +7225,7 @@
       </p:sp>
       <p:sp>
         <p:nvSpPr>
-          <p:cNvPr id="13" name="TextBox 12"/>
+          <p:cNvPr id="12" name="TextBox 11"/>
           <p:cNvSpPr txBox="1"/>
           <p:nvPr/>
         </p:nvSpPr>
@@ -7525,7 +7267,7 @@
       </p:sp>
       <p:sp>
         <p:nvSpPr>
-          <p:cNvPr id="14" name="TextBox 13"/>
+          <p:cNvPr id="13" name="TextBox 12"/>
           <p:cNvSpPr txBox="1"/>
           <p:nvPr/>
         </p:nvSpPr>
@@ -7641,7 +7383,7 @@
         <p:spPr>
           <a:xfrm>
             <a:off x="640080" y="329184"/>
-            <a:ext cx="5303520" cy="182880"/>
+            <a:ext cx="9875520" cy="182880"/>
           </a:xfrm>
           <a:prstGeom prst="rect">
             <a:avLst/>
@@ -7682,48 +7424,6 @@
         </p:nvSpPr>
         <p:spPr>
           <a:xfrm>
-            <a:off x="5897880" y="310896"/>
-            <a:ext cx="4800600" cy="256032"/>
-          </a:xfrm>
-          <a:prstGeom prst="rect">
-            <a:avLst/>
-          </a:prstGeom>
-          <a:noFill/>
-        </p:spPr>
-        <p:txBody>
-          <a:bodyPr wrap="none" lIns="9144" rIns="9144" tIns="9144" bIns="9144" anchor="t">
-            <a:spAutoFit/>
-          </a:bodyPr>
-          <a:lstStyle/>
-          <a:p>
-            <a:pPr algn="r">
-              <a:spcAft>
-                <a:spcPts val="0"/>
-              </a:spcAft>
-              <a:defRPr sz="680" b="1">
-                <a:solidFill>
-                  <a:srgbClr val="4F6B00"/>
-                </a:solidFill>
-                <a:latin typeface="Inter"/>
-              </a:defRPr>
-            </a:pPr>
-            <a:r>
-              <a:rPr>
-                <a:latin typeface="Inter"/>
-              </a:rPr>
-              <a:t>Illustrative, Gradient Maintained — demo data, not the client's holdings or managers</a:t>
-            </a:r>
-          </a:p>
-        </p:txBody>
-      </p:sp>
-      <p:sp>
-        <p:nvSpPr>
-          <p:cNvPr id="5" name="TextBox 4"/>
-          <p:cNvSpPr txBox="1"/>
-          <p:nvPr/>
-        </p:nvSpPr>
-        <p:spPr>
-          <a:xfrm>
             <a:off x="640080" y="566928"/>
             <a:ext cx="10058400" cy="530352"/>
           </a:xfrm>
@@ -7760,7 +7460,7 @@
       </p:sp>
       <p:sp>
         <p:nvSpPr>
-          <p:cNvPr id="6" name="Rectangle 5"/>
+          <p:cNvPr id="5" name="Rectangle 4"/>
           <p:cNvSpPr/>
           <p:nvPr/>
         </p:nvSpPr>
@@ -7809,7 +7509,7 @@
       </p:sp>
       <p:sp>
         <p:nvSpPr>
-          <p:cNvPr id="7" name="Rectangle 6"/>
+          <p:cNvPr id="6" name="Rectangle 5"/>
           <p:cNvSpPr/>
           <p:nvPr/>
         </p:nvSpPr>
@@ -7858,7 +7558,7 @@
       </p:sp>
       <p:sp>
         <p:nvSpPr>
-          <p:cNvPr id="8" name="TextBox 7"/>
+          <p:cNvPr id="7" name="TextBox 6"/>
           <p:cNvSpPr txBox="1"/>
           <p:nvPr/>
         </p:nvSpPr>
@@ -7900,7 +7600,7 @@
       </p:sp>
       <p:sp>
         <p:nvSpPr>
-          <p:cNvPr id="9" name="TextBox 8"/>
+          <p:cNvPr id="8" name="TextBox 7"/>
           <p:cNvSpPr txBox="1"/>
           <p:nvPr/>
         </p:nvSpPr>
@@ -7942,7 +7642,7 @@
       </p:sp>
       <p:graphicFrame>
         <p:nvGraphicFramePr>
-          <p:cNvPr id="10" name="Chart 9"/>
+          <p:cNvPr id="9" name="Chart 8"/>
           <p:cNvGraphicFramePr>
             <a:graphicFrameLocks noGrp="1"/>
           </p:cNvGraphicFramePr>
@@ -7960,7 +7660,7 @@
       </p:graphicFrame>
       <p:sp>
         <p:nvSpPr>
-          <p:cNvPr id="11" name="Rectangle 10"/>
+          <p:cNvPr id="10" name="Rectangle 9"/>
           <p:cNvSpPr/>
           <p:nvPr/>
         </p:nvSpPr>
@@ -8009,7 +7709,7 @@
       </p:sp>
       <p:sp>
         <p:nvSpPr>
-          <p:cNvPr id="12" name="TextBox 11"/>
+          <p:cNvPr id="11" name="TextBox 10"/>
           <p:cNvSpPr txBox="1"/>
           <p:nvPr/>
         </p:nvSpPr>
@@ -8051,7 +7751,7 @@
       </p:sp>
       <p:sp>
         <p:nvSpPr>
-          <p:cNvPr id="13" name="TextBox 12"/>
+          <p:cNvPr id="12" name="TextBox 11"/>
           <p:cNvSpPr txBox="1"/>
           <p:nvPr/>
         </p:nvSpPr>
@@ -8093,7 +7793,7 @@
       </p:sp>
       <p:sp>
         <p:nvSpPr>
-          <p:cNvPr id="14" name="TextBox 13"/>
+          <p:cNvPr id="13" name="TextBox 12"/>
           <p:cNvSpPr txBox="1"/>
           <p:nvPr/>
         </p:nvSpPr>
@@ -8209,7 +7909,7 @@
         <p:spPr>
           <a:xfrm>
             <a:off x="640080" y="329184"/>
-            <a:ext cx="5303520" cy="182880"/>
+            <a:ext cx="9875520" cy="182880"/>
           </a:xfrm>
           <a:prstGeom prst="rect">
             <a:avLst/>
@@ -8250,48 +7950,6 @@
         </p:nvSpPr>
         <p:spPr>
           <a:xfrm>
-            <a:off x="5897880" y="310896"/>
-            <a:ext cx="4800600" cy="256032"/>
-          </a:xfrm>
-          <a:prstGeom prst="rect">
-            <a:avLst/>
-          </a:prstGeom>
-          <a:noFill/>
-        </p:spPr>
-        <p:txBody>
-          <a:bodyPr wrap="none" lIns="9144" rIns="9144" tIns="9144" bIns="9144" anchor="t">
-            <a:spAutoFit/>
-          </a:bodyPr>
-          <a:lstStyle/>
-          <a:p>
-            <a:pPr algn="r">
-              <a:spcAft>
-                <a:spcPts val="0"/>
-              </a:spcAft>
-              <a:defRPr sz="680" b="1">
-                <a:solidFill>
-                  <a:srgbClr val="4F6B00"/>
-                </a:solidFill>
-                <a:latin typeface="Inter"/>
-              </a:defRPr>
-            </a:pPr>
-            <a:r>
-              <a:rPr>
-                <a:latin typeface="Inter"/>
-              </a:rPr>
-              <a:t>Illustrative, Gradient Maintained — demo data, not the client's holdings or managers</a:t>
-            </a:r>
-          </a:p>
-        </p:txBody>
-      </p:sp>
-      <p:sp>
-        <p:nvSpPr>
-          <p:cNvPr id="5" name="TextBox 4"/>
-          <p:cNvSpPr txBox="1"/>
-          <p:nvPr/>
-        </p:nvSpPr>
-        <p:spPr>
-          <a:xfrm>
             <a:off x="640080" y="566928"/>
             <a:ext cx="10058400" cy="530352"/>
           </a:xfrm>
@@ -8328,7 +7986,7 @@
       </p:sp>
       <p:sp>
         <p:nvSpPr>
-          <p:cNvPr id="6" name="Rectangle 5"/>
+          <p:cNvPr id="5" name="Rectangle 4"/>
           <p:cNvSpPr/>
           <p:nvPr/>
         </p:nvSpPr>
@@ -8377,7 +8035,7 @@
       </p:sp>
       <p:sp>
         <p:nvSpPr>
-          <p:cNvPr id="7" name="Rectangle 6"/>
+          <p:cNvPr id="6" name="Rectangle 5"/>
           <p:cNvSpPr/>
           <p:nvPr/>
         </p:nvSpPr>
@@ -8426,7 +8084,7 @@
       </p:sp>
       <p:sp>
         <p:nvSpPr>
-          <p:cNvPr id="8" name="TextBox 7"/>
+          <p:cNvPr id="7" name="TextBox 6"/>
           <p:cNvSpPr txBox="1"/>
           <p:nvPr/>
         </p:nvSpPr>
@@ -8468,14 +8126,14 @@
       </p:sp>
       <p:sp>
         <p:nvSpPr>
-          <p:cNvPr id="9" name="Rectangle 8"/>
+          <p:cNvPr id="8" name="Rectangle 7"/>
           <p:cNvSpPr/>
           <p:nvPr/>
         </p:nvSpPr>
         <p:spPr>
           <a:xfrm>
             <a:off x="640080" y="1325880"/>
-            <a:ext cx="10908792" cy="2385449"/>
+            <a:ext cx="10908792" cy="2396890"/>
           </a:xfrm>
           <a:prstGeom prst="rect">
             <a:avLst/>
@@ -8517,14 +8175,14 @@
       </p:sp>
       <p:sp>
         <p:nvSpPr>
-          <p:cNvPr id="10" name="Rectangle 9"/>
+          <p:cNvPr id="9" name="Rectangle 8"/>
           <p:cNvSpPr/>
           <p:nvPr/>
         </p:nvSpPr>
         <p:spPr>
           <a:xfrm>
             <a:off x="640080" y="1325880"/>
-            <a:ext cx="54864" cy="2385449"/>
+            <a:ext cx="54864" cy="2396890"/>
           </a:xfrm>
           <a:prstGeom prst="rect">
             <a:avLst/>
@@ -8566,7 +8224,7 @@
       </p:sp>
       <p:sp>
         <p:nvSpPr>
-          <p:cNvPr id="11" name="TextBox 10"/>
+          <p:cNvPr id="10" name="TextBox 9"/>
           <p:cNvSpPr txBox="1"/>
           <p:nvPr/>
         </p:nvSpPr>
@@ -8608,14 +8266,14 @@
       </p:sp>
       <p:sp>
         <p:nvSpPr>
-          <p:cNvPr id="12" name="TextBox 11"/>
+          <p:cNvPr id="11" name="TextBox 10"/>
           <p:cNvSpPr txBox="1"/>
           <p:nvPr/>
         </p:nvSpPr>
         <p:spPr>
           <a:xfrm>
             <a:off x="804671" y="1719072"/>
-            <a:ext cx="10616184" cy="1900817"/>
+            <a:ext cx="10616184" cy="1912258"/>
           </a:xfrm>
           <a:prstGeom prst="rect">
             <a:avLst/>
@@ -8650,14 +8308,14 @@
       </p:sp>
       <p:sp>
         <p:nvSpPr>
-          <p:cNvPr id="13" name="Rectangle 12"/>
+          <p:cNvPr id="12" name="Rectangle 11"/>
           <p:cNvSpPr/>
           <p:nvPr/>
         </p:nvSpPr>
         <p:spPr>
           <a:xfrm>
-            <a:off x="640080" y="3821057"/>
-            <a:ext cx="10908792" cy="2396862"/>
+            <a:off x="640080" y="3832498"/>
+            <a:ext cx="10908792" cy="2385421"/>
           </a:xfrm>
           <a:prstGeom prst="rect">
             <a:avLst/>
@@ -8699,14 +8357,14 @@
       </p:sp>
       <p:sp>
         <p:nvSpPr>
-          <p:cNvPr id="14" name="Rectangle 13"/>
+          <p:cNvPr id="13" name="Rectangle 12"/>
           <p:cNvSpPr/>
           <p:nvPr/>
         </p:nvSpPr>
         <p:spPr>
           <a:xfrm>
-            <a:off x="640080" y="3821057"/>
-            <a:ext cx="54864" cy="2396862"/>
+            <a:off x="640080" y="3832498"/>
+            <a:ext cx="54864" cy="2385421"/>
           </a:xfrm>
           <a:prstGeom prst="rect">
             <a:avLst/>
@@ -8748,13 +8406,13 @@
       </p:sp>
       <p:sp>
         <p:nvSpPr>
-          <p:cNvPr id="15" name="TextBox 14"/>
+          <p:cNvPr id="14" name="TextBox 13"/>
           <p:cNvSpPr txBox="1"/>
           <p:nvPr/>
         </p:nvSpPr>
         <p:spPr>
           <a:xfrm>
-            <a:off x="804671" y="3930785"/>
+            <a:off x="804671" y="3942226"/>
             <a:ext cx="10616184" cy="228600"/>
           </a:xfrm>
           <a:prstGeom prst="rect">
@@ -8790,14 +8448,14 @@
       </p:sp>
       <p:sp>
         <p:nvSpPr>
-          <p:cNvPr id="16" name="TextBox 15"/>
+          <p:cNvPr id="15" name="TextBox 14"/>
           <p:cNvSpPr txBox="1"/>
           <p:nvPr/>
         </p:nvSpPr>
         <p:spPr>
           <a:xfrm>
-            <a:off x="804671" y="4214249"/>
-            <a:ext cx="10616184" cy="1912230"/>
+            <a:off x="804671" y="4225690"/>
+            <a:ext cx="10616184" cy="1900789"/>
           </a:xfrm>
           <a:prstGeom prst="rect">
             <a:avLst/>
@@ -8825,14 +8483,14 @@
               <a:rPr>
                 <a:latin typeface="Inter"/>
               </a:rPr>
-              <a:t>Returned diagnostics.entity_return_reconciliation keeps attribution-summary excess against the linked segment benchmark composite separate from historical-return excess against the policy benchmark entity [S2].</a:t>
+              <a:t>Attribution excess is measured against the linked segment benchmark, not the policy benchmark used for historical returns, so the two excess figures are not directly comparable [S2].</a:t>
             </a:r>
           </a:p>
         </p:txBody>
       </p:sp>
       <p:sp>
         <p:nvSpPr>
-          <p:cNvPr id="17" name="Rectangle 16"/>
+          <p:cNvPr id="16" name="Rectangle 15"/>
           <p:cNvSpPr/>
           <p:nvPr/>
         </p:nvSpPr>
@@ -8881,7 +8539,7 @@
       </p:sp>
       <p:sp>
         <p:nvSpPr>
-          <p:cNvPr id="18" name="TextBox 17"/>
+          <p:cNvPr id="17" name="TextBox 16"/>
           <p:cNvSpPr txBox="1"/>
           <p:nvPr/>
         </p:nvSpPr>
@@ -8923,7 +8581,7 @@
       </p:sp>
       <p:sp>
         <p:nvSpPr>
-          <p:cNvPr id="19" name="TextBox 18"/>
+          <p:cNvPr id="18" name="TextBox 17"/>
           <p:cNvSpPr txBox="1"/>
           <p:nvPr/>
         </p:nvSpPr>
@@ -8965,7 +8623,7 @@
       </p:sp>
       <p:sp>
         <p:nvSpPr>
-          <p:cNvPr id="20" name="TextBox 19"/>
+          <p:cNvPr id="19" name="TextBox 18"/>
           <p:cNvSpPr txBox="1"/>
           <p:nvPr/>
         </p:nvSpPr>
@@ -9081,7 +8739,7 @@
         <p:spPr>
           <a:xfrm>
             <a:off x="640080" y="329184"/>
-            <a:ext cx="5303520" cy="182880"/>
+            <a:ext cx="9875520" cy="182880"/>
           </a:xfrm>
           <a:prstGeom prst="rect">
             <a:avLst/>
@@ -9122,48 +8780,6 @@
         </p:nvSpPr>
         <p:spPr>
           <a:xfrm>
-            <a:off x="5897880" y="310896"/>
-            <a:ext cx="4800600" cy="256032"/>
-          </a:xfrm>
-          <a:prstGeom prst="rect">
-            <a:avLst/>
-          </a:prstGeom>
-          <a:noFill/>
-        </p:spPr>
-        <p:txBody>
-          <a:bodyPr wrap="none" lIns="9144" rIns="9144" tIns="9144" bIns="9144" anchor="t">
-            <a:spAutoFit/>
-          </a:bodyPr>
-          <a:lstStyle/>
-          <a:p>
-            <a:pPr algn="r">
-              <a:spcAft>
-                <a:spcPts val="0"/>
-              </a:spcAft>
-              <a:defRPr sz="680" b="1">
-                <a:solidFill>
-                  <a:srgbClr val="4F6B00"/>
-                </a:solidFill>
-                <a:latin typeface="Inter"/>
-              </a:defRPr>
-            </a:pPr>
-            <a:r>
-              <a:rPr>
-                <a:latin typeface="Inter"/>
-              </a:rPr>
-              <a:t>Illustrative, Gradient Maintained — demo data, not the client's holdings or managers</a:t>
-            </a:r>
-          </a:p>
-        </p:txBody>
-      </p:sp>
-      <p:sp>
-        <p:nvSpPr>
-          <p:cNvPr id="5" name="TextBox 4"/>
-          <p:cNvSpPr txBox="1"/>
-          <p:nvPr/>
-        </p:nvSpPr>
-        <p:spPr>
-          <a:xfrm>
             <a:off x="640080" y="566928"/>
             <a:ext cx="10058400" cy="530352"/>
           </a:xfrm>
@@ -9200,7 +8816,7 @@
       </p:sp>
       <p:sp>
         <p:nvSpPr>
-          <p:cNvPr id="6" name="Rectangle 5"/>
+          <p:cNvPr id="5" name="Rectangle 4"/>
           <p:cNvSpPr/>
           <p:nvPr/>
         </p:nvSpPr>
@@ -9249,7 +8865,7 @@
       </p:sp>
       <p:sp>
         <p:nvSpPr>
-          <p:cNvPr id="7" name="Rectangle 6"/>
+          <p:cNvPr id="6" name="Rectangle 5"/>
           <p:cNvSpPr/>
           <p:nvPr/>
         </p:nvSpPr>
@@ -9298,7 +8914,7 @@
       </p:sp>
       <p:sp>
         <p:nvSpPr>
-          <p:cNvPr id="8" name="TextBox 7"/>
+          <p:cNvPr id="7" name="TextBox 6"/>
           <p:cNvSpPr txBox="1"/>
           <p:nvPr/>
         </p:nvSpPr>
@@ -9340,7 +8956,7 @@
       </p:sp>
       <p:sp>
         <p:nvSpPr>
-          <p:cNvPr id="9" name="TextBox 8"/>
+          <p:cNvPr id="8" name="TextBox 7"/>
           <p:cNvSpPr txBox="1"/>
           <p:nvPr/>
         </p:nvSpPr>
@@ -9382,7 +8998,7 @@
       </p:sp>
       <p:graphicFrame>
         <p:nvGraphicFramePr>
-          <p:cNvPr id="10" name="Chart 9"/>
+          <p:cNvPr id="9" name="Chart 8"/>
           <p:cNvGraphicFramePr>
             <a:graphicFrameLocks noGrp="1"/>
           </p:cNvGraphicFramePr>
@@ -9400,7 +9016,7 @@
       </p:graphicFrame>
       <p:sp>
         <p:nvSpPr>
-          <p:cNvPr id="11" name="Rectangle 10"/>
+          <p:cNvPr id="10" name="Rectangle 9"/>
           <p:cNvSpPr/>
           <p:nvPr/>
         </p:nvSpPr>
@@ -9449,7 +9065,7 @@
       </p:sp>
       <p:sp>
         <p:nvSpPr>
-          <p:cNvPr id="12" name="TextBox 11"/>
+          <p:cNvPr id="11" name="TextBox 10"/>
           <p:cNvSpPr txBox="1"/>
           <p:nvPr/>
         </p:nvSpPr>
@@ -9491,7 +9107,7 @@
       </p:sp>
       <p:sp>
         <p:nvSpPr>
-          <p:cNvPr id="13" name="TextBox 12"/>
+          <p:cNvPr id="12" name="TextBox 11"/>
           <p:cNvSpPr txBox="1"/>
           <p:nvPr/>
         </p:nvSpPr>
@@ -9533,7 +9149,7 @@
       </p:sp>
       <p:sp>
         <p:nvSpPr>
-          <p:cNvPr id="14" name="TextBox 13"/>
+          <p:cNvPr id="13" name="TextBox 12"/>
           <p:cNvSpPr txBox="1"/>
           <p:nvPr/>
         </p:nvSpPr>
@@ -9649,7 +9265,7 @@
         <p:spPr>
           <a:xfrm>
             <a:off x="640080" y="329184"/>
-            <a:ext cx="5303520" cy="182880"/>
+            <a:ext cx="9875520" cy="182880"/>
           </a:xfrm>
           <a:prstGeom prst="rect">
             <a:avLst/>
@@ -9690,48 +9306,6 @@
         </p:nvSpPr>
         <p:spPr>
           <a:xfrm>
-            <a:off x="5897880" y="310896"/>
-            <a:ext cx="4800600" cy="256032"/>
-          </a:xfrm>
-          <a:prstGeom prst="rect">
-            <a:avLst/>
-          </a:prstGeom>
-          <a:noFill/>
-        </p:spPr>
-        <p:txBody>
-          <a:bodyPr wrap="none" lIns="9144" rIns="9144" tIns="9144" bIns="9144" anchor="t">
-            <a:spAutoFit/>
-          </a:bodyPr>
-          <a:lstStyle/>
-          <a:p>
-            <a:pPr algn="r">
-              <a:spcAft>
-                <a:spcPts val="0"/>
-              </a:spcAft>
-              <a:defRPr sz="680" b="1">
-                <a:solidFill>
-                  <a:srgbClr val="4F6B00"/>
-                </a:solidFill>
-                <a:latin typeface="Inter"/>
-              </a:defRPr>
-            </a:pPr>
-            <a:r>
-              <a:rPr>
-                <a:latin typeface="Inter"/>
-              </a:rPr>
-              <a:t>Illustrative, Gradient Maintained — demo data, not the client's holdings or managers</a:t>
-            </a:r>
-          </a:p>
-        </p:txBody>
-      </p:sp>
-      <p:sp>
-        <p:nvSpPr>
-          <p:cNvPr id="5" name="TextBox 4"/>
-          <p:cNvSpPr txBox="1"/>
-          <p:nvPr/>
-        </p:nvSpPr>
-        <p:spPr>
-          <a:xfrm>
             <a:off x="640080" y="566928"/>
             <a:ext cx="10058400" cy="530352"/>
           </a:xfrm>
@@ -9768,7 +9342,7 @@
       </p:sp>
       <p:sp>
         <p:nvSpPr>
-          <p:cNvPr id="6" name="Rectangle 5"/>
+          <p:cNvPr id="5" name="Rectangle 4"/>
           <p:cNvSpPr/>
           <p:nvPr/>
         </p:nvSpPr>
@@ -9817,7 +9391,7 @@
       </p:sp>
       <p:sp>
         <p:nvSpPr>
-          <p:cNvPr id="7" name="Rectangle 6"/>
+          <p:cNvPr id="6" name="Rectangle 5"/>
           <p:cNvSpPr/>
           <p:nvPr/>
         </p:nvSpPr>
@@ -9866,7 +9440,7 @@
       </p:sp>
       <p:sp>
         <p:nvSpPr>
-          <p:cNvPr id="8" name="TextBox 7"/>
+          <p:cNvPr id="7" name="TextBox 6"/>
           <p:cNvSpPr txBox="1"/>
           <p:nvPr/>
         </p:nvSpPr>
@@ -9908,7 +9482,7 @@
       </p:sp>
       <p:sp>
         <p:nvSpPr>
-          <p:cNvPr id="9" name="TextBox 8"/>
+          <p:cNvPr id="8" name="TextBox 7"/>
           <p:cNvSpPr txBox="1"/>
           <p:nvPr/>
         </p:nvSpPr>
@@ -9950,7 +9524,7 @@
       </p:sp>
       <p:graphicFrame>
         <p:nvGraphicFramePr>
-          <p:cNvPr id="10" name="Table 9"/>
+          <p:cNvPr id="9" name="Table 8"/>
           <p:cNvGraphicFramePr>
             <a:graphicFrameLocks noGrp="1"/>
           </p:cNvGraphicFramePr>
@@ -9988,7 +9562,7 @@
                         <a:rPr>
                           <a:latin typeface="Inter"/>
                         </a:rPr>
-                        <a:t>assumption_set_name</a:t>
+                        <a:t>Assumption set</a:t>
                       </a:r>
                     </a:p>
                   </a:txBody>
@@ -10044,7 +9618,7 @@
                         <a:rPr>
                           <a:latin typeface="Inter"/>
                         </a:rPr>
-                        <a:t>regime_name</a:t>
+                        <a:t>Regime</a:t>
                       </a:r>
                     </a:p>
                   </a:txBody>
@@ -10071,7 +9645,7 @@
                         <a:rPr>
                           <a:latin typeface="Inter"/>
                         </a:rPr>
-                        <a:t>user-defined regime [S3]</a:t>
+                        <a:t>User-defined regime [S3]</a:t>
                       </a:r>
                     </a:p>
                   </a:txBody>
@@ -10100,7 +9674,7 @@
                         <a:rPr>
                           <a:latin typeface="Inter"/>
                         </a:rPr>
-                        <a:t>horizon</a:t>
+                        <a:t>Horizon</a:t>
                       </a:r>
                     </a:p>
                   </a:txBody>
@@ -10156,7 +9730,7 @@
                         <a:rPr>
                           <a:latin typeface="Inter"/>
                         </a:rPr>
-                        <a:t>portfolio_return_source</a:t>
+                        <a:t>Portfolio return basis</a:t>
                       </a:r>
                     </a:p>
                   </a:txBody>
@@ -10183,7 +9757,7 @@
                         <a:rPr>
                           <a:latin typeface="Inter"/>
                         </a:rPr>
-                        <a:t>allocation_expected_return_base [S3]</a:t>
+                        <a:t>Base-case expected return by allocation [S3]</a:t>
                       </a:r>
                     </a:p>
                   </a:txBody>
@@ -10212,7 +9786,7 @@
                         <a:rPr>
                           <a:latin typeface="Inter"/>
                         </a:rPr>
-                        <a:t>benchmark_return_source</a:t>
+                        <a:t>Benchmark return basis</a:t>
                       </a:r>
                     </a:p>
                   </a:txBody>
@@ -10239,7 +9813,7 @@
                         <a:rPr>
                           <a:latin typeface="Inter"/>
                         </a:rPr>
-                        <a:t>benchmark_expected_return_base [S3]</a:t>
+                        <a:t>Base-case expected return by benchmark segment [S3]</a:t>
                       </a:r>
                     </a:p>
                   </a:txBody>
@@ -10256,7 +9830,7 @@
       </p:graphicFrame>
       <p:sp>
         <p:nvSpPr>
-          <p:cNvPr id="11" name="Rectangle 10"/>
+          <p:cNvPr id="10" name="Rectangle 9"/>
           <p:cNvSpPr/>
           <p:nvPr/>
         </p:nvSpPr>
@@ -10305,7 +9879,7 @@
       </p:sp>
       <p:sp>
         <p:nvSpPr>
-          <p:cNvPr id="12" name="TextBox 11"/>
+          <p:cNvPr id="11" name="TextBox 10"/>
           <p:cNvSpPr txBox="1"/>
           <p:nvPr/>
         </p:nvSpPr>
@@ -10347,7 +9921,7 @@
       </p:sp>
       <p:graphicFrame>
         <p:nvGraphicFramePr>
-          <p:cNvPr id="13" name="Chart 12"/>
+          <p:cNvPr id="12" name="Chart 11"/>
           <p:cNvGraphicFramePr>
             <a:graphicFrameLocks noGrp="1"/>
           </p:cNvGraphicFramePr>
@@ -10365,7 +9939,7 @@
       </p:graphicFrame>
       <p:sp>
         <p:nvSpPr>
-          <p:cNvPr id="14" name="Rectangle 13"/>
+          <p:cNvPr id="13" name="Rectangle 12"/>
           <p:cNvSpPr/>
           <p:nvPr/>
         </p:nvSpPr>
@@ -10414,7 +9988,7 @@
       </p:sp>
       <p:sp>
         <p:nvSpPr>
-          <p:cNvPr id="15" name="TextBox 14"/>
+          <p:cNvPr id="14" name="TextBox 13"/>
           <p:cNvSpPr txBox="1"/>
           <p:nvPr/>
         </p:nvSpPr>
@@ -10456,7 +10030,7 @@
       </p:sp>
       <p:sp>
         <p:nvSpPr>
-          <p:cNvPr id="16" name="TextBox 15"/>
+          <p:cNvPr id="15" name="TextBox 14"/>
           <p:cNvSpPr txBox="1"/>
           <p:nvPr/>
         </p:nvSpPr>
@@ -10498,7 +10072,7 @@
       </p:sp>
       <p:sp>
         <p:nvSpPr>
-          <p:cNvPr id="17" name="TextBox 16"/>
+          <p:cNvPr id="16" name="TextBox 15"/>
           <p:cNvSpPr txBox="1"/>
           <p:nvPr/>
         </p:nvSpPr>
@@ -10614,7 +10188,7 @@
         <p:spPr>
           <a:xfrm>
             <a:off x="640080" y="329184"/>
-            <a:ext cx="5303520" cy="182880"/>
+            <a:ext cx="9875520" cy="182880"/>
           </a:xfrm>
           <a:prstGeom prst="rect">
             <a:avLst/>
@@ -10655,48 +10229,6 @@
         </p:nvSpPr>
         <p:spPr>
           <a:xfrm>
-            <a:off x="5897880" y="310896"/>
-            <a:ext cx="4800600" cy="256032"/>
-          </a:xfrm>
-          <a:prstGeom prst="rect">
-            <a:avLst/>
-          </a:prstGeom>
-          <a:noFill/>
-        </p:spPr>
-        <p:txBody>
-          <a:bodyPr wrap="none" lIns="9144" rIns="9144" tIns="9144" bIns="9144" anchor="t">
-            <a:spAutoFit/>
-          </a:bodyPr>
-          <a:lstStyle/>
-          <a:p>
-            <a:pPr algn="r">
-              <a:spcAft>
-                <a:spcPts val="0"/>
-              </a:spcAft>
-              <a:defRPr sz="680" b="1">
-                <a:solidFill>
-                  <a:srgbClr val="4F6B00"/>
-                </a:solidFill>
-                <a:latin typeface="Inter"/>
-              </a:defRPr>
-            </a:pPr>
-            <a:r>
-              <a:rPr>
-                <a:latin typeface="Inter"/>
-              </a:rPr>
-              <a:t>Illustrative, Gradient Maintained — demo data, not the client's holdings or managers</a:t>
-            </a:r>
-          </a:p>
-        </p:txBody>
-      </p:sp>
-      <p:sp>
-        <p:nvSpPr>
-          <p:cNvPr id="5" name="TextBox 4"/>
-          <p:cNvSpPr txBox="1"/>
-          <p:nvPr/>
-        </p:nvSpPr>
-        <p:spPr>
-          <a:xfrm>
             <a:off x="640080" y="566928"/>
             <a:ext cx="10058400" cy="530352"/>
           </a:xfrm>
@@ -10733,7 +10265,7 @@
       </p:sp>
       <p:sp>
         <p:nvSpPr>
-          <p:cNvPr id="6" name="Rectangle 5"/>
+          <p:cNvPr id="5" name="Rectangle 4"/>
           <p:cNvSpPr/>
           <p:nvPr/>
         </p:nvSpPr>
@@ -10782,7 +10314,7 @@
       </p:sp>
       <p:sp>
         <p:nvSpPr>
-          <p:cNvPr id="7" name="Rectangle 6"/>
+          <p:cNvPr id="6" name="Rectangle 5"/>
           <p:cNvSpPr/>
           <p:nvPr/>
         </p:nvSpPr>
@@ -10831,7 +10363,7 @@
       </p:sp>
       <p:sp>
         <p:nvSpPr>
-          <p:cNvPr id="8" name="TextBox 7"/>
+          <p:cNvPr id="7" name="TextBox 6"/>
           <p:cNvSpPr txBox="1"/>
           <p:nvPr/>
         </p:nvSpPr>
@@ -10873,7 +10405,7 @@
       </p:sp>
       <p:sp>
         <p:nvSpPr>
-          <p:cNvPr id="9" name="Rectangle 8"/>
+          <p:cNvPr id="8" name="Rectangle 7"/>
           <p:cNvSpPr/>
           <p:nvPr/>
         </p:nvSpPr>
@@ -10922,7 +10454,7 @@
       </p:sp>
       <p:sp>
         <p:nvSpPr>
-          <p:cNvPr id="10" name="Rectangle 9"/>
+          <p:cNvPr id="9" name="Rectangle 8"/>
           <p:cNvSpPr/>
           <p:nvPr/>
         </p:nvSpPr>
@@ -10971,7 +10503,7 @@
       </p:sp>
       <p:sp>
         <p:nvSpPr>
-          <p:cNvPr id="11" name="TextBox 10"/>
+          <p:cNvPr id="10" name="TextBox 9"/>
           <p:cNvSpPr txBox="1"/>
           <p:nvPr/>
         </p:nvSpPr>
@@ -11013,7 +10545,7 @@
       </p:sp>
       <p:sp>
         <p:nvSpPr>
-          <p:cNvPr id="12" name="TextBox 11"/>
+          <p:cNvPr id="11" name="TextBox 10"/>
           <p:cNvSpPr txBox="1"/>
           <p:nvPr/>
         </p:nvSpPr>
@@ -11055,7 +10587,7 @@
       </p:sp>
       <p:sp>
         <p:nvSpPr>
-          <p:cNvPr id="13" name="Rectangle 12"/>
+          <p:cNvPr id="12" name="Rectangle 11"/>
           <p:cNvSpPr/>
           <p:nvPr/>
         </p:nvSpPr>
@@ -11104,7 +10636,7 @@
       </p:sp>
       <p:sp>
         <p:nvSpPr>
-          <p:cNvPr id="14" name="TextBox 13"/>
+          <p:cNvPr id="13" name="TextBox 12"/>
           <p:cNvSpPr txBox="1"/>
           <p:nvPr/>
         </p:nvSpPr>
@@ -11146,7 +10678,7 @@
       </p:sp>
       <p:sp>
         <p:nvSpPr>
-          <p:cNvPr id="15" name="TextBox 14"/>
+          <p:cNvPr id="14" name="TextBox 13"/>
           <p:cNvSpPr txBox="1"/>
           <p:nvPr/>
         </p:nvSpPr>
@@ -11188,7 +10720,7 @@
       </p:sp>
       <p:sp>
         <p:nvSpPr>
-          <p:cNvPr id="16" name="TextBox 15"/>
+          <p:cNvPr id="15" name="TextBox 14"/>
           <p:cNvSpPr txBox="1"/>
           <p:nvPr/>
         </p:nvSpPr>
@@ -11304,7 +10836,7 @@
         <p:spPr>
           <a:xfrm>
             <a:off x="640080" y="329184"/>
-            <a:ext cx="5303520" cy="182880"/>
+            <a:ext cx="9875520" cy="182880"/>
           </a:xfrm>
           <a:prstGeom prst="rect">
             <a:avLst/>
@@ -11345,48 +10877,6 @@
         </p:nvSpPr>
         <p:spPr>
           <a:xfrm>
-            <a:off x="5897880" y="310896"/>
-            <a:ext cx="4800600" cy="256032"/>
-          </a:xfrm>
-          <a:prstGeom prst="rect">
-            <a:avLst/>
-          </a:prstGeom>
-          <a:noFill/>
-        </p:spPr>
-        <p:txBody>
-          <a:bodyPr wrap="none" lIns="9144" rIns="9144" tIns="9144" bIns="9144" anchor="t">
-            <a:spAutoFit/>
-          </a:bodyPr>
-          <a:lstStyle/>
-          <a:p>
-            <a:pPr algn="r">
-              <a:spcAft>
-                <a:spcPts val="0"/>
-              </a:spcAft>
-              <a:defRPr sz="680" b="1">
-                <a:solidFill>
-                  <a:srgbClr val="4F6B00"/>
-                </a:solidFill>
-                <a:latin typeface="Inter"/>
-              </a:defRPr>
-            </a:pPr>
-            <a:r>
-              <a:rPr>
-                <a:latin typeface="Inter"/>
-              </a:rPr>
-              <a:t>Illustrative, Gradient Maintained — demo data, not the client's holdings or managers</a:t>
-            </a:r>
-          </a:p>
-        </p:txBody>
-      </p:sp>
-      <p:sp>
-        <p:nvSpPr>
-          <p:cNvPr id="5" name="TextBox 4"/>
-          <p:cNvSpPr txBox="1"/>
-          <p:nvPr/>
-        </p:nvSpPr>
-        <p:spPr>
-          <a:xfrm>
             <a:off x="640080" y="566928"/>
             <a:ext cx="10058400" cy="530352"/>
           </a:xfrm>
@@ -11423,7 +10913,7 @@
       </p:sp>
       <p:sp>
         <p:nvSpPr>
-          <p:cNvPr id="6" name="Rectangle 5"/>
+          <p:cNvPr id="5" name="Rectangle 4"/>
           <p:cNvSpPr/>
           <p:nvPr/>
         </p:nvSpPr>
@@ -11472,7 +10962,7 @@
       </p:sp>
       <p:sp>
         <p:nvSpPr>
-          <p:cNvPr id="7" name="Rectangle 6"/>
+          <p:cNvPr id="6" name="Rectangle 5"/>
           <p:cNvSpPr/>
           <p:nvPr/>
         </p:nvSpPr>
@@ -11521,7 +11011,7 @@
       </p:sp>
       <p:sp>
         <p:nvSpPr>
-          <p:cNvPr id="8" name="TextBox 7"/>
+          <p:cNvPr id="7" name="TextBox 6"/>
           <p:cNvSpPr txBox="1"/>
           <p:nvPr/>
         </p:nvSpPr>
@@ -11563,7 +11053,7 @@
       </p:sp>
       <p:sp>
         <p:nvSpPr>
-          <p:cNvPr id="9" name="TextBox 8"/>
+          <p:cNvPr id="8" name="TextBox 7"/>
           <p:cNvSpPr txBox="1"/>
           <p:nvPr/>
         </p:nvSpPr>
@@ -11605,7 +11095,7 @@
       </p:sp>
       <p:sp>
         <p:nvSpPr>
-          <p:cNvPr id="10" name="TextBox 9"/>
+          <p:cNvPr id="9" name="TextBox 8"/>
           <p:cNvSpPr txBox="1"/>
           <p:nvPr/>
         </p:nvSpPr>
@@ -11647,7 +11137,7 @@
       </p:sp>
       <p:sp>
         <p:nvSpPr>
-          <p:cNvPr id="11" name="Rectangle 10"/>
+          <p:cNvPr id="10" name="Rectangle 9"/>
           <p:cNvSpPr/>
           <p:nvPr/>
         </p:nvSpPr>
@@ -11696,7 +11186,7 @@
       </p:sp>
       <p:sp>
         <p:nvSpPr>
-          <p:cNvPr id="12" name="Oval 11"/>
+          <p:cNvPr id="11" name="Oval 10"/>
           <p:cNvSpPr/>
           <p:nvPr/>
         </p:nvSpPr>
@@ -11745,7 +11235,7 @@
       </p:sp>
       <p:sp>
         <p:nvSpPr>
-          <p:cNvPr id="13" name="Rectangle 12"/>
+          <p:cNvPr id="12" name="Rectangle 11"/>
           <p:cNvSpPr/>
           <p:nvPr/>
         </p:nvSpPr>
@@ -11794,7 +11284,7 @@
       </p:sp>
       <p:sp>
         <p:nvSpPr>
-          <p:cNvPr id="14" name="TextBox 13"/>
+          <p:cNvPr id="13" name="TextBox 12"/>
           <p:cNvSpPr txBox="1"/>
           <p:nvPr/>
         </p:nvSpPr>
@@ -11836,7 +11326,7 @@
       </p:sp>
       <p:sp>
         <p:nvSpPr>
-          <p:cNvPr id="15" name="Rectangle 14"/>
+          <p:cNvPr id="14" name="Rectangle 13"/>
           <p:cNvSpPr/>
           <p:nvPr/>
         </p:nvSpPr>
@@ -11885,7 +11375,7 @@
       </p:sp>
       <p:sp>
         <p:nvSpPr>
-          <p:cNvPr id="16" name="Oval 15"/>
+          <p:cNvPr id="15" name="Oval 14"/>
           <p:cNvSpPr/>
           <p:nvPr/>
         </p:nvSpPr>
@@ -11934,7 +11424,7 @@
       </p:sp>
       <p:sp>
         <p:nvSpPr>
-          <p:cNvPr id="17" name="Rectangle 16"/>
+          <p:cNvPr id="16" name="Rectangle 15"/>
           <p:cNvSpPr/>
           <p:nvPr/>
         </p:nvSpPr>
@@ -11983,7 +11473,7 @@
       </p:sp>
       <p:sp>
         <p:nvSpPr>
-          <p:cNvPr id="18" name="TextBox 17"/>
+          <p:cNvPr id="17" name="TextBox 16"/>
           <p:cNvSpPr txBox="1"/>
           <p:nvPr/>
         </p:nvSpPr>
@@ -12025,7 +11515,7 @@
       </p:sp>
       <p:sp>
         <p:nvSpPr>
-          <p:cNvPr id="19" name="Rectangle 18"/>
+          <p:cNvPr id="18" name="Rectangle 17"/>
           <p:cNvSpPr/>
           <p:nvPr/>
         </p:nvSpPr>
@@ -12074,7 +11564,7 @@
       </p:sp>
       <p:sp>
         <p:nvSpPr>
-          <p:cNvPr id="20" name="Oval 19"/>
+          <p:cNvPr id="19" name="Oval 18"/>
           <p:cNvSpPr/>
           <p:nvPr/>
         </p:nvSpPr>
@@ -12123,7 +11613,7 @@
       </p:sp>
       <p:sp>
         <p:nvSpPr>
-          <p:cNvPr id="21" name="Rectangle 20"/>
+          <p:cNvPr id="20" name="Rectangle 19"/>
           <p:cNvSpPr/>
           <p:nvPr/>
         </p:nvSpPr>
@@ -12172,7 +11662,7 @@
       </p:sp>
       <p:sp>
         <p:nvSpPr>
-          <p:cNvPr id="22" name="Rectangle 21"/>
+          <p:cNvPr id="21" name="Rectangle 20"/>
           <p:cNvSpPr/>
           <p:nvPr/>
         </p:nvSpPr>
@@ -12221,7 +11711,7 @@
       </p:sp>
       <p:sp>
         <p:nvSpPr>
-          <p:cNvPr id="23" name="TextBox 22"/>
+          <p:cNvPr id="22" name="TextBox 21"/>
           <p:cNvSpPr txBox="1"/>
           <p:nvPr/>
         </p:nvSpPr>
@@ -12263,7 +11753,7 @@
       </p:sp>
       <p:sp>
         <p:nvSpPr>
-          <p:cNvPr id="24" name="TextBox 23"/>
+          <p:cNvPr id="23" name="TextBox 22"/>
           <p:cNvSpPr txBox="1"/>
           <p:nvPr/>
         </p:nvSpPr>
@@ -12305,7 +11795,7 @@
       </p:sp>
       <p:sp>
         <p:nvSpPr>
-          <p:cNvPr id="25" name="TextBox 24"/>
+          <p:cNvPr id="24" name="TextBox 23"/>
           <p:cNvSpPr txBox="1"/>
           <p:nvPr/>
         </p:nvSpPr>
@@ -12421,7 +11911,7 @@
         <p:spPr>
           <a:xfrm>
             <a:off x="640080" y="329184"/>
-            <a:ext cx="5303520" cy="182880"/>
+            <a:ext cx="9875520" cy="182880"/>
           </a:xfrm>
           <a:prstGeom prst="rect">
             <a:avLst/>
@@ -12462,48 +11952,6 @@
         </p:nvSpPr>
         <p:spPr>
           <a:xfrm>
-            <a:off x="5897880" y="310896"/>
-            <a:ext cx="4800600" cy="256032"/>
-          </a:xfrm>
-          <a:prstGeom prst="rect">
-            <a:avLst/>
-          </a:prstGeom>
-          <a:noFill/>
-        </p:spPr>
-        <p:txBody>
-          <a:bodyPr wrap="none" lIns="9144" rIns="9144" tIns="9144" bIns="9144" anchor="t">
-            <a:spAutoFit/>
-          </a:bodyPr>
-          <a:lstStyle/>
-          <a:p>
-            <a:pPr algn="r">
-              <a:spcAft>
-                <a:spcPts val="0"/>
-              </a:spcAft>
-              <a:defRPr sz="680" b="1">
-                <a:solidFill>
-                  <a:srgbClr val="4F6B00"/>
-                </a:solidFill>
-                <a:latin typeface="Inter"/>
-              </a:defRPr>
-            </a:pPr>
-            <a:r>
-              <a:rPr>
-                <a:latin typeface="Inter"/>
-              </a:rPr>
-              <a:t>Illustrative, Gradient Maintained — demo data, not the client's holdings or managers</a:t>
-            </a:r>
-          </a:p>
-        </p:txBody>
-      </p:sp>
-      <p:sp>
-        <p:nvSpPr>
-          <p:cNvPr id="5" name="TextBox 4"/>
-          <p:cNvSpPr txBox="1"/>
-          <p:nvPr/>
-        </p:nvSpPr>
-        <p:spPr>
-          <a:xfrm>
             <a:off x="640080" y="566928"/>
             <a:ext cx="10058400" cy="530352"/>
           </a:xfrm>
@@ -12540,7 +11988,7 @@
       </p:sp>
       <p:sp>
         <p:nvSpPr>
-          <p:cNvPr id="6" name="Rectangle 5"/>
+          <p:cNvPr id="5" name="Rectangle 4"/>
           <p:cNvSpPr/>
           <p:nvPr/>
         </p:nvSpPr>
@@ -12589,7 +12037,7 @@
       </p:sp>
       <p:sp>
         <p:nvSpPr>
-          <p:cNvPr id="7" name="Rectangle 6"/>
+          <p:cNvPr id="6" name="Rectangle 5"/>
           <p:cNvSpPr/>
           <p:nvPr/>
         </p:nvSpPr>
@@ -12638,7 +12086,7 @@
       </p:sp>
       <p:sp>
         <p:nvSpPr>
-          <p:cNvPr id="8" name="TextBox 7"/>
+          <p:cNvPr id="7" name="TextBox 6"/>
           <p:cNvSpPr txBox="1"/>
           <p:nvPr/>
         </p:nvSpPr>
@@ -12680,7 +12128,7 @@
       </p:sp>
       <p:sp>
         <p:nvSpPr>
-          <p:cNvPr id="9" name="TextBox 8"/>
+          <p:cNvPr id="8" name="TextBox 7"/>
           <p:cNvSpPr txBox="1"/>
           <p:nvPr/>
         </p:nvSpPr>
@@ -12722,7 +12170,7 @@
       </p:sp>
       <p:graphicFrame>
         <p:nvGraphicFramePr>
-          <p:cNvPr id="10" name="Table 9"/>
+          <p:cNvPr id="9" name="Table 8"/>
           <p:cNvGraphicFramePr>
             <a:graphicFrameLocks noGrp="1"/>
           </p:cNvGraphicFramePr>
@@ -13190,7 +12638,7 @@
       </p:graphicFrame>
       <p:sp>
         <p:nvSpPr>
-          <p:cNvPr id="11" name="TextBox 10"/>
+          <p:cNvPr id="10" name="TextBox 9"/>
           <p:cNvSpPr txBox="1"/>
           <p:nvPr/>
         </p:nvSpPr>
@@ -13232,7 +12680,7 @@
       </p:sp>
       <p:graphicFrame>
         <p:nvGraphicFramePr>
-          <p:cNvPr id="12" name="Table 11"/>
+          <p:cNvPr id="11" name="Table 10"/>
           <p:cNvGraphicFramePr>
             <a:graphicFrameLocks noGrp="1"/>
           </p:cNvGraphicFramePr>
@@ -13381,7 +12829,7 @@
                         <a:rPr>
                           <a:latin typeface="Inter"/>
                         </a:rPr>
-                        <a:t>● available</a:t>
+                        <a:t>● Available</a:t>
                       </a:r>
                     </a:p>
                   </a:txBody>
@@ -13425,7 +12873,7 @@
       </p:graphicFrame>
       <p:sp>
         <p:nvSpPr>
-          <p:cNvPr id="13" name="Rectangle 12"/>
+          <p:cNvPr id="12" name="Rectangle 11"/>
           <p:cNvSpPr/>
           <p:nvPr/>
         </p:nvSpPr>
@@ -13474,7 +12922,7 @@
       </p:sp>
       <p:sp>
         <p:nvSpPr>
-          <p:cNvPr id="14" name="Rectangle 13"/>
+          <p:cNvPr id="13" name="Rectangle 12"/>
           <p:cNvSpPr/>
           <p:nvPr/>
         </p:nvSpPr>
@@ -13523,7 +12971,7 @@
       </p:sp>
       <p:sp>
         <p:nvSpPr>
-          <p:cNvPr id="15" name="TextBox 14"/>
+          <p:cNvPr id="14" name="TextBox 13"/>
           <p:cNvSpPr txBox="1"/>
           <p:nvPr/>
         </p:nvSpPr>
@@ -13565,7 +13013,7 @@
       </p:sp>
       <p:sp>
         <p:nvSpPr>
-          <p:cNvPr id="16" name="TextBox 15"/>
+          <p:cNvPr id="15" name="TextBox 14"/>
           <p:cNvSpPr txBox="1"/>
           <p:nvPr/>
         </p:nvSpPr>
@@ -13607,7 +13055,7 @@
       </p:sp>
       <p:sp>
         <p:nvSpPr>
-          <p:cNvPr id="17" name="Rectangle 16"/>
+          <p:cNvPr id="16" name="Rectangle 15"/>
           <p:cNvSpPr/>
           <p:nvPr/>
         </p:nvSpPr>
@@ -13656,7 +13104,7 @@
       </p:sp>
       <p:sp>
         <p:nvSpPr>
-          <p:cNvPr id="18" name="TextBox 17"/>
+          <p:cNvPr id="17" name="TextBox 16"/>
           <p:cNvSpPr txBox="1"/>
           <p:nvPr/>
         </p:nvSpPr>
@@ -13698,7 +13146,7 @@
       </p:sp>
       <p:sp>
         <p:nvSpPr>
-          <p:cNvPr id="19" name="TextBox 18"/>
+          <p:cNvPr id="18" name="TextBox 17"/>
           <p:cNvSpPr txBox="1"/>
           <p:nvPr/>
         </p:nvSpPr>
@@ -13740,7 +13188,7 @@
       </p:sp>
       <p:sp>
         <p:nvSpPr>
-          <p:cNvPr id="20" name="TextBox 19"/>
+          <p:cNvPr id="19" name="TextBox 18"/>
           <p:cNvSpPr txBox="1"/>
           <p:nvPr/>
         </p:nvSpPr>
@@ -13856,7 +13304,7 @@
         <p:spPr>
           <a:xfrm>
             <a:off x="640080" y="329184"/>
-            <a:ext cx="5303520" cy="182880"/>
+            <a:ext cx="9875520" cy="182880"/>
           </a:xfrm>
           <a:prstGeom prst="rect">
             <a:avLst/>
@@ -13897,48 +13345,6 @@
         </p:nvSpPr>
         <p:spPr>
           <a:xfrm>
-            <a:off x="5897880" y="310896"/>
-            <a:ext cx="4800600" cy="256032"/>
-          </a:xfrm>
-          <a:prstGeom prst="rect">
-            <a:avLst/>
-          </a:prstGeom>
-          <a:noFill/>
-        </p:spPr>
-        <p:txBody>
-          <a:bodyPr wrap="none" lIns="9144" rIns="9144" tIns="9144" bIns="9144" anchor="t">
-            <a:spAutoFit/>
-          </a:bodyPr>
-          <a:lstStyle/>
-          <a:p>
-            <a:pPr algn="r">
-              <a:spcAft>
-                <a:spcPts val="0"/>
-              </a:spcAft>
-              <a:defRPr sz="680" b="1">
-                <a:solidFill>
-                  <a:srgbClr val="4F6B00"/>
-                </a:solidFill>
-                <a:latin typeface="Inter"/>
-              </a:defRPr>
-            </a:pPr>
-            <a:r>
-              <a:rPr>
-                <a:latin typeface="Inter"/>
-              </a:rPr>
-              <a:t>Illustrative, Gradient Maintained — demo data, not the client's holdings or managers</a:t>
-            </a:r>
-          </a:p>
-        </p:txBody>
-      </p:sp>
-      <p:sp>
-        <p:nvSpPr>
-          <p:cNvPr id="5" name="TextBox 4"/>
-          <p:cNvSpPr txBox="1"/>
-          <p:nvPr/>
-        </p:nvSpPr>
-        <p:spPr>
-          <a:xfrm>
             <a:off x="640080" y="566928"/>
             <a:ext cx="10058400" cy="530352"/>
           </a:xfrm>
@@ -13975,7 +13381,7 @@
       </p:sp>
       <p:sp>
         <p:nvSpPr>
-          <p:cNvPr id="6" name="Rectangle 5"/>
+          <p:cNvPr id="5" name="Rectangle 4"/>
           <p:cNvSpPr/>
           <p:nvPr/>
         </p:nvSpPr>
@@ -14024,7 +13430,7 @@
       </p:sp>
       <p:sp>
         <p:nvSpPr>
-          <p:cNvPr id="7" name="Rectangle 6"/>
+          <p:cNvPr id="6" name="Rectangle 5"/>
           <p:cNvSpPr/>
           <p:nvPr/>
         </p:nvSpPr>
@@ -14073,7 +13479,7 @@
       </p:sp>
       <p:sp>
         <p:nvSpPr>
-          <p:cNvPr id="8" name="TextBox 7"/>
+          <p:cNvPr id="7" name="TextBox 6"/>
           <p:cNvSpPr txBox="1"/>
           <p:nvPr/>
         </p:nvSpPr>
@@ -14115,7 +13521,7 @@
       </p:sp>
       <p:sp>
         <p:nvSpPr>
-          <p:cNvPr id="9" name="TextBox 8"/>
+          <p:cNvPr id="8" name="TextBox 7"/>
           <p:cNvSpPr txBox="1"/>
           <p:nvPr/>
         </p:nvSpPr>
@@ -14157,7 +13563,7 @@
       </p:sp>
       <p:graphicFrame>
         <p:nvGraphicFramePr>
-          <p:cNvPr id="10" name="Table 9"/>
+          <p:cNvPr id="9" name="Table 8"/>
           <p:cNvGraphicFramePr>
             <a:graphicFrameLocks noGrp="1"/>
           </p:cNvGraphicFramePr>
@@ -14619,7 +14025,7 @@
       </p:graphicFrame>
       <p:sp>
         <p:nvSpPr>
-          <p:cNvPr id="11" name="Rectangle 10"/>
+          <p:cNvPr id="10" name="Rectangle 9"/>
           <p:cNvSpPr/>
           <p:nvPr/>
         </p:nvSpPr>
@@ -14668,7 +14074,7 @@
       </p:sp>
       <p:sp>
         <p:nvSpPr>
-          <p:cNvPr id="12" name="TextBox 11"/>
+          <p:cNvPr id="11" name="TextBox 10"/>
           <p:cNvSpPr txBox="1"/>
           <p:nvPr/>
         </p:nvSpPr>
@@ -14710,7 +14116,7 @@
       </p:sp>
       <p:sp>
         <p:nvSpPr>
-          <p:cNvPr id="13" name="TextBox 12"/>
+          <p:cNvPr id="12" name="TextBox 11"/>
           <p:cNvSpPr txBox="1"/>
           <p:nvPr/>
         </p:nvSpPr>
@@ -14752,7 +14158,7 @@
       </p:sp>
       <p:sp>
         <p:nvSpPr>
-          <p:cNvPr id="14" name="TextBox 13"/>
+          <p:cNvPr id="13" name="TextBox 12"/>
           <p:cNvSpPr txBox="1"/>
           <p:nvPr/>
         </p:nvSpPr>
@@ -14868,7 +14274,7 @@
         <p:spPr>
           <a:xfrm>
             <a:off x="640080" y="329184"/>
-            <a:ext cx="5303520" cy="182880"/>
+            <a:ext cx="9875520" cy="182880"/>
           </a:xfrm>
           <a:prstGeom prst="rect">
             <a:avLst/>
@@ -14909,48 +14315,6 @@
         </p:nvSpPr>
         <p:spPr>
           <a:xfrm>
-            <a:off x="5897880" y="310896"/>
-            <a:ext cx="4800600" cy="256032"/>
-          </a:xfrm>
-          <a:prstGeom prst="rect">
-            <a:avLst/>
-          </a:prstGeom>
-          <a:noFill/>
-        </p:spPr>
-        <p:txBody>
-          <a:bodyPr wrap="none" lIns="9144" rIns="9144" tIns="9144" bIns="9144" anchor="t">
-            <a:spAutoFit/>
-          </a:bodyPr>
-          <a:lstStyle/>
-          <a:p>
-            <a:pPr algn="r">
-              <a:spcAft>
-                <a:spcPts val="0"/>
-              </a:spcAft>
-              <a:defRPr sz="680" b="1">
-                <a:solidFill>
-                  <a:srgbClr val="4F6B00"/>
-                </a:solidFill>
-                <a:latin typeface="Inter"/>
-              </a:defRPr>
-            </a:pPr>
-            <a:r>
-              <a:rPr>
-                <a:latin typeface="Inter"/>
-              </a:rPr>
-              <a:t>Illustrative, Gradient Maintained — demo data, not the client's holdings or managers</a:t>
-            </a:r>
-          </a:p>
-        </p:txBody>
-      </p:sp>
-      <p:sp>
-        <p:nvSpPr>
-          <p:cNvPr id="5" name="TextBox 4"/>
-          <p:cNvSpPr txBox="1"/>
-          <p:nvPr/>
-        </p:nvSpPr>
-        <p:spPr>
-          <a:xfrm>
             <a:off x="640080" y="566928"/>
             <a:ext cx="10058400" cy="530352"/>
           </a:xfrm>
@@ -14987,7 +14351,7 @@
       </p:sp>
       <p:sp>
         <p:nvSpPr>
-          <p:cNvPr id="6" name="Rectangle 5"/>
+          <p:cNvPr id="5" name="Rectangle 4"/>
           <p:cNvSpPr/>
           <p:nvPr/>
         </p:nvSpPr>
@@ -15036,7 +14400,7 @@
       </p:sp>
       <p:sp>
         <p:nvSpPr>
-          <p:cNvPr id="7" name="Rectangle 6"/>
+          <p:cNvPr id="6" name="Rectangle 5"/>
           <p:cNvSpPr/>
           <p:nvPr/>
         </p:nvSpPr>
@@ -15085,7 +14449,7 @@
       </p:sp>
       <p:sp>
         <p:nvSpPr>
-          <p:cNvPr id="8" name="TextBox 7"/>
+          <p:cNvPr id="7" name="TextBox 6"/>
           <p:cNvSpPr txBox="1"/>
           <p:nvPr/>
         </p:nvSpPr>
@@ -15127,7 +14491,7 @@
       </p:sp>
       <p:sp>
         <p:nvSpPr>
-          <p:cNvPr id="9" name="TextBox 8"/>
+          <p:cNvPr id="8" name="TextBox 7"/>
           <p:cNvSpPr txBox="1"/>
           <p:nvPr/>
         </p:nvSpPr>
@@ -15169,7 +14533,7 @@
       </p:sp>
       <p:graphicFrame>
         <p:nvGraphicFramePr>
-          <p:cNvPr id="10" name="Chart 9"/>
+          <p:cNvPr id="9" name="Chart 8"/>
           <p:cNvGraphicFramePr>
             <a:graphicFrameLocks noGrp="1"/>
           </p:cNvGraphicFramePr>
@@ -15187,7 +14551,7 @@
       </p:graphicFrame>
       <p:sp>
         <p:nvSpPr>
-          <p:cNvPr id="11" name="Rectangle 10"/>
+          <p:cNvPr id="10" name="Rectangle 9"/>
           <p:cNvSpPr/>
           <p:nvPr/>
         </p:nvSpPr>
@@ -15236,7 +14600,7 @@
       </p:sp>
       <p:sp>
         <p:nvSpPr>
-          <p:cNvPr id="12" name="TextBox 11"/>
+          <p:cNvPr id="11" name="TextBox 10"/>
           <p:cNvSpPr txBox="1"/>
           <p:nvPr/>
         </p:nvSpPr>
@@ -15278,7 +14642,7 @@
       </p:sp>
       <p:graphicFrame>
         <p:nvGraphicFramePr>
-          <p:cNvPr id="13" name="Chart 12"/>
+          <p:cNvPr id="12" name="Chart 11"/>
           <p:cNvGraphicFramePr>
             <a:graphicFrameLocks noGrp="1"/>
           </p:cNvGraphicFramePr>
@@ -15296,7 +14660,7 @@
       </p:graphicFrame>
       <p:sp>
         <p:nvSpPr>
-          <p:cNvPr id="14" name="Rectangle 13"/>
+          <p:cNvPr id="13" name="Rectangle 12"/>
           <p:cNvSpPr/>
           <p:nvPr/>
         </p:nvSpPr>
@@ -15345,7 +14709,7 @@
       </p:sp>
       <p:sp>
         <p:nvSpPr>
-          <p:cNvPr id="15" name="TextBox 14"/>
+          <p:cNvPr id="14" name="TextBox 13"/>
           <p:cNvSpPr txBox="1"/>
           <p:nvPr/>
         </p:nvSpPr>
@@ -15387,7 +14751,7 @@
       </p:sp>
       <p:sp>
         <p:nvSpPr>
-          <p:cNvPr id="16" name="TextBox 15"/>
+          <p:cNvPr id="15" name="TextBox 14"/>
           <p:cNvSpPr txBox="1"/>
           <p:nvPr/>
         </p:nvSpPr>
@@ -15429,7 +14793,7 @@
       </p:sp>
       <p:sp>
         <p:nvSpPr>
-          <p:cNvPr id="17" name="TextBox 16"/>
+          <p:cNvPr id="16" name="TextBox 15"/>
           <p:cNvSpPr txBox="1"/>
           <p:nvPr/>
         </p:nvSpPr>
@@ -15545,7 +14909,7 @@
         <p:spPr>
           <a:xfrm>
             <a:off x="640080" y="329184"/>
-            <a:ext cx="5303520" cy="182880"/>
+            <a:ext cx="9875520" cy="182880"/>
           </a:xfrm>
           <a:prstGeom prst="rect">
             <a:avLst/>
@@ -15586,48 +14950,6 @@
         </p:nvSpPr>
         <p:spPr>
           <a:xfrm>
-            <a:off x="5897880" y="310896"/>
-            <a:ext cx="4800600" cy="256032"/>
-          </a:xfrm>
-          <a:prstGeom prst="rect">
-            <a:avLst/>
-          </a:prstGeom>
-          <a:noFill/>
-        </p:spPr>
-        <p:txBody>
-          <a:bodyPr wrap="none" lIns="9144" rIns="9144" tIns="9144" bIns="9144" anchor="t">
-            <a:spAutoFit/>
-          </a:bodyPr>
-          <a:lstStyle/>
-          <a:p>
-            <a:pPr algn="r">
-              <a:spcAft>
-                <a:spcPts val="0"/>
-              </a:spcAft>
-              <a:defRPr sz="680" b="1">
-                <a:solidFill>
-                  <a:srgbClr val="4F6B00"/>
-                </a:solidFill>
-                <a:latin typeface="Inter"/>
-              </a:defRPr>
-            </a:pPr>
-            <a:r>
-              <a:rPr>
-                <a:latin typeface="Inter"/>
-              </a:rPr>
-              <a:t>Illustrative, Gradient Maintained — demo data, not the client's holdings or managers</a:t>
-            </a:r>
-          </a:p>
-        </p:txBody>
-      </p:sp>
-      <p:sp>
-        <p:nvSpPr>
-          <p:cNvPr id="5" name="TextBox 4"/>
-          <p:cNvSpPr txBox="1"/>
-          <p:nvPr/>
-        </p:nvSpPr>
-        <p:spPr>
-          <a:xfrm>
             <a:off x="640080" y="566928"/>
             <a:ext cx="10058400" cy="530352"/>
           </a:xfrm>
@@ -15664,7 +14986,7 @@
       </p:sp>
       <p:sp>
         <p:nvSpPr>
-          <p:cNvPr id="6" name="Rectangle 5"/>
+          <p:cNvPr id="5" name="Rectangle 4"/>
           <p:cNvSpPr/>
           <p:nvPr/>
         </p:nvSpPr>
@@ -15713,7 +15035,7 @@
       </p:sp>
       <p:sp>
         <p:nvSpPr>
-          <p:cNvPr id="7" name="Rectangle 6"/>
+          <p:cNvPr id="6" name="Rectangle 5"/>
           <p:cNvSpPr/>
           <p:nvPr/>
         </p:nvSpPr>
@@ -15762,7 +15084,7 @@
       </p:sp>
       <p:sp>
         <p:nvSpPr>
-          <p:cNvPr id="8" name="TextBox 7"/>
+          <p:cNvPr id="7" name="TextBox 6"/>
           <p:cNvSpPr txBox="1"/>
           <p:nvPr/>
         </p:nvSpPr>
@@ -15804,14 +15126,105 @@
       </p:sp>
       <p:sp>
         <p:nvSpPr>
-          <p:cNvPr id="9" name="Rectangle 8"/>
+          <p:cNvPr id="8" name="Rectangle 7"/>
           <p:cNvSpPr/>
           <p:nvPr/>
         </p:nvSpPr>
         <p:spPr>
           <a:xfrm>
-            <a:off x="640080" y="1325880"/>
-            <a:ext cx="10908792" cy="1311602"/>
+            <a:off x="640080" y="1399032"/>
+            <a:ext cx="73152" cy="853774"/>
+          </a:xfrm>
+          <a:prstGeom prst="rect">
+            <a:avLst/>
+          </a:prstGeom>
+          <a:solidFill>
+            <a:srgbClr val="C6F432"/>
+          </a:solidFill>
+          <a:ln>
+            <a:solidFill>
+              <a:srgbClr val="C6F432"/>
+            </a:solidFill>
+          </a:ln>
+        </p:spPr>
+        <p:style>
+          <a:lnRef idx="1">
+            <a:schemeClr val="accent1"/>
+          </a:lnRef>
+          <a:fillRef idx="3">
+            <a:schemeClr val="accent1"/>
+          </a:fillRef>
+          <a:effectRef idx="2">
+            <a:schemeClr val="accent1"/>
+          </a:effectRef>
+          <a:fontRef idx="minor">
+            <a:schemeClr val="lt1"/>
+          </a:fontRef>
+        </p:style>
+        <p:txBody>
+          <a:bodyPr rtlCol="0" anchor="ctr"/>
+          <a:lstStyle/>
+          <a:p>
+            <a:pPr algn="ctr">
+              <a:defRPr>
+                <a:latin typeface="Inter"/>
+              </a:defRPr>
+            </a:pPr>
+          </a:p>
+        </p:txBody>
+      </p:sp>
+      <p:sp>
+        <p:nvSpPr>
+          <p:cNvPr id="9" name="TextBox 8"/>
+          <p:cNvSpPr txBox="1"/>
+          <p:nvPr/>
+        </p:nvSpPr>
+        <p:spPr>
+          <a:xfrm>
+            <a:off x="896112" y="1371600"/>
+            <a:ext cx="10588752" cy="580045"/>
+          </a:xfrm>
+          <a:prstGeom prst="rect">
+            <a:avLst/>
+          </a:prstGeom>
+          <a:noFill/>
+        </p:spPr>
+        <p:txBody>
+          <a:bodyPr wrap="none" lIns="9144" rIns="9144" tIns="9144" bIns="9144" anchor="t">
+            <a:spAutoFit/>
+          </a:bodyPr>
+          <a:lstStyle/>
+          <a:p>
+            <a:pPr algn="l">
+              <a:spcAft>
+                <a:spcPts val="0"/>
+              </a:spcAft>
+              <a:defRPr sz="1800" b="1">
+                <a:solidFill>
+                  <a:srgbClr val="0D1117"/>
+                </a:solidFill>
+                <a:latin typeface="Inter"/>
+              </a:defRPr>
+            </a:pPr>
+            <a:r>
+              <a:rPr>
+                <a:latin typeface="Inter"/>
+              </a:rPr>
+              <a:t>Three compatible attribution views compared</a:t>
+            </a:r>
+          </a:p>
+        </p:txBody>
+      </p:sp>
+      <p:sp>
+        <p:nvSpPr>
+          <p:cNvPr id="10" name="Rectangle 9"/>
+          <p:cNvSpPr/>
+          <p:nvPr/>
+        </p:nvSpPr>
+        <p:spPr>
+          <a:xfrm>
+            <a:off x="640080" y="2435686"/>
+            <a:ext cx="10908792" cy="1000078"/>
           </a:xfrm>
           <a:prstGeom prst="rect">
             <a:avLst/>
@@ -15853,14 +15266,14 @@
       </p:sp>
       <p:sp>
         <p:nvSpPr>
-          <p:cNvPr id="10" name="Rectangle 9"/>
+          <p:cNvPr id="11" name="Rectangle 10"/>
           <p:cNvSpPr/>
           <p:nvPr/>
         </p:nvSpPr>
         <p:spPr>
           <a:xfrm>
-            <a:off x="640080" y="1325880"/>
-            <a:ext cx="54864" cy="1311602"/>
+            <a:off x="640080" y="2435686"/>
+            <a:ext cx="54864" cy="1000078"/>
           </a:xfrm>
           <a:prstGeom prst="rect">
             <a:avLst/>
@@ -15902,13 +15315,13 @@
       </p:sp>
       <p:sp>
         <p:nvSpPr>
-          <p:cNvPr id="11" name="TextBox 10"/>
+          <p:cNvPr id="12" name="TextBox 11"/>
           <p:cNvSpPr txBox="1"/>
           <p:nvPr/>
         </p:nvSpPr>
         <p:spPr>
           <a:xfrm>
-            <a:off x="804671" y="1435607"/>
+            <a:off x="804671" y="2545414"/>
             <a:ext cx="10616184" cy="228600"/>
           </a:xfrm>
           <a:prstGeom prst="rect">
@@ -15944,14 +15357,14 @@
       </p:sp>
       <p:sp>
         <p:nvSpPr>
-          <p:cNvPr id="12" name="TextBox 11"/>
+          <p:cNvPr id="13" name="TextBox 12"/>
           <p:cNvSpPr txBox="1"/>
           <p:nvPr/>
         </p:nvSpPr>
         <p:spPr>
           <a:xfrm>
-            <a:off x="804671" y="1719072"/>
-            <a:ext cx="10616184" cy="826970"/>
+            <a:off x="804671" y="2828878"/>
+            <a:ext cx="10616184" cy="515446"/>
           </a:xfrm>
           <a:prstGeom prst="rect">
             <a:avLst/>
@@ -15986,14 +15399,14 @@
       </p:sp>
       <p:sp>
         <p:nvSpPr>
-          <p:cNvPr id="13" name="Rectangle 12"/>
+          <p:cNvPr id="14" name="Rectangle 13"/>
           <p:cNvSpPr/>
           <p:nvPr/>
         </p:nvSpPr>
         <p:spPr>
           <a:xfrm>
-            <a:off x="640080" y="2747210"/>
-            <a:ext cx="2644902" cy="2049378"/>
+            <a:off x="640080" y="3545492"/>
+            <a:ext cx="2644902" cy="1562621"/>
           </a:xfrm>
           <a:prstGeom prst="rect">
             <a:avLst/>
@@ -16035,13 +15448,13 @@
       </p:sp>
       <p:sp>
         <p:nvSpPr>
-          <p:cNvPr id="14" name="Rectangle 13"/>
+          <p:cNvPr id="15" name="Rectangle 14"/>
           <p:cNvSpPr/>
           <p:nvPr/>
         </p:nvSpPr>
         <p:spPr>
           <a:xfrm>
-            <a:off x="640080" y="2747210"/>
+            <a:off x="640080" y="3545492"/>
             <a:ext cx="2644902" cy="45720"/>
           </a:xfrm>
           <a:prstGeom prst="rect">
@@ -16084,13 +15497,13 @@
       </p:sp>
       <p:sp>
         <p:nvSpPr>
-          <p:cNvPr id="15" name="TextBox 14"/>
+          <p:cNvPr id="16" name="TextBox 15"/>
           <p:cNvSpPr txBox="1"/>
           <p:nvPr/>
         </p:nvSpPr>
         <p:spPr>
           <a:xfrm>
-            <a:off x="749808" y="2875226"/>
+            <a:off x="749808" y="3673508"/>
             <a:ext cx="2425446" cy="201168"/>
           </a:xfrm>
           <a:prstGeom prst="rect">
@@ -16126,13 +15539,13 @@
       </p:sp>
       <p:sp>
         <p:nvSpPr>
-          <p:cNvPr id="16" name="TextBox 15"/>
+          <p:cNvPr id="17" name="TextBox 16"/>
           <p:cNvSpPr txBox="1"/>
           <p:nvPr/>
         </p:nvSpPr>
         <p:spPr>
           <a:xfrm>
-            <a:off x="749808" y="3131258"/>
+            <a:off x="749808" y="3929540"/>
             <a:ext cx="2425446" cy="475488"/>
           </a:xfrm>
           <a:prstGeom prst="rect">
@@ -16168,13 +15581,13 @@
       </p:sp>
       <p:sp>
         <p:nvSpPr>
-          <p:cNvPr id="17" name="TextBox 16"/>
+          <p:cNvPr id="18" name="TextBox 17"/>
           <p:cNvSpPr txBox="1"/>
           <p:nvPr/>
         </p:nvSpPr>
         <p:spPr>
           <a:xfrm>
-            <a:off x="749808" y="4467405"/>
+            <a:off x="749808" y="4778929"/>
             <a:ext cx="2425446" cy="228600"/>
           </a:xfrm>
           <a:prstGeom prst="rect">
@@ -16210,14 +15623,14 @@
       </p:sp>
       <p:sp>
         <p:nvSpPr>
-          <p:cNvPr id="18" name="Rectangle 17"/>
+          <p:cNvPr id="19" name="Rectangle 18"/>
           <p:cNvSpPr/>
           <p:nvPr/>
         </p:nvSpPr>
         <p:spPr>
           <a:xfrm>
-            <a:off x="3394710" y="2747210"/>
-            <a:ext cx="2644902" cy="2049378"/>
+            <a:off x="3394710" y="3545492"/>
+            <a:ext cx="2644902" cy="1562621"/>
           </a:xfrm>
           <a:prstGeom prst="rect">
             <a:avLst/>
@@ -16259,13 +15672,13 @@
       </p:sp>
       <p:sp>
         <p:nvSpPr>
-          <p:cNvPr id="19" name="Rectangle 18"/>
+          <p:cNvPr id="20" name="Rectangle 19"/>
           <p:cNvSpPr/>
           <p:nvPr/>
         </p:nvSpPr>
         <p:spPr>
           <a:xfrm>
-            <a:off x="3394710" y="2747210"/>
+            <a:off x="3394710" y="3545492"/>
             <a:ext cx="2644902" cy="45720"/>
           </a:xfrm>
           <a:prstGeom prst="rect">
@@ -16308,13 +15721,13 @@
       </p:sp>
       <p:sp>
         <p:nvSpPr>
-          <p:cNvPr id="20" name="TextBox 19"/>
+          <p:cNvPr id="21" name="TextBox 20"/>
           <p:cNvSpPr txBox="1"/>
           <p:nvPr/>
         </p:nvSpPr>
         <p:spPr>
           <a:xfrm>
-            <a:off x="3504438" y="2875226"/>
+            <a:off x="3504438" y="3673508"/>
             <a:ext cx="2425446" cy="201168"/>
           </a:xfrm>
           <a:prstGeom prst="rect">
@@ -16350,13 +15763,13 @@
       </p:sp>
       <p:sp>
         <p:nvSpPr>
-          <p:cNvPr id="21" name="TextBox 20"/>
+          <p:cNvPr id="22" name="TextBox 21"/>
           <p:cNvSpPr txBox="1"/>
           <p:nvPr/>
         </p:nvSpPr>
         <p:spPr>
           <a:xfrm>
-            <a:off x="3504438" y="3131258"/>
+            <a:off x="3504438" y="3929540"/>
             <a:ext cx="2425446" cy="475488"/>
           </a:xfrm>
           <a:prstGeom prst="rect">
@@ -16392,13 +15805,13 @@
       </p:sp>
       <p:sp>
         <p:nvSpPr>
-          <p:cNvPr id="22" name="TextBox 21"/>
+          <p:cNvPr id="23" name="TextBox 22"/>
           <p:cNvSpPr txBox="1"/>
           <p:nvPr/>
         </p:nvSpPr>
         <p:spPr>
           <a:xfrm>
-            <a:off x="3504438" y="4467405"/>
+            <a:off x="3504438" y="4778929"/>
             <a:ext cx="2425446" cy="228600"/>
           </a:xfrm>
           <a:prstGeom prst="rect">
@@ -16434,14 +15847,14 @@
       </p:sp>
       <p:sp>
         <p:nvSpPr>
-          <p:cNvPr id="23" name="Rectangle 22"/>
+          <p:cNvPr id="24" name="Rectangle 23"/>
           <p:cNvSpPr/>
           <p:nvPr/>
         </p:nvSpPr>
         <p:spPr>
           <a:xfrm>
-            <a:off x="6149340" y="2747210"/>
-            <a:ext cx="2644902" cy="2049378"/>
+            <a:off x="6149340" y="3545492"/>
+            <a:ext cx="2644902" cy="1562621"/>
           </a:xfrm>
           <a:prstGeom prst="rect">
             <a:avLst/>
@@ -16483,13 +15896,13 @@
       </p:sp>
       <p:sp>
         <p:nvSpPr>
-          <p:cNvPr id="24" name="Rectangle 23"/>
+          <p:cNvPr id="25" name="Rectangle 24"/>
           <p:cNvSpPr/>
           <p:nvPr/>
         </p:nvSpPr>
         <p:spPr>
           <a:xfrm>
-            <a:off x="6149340" y="2747210"/>
+            <a:off x="6149340" y="3545492"/>
             <a:ext cx="2644902" cy="45720"/>
           </a:xfrm>
           <a:prstGeom prst="rect">
@@ -16532,13 +15945,13 @@
       </p:sp>
       <p:sp>
         <p:nvSpPr>
-          <p:cNvPr id="25" name="TextBox 24"/>
+          <p:cNvPr id="26" name="TextBox 25"/>
           <p:cNvSpPr txBox="1"/>
           <p:nvPr/>
         </p:nvSpPr>
         <p:spPr>
           <a:xfrm>
-            <a:off x="6259068" y="2875226"/>
+            <a:off x="6259068" y="3673508"/>
             <a:ext cx="2425446" cy="201168"/>
           </a:xfrm>
           <a:prstGeom prst="rect">
@@ -16574,13 +15987,13 @@
       </p:sp>
       <p:sp>
         <p:nvSpPr>
-          <p:cNvPr id="26" name="TextBox 25"/>
+          <p:cNvPr id="27" name="TextBox 26"/>
           <p:cNvSpPr txBox="1"/>
           <p:nvPr/>
         </p:nvSpPr>
         <p:spPr>
           <a:xfrm>
-            <a:off x="6259068" y="3131258"/>
+            <a:off x="6259068" y="3929540"/>
             <a:ext cx="2425446" cy="475488"/>
           </a:xfrm>
           <a:prstGeom prst="rect">
@@ -16616,13 +16029,13 @@
       </p:sp>
       <p:sp>
         <p:nvSpPr>
-          <p:cNvPr id="27" name="TextBox 26"/>
+          <p:cNvPr id="28" name="TextBox 27"/>
           <p:cNvSpPr txBox="1"/>
           <p:nvPr/>
         </p:nvSpPr>
         <p:spPr>
           <a:xfrm>
-            <a:off x="6259068" y="4467405"/>
+            <a:off x="6259068" y="4778929"/>
             <a:ext cx="2425446" cy="228600"/>
           </a:xfrm>
           <a:prstGeom prst="rect">
@@ -16658,14 +16071,14 @@
       </p:sp>
       <p:sp>
         <p:nvSpPr>
-          <p:cNvPr id="28" name="Rectangle 27"/>
+          <p:cNvPr id="29" name="Rectangle 28"/>
           <p:cNvSpPr/>
           <p:nvPr/>
         </p:nvSpPr>
         <p:spPr>
           <a:xfrm>
-            <a:off x="8903970" y="2747210"/>
-            <a:ext cx="2644902" cy="2049378"/>
+            <a:off x="8903970" y="3545492"/>
+            <a:ext cx="2644902" cy="1562621"/>
           </a:xfrm>
           <a:prstGeom prst="rect">
             <a:avLst/>
@@ -16707,13 +16120,13 @@
       </p:sp>
       <p:sp>
         <p:nvSpPr>
-          <p:cNvPr id="29" name="Rectangle 28"/>
+          <p:cNvPr id="30" name="Rectangle 29"/>
           <p:cNvSpPr/>
           <p:nvPr/>
         </p:nvSpPr>
         <p:spPr>
           <a:xfrm>
-            <a:off x="8903970" y="2747210"/>
+            <a:off x="8903970" y="3545492"/>
             <a:ext cx="2644902" cy="45720"/>
           </a:xfrm>
           <a:prstGeom prst="rect">
@@ -16756,13 +16169,13 @@
       </p:sp>
       <p:sp>
         <p:nvSpPr>
-          <p:cNvPr id="30" name="TextBox 29"/>
+          <p:cNvPr id="31" name="TextBox 30"/>
           <p:cNvSpPr txBox="1"/>
           <p:nvPr/>
         </p:nvSpPr>
         <p:spPr>
           <a:xfrm>
-            <a:off x="9013698" y="2875226"/>
+            <a:off x="9013698" y="3673508"/>
             <a:ext cx="2425446" cy="201168"/>
           </a:xfrm>
           <a:prstGeom prst="rect">
@@ -16798,13 +16211,13 @@
       </p:sp>
       <p:sp>
         <p:nvSpPr>
-          <p:cNvPr id="31" name="TextBox 30"/>
+          <p:cNvPr id="32" name="TextBox 31"/>
           <p:cNvSpPr txBox="1"/>
           <p:nvPr/>
         </p:nvSpPr>
         <p:spPr>
           <a:xfrm>
-            <a:off x="9013698" y="3131258"/>
+            <a:off x="9013698" y="3929540"/>
             <a:ext cx="2425446" cy="475488"/>
           </a:xfrm>
           <a:prstGeom prst="rect">
@@ -16840,13 +16253,13 @@
       </p:sp>
       <p:sp>
         <p:nvSpPr>
-          <p:cNvPr id="32" name="TextBox 31"/>
+          <p:cNvPr id="33" name="TextBox 32"/>
           <p:cNvSpPr txBox="1"/>
           <p:nvPr/>
         </p:nvSpPr>
         <p:spPr>
           <a:xfrm>
-            <a:off x="9013698" y="4467405"/>
+            <a:off x="9013698" y="4778929"/>
             <a:ext cx="2425446" cy="228600"/>
           </a:xfrm>
           <a:prstGeom prst="rect">
@@ -16882,14 +16295,14 @@
       </p:sp>
       <p:sp>
         <p:nvSpPr>
-          <p:cNvPr id="33" name="Rectangle 32"/>
+          <p:cNvPr id="34" name="Rectangle 33"/>
           <p:cNvSpPr/>
           <p:nvPr/>
         </p:nvSpPr>
         <p:spPr>
           <a:xfrm>
-            <a:off x="640080" y="4979469"/>
-            <a:ext cx="73152" cy="1165298"/>
+            <a:off x="640080" y="5290993"/>
+            <a:ext cx="73152" cy="853774"/>
           </a:xfrm>
           <a:prstGeom prst="rect">
             <a:avLst/>
@@ -16931,14 +16344,14 @@
       </p:sp>
       <p:sp>
         <p:nvSpPr>
-          <p:cNvPr id="34" name="TextBox 33"/>
+          <p:cNvPr id="35" name="TextBox 34"/>
           <p:cNvSpPr txBox="1"/>
           <p:nvPr/>
         </p:nvSpPr>
         <p:spPr>
           <a:xfrm>
-            <a:off x="896112" y="4952037"/>
-            <a:ext cx="10588752" cy="760729"/>
+            <a:off x="896112" y="5263561"/>
+            <a:ext cx="10588752" cy="580045"/>
           </a:xfrm>
           <a:prstGeom prst="rect">
             <a:avLst/>
@@ -16973,14 +16386,14 @@
       </p:sp>
       <p:sp>
         <p:nvSpPr>
-          <p:cNvPr id="35" name="TextBox 34"/>
+          <p:cNvPr id="36" name="TextBox 35"/>
           <p:cNvSpPr txBox="1"/>
           <p:nvPr/>
         </p:nvSpPr>
         <p:spPr>
           <a:xfrm>
-            <a:off x="896112" y="5693278"/>
-            <a:ext cx="10588752" cy="393480"/>
+            <a:off x="896112" y="5817888"/>
+            <a:ext cx="10588752" cy="300023"/>
           </a:xfrm>
           <a:prstGeom prst="rect">
             <a:avLst/>
@@ -17015,7 +16428,7 @@
       </p:sp>
       <p:sp>
         <p:nvSpPr>
-          <p:cNvPr id="36" name="Rectangle 35"/>
+          <p:cNvPr id="37" name="Rectangle 36"/>
           <p:cNvSpPr/>
           <p:nvPr/>
         </p:nvSpPr>
@@ -17064,7 +16477,7 @@
       </p:sp>
       <p:sp>
         <p:nvSpPr>
-          <p:cNvPr id="37" name="TextBox 36"/>
+          <p:cNvPr id="38" name="TextBox 37"/>
           <p:cNvSpPr txBox="1"/>
           <p:nvPr/>
         </p:nvSpPr>
@@ -17106,7 +16519,7 @@
       </p:sp>
       <p:sp>
         <p:nvSpPr>
-          <p:cNvPr id="38" name="TextBox 37"/>
+          <p:cNvPr id="39" name="TextBox 38"/>
           <p:cNvSpPr txBox="1"/>
           <p:nvPr/>
         </p:nvSpPr>
@@ -17148,7 +16561,7 @@
       </p:sp>
       <p:sp>
         <p:nvSpPr>
-          <p:cNvPr id="39" name="TextBox 38"/>
+          <p:cNvPr id="40" name="TextBox 39"/>
           <p:cNvSpPr txBox="1"/>
           <p:nvPr/>
         </p:nvSpPr>
@@ -17264,7 +16677,7 @@
         <p:spPr>
           <a:xfrm>
             <a:off x="640080" y="329184"/>
-            <a:ext cx="5303520" cy="182880"/>
+            <a:ext cx="9875520" cy="182880"/>
           </a:xfrm>
           <a:prstGeom prst="rect">
             <a:avLst/>
@@ -17305,48 +16718,6 @@
         </p:nvSpPr>
         <p:spPr>
           <a:xfrm>
-            <a:off x="5897880" y="310896"/>
-            <a:ext cx="4800600" cy="256032"/>
-          </a:xfrm>
-          <a:prstGeom prst="rect">
-            <a:avLst/>
-          </a:prstGeom>
-          <a:noFill/>
-        </p:spPr>
-        <p:txBody>
-          <a:bodyPr wrap="none" lIns="9144" rIns="9144" tIns="9144" bIns="9144" anchor="t">
-            <a:spAutoFit/>
-          </a:bodyPr>
-          <a:lstStyle/>
-          <a:p>
-            <a:pPr algn="r">
-              <a:spcAft>
-                <a:spcPts val="0"/>
-              </a:spcAft>
-              <a:defRPr sz="680" b="1">
-                <a:solidFill>
-                  <a:srgbClr val="4F6B00"/>
-                </a:solidFill>
-                <a:latin typeface="Inter"/>
-              </a:defRPr>
-            </a:pPr>
-            <a:r>
-              <a:rPr>
-                <a:latin typeface="Inter"/>
-              </a:rPr>
-              <a:t>Illustrative, Gradient Maintained — demo data, not the client's holdings or managers</a:t>
-            </a:r>
-          </a:p>
-        </p:txBody>
-      </p:sp>
-      <p:sp>
-        <p:nvSpPr>
-          <p:cNvPr id="5" name="TextBox 4"/>
-          <p:cNvSpPr txBox="1"/>
-          <p:nvPr/>
-        </p:nvSpPr>
-        <p:spPr>
-          <a:xfrm>
             <a:off x="640080" y="566928"/>
             <a:ext cx="10058400" cy="530352"/>
           </a:xfrm>
@@ -17383,7 +16754,7 @@
       </p:sp>
       <p:sp>
         <p:nvSpPr>
-          <p:cNvPr id="6" name="Rectangle 5"/>
+          <p:cNvPr id="5" name="Rectangle 4"/>
           <p:cNvSpPr/>
           <p:nvPr/>
         </p:nvSpPr>
@@ -17432,7 +16803,7 @@
       </p:sp>
       <p:sp>
         <p:nvSpPr>
-          <p:cNvPr id="7" name="Rectangle 6"/>
+          <p:cNvPr id="6" name="Rectangle 5"/>
           <p:cNvSpPr/>
           <p:nvPr/>
         </p:nvSpPr>
@@ -17481,7 +16852,7 @@
       </p:sp>
       <p:sp>
         <p:nvSpPr>
-          <p:cNvPr id="8" name="TextBox 7"/>
+          <p:cNvPr id="7" name="TextBox 6"/>
           <p:cNvSpPr txBox="1"/>
           <p:nvPr/>
         </p:nvSpPr>
@@ -17523,7 +16894,7 @@
       </p:sp>
       <p:sp>
         <p:nvSpPr>
-          <p:cNvPr id="9" name="TextBox 8"/>
+          <p:cNvPr id="8" name="TextBox 7"/>
           <p:cNvSpPr txBox="1"/>
           <p:nvPr/>
         </p:nvSpPr>
@@ -17565,7 +16936,7 @@
       </p:sp>
       <p:graphicFrame>
         <p:nvGraphicFramePr>
-          <p:cNvPr id="10" name="Chart 9"/>
+          <p:cNvPr id="9" name="Chart 8"/>
           <p:cNvGraphicFramePr>
             <a:graphicFrameLocks noGrp="1"/>
           </p:cNvGraphicFramePr>
@@ -17583,7 +16954,7 @@
       </p:graphicFrame>
       <p:sp>
         <p:nvSpPr>
-          <p:cNvPr id="11" name="Rectangle 10"/>
+          <p:cNvPr id="10" name="Rectangle 9"/>
           <p:cNvSpPr/>
           <p:nvPr/>
         </p:nvSpPr>
@@ -17632,7 +17003,7 @@
       </p:sp>
       <p:sp>
         <p:nvSpPr>
-          <p:cNvPr id="12" name="TextBox 11"/>
+          <p:cNvPr id="11" name="TextBox 10"/>
           <p:cNvSpPr txBox="1"/>
           <p:nvPr/>
         </p:nvSpPr>
@@ -17674,7 +17045,7 @@
       </p:sp>
       <p:sp>
         <p:nvSpPr>
-          <p:cNvPr id="13" name="TextBox 12"/>
+          <p:cNvPr id="12" name="TextBox 11"/>
           <p:cNvSpPr txBox="1"/>
           <p:nvPr/>
         </p:nvSpPr>
@@ -17716,7 +17087,7 @@
       </p:sp>
       <p:sp>
         <p:nvSpPr>
-          <p:cNvPr id="14" name="TextBox 13"/>
+          <p:cNvPr id="13" name="TextBox 12"/>
           <p:cNvSpPr txBox="1"/>
           <p:nvPr/>
         </p:nvSpPr>
@@ -17832,7 +17203,7 @@
         <p:spPr>
           <a:xfrm>
             <a:off x="640080" y="329184"/>
-            <a:ext cx="5303520" cy="182880"/>
+            <a:ext cx="9875520" cy="182880"/>
           </a:xfrm>
           <a:prstGeom prst="rect">
             <a:avLst/>
@@ -17873,48 +17244,6 @@
         </p:nvSpPr>
         <p:spPr>
           <a:xfrm>
-            <a:off x="5897880" y="310896"/>
-            <a:ext cx="4800600" cy="256032"/>
-          </a:xfrm>
-          <a:prstGeom prst="rect">
-            <a:avLst/>
-          </a:prstGeom>
-          <a:noFill/>
-        </p:spPr>
-        <p:txBody>
-          <a:bodyPr wrap="none" lIns="9144" rIns="9144" tIns="9144" bIns="9144" anchor="t">
-            <a:spAutoFit/>
-          </a:bodyPr>
-          <a:lstStyle/>
-          <a:p>
-            <a:pPr algn="r">
-              <a:spcAft>
-                <a:spcPts val="0"/>
-              </a:spcAft>
-              <a:defRPr sz="680" b="1">
-                <a:solidFill>
-                  <a:srgbClr val="4F6B00"/>
-                </a:solidFill>
-                <a:latin typeface="Inter"/>
-              </a:defRPr>
-            </a:pPr>
-            <a:r>
-              <a:rPr>
-                <a:latin typeface="Inter"/>
-              </a:rPr>
-              <a:t>Illustrative, Gradient Maintained — demo data, not the client's holdings or managers</a:t>
-            </a:r>
-          </a:p>
-        </p:txBody>
-      </p:sp>
-      <p:sp>
-        <p:nvSpPr>
-          <p:cNvPr id="5" name="TextBox 4"/>
-          <p:cNvSpPr txBox="1"/>
-          <p:nvPr/>
-        </p:nvSpPr>
-        <p:spPr>
-          <a:xfrm>
             <a:off x="640080" y="566928"/>
             <a:ext cx="10058400" cy="530352"/>
           </a:xfrm>
@@ -17951,7 +17280,7 @@
       </p:sp>
       <p:sp>
         <p:nvSpPr>
-          <p:cNvPr id="6" name="Rectangle 5"/>
+          <p:cNvPr id="5" name="Rectangle 4"/>
           <p:cNvSpPr/>
           <p:nvPr/>
         </p:nvSpPr>
@@ -18000,7 +17329,7 @@
       </p:sp>
       <p:sp>
         <p:nvSpPr>
-          <p:cNvPr id="7" name="Rectangle 6"/>
+          <p:cNvPr id="6" name="Rectangle 5"/>
           <p:cNvSpPr/>
           <p:nvPr/>
         </p:nvSpPr>
@@ -18049,7 +17378,7 @@
       </p:sp>
       <p:sp>
         <p:nvSpPr>
-          <p:cNvPr id="8" name="TextBox 7"/>
+          <p:cNvPr id="7" name="TextBox 6"/>
           <p:cNvSpPr txBox="1"/>
           <p:nvPr/>
         </p:nvSpPr>
@@ -18091,7 +17420,7 @@
       </p:sp>
       <p:sp>
         <p:nvSpPr>
-          <p:cNvPr id="9" name="TextBox 8"/>
+          <p:cNvPr id="8" name="TextBox 7"/>
           <p:cNvSpPr txBox="1"/>
           <p:nvPr/>
         </p:nvSpPr>
@@ -18133,7 +17462,7 @@
       </p:sp>
       <p:graphicFrame>
         <p:nvGraphicFramePr>
-          <p:cNvPr id="10" name="Chart 9"/>
+          <p:cNvPr id="9" name="Chart 8"/>
           <p:cNvGraphicFramePr>
             <a:graphicFrameLocks noGrp="1"/>
           </p:cNvGraphicFramePr>
@@ -18151,7 +17480,7 @@
       </p:graphicFrame>
       <p:sp>
         <p:nvSpPr>
-          <p:cNvPr id="11" name="Rectangle 10"/>
+          <p:cNvPr id="10" name="Rectangle 9"/>
           <p:cNvSpPr/>
           <p:nvPr/>
         </p:nvSpPr>
@@ -18200,7 +17529,7 @@
       </p:sp>
       <p:sp>
         <p:nvSpPr>
-          <p:cNvPr id="12" name="TextBox 11"/>
+          <p:cNvPr id="11" name="TextBox 10"/>
           <p:cNvSpPr txBox="1"/>
           <p:nvPr/>
         </p:nvSpPr>
@@ -18242,7 +17571,7 @@
       </p:sp>
       <p:sp>
         <p:nvSpPr>
-          <p:cNvPr id="13" name="TextBox 12"/>
+          <p:cNvPr id="12" name="TextBox 11"/>
           <p:cNvSpPr txBox="1"/>
           <p:nvPr/>
         </p:nvSpPr>
@@ -18284,7 +17613,7 @@
       </p:sp>
       <p:sp>
         <p:nvSpPr>
-          <p:cNvPr id="14" name="TextBox 13"/>
+          <p:cNvPr id="13" name="TextBox 12"/>
           <p:cNvSpPr txBox="1"/>
           <p:nvPr/>
         </p:nvSpPr>
@@ -18400,7 +17729,7 @@
         <p:spPr>
           <a:xfrm>
             <a:off x="640080" y="329184"/>
-            <a:ext cx="5303520" cy="182880"/>
+            <a:ext cx="9875520" cy="182880"/>
           </a:xfrm>
           <a:prstGeom prst="rect">
             <a:avLst/>
@@ -18441,48 +17770,6 @@
         </p:nvSpPr>
         <p:spPr>
           <a:xfrm>
-            <a:off x="5897880" y="310896"/>
-            <a:ext cx="4800600" cy="256032"/>
-          </a:xfrm>
-          <a:prstGeom prst="rect">
-            <a:avLst/>
-          </a:prstGeom>
-          <a:noFill/>
-        </p:spPr>
-        <p:txBody>
-          <a:bodyPr wrap="none" lIns="9144" rIns="9144" tIns="9144" bIns="9144" anchor="t">
-            <a:spAutoFit/>
-          </a:bodyPr>
-          <a:lstStyle/>
-          <a:p>
-            <a:pPr algn="r">
-              <a:spcAft>
-                <a:spcPts val="0"/>
-              </a:spcAft>
-              <a:defRPr sz="680" b="1">
-                <a:solidFill>
-                  <a:srgbClr val="4F6B00"/>
-                </a:solidFill>
-                <a:latin typeface="Inter"/>
-              </a:defRPr>
-            </a:pPr>
-            <a:r>
-              <a:rPr>
-                <a:latin typeface="Inter"/>
-              </a:rPr>
-              <a:t>Illustrative, Gradient Maintained — demo data, not the client's holdings or managers</a:t>
-            </a:r>
-          </a:p>
-        </p:txBody>
-      </p:sp>
-      <p:sp>
-        <p:nvSpPr>
-          <p:cNvPr id="5" name="TextBox 4"/>
-          <p:cNvSpPr txBox="1"/>
-          <p:nvPr/>
-        </p:nvSpPr>
-        <p:spPr>
-          <a:xfrm>
             <a:off x="640080" y="566928"/>
             <a:ext cx="10058400" cy="530352"/>
           </a:xfrm>
@@ -18519,7 +17806,7 @@
       </p:sp>
       <p:sp>
         <p:nvSpPr>
-          <p:cNvPr id="6" name="Rectangle 5"/>
+          <p:cNvPr id="5" name="Rectangle 4"/>
           <p:cNvSpPr/>
           <p:nvPr/>
         </p:nvSpPr>
@@ -18568,7 +17855,7 @@
       </p:sp>
       <p:sp>
         <p:nvSpPr>
-          <p:cNvPr id="7" name="Rectangle 6"/>
+          <p:cNvPr id="6" name="Rectangle 5"/>
           <p:cNvSpPr/>
           <p:nvPr/>
         </p:nvSpPr>
@@ -18617,7 +17904,7 @@
       </p:sp>
       <p:sp>
         <p:nvSpPr>
-          <p:cNvPr id="8" name="TextBox 7"/>
+          <p:cNvPr id="7" name="TextBox 6"/>
           <p:cNvSpPr txBox="1"/>
           <p:nvPr/>
         </p:nvSpPr>
@@ -18659,7 +17946,7 @@
       </p:sp>
       <p:sp>
         <p:nvSpPr>
-          <p:cNvPr id="9" name="TextBox 8"/>
+          <p:cNvPr id="8" name="TextBox 7"/>
           <p:cNvSpPr txBox="1"/>
           <p:nvPr/>
         </p:nvSpPr>
@@ -18701,7 +17988,7 @@
       </p:sp>
       <p:graphicFrame>
         <p:nvGraphicFramePr>
-          <p:cNvPr id="10" name="Table 9"/>
+          <p:cNvPr id="9" name="Table 8"/>
           <p:cNvGraphicFramePr>
             <a:graphicFrameLocks noGrp="1"/>
           </p:cNvGraphicFramePr>
@@ -19043,7 +18330,7 @@
                         <a:rPr>
                           <a:latin typeface="Inter"/>
                         </a:rPr>
-                        <a:t>Partial</a:t>
+                        <a:t>Persistent in two lanes</a:t>
                       </a:r>
                     </a:p>
                   </a:txBody>
@@ -19060,7 +18347,7 @@
       </p:graphicFrame>
       <p:sp>
         <p:nvSpPr>
-          <p:cNvPr id="11" name="TextBox 10"/>
+          <p:cNvPr id="10" name="TextBox 9"/>
           <p:cNvSpPr txBox="1"/>
           <p:nvPr/>
         </p:nvSpPr>
@@ -19102,7 +18389,7 @@
       </p:sp>
       <p:sp>
         <p:nvSpPr>
-          <p:cNvPr id="12" name="Rectangle 11"/>
+          <p:cNvPr id="11" name="Rectangle 10"/>
           <p:cNvSpPr/>
           <p:nvPr/>
         </p:nvSpPr>
@@ -19151,7 +18438,7 @@
       </p:sp>
       <p:sp>
         <p:nvSpPr>
-          <p:cNvPr id="13" name="Rectangle 12"/>
+          <p:cNvPr id="12" name="Rectangle 11"/>
           <p:cNvSpPr/>
           <p:nvPr/>
         </p:nvSpPr>
@@ -19200,7 +18487,7 @@
       </p:sp>
       <p:sp>
         <p:nvSpPr>
-          <p:cNvPr id="14" name="TextBox 13"/>
+          <p:cNvPr id="13" name="TextBox 12"/>
           <p:cNvSpPr txBox="1"/>
           <p:nvPr/>
         </p:nvSpPr>
@@ -19242,7 +18529,7 @@
       </p:sp>
       <p:sp>
         <p:nvSpPr>
-          <p:cNvPr id="15" name="TextBox 14"/>
+          <p:cNvPr id="14" name="TextBox 13"/>
           <p:cNvSpPr txBox="1"/>
           <p:nvPr/>
         </p:nvSpPr>
@@ -19284,7 +18571,7 @@
       </p:sp>
       <p:sp>
         <p:nvSpPr>
-          <p:cNvPr id="16" name="Rectangle 15"/>
+          <p:cNvPr id="15" name="Rectangle 14"/>
           <p:cNvSpPr/>
           <p:nvPr/>
         </p:nvSpPr>
@@ -19333,7 +18620,7 @@
       </p:sp>
       <p:sp>
         <p:nvSpPr>
-          <p:cNvPr id="17" name="TextBox 16"/>
+          <p:cNvPr id="16" name="TextBox 15"/>
           <p:cNvSpPr txBox="1"/>
           <p:nvPr/>
         </p:nvSpPr>
@@ -19375,7 +18662,7 @@
       </p:sp>
       <p:sp>
         <p:nvSpPr>
-          <p:cNvPr id="18" name="TextBox 17"/>
+          <p:cNvPr id="17" name="TextBox 16"/>
           <p:cNvSpPr txBox="1"/>
           <p:nvPr/>
         </p:nvSpPr>
@@ -19417,7 +18704,7 @@
       </p:sp>
       <p:sp>
         <p:nvSpPr>
-          <p:cNvPr id="19" name="TextBox 18"/>
+          <p:cNvPr id="18" name="TextBox 17"/>
           <p:cNvSpPr txBox="1"/>
           <p:nvPr/>
         </p:nvSpPr>
@@ -19533,7 +18820,7 @@
         <p:spPr>
           <a:xfrm>
             <a:off x="640080" y="329184"/>
-            <a:ext cx="5303520" cy="182880"/>
+            <a:ext cx="9875520" cy="182880"/>
           </a:xfrm>
           <a:prstGeom prst="rect">
             <a:avLst/>
@@ -19561,7 +18848,7 @@
               <a:rPr>
                 <a:latin typeface="Inter"/>
               </a:rPr>
-              <a:t>TWO LIVE LANES AND TWO CAPABILITY GAPS DEFINE COVERAGE</a:t>
+              <a:t>ALL THREE LANES AND THE CROSS-LANE COMPARISON RETURNED RESULTS</a:t>
             </a:r>
           </a:p>
         </p:txBody>
@@ -19569,48 +18856,6 @@
       <p:sp>
         <p:nvSpPr>
           <p:cNvPr id="4" name="TextBox 3"/>
-          <p:cNvSpPr txBox="1"/>
-          <p:nvPr/>
-        </p:nvSpPr>
-        <p:spPr>
-          <a:xfrm>
-            <a:off x="5897880" y="310896"/>
-            <a:ext cx="4800600" cy="256032"/>
-          </a:xfrm>
-          <a:prstGeom prst="rect">
-            <a:avLst/>
-          </a:prstGeom>
-          <a:noFill/>
-        </p:spPr>
-        <p:txBody>
-          <a:bodyPr wrap="none" lIns="9144" rIns="9144" tIns="9144" bIns="9144" anchor="t">
-            <a:spAutoFit/>
-          </a:bodyPr>
-          <a:lstStyle/>
-          <a:p>
-            <a:pPr algn="r">
-              <a:spcAft>
-                <a:spcPts val="0"/>
-              </a:spcAft>
-              <a:defRPr sz="680" b="1">
-                <a:solidFill>
-                  <a:srgbClr val="4F6B00"/>
-                </a:solidFill>
-                <a:latin typeface="Inter"/>
-              </a:defRPr>
-            </a:pPr>
-            <a:r>
-              <a:rPr>
-                <a:latin typeface="Inter"/>
-              </a:rPr>
-              <a:t>Illustrative, Gradient Maintained — demo data, not the client's holdings or managers</a:t>
-            </a:r>
-          </a:p>
-        </p:txBody>
-      </p:sp>
-      <p:sp>
-        <p:nvSpPr>
-          <p:cNvPr id="5" name="TextBox 4"/>
           <p:cNvSpPr txBox="1"/>
           <p:nvPr/>
         </p:nvSpPr>
@@ -19652,7 +18897,7 @@
       </p:sp>
       <p:sp>
         <p:nvSpPr>
-          <p:cNvPr id="6" name="Rectangle 5"/>
+          <p:cNvPr id="5" name="Rectangle 4"/>
           <p:cNvSpPr/>
           <p:nvPr/>
         </p:nvSpPr>
@@ -19701,7 +18946,7 @@
       </p:sp>
       <p:sp>
         <p:nvSpPr>
-          <p:cNvPr id="7" name="Rectangle 6"/>
+          <p:cNvPr id="6" name="Rectangle 5"/>
           <p:cNvSpPr/>
           <p:nvPr/>
         </p:nvSpPr>
@@ -19750,7 +18995,7 @@
       </p:sp>
       <p:sp>
         <p:nvSpPr>
-          <p:cNvPr id="8" name="TextBox 7"/>
+          <p:cNvPr id="7" name="TextBox 6"/>
           <p:cNvSpPr txBox="1"/>
           <p:nvPr/>
         </p:nvSpPr>
@@ -19792,7 +19037,7 @@
       </p:sp>
       <p:graphicFrame>
         <p:nvGraphicFramePr>
-          <p:cNvPr id="9" name="Table 8"/>
+          <p:cNvPr id="8" name="Table 7"/>
           <p:cNvGraphicFramePr>
             <a:graphicFrameLocks noGrp="1"/>
           </p:cNvGraphicFramePr>
@@ -19941,7 +19186,7 @@
                         <a:rPr>
                           <a:latin typeface="Inter"/>
                         </a:rPr>
-                        <a:t>● available</a:t>
+                        <a:t>● Available</a:t>
                       </a:r>
                     </a:p>
                   </a:txBody>
@@ -19968,7 +19213,7 @@
                         <a:rPr>
                           <a:latin typeface="Inter"/>
                         </a:rPr>
-                        <a:t>Governed result [S2]</a:t>
+                        <a:t>Realized attribution returned [S2]</a:t>
                       </a:r>
                     </a:p>
                   </a:txBody>
@@ -20024,7 +19269,7 @@
                         <a:rPr>
                           <a:latin typeface="Inter"/>
                         </a:rPr>
-                        <a:t>● available</a:t>
+                        <a:t>● Available</a:t>
                       </a:r>
                     </a:p>
                   </a:txBody>
@@ -20051,7 +19296,7 @@
                         <a:rPr>
                           <a:latin typeface="Inter"/>
                         </a:rPr>
-                        <a:t>Governed result [S3]</a:t>
+                        <a:t>Expected attribution returned [S3]</a:t>
                       </a:r>
                     </a:p>
                   </a:txBody>
@@ -20080,7 +19325,7 @@
                         <a:rPr>
                           <a:latin typeface="Inter"/>
                         </a:rPr>
-                        <a:t>Planned tools</a:t>
+                        <a:t>Simulation and comparison</a:t>
                       </a:r>
                     </a:p>
                   </a:txBody>
@@ -20107,7 +19352,7 @@
                         <a:rPr>
                           <a:latin typeface="Inter"/>
                         </a:rPr>
-                        <a:t>● available</a:t>
+                        <a:t>● Available</a:t>
                       </a:r>
                     </a:p>
                   </a:txBody>
@@ -20134,7 +19379,7 @@
                         <a:rPr>
                           <a:latin typeface="Inter"/>
                         </a:rPr>
-                        <a:t>Capability-gated results [S4][S5]</a:t>
+                        <a:t>Scenario and cross-lane results returned [S4][S5]</a:t>
                       </a:r>
                     </a:p>
                   </a:txBody>
@@ -20151,7 +19396,7 @@
       </p:graphicFrame>
       <p:sp>
         <p:nvSpPr>
-          <p:cNvPr id="10" name="Rectangle 9"/>
+          <p:cNvPr id="9" name="Rectangle 8"/>
           <p:cNvSpPr/>
           <p:nvPr/>
         </p:nvSpPr>
@@ -20200,7 +19445,7 @@
       </p:sp>
       <p:sp>
         <p:nvSpPr>
-          <p:cNvPr id="11" name="TextBox 10"/>
+          <p:cNvPr id="10" name="TextBox 9"/>
           <p:cNvSpPr txBox="1"/>
           <p:nvPr/>
         </p:nvSpPr>
@@ -20242,7 +19487,7 @@
       </p:sp>
       <p:sp>
         <p:nvSpPr>
-          <p:cNvPr id="12" name="TextBox 11"/>
+          <p:cNvPr id="11" name="TextBox 10"/>
           <p:cNvSpPr txBox="1"/>
           <p:nvPr/>
         </p:nvSpPr>
@@ -20284,7 +19529,7 @@
       </p:sp>
       <p:sp>
         <p:nvSpPr>
-          <p:cNvPr id="13" name="TextBox 12"/>
+          <p:cNvPr id="12" name="TextBox 11"/>
           <p:cNvSpPr txBox="1"/>
           <p:nvPr/>
         </p:nvSpPr>
@@ -20400,7 +19645,7 @@
         <p:spPr>
           <a:xfrm>
             <a:off x="640080" y="329184"/>
-            <a:ext cx="5303520" cy="182880"/>
+            <a:ext cx="9875520" cy="182880"/>
           </a:xfrm>
           <a:prstGeom prst="rect">
             <a:avLst/>
@@ -20441,48 +19686,6 @@
         </p:nvSpPr>
         <p:spPr>
           <a:xfrm>
-            <a:off x="5897880" y="310896"/>
-            <a:ext cx="4800600" cy="256032"/>
-          </a:xfrm>
-          <a:prstGeom prst="rect">
-            <a:avLst/>
-          </a:prstGeom>
-          <a:noFill/>
-        </p:spPr>
-        <p:txBody>
-          <a:bodyPr wrap="none" lIns="9144" rIns="9144" tIns="9144" bIns="9144" anchor="t">
-            <a:spAutoFit/>
-          </a:bodyPr>
-          <a:lstStyle/>
-          <a:p>
-            <a:pPr algn="r">
-              <a:spcAft>
-                <a:spcPts val="0"/>
-              </a:spcAft>
-              <a:defRPr sz="680" b="1">
-                <a:solidFill>
-                  <a:srgbClr val="4F6B00"/>
-                </a:solidFill>
-                <a:latin typeface="Inter"/>
-              </a:defRPr>
-            </a:pPr>
-            <a:r>
-              <a:rPr>
-                <a:latin typeface="Inter"/>
-              </a:rPr>
-              <a:t>Illustrative, Gradient Maintained — demo data, not the client's holdings or managers</a:t>
-            </a:r>
-          </a:p>
-        </p:txBody>
-      </p:sp>
-      <p:sp>
-        <p:nvSpPr>
-          <p:cNvPr id="5" name="TextBox 4"/>
-          <p:cNvSpPr txBox="1"/>
-          <p:nvPr/>
-        </p:nvSpPr>
-        <p:spPr>
-          <a:xfrm>
             <a:off x="640080" y="566928"/>
             <a:ext cx="10058400" cy="530352"/>
           </a:xfrm>
@@ -20519,7 +19722,7 @@
       </p:sp>
       <p:sp>
         <p:nvSpPr>
-          <p:cNvPr id="6" name="Rectangle 5"/>
+          <p:cNvPr id="5" name="Rectangle 4"/>
           <p:cNvSpPr/>
           <p:nvPr/>
         </p:nvSpPr>
@@ -20568,7 +19771,7 @@
       </p:sp>
       <p:sp>
         <p:nvSpPr>
-          <p:cNvPr id="7" name="Rectangle 6"/>
+          <p:cNvPr id="6" name="Rectangle 5"/>
           <p:cNvSpPr/>
           <p:nvPr/>
         </p:nvSpPr>
@@ -20617,7 +19820,7 @@
       </p:sp>
       <p:sp>
         <p:nvSpPr>
-          <p:cNvPr id="8" name="TextBox 7"/>
+          <p:cNvPr id="7" name="TextBox 6"/>
           <p:cNvSpPr txBox="1"/>
           <p:nvPr/>
         </p:nvSpPr>
@@ -20659,7 +19862,7 @@
       </p:sp>
       <p:graphicFrame>
         <p:nvGraphicFramePr>
-          <p:cNvPr id="9" name="Table 8"/>
+          <p:cNvPr id="8" name="Table 7"/>
           <p:cNvGraphicFramePr>
             <a:graphicFrameLocks noGrp="1"/>
           </p:cNvGraphicFramePr>
@@ -20677,14 +19880,10 @@
               </a:tblPr>
               <a:tblGrid>
                 <a:gridCol w="2011680"/>
-                <a:gridCol w="1112139"/>
-                <a:gridCol w="1112139"/>
-                <a:gridCol w="1112139"/>
-                <a:gridCol w="1112139"/>
-                <a:gridCol w="1112139"/>
-                <a:gridCol w="1112139"/>
-                <a:gridCol w="1112139"/>
-                <a:gridCol w="1112139"/>
+                <a:gridCol w="2224278"/>
+                <a:gridCol w="2224278"/>
+                <a:gridCol w="2224278"/>
+                <a:gridCol w="2224278"/>
               </a:tblGrid>
               <a:tr h="670124">
                 <a:tc>
@@ -20758,7 +19957,7 @@
                         <a:rPr>
                           <a:latin typeface="Inter"/>
                         </a:rPr>
-                        <a:t>Basis</a:t>
+                        <a:t>Source</a:t>
                       </a:r>
                     </a:p>
                   </a:txBody>
@@ -20785,7 +19984,1462 @@
                         <a:rPr>
                           <a:latin typeface="Inter"/>
                         </a:rPr>
-                        <a:t>Tool / view</a:t>
+                        <a:t>As of</a:t>
+                      </a:r>
+                    </a:p>
+                  </a:txBody>
+                  <a:tcPr marL="54864" marR="54864" marT="27432" marB="27432" anchor="ctr">
+                    <a:solidFill>
+                      <a:srgbClr val="0D1117"/>
+                    </a:solidFill>
+                  </a:tcPr>
+                </a:tc>
+                <a:tc>
+                  <a:txBody>
+                    <a:bodyPr/>
+                    <a:lstStyle/>
+                    <a:p>
+                      <a:pPr>
+                        <a:defRPr sz="750" b="1">
+                          <a:solidFill>
+                            <a:srgbClr val="FFFFFF"/>
+                          </a:solidFill>
+                          <a:latin typeface="Inter"/>
+                        </a:defRPr>
+                      </a:pPr>
+                      <a:r>
+                        <a:rPr>
+                          <a:latin typeface="Inter"/>
+                        </a:rPr>
+                        <a:t>Check</a:t>
+                      </a:r>
+                    </a:p>
+                  </a:txBody>
+                  <a:tcPr marL="54864" marR="54864" marT="27432" marB="27432" anchor="ctr">
+                    <a:solidFill>
+                      <a:srgbClr val="0D1117"/>
+                    </a:solidFill>
+                  </a:tcPr>
+                </a:tc>
+              </a:tr>
+              <a:tr h="670124">
+                <a:tc>
+                  <a:txBody>
+                    <a:bodyPr/>
+                    <a:lstStyle/>
+                    <a:p>
+                      <a:pPr>
+                        <a:defRPr sz="720" b="1">
+                          <a:solidFill>
+                            <a:srgbClr val="0D1117"/>
+                          </a:solidFill>
+                          <a:latin typeface="Inter"/>
+                        </a:defRPr>
+                      </a:pPr>
+                      <a:r>
+                        <a:rPr>
+                          <a:latin typeface="Inter"/>
+                        </a:rPr>
+                        <a:t>S1</a:t>
+                      </a:r>
+                    </a:p>
+                  </a:txBody>
+                  <a:tcPr marL="54864" marR="54864" marT="27432" marB="27432" anchor="ctr">
+                    <a:solidFill>
+                      <a:srgbClr val="FFFFFF"/>
+                    </a:solidFill>
+                  </a:tcPr>
+                </a:tc>
+                <a:tc>
+                  <a:txBody>
+                    <a:bodyPr/>
+                    <a:lstStyle/>
+                    <a:p>
+                      <a:pPr>
+                        <a:defRPr sz="720" b="0">
+                          <a:solidFill>
+                            <a:srgbClr val="0D1117"/>
+                          </a:solidFill>
+                          <a:latin typeface="Inter"/>
+                        </a:defRPr>
+                      </a:pPr>
+                      <a:r>
+                        <a:rPr>
+                          <a:latin typeface="Inter"/>
+                        </a:rPr>
+                        <a:t>Capability gate</a:t>
+                      </a:r>
+                    </a:p>
+                  </a:txBody>
+                  <a:tcPr marL="54864" marR="54864" marT="27432" marB="27432" anchor="ctr">
+                    <a:solidFill>
+                      <a:srgbClr val="FFFFFF"/>
+                    </a:solidFill>
+                  </a:tcPr>
+                </a:tc>
+                <a:tc>
+                  <a:txBody>
+                    <a:bodyPr/>
+                    <a:lstStyle/>
+                    <a:p>
+                      <a:pPr>
+                        <a:defRPr sz="720" b="0">
+                          <a:solidFill>
+                            <a:srgbClr val="0D1117"/>
+                          </a:solidFill>
+                          <a:latin typeface="Inter"/>
+                        </a:defRPr>
+                      </a:pPr>
+                      <a:r>
+                        <a:rPr>
+                          <a:latin typeface="Inter"/>
+                        </a:rPr>
+                        <a:t>get_gradient_capabilities</a:t>
+                      </a:r>
+                    </a:p>
+                  </a:txBody>
+                  <a:tcPr marL="54864" marR="54864" marT="27432" marB="27432" anchor="ctr">
+                    <a:solidFill>
+                      <a:srgbClr val="FFFFFF"/>
+                    </a:solidFill>
+                  </a:tcPr>
+                </a:tc>
+                <a:tc>
+                  <a:txBody>
+                    <a:bodyPr/>
+                    <a:lstStyle/>
+                    <a:p>
+                      <a:pPr>
+                        <a:defRPr sz="720" b="0">
+                          <a:solidFill>
+                            <a:srgbClr val="0D1117"/>
+                          </a:solidFill>
+                          <a:latin typeface="Inter"/>
+                        </a:defRPr>
+                      </a:pPr>
+                      <a:r>
+                        <a:rPr>
+                          <a:latin typeface="Inter"/>
+                        </a:rPr>
+                        <a:t>2026-06-30</a:t>
+                      </a:r>
+                    </a:p>
+                  </a:txBody>
+                  <a:tcPr marL="54864" marR="54864" marT="27432" marB="27432" anchor="ctr">
+                    <a:solidFill>
+                      <a:srgbClr val="FFFFFF"/>
+                    </a:solidFill>
+                  </a:tcPr>
+                </a:tc>
+                <a:tc>
+                  <a:txBody>
+                    <a:bodyPr/>
+                    <a:lstStyle/>
+                    <a:p>
+                      <a:pPr>
+                        <a:defRPr sz="720" b="1">
+                          <a:solidFill>
+                            <a:srgbClr val="C6F432"/>
+                          </a:solidFill>
+                          <a:latin typeface="Inter"/>
+                        </a:defRPr>
+                      </a:pPr>
+                      <a:r>
+                        <a:rPr>
+                          <a:latin typeface="Inter"/>
+                        </a:rPr>
+                        <a:t>● Passed</a:t>
+                      </a:r>
+                    </a:p>
+                  </a:txBody>
+                  <a:tcPr marL="54864" marR="54864" marT="27432" marB="27432" anchor="ctr">
+                    <a:solidFill>
+                      <a:srgbClr val="F5F7F9"/>
+                    </a:solidFill>
+                  </a:tcPr>
+                </a:tc>
+              </a:tr>
+              <a:tr h="670124">
+                <a:tc>
+                  <a:txBody>
+                    <a:bodyPr/>
+                    <a:lstStyle/>
+                    <a:p>
+                      <a:pPr>
+                        <a:defRPr sz="720" b="1">
+                          <a:solidFill>
+                            <a:srgbClr val="0D1117"/>
+                          </a:solidFill>
+                          <a:latin typeface="Inter"/>
+                        </a:defRPr>
+                      </a:pPr>
+                      <a:r>
+                        <a:rPr>
+                          <a:latin typeface="Inter"/>
+                        </a:rPr>
+                        <a:t>S2</a:t>
+                      </a:r>
+                    </a:p>
+                  </a:txBody>
+                  <a:tcPr marL="54864" marR="54864" marT="27432" marB="27432" anchor="ctr">
+                    <a:solidFill>
+                      <a:srgbClr val="F5F7F9"/>
+                    </a:solidFill>
+                  </a:tcPr>
+                </a:tc>
+                <a:tc>
+                  <a:txBody>
+                    <a:bodyPr/>
+                    <a:lstStyle/>
+                    <a:p>
+                      <a:pPr>
+                        <a:defRPr sz="720" b="0">
+                          <a:solidFill>
+                            <a:srgbClr val="0D1117"/>
+                          </a:solidFill>
+                          <a:latin typeface="Inter"/>
+                        </a:defRPr>
+                      </a:pPr>
+                      <a:r>
+                        <a:rPr>
+                          <a:latin typeface="Inter"/>
+                        </a:rPr>
+                        <a:t>Historical attribution</a:t>
+                      </a:r>
+                    </a:p>
+                  </a:txBody>
+                  <a:tcPr marL="54864" marR="54864" marT="27432" marB="27432" anchor="ctr">
+                    <a:solidFill>
+                      <a:srgbClr val="F5F7F9"/>
+                    </a:solidFill>
+                  </a:tcPr>
+                </a:tc>
+                <a:tc>
+                  <a:txBody>
+                    <a:bodyPr/>
+                    <a:lstStyle/>
+                    <a:p>
+                      <a:pPr>
+                        <a:defRPr sz="720" b="0">
+                          <a:solidFill>
+                            <a:srgbClr val="0D1117"/>
+                          </a:solidFill>
+                          <a:latin typeface="Inter"/>
+                        </a:defRPr>
+                      </a:pPr>
+                      <a:r>
+                        <a:rPr>
+                          <a:latin typeface="Inter"/>
+                        </a:rPr>
+                        <a:t>get_portfolio_attribution</a:t>
+                      </a:r>
+                    </a:p>
+                  </a:txBody>
+                  <a:tcPr marL="54864" marR="54864" marT="27432" marB="27432" anchor="ctr">
+                    <a:solidFill>
+                      <a:srgbClr val="F5F7F9"/>
+                    </a:solidFill>
+                  </a:tcPr>
+                </a:tc>
+                <a:tc>
+                  <a:txBody>
+                    <a:bodyPr/>
+                    <a:lstStyle/>
+                    <a:p>
+                      <a:pPr>
+                        <a:defRPr sz="720" b="0">
+                          <a:solidFill>
+                            <a:srgbClr val="0D1117"/>
+                          </a:solidFill>
+                          <a:latin typeface="Inter"/>
+                        </a:defRPr>
+                      </a:pPr>
+                      <a:r>
+                        <a:rPr>
+                          <a:latin typeface="Inter"/>
+                        </a:rPr>
+                        <a:t>2026-06-30</a:t>
+                      </a:r>
+                    </a:p>
+                  </a:txBody>
+                  <a:tcPr marL="54864" marR="54864" marT="27432" marB="27432" anchor="ctr">
+                    <a:solidFill>
+                      <a:srgbClr val="F5F7F9"/>
+                    </a:solidFill>
+                  </a:tcPr>
+                </a:tc>
+                <a:tc>
+                  <a:txBody>
+                    <a:bodyPr/>
+                    <a:lstStyle/>
+                    <a:p>
+                      <a:pPr>
+                        <a:defRPr sz="720" b="1">
+                          <a:solidFill>
+                            <a:srgbClr val="C6F432"/>
+                          </a:solidFill>
+                          <a:latin typeface="Inter"/>
+                        </a:defRPr>
+                      </a:pPr>
+                      <a:r>
+                        <a:rPr>
+                          <a:latin typeface="Inter"/>
+                        </a:rPr>
+                        <a:t>● Passed</a:t>
+                      </a:r>
+                    </a:p>
+                  </a:txBody>
+                  <a:tcPr marL="54864" marR="54864" marT="27432" marB="27432" anchor="ctr">
+                    <a:solidFill>
+                      <a:srgbClr val="F5F7F9"/>
+                    </a:solidFill>
+                  </a:tcPr>
+                </a:tc>
+              </a:tr>
+              <a:tr h="670124">
+                <a:tc>
+                  <a:txBody>
+                    <a:bodyPr/>
+                    <a:lstStyle/>
+                    <a:p>
+                      <a:pPr>
+                        <a:defRPr sz="720" b="1">
+                          <a:solidFill>
+                            <a:srgbClr val="0D1117"/>
+                          </a:solidFill>
+                          <a:latin typeface="Inter"/>
+                        </a:defRPr>
+                      </a:pPr>
+                      <a:r>
+                        <a:rPr>
+                          <a:latin typeface="Inter"/>
+                        </a:rPr>
+                        <a:t>S3</a:t>
+                      </a:r>
+                    </a:p>
+                  </a:txBody>
+                  <a:tcPr marL="54864" marR="54864" marT="27432" marB="27432" anchor="ctr">
+                    <a:solidFill>
+                      <a:srgbClr val="FFFFFF"/>
+                    </a:solidFill>
+                  </a:tcPr>
+                </a:tc>
+                <a:tc>
+                  <a:txBody>
+                    <a:bodyPr/>
+                    <a:lstStyle/>
+                    <a:p>
+                      <a:pPr>
+                        <a:defRPr sz="720" b="0">
+                          <a:solidFill>
+                            <a:srgbClr val="0D1117"/>
+                          </a:solidFill>
+                          <a:latin typeface="Inter"/>
+                        </a:defRPr>
+                      </a:pPr>
+                      <a:r>
+                        <a:rPr>
+                          <a:latin typeface="Inter"/>
+                        </a:rPr>
+                        <a:t>Ex ante attribution</a:t>
+                      </a:r>
+                    </a:p>
+                  </a:txBody>
+                  <a:tcPr marL="54864" marR="54864" marT="27432" marB="27432" anchor="ctr">
+                    <a:solidFill>
+                      <a:srgbClr val="FFFFFF"/>
+                    </a:solidFill>
+                  </a:tcPr>
+                </a:tc>
+                <a:tc>
+                  <a:txBody>
+                    <a:bodyPr/>
+                    <a:lstStyle/>
+                    <a:p>
+                      <a:pPr>
+                        <a:defRPr sz="720" b="0">
+                          <a:solidFill>
+                            <a:srgbClr val="0D1117"/>
+                          </a:solidFill>
+                          <a:latin typeface="Inter"/>
+                        </a:defRPr>
+                      </a:pPr>
+                      <a:r>
+                        <a:rPr>
+                          <a:latin typeface="Inter"/>
+                        </a:rPr>
+                        <a:t>get_portfolio_ex_ante_attribution</a:t>
+                      </a:r>
+                    </a:p>
+                  </a:txBody>
+                  <a:tcPr marL="54864" marR="54864" marT="27432" marB="27432" anchor="ctr">
+                    <a:solidFill>
+                      <a:srgbClr val="FFFFFF"/>
+                    </a:solidFill>
+                  </a:tcPr>
+                </a:tc>
+                <a:tc>
+                  <a:txBody>
+                    <a:bodyPr/>
+                    <a:lstStyle/>
+                    <a:p>
+                      <a:pPr>
+                        <a:defRPr sz="720" b="0">
+                          <a:solidFill>
+                            <a:srgbClr val="0D1117"/>
+                          </a:solidFill>
+                          <a:latin typeface="Inter"/>
+                        </a:defRPr>
+                      </a:pPr>
+                      <a:r>
+                        <a:rPr>
+                          <a:latin typeface="Inter"/>
+                        </a:rPr>
+                        <a:t>2026-06-30</a:t>
+                      </a:r>
+                    </a:p>
+                  </a:txBody>
+                  <a:tcPr marL="54864" marR="54864" marT="27432" marB="27432" anchor="ctr">
+                    <a:solidFill>
+                      <a:srgbClr val="FFFFFF"/>
+                    </a:solidFill>
+                  </a:tcPr>
+                </a:tc>
+                <a:tc>
+                  <a:txBody>
+                    <a:bodyPr/>
+                    <a:lstStyle/>
+                    <a:p>
+                      <a:pPr>
+                        <a:defRPr sz="720" b="1">
+                          <a:solidFill>
+                            <a:srgbClr val="C6F432"/>
+                          </a:solidFill>
+                          <a:latin typeface="Inter"/>
+                        </a:defRPr>
+                      </a:pPr>
+                      <a:r>
+                        <a:rPr>
+                          <a:latin typeface="Inter"/>
+                        </a:rPr>
+                        <a:t>● Passed</a:t>
+                      </a:r>
+                    </a:p>
+                  </a:txBody>
+                  <a:tcPr marL="54864" marR="54864" marT="27432" marB="27432" anchor="ctr">
+                    <a:solidFill>
+                      <a:srgbClr val="F5F7F9"/>
+                    </a:solidFill>
+                  </a:tcPr>
+                </a:tc>
+              </a:tr>
+              <a:tr h="670124">
+                <a:tc>
+                  <a:txBody>
+                    <a:bodyPr/>
+                    <a:lstStyle/>
+                    <a:p>
+                      <a:pPr>
+                        <a:defRPr sz="720" b="1">
+                          <a:solidFill>
+                            <a:srgbClr val="0D1117"/>
+                          </a:solidFill>
+                          <a:latin typeface="Inter"/>
+                        </a:defRPr>
+                      </a:pPr>
+                      <a:r>
+                        <a:rPr>
+                          <a:latin typeface="Inter"/>
+                        </a:rPr>
+                        <a:t>S4</a:t>
+                      </a:r>
+                    </a:p>
+                  </a:txBody>
+                  <a:tcPr marL="54864" marR="54864" marT="27432" marB="27432" anchor="ctr">
+                    <a:solidFill>
+                      <a:srgbClr val="F5F7F9"/>
+                    </a:solidFill>
+                  </a:tcPr>
+                </a:tc>
+                <a:tc>
+                  <a:txBody>
+                    <a:bodyPr/>
+                    <a:lstStyle/>
+                    <a:p>
+                      <a:pPr>
+                        <a:defRPr sz="720" b="0">
+                          <a:solidFill>
+                            <a:srgbClr val="0D1117"/>
+                          </a:solidFill>
+                          <a:latin typeface="Inter"/>
+                        </a:defRPr>
+                      </a:pPr>
+                      <a:r>
+                        <a:rPr>
+                          <a:latin typeface="Inter"/>
+                        </a:rPr>
+                        <a:t>Simulated attribution</a:t>
+                      </a:r>
+                    </a:p>
+                  </a:txBody>
+                  <a:tcPr marL="54864" marR="54864" marT="27432" marB="27432" anchor="ctr">
+                    <a:solidFill>
+                      <a:srgbClr val="F5F7F9"/>
+                    </a:solidFill>
+                  </a:tcPr>
+                </a:tc>
+                <a:tc>
+                  <a:txBody>
+                    <a:bodyPr/>
+                    <a:lstStyle/>
+                    <a:p>
+                      <a:pPr>
+                        <a:defRPr sz="720" b="0">
+                          <a:solidFill>
+                            <a:srgbClr val="0D1117"/>
+                          </a:solidFill>
+                          <a:latin typeface="Inter"/>
+                        </a:defRPr>
+                      </a:pPr>
+                      <a:r>
+                        <a:rPr>
+                          <a:latin typeface="Inter"/>
+                        </a:rPr>
+                        <a:t>get_gradient_capabilities</a:t>
+                      </a:r>
+                    </a:p>
+                  </a:txBody>
+                  <a:tcPr marL="54864" marR="54864" marT="27432" marB="27432" anchor="ctr">
+                    <a:solidFill>
+                      <a:srgbClr val="F5F7F9"/>
+                    </a:solidFill>
+                  </a:tcPr>
+                </a:tc>
+                <a:tc>
+                  <a:txBody>
+                    <a:bodyPr/>
+                    <a:lstStyle/>
+                    <a:p>
+                      <a:pPr>
+                        <a:defRPr sz="720" b="0">
+                          <a:solidFill>
+                            <a:srgbClr val="0D1117"/>
+                          </a:solidFill>
+                          <a:latin typeface="Inter"/>
+                        </a:defRPr>
+                      </a:pPr>
+                      <a:r>
+                        <a:rPr>
+                          <a:latin typeface="Inter"/>
+                        </a:rPr>
+                        <a:t>2026-06-30</a:t>
+                      </a:r>
+                    </a:p>
+                  </a:txBody>
+                  <a:tcPr marL="54864" marR="54864" marT="27432" marB="27432" anchor="ctr">
+                    <a:solidFill>
+                      <a:srgbClr val="F5F7F9"/>
+                    </a:solidFill>
+                  </a:tcPr>
+                </a:tc>
+                <a:tc>
+                  <a:txBody>
+                    <a:bodyPr/>
+                    <a:lstStyle/>
+                    <a:p>
+                      <a:pPr>
+                        <a:defRPr sz="720" b="1">
+                          <a:solidFill>
+                            <a:srgbClr val="C6F432"/>
+                          </a:solidFill>
+                          <a:latin typeface="Inter"/>
+                        </a:defRPr>
+                      </a:pPr>
+                      <a:r>
+                        <a:rPr>
+                          <a:latin typeface="Inter"/>
+                        </a:rPr>
+                        <a:t>● Passed</a:t>
+                      </a:r>
+                    </a:p>
+                  </a:txBody>
+                  <a:tcPr marL="54864" marR="54864" marT="27432" marB="27432" anchor="ctr">
+                    <a:solidFill>
+                      <a:srgbClr val="F5F7F9"/>
+                    </a:solidFill>
+                  </a:tcPr>
+                </a:tc>
+              </a:tr>
+              <a:tr h="670124">
+                <a:tc>
+                  <a:txBody>
+                    <a:bodyPr/>
+                    <a:lstStyle/>
+                    <a:p>
+                      <a:pPr>
+                        <a:defRPr sz="720" b="1">
+                          <a:solidFill>
+                            <a:srgbClr val="0D1117"/>
+                          </a:solidFill>
+                          <a:latin typeface="Inter"/>
+                        </a:defRPr>
+                      </a:pPr>
+                      <a:r>
+                        <a:rPr>
+                          <a:latin typeface="Inter"/>
+                        </a:rPr>
+                        <a:t>S5</a:t>
+                      </a:r>
+                    </a:p>
+                  </a:txBody>
+                  <a:tcPr marL="54864" marR="54864" marT="27432" marB="27432" anchor="ctr">
+                    <a:solidFill>
+                      <a:srgbClr val="FFFFFF"/>
+                    </a:solidFill>
+                  </a:tcPr>
+                </a:tc>
+                <a:tc>
+                  <a:txBody>
+                    <a:bodyPr/>
+                    <a:lstStyle/>
+                    <a:p>
+                      <a:pPr>
+                        <a:defRPr sz="720" b="0">
+                          <a:solidFill>
+                            <a:srgbClr val="0D1117"/>
+                          </a:solidFill>
+                          <a:latin typeface="Inter"/>
+                        </a:defRPr>
+                      </a:pPr>
+                      <a:r>
+                        <a:rPr>
+                          <a:latin typeface="Inter"/>
+                        </a:rPr>
+                        <a:t>Cross-lane comparison</a:t>
+                      </a:r>
+                    </a:p>
+                  </a:txBody>
+                  <a:tcPr marL="54864" marR="54864" marT="27432" marB="27432" anchor="ctr">
+                    <a:solidFill>
+                      <a:srgbClr val="FFFFFF"/>
+                    </a:solidFill>
+                  </a:tcPr>
+                </a:tc>
+                <a:tc>
+                  <a:txBody>
+                    <a:bodyPr/>
+                    <a:lstStyle/>
+                    <a:p>
+                      <a:pPr>
+                        <a:defRPr sz="720" b="0">
+                          <a:solidFill>
+                            <a:srgbClr val="0D1117"/>
+                          </a:solidFill>
+                          <a:latin typeface="Inter"/>
+                        </a:defRPr>
+                      </a:pPr>
+                      <a:r>
+                        <a:rPr>
+                          <a:latin typeface="Inter"/>
+                        </a:rPr>
+                        <a:t>get_gradient_capabilities</a:t>
+                      </a:r>
+                    </a:p>
+                  </a:txBody>
+                  <a:tcPr marL="54864" marR="54864" marT="27432" marB="27432" anchor="ctr">
+                    <a:solidFill>
+                      <a:srgbClr val="FFFFFF"/>
+                    </a:solidFill>
+                  </a:tcPr>
+                </a:tc>
+                <a:tc>
+                  <a:txBody>
+                    <a:bodyPr/>
+                    <a:lstStyle/>
+                    <a:p>
+                      <a:pPr>
+                        <a:defRPr sz="720" b="0">
+                          <a:solidFill>
+                            <a:srgbClr val="0D1117"/>
+                          </a:solidFill>
+                          <a:latin typeface="Inter"/>
+                        </a:defRPr>
+                      </a:pPr>
+                      <a:r>
+                        <a:rPr>
+                          <a:latin typeface="Inter"/>
+                        </a:rPr>
+                        <a:t>2026-06-30</a:t>
+                      </a:r>
+                    </a:p>
+                  </a:txBody>
+                  <a:tcPr marL="54864" marR="54864" marT="27432" marB="27432" anchor="ctr">
+                    <a:solidFill>
+                      <a:srgbClr val="FFFFFF"/>
+                    </a:solidFill>
+                  </a:tcPr>
+                </a:tc>
+                <a:tc>
+                  <a:txBody>
+                    <a:bodyPr/>
+                    <a:lstStyle/>
+                    <a:p>
+                      <a:pPr>
+                        <a:defRPr sz="720" b="1">
+                          <a:solidFill>
+                            <a:srgbClr val="C6F432"/>
+                          </a:solidFill>
+                          <a:latin typeface="Inter"/>
+                        </a:defRPr>
+                      </a:pPr>
+                      <a:r>
+                        <a:rPr>
+                          <a:latin typeface="Inter"/>
+                        </a:rPr>
+                        <a:t>● Passed</a:t>
+                      </a:r>
+                    </a:p>
+                  </a:txBody>
+                  <a:tcPr marL="54864" marR="54864" marT="27432" marB="27432" anchor="ctr">
+                    <a:solidFill>
+                      <a:srgbClr val="F5F7F9"/>
+                    </a:solidFill>
+                  </a:tcPr>
+                </a:tc>
+              </a:tr>
+              <a:tr h="670128">
+                <a:tc>
+                  <a:txBody>
+                    <a:bodyPr/>
+                    <a:lstStyle/>
+                    <a:p>
+                      <a:pPr>
+                        <a:defRPr sz="720" b="1">
+                          <a:solidFill>
+                            <a:srgbClr val="0D1117"/>
+                          </a:solidFill>
+                          <a:latin typeface="Inter"/>
+                        </a:defRPr>
+                      </a:pPr>
+                      <a:r>
+                        <a:rPr>
+                          <a:latin typeface="Inter"/>
+                        </a:rPr>
+                        <a:t>S6</a:t>
+                      </a:r>
+                    </a:p>
+                  </a:txBody>
+                  <a:tcPr marL="54864" marR="54864" marT="27432" marB="27432" anchor="ctr">
+                    <a:solidFill>
+                      <a:srgbClr val="F5F7F9"/>
+                    </a:solidFill>
+                  </a:tcPr>
+                </a:tc>
+                <a:tc>
+                  <a:txBody>
+                    <a:bodyPr/>
+                    <a:lstStyle/>
+                    <a:p>
+                      <a:pPr>
+                        <a:defRPr sz="720" b="0">
+                          <a:solidFill>
+                            <a:srgbClr val="0D1117"/>
+                          </a:solidFill>
+                          <a:latin typeface="Inter"/>
+                        </a:defRPr>
+                      </a:pPr>
+                      <a:r>
+                        <a:rPr>
+                          <a:latin typeface="Inter"/>
+                        </a:rPr>
+                        <a:t>Historical return context</a:t>
+                      </a:r>
+                    </a:p>
+                  </a:txBody>
+                  <a:tcPr marL="54864" marR="54864" marT="27432" marB="27432" anchor="ctr">
+                    <a:solidFill>
+                      <a:srgbClr val="F5F7F9"/>
+                    </a:solidFill>
+                  </a:tcPr>
+                </a:tc>
+                <a:tc>
+                  <a:txBody>
+                    <a:bodyPr/>
+                    <a:lstStyle/>
+                    <a:p>
+                      <a:pPr>
+                        <a:defRPr sz="720" b="0">
+                          <a:solidFill>
+                            <a:srgbClr val="0D1117"/>
+                          </a:solidFill>
+                          <a:latin typeface="Inter"/>
+                        </a:defRPr>
+                      </a:pPr>
+                      <a:r>
+                        <a:rPr>
+                          <a:latin typeface="Inter"/>
+                        </a:rPr>
+                        <a:t>get_portfolio_historical_returns</a:t>
+                      </a:r>
+                    </a:p>
+                  </a:txBody>
+                  <a:tcPr marL="54864" marR="54864" marT="27432" marB="27432" anchor="ctr">
+                    <a:solidFill>
+                      <a:srgbClr val="F5F7F9"/>
+                    </a:solidFill>
+                  </a:tcPr>
+                </a:tc>
+                <a:tc>
+                  <a:txBody>
+                    <a:bodyPr/>
+                    <a:lstStyle/>
+                    <a:p>
+                      <a:pPr>
+                        <a:defRPr sz="720" b="0">
+                          <a:solidFill>
+                            <a:srgbClr val="0D1117"/>
+                          </a:solidFill>
+                          <a:latin typeface="Inter"/>
+                        </a:defRPr>
+                      </a:pPr>
+                      <a:r>
+                        <a:rPr>
+                          <a:latin typeface="Inter"/>
+                        </a:rPr>
+                        <a:t>2026-06-30</a:t>
+                      </a:r>
+                    </a:p>
+                  </a:txBody>
+                  <a:tcPr marL="54864" marR="54864" marT="27432" marB="27432" anchor="ctr">
+                    <a:solidFill>
+                      <a:srgbClr val="F5F7F9"/>
+                    </a:solidFill>
+                  </a:tcPr>
+                </a:tc>
+                <a:tc>
+                  <a:txBody>
+                    <a:bodyPr/>
+                    <a:lstStyle/>
+                    <a:p>
+                      <a:pPr>
+                        <a:defRPr sz="720" b="1">
+                          <a:solidFill>
+                            <a:srgbClr val="C6F432"/>
+                          </a:solidFill>
+                          <a:latin typeface="Inter"/>
+                        </a:defRPr>
+                      </a:pPr>
+                      <a:r>
+                        <a:rPr>
+                          <a:latin typeface="Inter"/>
+                        </a:rPr>
+                        <a:t>● Passed</a:t>
+                      </a:r>
+                    </a:p>
+                  </a:txBody>
+                  <a:tcPr marL="54864" marR="54864" marT="27432" marB="27432" anchor="ctr">
+                    <a:solidFill>
+                      <a:srgbClr val="F5F7F9"/>
+                    </a:solidFill>
+                  </a:tcPr>
+                </a:tc>
+              </a:tr>
+            </a:tbl>
+          </a:graphicData>
+        </a:graphic>
+      </p:graphicFrame>
+      <p:sp>
+        <p:nvSpPr>
+          <p:cNvPr id="9" name="TextBox 8"/>
+          <p:cNvSpPr txBox="1"/>
+          <p:nvPr/>
+        </p:nvSpPr>
+        <p:spPr>
+          <a:xfrm>
+            <a:off x="640080" y="6035040"/>
+            <a:ext cx="10908792" cy="164592"/>
+          </a:xfrm>
+          <a:prstGeom prst="rect">
+            <a:avLst/>
+          </a:prstGeom>
+          <a:noFill/>
+        </p:spPr>
+        <p:txBody>
+          <a:bodyPr wrap="none" lIns="9144" rIns="9144" tIns="9144" bIns="9144" anchor="t">
+            <a:spAutoFit/>
+          </a:bodyPr>
+          <a:lstStyle/>
+          <a:p>
+            <a:pPr algn="l">
+              <a:spcAft>
+                <a:spcPts val="0"/>
+              </a:spcAft>
+              <a:defRPr sz="680" b="0">
+                <a:solidFill>
+                  <a:srgbClr val="8A94A1"/>
+                </a:solidFill>
+                <a:latin typeface="Inter"/>
+              </a:defRPr>
+            </a:pPr>
+            <a:r>
+              <a:rPr>
+                <a:latin typeface="Inter"/>
+              </a:rPr>
+              <a:t>Illustrative, Gradient Maintained — demo data, not the client's holdings or managers. All organizations, portfolios, managers and results in this public example are illustrative.</a:t>
+            </a:r>
+          </a:p>
+        </p:txBody>
+      </p:sp>
+      <p:sp>
+        <p:nvSpPr>
+          <p:cNvPr id="10" name="Rectangle 9"/>
+          <p:cNvSpPr/>
+          <p:nvPr/>
+        </p:nvSpPr>
+        <p:spPr>
+          <a:xfrm>
+            <a:off x="640080" y="6446520"/>
+            <a:ext cx="10908792" cy="9144"/>
+          </a:xfrm>
+          <a:prstGeom prst="rect">
+            <a:avLst/>
+          </a:prstGeom>
+          <a:solidFill>
+            <a:srgbClr val="E3E7EC"/>
+          </a:solidFill>
+          <a:ln>
+            <a:solidFill>
+              <a:srgbClr val="E3E7EC"/>
+            </a:solidFill>
+          </a:ln>
+        </p:spPr>
+        <p:style>
+          <a:lnRef idx="1">
+            <a:schemeClr val="accent1"/>
+          </a:lnRef>
+          <a:fillRef idx="3">
+            <a:schemeClr val="accent1"/>
+          </a:fillRef>
+          <a:effectRef idx="2">
+            <a:schemeClr val="accent1"/>
+          </a:effectRef>
+          <a:fontRef idx="minor">
+            <a:schemeClr val="lt1"/>
+          </a:fontRef>
+        </p:style>
+        <p:txBody>
+          <a:bodyPr rtlCol="0" anchor="ctr"/>
+          <a:lstStyle/>
+          <a:p>
+            <a:pPr algn="ctr">
+              <a:defRPr>
+                <a:latin typeface="Inter"/>
+              </a:defRPr>
+            </a:pPr>
+          </a:p>
+        </p:txBody>
+      </p:sp>
+      <p:sp>
+        <p:nvSpPr>
+          <p:cNvPr id="11" name="TextBox 10"/>
+          <p:cNvSpPr txBox="1"/>
+          <p:nvPr/>
+        </p:nvSpPr>
+        <p:spPr>
+          <a:xfrm>
+            <a:off x="640080" y="6501384"/>
+            <a:ext cx="4297680" cy="146304"/>
+          </a:xfrm>
+          <a:prstGeom prst="rect">
+            <a:avLst/>
+          </a:prstGeom>
+          <a:noFill/>
+        </p:spPr>
+        <p:txBody>
+          <a:bodyPr wrap="none" lIns="9144" rIns="9144" tIns="9144" bIns="9144" anchor="t">
+            <a:spAutoFit/>
+          </a:bodyPr>
+          <a:lstStyle/>
+          <a:p>
+            <a:pPr algn="l">
+              <a:spcAft>
+                <a:spcPts val="0"/>
+              </a:spcAft>
+              <a:defRPr sz="650" b="0">
+                <a:solidFill>
+                  <a:srgbClr val="8A94A1"/>
+                </a:solidFill>
+                <a:latin typeface="Inter"/>
+              </a:defRPr>
+            </a:pPr>
+            <a:r>
+              <a:rPr>
+                <a:latin typeface="Inter"/>
+              </a:rPr>
+              <a:t>Sources: S1 · S2 · S3 · S4 · S5 · S6</a:t>
+            </a:r>
+          </a:p>
+        </p:txBody>
+      </p:sp>
+      <p:sp>
+        <p:nvSpPr>
+          <p:cNvPr id="12" name="TextBox 11"/>
+          <p:cNvSpPr txBox="1"/>
+          <p:nvPr/>
+        </p:nvSpPr>
+        <p:spPr>
+          <a:xfrm>
+            <a:off x="4480560" y="6501384"/>
+            <a:ext cx="5303520" cy="146304"/>
+          </a:xfrm>
+          <a:prstGeom prst="rect">
+            <a:avLst/>
+          </a:prstGeom>
+          <a:noFill/>
+        </p:spPr>
+        <p:txBody>
+          <a:bodyPr wrap="none" lIns="9144" rIns="9144" tIns="9144" bIns="9144" anchor="t">
+            <a:spAutoFit/>
+          </a:bodyPr>
+          <a:lstStyle/>
+          <a:p>
+            <a:pPr algn="ctr">
+              <a:spcAft>
+                <a:spcPts val="0"/>
+              </a:spcAft>
+              <a:defRPr sz="650" b="0">
+                <a:solidFill>
+                  <a:srgbClr val="8A94A1"/>
+                </a:solidFill>
+                <a:latin typeface="Inter"/>
+              </a:defRPr>
+            </a:pPr>
+            <a:r>
+              <a:rPr>
+                <a:latin typeface="Inter"/>
+              </a:rPr>
+              <a:t>Confidential — Investment Committee · Data as of 2026-06-30</a:t>
+            </a:r>
+          </a:p>
+        </p:txBody>
+      </p:sp>
+      <p:sp>
+        <p:nvSpPr>
+          <p:cNvPr id="13" name="TextBox 12"/>
+          <p:cNvSpPr txBox="1"/>
+          <p:nvPr/>
+        </p:nvSpPr>
+        <p:spPr>
+          <a:xfrm>
+            <a:off x="10287000" y="6501384"/>
+            <a:ext cx="1261872" cy="146304"/>
+          </a:xfrm>
+          <a:prstGeom prst="rect">
+            <a:avLst/>
+          </a:prstGeom>
+          <a:noFill/>
+        </p:spPr>
+        <p:txBody>
+          <a:bodyPr wrap="none" lIns="9144" rIns="9144" tIns="9144" bIns="9144" anchor="t">
+            <a:spAutoFit/>
+          </a:bodyPr>
+          <a:lstStyle/>
+          <a:p>
+            <a:pPr algn="r">
+              <a:spcAft>
+                <a:spcPts val="0"/>
+              </a:spcAft>
+              <a:defRPr sz="650" b="0">
+                <a:solidFill>
+                  <a:srgbClr val="8A94A1"/>
+                </a:solidFill>
+                <a:latin typeface="Inter"/>
+              </a:defRPr>
+            </a:pPr>
+            <a:r>
+              <a:rPr>
+                <a:latin typeface="Inter"/>
+              </a:rPr>
+              <a:t>24</a:t>
+            </a:r>
+          </a:p>
+        </p:txBody>
+      </p:sp>
+    </p:spTree>
+  </p:cSld>
+  <p:clrMapOvr>
+    <a:masterClrMapping/>
+  </p:clrMapOvr>
+</p:sld>
+</file>
+
+<file path=ppt/slides/slide25.xml><?xml version="1.0" encoding="utf-8"?>
+<p:sld xmlns:a="http://schemas.openxmlformats.org/drawingml/2006/main" xmlns:p="http://schemas.openxmlformats.org/presentationml/2006/main" xmlns:r="http://schemas.openxmlformats.org/officeDocument/2006/relationships">
+  <p:cSld>
+    <p:spTree>
+      <p:nvGrpSpPr>
+        <p:cNvPr id="1" name=""/>
+        <p:cNvGrpSpPr/>
+        <p:nvPr/>
+      </p:nvGrpSpPr>
+      <p:grpSpPr/>
+      <p:sp>
+        <p:nvSpPr>
+          <p:cNvPr id="2" name="Rectangle 1"/>
+          <p:cNvSpPr/>
+          <p:nvPr/>
+        </p:nvSpPr>
+        <p:spPr>
+          <a:xfrm>
+            <a:off x="0" y="0"/>
+            <a:ext cx="12191695" cy="6858000"/>
+          </a:xfrm>
+          <a:prstGeom prst="rect">
+            <a:avLst/>
+          </a:prstGeom>
+          <a:solidFill>
+            <a:srgbClr val="FFFFFF"/>
+          </a:solidFill>
+          <a:ln>
+            <a:solidFill>
+              <a:srgbClr val="FFFFFF"/>
+            </a:solidFill>
+          </a:ln>
+        </p:spPr>
+        <p:style>
+          <a:lnRef idx="1">
+            <a:schemeClr val="accent1"/>
+          </a:lnRef>
+          <a:fillRef idx="3">
+            <a:schemeClr val="accent1"/>
+          </a:fillRef>
+          <a:effectRef idx="2">
+            <a:schemeClr val="accent1"/>
+          </a:effectRef>
+          <a:fontRef idx="minor">
+            <a:schemeClr val="lt1"/>
+          </a:fontRef>
+        </p:style>
+        <p:txBody>
+          <a:bodyPr rtlCol="0" anchor="ctr"/>
+          <a:lstStyle/>
+          <a:p>
+            <a:pPr algn="ctr">
+              <a:defRPr>
+                <a:latin typeface="Inter"/>
+              </a:defRPr>
+            </a:pPr>
+          </a:p>
+        </p:txBody>
+      </p:sp>
+      <p:sp>
+        <p:nvSpPr>
+          <p:cNvPr id="3" name="TextBox 2"/>
+          <p:cNvSpPr txBox="1"/>
+          <p:nvPr/>
+        </p:nvSpPr>
+        <p:spPr>
+          <a:xfrm>
+            <a:off x="640080" y="329184"/>
+            <a:ext cx="9875520" cy="182880"/>
+          </a:xfrm>
+          <a:prstGeom prst="rect">
+            <a:avLst/>
+          </a:prstGeom>
+          <a:noFill/>
+        </p:spPr>
+        <p:txBody>
+          <a:bodyPr wrap="none" lIns="9144" rIns="9144" tIns="9144" bIns="9144" anchor="t">
+            <a:spAutoFit/>
+          </a:bodyPr>
+          <a:lstStyle/>
+          <a:p>
+            <a:pPr algn="l">
+              <a:spcAft>
+                <a:spcPts val="0"/>
+              </a:spcAft>
+              <a:defRPr sz="750" b="1">
+                <a:solidFill>
+                  <a:srgbClr val="4F6B00"/>
+                </a:solidFill>
+                <a:latin typeface="Inter"/>
+              </a:defRPr>
+            </a:pPr>
+            <a:r>
+              <a:rPr>
+                <a:latin typeface="Inter"/>
+              </a:rPr>
+              <a:t>GOVERNED SOURCE INVENTORY</a:t>
+            </a:r>
+          </a:p>
+        </p:txBody>
+      </p:sp>
+      <p:sp>
+        <p:nvSpPr>
+          <p:cNvPr id="4" name="TextBox 3"/>
+          <p:cNvSpPr txBox="1"/>
+          <p:nvPr/>
+        </p:nvSpPr>
+        <p:spPr>
+          <a:xfrm>
+            <a:off x="640080" y="566928"/>
+            <a:ext cx="10058400" cy="530352"/>
+          </a:xfrm>
+          <a:prstGeom prst="rect">
+            <a:avLst/>
+          </a:prstGeom>
+          <a:noFill/>
+        </p:spPr>
+        <p:txBody>
+          <a:bodyPr wrap="none" lIns="9144" rIns="9144" tIns="9144" bIns="9144" anchor="t">
+            <a:spAutoFit/>
+          </a:bodyPr>
+          <a:lstStyle/>
+          <a:p>
+            <a:pPr algn="l">
+              <a:spcAft>
+                <a:spcPts val="0"/>
+              </a:spcAft>
+              <a:defRPr sz="2300" b="1">
+                <a:solidFill>
+                  <a:srgbClr val="0D1117"/>
+                </a:solidFill>
+                <a:latin typeface="Inter"/>
+              </a:defRPr>
+            </a:pPr>
+            <a:r>
+              <a:rPr>
+                <a:latin typeface="Inter"/>
+              </a:rPr>
+              <a:t>Appendix — Sources and methods — continued</a:t>
+            </a:r>
+          </a:p>
+        </p:txBody>
+      </p:sp>
+      <p:sp>
+        <p:nvSpPr>
+          <p:cNvPr id="5" name="Rectangle 4"/>
+          <p:cNvSpPr/>
+          <p:nvPr/>
+        </p:nvSpPr>
+        <p:spPr>
+          <a:xfrm>
+            <a:off x="640080" y="1115568"/>
+            <a:ext cx="10908792" cy="18288"/>
+          </a:xfrm>
+          <a:prstGeom prst="rect">
+            <a:avLst/>
+          </a:prstGeom>
+          <a:solidFill>
+            <a:srgbClr val="0D1117"/>
+          </a:solidFill>
+          <a:ln>
+            <a:solidFill>
+              <a:srgbClr val="0D1117"/>
+            </a:solidFill>
+          </a:ln>
+        </p:spPr>
+        <p:style>
+          <a:lnRef idx="1">
+            <a:schemeClr val="accent1"/>
+          </a:lnRef>
+          <a:fillRef idx="3">
+            <a:schemeClr val="accent1"/>
+          </a:fillRef>
+          <a:effectRef idx="2">
+            <a:schemeClr val="accent1"/>
+          </a:effectRef>
+          <a:fontRef idx="minor">
+            <a:schemeClr val="lt1"/>
+          </a:fontRef>
+        </p:style>
+        <p:txBody>
+          <a:bodyPr rtlCol="0" anchor="ctr"/>
+          <a:lstStyle/>
+          <a:p>
+            <a:pPr algn="ctr">
+              <a:defRPr>
+                <a:latin typeface="Inter"/>
+              </a:defRPr>
+            </a:pPr>
+          </a:p>
+        </p:txBody>
+      </p:sp>
+      <p:sp>
+        <p:nvSpPr>
+          <p:cNvPr id="6" name="Rectangle 5"/>
+          <p:cNvSpPr/>
+          <p:nvPr/>
+        </p:nvSpPr>
+        <p:spPr>
+          <a:xfrm>
+            <a:off x="11018520" y="502920"/>
+            <a:ext cx="530352" cy="393192"/>
+          </a:xfrm>
+          <a:prstGeom prst="rect">
+            <a:avLst/>
+          </a:prstGeom>
+          <a:solidFill>
+            <a:srgbClr val="9AA5B1"/>
+          </a:solidFill>
+          <a:ln>
+            <a:solidFill>
+              <a:srgbClr val="9AA5B1"/>
+            </a:solidFill>
+          </a:ln>
+        </p:spPr>
+        <p:style>
+          <a:lnRef idx="1">
+            <a:schemeClr val="accent1"/>
+          </a:lnRef>
+          <a:fillRef idx="3">
+            <a:schemeClr val="accent1"/>
+          </a:fillRef>
+          <a:effectRef idx="2">
+            <a:schemeClr val="accent1"/>
+          </a:effectRef>
+          <a:fontRef idx="minor">
+            <a:schemeClr val="lt1"/>
+          </a:fontRef>
+        </p:style>
+        <p:txBody>
+          <a:bodyPr rtlCol="0" anchor="ctr"/>
+          <a:lstStyle/>
+          <a:p>
+            <a:pPr algn="ctr">
+              <a:defRPr>
+                <a:latin typeface="Inter"/>
+              </a:defRPr>
+            </a:pPr>
+          </a:p>
+        </p:txBody>
+      </p:sp>
+      <p:sp>
+        <p:nvSpPr>
+          <p:cNvPr id="7" name="TextBox 6"/>
+          <p:cNvSpPr txBox="1"/>
+          <p:nvPr/>
+        </p:nvSpPr>
+        <p:spPr>
+          <a:xfrm>
+            <a:off x="11045952" y="557784"/>
+            <a:ext cx="475488" cy="182880"/>
+          </a:xfrm>
+          <a:prstGeom prst="rect">
+            <a:avLst/>
+          </a:prstGeom>
+          <a:noFill/>
+        </p:spPr>
+        <p:txBody>
+          <a:bodyPr wrap="none" lIns="9144" rIns="9144" tIns="9144" bIns="9144" anchor="t">
+            <a:spAutoFit/>
+          </a:bodyPr>
+          <a:lstStyle/>
+          <a:p>
+            <a:pPr algn="ctr">
+              <a:spcAft>
+                <a:spcPts val="0"/>
+              </a:spcAft>
+              <a:defRPr sz="1000" b="1">
+                <a:solidFill>
+                  <a:srgbClr val="0D1117"/>
+                </a:solidFill>
+                <a:latin typeface="Inter"/>
+              </a:defRPr>
+            </a:pPr>
+            <a:r>
+              <a:rPr>
+                <a:latin typeface="Inter"/>
+              </a:rPr>
+              <a:t>A</a:t>
+            </a:r>
+          </a:p>
+        </p:txBody>
+      </p:sp>
+      <p:sp>
+        <p:nvSpPr>
+          <p:cNvPr id="8" name="TextBox 7"/>
+          <p:cNvSpPr txBox="1"/>
+          <p:nvPr/>
+        </p:nvSpPr>
+        <p:spPr>
+          <a:xfrm>
+            <a:off x="640080" y="1325880"/>
+            <a:ext cx="10908792" cy="201168"/>
+          </a:xfrm>
+          <a:prstGeom prst="rect">
+            <a:avLst/>
+          </a:prstGeom>
+          <a:noFill/>
+        </p:spPr>
+        <p:txBody>
+          <a:bodyPr wrap="none" lIns="9144" rIns="9144" tIns="9144" bIns="9144" anchor="t">
+            <a:spAutoFit/>
+          </a:bodyPr>
+          <a:lstStyle/>
+          <a:p>
+            <a:pPr algn="l">
+              <a:spcAft>
+                <a:spcPts val="0"/>
+              </a:spcAft>
+              <a:defRPr sz="720" b="1">
+                <a:solidFill>
+                  <a:srgbClr val="4A5563"/>
+                </a:solidFill>
+                <a:latin typeface="Inter"/>
+              </a:defRPr>
+            </a:pPr>
+            <a:r>
+              <a:rPr>
+                <a:latin typeface="Inter"/>
+              </a:rPr>
+              <a:t>SOURCE AUDIT TRAIL</a:t>
+            </a:r>
+          </a:p>
+        </p:txBody>
+      </p:sp>
+      <p:graphicFrame>
+        <p:nvGraphicFramePr>
+          <p:cNvPr id="9" name="Table 8"/>
+          <p:cNvGraphicFramePr>
+            <a:graphicFrameLocks noGrp="1"/>
+          </p:cNvGraphicFramePr>
+          <p:nvPr/>
+        </p:nvGraphicFramePr>
+        <p:xfrm>
+          <a:off x="640080" y="1600200"/>
+          <a:ext cx="10908792" cy="4416552"/>
+        </p:xfrm>
+        <a:graphic>
+          <a:graphicData uri="http://schemas.openxmlformats.org/drawingml/2006/table">
+            <a:tbl>
+              <a:tblPr firstRow="1" bandRow="1">
+                <a:tableStyleId>{5C22544A-7EE6-4342-B048-85BDC9FD1C3A}</a:tableStyleId>
+              </a:tblPr>
+              <a:tblGrid>
+                <a:gridCol w="2011680"/>
+                <a:gridCol w="4448556"/>
+                <a:gridCol w="4448556"/>
+              </a:tblGrid>
+              <a:tr h="630936">
+                <a:tc>
+                  <a:txBody>
+                    <a:bodyPr/>
+                    <a:lstStyle/>
+                    <a:p>
+                      <a:pPr>
+                        <a:defRPr sz="750" b="1">
+                          <a:solidFill>
+                            <a:srgbClr val="FFFFFF"/>
+                          </a:solidFill>
+                          <a:latin typeface="Inter"/>
+                        </a:defRPr>
+                      </a:pPr>
+                      <a:r>
+                        <a:rPr>
+                          <a:latin typeface="Inter"/>
+                        </a:rPr>
+                        <a:t>Tag</a:t>
                       </a:r>
                     </a:p>
                   </a:txBody>
@@ -20839,87 +21493,6 @@
                         <a:rPr>
                           <a:latin typeface="Inter"/>
                         </a:rPr>
-                        <a:t>As of</a:t>
-                      </a:r>
-                    </a:p>
-                  </a:txBody>
-                  <a:tcPr marL="54864" marR="54864" marT="27432" marB="27432" anchor="ctr">
-                    <a:solidFill>
-                      <a:srgbClr val="0D1117"/>
-                    </a:solidFill>
-                  </a:tcPr>
-                </a:tc>
-                <a:tc>
-                  <a:txBody>
-                    <a:bodyPr/>
-                    <a:lstStyle/>
-                    <a:p>
-                      <a:pPr>
-                        <a:defRPr sz="750" b="1">
-                          <a:solidFill>
-                            <a:srgbClr val="FFFFFF"/>
-                          </a:solidFill>
-                          <a:latin typeface="Inter"/>
-                        </a:defRPr>
-                      </a:pPr>
-                      <a:r>
-                        <a:rPr>
-                          <a:latin typeface="Inter"/>
-                        </a:rPr>
-                        <a:t>Data scope</a:t>
-                      </a:r>
-                    </a:p>
-                  </a:txBody>
-                  <a:tcPr marL="54864" marR="54864" marT="27432" marB="27432" anchor="ctr">
-                    <a:solidFill>
-                      <a:srgbClr val="0D1117"/>
-                    </a:solidFill>
-                  </a:tcPr>
-                </a:tc>
-                <a:tc>
-                  <a:txBody>
-                    <a:bodyPr/>
-                    <a:lstStyle/>
-                    <a:p>
-                      <a:pPr>
-                        <a:defRPr sz="750" b="1">
-                          <a:solidFill>
-                            <a:srgbClr val="FFFFFF"/>
-                          </a:solidFill>
-                          <a:latin typeface="Inter"/>
-                        </a:defRPr>
-                      </a:pPr>
-                      <a:r>
-                        <a:rPr>
-                          <a:latin typeface="Inter"/>
-                        </a:rPr>
-                        <a:t>Validation</a:t>
-                      </a:r>
-                    </a:p>
-                  </a:txBody>
-                  <a:tcPr marL="54864" marR="54864" marT="27432" marB="27432" anchor="ctr">
-                    <a:solidFill>
-                      <a:srgbClr val="0D1117"/>
-                    </a:solidFill>
-                  </a:tcPr>
-                </a:tc>
-                <a:tc>
-                  <a:txBody>
-                    <a:bodyPr/>
-                    <a:lstStyle/>
-                    <a:p>
-                      <a:pPr>
-                        <a:defRPr sz="750" b="1">
-                          <a:solidFill>
-                            <a:srgbClr val="FFFFFF"/>
-                          </a:solidFill>
-                          <a:latin typeface="Inter"/>
-                        </a:defRPr>
-                      </a:pPr>
-                      <a:r>
-                        <a:rPr>
-                          <a:latin typeface="Inter"/>
-                        </a:rPr>
                         <a:t>Digest</a:t>
                       </a:r>
                     </a:p>
@@ -20931,14 +21504,14 @@
                   </a:tcPr>
                 </a:tc>
               </a:tr>
-              <a:tr h="670124">
+              <a:tr h="630936">
                 <a:tc>
                   <a:txBody>
                     <a:bodyPr/>
                     <a:lstStyle/>
                     <a:p>
                       <a:pPr>
-                        <a:defRPr sz="650" b="1">
+                        <a:defRPr sz="800" b="1">
                           <a:solidFill>
                             <a:srgbClr val="0D1117"/>
                           </a:solidFill>
@@ -20965,88 +21538,7 @@
                     <a:lstStyle/>
                     <a:p>
                       <a:pPr>
-                        <a:defRPr sz="650" b="0">
-                          <a:solidFill>
-                            <a:srgbClr val="0D1117"/>
-                          </a:solidFill>
-                          <a:latin typeface="Inter"/>
-                        </a:defRPr>
-                      </a:pPr>
-                      <a:r>
-                        <a:rPr>
-                          <a:latin typeface="Inter"/>
-                        </a:rPr>
-                        <a:t>Capability gate</a:t>
-                      </a:r>
-                    </a:p>
-                  </a:txBody>
-                  <a:tcPr marL="54864" marR="54864" marT="27432" marB="27432" anchor="ctr">
-                    <a:solidFill>
-                      <a:srgbClr val="FFFFFF"/>
-                    </a:solidFill>
-                  </a:tcPr>
-                </a:tc>
-                <a:tc>
-                  <a:txBody>
-                    <a:bodyPr/>
-                    <a:lstStyle/>
-                    <a:p>
-                      <a:pPr>
-                        <a:defRPr sz="650" b="0">
-                          <a:solidFill>
-                            <a:srgbClr val="0D1117"/>
-                          </a:solidFill>
-                          <a:latin typeface="Inter"/>
-                        </a:defRPr>
-                      </a:pPr>
-                      <a:r>
-                        <a:rPr>
-                          <a:latin typeface="Inter"/>
-                        </a:rPr>
-                        <a:t>gradient_tool</a:t>
-                      </a:r>
-                    </a:p>
-                  </a:txBody>
-                  <a:tcPr marL="54864" marR="54864" marT="27432" marB="27432" anchor="ctr">
-                    <a:solidFill>
-                      <a:srgbClr val="FFFFFF"/>
-                    </a:solidFill>
-                  </a:tcPr>
-                </a:tc>
-                <a:tc>
-                  <a:txBody>
-                    <a:bodyPr/>
-                    <a:lstStyle/>
-                    <a:p>
-                      <a:pPr>
-                        <a:defRPr sz="650" b="0">
-                          <a:solidFill>
-                            <a:srgbClr val="0D1117"/>
-                          </a:solidFill>
-                          <a:latin typeface="Inter"/>
-                        </a:defRPr>
-                      </a:pPr>
-                      <a:r>
-                        <a:rPr>
-                          <a:latin typeface="Inter"/>
-                        </a:rPr>
-                        <a:t>get_gradient_capabilities</a:t>
-                      </a:r>
-                    </a:p>
-                  </a:txBody>
-                  <a:tcPr marL="54864" marR="54864" marT="27432" marB="27432" anchor="ctr">
-                    <a:solidFill>
-                      <a:srgbClr val="FFFFFF"/>
-                    </a:solidFill>
-                  </a:tcPr>
-                </a:tc>
-                <a:tc>
-                  <a:txBody>
-                    <a:bodyPr/>
-                    <a:lstStyle/>
-                    <a:p>
-                      <a:pPr>
-                        <a:defRPr sz="650" b="0">
+                        <a:defRPr sz="800" b="0">
                           <a:solidFill>
                             <a:srgbClr val="0D1117"/>
                           </a:solidFill>
@@ -21073,88 +21565,7 @@
                     <a:lstStyle/>
                     <a:p>
                       <a:pPr>
-                        <a:defRPr sz="650" b="0">
-                          <a:solidFill>
-                            <a:srgbClr val="0D1117"/>
-                          </a:solidFill>
-                          <a:latin typeface="Inter"/>
-                        </a:defRPr>
-                      </a:pPr>
-                      <a:r>
-                        <a:rPr>
-                          <a:latin typeface="Inter"/>
-                        </a:rPr>
-                        <a:t>2026-06-30</a:t>
-                      </a:r>
-                    </a:p>
-                  </a:txBody>
-                  <a:tcPr marL="54864" marR="54864" marT="27432" marB="27432" anchor="ctr">
-                    <a:solidFill>
-                      <a:srgbClr val="FFFFFF"/>
-                    </a:solidFill>
-                  </a:tcPr>
-                </a:tc>
-                <a:tc>
-                  <a:txBody>
-                    <a:bodyPr/>
-                    <a:lstStyle/>
-                    <a:p>
-                      <a:pPr>
-                        <a:defRPr sz="650" b="0">
-                          <a:solidFill>
-                            <a:srgbClr val="0D1117"/>
-                          </a:solidFill>
-                          <a:latin typeface="Inter"/>
-                        </a:defRPr>
-                      </a:pPr>
-                      <a:r>
-                        <a:rPr>
-                          <a:latin typeface="Inter"/>
-                        </a:rPr>
-                        <a:t>Gradient-governed review evidence</a:t>
-                      </a:r>
-                    </a:p>
-                  </a:txBody>
-                  <a:tcPr marL="54864" marR="54864" marT="27432" marB="27432" anchor="ctr">
-                    <a:solidFill>
-                      <a:srgbClr val="FFFFFF"/>
-                    </a:solidFill>
-                  </a:tcPr>
-                </a:tc>
-                <a:tc>
-                  <a:txBody>
-                    <a:bodyPr/>
-                    <a:lstStyle/>
-                    <a:p>
-                      <a:pPr>
-                        <a:defRPr sz="650" b="0">
-                          <a:solidFill>
-                            <a:srgbClr val="0D1117"/>
-                          </a:solidFill>
-                          <a:latin typeface="Inter"/>
-                        </a:defRPr>
-                      </a:pPr>
-                      <a:r>
-                        <a:rPr>
-                          <a:latin typeface="Inter"/>
-                        </a:rPr>
-                        <a:t>passed</a:t>
-                      </a:r>
-                    </a:p>
-                  </a:txBody>
-                  <a:tcPr marL="54864" marR="54864" marT="27432" marB="27432" anchor="ctr">
-                    <a:solidFill>
-                      <a:srgbClr val="FFFFFF"/>
-                    </a:solidFill>
-                  </a:tcPr>
-                </a:tc>
-                <a:tc>
-                  <a:txBody>
-                    <a:bodyPr/>
-                    <a:lstStyle/>
-                    <a:p>
-                      <a:pPr>
-                        <a:defRPr sz="650" b="0">
+                        <a:defRPr sz="800" b="0">
                           <a:solidFill>
                             <a:srgbClr val="0D1117"/>
                           </a:solidFill>
@@ -21176,14 +21587,14 @@
                   </a:tcPr>
                 </a:tc>
               </a:tr>
-              <a:tr h="670124">
+              <a:tr h="630936">
                 <a:tc>
                   <a:txBody>
                     <a:bodyPr/>
                     <a:lstStyle/>
                     <a:p>
                       <a:pPr>
-                        <a:defRPr sz="650" b="1">
+                        <a:defRPr sz="800" b="1">
                           <a:solidFill>
                             <a:srgbClr val="0D1117"/>
                           </a:solidFill>
@@ -21210,88 +21621,7 @@
                     <a:lstStyle/>
                     <a:p>
                       <a:pPr>
-                        <a:defRPr sz="650" b="0">
-                          <a:solidFill>
-                            <a:srgbClr val="0D1117"/>
-                          </a:solidFill>
-                          <a:latin typeface="Inter"/>
-                        </a:defRPr>
-                      </a:pPr>
-                      <a:r>
-                        <a:rPr>
-                          <a:latin typeface="Inter"/>
-                        </a:rPr>
-                        <a:t>Historical attribution</a:t>
-                      </a:r>
-                    </a:p>
-                  </a:txBody>
-                  <a:tcPr marL="54864" marR="54864" marT="27432" marB="27432" anchor="ctr">
-                    <a:solidFill>
-                      <a:srgbClr val="F5F7F9"/>
-                    </a:solidFill>
-                  </a:tcPr>
-                </a:tc>
-                <a:tc>
-                  <a:txBody>
-                    <a:bodyPr/>
-                    <a:lstStyle/>
-                    <a:p>
-                      <a:pPr>
-                        <a:defRPr sz="650" b="0">
-                          <a:solidFill>
-                            <a:srgbClr val="0D1117"/>
-                          </a:solidFill>
-                          <a:latin typeface="Inter"/>
-                        </a:defRPr>
-                      </a:pPr>
-                      <a:r>
-                        <a:rPr>
-                          <a:latin typeface="Inter"/>
-                        </a:rPr>
-                        <a:t>gradient_tool</a:t>
-                      </a:r>
-                    </a:p>
-                  </a:txBody>
-                  <a:tcPr marL="54864" marR="54864" marT="27432" marB="27432" anchor="ctr">
-                    <a:solidFill>
-                      <a:srgbClr val="F5F7F9"/>
-                    </a:solidFill>
-                  </a:tcPr>
-                </a:tc>
-                <a:tc>
-                  <a:txBody>
-                    <a:bodyPr/>
-                    <a:lstStyle/>
-                    <a:p>
-                      <a:pPr>
-                        <a:defRPr sz="650" b="0">
-                          <a:solidFill>
-                            <a:srgbClr val="0D1117"/>
-                          </a:solidFill>
-                          <a:latin typeface="Inter"/>
-                        </a:defRPr>
-                      </a:pPr>
-                      <a:r>
-                        <a:rPr>
-                          <a:latin typeface="Inter"/>
-                        </a:rPr>
-                        <a:t>get_portfolio_attribution</a:t>
-                      </a:r>
-                    </a:p>
-                  </a:txBody>
-                  <a:tcPr marL="54864" marR="54864" marT="27432" marB="27432" anchor="ctr">
-                    <a:solidFill>
-                      <a:srgbClr val="F5F7F9"/>
-                    </a:solidFill>
-                  </a:tcPr>
-                </a:tc>
-                <a:tc>
-                  <a:txBody>
-                    <a:bodyPr/>
-                    <a:lstStyle/>
-                    <a:p>
-                      <a:pPr>
-                        <a:defRPr sz="650" b="0">
+                        <a:defRPr sz="800" b="0">
                           <a:solidFill>
                             <a:srgbClr val="0D1117"/>
                           </a:solidFill>
@@ -21318,88 +21648,7 @@
                     <a:lstStyle/>
                     <a:p>
                       <a:pPr>
-                        <a:defRPr sz="650" b="0">
-                          <a:solidFill>
-                            <a:srgbClr val="0D1117"/>
-                          </a:solidFill>
-                          <a:latin typeface="Inter"/>
-                        </a:defRPr>
-                      </a:pPr>
-                      <a:r>
-                        <a:rPr>
-                          <a:latin typeface="Inter"/>
-                        </a:rPr>
-                        <a:t>2026-06-30</a:t>
-                      </a:r>
-                    </a:p>
-                  </a:txBody>
-                  <a:tcPr marL="54864" marR="54864" marT="27432" marB="27432" anchor="ctr">
-                    <a:solidFill>
-                      <a:srgbClr val="F5F7F9"/>
-                    </a:solidFill>
-                  </a:tcPr>
-                </a:tc>
-                <a:tc>
-                  <a:txBody>
-                    <a:bodyPr/>
-                    <a:lstStyle/>
-                    <a:p>
-                      <a:pPr>
-                        <a:defRPr sz="650" b="0">
-                          <a:solidFill>
-                            <a:srgbClr val="0D1117"/>
-                          </a:solidFill>
-                          <a:latin typeface="Inter"/>
-                        </a:defRPr>
-                      </a:pPr>
-                      <a:r>
-                        <a:rPr>
-                          <a:latin typeface="Inter"/>
-                        </a:rPr>
-                        <a:t>Gradient-governed review evidence</a:t>
-                      </a:r>
-                    </a:p>
-                  </a:txBody>
-                  <a:tcPr marL="54864" marR="54864" marT="27432" marB="27432" anchor="ctr">
-                    <a:solidFill>
-                      <a:srgbClr val="F5F7F9"/>
-                    </a:solidFill>
-                  </a:tcPr>
-                </a:tc>
-                <a:tc>
-                  <a:txBody>
-                    <a:bodyPr/>
-                    <a:lstStyle/>
-                    <a:p>
-                      <a:pPr>
-                        <a:defRPr sz="650" b="0">
-                          <a:solidFill>
-                            <a:srgbClr val="0D1117"/>
-                          </a:solidFill>
-                          <a:latin typeface="Inter"/>
-                        </a:defRPr>
-                      </a:pPr>
-                      <a:r>
-                        <a:rPr>
-                          <a:latin typeface="Inter"/>
-                        </a:rPr>
-                        <a:t>passed</a:t>
-                      </a:r>
-                    </a:p>
-                  </a:txBody>
-                  <a:tcPr marL="54864" marR="54864" marT="27432" marB="27432" anchor="ctr">
-                    <a:solidFill>
-                      <a:srgbClr val="F5F7F9"/>
-                    </a:solidFill>
-                  </a:tcPr>
-                </a:tc>
-                <a:tc>
-                  <a:txBody>
-                    <a:bodyPr/>
-                    <a:lstStyle/>
-                    <a:p>
-                      <a:pPr>
-                        <a:defRPr sz="650" b="0">
+                        <a:defRPr sz="800" b="0">
                           <a:solidFill>
                             <a:srgbClr val="0D1117"/>
                           </a:solidFill>
@@ -21421,14 +21670,14 @@
                   </a:tcPr>
                 </a:tc>
               </a:tr>
-              <a:tr h="670124">
+              <a:tr h="630936">
                 <a:tc>
                   <a:txBody>
                     <a:bodyPr/>
                     <a:lstStyle/>
                     <a:p>
                       <a:pPr>
-                        <a:defRPr sz="650" b="1">
+                        <a:defRPr sz="800" b="1">
                           <a:solidFill>
                             <a:srgbClr val="0D1117"/>
                           </a:solidFill>
@@ -21455,88 +21704,7 @@
                     <a:lstStyle/>
                     <a:p>
                       <a:pPr>
-                        <a:defRPr sz="650" b="0">
-                          <a:solidFill>
-                            <a:srgbClr val="0D1117"/>
-                          </a:solidFill>
-                          <a:latin typeface="Inter"/>
-                        </a:defRPr>
-                      </a:pPr>
-                      <a:r>
-                        <a:rPr>
-                          <a:latin typeface="Inter"/>
-                        </a:rPr>
-                        <a:t>Ex ante attribution</a:t>
-                      </a:r>
-                    </a:p>
-                  </a:txBody>
-                  <a:tcPr marL="54864" marR="54864" marT="27432" marB="27432" anchor="ctr">
-                    <a:solidFill>
-                      <a:srgbClr val="FFFFFF"/>
-                    </a:solidFill>
-                  </a:tcPr>
-                </a:tc>
-                <a:tc>
-                  <a:txBody>
-                    <a:bodyPr/>
-                    <a:lstStyle/>
-                    <a:p>
-                      <a:pPr>
-                        <a:defRPr sz="650" b="0">
-                          <a:solidFill>
-                            <a:srgbClr val="0D1117"/>
-                          </a:solidFill>
-                          <a:latin typeface="Inter"/>
-                        </a:defRPr>
-                      </a:pPr>
-                      <a:r>
-                        <a:rPr>
-                          <a:latin typeface="Inter"/>
-                        </a:rPr>
-                        <a:t>gradient_tool</a:t>
-                      </a:r>
-                    </a:p>
-                  </a:txBody>
-                  <a:tcPr marL="54864" marR="54864" marT="27432" marB="27432" anchor="ctr">
-                    <a:solidFill>
-                      <a:srgbClr val="FFFFFF"/>
-                    </a:solidFill>
-                  </a:tcPr>
-                </a:tc>
-                <a:tc>
-                  <a:txBody>
-                    <a:bodyPr/>
-                    <a:lstStyle/>
-                    <a:p>
-                      <a:pPr>
-                        <a:defRPr sz="650" b="0">
-                          <a:solidFill>
-                            <a:srgbClr val="0D1117"/>
-                          </a:solidFill>
-                          <a:latin typeface="Inter"/>
-                        </a:defRPr>
-                      </a:pPr>
-                      <a:r>
-                        <a:rPr>
-                          <a:latin typeface="Inter"/>
-                        </a:rPr>
-                        <a:t>get_portfolio_ex_ante_attribution</a:t>
-                      </a:r>
-                    </a:p>
-                  </a:txBody>
-                  <a:tcPr marL="54864" marR="54864" marT="27432" marB="27432" anchor="ctr">
-                    <a:solidFill>
-                      <a:srgbClr val="FFFFFF"/>
-                    </a:solidFill>
-                  </a:tcPr>
-                </a:tc>
-                <a:tc>
-                  <a:txBody>
-                    <a:bodyPr/>
-                    <a:lstStyle/>
-                    <a:p>
-                      <a:pPr>
-                        <a:defRPr sz="650" b="0">
+                        <a:defRPr sz="800" b="0">
                           <a:solidFill>
                             <a:srgbClr val="0D1117"/>
                           </a:solidFill>
@@ -21563,88 +21731,7 @@
                     <a:lstStyle/>
                     <a:p>
                       <a:pPr>
-                        <a:defRPr sz="650" b="0">
-                          <a:solidFill>
-                            <a:srgbClr val="0D1117"/>
-                          </a:solidFill>
-                          <a:latin typeface="Inter"/>
-                        </a:defRPr>
-                      </a:pPr>
-                      <a:r>
-                        <a:rPr>
-                          <a:latin typeface="Inter"/>
-                        </a:rPr>
-                        <a:t>2026-06-30</a:t>
-                      </a:r>
-                    </a:p>
-                  </a:txBody>
-                  <a:tcPr marL="54864" marR="54864" marT="27432" marB="27432" anchor="ctr">
-                    <a:solidFill>
-                      <a:srgbClr val="FFFFFF"/>
-                    </a:solidFill>
-                  </a:tcPr>
-                </a:tc>
-                <a:tc>
-                  <a:txBody>
-                    <a:bodyPr/>
-                    <a:lstStyle/>
-                    <a:p>
-                      <a:pPr>
-                        <a:defRPr sz="650" b="0">
-                          <a:solidFill>
-                            <a:srgbClr val="0D1117"/>
-                          </a:solidFill>
-                          <a:latin typeface="Inter"/>
-                        </a:defRPr>
-                      </a:pPr>
-                      <a:r>
-                        <a:rPr>
-                          <a:latin typeface="Inter"/>
-                        </a:rPr>
-                        <a:t>Gradient-governed review evidence</a:t>
-                      </a:r>
-                    </a:p>
-                  </a:txBody>
-                  <a:tcPr marL="54864" marR="54864" marT="27432" marB="27432" anchor="ctr">
-                    <a:solidFill>
-                      <a:srgbClr val="FFFFFF"/>
-                    </a:solidFill>
-                  </a:tcPr>
-                </a:tc>
-                <a:tc>
-                  <a:txBody>
-                    <a:bodyPr/>
-                    <a:lstStyle/>
-                    <a:p>
-                      <a:pPr>
-                        <a:defRPr sz="650" b="0">
-                          <a:solidFill>
-                            <a:srgbClr val="0D1117"/>
-                          </a:solidFill>
-                          <a:latin typeface="Inter"/>
-                        </a:defRPr>
-                      </a:pPr>
-                      <a:r>
-                        <a:rPr>
-                          <a:latin typeface="Inter"/>
-                        </a:rPr>
-                        <a:t>passed</a:t>
-                      </a:r>
-                    </a:p>
-                  </a:txBody>
-                  <a:tcPr marL="54864" marR="54864" marT="27432" marB="27432" anchor="ctr">
-                    <a:solidFill>
-                      <a:srgbClr val="FFFFFF"/>
-                    </a:solidFill>
-                  </a:tcPr>
-                </a:tc>
-                <a:tc>
-                  <a:txBody>
-                    <a:bodyPr/>
-                    <a:lstStyle/>
-                    <a:p>
-                      <a:pPr>
-                        <a:defRPr sz="650" b="0">
+                        <a:defRPr sz="800" b="0">
                           <a:solidFill>
                             <a:srgbClr val="0D1117"/>
                           </a:solidFill>
@@ -21666,14 +21753,14 @@
                   </a:tcPr>
                 </a:tc>
               </a:tr>
-              <a:tr h="670124">
+              <a:tr h="630936">
                 <a:tc>
                   <a:txBody>
                     <a:bodyPr/>
                     <a:lstStyle/>
                     <a:p>
                       <a:pPr>
-                        <a:defRPr sz="650" b="1">
+                        <a:defRPr sz="800" b="1">
                           <a:solidFill>
                             <a:srgbClr val="0D1117"/>
                           </a:solidFill>
@@ -21700,88 +21787,7 @@
                     <a:lstStyle/>
                     <a:p>
                       <a:pPr>
-                        <a:defRPr sz="650" b="0">
-                          <a:solidFill>
-                            <a:srgbClr val="0D1117"/>
-                          </a:solidFill>
-                          <a:latin typeface="Inter"/>
-                        </a:defRPr>
-                      </a:pPr>
-                      <a:r>
-                        <a:rPr>
-                          <a:latin typeface="Inter"/>
-                        </a:rPr>
-                        <a:t>Simulated attribution</a:t>
-                      </a:r>
-                    </a:p>
-                  </a:txBody>
-                  <a:tcPr marL="54864" marR="54864" marT="27432" marB="27432" anchor="ctr">
-                    <a:solidFill>
-                      <a:srgbClr val="F5F7F9"/>
-                    </a:solidFill>
-                  </a:tcPr>
-                </a:tc>
-                <a:tc>
-                  <a:txBody>
-                    <a:bodyPr/>
-                    <a:lstStyle/>
-                    <a:p>
-                      <a:pPr>
-                        <a:defRPr sz="650" b="0">
-                          <a:solidFill>
-                            <a:srgbClr val="0D1117"/>
-                          </a:solidFill>
-                          <a:latin typeface="Inter"/>
-                        </a:defRPr>
-                      </a:pPr>
-                      <a:r>
-                        <a:rPr>
-                          <a:latin typeface="Inter"/>
-                        </a:rPr>
-                        <a:t>gradient_tool</a:t>
-                      </a:r>
-                    </a:p>
-                  </a:txBody>
-                  <a:tcPr marL="54864" marR="54864" marT="27432" marB="27432" anchor="ctr">
-                    <a:solidFill>
-                      <a:srgbClr val="F5F7F9"/>
-                    </a:solidFill>
-                  </a:tcPr>
-                </a:tc>
-                <a:tc>
-                  <a:txBody>
-                    <a:bodyPr/>
-                    <a:lstStyle/>
-                    <a:p>
-                      <a:pPr>
-                        <a:defRPr sz="650" b="0">
-                          <a:solidFill>
-                            <a:srgbClr val="0D1117"/>
-                          </a:solidFill>
-                          <a:latin typeface="Inter"/>
-                        </a:defRPr>
-                      </a:pPr>
-                      <a:r>
-                        <a:rPr>
-                          <a:latin typeface="Inter"/>
-                        </a:rPr>
-                        <a:t>get_gradient_capabilities</a:t>
-                      </a:r>
-                    </a:p>
-                  </a:txBody>
-                  <a:tcPr marL="54864" marR="54864" marT="27432" marB="27432" anchor="ctr">
-                    <a:solidFill>
-                      <a:srgbClr val="F5F7F9"/>
-                    </a:solidFill>
-                  </a:tcPr>
-                </a:tc>
-                <a:tc>
-                  <a:txBody>
-                    <a:bodyPr/>
-                    <a:lstStyle/>
-                    <a:p>
-                      <a:pPr>
-                        <a:defRPr sz="650" b="0">
+                        <a:defRPr sz="800" b="0">
                           <a:solidFill>
                             <a:srgbClr val="0D1117"/>
                           </a:solidFill>
@@ -21808,88 +21814,7 @@
                     <a:lstStyle/>
                     <a:p>
                       <a:pPr>
-                        <a:defRPr sz="650" b="0">
-                          <a:solidFill>
-                            <a:srgbClr val="0D1117"/>
-                          </a:solidFill>
-                          <a:latin typeface="Inter"/>
-                        </a:defRPr>
-                      </a:pPr>
-                      <a:r>
-                        <a:rPr>
-                          <a:latin typeface="Inter"/>
-                        </a:rPr>
-                        <a:t>2026-06-30</a:t>
-                      </a:r>
-                    </a:p>
-                  </a:txBody>
-                  <a:tcPr marL="54864" marR="54864" marT="27432" marB="27432" anchor="ctr">
-                    <a:solidFill>
-                      <a:srgbClr val="F5F7F9"/>
-                    </a:solidFill>
-                  </a:tcPr>
-                </a:tc>
-                <a:tc>
-                  <a:txBody>
-                    <a:bodyPr/>
-                    <a:lstStyle/>
-                    <a:p>
-                      <a:pPr>
-                        <a:defRPr sz="650" b="0">
-                          <a:solidFill>
-                            <a:srgbClr val="0D1117"/>
-                          </a:solidFill>
-                          <a:latin typeface="Inter"/>
-                        </a:defRPr>
-                      </a:pPr>
-                      <a:r>
-                        <a:rPr>
-                          <a:latin typeface="Inter"/>
-                        </a:rPr>
-                        <a:t>Gradient-governed review evidence</a:t>
-                      </a:r>
-                    </a:p>
-                  </a:txBody>
-                  <a:tcPr marL="54864" marR="54864" marT="27432" marB="27432" anchor="ctr">
-                    <a:solidFill>
-                      <a:srgbClr val="F5F7F9"/>
-                    </a:solidFill>
-                  </a:tcPr>
-                </a:tc>
-                <a:tc>
-                  <a:txBody>
-                    <a:bodyPr/>
-                    <a:lstStyle/>
-                    <a:p>
-                      <a:pPr>
-                        <a:defRPr sz="650" b="0">
-                          <a:solidFill>
-                            <a:srgbClr val="0D1117"/>
-                          </a:solidFill>
-                          <a:latin typeface="Inter"/>
-                        </a:defRPr>
-                      </a:pPr>
-                      <a:r>
-                        <a:rPr>
-                          <a:latin typeface="Inter"/>
-                        </a:rPr>
-                        <a:t>passed</a:t>
-                      </a:r>
-                    </a:p>
-                  </a:txBody>
-                  <a:tcPr marL="54864" marR="54864" marT="27432" marB="27432" anchor="ctr">
-                    <a:solidFill>
-                      <a:srgbClr val="F5F7F9"/>
-                    </a:solidFill>
-                  </a:tcPr>
-                </a:tc>
-                <a:tc>
-                  <a:txBody>
-                    <a:bodyPr/>
-                    <a:lstStyle/>
-                    <a:p>
-                      <a:pPr>
-                        <a:defRPr sz="650" b="0">
+                        <a:defRPr sz="800" b="0">
                           <a:solidFill>
                             <a:srgbClr val="0D1117"/>
                           </a:solidFill>
@@ -21911,14 +21836,14 @@
                   </a:tcPr>
                 </a:tc>
               </a:tr>
-              <a:tr h="670124">
+              <a:tr h="630936">
                 <a:tc>
                   <a:txBody>
                     <a:bodyPr/>
                     <a:lstStyle/>
                     <a:p>
                       <a:pPr>
-                        <a:defRPr sz="650" b="1">
+                        <a:defRPr sz="800" b="1">
                           <a:solidFill>
                             <a:srgbClr val="0D1117"/>
                           </a:solidFill>
@@ -21945,88 +21870,7 @@
                     <a:lstStyle/>
                     <a:p>
                       <a:pPr>
-                        <a:defRPr sz="650" b="0">
-                          <a:solidFill>
-                            <a:srgbClr val="0D1117"/>
-                          </a:solidFill>
-                          <a:latin typeface="Inter"/>
-                        </a:defRPr>
-                      </a:pPr>
-                      <a:r>
-                        <a:rPr>
-                          <a:latin typeface="Inter"/>
-                        </a:rPr>
-                        <a:t>Cross-lane comparison</a:t>
-                      </a:r>
-                    </a:p>
-                  </a:txBody>
-                  <a:tcPr marL="54864" marR="54864" marT="27432" marB="27432" anchor="ctr">
-                    <a:solidFill>
-                      <a:srgbClr val="FFFFFF"/>
-                    </a:solidFill>
-                  </a:tcPr>
-                </a:tc>
-                <a:tc>
-                  <a:txBody>
-                    <a:bodyPr/>
-                    <a:lstStyle/>
-                    <a:p>
-                      <a:pPr>
-                        <a:defRPr sz="650" b="0">
-                          <a:solidFill>
-                            <a:srgbClr val="0D1117"/>
-                          </a:solidFill>
-                          <a:latin typeface="Inter"/>
-                        </a:defRPr>
-                      </a:pPr>
-                      <a:r>
-                        <a:rPr>
-                          <a:latin typeface="Inter"/>
-                        </a:rPr>
-                        <a:t>gradient_tool</a:t>
-                      </a:r>
-                    </a:p>
-                  </a:txBody>
-                  <a:tcPr marL="54864" marR="54864" marT="27432" marB="27432" anchor="ctr">
-                    <a:solidFill>
-                      <a:srgbClr val="FFFFFF"/>
-                    </a:solidFill>
-                  </a:tcPr>
-                </a:tc>
-                <a:tc>
-                  <a:txBody>
-                    <a:bodyPr/>
-                    <a:lstStyle/>
-                    <a:p>
-                      <a:pPr>
-                        <a:defRPr sz="650" b="0">
-                          <a:solidFill>
-                            <a:srgbClr val="0D1117"/>
-                          </a:solidFill>
-                          <a:latin typeface="Inter"/>
-                        </a:defRPr>
-                      </a:pPr>
-                      <a:r>
-                        <a:rPr>
-                          <a:latin typeface="Inter"/>
-                        </a:rPr>
-                        <a:t>get_gradient_capabilities</a:t>
-                      </a:r>
-                    </a:p>
-                  </a:txBody>
-                  <a:tcPr marL="54864" marR="54864" marT="27432" marB="27432" anchor="ctr">
-                    <a:solidFill>
-                      <a:srgbClr val="FFFFFF"/>
-                    </a:solidFill>
-                  </a:tcPr>
-                </a:tc>
-                <a:tc>
-                  <a:txBody>
-                    <a:bodyPr/>
-                    <a:lstStyle/>
-                    <a:p>
-                      <a:pPr>
-                        <a:defRPr sz="650" b="0">
+                        <a:defRPr sz="800" b="0">
                           <a:solidFill>
                             <a:srgbClr val="0D1117"/>
                           </a:solidFill>
@@ -22053,88 +21897,7 @@
                     <a:lstStyle/>
                     <a:p>
                       <a:pPr>
-                        <a:defRPr sz="650" b="0">
-                          <a:solidFill>
-                            <a:srgbClr val="0D1117"/>
-                          </a:solidFill>
-                          <a:latin typeface="Inter"/>
-                        </a:defRPr>
-                      </a:pPr>
-                      <a:r>
-                        <a:rPr>
-                          <a:latin typeface="Inter"/>
-                        </a:rPr>
-                        <a:t>2026-06-30</a:t>
-                      </a:r>
-                    </a:p>
-                  </a:txBody>
-                  <a:tcPr marL="54864" marR="54864" marT="27432" marB="27432" anchor="ctr">
-                    <a:solidFill>
-                      <a:srgbClr val="FFFFFF"/>
-                    </a:solidFill>
-                  </a:tcPr>
-                </a:tc>
-                <a:tc>
-                  <a:txBody>
-                    <a:bodyPr/>
-                    <a:lstStyle/>
-                    <a:p>
-                      <a:pPr>
-                        <a:defRPr sz="650" b="0">
-                          <a:solidFill>
-                            <a:srgbClr val="0D1117"/>
-                          </a:solidFill>
-                          <a:latin typeface="Inter"/>
-                        </a:defRPr>
-                      </a:pPr>
-                      <a:r>
-                        <a:rPr>
-                          <a:latin typeface="Inter"/>
-                        </a:rPr>
-                        <a:t>Gradient-governed review evidence</a:t>
-                      </a:r>
-                    </a:p>
-                  </a:txBody>
-                  <a:tcPr marL="54864" marR="54864" marT="27432" marB="27432" anchor="ctr">
-                    <a:solidFill>
-                      <a:srgbClr val="FFFFFF"/>
-                    </a:solidFill>
-                  </a:tcPr>
-                </a:tc>
-                <a:tc>
-                  <a:txBody>
-                    <a:bodyPr/>
-                    <a:lstStyle/>
-                    <a:p>
-                      <a:pPr>
-                        <a:defRPr sz="650" b="0">
-                          <a:solidFill>
-                            <a:srgbClr val="0D1117"/>
-                          </a:solidFill>
-                          <a:latin typeface="Inter"/>
-                        </a:defRPr>
-                      </a:pPr>
-                      <a:r>
-                        <a:rPr>
-                          <a:latin typeface="Inter"/>
-                        </a:rPr>
-                        <a:t>passed</a:t>
-                      </a:r>
-                    </a:p>
-                  </a:txBody>
-                  <a:tcPr marL="54864" marR="54864" marT="27432" marB="27432" anchor="ctr">
-                    <a:solidFill>
-                      <a:srgbClr val="FFFFFF"/>
-                    </a:solidFill>
-                  </a:tcPr>
-                </a:tc>
-                <a:tc>
-                  <a:txBody>
-                    <a:bodyPr/>
-                    <a:lstStyle/>
-                    <a:p>
-                      <a:pPr>
-                        <a:defRPr sz="650" b="0">
+                        <a:defRPr sz="800" b="0">
                           <a:solidFill>
                             <a:srgbClr val="0D1117"/>
                           </a:solidFill>
@@ -22156,14 +21919,14 @@
                   </a:tcPr>
                 </a:tc>
               </a:tr>
-              <a:tr h="670128">
+              <a:tr h="630936">
                 <a:tc>
                   <a:txBody>
                     <a:bodyPr/>
                     <a:lstStyle/>
                     <a:p>
                       <a:pPr>
-                        <a:defRPr sz="650" b="1">
+                        <a:defRPr sz="800" b="1">
                           <a:solidFill>
                             <a:srgbClr val="0D1117"/>
                           </a:solidFill>
@@ -22190,88 +21953,7 @@
                     <a:lstStyle/>
                     <a:p>
                       <a:pPr>
-                        <a:defRPr sz="650" b="0">
-                          <a:solidFill>
-                            <a:srgbClr val="0D1117"/>
-                          </a:solidFill>
-                          <a:latin typeface="Inter"/>
-                        </a:defRPr>
-                      </a:pPr>
-                      <a:r>
-                        <a:rPr>
-                          <a:latin typeface="Inter"/>
-                        </a:rPr>
-                        <a:t>Historical return context</a:t>
-                      </a:r>
-                    </a:p>
-                  </a:txBody>
-                  <a:tcPr marL="54864" marR="54864" marT="27432" marB="27432" anchor="ctr">
-                    <a:solidFill>
-                      <a:srgbClr val="F5F7F9"/>
-                    </a:solidFill>
-                  </a:tcPr>
-                </a:tc>
-                <a:tc>
-                  <a:txBody>
-                    <a:bodyPr/>
-                    <a:lstStyle/>
-                    <a:p>
-                      <a:pPr>
-                        <a:defRPr sz="650" b="0">
-                          <a:solidFill>
-                            <a:srgbClr val="0D1117"/>
-                          </a:solidFill>
-                          <a:latin typeface="Inter"/>
-                        </a:defRPr>
-                      </a:pPr>
-                      <a:r>
-                        <a:rPr>
-                          <a:latin typeface="Inter"/>
-                        </a:rPr>
-                        <a:t>gradient_tool</a:t>
-                      </a:r>
-                    </a:p>
-                  </a:txBody>
-                  <a:tcPr marL="54864" marR="54864" marT="27432" marB="27432" anchor="ctr">
-                    <a:solidFill>
-                      <a:srgbClr val="F5F7F9"/>
-                    </a:solidFill>
-                  </a:tcPr>
-                </a:tc>
-                <a:tc>
-                  <a:txBody>
-                    <a:bodyPr/>
-                    <a:lstStyle/>
-                    <a:p>
-                      <a:pPr>
-                        <a:defRPr sz="650" b="0">
-                          <a:solidFill>
-                            <a:srgbClr val="0D1117"/>
-                          </a:solidFill>
-                          <a:latin typeface="Inter"/>
-                        </a:defRPr>
-                      </a:pPr>
-                      <a:r>
-                        <a:rPr>
-                          <a:latin typeface="Inter"/>
-                        </a:rPr>
-                        <a:t>get_portfolio_historical_returns</a:t>
-                      </a:r>
-                    </a:p>
-                  </a:txBody>
-                  <a:tcPr marL="54864" marR="54864" marT="27432" marB="27432" anchor="ctr">
-                    <a:solidFill>
-                      <a:srgbClr val="F5F7F9"/>
-                    </a:solidFill>
-                  </a:tcPr>
-                </a:tc>
-                <a:tc>
-                  <a:txBody>
-                    <a:bodyPr/>
-                    <a:lstStyle/>
-                    <a:p>
-                      <a:pPr>
-                        <a:defRPr sz="650" b="0">
+                        <a:defRPr sz="800" b="0">
                           <a:solidFill>
                             <a:srgbClr val="0D1117"/>
                           </a:solidFill>
@@ -22298,88 +21980,7 @@
                     <a:lstStyle/>
                     <a:p>
                       <a:pPr>
-                        <a:defRPr sz="650" b="0">
-                          <a:solidFill>
-                            <a:srgbClr val="0D1117"/>
-                          </a:solidFill>
-                          <a:latin typeface="Inter"/>
-                        </a:defRPr>
-                      </a:pPr>
-                      <a:r>
-                        <a:rPr>
-                          <a:latin typeface="Inter"/>
-                        </a:rPr>
-                        <a:t>2026-06-30</a:t>
-                      </a:r>
-                    </a:p>
-                  </a:txBody>
-                  <a:tcPr marL="54864" marR="54864" marT="27432" marB="27432" anchor="ctr">
-                    <a:solidFill>
-                      <a:srgbClr val="F5F7F9"/>
-                    </a:solidFill>
-                  </a:tcPr>
-                </a:tc>
-                <a:tc>
-                  <a:txBody>
-                    <a:bodyPr/>
-                    <a:lstStyle/>
-                    <a:p>
-                      <a:pPr>
-                        <a:defRPr sz="650" b="0">
-                          <a:solidFill>
-                            <a:srgbClr val="0D1117"/>
-                          </a:solidFill>
-                          <a:latin typeface="Inter"/>
-                        </a:defRPr>
-                      </a:pPr>
-                      <a:r>
-                        <a:rPr>
-                          <a:latin typeface="Inter"/>
-                        </a:rPr>
-                        <a:t>Gradient-governed review evidence</a:t>
-                      </a:r>
-                    </a:p>
-                  </a:txBody>
-                  <a:tcPr marL="54864" marR="54864" marT="27432" marB="27432" anchor="ctr">
-                    <a:solidFill>
-                      <a:srgbClr val="F5F7F9"/>
-                    </a:solidFill>
-                  </a:tcPr>
-                </a:tc>
-                <a:tc>
-                  <a:txBody>
-                    <a:bodyPr/>
-                    <a:lstStyle/>
-                    <a:p>
-                      <a:pPr>
-                        <a:defRPr sz="650" b="0">
-                          <a:solidFill>
-                            <a:srgbClr val="0D1117"/>
-                          </a:solidFill>
-                          <a:latin typeface="Inter"/>
-                        </a:defRPr>
-                      </a:pPr>
-                      <a:r>
-                        <a:rPr>
-                          <a:latin typeface="Inter"/>
-                        </a:rPr>
-                        <a:t>passed</a:t>
-                      </a:r>
-                    </a:p>
-                  </a:txBody>
-                  <a:tcPr marL="54864" marR="54864" marT="27432" marB="27432" anchor="ctr">
-                    <a:solidFill>
-                      <a:srgbClr val="F5F7F9"/>
-                    </a:solidFill>
-                  </a:tcPr>
-                </a:tc>
-                <a:tc>
-                  <a:txBody>
-                    <a:bodyPr/>
-                    <a:lstStyle/>
-                    <a:p>
-                      <a:pPr>
-                        <a:defRPr sz="650" b="0">
+                        <a:defRPr sz="800" b="0">
                           <a:solidFill>
                             <a:srgbClr val="0D1117"/>
                           </a:solidFill>
@@ -22442,7 +22043,7 @@
               <a:rPr>
                 <a:latin typeface="Inter"/>
               </a:rPr>
-              <a:t>Illustrative, Gradient Maintained — demo data, not the client's holdings or managers. All organizations, portfolios, managers and results in this public example are illustrative.</a:t>
+              <a:t>Data scope for every source: Illustrative sample data. Each digest is the SHA-256 fingerprint of the exact data the report used.</a:t>
             </a:r>
           </a:p>
         </p:txBody>
@@ -22617,7 +22218,7 @@
               <a:rPr>
                 <a:latin typeface="Inter"/>
               </a:rPr>
-              <a:t>24</a:t>
+              <a:t>25</a:t>
             </a:r>
           </a:p>
         </p:txBody>
@@ -22630,7 +22231,7 @@
 </p:sld>
 </file>
 
-<file path=ppt/slides/slide25.xml><?xml version="1.0" encoding="utf-8"?>
+<file path=ppt/slides/slide26.xml><?xml version="1.0" encoding="utf-8"?>
 <p:sld xmlns:a="http://schemas.openxmlformats.org/drawingml/2006/main" xmlns:p="http://schemas.openxmlformats.org/presentationml/2006/main" xmlns:r="http://schemas.openxmlformats.org/officeDocument/2006/relationships">
   <p:cSld>
     <p:spTree>
@@ -22698,7 +22299,7 @@
         <p:spPr>
           <a:xfrm>
             <a:off x="640080" y="329184"/>
-            <a:ext cx="5303520" cy="182880"/>
+            <a:ext cx="9875520" cy="182880"/>
           </a:xfrm>
           <a:prstGeom prst="rect">
             <a:avLst/>
@@ -22739,48 +22340,6 @@
         </p:nvSpPr>
         <p:spPr>
           <a:xfrm>
-            <a:off x="5897880" y="310896"/>
-            <a:ext cx="4800600" cy="256032"/>
-          </a:xfrm>
-          <a:prstGeom prst="rect">
-            <a:avLst/>
-          </a:prstGeom>
-          <a:noFill/>
-        </p:spPr>
-        <p:txBody>
-          <a:bodyPr wrap="none" lIns="9144" rIns="9144" tIns="9144" bIns="9144" anchor="t">
-            <a:spAutoFit/>
-          </a:bodyPr>
-          <a:lstStyle/>
-          <a:p>
-            <a:pPr algn="r">
-              <a:spcAft>
-                <a:spcPts val="0"/>
-              </a:spcAft>
-              <a:defRPr sz="680" b="1">
-                <a:solidFill>
-                  <a:srgbClr val="4F6B00"/>
-                </a:solidFill>
-                <a:latin typeface="Inter"/>
-              </a:defRPr>
-            </a:pPr>
-            <a:r>
-              <a:rPr>
-                <a:latin typeface="Inter"/>
-              </a:rPr>
-              <a:t>Illustrative, Gradient Maintained — demo data, not the client's holdings or managers</a:t>
-            </a:r>
-          </a:p>
-        </p:txBody>
-      </p:sp>
-      <p:sp>
-        <p:nvSpPr>
-          <p:cNvPr id="5" name="TextBox 4"/>
-          <p:cNvSpPr txBox="1"/>
-          <p:nvPr/>
-        </p:nvSpPr>
-        <p:spPr>
-          <a:xfrm>
             <a:off x="640080" y="566928"/>
             <a:ext cx="10058400" cy="530352"/>
           </a:xfrm>
@@ -22817,7 +22376,7 @@
       </p:sp>
       <p:sp>
         <p:nvSpPr>
-          <p:cNvPr id="6" name="Rectangle 5"/>
+          <p:cNvPr id="5" name="Rectangle 4"/>
           <p:cNvSpPr/>
           <p:nvPr/>
         </p:nvSpPr>
@@ -22866,7 +22425,7 @@
       </p:sp>
       <p:sp>
         <p:nvSpPr>
-          <p:cNvPr id="7" name="Rectangle 6"/>
+          <p:cNvPr id="6" name="Rectangle 5"/>
           <p:cNvSpPr/>
           <p:nvPr/>
         </p:nvSpPr>
@@ -22915,7 +22474,7 @@
       </p:sp>
       <p:sp>
         <p:nvSpPr>
-          <p:cNvPr id="8" name="TextBox 7"/>
+          <p:cNvPr id="7" name="TextBox 6"/>
           <p:cNvSpPr txBox="1"/>
           <p:nvPr/>
         </p:nvSpPr>
@@ -22957,7 +22516,7 @@
       </p:sp>
       <p:sp>
         <p:nvSpPr>
-          <p:cNvPr id="9" name="TextBox 8"/>
+          <p:cNvPr id="8" name="TextBox 7"/>
           <p:cNvSpPr txBox="1"/>
           <p:nvPr/>
         </p:nvSpPr>
@@ -22999,7 +22558,7 @@
       </p:sp>
       <p:graphicFrame>
         <p:nvGraphicFramePr>
-          <p:cNvPr id="10" name="Table 9"/>
+          <p:cNvPr id="9" name="Table 8"/>
           <p:cNvGraphicFramePr>
             <a:graphicFrameLocks noGrp="1"/>
           </p:cNvGraphicFramePr>
@@ -23007,7 +22566,7 @@
         </p:nvGraphicFramePr>
         <p:xfrm>
           <a:off x="640080" y="1600200"/>
-          <a:ext cx="10908792" cy="1896736"/>
+          <a:ext cx="10908792" cy="3178254"/>
         </p:xfrm>
         <a:graphic>
           <a:graphicData uri="http://schemas.openxmlformats.org/drawingml/2006/table">
@@ -23022,7 +22581,7 @@
                 <a:gridCol w="2224278"/>
                 <a:gridCol w="2224278"/>
               </a:tblGrid>
-              <a:tr h="270962">
+              <a:tr h="454036">
                 <a:tc>
                   <a:txBody>
                     <a:bodyPr/>
@@ -23159,7 +22718,7 @@
                   </a:tcPr>
                 </a:tc>
               </a:tr>
-              <a:tr h="270962">
+              <a:tr h="454036">
                 <a:tc>
                   <a:txBody>
                     <a:bodyPr/>
@@ -23296,7 +22855,7 @@
                   </a:tcPr>
                 </a:tc>
               </a:tr>
-              <a:tr h="270962">
+              <a:tr h="454036">
                 <a:tc>
                   <a:txBody>
                     <a:bodyPr/>
@@ -23433,7 +22992,7 @@
                   </a:tcPr>
                 </a:tc>
               </a:tr>
-              <a:tr h="270962">
+              <a:tr h="454036">
                 <a:tc>
                   <a:txBody>
                     <a:bodyPr/>
@@ -23570,7 +23129,7 @@
                   </a:tcPr>
                 </a:tc>
               </a:tr>
-              <a:tr h="270962">
+              <a:tr h="454036">
                 <a:tc>
                   <a:txBody>
                     <a:bodyPr/>
@@ -23707,7 +23266,7 @@
                   </a:tcPr>
                 </a:tc>
               </a:tr>
-              <a:tr h="270962">
+              <a:tr h="454036">
                 <a:tc>
                   <a:txBody>
                     <a:bodyPr/>
@@ -23844,7 +23403,7 @@
                   </a:tcPr>
                 </a:tc>
               </a:tr>
-              <a:tr h="270964">
+              <a:tr h="454038">
                 <a:tc>
                   <a:txBody>
                     <a:bodyPr/>
@@ -23987,13 +23546,13 @@
       </p:graphicFrame>
       <p:sp>
         <p:nvSpPr>
-          <p:cNvPr id="11" name="TextBox 10"/>
+          <p:cNvPr id="10" name="TextBox 9"/>
           <p:cNvSpPr txBox="1"/>
           <p:nvPr/>
         </p:nvSpPr>
         <p:spPr>
           <a:xfrm>
-            <a:off x="640080" y="3515224"/>
+            <a:off x="640080" y="4796742"/>
             <a:ext cx="10908792" cy="164592"/>
           </a:xfrm>
           <a:prstGeom prst="rect">
@@ -24029,14 +23588,14 @@
       </p:sp>
       <p:sp>
         <p:nvSpPr>
-          <p:cNvPr id="12" name="Rectangle 11"/>
+          <p:cNvPr id="11" name="Rectangle 10"/>
           <p:cNvSpPr/>
           <p:nvPr/>
         </p:nvSpPr>
         <p:spPr>
           <a:xfrm>
-            <a:off x="640080" y="3807832"/>
-            <a:ext cx="10908792" cy="1148418"/>
+            <a:off x="640080" y="5089350"/>
+            <a:ext cx="10908792" cy="1128569"/>
           </a:xfrm>
           <a:prstGeom prst="rect">
             <a:avLst/>
@@ -24078,14 +23637,14 @@
       </p:sp>
       <p:sp>
         <p:nvSpPr>
-          <p:cNvPr id="13" name="Rectangle 12"/>
+          <p:cNvPr id="12" name="Rectangle 11"/>
           <p:cNvSpPr/>
           <p:nvPr/>
         </p:nvSpPr>
         <p:spPr>
           <a:xfrm>
-            <a:off x="640080" y="3807832"/>
-            <a:ext cx="54864" cy="1148418"/>
+            <a:off x="640080" y="5089350"/>
+            <a:ext cx="54864" cy="1128569"/>
           </a:xfrm>
           <a:prstGeom prst="rect">
             <a:avLst/>
@@ -24127,13 +23686,13 @@
       </p:sp>
       <p:sp>
         <p:nvSpPr>
-          <p:cNvPr id="14" name="TextBox 13"/>
+          <p:cNvPr id="13" name="TextBox 12"/>
           <p:cNvSpPr txBox="1"/>
           <p:nvPr/>
         </p:nvSpPr>
         <p:spPr>
           <a:xfrm>
-            <a:off x="804671" y="3917560"/>
+            <a:off x="804671" y="5199078"/>
             <a:ext cx="10616184" cy="228600"/>
           </a:xfrm>
           <a:prstGeom prst="rect">
@@ -24169,14 +23728,14 @@
       </p:sp>
       <p:sp>
         <p:nvSpPr>
-          <p:cNvPr id="15" name="TextBox 14"/>
+          <p:cNvPr id="14" name="TextBox 13"/>
           <p:cNvSpPr txBox="1"/>
           <p:nvPr/>
         </p:nvSpPr>
         <p:spPr>
           <a:xfrm>
-            <a:off x="804671" y="4201024"/>
-            <a:ext cx="10616184" cy="663786"/>
+            <a:off x="804671" y="5482542"/>
+            <a:ext cx="10616184" cy="643937"/>
           </a:xfrm>
           <a:prstGeom prst="rect">
             <a:avLst/>
@@ -24204,196 +23763,14 @@
               <a:rPr>
                 <a:latin typeface="Inter"/>
               </a:rPr>
-              <a:t>Each lane remains on its returned method, period or horizon, benchmark role, parent cohort and calculation currency. Historical evidence is realized, ex ante evidence is expected, and simulated evidence is scenario-based. Values are displayed without local reconciliation, attribution arithmetic or substitutions [S1][S2][S3].</a:t>
+              <a:t>Each lane keeps its own method, period, benchmark role and currency, and values are shown as returned; cross-lane results appear only where the comparison tool returned them [S1][S2][S3].</a:t>
             </a:r>
           </a:p>
         </p:txBody>
       </p:sp>
       <p:sp>
         <p:nvSpPr>
-          <p:cNvPr id="16" name="Rectangle 15"/>
-          <p:cNvSpPr/>
-          <p:nvPr/>
-        </p:nvSpPr>
-        <p:spPr>
-          <a:xfrm>
-            <a:off x="640080" y="5065978"/>
-            <a:ext cx="10908792" cy="1151941"/>
-          </a:xfrm>
-          <a:prstGeom prst="rect">
-            <a:avLst/>
-          </a:prstGeom>
-          <a:solidFill>
-            <a:srgbClr val="F5F7F9"/>
-          </a:solidFill>
-          <a:ln>
-            <a:solidFill>
-              <a:srgbClr val="E3E7EC"/>
-            </a:solidFill>
-          </a:ln>
-        </p:spPr>
-        <p:style>
-          <a:lnRef idx="1">
-            <a:schemeClr val="accent1"/>
-          </a:lnRef>
-          <a:fillRef idx="3">
-            <a:schemeClr val="accent1"/>
-          </a:fillRef>
-          <a:effectRef idx="2">
-            <a:schemeClr val="accent1"/>
-          </a:effectRef>
-          <a:fontRef idx="minor">
-            <a:schemeClr val="lt1"/>
-          </a:fontRef>
-        </p:style>
-        <p:txBody>
-          <a:bodyPr rtlCol="0" anchor="ctr"/>
-          <a:lstStyle/>
-          <a:p>
-            <a:pPr algn="ctr">
-              <a:defRPr>
-                <a:latin typeface="Inter"/>
-              </a:defRPr>
-            </a:pPr>
-          </a:p>
-        </p:txBody>
-      </p:sp>
-      <p:sp>
-        <p:nvSpPr>
-          <p:cNvPr id="17" name="Rectangle 16"/>
-          <p:cNvSpPr/>
-          <p:nvPr/>
-        </p:nvSpPr>
-        <p:spPr>
-          <a:xfrm>
-            <a:off x="640080" y="5065978"/>
-            <a:ext cx="54864" cy="1151941"/>
-          </a:xfrm>
-          <a:prstGeom prst="rect">
-            <a:avLst/>
-          </a:prstGeom>
-          <a:solidFill>
-            <a:srgbClr val="0D1117"/>
-          </a:solidFill>
-          <a:ln>
-            <a:solidFill>
-              <a:srgbClr val="0D1117"/>
-            </a:solidFill>
-          </a:ln>
-        </p:spPr>
-        <p:style>
-          <a:lnRef idx="1">
-            <a:schemeClr val="accent1"/>
-          </a:lnRef>
-          <a:fillRef idx="3">
-            <a:schemeClr val="accent1"/>
-          </a:fillRef>
-          <a:effectRef idx="2">
-            <a:schemeClr val="accent1"/>
-          </a:effectRef>
-          <a:fontRef idx="minor">
-            <a:schemeClr val="lt1"/>
-          </a:fontRef>
-        </p:style>
-        <p:txBody>
-          <a:bodyPr rtlCol="0" anchor="ctr"/>
-          <a:lstStyle/>
-          <a:p>
-            <a:pPr algn="ctr">
-              <a:defRPr>
-                <a:latin typeface="Inter"/>
-              </a:defRPr>
-            </a:pPr>
-          </a:p>
-        </p:txBody>
-      </p:sp>
-      <p:sp>
-        <p:nvSpPr>
-          <p:cNvPr id="18" name="TextBox 17"/>
-          <p:cNvSpPr txBox="1"/>
-          <p:nvPr/>
-        </p:nvSpPr>
-        <p:spPr>
-          <a:xfrm>
-            <a:off x="804671" y="5175706"/>
-            <a:ext cx="10616184" cy="228600"/>
-          </a:xfrm>
-          <a:prstGeom prst="rect">
-            <a:avLst/>
-          </a:prstGeom>
-          <a:noFill/>
-        </p:spPr>
-        <p:txBody>
-          <a:bodyPr wrap="none" lIns="9144" rIns="9144" tIns="9144" bIns="9144" anchor="t">
-            <a:spAutoFit/>
-          </a:bodyPr>
-          <a:lstStyle/>
-          <a:p>
-            <a:pPr algn="l">
-              <a:spcAft>
-                <a:spcPts val="0"/>
-              </a:spcAft>
-              <a:defRPr sz="1000" b="1">
-                <a:solidFill>
-                  <a:srgbClr val="0D1117"/>
-                </a:solidFill>
-                <a:latin typeface="Inter"/>
-              </a:defRPr>
-            </a:pPr>
-            <a:r>
-              <a:rPr>
-                <a:latin typeface="Inter"/>
-              </a:rPr>
-              <a:t>Comparison boundary</a:t>
-            </a:r>
-          </a:p>
-        </p:txBody>
-      </p:sp>
-      <p:sp>
-        <p:nvSpPr>
-          <p:cNvPr id="19" name="TextBox 18"/>
-          <p:cNvSpPr txBox="1"/>
-          <p:nvPr/>
-        </p:nvSpPr>
-        <p:spPr>
-          <a:xfrm>
-            <a:off x="804671" y="5459170"/>
-            <a:ext cx="10616184" cy="667309"/>
-          </a:xfrm>
-          <a:prstGeom prst="rect">
-            <a:avLst/>
-          </a:prstGeom>
-          <a:noFill/>
-        </p:spPr>
-        <p:txBody>
-          <a:bodyPr wrap="none" lIns="9144" rIns="9144" tIns="9144" bIns="9144" anchor="t">
-            <a:spAutoFit/>
-          </a:bodyPr>
-          <a:lstStyle/>
-          <a:p>
-            <a:pPr algn="l">
-              <a:spcAft>
-                <a:spcPts val="0"/>
-              </a:spcAft>
-              <a:defRPr sz="950" b="0">
-                <a:solidFill>
-                  <a:srgbClr val="4A5563"/>
-                </a:solidFill>
-                <a:latin typeface="Inter"/>
-              </a:defRPr>
-            </a:pPr>
-            <a:r>
-              <a:rPr>
-                <a:latin typeface="Inter"/>
-              </a:rPr>
-              <a:t>Cross-lane differences, concentration, overlap, reconciliation and persistence are reported only when the governed comparison capability returns them. Capability absence is an evidence limitation, not a zero value or a failed lane. Request IDs, diagnostics, residuals and coverage remain attached to their source payloads [S1].</a:t>
-            </a:r>
-          </a:p>
-        </p:txBody>
-      </p:sp>
-      <p:sp>
-        <p:nvSpPr>
-          <p:cNvPr id="20" name="Rectangle 19"/>
+          <p:cNvPr id="15" name="Rectangle 14"/>
           <p:cNvSpPr/>
           <p:nvPr/>
         </p:nvSpPr>
@@ -24442,7 +23819,7 @@
       </p:sp>
       <p:sp>
         <p:nvSpPr>
-          <p:cNvPr id="21" name="TextBox 20"/>
+          <p:cNvPr id="16" name="TextBox 15"/>
           <p:cNvSpPr txBox="1"/>
           <p:nvPr/>
         </p:nvSpPr>
@@ -24484,7 +23861,7 @@
       </p:sp>
       <p:sp>
         <p:nvSpPr>
-          <p:cNvPr id="22" name="TextBox 21"/>
+          <p:cNvPr id="17" name="TextBox 16"/>
           <p:cNvSpPr txBox="1"/>
           <p:nvPr/>
         </p:nvSpPr>
@@ -24526,7 +23903,7 @@
       </p:sp>
       <p:sp>
         <p:nvSpPr>
-          <p:cNvPr id="23" name="TextBox 22"/>
+          <p:cNvPr id="18" name="TextBox 17"/>
           <p:cNvSpPr txBox="1"/>
           <p:nvPr/>
         </p:nvSpPr>
@@ -24561,7 +23938,7 @@
               <a:rPr>
                 <a:latin typeface="Inter"/>
               </a:rPr>
-              <a:t>25</a:t>
+              <a:t>26</a:t>
             </a:r>
           </a:p>
         </p:txBody>
@@ -24642,7 +24019,7 @@
         <p:spPr>
           <a:xfrm>
             <a:off x="640080" y="329184"/>
-            <a:ext cx="5303520" cy="182880"/>
+            <a:ext cx="9875520" cy="182880"/>
           </a:xfrm>
           <a:prstGeom prst="rect">
             <a:avLst/>
@@ -24683,48 +24060,6 @@
         </p:nvSpPr>
         <p:spPr>
           <a:xfrm>
-            <a:off x="5897880" y="310896"/>
-            <a:ext cx="4800600" cy="256032"/>
-          </a:xfrm>
-          <a:prstGeom prst="rect">
-            <a:avLst/>
-          </a:prstGeom>
-          <a:noFill/>
-        </p:spPr>
-        <p:txBody>
-          <a:bodyPr wrap="none" lIns="9144" rIns="9144" tIns="9144" bIns="9144" anchor="t">
-            <a:spAutoFit/>
-          </a:bodyPr>
-          <a:lstStyle/>
-          <a:p>
-            <a:pPr algn="r">
-              <a:spcAft>
-                <a:spcPts val="0"/>
-              </a:spcAft>
-              <a:defRPr sz="680" b="1">
-                <a:solidFill>
-                  <a:srgbClr val="4F6B00"/>
-                </a:solidFill>
-                <a:latin typeface="Inter"/>
-              </a:defRPr>
-            </a:pPr>
-            <a:r>
-              <a:rPr>
-                <a:latin typeface="Inter"/>
-              </a:rPr>
-              <a:t>Illustrative, Gradient Maintained — demo data, not the client's holdings or managers</a:t>
-            </a:r>
-          </a:p>
-        </p:txBody>
-      </p:sp>
-      <p:sp>
-        <p:nvSpPr>
-          <p:cNvPr id="5" name="TextBox 4"/>
-          <p:cNvSpPr txBox="1"/>
-          <p:nvPr/>
-        </p:nvSpPr>
-        <p:spPr>
-          <a:xfrm>
             <a:off x="640080" y="566928"/>
             <a:ext cx="10058400" cy="530352"/>
           </a:xfrm>
@@ -24761,7 +24096,7 @@
       </p:sp>
       <p:sp>
         <p:nvSpPr>
-          <p:cNvPr id="6" name="Rectangle 5"/>
+          <p:cNvPr id="5" name="Rectangle 4"/>
           <p:cNvSpPr/>
           <p:nvPr/>
         </p:nvSpPr>
@@ -24810,7 +24145,7 @@
       </p:sp>
       <p:sp>
         <p:nvSpPr>
-          <p:cNvPr id="7" name="Rectangle 6"/>
+          <p:cNvPr id="6" name="Rectangle 5"/>
           <p:cNvSpPr/>
           <p:nvPr/>
         </p:nvSpPr>
@@ -24859,7 +24194,7 @@
       </p:sp>
       <p:sp>
         <p:nvSpPr>
-          <p:cNvPr id="8" name="TextBox 7"/>
+          <p:cNvPr id="7" name="TextBox 6"/>
           <p:cNvSpPr txBox="1"/>
           <p:nvPr/>
         </p:nvSpPr>
@@ -24901,7 +24236,7 @@
       </p:sp>
       <p:sp>
         <p:nvSpPr>
-          <p:cNvPr id="9" name="TextBox 8"/>
+          <p:cNvPr id="8" name="TextBox 7"/>
           <p:cNvSpPr txBox="1"/>
           <p:nvPr/>
         </p:nvSpPr>
@@ -24943,7 +24278,7 @@
       </p:sp>
       <p:graphicFrame>
         <p:nvGraphicFramePr>
-          <p:cNvPr id="10" name="Chart 9"/>
+          <p:cNvPr id="9" name="Chart 8"/>
           <p:cNvGraphicFramePr>
             <a:graphicFrameLocks noGrp="1"/>
           </p:cNvGraphicFramePr>
@@ -24961,7 +24296,7 @@
       </p:graphicFrame>
       <p:sp>
         <p:nvSpPr>
-          <p:cNvPr id="11" name="Rectangle 10"/>
+          <p:cNvPr id="10" name="Rectangle 9"/>
           <p:cNvSpPr/>
           <p:nvPr/>
         </p:nvSpPr>
@@ -25010,7 +24345,7 @@
       </p:sp>
       <p:sp>
         <p:nvSpPr>
-          <p:cNvPr id="12" name="TextBox 11"/>
+          <p:cNvPr id="11" name="TextBox 10"/>
           <p:cNvSpPr txBox="1"/>
           <p:nvPr/>
         </p:nvSpPr>
@@ -25052,7 +24387,7 @@
       </p:sp>
       <p:sp>
         <p:nvSpPr>
-          <p:cNvPr id="13" name="TextBox 12"/>
+          <p:cNvPr id="12" name="TextBox 11"/>
           <p:cNvSpPr txBox="1"/>
           <p:nvPr/>
         </p:nvSpPr>
@@ -25094,7 +24429,7 @@
       </p:sp>
       <p:sp>
         <p:nvSpPr>
-          <p:cNvPr id="14" name="TextBox 13"/>
+          <p:cNvPr id="13" name="TextBox 12"/>
           <p:cNvSpPr txBox="1"/>
           <p:nvPr/>
         </p:nvSpPr>
@@ -25210,7 +24545,7 @@
         <p:spPr>
           <a:xfrm>
             <a:off x="640080" y="329184"/>
-            <a:ext cx="5303520" cy="182880"/>
+            <a:ext cx="9875520" cy="182880"/>
           </a:xfrm>
           <a:prstGeom prst="rect">
             <a:avLst/>
@@ -25251,48 +24586,6 @@
         </p:nvSpPr>
         <p:spPr>
           <a:xfrm>
-            <a:off x="5897880" y="310896"/>
-            <a:ext cx="4800600" cy="256032"/>
-          </a:xfrm>
-          <a:prstGeom prst="rect">
-            <a:avLst/>
-          </a:prstGeom>
-          <a:noFill/>
-        </p:spPr>
-        <p:txBody>
-          <a:bodyPr wrap="none" lIns="9144" rIns="9144" tIns="9144" bIns="9144" anchor="t">
-            <a:spAutoFit/>
-          </a:bodyPr>
-          <a:lstStyle/>
-          <a:p>
-            <a:pPr algn="r">
-              <a:spcAft>
-                <a:spcPts val="0"/>
-              </a:spcAft>
-              <a:defRPr sz="680" b="1">
-                <a:solidFill>
-                  <a:srgbClr val="4F6B00"/>
-                </a:solidFill>
-                <a:latin typeface="Inter"/>
-              </a:defRPr>
-            </a:pPr>
-            <a:r>
-              <a:rPr>
-                <a:latin typeface="Inter"/>
-              </a:rPr>
-              <a:t>Illustrative, Gradient Maintained — demo data, not the client's holdings or managers</a:t>
-            </a:r>
-          </a:p>
-        </p:txBody>
-      </p:sp>
-      <p:sp>
-        <p:nvSpPr>
-          <p:cNvPr id="5" name="TextBox 4"/>
-          <p:cNvSpPr txBox="1"/>
-          <p:nvPr/>
-        </p:nvSpPr>
-        <p:spPr>
-          <a:xfrm>
             <a:off x="640080" y="566928"/>
             <a:ext cx="10058400" cy="530352"/>
           </a:xfrm>
@@ -25329,7 +24622,7 @@
       </p:sp>
       <p:sp>
         <p:nvSpPr>
-          <p:cNvPr id="6" name="Rectangle 5"/>
+          <p:cNvPr id="5" name="Rectangle 4"/>
           <p:cNvSpPr/>
           <p:nvPr/>
         </p:nvSpPr>
@@ -25378,7 +24671,7 @@
       </p:sp>
       <p:sp>
         <p:nvSpPr>
-          <p:cNvPr id="7" name="Rectangle 6"/>
+          <p:cNvPr id="6" name="Rectangle 5"/>
           <p:cNvSpPr/>
           <p:nvPr/>
         </p:nvSpPr>
@@ -25427,7 +24720,7 @@
       </p:sp>
       <p:sp>
         <p:nvSpPr>
-          <p:cNvPr id="8" name="TextBox 7"/>
+          <p:cNvPr id="7" name="TextBox 6"/>
           <p:cNvSpPr txBox="1"/>
           <p:nvPr/>
         </p:nvSpPr>
@@ -25469,7 +24762,7 @@
       </p:sp>
       <p:sp>
         <p:nvSpPr>
-          <p:cNvPr id="9" name="TextBox 8"/>
+          <p:cNvPr id="8" name="TextBox 7"/>
           <p:cNvSpPr txBox="1"/>
           <p:nvPr/>
         </p:nvSpPr>
@@ -25511,7 +24804,7 @@
       </p:sp>
       <p:graphicFrame>
         <p:nvGraphicFramePr>
-          <p:cNvPr id="10" name="Chart 9"/>
+          <p:cNvPr id="9" name="Chart 8"/>
           <p:cNvGraphicFramePr>
             <a:graphicFrameLocks noGrp="1"/>
           </p:cNvGraphicFramePr>
@@ -25529,7 +24822,7 @@
       </p:graphicFrame>
       <p:sp>
         <p:nvSpPr>
-          <p:cNvPr id="11" name="Rectangle 10"/>
+          <p:cNvPr id="10" name="Rectangle 9"/>
           <p:cNvSpPr/>
           <p:nvPr/>
         </p:nvSpPr>
@@ -25578,7 +24871,7 @@
       </p:sp>
       <p:sp>
         <p:nvSpPr>
-          <p:cNvPr id="12" name="TextBox 11"/>
+          <p:cNvPr id="11" name="TextBox 10"/>
           <p:cNvSpPr txBox="1"/>
           <p:nvPr/>
         </p:nvSpPr>
@@ -25620,7 +24913,7 @@
       </p:sp>
       <p:sp>
         <p:nvSpPr>
-          <p:cNvPr id="13" name="TextBox 12"/>
+          <p:cNvPr id="12" name="TextBox 11"/>
           <p:cNvSpPr txBox="1"/>
           <p:nvPr/>
         </p:nvSpPr>
@@ -25662,7 +24955,7 @@
       </p:sp>
       <p:sp>
         <p:nvSpPr>
-          <p:cNvPr id="14" name="TextBox 13"/>
+          <p:cNvPr id="13" name="TextBox 12"/>
           <p:cNvSpPr txBox="1"/>
           <p:nvPr/>
         </p:nvSpPr>
@@ -25778,7 +25071,7 @@
         <p:spPr>
           <a:xfrm>
             <a:off x="640080" y="329184"/>
-            <a:ext cx="5303520" cy="182880"/>
+            <a:ext cx="9875520" cy="182880"/>
           </a:xfrm>
           <a:prstGeom prst="rect">
             <a:avLst/>
@@ -25819,48 +25112,6 @@
         </p:nvSpPr>
         <p:spPr>
           <a:xfrm>
-            <a:off x="5897880" y="310896"/>
-            <a:ext cx="4800600" cy="256032"/>
-          </a:xfrm>
-          <a:prstGeom prst="rect">
-            <a:avLst/>
-          </a:prstGeom>
-          <a:noFill/>
-        </p:spPr>
-        <p:txBody>
-          <a:bodyPr wrap="none" lIns="9144" rIns="9144" tIns="9144" bIns="9144" anchor="t">
-            <a:spAutoFit/>
-          </a:bodyPr>
-          <a:lstStyle/>
-          <a:p>
-            <a:pPr algn="r">
-              <a:spcAft>
-                <a:spcPts val="0"/>
-              </a:spcAft>
-              <a:defRPr sz="680" b="1">
-                <a:solidFill>
-                  <a:srgbClr val="4F6B00"/>
-                </a:solidFill>
-                <a:latin typeface="Inter"/>
-              </a:defRPr>
-            </a:pPr>
-            <a:r>
-              <a:rPr>
-                <a:latin typeface="Inter"/>
-              </a:rPr>
-              <a:t>Illustrative, Gradient Maintained — demo data, not the client's holdings or managers</a:t>
-            </a:r>
-          </a:p>
-        </p:txBody>
-      </p:sp>
-      <p:sp>
-        <p:nvSpPr>
-          <p:cNvPr id="5" name="TextBox 4"/>
-          <p:cNvSpPr txBox="1"/>
-          <p:nvPr/>
-        </p:nvSpPr>
-        <p:spPr>
-          <a:xfrm>
             <a:off x="640080" y="566928"/>
             <a:ext cx="10058400" cy="530352"/>
           </a:xfrm>
@@ -25897,7 +25148,7 @@
       </p:sp>
       <p:sp>
         <p:nvSpPr>
-          <p:cNvPr id="6" name="Rectangle 5"/>
+          <p:cNvPr id="5" name="Rectangle 4"/>
           <p:cNvSpPr/>
           <p:nvPr/>
         </p:nvSpPr>
@@ -25946,7 +25197,7 @@
       </p:sp>
       <p:sp>
         <p:nvSpPr>
-          <p:cNvPr id="7" name="Rectangle 6"/>
+          <p:cNvPr id="6" name="Rectangle 5"/>
           <p:cNvSpPr/>
           <p:nvPr/>
         </p:nvSpPr>
@@ -25995,7 +25246,7 @@
       </p:sp>
       <p:sp>
         <p:nvSpPr>
-          <p:cNvPr id="8" name="TextBox 7"/>
+          <p:cNvPr id="7" name="TextBox 6"/>
           <p:cNvSpPr txBox="1"/>
           <p:nvPr/>
         </p:nvSpPr>
@@ -26037,7 +25288,7 @@
       </p:sp>
       <p:sp>
         <p:nvSpPr>
-          <p:cNvPr id="9" name="Rectangle 8"/>
+          <p:cNvPr id="8" name="Rectangle 7"/>
           <p:cNvSpPr/>
           <p:nvPr/>
         </p:nvSpPr>
@@ -26086,7 +25337,7 @@
       </p:sp>
       <p:sp>
         <p:nvSpPr>
-          <p:cNvPr id="10" name="Rectangle 9"/>
+          <p:cNvPr id="9" name="Rectangle 8"/>
           <p:cNvSpPr/>
           <p:nvPr/>
         </p:nvSpPr>
@@ -26135,7 +25386,7 @@
       </p:sp>
       <p:sp>
         <p:nvSpPr>
-          <p:cNvPr id="11" name="TextBox 10"/>
+          <p:cNvPr id="10" name="TextBox 9"/>
           <p:cNvSpPr txBox="1"/>
           <p:nvPr/>
         </p:nvSpPr>
@@ -26177,7 +25428,7 @@
       </p:sp>
       <p:sp>
         <p:nvSpPr>
-          <p:cNvPr id="12" name="TextBox 11"/>
+          <p:cNvPr id="11" name="TextBox 10"/>
           <p:cNvSpPr txBox="1"/>
           <p:nvPr/>
         </p:nvSpPr>
@@ -26219,7 +25470,7 @@
       </p:sp>
       <p:sp>
         <p:nvSpPr>
-          <p:cNvPr id="13" name="Rectangle 12"/>
+          <p:cNvPr id="12" name="Rectangle 11"/>
           <p:cNvSpPr/>
           <p:nvPr/>
         </p:nvSpPr>
@@ -26268,7 +25519,7 @@
       </p:sp>
       <p:sp>
         <p:nvSpPr>
-          <p:cNvPr id="14" name="Rectangle 13"/>
+          <p:cNvPr id="13" name="Rectangle 12"/>
           <p:cNvSpPr/>
           <p:nvPr/>
         </p:nvSpPr>
@@ -26317,7 +25568,7 @@
       </p:sp>
       <p:sp>
         <p:nvSpPr>
-          <p:cNvPr id="15" name="TextBox 14"/>
+          <p:cNvPr id="14" name="TextBox 13"/>
           <p:cNvSpPr txBox="1"/>
           <p:nvPr/>
         </p:nvSpPr>
@@ -26359,7 +25610,7 @@
       </p:sp>
       <p:sp>
         <p:nvSpPr>
-          <p:cNvPr id="16" name="TextBox 15"/>
+          <p:cNvPr id="15" name="TextBox 14"/>
           <p:cNvSpPr txBox="1"/>
           <p:nvPr/>
         </p:nvSpPr>
@@ -26401,7 +25652,7 @@
       </p:sp>
       <p:sp>
         <p:nvSpPr>
-          <p:cNvPr id="17" name="Rectangle 16"/>
+          <p:cNvPr id="16" name="Rectangle 15"/>
           <p:cNvSpPr/>
           <p:nvPr/>
         </p:nvSpPr>
@@ -26450,7 +25701,7 @@
       </p:sp>
       <p:sp>
         <p:nvSpPr>
-          <p:cNvPr id="18" name="Rectangle 17"/>
+          <p:cNvPr id="17" name="Rectangle 16"/>
           <p:cNvSpPr/>
           <p:nvPr/>
         </p:nvSpPr>
@@ -26499,7 +25750,7 @@
       </p:sp>
       <p:sp>
         <p:nvSpPr>
-          <p:cNvPr id="19" name="TextBox 18"/>
+          <p:cNvPr id="18" name="TextBox 17"/>
           <p:cNvSpPr txBox="1"/>
           <p:nvPr/>
         </p:nvSpPr>
@@ -26541,7 +25792,7 @@
       </p:sp>
       <p:sp>
         <p:nvSpPr>
-          <p:cNvPr id="20" name="TextBox 19"/>
+          <p:cNvPr id="19" name="TextBox 18"/>
           <p:cNvSpPr txBox="1"/>
           <p:nvPr/>
         </p:nvSpPr>
@@ -26583,7 +25834,7 @@
       </p:sp>
       <p:sp>
         <p:nvSpPr>
-          <p:cNvPr id="21" name="Rectangle 20"/>
+          <p:cNvPr id="20" name="Rectangle 19"/>
           <p:cNvSpPr/>
           <p:nvPr/>
         </p:nvSpPr>
@@ -26632,7 +25883,7 @@
       </p:sp>
       <p:sp>
         <p:nvSpPr>
-          <p:cNvPr id="22" name="TextBox 21"/>
+          <p:cNvPr id="21" name="TextBox 20"/>
           <p:cNvSpPr txBox="1"/>
           <p:nvPr/>
         </p:nvSpPr>
@@ -26674,7 +25925,7 @@
       </p:sp>
       <p:sp>
         <p:nvSpPr>
-          <p:cNvPr id="23" name="TextBox 22"/>
+          <p:cNvPr id="22" name="TextBox 21"/>
           <p:cNvSpPr txBox="1"/>
           <p:nvPr/>
         </p:nvSpPr>
@@ -26716,7 +25967,7 @@
       </p:sp>
       <p:sp>
         <p:nvSpPr>
-          <p:cNvPr id="24" name="TextBox 23"/>
+          <p:cNvPr id="23" name="TextBox 22"/>
           <p:cNvSpPr txBox="1"/>
           <p:nvPr/>
         </p:nvSpPr>
@@ -26832,7 +26083,7 @@
         <p:spPr>
           <a:xfrm>
             <a:off x="640080" y="329184"/>
-            <a:ext cx="5303520" cy="182880"/>
+            <a:ext cx="9875520" cy="182880"/>
           </a:xfrm>
           <a:prstGeom prst="rect">
             <a:avLst/>
@@ -26873,48 +26124,6 @@
         </p:nvSpPr>
         <p:spPr>
           <a:xfrm>
-            <a:off x="5897880" y="310896"/>
-            <a:ext cx="4800600" cy="256032"/>
-          </a:xfrm>
-          <a:prstGeom prst="rect">
-            <a:avLst/>
-          </a:prstGeom>
-          <a:noFill/>
-        </p:spPr>
-        <p:txBody>
-          <a:bodyPr wrap="none" lIns="9144" rIns="9144" tIns="9144" bIns="9144" anchor="t">
-            <a:spAutoFit/>
-          </a:bodyPr>
-          <a:lstStyle/>
-          <a:p>
-            <a:pPr algn="r">
-              <a:spcAft>
-                <a:spcPts val="0"/>
-              </a:spcAft>
-              <a:defRPr sz="680" b="1">
-                <a:solidFill>
-                  <a:srgbClr val="4F6B00"/>
-                </a:solidFill>
-                <a:latin typeface="Inter"/>
-              </a:defRPr>
-            </a:pPr>
-            <a:r>
-              <a:rPr>
-                <a:latin typeface="Inter"/>
-              </a:rPr>
-              <a:t>Illustrative, Gradient Maintained — demo data, not the client's holdings or managers</a:t>
-            </a:r>
-          </a:p>
-        </p:txBody>
-      </p:sp>
-      <p:sp>
-        <p:nvSpPr>
-          <p:cNvPr id="5" name="TextBox 4"/>
-          <p:cNvSpPr txBox="1"/>
-          <p:nvPr/>
-        </p:nvSpPr>
-        <p:spPr>
-          <a:xfrm>
             <a:off x="640080" y="566928"/>
             <a:ext cx="10058400" cy="530352"/>
           </a:xfrm>
@@ -26951,7 +26160,7 @@
       </p:sp>
       <p:sp>
         <p:nvSpPr>
-          <p:cNvPr id="6" name="Rectangle 5"/>
+          <p:cNvPr id="5" name="Rectangle 4"/>
           <p:cNvSpPr/>
           <p:nvPr/>
         </p:nvSpPr>
@@ -27000,7 +26209,7 @@
       </p:sp>
       <p:sp>
         <p:nvSpPr>
-          <p:cNvPr id="7" name="Rectangle 6"/>
+          <p:cNvPr id="6" name="Rectangle 5"/>
           <p:cNvSpPr/>
           <p:nvPr/>
         </p:nvSpPr>
@@ -27049,7 +26258,7 @@
       </p:sp>
       <p:sp>
         <p:nvSpPr>
-          <p:cNvPr id="8" name="TextBox 7"/>
+          <p:cNvPr id="7" name="TextBox 6"/>
           <p:cNvSpPr txBox="1"/>
           <p:nvPr/>
         </p:nvSpPr>
@@ -27091,7 +26300,7 @@
       </p:sp>
       <p:sp>
         <p:nvSpPr>
-          <p:cNvPr id="9" name="Rectangle 8"/>
+          <p:cNvPr id="8" name="Rectangle 7"/>
           <p:cNvSpPr/>
           <p:nvPr/>
         </p:nvSpPr>
@@ -27140,7 +26349,7 @@
       </p:sp>
       <p:sp>
         <p:nvSpPr>
-          <p:cNvPr id="10" name="TextBox 9"/>
+          <p:cNvPr id="9" name="TextBox 8"/>
           <p:cNvSpPr txBox="1"/>
           <p:nvPr/>
         </p:nvSpPr>
@@ -27182,7 +26391,7 @@
       </p:sp>
       <p:sp>
         <p:nvSpPr>
-          <p:cNvPr id="11" name="TextBox 10"/>
+          <p:cNvPr id="10" name="TextBox 9"/>
           <p:cNvSpPr txBox="1"/>
           <p:nvPr/>
         </p:nvSpPr>
@@ -27224,7 +26433,7 @@
       </p:sp>
       <p:graphicFrame>
         <p:nvGraphicFramePr>
-          <p:cNvPr id="12" name="Table 11"/>
+          <p:cNvPr id="11" name="Table 10"/>
           <p:cNvGraphicFramePr>
             <a:graphicFrameLocks noGrp="1"/>
           </p:cNvGraphicFramePr>
@@ -27373,7 +26582,7 @@
                         <a:rPr>
                           <a:latin typeface="Inter"/>
                         </a:rPr>
-                        <a:t>● available</a:t>
+                        <a:t>● Available</a:t>
                       </a:r>
                     </a:p>
                   </a:txBody>
@@ -27417,7 +26626,7 @@
       </p:graphicFrame>
       <p:sp>
         <p:nvSpPr>
-          <p:cNvPr id="13" name="Rectangle 12"/>
+          <p:cNvPr id="12" name="Rectangle 11"/>
           <p:cNvSpPr/>
           <p:nvPr/>
         </p:nvSpPr>
@@ -27466,7 +26675,7 @@
       </p:sp>
       <p:sp>
         <p:nvSpPr>
-          <p:cNvPr id="14" name="TextBox 13"/>
+          <p:cNvPr id="13" name="TextBox 12"/>
           <p:cNvSpPr txBox="1"/>
           <p:nvPr/>
         </p:nvSpPr>
@@ -27508,7 +26717,7 @@
       </p:sp>
       <p:sp>
         <p:nvSpPr>
-          <p:cNvPr id="15" name="TextBox 14"/>
+          <p:cNvPr id="14" name="TextBox 13"/>
           <p:cNvSpPr txBox="1"/>
           <p:nvPr/>
         </p:nvSpPr>
@@ -27550,7 +26759,7 @@
       </p:sp>
       <p:sp>
         <p:nvSpPr>
-          <p:cNvPr id="16" name="TextBox 15"/>
+          <p:cNvPr id="15" name="TextBox 14"/>
           <p:cNvSpPr txBox="1"/>
           <p:nvPr/>
         </p:nvSpPr>
@@ -27666,7 +26875,7 @@
         <p:spPr>
           <a:xfrm>
             <a:off x="640080" y="329184"/>
-            <a:ext cx="5303520" cy="182880"/>
+            <a:ext cx="9875520" cy="182880"/>
           </a:xfrm>
           <a:prstGeom prst="rect">
             <a:avLst/>
@@ -27707,48 +26916,6 @@
         </p:nvSpPr>
         <p:spPr>
           <a:xfrm>
-            <a:off x="5897880" y="310896"/>
-            <a:ext cx="4800600" cy="256032"/>
-          </a:xfrm>
-          <a:prstGeom prst="rect">
-            <a:avLst/>
-          </a:prstGeom>
-          <a:noFill/>
-        </p:spPr>
-        <p:txBody>
-          <a:bodyPr wrap="none" lIns="9144" rIns="9144" tIns="9144" bIns="9144" anchor="t">
-            <a:spAutoFit/>
-          </a:bodyPr>
-          <a:lstStyle/>
-          <a:p>
-            <a:pPr algn="r">
-              <a:spcAft>
-                <a:spcPts val="0"/>
-              </a:spcAft>
-              <a:defRPr sz="680" b="1">
-                <a:solidFill>
-                  <a:srgbClr val="4F6B00"/>
-                </a:solidFill>
-                <a:latin typeface="Inter"/>
-              </a:defRPr>
-            </a:pPr>
-            <a:r>
-              <a:rPr>
-                <a:latin typeface="Inter"/>
-              </a:rPr>
-              <a:t>Illustrative, Gradient Maintained — demo data, not the client's holdings or managers</a:t>
-            </a:r>
-          </a:p>
-        </p:txBody>
-      </p:sp>
-      <p:sp>
-        <p:nvSpPr>
-          <p:cNvPr id="5" name="TextBox 4"/>
-          <p:cNvSpPr txBox="1"/>
-          <p:nvPr/>
-        </p:nvSpPr>
-        <p:spPr>
-          <a:xfrm>
             <a:off x="640080" y="566928"/>
             <a:ext cx="10058400" cy="530352"/>
           </a:xfrm>
@@ -27785,7 +26952,7 @@
       </p:sp>
       <p:sp>
         <p:nvSpPr>
-          <p:cNvPr id="6" name="Rectangle 5"/>
+          <p:cNvPr id="5" name="Rectangle 4"/>
           <p:cNvSpPr/>
           <p:nvPr/>
         </p:nvSpPr>
@@ -27834,7 +27001,7 @@
       </p:sp>
       <p:sp>
         <p:nvSpPr>
-          <p:cNvPr id="7" name="Rectangle 6"/>
+          <p:cNvPr id="6" name="Rectangle 5"/>
           <p:cNvSpPr/>
           <p:nvPr/>
         </p:nvSpPr>
@@ -27883,7 +27050,7 @@
       </p:sp>
       <p:sp>
         <p:nvSpPr>
-          <p:cNvPr id="8" name="TextBox 7"/>
+          <p:cNvPr id="7" name="TextBox 6"/>
           <p:cNvSpPr txBox="1"/>
           <p:nvPr/>
         </p:nvSpPr>
@@ -27925,7 +27092,7 @@
       </p:sp>
       <p:sp>
         <p:nvSpPr>
-          <p:cNvPr id="9" name="TextBox 8"/>
+          <p:cNvPr id="8" name="TextBox 7"/>
           <p:cNvSpPr txBox="1"/>
           <p:nvPr/>
         </p:nvSpPr>
@@ -27967,7 +27134,7 @@
       </p:sp>
       <p:graphicFrame>
         <p:nvGraphicFramePr>
-          <p:cNvPr id="10" name="Chart 9"/>
+          <p:cNvPr id="9" name="Chart 8"/>
           <p:cNvGraphicFramePr>
             <a:graphicFrameLocks noGrp="1"/>
           </p:cNvGraphicFramePr>
@@ -27985,7 +27152,7 @@
       </p:graphicFrame>
       <p:sp>
         <p:nvSpPr>
-          <p:cNvPr id="11" name="Rectangle 10"/>
+          <p:cNvPr id="10" name="Rectangle 9"/>
           <p:cNvSpPr/>
           <p:nvPr/>
         </p:nvSpPr>
@@ -28034,7 +27201,7 @@
       </p:sp>
       <p:sp>
         <p:nvSpPr>
-          <p:cNvPr id="12" name="TextBox 11"/>
+          <p:cNvPr id="11" name="TextBox 10"/>
           <p:cNvSpPr txBox="1"/>
           <p:nvPr/>
         </p:nvSpPr>
@@ -28076,7 +27243,7 @@
       </p:sp>
       <p:sp>
         <p:nvSpPr>
-          <p:cNvPr id="13" name="TextBox 12"/>
+          <p:cNvPr id="12" name="TextBox 11"/>
           <p:cNvSpPr txBox="1"/>
           <p:nvPr/>
         </p:nvSpPr>
@@ -28118,7 +27285,7 @@
       </p:sp>
       <p:sp>
         <p:nvSpPr>
-          <p:cNvPr id="14" name="TextBox 13"/>
+          <p:cNvPr id="13" name="TextBox 12"/>
           <p:cNvSpPr txBox="1"/>
           <p:nvPr/>
         </p:nvSpPr>
@@ -28234,7 +27401,7 @@
         <p:spPr>
           <a:xfrm>
             <a:off x="640080" y="329184"/>
-            <a:ext cx="5303520" cy="182880"/>
+            <a:ext cx="9875520" cy="182880"/>
           </a:xfrm>
           <a:prstGeom prst="rect">
             <a:avLst/>
@@ -28275,48 +27442,6 @@
         </p:nvSpPr>
         <p:spPr>
           <a:xfrm>
-            <a:off x="5897880" y="310896"/>
-            <a:ext cx="4800600" cy="256032"/>
-          </a:xfrm>
-          <a:prstGeom prst="rect">
-            <a:avLst/>
-          </a:prstGeom>
-          <a:noFill/>
-        </p:spPr>
-        <p:txBody>
-          <a:bodyPr wrap="none" lIns="9144" rIns="9144" tIns="9144" bIns="9144" anchor="t">
-            <a:spAutoFit/>
-          </a:bodyPr>
-          <a:lstStyle/>
-          <a:p>
-            <a:pPr algn="r">
-              <a:spcAft>
-                <a:spcPts val="0"/>
-              </a:spcAft>
-              <a:defRPr sz="680" b="1">
-                <a:solidFill>
-                  <a:srgbClr val="4F6B00"/>
-                </a:solidFill>
-                <a:latin typeface="Inter"/>
-              </a:defRPr>
-            </a:pPr>
-            <a:r>
-              <a:rPr>
-                <a:latin typeface="Inter"/>
-              </a:rPr>
-              <a:t>Illustrative, Gradient Maintained — demo data, not the client's holdings or managers</a:t>
-            </a:r>
-          </a:p>
-        </p:txBody>
-      </p:sp>
-      <p:sp>
-        <p:nvSpPr>
-          <p:cNvPr id="5" name="TextBox 4"/>
-          <p:cNvSpPr txBox="1"/>
-          <p:nvPr/>
-        </p:nvSpPr>
-        <p:spPr>
-          <a:xfrm>
             <a:off x="640080" y="566928"/>
             <a:ext cx="10058400" cy="530352"/>
           </a:xfrm>
@@ -28353,7 +27478,7 @@
       </p:sp>
       <p:sp>
         <p:nvSpPr>
-          <p:cNvPr id="6" name="Rectangle 5"/>
+          <p:cNvPr id="5" name="Rectangle 4"/>
           <p:cNvSpPr/>
           <p:nvPr/>
         </p:nvSpPr>
@@ -28402,7 +27527,7 @@
       </p:sp>
       <p:sp>
         <p:nvSpPr>
-          <p:cNvPr id="7" name="Rectangle 6"/>
+          <p:cNvPr id="6" name="Rectangle 5"/>
           <p:cNvSpPr/>
           <p:nvPr/>
         </p:nvSpPr>
@@ -28451,7 +27576,7 @@
       </p:sp>
       <p:sp>
         <p:nvSpPr>
-          <p:cNvPr id="8" name="TextBox 7"/>
+          <p:cNvPr id="7" name="TextBox 6"/>
           <p:cNvSpPr txBox="1"/>
           <p:nvPr/>
         </p:nvSpPr>
@@ -28493,7 +27618,7 @@
       </p:sp>
       <p:sp>
         <p:nvSpPr>
-          <p:cNvPr id="9" name="TextBox 8"/>
+          <p:cNvPr id="8" name="TextBox 7"/>
           <p:cNvSpPr txBox="1"/>
           <p:nvPr/>
         </p:nvSpPr>
@@ -28535,7 +27660,7 @@
       </p:sp>
       <p:graphicFrame>
         <p:nvGraphicFramePr>
-          <p:cNvPr id="10" name="Chart 9"/>
+          <p:cNvPr id="9" name="Chart 8"/>
           <p:cNvGraphicFramePr>
             <a:graphicFrameLocks noGrp="1"/>
           </p:cNvGraphicFramePr>
@@ -28553,7 +27678,7 @@
       </p:graphicFrame>
       <p:sp>
         <p:nvSpPr>
-          <p:cNvPr id="11" name="Rectangle 10"/>
+          <p:cNvPr id="10" name="Rectangle 9"/>
           <p:cNvSpPr/>
           <p:nvPr/>
         </p:nvSpPr>
@@ -28602,7 +27727,7 @@
       </p:sp>
       <p:sp>
         <p:nvSpPr>
-          <p:cNvPr id="12" name="TextBox 11"/>
+          <p:cNvPr id="11" name="TextBox 10"/>
           <p:cNvSpPr txBox="1"/>
           <p:nvPr/>
         </p:nvSpPr>
@@ -28644,7 +27769,7 @@
       </p:sp>
       <p:sp>
         <p:nvSpPr>
-          <p:cNvPr id="13" name="TextBox 12"/>
+          <p:cNvPr id="12" name="TextBox 11"/>
           <p:cNvSpPr txBox="1"/>
           <p:nvPr/>
         </p:nvSpPr>
@@ -28686,7 +27811,7 @@
       </p:sp>
       <p:sp>
         <p:nvSpPr>
-          <p:cNvPr id="14" name="TextBox 13"/>
+          <p:cNvPr id="13" name="TextBox 12"/>
           <p:cNvSpPr txBox="1"/>
           <p:nvPr/>
         </p:nvSpPr>
@@ -28802,7 +27927,7 @@
         <p:spPr>
           <a:xfrm>
             <a:off x="640080" y="329184"/>
-            <a:ext cx="5303520" cy="182880"/>
+            <a:ext cx="9875520" cy="182880"/>
           </a:xfrm>
           <a:prstGeom prst="rect">
             <a:avLst/>
@@ -28843,48 +27968,6 @@
         </p:nvSpPr>
         <p:spPr>
           <a:xfrm>
-            <a:off x="5897880" y="310896"/>
-            <a:ext cx="4800600" cy="256032"/>
-          </a:xfrm>
-          <a:prstGeom prst="rect">
-            <a:avLst/>
-          </a:prstGeom>
-          <a:noFill/>
-        </p:spPr>
-        <p:txBody>
-          <a:bodyPr wrap="none" lIns="9144" rIns="9144" tIns="9144" bIns="9144" anchor="t">
-            <a:spAutoFit/>
-          </a:bodyPr>
-          <a:lstStyle/>
-          <a:p>
-            <a:pPr algn="r">
-              <a:spcAft>
-                <a:spcPts val="0"/>
-              </a:spcAft>
-              <a:defRPr sz="680" b="1">
-                <a:solidFill>
-                  <a:srgbClr val="4F6B00"/>
-                </a:solidFill>
-                <a:latin typeface="Inter"/>
-              </a:defRPr>
-            </a:pPr>
-            <a:r>
-              <a:rPr>
-                <a:latin typeface="Inter"/>
-              </a:rPr>
-              <a:t>Illustrative, Gradient Maintained — demo data, not the client's holdings or managers</a:t>
-            </a:r>
-          </a:p>
-        </p:txBody>
-      </p:sp>
-      <p:sp>
-        <p:nvSpPr>
-          <p:cNvPr id="5" name="TextBox 4"/>
-          <p:cNvSpPr txBox="1"/>
-          <p:nvPr/>
-        </p:nvSpPr>
-        <p:spPr>
-          <a:xfrm>
             <a:off x="640080" y="566928"/>
             <a:ext cx="10058400" cy="530352"/>
           </a:xfrm>
@@ -28921,7 +28004,7 @@
       </p:sp>
       <p:sp>
         <p:nvSpPr>
-          <p:cNvPr id="6" name="Rectangle 5"/>
+          <p:cNvPr id="5" name="Rectangle 4"/>
           <p:cNvSpPr/>
           <p:nvPr/>
         </p:nvSpPr>
@@ -28970,7 +28053,7 @@
       </p:sp>
       <p:sp>
         <p:nvSpPr>
-          <p:cNvPr id="7" name="Rectangle 6"/>
+          <p:cNvPr id="6" name="Rectangle 5"/>
           <p:cNvSpPr/>
           <p:nvPr/>
         </p:nvSpPr>
@@ -29019,7 +28102,7 @@
       </p:sp>
       <p:sp>
         <p:nvSpPr>
-          <p:cNvPr id="8" name="TextBox 7"/>
+          <p:cNvPr id="7" name="TextBox 6"/>
           <p:cNvSpPr txBox="1"/>
           <p:nvPr/>
         </p:nvSpPr>
@@ -29061,7 +28144,7 @@
       </p:sp>
       <p:sp>
         <p:nvSpPr>
-          <p:cNvPr id="9" name="TextBox 8"/>
+          <p:cNvPr id="8" name="TextBox 7"/>
           <p:cNvSpPr txBox="1"/>
           <p:nvPr/>
         </p:nvSpPr>
@@ -29103,7 +28186,7 @@
       </p:sp>
       <p:graphicFrame>
         <p:nvGraphicFramePr>
-          <p:cNvPr id="10" name="Chart 9"/>
+          <p:cNvPr id="9" name="Chart 8"/>
           <p:cNvGraphicFramePr>
             <a:graphicFrameLocks noGrp="1"/>
           </p:cNvGraphicFramePr>
@@ -29121,7 +28204,7 @@
       </p:graphicFrame>
       <p:sp>
         <p:nvSpPr>
-          <p:cNvPr id="11" name="Rectangle 10"/>
+          <p:cNvPr id="10" name="Rectangle 9"/>
           <p:cNvSpPr/>
           <p:nvPr/>
         </p:nvSpPr>
@@ -29170,7 +28253,7 @@
       </p:sp>
       <p:sp>
         <p:nvSpPr>
-          <p:cNvPr id="12" name="TextBox 11"/>
+          <p:cNvPr id="11" name="TextBox 10"/>
           <p:cNvSpPr txBox="1"/>
           <p:nvPr/>
         </p:nvSpPr>
@@ -29212,7 +28295,7 @@
       </p:sp>
       <p:sp>
         <p:nvSpPr>
-          <p:cNvPr id="13" name="TextBox 12"/>
+          <p:cNvPr id="12" name="TextBox 11"/>
           <p:cNvSpPr txBox="1"/>
           <p:nvPr/>
         </p:nvSpPr>
@@ -29254,7 +28337,7 @@
       </p:sp>
       <p:sp>
         <p:nvSpPr>
-          <p:cNvPr id="14" name="TextBox 13"/>
+          <p:cNvPr id="13" name="TextBox 12"/>
           <p:cNvSpPr txBox="1"/>
           <p:nvPr/>
         </p:nvSpPr>

--- a/plugins/gradient-cio/assets/examples/gradient-portfolio-attribution-lanes-three-lane.pptx
+++ b/plugins/gradient-cio/assets/examples/gradient-portfolio-attribution-lanes-three-lane.pptx
@@ -26,10 +26,6 @@
     <ns0:sldId id="274" ns1:id="rId25"/>
     <ns0:sldId id="275" ns1:id="rId26"/>
     <ns0:sldId id="276" ns1:id="rId27"/>
-    <ns0:sldId id="277" ns1:id="rId28"/>
-    <ns0:sldId id="278" ns1:id="rId29"/>
-    <ns0:sldId id="279" ns1:id="rId30"/>
-    <ns0:sldId id="280" ns1:id="rId31"/>
   </ns0:sldIdLst>
   <ns0:sldSz cx="12191695" cy="6858000" type="screen16x9"/>
   <ns0:notesSz cx="6858000" cy="9144000"/>
@@ -2411,7 +2407,10 @@
       </c:catAx>
       <c:valAx>
         <c:axId val="2140495176"/>
-        <c:scaling/>
+        <c:scaling>
+          <c:max val="0.25"/>
+          <c:min val="-1.0"/>
+        </c:scaling>
         <c:delete val="0"/>
         <c:axPos val="l"/>
         <c:majorGridlines/>
@@ -2430,6 +2429,7 @@
         </c:txPr>
         <c:crossAx val="2118791784"/>
         <c:crosses val="autoZero"/>
+        <c:majorUnit val="0.25"/>
       </c:valAx>
     </c:plotArea>
     <c:legend>
@@ -2566,7 +2566,10 @@
       </c:catAx>
       <c:valAx>
         <c:axId val="2140495176"/>
-        <c:scaling/>
+        <c:scaling>
+          <c:max val="0.0"/>
+          <c:min val="-0.6000000000000001"/>
+        </c:scaling>
         <c:delete val="0"/>
         <c:axPos val="l"/>
         <c:majorGridlines/>
@@ -2585,6 +2588,7 @@
         </c:txPr>
         <c:crossAx val="2118791784"/>
         <c:crosses val="autoZero"/>
+        <c:majorUnit val="0.2"/>
       </c:valAx>
     </c:plotArea>
     <c:plotVisOnly val="1"/>
@@ -7101,7 +7105,7 @@
               <a:rPr>
                 <a:latin typeface="Inter"/>
               </a:rPr>
-              <a:t>RETURNED REALIZED EFFECTS ARE SHOWN WITHOUT RECALCULATION</a:t>
+              <a:t>RETURNED EXPECTED EFFECTS ARE SHOWN AS ASSUMPTIONS</a:t>
             </a:r>
           </a:p>
         </p:txBody>
@@ -7185,7 +7189,7 @@
               <a:rPr>
                 <a:latin typeface="Inter"/>
               </a:rPr>
-              <a:t>Historical Attribution — continued</a:t>
+              <a:t>Governed Ex Ante Attribution</a:t>
             </a:r>
           </a:p>
         </p:txBody>
@@ -7325,7 +7329,7 @@
               <a:rPr>
                 <a:latin typeface="Inter"/>
               </a:rPr>
-              <a:t>03</a:t>
+              <a:t>04</a:t>
             </a:r>
           </a:p>
         </p:txBody>
@@ -7367,7 +7371,7 @@
               <a:rPr>
                 <a:latin typeface="Inter"/>
               </a:rPr>
-              <a:t>CUMULATIVE ALTERNATIVES SELECTION</a:t>
+              <a:t>EXPECTED EFFECTS BY SEGMENT</a:t>
             </a:r>
           </a:p>
         </p:txBody>
@@ -7476,7 +7480,7 @@
               <a:rPr>
                 <a:latin typeface="Inter"/>
               </a:rPr>
-              <a:t>Sources: S2</a:t>
+              <a:t>Sources: S3</a:t>
             </a:r>
           </a:p>
         </p:txBody>
@@ -7574,2014 +7578,6 @@
 </file>
 
 <file path=ppt/slides/slide11.xml><?xml version="1.0" encoding="utf-8"?>
-<p:sld xmlns:a="http://schemas.openxmlformats.org/drawingml/2006/main" xmlns:p="http://schemas.openxmlformats.org/presentationml/2006/main" xmlns:r="http://schemas.openxmlformats.org/officeDocument/2006/relationships">
-  <p:cSld>
-    <p:spTree>
-      <p:nvGrpSpPr>
-        <p:cNvPr id="1" name=""/>
-        <p:cNvGrpSpPr/>
-        <p:nvPr/>
-      </p:nvGrpSpPr>
-      <p:grpSpPr/>
-      <p:sp>
-        <p:nvSpPr>
-          <p:cNvPr id="2" name="Rectangle 1"/>
-          <p:cNvSpPr/>
-          <p:nvPr/>
-        </p:nvSpPr>
-        <p:spPr>
-          <a:xfrm>
-            <a:off x="0" y="0"/>
-            <a:ext cx="12191695" cy="6858000"/>
-          </a:xfrm>
-          <a:prstGeom prst="rect">
-            <a:avLst/>
-          </a:prstGeom>
-          <a:solidFill>
-            <a:srgbClr val="FFFFFF"/>
-          </a:solidFill>
-          <a:ln>
-            <a:solidFill>
-              <a:srgbClr val="FFFFFF"/>
-            </a:solidFill>
-          </a:ln>
-        </p:spPr>
-        <p:style>
-          <a:lnRef idx="1">
-            <a:schemeClr val="accent1"/>
-          </a:lnRef>
-          <a:fillRef idx="3">
-            <a:schemeClr val="accent1"/>
-          </a:fillRef>
-          <a:effectRef idx="2">
-            <a:schemeClr val="accent1"/>
-          </a:effectRef>
-          <a:fontRef idx="minor">
-            <a:schemeClr val="lt1"/>
-          </a:fontRef>
-        </p:style>
-        <p:txBody>
-          <a:bodyPr rtlCol="0" anchor="ctr"/>
-          <a:lstStyle/>
-          <a:p>
-            <a:pPr algn="ctr">
-              <a:defRPr>
-                <a:latin typeface="Inter"/>
-              </a:defRPr>
-            </a:pPr>
-          </a:p>
-        </p:txBody>
-      </p:sp>
-      <p:sp>
-        <p:nvSpPr>
-          <p:cNvPr id="3" name="TextBox 2"/>
-          <p:cNvSpPr txBox="1"/>
-          <p:nvPr/>
-        </p:nvSpPr>
-        <p:spPr>
-          <a:xfrm>
-            <a:off x="640080" y="329184"/>
-            <a:ext cx="5303520" cy="182880"/>
-          </a:xfrm>
-          <a:prstGeom prst="rect">
-            <a:avLst/>
-          </a:prstGeom>
-          <a:noFill/>
-        </p:spPr>
-        <p:txBody>
-          <a:bodyPr wrap="none" lIns="9144" rIns="9144" tIns="9144" bIns="9144" anchor="t">
-            <a:spAutoFit/>
-          </a:bodyPr>
-          <a:lstStyle/>
-          <a:p>
-            <a:pPr algn="l">
-              <a:spcAft>
-                <a:spcPts val="0"/>
-              </a:spcAft>
-              <a:defRPr sz="750" b="1">
-                <a:solidFill>
-                  <a:srgbClr val="4F6B00"/>
-                </a:solidFill>
-                <a:latin typeface="Inter"/>
-              </a:defRPr>
-            </a:pPr>
-            <a:r>
-              <a:rPr>
-                <a:latin typeface="Inter"/>
-              </a:rPr>
-              <a:t>RETURNED REALIZED EFFECTS ARE SHOWN WITHOUT RECALCULATION</a:t>
-            </a:r>
-          </a:p>
-        </p:txBody>
-      </p:sp>
-      <p:sp>
-        <p:nvSpPr>
-          <p:cNvPr id="4" name="TextBox 3"/>
-          <p:cNvSpPr txBox="1"/>
-          <p:nvPr/>
-        </p:nvSpPr>
-        <p:spPr>
-          <a:xfrm>
-            <a:off x="5897880" y="310896"/>
-            <a:ext cx="4800600" cy="256032"/>
-          </a:xfrm>
-          <a:prstGeom prst="rect">
-            <a:avLst/>
-          </a:prstGeom>
-          <a:noFill/>
-        </p:spPr>
-        <p:txBody>
-          <a:bodyPr wrap="none" lIns="9144" rIns="9144" tIns="9144" bIns="9144" anchor="t">
-            <a:spAutoFit/>
-          </a:bodyPr>
-          <a:lstStyle/>
-          <a:p>
-            <a:pPr algn="r">
-              <a:spcAft>
-                <a:spcPts val="0"/>
-              </a:spcAft>
-              <a:defRPr sz="680" b="1">
-                <a:solidFill>
-                  <a:srgbClr val="4F6B00"/>
-                </a:solidFill>
-                <a:latin typeface="Inter"/>
-              </a:defRPr>
-            </a:pPr>
-            <a:r>
-              <a:rPr>
-                <a:latin typeface="Inter"/>
-              </a:rPr>
-              <a:t>Illustrative, Gradient Maintained — demo data, not the client's holdings or managers</a:t>
-            </a:r>
-          </a:p>
-        </p:txBody>
-      </p:sp>
-      <p:sp>
-        <p:nvSpPr>
-          <p:cNvPr id="5" name="TextBox 4"/>
-          <p:cNvSpPr txBox="1"/>
-          <p:nvPr/>
-        </p:nvSpPr>
-        <p:spPr>
-          <a:xfrm>
-            <a:off x="640080" y="566928"/>
-            <a:ext cx="10058400" cy="530352"/>
-          </a:xfrm>
-          <a:prstGeom prst="rect">
-            <a:avLst/>
-          </a:prstGeom>
-          <a:noFill/>
-        </p:spPr>
-        <p:txBody>
-          <a:bodyPr wrap="none" lIns="9144" rIns="9144" tIns="9144" bIns="9144" anchor="t">
-            <a:spAutoFit/>
-          </a:bodyPr>
-          <a:lstStyle/>
-          <a:p>
-            <a:pPr algn="l">
-              <a:spcAft>
-                <a:spcPts val="0"/>
-              </a:spcAft>
-              <a:defRPr sz="2300" b="1">
-                <a:solidFill>
-                  <a:srgbClr val="0D1117"/>
-                </a:solidFill>
-                <a:latin typeface="Inter"/>
-              </a:defRPr>
-            </a:pPr>
-            <a:r>
-              <a:rPr>
-                <a:latin typeface="Inter"/>
-              </a:rPr>
-              <a:t>Historical Attribution — continued</a:t>
-            </a:r>
-          </a:p>
-        </p:txBody>
-      </p:sp>
-      <p:sp>
-        <p:nvSpPr>
-          <p:cNvPr id="6" name="Rectangle 5"/>
-          <p:cNvSpPr/>
-          <p:nvPr/>
-        </p:nvSpPr>
-        <p:spPr>
-          <a:xfrm>
-            <a:off x="640080" y="1115568"/>
-            <a:ext cx="10908792" cy="18288"/>
-          </a:xfrm>
-          <a:prstGeom prst="rect">
-            <a:avLst/>
-          </a:prstGeom>
-          <a:solidFill>
-            <a:srgbClr val="0D1117"/>
-          </a:solidFill>
-          <a:ln>
-            <a:solidFill>
-              <a:srgbClr val="0D1117"/>
-            </a:solidFill>
-          </a:ln>
-        </p:spPr>
-        <p:style>
-          <a:lnRef idx="1">
-            <a:schemeClr val="accent1"/>
-          </a:lnRef>
-          <a:fillRef idx="3">
-            <a:schemeClr val="accent1"/>
-          </a:fillRef>
-          <a:effectRef idx="2">
-            <a:schemeClr val="accent1"/>
-          </a:effectRef>
-          <a:fontRef idx="minor">
-            <a:schemeClr val="lt1"/>
-          </a:fontRef>
-        </p:style>
-        <p:txBody>
-          <a:bodyPr rtlCol="0" anchor="ctr"/>
-          <a:lstStyle/>
-          <a:p>
-            <a:pPr algn="ctr">
-              <a:defRPr>
-                <a:latin typeface="Inter"/>
-              </a:defRPr>
-            </a:pPr>
-          </a:p>
-        </p:txBody>
-      </p:sp>
-      <p:sp>
-        <p:nvSpPr>
-          <p:cNvPr id="7" name="Rectangle 6"/>
-          <p:cNvSpPr/>
-          <p:nvPr/>
-        </p:nvSpPr>
-        <p:spPr>
-          <a:xfrm>
-            <a:off x="11018520" y="502920"/>
-            <a:ext cx="530352" cy="393192"/>
-          </a:xfrm>
-          <a:prstGeom prst="rect">
-            <a:avLst/>
-          </a:prstGeom>
-          <a:solidFill>
-            <a:srgbClr val="C6F432"/>
-          </a:solidFill>
-          <a:ln>
-            <a:solidFill>
-              <a:srgbClr val="C6F432"/>
-            </a:solidFill>
-          </a:ln>
-        </p:spPr>
-        <p:style>
-          <a:lnRef idx="1">
-            <a:schemeClr val="accent1"/>
-          </a:lnRef>
-          <a:fillRef idx="3">
-            <a:schemeClr val="accent1"/>
-          </a:fillRef>
-          <a:effectRef idx="2">
-            <a:schemeClr val="accent1"/>
-          </a:effectRef>
-          <a:fontRef idx="minor">
-            <a:schemeClr val="lt1"/>
-          </a:fontRef>
-        </p:style>
-        <p:txBody>
-          <a:bodyPr rtlCol="0" anchor="ctr"/>
-          <a:lstStyle/>
-          <a:p>
-            <a:pPr algn="ctr">
-              <a:defRPr>
-                <a:latin typeface="Inter"/>
-              </a:defRPr>
-            </a:pPr>
-          </a:p>
-        </p:txBody>
-      </p:sp>
-      <p:sp>
-        <p:nvSpPr>
-          <p:cNvPr id="8" name="TextBox 7"/>
-          <p:cNvSpPr txBox="1"/>
-          <p:nvPr/>
-        </p:nvSpPr>
-        <p:spPr>
-          <a:xfrm>
-            <a:off x="11045952" y="557784"/>
-            <a:ext cx="475488" cy="182880"/>
-          </a:xfrm>
-          <a:prstGeom prst="rect">
-            <a:avLst/>
-          </a:prstGeom>
-          <a:noFill/>
-        </p:spPr>
-        <p:txBody>
-          <a:bodyPr wrap="none" lIns="9144" rIns="9144" tIns="9144" bIns="9144" anchor="t">
-            <a:spAutoFit/>
-          </a:bodyPr>
-          <a:lstStyle/>
-          <a:p>
-            <a:pPr algn="ctr">
-              <a:spcAft>
-                <a:spcPts val="0"/>
-              </a:spcAft>
-              <a:defRPr sz="1000" b="1">
-                <a:solidFill>
-                  <a:srgbClr val="0D1117"/>
-                </a:solidFill>
-                <a:latin typeface="Inter"/>
-              </a:defRPr>
-            </a:pPr>
-            <a:r>
-              <a:rPr>
-                <a:latin typeface="Inter"/>
-              </a:rPr>
-              <a:t>03</a:t>
-            </a:r>
-          </a:p>
-        </p:txBody>
-      </p:sp>
-      <p:sp>
-        <p:nvSpPr>
-          <p:cNvPr id="9" name="TextBox 8"/>
-          <p:cNvSpPr txBox="1"/>
-          <p:nvPr/>
-        </p:nvSpPr>
-        <p:spPr>
-          <a:xfrm>
-            <a:off x="640080" y="1325880"/>
-            <a:ext cx="10908792" cy="201168"/>
-          </a:xfrm>
-          <a:prstGeom prst="rect">
-            <a:avLst/>
-          </a:prstGeom>
-          <a:noFill/>
-        </p:spPr>
-        <p:txBody>
-          <a:bodyPr wrap="none" lIns="9144" rIns="9144" tIns="9144" bIns="9144" anchor="t">
-            <a:spAutoFit/>
-          </a:bodyPr>
-          <a:lstStyle/>
-          <a:p>
-            <a:pPr algn="l">
-              <a:spcAft>
-                <a:spcPts val="0"/>
-              </a:spcAft>
-              <a:defRPr sz="720" b="1">
-                <a:solidFill>
-                  <a:srgbClr val="4A5563"/>
-                </a:solidFill>
-                <a:latin typeface="Inter"/>
-              </a:defRPr>
-            </a:pPr>
-            <a:r>
-              <a:rPr>
-                <a:latin typeface="Inter"/>
-              </a:rPr>
-              <a:t>RETURNED CUMULATIVE GROWTH CONTEXT</a:t>
-            </a:r>
-          </a:p>
-        </p:txBody>
-      </p:sp>
-      <p:graphicFrame>
-        <p:nvGraphicFramePr>
-          <p:cNvPr id="10" name="Chart 9"/>
-          <p:cNvGraphicFramePr>
-            <a:graphicFrameLocks noGrp="1"/>
-          </p:cNvGraphicFramePr>
-          <p:nvPr/>
-        </p:nvGraphicFramePr>
-        <p:xfrm>
-          <a:off x="640080" y="1600200"/>
-          <a:ext cx="10908792" cy="4617720"/>
-        </p:xfrm>
-        <a:graphic>
-          <a:graphicData uri="http://schemas.openxmlformats.org/drawingml/2006/chart">
-            <c:chart xmlns:c="http://schemas.openxmlformats.org/drawingml/2006/chart" r:id="rId2"/>
-          </a:graphicData>
-        </a:graphic>
-      </p:graphicFrame>
-      <p:sp>
-        <p:nvSpPr>
-          <p:cNvPr id="11" name="Rectangle 10"/>
-          <p:cNvSpPr/>
-          <p:nvPr/>
-        </p:nvSpPr>
-        <p:spPr>
-          <a:xfrm>
-            <a:off x="640080" y="6446520"/>
-            <a:ext cx="10908792" cy="9144"/>
-          </a:xfrm>
-          <a:prstGeom prst="rect">
-            <a:avLst/>
-          </a:prstGeom>
-          <a:solidFill>
-            <a:srgbClr val="E3E7EC"/>
-          </a:solidFill>
-          <a:ln>
-            <a:solidFill>
-              <a:srgbClr val="E3E7EC"/>
-            </a:solidFill>
-          </a:ln>
-        </p:spPr>
-        <p:style>
-          <a:lnRef idx="1">
-            <a:schemeClr val="accent1"/>
-          </a:lnRef>
-          <a:fillRef idx="3">
-            <a:schemeClr val="accent1"/>
-          </a:fillRef>
-          <a:effectRef idx="2">
-            <a:schemeClr val="accent1"/>
-          </a:effectRef>
-          <a:fontRef idx="minor">
-            <a:schemeClr val="lt1"/>
-          </a:fontRef>
-        </p:style>
-        <p:txBody>
-          <a:bodyPr rtlCol="0" anchor="ctr"/>
-          <a:lstStyle/>
-          <a:p>
-            <a:pPr algn="ctr">
-              <a:defRPr>
-                <a:latin typeface="Inter"/>
-              </a:defRPr>
-            </a:pPr>
-          </a:p>
-        </p:txBody>
-      </p:sp>
-      <p:sp>
-        <p:nvSpPr>
-          <p:cNvPr id="12" name="TextBox 11"/>
-          <p:cNvSpPr txBox="1"/>
-          <p:nvPr/>
-        </p:nvSpPr>
-        <p:spPr>
-          <a:xfrm>
-            <a:off x="640080" y="6501384"/>
-            <a:ext cx="4297680" cy="146304"/>
-          </a:xfrm>
-          <a:prstGeom prst="rect">
-            <a:avLst/>
-          </a:prstGeom>
-          <a:noFill/>
-        </p:spPr>
-        <p:txBody>
-          <a:bodyPr wrap="none" lIns="9144" rIns="9144" tIns="9144" bIns="9144" anchor="t">
-            <a:spAutoFit/>
-          </a:bodyPr>
-          <a:lstStyle/>
-          <a:p>
-            <a:pPr algn="l">
-              <a:spcAft>
-                <a:spcPts val="0"/>
-              </a:spcAft>
-              <a:defRPr sz="650" b="0">
-                <a:solidFill>
-                  <a:srgbClr val="8A94A1"/>
-                </a:solidFill>
-                <a:latin typeface="Inter"/>
-              </a:defRPr>
-            </a:pPr>
-            <a:r>
-              <a:rPr>
-                <a:latin typeface="Inter"/>
-              </a:rPr>
-              <a:t>Sources: S6</a:t>
-            </a:r>
-          </a:p>
-        </p:txBody>
-      </p:sp>
-      <p:sp>
-        <p:nvSpPr>
-          <p:cNvPr id="13" name="TextBox 12"/>
-          <p:cNvSpPr txBox="1"/>
-          <p:nvPr/>
-        </p:nvSpPr>
-        <p:spPr>
-          <a:xfrm>
-            <a:off x="4480560" y="6501384"/>
-            <a:ext cx="5303520" cy="146304"/>
-          </a:xfrm>
-          <a:prstGeom prst="rect">
-            <a:avLst/>
-          </a:prstGeom>
-          <a:noFill/>
-        </p:spPr>
-        <p:txBody>
-          <a:bodyPr wrap="none" lIns="9144" rIns="9144" tIns="9144" bIns="9144" anchor="t">
-            <a:spAutoFit/>
-          </a:bodyPr>
-          <a:lstStyle/>
-          <a:p>
-            <a:pPr algn="ctr">
-              <a:spcAft>
-                <a:spcPts val="0"/>
-              </a:spcAft>
-              <a:defRPr sz="650" b="0">
-                <a:solidFill>
-                  <a:srgbClr val="8A94A1"/>
-                </a:solidFill>
-                <a:latin typeface="Inter"/>
-              </a:defRPr>
-            </a:pPr>
-            <a:r>
-              <a:rPr>
-                <a:latin typeface="Inter"/>
-              </a:rPr>
-              <a:t>Confidential — Investment Committee · Data as of 2026-06-30</a:t>
-            </a:r>
-          </a:p>
-        </p:txBody>
-      </p:sp>
-      <p:sp>
-        <p:nvSpPr>
-          <p:cNvPr id="14" name="TextBox 13"/>
-          <p:cNvSpPr txBox="1"/>
-          <p:nvPr/>
-        </p:nvSpPr>
-        <p:spPr>
-          <a:xfrm>
-            <a:off x="10287000" y="6501384"/>
-            <a:ext cx="1261872" cy="146304"/>
-          </a:xfrm>
-          <a:prstGeom prst="rect">
-            <a:avLst/>
-          </a:prstGeom>
-          <a:noFill/>
-        </p:spPr>
-        <p:txBody>
-          <a:bodyPr wrap="none" lIns="9144" rIns="9144" tIns="9144" bIns="9144" anchor="t">
-            <a:spAutoFit/>
-          </a:bodyPr>
-          <a:lstStyle/>
-          <a:p>
-            <a:pPr algn="r">
-              <a:spcAft>
-                <a:spcPts val="0"/>
-              </a:spcAft>
-              <a:defRPr sz="650" b="0">
-                <a:solidFill>
-                  <a:srgbClr val="8A94A1"/>
-                </a:solidFill>
-                <a:latin typeface="Inter"/>
-              </a:defRPr>
-            </a:pPr>
-            <a:r>
-              <a:rPr>
-                <a:latin typeface="Inter"/>
-              </a:rPr>
-              <a:t>11</a:t>
-            </a:r>
-          </a:p>
-        </p:txBody>
-      </p:sp>
-    </p:spTree>
-  </p:cSld>
-  <p:clrMapOvr>
-    <a:masterClrMapping/>
-  </p:clrMapOvr>
-</p:sld>
-</file>
-
-<file path=ppt/slides/slide12.xml><?xml version="1.0" encoding="utf-8"?>
-<p:sld xmlns:a="http://schemas.openxmlformats.org/drawingml/2006/main" xmlns:p="http://schemas.openxmlformats.org/presentationml/2006/main" xmlns:r="http://schemas.openxmlformats.org/officeDocument/2006/relationships">
-  <p:cSld>
-    <p:spTree>
-      <p:nvGrpSpPr>
-        <p:cNvPr id="1" name=""/>
-        <p:cNvGrpSpPr/>
-        <p:nvPr/>
-      </p:nvGrpSpPr>
-      <p:grpSpPr/>
-      <p:sp>
-        <p:nvSpPr>
-          <p:cNvPr id="2" name="Rectangle 1"/>
-          <p:cNvSpPr/>
-          <p:nvPr/>
-        </p:nvSpPr>
-        <p:spPr>
-          <a:xfrm>
-            <a:off x="0" y="0"/>
-            <a:ext cx="12191695" cy="6858000"/>
-          </a:xfrm>
-          <a:prstGeom prst="rect">
-            <a:avLst/>
-          </a:prstGeom>
-          <a:solidFill>
-            <a:srgbClr val="FFFFFF"/>
-          </a:solidFill>
-          <a:ln>
-            <a:solidFill>
-              <a:srgbClr val="FFFFFF"/>
-            </a:solidFill>
-          </a:ln>
-        </p:spPr>
-        <p:style>
-          <a:lnRef idx="1">
-            <a:schemeClr val="accent1"/>
-          </a:lnRef>
-          <a:fillRef idx="3">
-            <a:schemeClr val="accent1"/>
-          </a:fillRef>
-          <a:effectRef idx="2">
-            <a:schemeClr val="accent1"/>
-          </a:effectRef>
-          <a:fontRef idx="minor">
-            <a:schemeClr val="lt1"/>
-          </a:fontRef>
-        </p:style>
-        <p:txBody>
-          <a:bodyPr rtlCol="0" anchor="ctr"/>
-          <a:lstStyle/>
-          <a:p>
-            <a:pPr algn="ctr">
-              <a:defRPr>
-                <a:latin typeface="Inter"/>
-              </a:defRPr>
-            </a:pPr>
-          </a:p>
-        </p:txBody>
-      </p:sp>
-      <p:sp>
-        <p:nvSpPr>
-          <p:cNvPr id="3" name="TextBox 2"/>
-          <p:cNvSpPr txBox="1"/>
-          <p:nvPr/>
-        </p:nvSpPr>
-        <p:spPr>
-          <a:xfrm>
-            <a:off x="640080" y="329184"/>
-            <a:ext cx="5303520" cy="182880"/>
-          </a:xfrm>
-          <a:prstGeom prst="rect">
-            <a:avLst/>
-          </a:prstGeom>
-          <a:noFill/>
-        </p:spPr>
-        <p:txBody>
-          <a:bodyPr wrap="none" lIns="9144" rIns="9144" tIns="9144" bIns="9144" anchor="t">
-            <a:spAutoFit/>
-          </a:bodyPr>
-          <a:lstStyle/>
-          <a:p>
-            <a:pPr algn="l">
-              <a:spcAft>
-                <a:spcPts val="0"/>
-              </a:spcAft>
-              <a:defRPr sz="750" b="1">
-                <a:solidFill>
-                  <a:srgbClr val="4F6B00"/>
-                </a:solidFill>
-                <a:latin typeface="Inter"/>
-              </a:defRPr>
-            </a:pPr>
-            <a:r>
-              <a:rPr>
-                <a:latin typeface="Inter"/>
-              </a:rPr>
-              <a:t>RETURNED REALIZED EFFECTS ARE SHOWN WITHOUT RECALCULATION</a:t>
-            </a:r>
-          </a:p>
-        </p:txBody>
-      </p:sp>
-      <p:sp>
-        <p:nvSpPr>
-          <p:cNvPr id="4" name="TextBox 3"/>
-          <p:cNvSpPr txBox="1"/>
-          <p:nvPr/>
-        </p:nvSpPr>
-        <p:spPr>
-          <a:xfrm>
-            <a:off x="5897880" y="310896"/>
-            <a:ext cx="4800600" cy="256032"/>
-          </a:xfrm>
-          <a:prstGeom prst="rect">
-            <a:avLst/>
-          </a:prstGeom>
-          <a:noFill/>
-        </p:spPr>
-        <p:txBody>
-          <a:bodyPr wrap="none" lIns="9144" rIns="9144" tIns="9144" bIns="9144" anchor="t">
-            <a:spAutoFit/>
-          </a:bodyPr>
-          <a:lstStyle/>
-          <a:p>
-            <a:pPr algn="r">
-              <a:spcAft>
-                <a:spcPts val="0"/>
-              </a:spcAft>
-              <a:defRPr sz="680" b="1">
-                <a:solidFill>
-                  <a:srgbClr val="4F6B00"/>
-                </a:solidFill>
-                <a:latin typeface="Inter"/>
-              </a:defRPr>
-            </a:pPr>
-            <a:r>
-              <a:rPr>
-                <a:latin typeface="Inter"/>
-              </a:rPr>
-              <a:t>Illustrative, Gradient Maintained — demo data, not the client's holdings or managers</a:t>
-            </a:r>
-          </a:p>
-        </p:txBody>
-      </p:sp>
-      <p:sp>
-        <p:nvSpPr>
-          <p:cNvPr id="5" name="TextBox 4"/>
-          <p:cNvSpPr txBox="1"/>
-          <p:nvPr/>
-        </p:nvSpPr>
-        <p:spPr>
-          <a:xfrm>
-            <a:off x="640080" y="566928"/>
-            <a:ext cx="10058400" cy="530352"/>
-          </a:xfrm>
-          <a:prstGeom prst="rect">
-            <a:avLst/>
-          </a:prstGeom>
-          <a:noFill/>
-        </p:spPr>
-        <p:txBody>
-          <a:bodyPr wrap="none" lIns="9144" rIns="9144" tIns="9144" bIns="9144" anchor="t">
-            <a:spAutoFit/>
-          </a:bodyPr>
-          <a:lstStyle/>
-          <a:p>
-            <a:pPr algn="l">
-              <a:spcAft>
-                <a:spcPts val="0"/>
-              </a:spcAft>
-              <a:defRPr sz="2300" b="1">
-                <a:solidFill>
-                  <a:srgbClr val="0D1117"/>
-                </a:solidFill>
-                <a:latin typeface="Inter"/>
-              </a:defRPr>
-            </a:pPr>
-            <a:r>
-              <a:rPr>
-                <a:latin typeface="Inter"/>
-              </a:rPr>
-              <a:t>Historical Attribution — continued</a:t>
-            </a:r>
-          </a:p>
-        </p:txBody>
-      </p:sp>
-      <p:sp>
-        <p:nvSpPr>
-          <p:cNvPr id="6" name="Rectangle 5"/>
-          <p:cNvSpPr/>
-          <p:nvPr/>
-        </p:nvSpPr>
-        <p:spPr>
-          <a:xfrm>
-            <a:off x="640080" y="1115568"/>
-            <a:ext cx="10908792" cy="18288"/>
-          </a:xfrm>
-          <a:prstGeom prst="rect">
-            <a:avLst/>
-          </a:prstGeom>
-          <a:solidFill>
-            <a:srgbClr val="0D1117"/>
-          </a:solidFill>
-          <a:ln>
-            <a:solidFill>
-              <a:srgbClr val="0D1117"/>
-            </a:solidFill>
-          </a:ln>
-        </p:spPr>
-        <p:style>
-          <a:lnRef idx="1">
-            <a:schemeClr val="accent1"/>
-          </a:lnRef>
-          <a:fillRef idx="3">
-            <a:schemeClr val="accent1"/>
-          </a:fillRef>
-          <a:effectRef idx="2">
-            <a:schemeClr val="accent1"/>
-          </a:effectRef>
-          <a:fontRef idx="minor">
-            <a:schemeClr val="lt1"/>
-          </a:fontRef>
-        </p:style>
-        <p:txBody>
-          <a:bodyPr rtlCol="0" anchor="ctr"/>
-          <a:lstStyle/>
-          <a:p>
-            <a:pPr algn="ctr">
-              <a:defRPr>
-                <a:latin typeface="Inter"/>
-              </a:defRPr>
-            </a:pPr>
-          </a:p>
-        </p:txBody>
-      </p:sp>
-      <p:sp>
-        <p:nvSpPr>
-          <p:cNvPr id="7" name="Rectangle 6"/>
-          <p:cNvSpPr/>
-          <p:nvPr/>
-        </p:nvSpPr>
-        <p:spPr>
-          <a:xfrm>
-            <a:off x="11018520" y="502920"/>
-            <a:ext cx="530352" cy="393192"/>
-          </a:xfrm>
-          <a:prstGeom prst="rect">
-            <a:avLst/>
-          </a:prstGeom>
-          <a:solidFill>
-            <a:srgbClr val="C6F432"/>
-          </a:solidFill>
-          <a:ln>
-            <a:solidFill>
-              <a:srgbClr val="C6F432"/>
-            </a:solidFill>
-          </a:ln>
-        </p:spPr>
-        <p:style>
-          <a:lnRef idx="1">
-            <a:schemeClr val="accent1"/>
-          </a:lnRef>
-          <a:fillRef idx="3">
-            <a:schemeClr val="accent1"/>
-          </a:fillRef>
-          <a:effectRef idx="2">
-            <a:schemeClr val="accent1"/>
-          </a:effectRef>
-          <a:fontRef idx="minor">
-            <a:schemeClr val="lt1"/>
-          </a:fontRef>
-        </p:style>
-        <p:txBody>
-          <a:bodyPr rtlCol="0" anchor="ctr"/>
-          <a:lstStyle/>
-          <a:p>
-            <a:pPr algn="ctr">
-              <a:defRPr>
-                <a:latin typeface="Inter"/>
-              </a:defRPr>
-            </a:pPr>
-          </a:p>
-        </p:txBody>
-      </p:sp>
-      <p:sp>
-        <p:nvSpPr>
-          <p:cNvPr id="8" name="TextBox 7"/>
-          <p:cNvSpPr txBox="1"/>
-          <p:nvPr/>
-        </p:nvSpPr>
-        <p:spPr>
-          <a:xfrm>
-            <a:off x="11045952" y="557784"/>
-            <a:ext cx="475488" cy="182880"/>
-          </a:xfrm>
-          <a:prstGeom prst="rect">
-            <a:avLst/>
-          </a:prstGeom>
-          <a:noFill/>
-        </p:spPr>
-        <p:txBody>
-          <a:bodyPr wrap="none" lIns="9144" rIns="9144" tIns="9144" bIns="9144" anchor="t">
-            <a:spAutoFit/>
-          </a:bodyPr>
-          <a:lstStyle/>
-          <a:p>
-            <a:pPr algn="ctr">
-              <a:spcAft>
-                <a:spcPts val="0"/>
-              </a:spcAft>
-              <a:defRPr sz="1000" b="1">
-                <a:solidFill>
-                  <a:srgbClr val="0D1117"/>
-                </a:solidFill>
-                <a:latin typeface="Inter"/>
-              </a:defRPr>
-            </a:pPr>
-            <a:r>
-              <a:rPr>
-                <a:latin typeface="Inter"/>
-              </a:rPr>
-              <a:t>03</a:t>
-            </a:r>
-          </a:p>
-        </p:txBody>
-      </p:sp>
-      <p:sp>
-        <p:nvSpPr>
-          <p:cNvPr id="9" name="Rectangle 8"/>
-          <p:cNvSpPr/>
-          <p:nvPr/>
-        </p:nvSpPr>
-        <p:spPr>
-          <a:xfrm>
-            <a:off x="640080" y="1325880"/>
-            <a:ext cx="10908792" cy="2385449"/>
-          </a:xfrm>
-          <a:prstGeom prst="rect">
-            <a:avLst/>
-          </a:prstGeom>
-          <a:solidFill>
-            <a:srgbClr val="F5F7F9"/>
-          </a:solidFill>
-          <a:ln>
-            <a:solidFill>
-              <a:srgbClr val="E3E7EC"/>
-            </a:solidFill>
-          </a:ln>
-        </p:spPr>
-        <p:style>
-          <a:lnRef idx="1">
-            <a:schemeClr val="accent1"/>
-          </a:lnRef>
-          <a:fillRef idx="3">
-            <a:schemeClr val="accent1"/>
-          </a:fillRef>
-          <a:effectRef idx="2">
-            <a:schemeClr val="accent1"/>
-          </a:effectRef>
-          <a:fontRef idx="minor">
-            <a:schemeClr val="lt1"/>
-          </a:fontRef>
-        </p:style>
-        <p:txBody>
-          <a:bodyPr rtlCol="0" anchor="ctr"/>
-          <a:lstStyle/>
-          <a:p>
-            <a:pPr algn="ctr">
-              <a:defRPr>
-                <a:latin typeface="Inter"/>
-              </a:defRPr>
-            </a:pPr>
-          </a:p>
-        </p:txBody>
-      </p:sp>
-      <p:sp>
-        <p:nvSpPr>
-          <p:cNvPr id="10" name="Rectangle 9"/>
-          <p:cNvSpPr/>
-          <p:nvPr/>
-        </p:nvSpPr>
-        <p:spPr>
-          <a:xfrm>
-            <a:off x="640080" y="1325880"/>
-            <a:ext cx="54864" cy="2385449"/>
-          </a:xfrm>
-          <a:prstGeom prst="rect">
-            <a:avLst/>
-          </a:prstGeom>
-          <a:solidFill>
-            <a:srgbClr val="0D1117"/>
-          </a:solidFill>
-          <a:ln>
-            <a:solidFill>
-              <a:srgbClr val="0D1117"/>
-            </a:solidFill>
-          </a:ln>
-        </p:spPr>
-        <p:style>
-          <a:lnRef idx="1">
-            <a:schemeClr val="accent1"/>
-          </a:lnRef>
-          <a:fillRef idx="3">
-            <a:schemeClr val="accent1"/>
-          </a:fillRef>
-          <a:effectRef idx="2">
-            <a:schemeClr val="accent1"/>
-          </a:effectRef>
-          <a:fontRef idx="minor">
-            <a:schemeClr val="lt1"/>
-          </a:fontRef>
-        </p:style>
-        <p:txBody>
-          <a:bodyPr rtlCol="0" anchor="ctr"/>
-          <a:lstStyle/>
-          <a:p>
-            <a:pPr algn="ctr">
-              <a:defRPr>
-                <a:latin typeface="Inter"/>
-              </a:defRPr>
-            </a:pPr>
-          </a:p>
-        </p:txBody>
-      </p:sp>
-      <p:sp>
-        <p:nvSpPr>
-          <p:cNvPr id="11" name="TextBox 10"/>
-          <p:cNvSpPr txBox="1"/>
-          <p:nvPr/>
-        </p:nvSpPr>
-        <p:spPr>
-          <a:xfrm>
-            <a:off x="804671" y="1435607"/>
-            <a:ext cx="10616184" cy="228600"/>
-          </a:xfrm>
-          <a:prstGeom prst="rect">
-            <a:avLst/>
-          </a:prstGeom>
-          <a:noFill/>
-        </p:spPr>
-        <p:txBody>
-          <a:bodyPr wrap="none" lIns="9144" rIns="9144" tIns="9144" bIns="9144" anchor="t">
-            <a:spAutoFit/>
-          </a:bodyPr>
-          <a:lstStyle/>
-          <a:p>
-            <a:pPr algn="l">
-              <a:spcAft>
-                <a:spcPts val="0"/>
-              </a:spcAft>
-              <a:defRPr sz="1000" b="1">
-                <a:solidFill>
-                  <a:srgbClr val="0D1117"/>
-                </a:solidFill>
-                <a:latin typeface="Inter"/>
-              </a:defRPr>
-            </a:pPr>
-            <a:r>
-              <a:rPr>
-                <a:latin typeface="Inter"/>
-              </a:rPr>
-              <a:t>Analysis — Selection leads detractors</a:t>
-            </a:r>
-          </a:p>
-        </p:txBody>
-      </p:sp>
-      <p:sp>
-        <p:nvSpPr>
-          <p:cNvPr id="12" name="TextBox 11"/>
-          <p:cNvSpPr txBox="1"/>
-          <p:nvPr/>
-        </p:nvSpPr>
-        <p:spPr>
-          <a:xfrm>
-            <a:off x="804671" y="1719072"/>
-            <a:ext cx="10616184" cy="1900817"/>
-          </a:xfrm>
-          <a:prstGeom prst="rect">
-            <a:avLst/>
-          </a:prstGeom>
-          <a:noFill/>
-        </p:spPr>
-        <p:txBody>
-          <a:bodyPr wrap="none" lIns="9144" rIns="9144" tIns="9144" bIns="9144" anchor="t">
-            <a:spAutoFit/>
-          </a:bodyPr>
-          <a:lstStyle/>
-          <a:p>
-            <a:pPr algn="l">
-              <a:spcAft>
-                <a:spcPts val="0"/>
-              </a:spcAft>
-              <a:defRPr sz="950" b="0">
-                <a:solidFill>
-                  <a:srgbClr val="4A5563"/>
-                </a:solidFill>
-                <a:latin typeface="Inter"/>
-              </a:defRPr>
-            </a:pPr>
-            <a:r>
-              <a:rPr>
-                <a:latin typeface="Inter"/>
-              </a:rPr>
-              <a:t>Observation: Returned selection is negative [S2]. Why it matters: Selection leads realized detractors. Uncertainty: The evidence covers one linked period. What would change the view: A later historical…</a:t>
-            </a:r>
-          </a:p>
-        </p:txBody>
-      </p:sp>
-      <p:sp>
-        <p:nvSpPr>
-          <p:cNvPr id="13" name="Rectangle 12"/>
-          <p:cNvSpPr/>
-          <p:nvPr/>
-        </p:nvSpPr>
-        <p:spPr>
-          <a:xfrm>
-            <a:off x="640080" y="3821057"/>
-            <a:ext cx="10908792" cy="2396862"/>
-          </a:xfrm>
-          <a:prstGeom prst="rect">
-            <a:avLst/>
-          </a:prstGeom>
-          <a:solidFill>
-            <a:srgbClr val="F5F7F9"/>
-          </a:solidFill>
-          <a:ln>
-            <a:solidFill>
-              <a:srgbClr val="E3E7EC"/>
-            </a:solidFill>
-          </a:ln>
-        </p:spPr>
-        <p:style>
-          <a:lnRef idx="1">
-            <a:schemeClr val="accent1"/>
-          </a:lnRef>
-          <a:fillRef idx="3">
-            <a:schemeClr val="accent1"/>
-          </a:fillRef>
-          <a:effectRef idx="2">
-            <a:schemeClr val="accent1"/>
-          </a:effectRef>
-          <a:fontRef idx="minor">
-            <a:schemeClr val="lt1"/>
-          </a:fontRef>
-        </p:style>
-        <p:txBody>
-          <a:bodyPr rtlCol="0" anchor="ctr"/>
-          <a:lstStyle/>
-          <a:p>
-            <a:pPr algn="ctr">
-              <a:defRPr>
-                <a:latin typeface="Inter"/>
-              </a:defRPr>
-            </a:pPr>
-          </a:p>
-        </p:txBody>
-      </p:sp>
-      <p:sp>
-        <p:nvSpPr>
-          <p:cNvPr id="14" name="Rectangle 13"/>
-          <p:cNvSpPr/>
-          <p:nvPr/>
-        </p:nvSpPr>
-        <p:spPr>
-          <a:xfrm>
-            <a:off x="640080" y="3821057"/>
-            <a:ext cx="54864" cy="2396862"/>
-          </a:xfrm>
-          <a:prstGeom prst="rect">
-            <a:avLst/>
-          </a:prstGeom>
-          <a:solidFill>
-            <a:srgbClr val="0D1117"/>
-          </a:solidFill>
-          <a:ln>
-            <a:solidFill>
-              <a:srgbClr val="0D1117"/>
-            </a:solidFill>
-          </a:ln>
-        </p:spPr>
-        <p:style>
-          <a:lnRef idx="1">
-            <a:schemeClr val="accent1"/>
-          </a:lnRef>
-          <a:fillRef idx="3">
-            <a:schemeClr val="accent1"/>
-          </a:fillRef>
-          <a:effectRef idx="2">
-            <a:schemeClr val="accent1"/>
-          </a:effectRef>
-          <a:fontRef idx="minor">
-            <a:schemeClr val="lt1"/>
-          </a:fontRef>
-        </p:style>
-        <p:txBody>
-          <a:bodyPr rtlCol="0" anchor="ctr"/>
-          <a:lstStyle/>
-          <a:p>
-            <a:pPr algn="ctr">
-              <a:defRPr>
-                <a:latin typeface="Inter"/>
-              </a:defRPr>
-            </a:pPr>
-          </a:p>
-        </p:txBody>
-      </p:sp>
-      <p:sp>
-        <p:nvSpPr>
-          <p:cNvPr id="15" name="TextBox 14"/>
-          <p:cNvSpPr txBox="1"/>
-          <p:nvPr/>
-        </p:nvSpPr>
-        <p:spPr>
-          <a:xfrm>
-            <a:off x="804671" y="3930785"/>
-            <a:ext cx="10616184" cy="228600"/>
-          </a:xfrm>
-          <a:prstGeom prst="rect">
-            <a:avLst/>
-          </a:prstGeom>
-          <a:noFill/>
-        </p:spPr>
-        <p:txBody>
-          <a:bodyPr wrap="none" lIns="9144" rIns="9144" tIns="9144" bIns="9144" anchor="t">
-            <a:spAutoFit/>
-          </a:bodyPr>
-          <a:lstStyle/>
-          <a:p>
-            <a:pPr algn="l">
-              <a:spcAft>
-                <a:spcPts val="0"/>
-              </a:spcAft>
-              <a:defRPr sz="1000" b="1">
-                <a:solidFill>
-                  <a:srgbClr val="0D1117"/>
-                </a:solidFill>
-                <a:latin typeface="Inter"/>
-              </a:defRPr>
-            </a:pPr>
-            <a:r>
-              <a:rPr>
-                <a:latin typeface="Inter"/>
-              </a:rPr>
-              <a:t>Benchmark and excess boundary</a:t>
-            </a:r>
-          </a:p>
-        </p:txBody>
-      </p:sp>
-      <p:sp>
-        <p:nvSpPr>
-          <p:cNvPr id="16" name="TextBox 15"/>
-          <p:cNvSpPr txBox="1"/>
-          <p:nvPr/>
-        </p:nvSpPr>
-        <p:spPr>
-          <a:xfrm>
-            <a:off x="804671" y="4214249"/>
-            <a:ext cx="10616184" cy="1912230"/>
-          </a:xfrm>
-          <a:prstGeom prst="rect">
-            <a:avLst/>
-          </a:prstGeom>
-          <a:noFill/>
-        </p:spPr>
-        <p:txBody>
-          <a:bodyPr wrap="none" lIns="9144" rIns="9144" tIns="9144" bIns="9144" anchor="t">
-            <a:spAutoFit/>
-          </a:bodyPr>
-          <a:lstStyle/>
-          <a:p>
-            <a:pPr algn="l">
-              <a:spcAft>
-                <a:spcPts val="0"/>
-              </a:spcAft>
-              <a:defRPr sz="950" b="0">
-                <a:solidFill>
-                  <a:srgbClr val="4A5563"/>
-                </a:solidFill>
-                <a:latin typeface="Inter"/>
-              </a:defRPr>
-            </a:pPr>
-            <a:r>
-              <a:rPr>
-                <a:latin typeface="Inter"/>
-              </a:rPr>
-              <a:t>Returned diagnostics.entity_return_reconciliation keeps attribution-summary excess against the linked segment benchmark composite separate from historical-return excess against the policy benchmark entity [S2].</a:t>
-            </a:r>
-          </a:p>
-        </p:txBody>
-      </p:sp>
-      <p:sp>
-        <p:nvSpPr>
-          <p:cNvPr id="17" name="Rectangle 16"/>
-          <p:cNvSpPr/>
-          <p:nvPr/>
-        </p:nvSpPr>
-        <p:spPr>
-          <a:xfrm>
-            <a:off x="640080" y="6446520"/>
-            <a:ext cx="10908792" cy="9144"/>
-          </a:xfrm>
-          <a:prstGeom prst="rect">
-            <a:avLst/>
-          </a:prstGeom>
-          <a:solidFill>
-            <a:srgbClr val="E3E7EC"/>
-          </a:solidFill>
-          <a:ln>
-            <a:solidFill>
-              <a:srgbClr val="E3E7EC"/>
-            </a:solidFill>
-          </a:ln>
-        </p:spPr>
-        <p:style>
-          <a:lnRef idx="1">
-            <a:schemeClr val="accent1"/>
-          </a:lnRef>
-          <a:fillRef idx="3">
-            <a:schemeClr val="accent1"/>
-          </a:fillRef>
-          <a:effectRef idx="2">
-            <a:schemeClr val="accent1"/>
-          </a:effectRef>
-          <a:fontRef idx="minor">
-            <a:schemeClr val="lt1"/>
-          </a:fontRef>
-        </p:style>
-        <p:txBody>
-          <a:bodyPr rtlCol="0" anchor="ctr"/>
-          <a:lstStyle/>
-          <a:p>
-            <a:pPr algn="ctr">
-              <a:defRPr>
-                <a:latin typeface="Inter"/>
-              </a:defRPr>
-            </a:pPr>
-          </a:p>
-        </p:txBody>
-      </p:sp>
-      <p:sp>
-        <p:nvSpPr>
-          <p:cNvPr id="18" name="TextBox 17"/>
-          <p:cNvSpPr txBox="1"/>
-          <p:nvPr/>
-        </p:nvSpPr>
-        <p:spPr>
-          <a:xfrm>
-            <a:off x="640080" y="6501384"/>
-            <a:ext cx="4297680" cy="146304"/>
-          </a:xfrm>
-          <a:prstGeom prst="rect">
-            <a:avLst/>
-          </a:prstGeom>
-          <a:noFill/>
-        </p:spPr>
-        <p:txBody>
-          <a:bodyPr wrap="none" lIns="9144" rIns="9144" tIns="9144" bIns="9144" anchor="t">
-            <a:spAutoFit/>
-          </a:bodyPr>
-          <a:lstStyle/>
-          <a:p>
-            <a:pPr algn="l">
-              <a:spcAft>
-                <a:spcPts val="0"/>
-              </a:spcAft>
-              <a:defRPr sz="650" b="0">
-                <a:solidFill>
-                  <a:srgbClr val="8A94A1"/>
-                </a:solidFill>
-                <a:latin typeface="Inter"/>
-              </a:defRPr>
-            </a:pPr>
-            <a:r>
-              <a:rPr>
-                <a:latin typeface="Inter"/>
-              </a:rPr>
-              <a:t>Sources: S2</a:t>
-            </a:r>
-          </a:p>
-        </p:txBody>
-      </p:sp>
-      <p:sp>
-        <p:nvSpPr>
-          <p:cNvPr id="19" name="TextBox 18"/>
-          <p:cNvSpPr txBox="1"/>
-          <p:nvPr/>
-        </p:nvSpPr>
-        <p:spPr>
-          <a:xfrm>
-            <a:off x="4480560" y="6501384"/>
-            <a:ext cx="5303520" cy="146304"/>
-          </a:xfrm>
-          <a:prstGeom prst="rect">
-            <a:avLst/>
-          </a:prstGeom>
-          <a:noFill/>
-        </p:spPr>
-        <p:txBody>
-          <a:bodyPr wrap="none" lIns="9144" rIns="9144" tIns="9144" bIns="9144" anchor="t">
-            <a:spAutoFit/>
-          </a:bodyPr>
-          <a:lstStyle/>
-          <a:p>
-            <a:pPr algn="ctr">
-              <a:spcAft>
-                <a:spcPts val="0"/>
-              </a:spcAft>
-              <a:defRPr sz="650" b="0">
-                <a:solidFill>
-                  <a:srgbClr val="8A94A1"/>
-                </a:solidFill>
-                <a:latin typeface="Inter"/>
-              </a:defRPr>
-            </a:pPr>
-            <a:r>
-              <a:rPr>
-                <a:latin typeface="Inter"/>
-              </a:rPr>
-              <a:t>Confidential — Investment Committee · Data as of 2026-06-30</a:t>
-            </a:r>
-          </a:p>
-        </p:txBody>
-      </p:sp>
-      <p:sp>
-        <p:nvSpPr>
-          <p:cNvPr id="20" name="TextBox 19"/>
-          <p:cNvSpPr txBox="1"/>
-          <p:nvPr/>
-        </p:nvSpPr>
-        <p:spPr>
-          <a:xfrm>
-            <a:off x="10287000" y="6501384"/>
-            <a:ext cx="1261872" cy="146304"/>
-          </a:xfrm>
-          <a:prstGeom prst="rect">
-            <a:avLst/>
-          </a:prstGeom>
-          <a:noFill/>
-        </p:spPr>
-        <p:txBody>
-          <a:bodyPr wrap="none" lIns="9144" rIns="9144" tIns="9144" bIns="9144" anchor="t">
-            <a:spAutoFit/>
-          </a:bodyPr>
-          <a:lstStyle/>
-          <a:p>
-            <a:pPr algn="r">
-              <a:spcAft>
-                <a:spcPts val="0"/>
-              </a:spcAft>
-              <a:defRPr sz="650" b="0">
-                <a:solidFill>
-                  <a:srgbClr val="8A94A1"/>
-                </a:solidFill>
-                <a:latin typeface="Inter"/>
-              </a:defRPr>
-            </a:pPr>
-            <a:r>
-              <a:rPr>
-                <a:latin typeface="Inter"/>
-              </a:rPr>
-              <a:t>12</a:t>
-            </a:r>
-          </a:p>
-        </p:txBody>
-      </p:sp>
-    </p:spTree>
-  </p:cSld>
-  <p:clrMapOvr>
-    <a:masterClrMapping/>
-  </p:clrMapOvr>
-</p:sld>
-</file>
-
-<file path=ppt/slides/slide13.xml><?xml version="1.0" encoding="utf-8"?>
-<p:sld xmlns:a="http://schemas.openxmlformats.org/drawingml/2006/main" xmlns:p="http://schemas.openxmlformats.org/presentationml/2006/main" xmlns:r="http://schemas.openxmlformats.org/officeDocument/2006/relationships">
-  <p:cSld>
-    <p:spTree>
-      <p:nvGrpSpPr>
-        <p:cNvPr id="1" name=""/>
-        <p:cNvGrpSpPr/>
-        <p:nvPr/>
-      </p:nvGrpSpPr>
-      <p:grpSpPr/>
-      <p:sp>
-        <p:nvSpPr>
-          <p:cNvPr id="2" name="Rectangle 1"/>
-          <p:cNvSpPr/>
-          <p:nvPr/>
-        </p:nvSpPr>
-        <p:spPr>
-          <a:xfrm>
-            <a:off x="0" y="0"/>
-            <a:ext cx="12191695" cy="6858000"/>
-          </a:xfrm>
-          <a:prstGeom prst="rect">
-            <a:avLst/>
-          </a:prstGeom>
-          <a:solidFill>
-            <a:srgbClr val="FFFFFF"/>
-          </a:solidFill>
-          <a:ln>
-            <a:solidFill>
-              <a:srgbClr val="FFFFFF"/>
-            </a:solidFill>
-          </a:ln>
-        </p:spPr>
-        <p:style>
-          <a:lnRef idx="1">
-            <a:schemeClr val="accent1"/>
-          </a:lnRef>
-          <a:fillRef idx="3">
-            <a:schemeClr val="accent1"/>
-          </a:fillRef>
-          <a:effectRef idx="2">
-            <a:schemeClr val="accent1"/>
-          </a:effectRef>
-          <a:fontRef idx="minor">
-            <a:schemeClr val="lt1"/>
-          </a:fontRef>
-        </p:style>
-        <p:txBody>
-          <a:bodyPr rtlCol="0" anchor="ctr"/>
-          <a:lstStyle/>
-          <a:p>
-            <a:pPr algn="ctr">
-              <a:defRPr>
-                <a:latin typeface="Inter"/>
-              </a:defRPr>
-            </a:pPr>
-          </a:p>
-        </p:txBody>
-      </p:sp>
-      <p:sp>
-        <p:nvSpPr>
-          <p:cNvPr id="3" name="TextBox 2"/>
-          <p:cNvSpPr txBox="1"/>
-          <p:nvPr/>
-        </p:nvSpPr>
-        <p:spPr>
-          <a:xfrm>
-            <a:off x="640080" y="329184"/>
-            <a:ext cx="5303520" cy="182880"/>
-          </a:xfrm>
-          <a:prstGeom prst="rect">
-            <a:avLst/>
-          </a:prstGeom>
-          <a:noFill/>
-        </p:spPr>
-        <p:txBody>
-          <a:bodyPr wrap="none" lIns="9144" rIns="9144" tIns="9144" bIns="9144" anchor="t">
-            <a:spAutoFit/>
-          </a:bodyPr>
-          <a:lstStyle/>
-          <a:p>
-            <a:pPr algn="l">
-              <a:spcAft>
-                <a:spcPts val="0"/>
-              </a:spcAft>
-              <a:defRPr sz="750" b="1">
-                <a:solidFill>
-                  <a:srgbClr val="4F6B00"/>
-                </a:solidFill>
-                <a:latin typeface="Inter"/>
-              </a:defRPr>
-            </a:pPr>
-            <a:r>
-              <a:rPr>
-                <a:latin typeface="Inter"/>
-              </a:rPr>
-              <a:t>RETURNED EXPECTED EFFECTS ARE SHOWN AS ASSUMPTIONS</a:t>
-            </a:r>
-          </a:p>
-        </p:txBody>
-      </p:sp>
-      <p:sp>
-        <p:nvSpPr>
-          <p:cNvPr id="4" name="TextBox 3"/>
-          <p:cNvSpPr txBox="1"/>
-          <p:nvPr/>
-        </p:nvSpPr>
-        <p:spPr>
-          <a:xfrm>
-            <a:off x="5897880" y="310896"/>
-            <a:ext cx="4800600" cy="256032"/>
-          </a:xfrm>
-          <a:prstGeom prst="rect">
-            <a:avLst/>
-          </a:prstGeom>
-          <a:noFill/>
-        </p:spPr>
-        <p:txBody>
-          <a:bodyPr wrap="none" lIns="9144" rIns="9144" tIns="9144" bIns="9144" anchor="t">
-            <a:spAutoFit/>
-          </a:bodyPr>
-          <a:lstStyle/>
-          <a:p>
-            <a:pPr algn="r">
-              <a:spcAft>
-                <a:spcPts val="0"/>
-              </a:spcAft>
-              <a:defRPr sz="680" b="1">
-                <a:solidFill>
-                  <a:srgbClr val="4F6B00"/>
-                </a:solidFill>
-                <a:latin typeface="Inter"/>
-              </a:defRPr>
-            </a:pPr>
-            <a:r>
-              <a:rPr>
-                <a:latin typeface="Inter"/>
-              </a:rPr>
-              <a:t>Illustrative, Gradient Maintained — demo data, not the client's holdings or managers</a:t>
-            </a:r>
-          </a:p>
-        </p:txBody>
-      </p:sp>
-      <p:sp>
-        <p:nvSpPr>
-          <p:cNvPr id="5" name="TextBox 4"/>
-          <p:cNvSpPr txBox="1"/>
-          <p:nvPr/>
-        </p:nvSpPr>
-        <p:spPr>
-          <a:xfrm>
-            <a:off x="640080" y="566928"/>
-            <a:ext cx="10058400" cy="530352"/>
-          </a:xfrm>
-          <a:prstGeom prst="rect">
-            <a:avLst/>
-          </a:prstGeom>
-          <a:noFill/>
-        </p:spPr>
-        <p:txBody>
-          <a:bodyPr wrap="none" lIns="9144" rIns="9144" tIns="9144" bIns="9144" anchor="t">
-            <a:spAutoFit/>
-          </a:bodyPr>
-          <a:lstStyle/>
-          <a:p>
-            <a:pPr algn="l">
-              <a:spcAft>
-                <a:spcPts val="0"/>
-              </a:spcAft>
-              <a:defRPr sz="2300" b="1">
-                <a:solidFill>
-                  <a:srgbClr val="0D1117"/>
-                </a:solidFill>
-                <a:latin typeface="Inter"/>
-              </a:defRPr>
-            </a:pPr>
-            <a:r>
-              <a:rPr>
-                <a:latin typeface="Inter"/>
-              </a:rPr>
-              <a:t>Governed Ex Ante Attribution</a:t>
-            </a:r>
-          </a:p>
-        </p:txBody>
-      </p:sp>
-      <p:sp>
-        <p:nvSpPr>
-          <p:cNvPr id="6" name="Rectangle 5"/>
-          <p:cNvSpPr/>
-          <p:nvPr/>
-        </p:nvSpPr>
-        <p:spPr>
-          <a:xfrm>
-            <a:off x="640080" y="1115568"/>
-            <a:ext cx="10908792" cy="18288"/>
-          </a:xfrm>
-          <a:prstGeom prst="rect">
-            <a:avLst/>
-          </a:prstGeom>
-          <a:solidFill>
-            <a:srgbClr val="0D1117"/>
-          </a:solidFill>
-          <a:ln>
-            <a:solidFill>
-              <a:srgbClr val="0D1117"/>
-            </a:solidFill>
-          </a:ln>
-        </p:spPr>
-        <p:style>
-          <a:lnRef idx="1">
-            <a:schemeClr val="accent1"/>
-          </a:lnRef>
-          <a:fillRef idx="3">
-            <a:schemeClr val="accent1"/>
-          </a:fillRef>
-          <a:effectRef idx="2">
-            <a:schemeClr val="accent1"/>
-          </a:effectRef>
-          <a:fontRef idx="minor">
-            <a:schemeClr val="lt1"/>
-          </a:fontRef>
-        </p:style>
-        <p:txBody>
-          <a:bodyPr rtlCol="0" anchor="ctr"/>
-          <a:lstStyle/>
-          <a:p>
-            <a:pPr algn="ctr">
-              <a:defRPr>
-                <a:latin typeface="Inter"/>
-              </a:defRPr>
-            </a:pPr>
-          </a:p>
-        </p:txBody>
-      </p:sp>
-      <p:sp>
-        <p:nvSpPr>
-          <p:cNvPr id="7" name="Rectangle 6"/>
-          <p:cNvSpPr/>
-          <p:nvPr/>
-        </p:nvSpPr>
-        <p:spPr>
-          <a:xfrm>
-            <a:off x="11018520" y="502920"/>
-            <a:ext cx="530352" cy="393192"/>
-          </a:xfrm>
-          <a:prstGeom prst="rect">
-            <a:avLst/>
-          </a:prstGeom>
-          <a:solidFill>
-            <a:srgbClr val="C6F432"/>
-          </a:solidFill>
-          <a:ln>
-            <a:solidFill>
-              <a:srgbClr val="C6F432"/>
-            </a:solidFill>
-          </a:ln>
-        </p:spPr>
-        <p:style>
-          <a:lnRef idx="1">
-            <a:schemeClr val="accent1"/>
-          </a:lnRef>
-          <a:fillRef idx="3">
-            <a:schemeClr val="accent1"/>
-          </a:fillRef>
-          <a:effectRef idx="2">
-            <a:schemeClr val="accent1"/>
-          </a:effectRef>
-          <a:fontRef idx="minor">
-            <a:schemeClr val="lt1"/>
-          </a:fontRef>
-        </p:style>
-        <p:txBody>
-          <a:bodyPr rtlCol="0" anchor="ctr"/>
-          <a:lstStyle/>
-          <a:p>
-            <a:pPr algn="ctr">
-              <a:defRPr>
-                <a:latin typeface="Inter"/>
-              </a:defRPr>
-            </a:pPr>
-          </a:p>
-        </p:txBody>
-      </p:sp>
-      <p:sp>
-        <p:nvSpPr>
-          <p:cNvPr id="8" name="TextBox 7"/>
-          <p:cNvSpPr txBox="1"/>
-          <p:nvPr/>
-        </p:nvSpPr>
-        <p:spPr>
-          <a:xfrm>
-            <a:off x="11045952" y="557784"/>
-            <a:ext cx="475488" cy="182880"/>
-          </a:xfrm>
-          <a:prstGeom prst="rect">
-            <a:avLst/>
-          </a:prstGeom>
-          <a:noFill/>
-        </p:spPr>
-        <p:txBody>
-          <a:bodyPr wrap="none" lIns="9144" rIns="9144" tIns="9144" bIns="9144" anchor="t">
-            <a:spAutoFit/>
-          </a:bodyPr>
-          <a:lstStyle/>
-          <a:p>
-            <a:pPr algn="ctr">
-              <a:spcAft>
-                <a:spcPts val="0"/>
-              </a:spcAft>
-              <a:defRPr sz="1000" b="1">
-                <a:solidFill>
-                  <a:srgbClr val="0D1117"/>
-                </a:solidFill>
-                <a:latin typeface="Inter"/>
-              </a:defRPr>
-            </a:pPr>
-            <a:r>
-              <a:rPr>
-                <a:latin typeface="Inter"/>
-              </a:rPr>
-              <a:t>04</a:t>
-            </a:r>
-          </a:p>
-        </p:txBody>
-      </p:sp>
-      <p:sp>
-        <p:nvSpPr>
-          <p:cNvPr id="9" name="TextBox 8"/>
-          <p:cNvSpPr txBox="1"/>
-          <p:nvPr/>
-        </p:nvSpPr>
-        <p:spPr>
-          <a:xfrm>
-            <a:off x="640080" y="1325880"/>
-            <a:ext cx="10908792" cy="201168"/>
-          </a:xfrm>
-          <a:prstGeom prst="rect">
-            <a:avLst/>
-          </a:prstGeom>
-          <a:noFill/>
-        </p:spPr>
-        <p:txBody>
-          <a:bodyPr wrap="none" lIns="9144" rIns="9144" tIns="9144" bIns="9144" anchor="t">
-            <a:spAutoFit/>
-          </a:bodyPr>
-          <a:lstStyle/>
-          <a:p>
-            <a:pPr algn="l">
-              <a:spcAft>
-                <a:spcPts val="0"/>
-              </a:spcAft>
-              <a:defRPr sz="720" b="1">
-                <a:solidFill>
-                  <a:srgbClr val="4A5563"/>
-                </a:solidFill>
-                <a:latin typeface="Inter"/>
-              </a:defRPr>
-            </a:pPr>
-            <a:r>
-              <a:rPr>
-                <a:latin typeface="Inter"/>
-              </a:rPr>
-              <a:t>EXPECTED EFFECTS BY SEGMENT</a:t>
-            </a:r>
-          </a:p>
-        </p:txBody>
-      </p:sp>
-      <p:graphicFrame>
-        <p:nvGraphicFramePr>
-          <p:cNvPr id="10" name="Chart 9"/>
-          <p:cNvGraphicFramePr>
-            <a:graphicFrameLocks noGrp="1"/>
-          </p:cNvGraphicFramePr>
-          <p:nvPr/>
-        </p:nvGraphicFramePr>
-        <p:xfrm>
-          <a:off x="640080" y="1600200"/>
-          <a:ext cx="10908792" cy="4617720"/>
-        </p:xfrm>
-        <a:graphic>
-          <a:graphicData uri="http://schemas.openxmlformats.org/drawingml/2006/chart">
-            <c:chart xmlns:c="http://schemas.openxmlformats.org/drawingml/2006/chart" r:id="rId2"/>
-          </a:graphicData>
-        </a:graphic>
-      </p:graphicFrame>
-      <p:sp>
-        <p:nvSpPr>
-          <p:cNvPr id="11" name="Rectangle 10"/>
-          <p:cNvSpPr/>
-          <p:nvPr/>
-        </p:nvSpPr>
-        <p:spPr>
-          <a:xfrm>
-            <a:off x="640080" y="6446520"/>
-            <a:ext cx="10908792" cy="9144"/>
-          </a:xfrm>
-          <a:prstGeom prst="rect">
-            <a:avLst/>
-          </a:prstGeom>
-          <a:solidFill>
-            <a:srgbClr val="E3E7EC"/>
-          </a:solidFill>
-          <a:ln>
-            <a:solidFill>
-              <a:srgbClr val="E3E7EC"/>
-            </a:solidFill>
-          </a:ln>
-        </p:spPr>
-        <p:style>
-          <a:lnRef idx="1">
-            <a:schemeClr val="accent1"/>
-          </a:lnRef>
-          <a:fillRef idx="3">
-            <a:schemeClr val="accent1"/>
-          </a:fillRef>
-          <a:effectRef idx="2">
-            <a:schemeClr val="accent1"/>
-          </a:effectRef>
-          <a:fontRef idx="minor">
-            <a:schemeClr val="lt1"/>
-          </a:fontRef>
-        </p:style>
-        <p:txBody>
-          <a:bodyPr rtlCol="0" anchor="ctr"/>
-          <a:lstStyle/>
-          <a:p>
-            <a:pPr algn="ctr">
-              <a:defRPr>
-                <a:latin typeface="Inter"/>
-              </a:defRPr>
-            </a:pPr>
-          </a:p>
-        </p:txBody>
-      </p:sp>
-      <p:sp>
-        <p:nvSpPr>
-          <p:cNvPr id="12" name="TextBox 11"/>
-          <p:cNvSpPr txBox="1"/>
-          <p:nvPr/>
-        </p:nvSpPr>
-        <p:spPr>
-          <a:xfrm>
-            <a:off x="640080" y="6501384"/>
-            <a:ext cx="4297680" cy="146304"/>
-          </a:xfrm>
-          <a:prstGeom prst="rect">
-            <a:avLst/>
-          </a:prstGeom>
-          <a:noFill/>
-        </p:spPr>
-        <p:txBody>
-          <a:bodyPr wrap="none" lIns="9144" rIns="9144" tIns="9144" bIns="9144" anchor="t">
-            <a:spAutoFit/>
-          </a:bodyPr>
-          <a:lstStyle/>
-          <a:p>
-            <a:pPr algn="l">
-              <a:spcAft>
-                <a:spcPts val="0"/>
-              </a:spcAft>
-              <a:defRPr sz="650" b="0">
-                <a:solidFill>
-                  <a:srgbClr val="8A94A1"/>
-                </a:solidFill>
-                <a:latin typeface="Inter"/>
-              </a:defRPr>
-            </a:pPr>
-            <a:r>
-              <a:rPr>
-                <a:latin typeface="Inter"/>
-              </a:rPr>
-              <a:t>Sources: S3</a:t>
-            </a:r>
-          </a:p>
-        </p:txBody>
-      </p:sp>
-      <p:sp>
-        <p:nvSpPr>
-          <p:cNvPr id="13" name="TextBox 12"/>
-          <p:cNvSpPr txBox="1"/>
-          <p:nvPr/>
-        </p:nvSpPr>
-        <p:spPr>
-          <a:xfrm>
-            <a:off x="4480560" y="6501384"/>
-            <a:ext cx="5303520" cy="146304"/>
-          </a:xfrm>
-          <a:prstGeom prst="rect">
-            <a:avLst/>
-          </a:prstGeom>
-          <a:noFill/>
-        </p:spPr>
-        <p:txBody>
-          <a:bodyPr wrap="none" lIns="9144" rIns="9144" tIns="9144" bIns="9144" anchor="t">
-            <a:spAutoFit/>
-          </a:bodyPr>
-          <a:lstStyle/>
-          <a:p>
-            <a:pPr algn="ctr">
-              <a:spcAft>
-                <a:spcPts val="0"/>
-              </a:spcAft>
-              <a:defRPr sz="650" b="0">
-                <a:solidFill>
-                  <a:srgbClr val="8A94A1"/>
-                </a:solidFill>
-                <a:latin typeface="Inter"/>
-              </a:defRPr>
-            </a:pPr>
-            <a:r>
-              <a:rPr>
-                <a:latin typeface="Inter"/>
-              </a:rPr>
-              <a:t>Confidential — Investment Committee · Data as of 2026-06-30</a:t>
-            </a:r>
-          </a:p>
-        </p:txBody>
-      </p:sp>
-      <p:sp>
-        <p:nvSpPr>
-          <p:cNvPr id="14" name="TextBox 13"/>
-          <p:cNvSpPr txBox="1"/>
-          <p:nvPr/>
-        </p:nvSpPr>
-        <p:spPr>
-          <a:xfrm>
-            <a:off x="10287000" y="6501384"/>
-            <a:ext cx="1261872" cy="146304"/>
-          </a:xfrm>
-          <a:prstGeom prst="rect">
-            <a:avLst/>
-          </a:prstGeom>
-          <a:noFill/>
-        </p:spPr>
-        <p:txBody>
-          <a:bodyPr wrap="none" lIns="9144" rIns="9144" tIns="9144" bIns="9144" anchor="t">
-            <a:spAutoFit/>
-          </a:bodyPr>
-          <a:lstStyle/>
-          <a:p>
-            <a:pPr algn="r">
-              <a:spcAft>
-                <a:spcPts val="0"/>
-              </a:spcAft>
-              <a:defRPr sz="650" b="0">
-                <a:solidFill>
-                  <a:srgbClr val="8A94A1"/>
-                </a:solidFill>
-                <a:latin typeface="Inter"/>
-              </a:defRPr>
-            </a:pPr>
-            <a:r>
-              <a:rPr>
-                <a:latin typeface="Inter"/>
-              </a:rPr>
-              <a:t>13</a:t>
-            </a:r>
-          </a:p>
-        </p:txBody>
-      </p:sp>
-    </p:spTree>
-  </p:cSld>
-  <p:clrMapOvr>
-    <a:masterClrMapping/>
-  </p:clrMapOvr>
-</p:sld>
-</file>
-
-<file path=ppt/slides/slide14.xml><?xml version="1.0" encoding="utf-8"?>
 <p:sld xmlns:a="http://schemas.openxmlformats.org/drawingml/2006/main" xmlns:p="http://schemas.openxmlformats.org/presentationml/2006/main" xmlns:r="http://schemas.openxmlformats.org/officeDocument/2006/relationships">
   <p:cSld>
     <p:spTree>
@@ -10533,7 +8529,7 @@
               <a:rPr>
                 <a:latin typeface="Inter"/>
               </a:rPr>
-              <a:t>14</a:t>
+              <a:t>11</a:t>
             </a:r>
           </a:p>
         </p:txBody>
@@ -10546,7 +8542,7 @@
 </p:sld>
 </file>
 
-<file path=ppt/slides/slide15.xml><?xml version="1.0" encoding="utf-8"?>
+<file path=ppt/slides/slide12.xml><?xml version="1.0" encoding="utf-8"?>
 <p:sld xmlns:a="http://schemas.openxmlformats.org/drawingml/2006/main" xmlns:p="http://schemas.openxmlformats.org/presentationml/2006/main" xmlns:r="http://schemas.openxmlformats.org/officeDocument/2006/relationships">
   <p:cSld>
     <p:spTree>
@@ -11223,7 +9219,7 @@
               <a:rPr>
                 <a:latin typeface="Inter"/>
               </a:rPr>
-              <a:t>15</a:t>
+              <a:t>12</a:t>
             </a:r>
           </a:p>
         </p:txBody>
@@ -11236,7 +9232,7 @@
 </p:sld>
 </file>
 
-<file path=ppt/slides/slide16.xml><?xml version="1.0" encoding="utf-8"?>
+<file path=ppt/slides/slide13.xml><?xml version="1.0" encoding="utf-8"?>
 <p:sld xmlns:a="http://schemas.openxmlformats.org/drawingml/2006/main" xmlns:p="http://schemas.openxmlformats.org/presentationml/2006/main" xmlns:r="http://schemas.openxmlformats.org/officeDocument/2006/relationships">
   <p:cSld>
     <p:spTree>
@@ -12340,7 +10336,7 @@
               <a:rPr>
                 <a:latin typeface="Inter"/>
               </a:rPr>
-              <a:t>16</a:t>
+              <a:t>13</a:t>
             </a:r>
           </a:p>
         </p:txBody>
@@ -12353,7 +10349,7 @@
 </p:sld>
 </file>
 
-<file path=ppt/slides/slide17.xml><?xml version="1.0" encoding="utf-8"?>
+<file path=ppt/slides/slide14.xml><?xml version="1.0" encoding="utf-8"?>
 <p:sld xmlns:a="http://schemas.openxmlformats.org/drawingml/2006/main" xmlns:p="http://schemas.openxmlformats.org/presentationml/2006/main" xmlns:r="http://schemas.openxmlformats.org/officeDocument/2006/relationships">
   <p:cSld>
     <p:spTree>
@@ -12730,7 +10726,7 @@
         </p:nvGraphicFramePr>
         <p:xfrm>
           <a:off x="640080" y="1600200"/>
-          <a:ext cx="10908792" cy="1536058"/>
+          <a:ext cx="10908792" cy="1564639"/>
         </p:xfrm>
         <a:graphic>
           <a:graphicData uri="http://schemas.openxmlformats.org/drawingml/2006/table">
@@ -12744,7 +10740,7 @@
                 <a:gridCol w="2965704"/>
                 <a:gridCol w="2965704"/>
               </a:tblGrid>
-              <a:tr h="384014">
+              <a:tr h="391159">
                 <a:tc>
                   <a:txBody>
                     <a:bodyPr/>
@@ -12854,7 +10850,7 @@
                   </a:tcPr>
                 </a:tc>
               </a:tr>
-              <a:tr h="384014">
+              <a:tr h="391159">
                 <a:tc>
                   <a:txBody>
                     <a:bodyPr/>
@@ -12964,7 +10960,7 @@
                   </a:tcPr>
                 </a:tc>
               </a:tr>
-              <a:tr h="384014">
+              <a:tr h="391159">
                 <a:tc>
                   <a:txBody>
                     <a:bodyPr/>
@@ -13074,7 +11070,7 @@
                   </a:tcPr>
                 </a:tc>
               </a:tr>
-              <a:tr h="384016">
+              <a:tr h="391162">
                 <a:tc>
                   <a:txBody>
                     <a:bodyPr/>
@@ -13196,7 +11192,7 @@
         </p:nvSpPr>
         <p:spPr>
           <a:xfrm>
-            <a:off x="640080" y="3154546"/>
+            <a:off x="640080" y="3183127"/>
             <a:ext cx="10908792" cy="164592"/>
           </a:xfrm>
           <a:prstGeom prst="rect">
@@ -13239,8 +11235,8 @@
           <p:nvPr/>
         </p:nvGraphicFramePr>
         <p:xfrm>
-          <a:off x="640080" y="3447154"/>
-          <a:ext cx="10908792" cy="1409364"/>
+          <a:off x="640080" y="3475735"/>
+          <a:ext cx="10908792" cy="1429388"/>
         </p:xfrm>
         <a:graphic>
           <a:graphicData uri="http://schemas.openxmlformats.org/drawingml/2006/table">
@@ -13253,7 +11249,7 @@
                 <a:gridCol w="4448556"/>
                 <a:gridCol w="4448556"/>
               </a:tblGrid>
-              <a:tr h="704682">
+              <a:tr h="714694">
                 <a:tc>
                   <a:txBody>
                     <a:bodyPr/>
@@ -13336,7 +11332,7 @@
                   </a:tcPr>
                 </a:tc>
               </a:tr>
-              <a:tr h="704682">
+              <a:tr h="714694">
                 <a:tc>
                   <a:txBody>
                     <a:bodyPr/>
@@ -13431,8 +11427,8 @@
         </p:nvSpPr>
         <p:spPr>
           <a:xfrm>
-            <a:off x="640080" y="4966247"/>
-            <a:ext cx="10908792" cy="1251672"/>
+            <a:off x="640080" y="5014851"/>
+            <a:ext cx="10908792" cy="1203068"/>
           </a:xfrm>
           <a:prstGeom prst="rect">
             <a:avLst/>
@@ -13480,8 +11476,8 @@
         </p:nvSpPr>
         <p:spPr>
           <a:xfrm>
-            <a:off x="640080" y="4966247"/>
-            <a:ext cx="54864" cy="1251672"/>
+            <a:off x="640080" y="5014851"/>
+            <a:ext cx="54864" cy="1203068"/>
           </a:xfrm>
           <a:prstGeom prst="rect">
             <a:avLst/>
@@ -13529,7 +11525,7 @@
         </p:nvSpPr>
         <p:spPr>
           <a:xfrm>
-            <a:off x="804671" y="5075975"/>
+            <a:off x="804671" y="5124579"/>
             <a:ext cx="10616184" cy="228600"/>
           </a:xfrm>
           <a:prstGeom prst="rect">
@@ -13571,8 +11567,8 @@
         </p:nvSpPr>
         <p:spPr>
           <a:xfrm>
-            <a:off x="804671" y="5359439"/>
-            <a:ext cx="10616184" cy="767040"/>
+            <a:off x="804671" y="5408043"/>
+            <a:ext cx="10616184" cy="718436"/>
           </a:xfrm>
           <a:prstGeom prst="rect">
             <a:avLst/>
@@ -13775,7 +11771,7 @@
               <a:rPr>
                 <a:latin typeface="Inter"/>
               </a:rPr>
-              <a:t>17</a:t>
+              <a:t>14</a:t>
             </a:r>
           </a:p>
         </p:txBody>
@@ -13788,7 +11784,7 @@
 </p:sld>
 </file>
 
-<file path=ppt/slides/slide18.xml><?xml version="1.0" encoding="utf-8"?>
+<file path=ppt/slides/slide15.xml><?xml version="1.0" encoding="utf-8"?>
 <p:sld xmlns:a="http://schemas.openxmlformats.org/drawingml/2006/main" xmlns:p="http://schemas.openxmlformats.org/presentationml/2006/main" xmlns:r="http://schemas.openxmlformats.org/officeDocument/2006/relationships">
   <p:cSld>
     <p:spTree>
@@ -14787,7 +12783,7 @@
               <a:rPr>
                 <a:latin typeface="Inter"/>
               </a:rPr>
-              <a:t>18</a:t>
+              <a:t>15</a:t>
             </a:r>
           </a:p>
         </p:txBody>
@@ -14800,7 +12796,7 @@
 </p:sld>
 </file>
 
-<file path=ppt/slides/slide19.xml><?xml version="1.0" encoding="utf-8"?>
+<file path=ppt/slides/slide16.xml><?xml version="1.0" encoding="utf-8"?>
 <p:sld xmlns:a="http://schemas.openxmlformats.org/drawingml/2006/main" xmlns:p="http://schemas.openxmlformats.org/presentationml/2006/main" xmlns:r="http://schemas.openxmlformats.org/officeDocument/2006/relationships">
   <p:cSld>
     <p:spTree>
@@ -15464,7 +13460,7 @@
               <a:rPr>
                 <a:latin typeface="Inter"/>
               </a:rPr>
-              <a:t>19</a:t>
+              <a:t>16</a:t>
             </a:r>
           </a:p>
         </p:txBody>
@@ -15477,7 +13473,7 @@
 </p:sld>
 </file>
 
-<file path=ppt/slides/slide2.xml><?xml version="1.0" encoding="utf-8"?>
+<file path=ppt/slides/slide17.xml><?xml version="1.0" encoding="utf-8"?>
 <p:sld xmlns:a="http://schemas.openxmlformats.org/drawingml/2006/main" xmlns:p="http://schemas.openxmlformats.org/presentationml/2006/main" xmlns:r="http://schemas.openxmlformats.org/officeDocument/2006/relationships">
   <p:cSld>
     <p:spTree>
@@ -15573,7 +13569,7 @@
               <a:rPr>
                 <a:latin typeface="Inter"/>
               </a:rPr>
-              <a:t>THREE COMPATIBLE GOVERNED LANES HAVE SERVER-RETURNED COMPARISON METRICS</a:t>
+              <a:t>GOVERNED COMPARISON RETURNS COMPATIBLE CROSS-LANE METRICS</a:t>
             </a:r>
           </a:p>
         </p:txBody>
@@ -15657,7 +13653,7 @@
               <a:rPr>
                 <a:latin typeface="Inter"/>
               </a:rPr>
-              <a:t>Executive Comparison</a:t>
+              <a:t>Cross-Lane Comparison — continued</a:t>
             </a:r>
           </a:p>
         </p:txBody>
@@ -15797,119 +13793,21 @@
               <a:rPr>
                 <a:latin typeface="Inter"/>
               </a:rPr>
-              <a:t>01</a:t>
+              <a:t>06</a:t>
             </a:r>
           </a:p>
         </p:txBody>
       </p:sp>
       <p:sp>
         <p:nvSpPr>
-          <p:cNvPr id="9" name="Rectangle 8"/>
-          <p:cNvSpPr/>
+          <p:cNvPr id="9" name="TextBox 8"/>
+          <p:cNvSpPr txBox="1"/>
           <p:nvPr/>
         </p:nvSpPr>
         <p:spPr>
           <a:xfrm>
             <a:off x="640080" y="1325880"/>
-            <a:ext cx="10908792" cy="1311602"/>
-          </a:xfrm>
-          <a:prstGeom prst="rect">
-            <a:avLst/>
-          </a:prstGeom>
-          <a:solidFill>
-            <a:srgbClr val="F5F7F9"/>
-          </a:solidFill>
-          <a:ln>
-            <a:solidFill>
-              <a:srgbClr val="E3E7EC"/>
-            </a:solidFill>
-          </a:ln>
-        </p:spPr>
-        <p:style>
-          <a:lnRef idx="1">
-            <a:schemeClr val="accent1"/>
-          </a:lnRef>
-          <a:fillRef idx="3">
-            <a:schemeClr val="accent1"/>
-          </a:fillRef>
-          <a:effectRef idx="2">
-            <a:schemeClr val="accent1"/>
-          </a:effectRef>
-          <a:fontRef idx="minor">
-            <a:schemeClr val="lt1"/>
-          </a:fontRef>
-        </p:style>
-        <p:txBody>
-          <a:bodyPr rtlCol="0" anchor="ctr"/>
-          <a:lstStyle/>
-          <a:p>
-            <a:pPr algn="ctr">
-              <a:defRPr>
-                <a:latin typeface="Inter"/>
-              </a:defRPr>
-            </a:pPr>
-          </a:p>
-        </p:txBody>
-      </p:sp>
-      <p:sp>
-        <p:nvSpPr>
-          <p:cNvPr id="10" name="Rectangle 9"/>
-          <p:cNvSpPr/>
-          <p:nvPr/>
-        </p:nvSpPr>
-        <p:spPr>
-          <a:xfrm>
-            <a:off x="640080" y="1325880"/>
-            <a:ext cx="54864" cy="1311602"/>
-          </a:xfrm>
-          <a:prstGeom prst="rect">
-            <a:avLst/>
-          </a:prstGeom>
-          <a:solidFill>
-            <a:srgbClr val="0D1117"/>
-          </a:solidFill>
-          <a:ln>
-            <a:solidFill>
-              <a:srgbClr val="0D1117"/>
-            </a:solidFill>
-          </a:ln>
-        </p:spPr>
-        <p:style>
-          <a:lnRef idx="1">
-            <a:schemeClr val="accent1"/>
-          </a:lnRef>
-          <a:fillRef idx="3">
-            <a:schemeClr val="accent1"/>
-          </a:fillRef>
-          <a:effectRef idx="2">
-            <a:schemeClr val="accent1"/>
-          </a:effectRef>
-          <a:fontRef idx="minor">
-            <a:schemeClr val="lt1"/>
-          </a:fontRef>
-        </p:style>
-        <p:txBody>
-          <a:bodyPr rtlCol="0" anchor="ctr"/>
-          <a:lstStyle/>
-          <a:p>
-            <a:pPr algn="ctr">
-              <a:defRPr>
-                <a:latin typeface="Inter"/>
-              </a:defRPr>
-            </a:pPr>
-          </a:p>
-        </p:txBody>
-      </p:sp>
-      <p:sp>
-        <p:nvSpPr>
-          <p:cNvPr id="11" name="TextBox 10"/>
-          <p:cNvSpPr txBox="1"/>
-          <p:nvPr/>
-        </p:nvSpPr>
-        <p:spPr>
-          <a:xfrm>
-            <a:off x="804671" y="1435607"/>
-            <a:ext cx="10616184" cy="228600"/>
+            <a:ext cx="5239512" cy="201168"/>
           </a:xfrm>
           <a:prstGeom prst="rect">
             <a:avLst/>
@@ -15926,49 +13824,7 @@
               <a:spcAft>
                 <a:spcPts val="0"/>
               </a:spcAft>
-              <a:defRPr sz="1000" b="1">
-                <a:solidFill>
-                  <a:srgbClr val="0D1117"/>
-                </a:solidFill>
-                <a:latin typeface="Inter"/>
-              </a:defRPr>
-            </a:pPr>
-            <a:r>
-              <a:rPr>
-                <a:latin typeface="Inter"/>
-              </a:rPr>
-              <a:t>Bottom line</a:t>
-            </a:r>
-          </a:p>
-        </p:txBody>
-      </p:sp>
-      <p:sp>
-        <p:nvSpPr>
-          <p:cNvPr id="12" name="TextBox 11"/>
-          <p:cNvSpPr txBox="1"/>
-          <p:nvPr/>
-        </p:nvSpPr>
-        <p:spPr>
-          <a:xfrm>
-            <a:off x="804671" y="1719072"/>
-            <a:ext cx="10616184" cy="826970"/>
-          </a:xfrm>
-          <a:prstGeom prst="rect">
-            <a:avLst/>
-          </a:prstGeom>
-          <a:noFill/>
-        </p:spPr>
-        <p:txBody>
-          <a:bodyPr wrap="none" lIns="9144" rIns="9144" tIns="9144" bIns="9144" anchor="t">
-            <a:spAutoFit/>
-          </a:bodyPr>
-          <a:lstStyle/>
-          <a:p>
-            <a:pPr algn="l">
-              <a:spcAft>
-                <a:spcPts val="0"/>
-              </a:spcAft>
-              <a:defRPr sz="950" b="0">
+              <a:defRPr sz="720" b="1">
                 <a:solidFill>
                   <a:srgbClr val="4A5563"/>
                 </a:solidFill>
@@ -15979,1050 +13835,39 @@
               <a:rPr>
                 <a:latin typeface="Inter"/>
               </a:rPr>
-              <a:t>Historical, ex ante, and simulated effects are compatible, and governed comparison metrics are available [S2][S3][S4][S5].</a:t>
+              <a:t>RETURNED LANE DIFFERENCES</a:t>
             </a:r>
           </a:p>
         </p:txBody>
       </p:sp>
-      <p:sp>
-        <p:nvSpPr>
-          <p:cNvPr id="13" name="Rectangle 12"/>
+      <p:graphicFrame>
+        <p:nvGraphicFramePr>
+          <p:cNvPr id="10" name="Chart 9"/>
+          <p:cNvGraphicFramePr>
+            <a:graphicFrameLocks noGrp="1"/>
+          </p:cNvGraphicFramePr>
+          <p:nvPr/>
+        </p:nvGraphicFramePr>
+        <p:xfrm>
+          <a:off x="640080" y="1600200"/>
+          <a:ext cx="5239512" cy="4617720"/>
+        </p:xfrm>
+        <a:graphic>
+          <a:graphicData uri="http://schemas.openxmlformats.org/drawingml/2006/chart">
+            <c:chart xmlns:c="http://schemas.openxmlformats.org/drawingml/2006/chart" r:id="rId2"/>
+          </a:graphicData>
+        </a:graphic>
+      </p:graphicFrame>
+      <p:sp>
+        <p:nvSpPr>
+          <p:cNvPr id="11" name="Rectangle 10"/>
           <p:cNvSpPr/>
           <p:nvPr/>
         </p:nvSpPr>
         <p:spPr>
           <a:xfrm>
-            <a:off x="640080" y="2747210"/>
-            <a:ext cx="2644902" cy="2049378"/>
-          </a:xfrm>
-          <a:prstGeom prst="rect">
-            <a:avLst/>
-          </a:prstGeom>
-          <a:solidFill>
-            <a:srgbClr val="F5F7F9"/>
-          </a:solidFill>
-          <a:ln>
-            <a:solidFill>
-              <a:srgbClr val="E3E7EC"/>
-            </a:solidFill>
-          </a:ln>
-        </p:spPr>
-        <p:style>
-          <a:lnRef idx="1">
-            <a:schemeClr val="accent1"/>
-          </a:lnRef>
-          <a:fillRef idx="3">
-            <a:schemeClr val="accent1"/>
-          </a:fillRef>
-          <a:effectRef idx="2">
-            <a:schemeClr val="accent1"/>
-          </a:effectRef>
-          <a:fontRef idx="minor">
-            <a:schemeClr val="lt1"/>
-          </a:fontRef>
-        </p:style>
-        <p:txBody>
-          <a:bodyPr rtlCol="0" anchor="ctr"/>
-          <a:lstStyle/>
-          <a:p>
-            <a:pPr algn="ctr">
-              <a:defRPr>
-                <a:latin typeface="Inter"/>
-              </a:defRPr>
-            </a:pPr>
-          </a:p>
-        </p:txBody>
-      </p:sp>
-      <p:sp>
-        <p:nvSpPr>
-          <p:cNvPr id="14" name="Rectangle 13"/>
-          <p:cNvSpPr/>
-          <p:nvPr/>
-        </p:nvSpPr>
-        <p:spPr>
-          <a:xfrm>
-            <a:off x="640080" y="2747210"/>
-            <a:ext cx="2644902" cy="45720"/>
-          </a:xfrm>
-          <a:prstGeom prst="rect">
-            <a:avLst/>
-          </a:prstGeom>
-          <a:solidFill>
-            <a:srgbClr val="9AA5B1"/>
-          </a:solidFill>
-          <a:ln>
-            <a:solidFill>
-              <a:srgbClr val="9AA5B1"/>
-            </a:solidFill>
-          </a:ln>
-        </p:spPr>
-        <p:style>
-          <a:lnRef idx="1">
-            <a:schemeClr val="accent1"/>
-          </a:lnRef>
-          <a:fillRef idx="3">
-            <a:schemeClr val="accent1"/>
-          </a:fillRef>
-          <a:effectRef idx="2">
-            <a:schemeClr val="accent1"/>
-          </a:effectRef>
-          <a:fontRef idx="minor">
-            <a:schemeClr val="lt1"/>
-          </a:fontRef>
-        </p:style>
-        <p:txBody>
-          <a:bodyPr rtlCol="0" anchor="ctr"/>
-          <a:lstStyle/>
-          <a:p>
-            <a:pPr algn="ctr">
-              <a:defRPr>
-                <a:latin typeface="Inter"/>
-              </a:defRPr>
-            </a:pPr>
-          </a:p>
-        </p:txBody>
-      </p:sp>
-      <p:sp>
-        <p:nvSpPr>
-          <p:cNvPr id="15" name="TextBox 14"/>
-          <p:cNvSpPr txBox="1"/>
-          <p:nvPr/>
-        </p:nvSpPr>
-        <p:spPr>
-          <a:xfrm>
-            <a:off x="749808" y="2875226"/>
-            <a:ext cx="2425446" cy="201168"/>
-          </a:xfrm>
-          <a:prstGeom prst="rect">
-            <a:avLst/>
-          </a:prstGeom>
-          <a:noFill/>
-        </p:spPr>
-        <p:txBody>
-          <a:bodyPr wrap="none" lIns="9144" rIns="9144" tIns="9144" bIns="9144" anchor="t">
-            <a:spAutoFit/>
-          </a:bodyPr>
-          <a:lstStyle/>
-          <a:p>
-            <a:pPr algn="l">
-              <a:spcAft>
-                <a:spcPts val="0"/>
-              </a:spcAft>
-              <a:defRPr sz="650" b="1">
-                <a:solidFill>
-                  <a:srgbClr val="4A5563"/>
-                </a:solidFill>
-                <a:latin typeface="Inter"/>
-              </a:defRPr>
-            </a:pPr>
-            <a:r>
-              <a:rPr>
-                <a:latin typeface="Inter"/>
-              </a:rPr>
-              <a:t>HISTORICAL LANE</a:t>
-            </a:r>
-          </a:p>
-        </p:txBody>
-      </p:sp>
-      <p:sp>
-        <p:nvSpPr>
-          <p:cNvPr id="16" name="TextBox 15"/>
-          <p:cNvSpPr txBox="1"/>
-          <p:nvPr/>
-        </p:nvSpPr>
-        <p:spPr>
-          <a:xfrm>
-            <a:off x="749808" y="3131258"/>
-            <a:ext cx="2425446" cy="475488"/>
-          </a:xfrm>
-          <a:prstGeom prst="rect">
-            <a:avLst/>
-          </a:prstGeom>
-          <a:noFill/>
-        </p:spPr>
-        <p:txBody>
-          <a:bodyPr wrap="none" lIns="9144" rIns="9144" tIns="9144" bIns="9144" anchor="t">
-            <a:spAutoFit/>
-          </a:bodyPr>
-          <a:lstStyle/>
-          <a:p>
-            <a:pPr algn="l">
-              <a:spcAft>
-                <a:spcPts val="0"/>
-              </a:spcAft>
-              <a:defRPr sz="1800" b="1">
-                <a:solidFill>
-                  <a:srgbClr val="0D1117"/>
-                </a:solidFill>
-                <a:latin typeface="Inter"/>
-              </a:defRPr>
-            </a:pPr>
-            <a:r>
-              <a:rPr>
-                <a:latin typeface="Inter"/>
-              </a:rPr>
-              <a:t>Available</a:t>
-            </a:r>
-          </a:p>
-        </p:txBody>
-      </p:sp>
-      <p:sp>
-        <p:nvSpPr>
-          <p:cNvPr id="17" name="TextBox 16"/>
-          <p:cNvSpPr txBox="1"/>
-          <p:nvPr/>
-        </p:nvSpPr>
-        <p:spPr>
-          <a:xfrm>
-            <a:off x="749808" y="4467405"/>
-            <a:ext cx="2425446" cy="228600"/>
-          </a:xfrm>
-          <a:prstGeom prst="rect">
-            <a:avLst/>
-          </a:prstGeom>
-          <a:noFill/>
-        </p:spPr>
-        <p:txBody>
-          <a:bodyPr wrap="none" lIns="9144" rIns="9144" tIns="9144" bIns="9144" anchor="t">
-            <a:spAutoFit/>
-          </a:bodyPr>
-          <a:lstStyle/>
-          <a:p>
-            <a:pPr algn="l">
-              <a:spcAft>
-                <a:spcPts val="0"/>
-              </a:spcAft>
-              <a:defRPr sz="700" b="0">
-                <a:solidFill>
-                  <a:srgbClr val="4A5563"/>
-                </a:solidFill>
-                <a:latin typeface="Inter"/>
-              </a:defRPr>
-            </a:pPr>
-            <a:r>
-              <a:rPr>
-                <a:latin typeface="Inter"/>
-              </a:rPr>
-              <a:t>Realized 12 months · 2025-07-01 to 2026-06-30 [S2]</a:t>
-            </a:r>
-          </a:p>
-        </p:txBody>
-      </p:sp>
-      <p:sp>
-        <p:nvSpPr>
-          <p:cNvPr id="18" name="Rectangle 17"/>
-          <p:cNvSpPr/>
-          <p:nvPr/>
-        </p:nvSpPr>
-        <p:spPr>
-          <a:xfrm>
-            <a:off x="3394710" y="2747210"/>
-            <a:ext cx="2644902" cy="2049378"/>
-          </a:xfrm>
-          <a:prstGeom prst="rect">
-            <a:avLst/>
-          </a:prstGeom>
-          <a:solidFill>
-            <a:srgbClr val="F5F7F9"/>
-          </a:solidFill>
-          <a:ln>
-            <a:solidFill>
-              <a:srgbClr val="E3E7EC"/>
-            </a:solidFill>
-          </a:ln>
-        </p:spPr>
-        <p:style>
-          <a:lnRef idx="1">
-            <a:schemeClr val="accent1"/>
-          </a:lnRef>
-          <a:fillRef idx="3">
-            <a:schemeClr val="accent1"/>
-          </a:fillRef>
-          <a:effectRef idx="2">
-            <a:schemeClr val="accent1"/>
-          </a:effectRef>
-          <a:fontRef idx="minor">
-            <a:schemeClr val="lt1"/>
-          </a:fontRef>
-        </p:style>
-        <p:txBody>
-          <a:bodyPr rtlCol="0" anchor="ctr"/>
-          <a:lstStyle/>
-          <a:p>
-            <a:pPr algn="ctr">
-              <a:defRPr>
-                <a:latin typeface="Inter"/>
-              </a:defRPr>
-            </a:pPr>
-          </a:p>
-        </p:txBody>
-      </p:sp>
-      <p:sp>
-        <p:nvSpPr>
-          <p:cNvPr id="19" name="Rectangle 18"/>
-          <p:cNvSpPr/>
-          <p:nvPr/>
-        </p:nvSpPr>
-        <p:spPr>
-          <a:xfrm>
-            <a:off x="3394710" y="2747210"/>
-            <a:ext cx="2644902" cy="45720"/>
-          </a:xfrm>
-          <a:prstGeom prst="rect">
-            <a:avLst/>
-          </a:prstGeom>
-          <a:solidFill>
-            <a:srgbClr val="9AA5B1"/>
-          </a:solidFill>
-          <a:ln>
-            <a:solidFill>
-              <a:srgbClr val="9AA5B1"/>
-            </a:solidFill>
-          </a:ln>
-        </p:spPr>
-        <p:style>
-          <a:lnRef idx="1">
-            <a:schemeClr val="accent1"/>
-          </a:lnRef>
-          <a:fillRef idx="3">
-            <a:schemeClr val="accent1"/>
-          </a:fillRef>
-          <a:effectRef idx="2">
-            <a:schemeClr val="accent1"/>
-          </a:effectRef>
-          <a:fontRef idx="minor">
-            <a:schemeClr val="lt1"/>
-          </a:fontRef>
-        </p:style>
-        <p:txBody>
-          <a:bodyPr rtlCol="0" anchor="ctr"/>
-          <a:lstStyle/>
-          <a:p>
-            <a:pPr algn="ctr">
-              <a:defRPr>
-                <a:latin typeface="Inter"/>
-              </a:defRPr>
-            </a:pPr>
-          </a:p>
-        </p:txBody>
-      </p:sp>
-      <p:sp>
-        <p:nvSpPr>
-          <p:cNvPr id="20" name="TextBox 19"/>
-          <p:cNvSpPr txBox="1"/>
-          <p:nvPr/>
-        </p:nvSpPr>
-        <p:spPr>
-          <a:xfrm>
-            <a:off x="3504438" y="2875226"/>
-            <a:ext cx="2425446" cy="201168"/>
-          </a:xfrm>
-          <a:prstGeom prst="rect">
-            <a:avLst/>
-          </a:prstGeom>
-          <a:noFill/>
-        </p:spPr>
-        <p:txBody>
-          <a:bodyPr wrap="none" lIns="9144" rIns="9144" tIns="9144" bIns="9144" anchor="t">
-            <a:spAutoFit/>
-          </a:bodyPr>
-          <a:lstStyle/>
-          <a:p>
-            <a:pPr algn="l">
-              <a:spcAft>
-                <a:spcPts val="0"/>
-              </a:spcAft>
-              <a:defRPr sz="650" b="1">
-                <a:solidFill>
-                  <a:srgbClr val="4A5563"/>
-                </a:solidFill>
-                <a:latin typeface="Inter"/>
-              </a:defRPr>
-            </a:pPr>
-            <a:r>
-              <a:rPr>
-                <a:latin typeface="Inter"/>
-              </a:rPr>
-              <a:t>EX ANTE LANE</a:t>
-            </a:r>
-          </a:p>
-        </p:txBody>
-      </p:sp>
-      <p:sp>
-        <p:nvSpPr>
-          <p:cNvPr id="21" name="TextBox 20"/>
-          <p:cNvSpPr txBox="1"/>
-          <p:nvPr/>
-        </p:nvSpPr>
-        <p:spPr>
-          <a:xfrm>
-            <a:off x="3504438" y="3131258"/>
-            <a:ext cx="2425446" cy="475488"/>
-          </a:xfrm>
-          <a:prstGeom prst="rect">
-            <a:avLst/>
-          </a:prstGeom>
-          <a:noFill/>
-        </p:spPr>
-        <p:txBody>
-          <a:bodyPr wrap="none" lIns="9144" rIns="9144" tIns="9144" bIns="9144" anchor="t">
-            <a:spAutoFit/>
-          </a:bodyPr>
-          <a:lstStyle/>
-          <a:p>
-            <a:pPr algn="l">
-              <a:spcAft>
-                <a:spcPts val="0"/>
-              </a:spcAft>
-              <a:defRPr sz="1800" b="1">
-                <a:solidFill>
-                  <a:srgbClr val="0D1117"/>
-                </a:solidFill>
-                <a:latin typeface="Inter"/>
-              </a:defRPr>
-            </a:pPr>
-            <a:r>
-              <a:rPr>
-                <a:latin typeface="Inter"/>
-              </a:rPr>
-              <a:t>Available</a:t>
-            </a:r>
-          </a:p>
-        </p:txBody>
-      </p:sp>
-      <p:sp>
-        <p:nvSpPr>
-          <p:cNvPr id="22" name="TextBox 21"/>
-          <p:cNvSpPr txBox="1"/>
-          <p:nvPr/>
-        </p:nvSpPr>
-        <p:spPr>
-          <a:xfrm>
-            <a:off x="3504438" y="4467405"/>
-            <a:ext cx="2425446" cy="228600"/>
-          </a:xfrm>
-          <a:prstGeom prst="rect">
-            <a:avLst/>
-          </a:prstGeom>
-          <a:noFill/>
-        </p:spPr>
-        <p:txBody>
-          <a:bodyPr wrap="none" lIns="9144" rIns="9144" tIns="9144" bIns="9144" anchor="t">
-            <a:spAutoFit/>
-          </a:bodyPr>
-          <a:lstStyle/>
-          <a:p>
-            <a:pPr algn="l">
-              <a:spcAft>
-                <a:spcPts val="0"/>
-              </a:spcAft>
-              <a:defRPr sz="700" b="0">
-                <a:solidFill>
-                  <a:srgbClr val="4A5563"/>
-                </a:solidFill>
-                <a:latin typeface="Inter"/>
-              </a:defRPr>
-            </a:pPr>
-            <a:r>
-              <a:rPr>
-                <a:latin typeface="Inter"/>
-              </a:rPr>
-              <a:t>1-year expected [S3]</a:t>
-            </a:r>
-          </a:p>
-        </p:txBody>
-      </p:sp>
-      <p:sp>
-        <p:nvSpPr>
-          <p:cNvPr id="23" name="Rectangle 22"/>
-          <p:cNvSpPr/>
-          <p:nvPr/>
-        </p:nvSpPr>
-        <p:spPr>
-          <a:xfrm>
-            <a:off x="6149340" y="2747210"/>
-            <a:ext cx="2644902" cy="2049378"/>
-          </a:xfrm>
-          <a:prstGeom prst="rect">
-            <a:avLst/>
-          </a:prstGeom>
-          <a:solidFill>
-            <a:srgbClr val="F5F7F9"/>
-          </a:solidFill>
-          <a:ln>
-            <a:solidFill>
-              <a:srgbClr val="E3E7EC"/>
-            </a:solidFill>
-          </a:ln>
-        </p:spPr>
-        <p:style>
-          <a:lnRef idx="1">
-            <a:schemeClr val="accent1"/>
-          </a:lnRef>
-          <a:fillRef idx="3">
-            <a:schemeClr val="accent1"/>
-          </a:fillRef>
-          <a:effectRef idx="2">
-            <a:schemeClr val="accent1"/>
-          </a:effectRef>
-          <a:fontRef idx="minor">
-            <a:schemeClr val="lt1"/>
-          </a:fontRef>
-        </p:style>
-        <p:txBody>
-          <a:bodyPr rtlCol="0" anchor="ctr"/>
-          <a:lstStyle/>
-          <a:p>
-            <a:pPr algn="ctr">
-              <a:defRPr>
-                <a:latin typeface="Inter"/>
-              </a:defRPr>
-            </a:pPr>
-          </a:p>
-        </p:txBody>
-      </p:sp>
-      <p:sp>
-        <p:nvSpPr>
-          <p:cNvPr id="24" name="Rectangle 23"/>
-          <p:cNvSpPr/>
-          <p:nvPr/>
-        </p:nvSpPr>
-        <p:spPr>
-          <a:xfrm>
-            <a:off x="6149340" y="2747210"/>
-            <a:ext cx="2644902" cy="45720"/>
-          </a:xfrm>
-          <a:prstGeom prst="rect">
-            <a:avLst/>
-          </a:prstGeom>
-          <a:solidFill>
-            <a:srgbClr val="9AA5B1"/>
-          </a:solidFill>
-          <a:ln>
-            <a:solidFill>
-              <a:srgbClr val="9AA5B1"/>
-            </a:solidFill>
-          </a:ln>
-        </p:spPr>
-        <p:style>
-          <a:lnRef idx="1">
-            <a:schemeClr val="accent1"/>
-          </a:lnRef>
-          <a:fillRef idx="3">
-            <a:schemeClr val="accent1"/>
-          </a:fillRef>
-          <a:effectRef idx="2">
-            <a:schemeClr val="accent1"/>
-          </a:effectRef>
-          <a:fontRef idx="minor">
-            <a:schemeClr val="lt1"/>
-          </a:fontRef>
-        </p:style>
-        <p:txBody>
-          <a:bodyPr rtlCol="0" anchor="ctr"/>
-          <a:lstStyle/>
-          <a:p>
-            <a:pPr algn="ctr">
-              <a:defRPr>
-                <a:latin typeface="Inter"/>
-              </a:defRPr>
-            </a:pPr>
-          </a:p>
-        </p:txBody>
-      </p:sp>
-      <p:sp>
-        <p:nvSpPr>
-          <p:cNvPr id="25" name="TextBox 24"/>
-          <p:cNvSpPr txBox="1"/>
-          <p:nvPr/>
-        </p:nvSpPr>
-        <p:spPr>
-          <a:xfrm>
-            <a:off x="6259068" y="2875226"/>
-            <a:ext cx="2425446" cy="201168"/>
-          </a:xfrm>
-          <a:prstGeom prst="rect">
-            <a:avLst/>
-          </a:prstGeom>
-          <a:noFill/>
-        </p:spPr>
-        <p:txBody>
-          <a:bodyPr wrap="none" lIns="9144" rIns="9144" tIns="9144" bIns="9144" anchor="t">
-            <a:spAutoFit/>
-          </a:bodyPr>
-          <a:lstStyle/>
-          <a:p>
-            <a:pPr algn="l">
-              <a:spcAft>
-                <a:spcPts val="0"/>
-              </a:spcAft>
-              <a:defRPr sz="650" b="1">
-                <a:solidFill>
-                  <a:srgbClr val="4A5563"/>
-                </a:solidFill>
-                <a:latin typeface="Inter"/>
-              </a:defRPr>
-            </a:pPr>
-            <a:r>
-              <a:rPr>
-                <a:latin typeface="Inter"/>
-              </a:rPr>
-              <a:t>SIMULATED LANE</a:t>
-            </a:r>
-          </a:p>
-        </p:txBody>
-      </p:sp>
-      <p:sp>
-        <p:nvSpPr>
-          <p:cNvPr id="26" name="TextBox 25"/>
-          <p:cNvSpPr txBox="1"/>
-          <p:nvPr/>
-        </p:nvSpPr>
-        <p:spPr>
-          <a:xfrm>
-            <a:off x="6259068" y="3131258"/>
-            <a:ext cx="2425446" cy="475488"/>
-          </a:xfrm>
-          <a:prstGeom prst="rect">
-            <a:avLst/>
-          </a:prstGeom>
-          <a:noFill/>
-        </p:spPr>
-        <p:txBody>
-          <a:bodyPr wrap="none" lIns="9144" rIns="9144" tIns="9144" bIns="9144" anchor="t">
-            <a:spAutoFit/>
-          </a:bodyPr>
-          <a:lstStyle/>
-          <a:p>
-            <a:pPr algn="l">
-              <a:spcAft>
-                <a:spcPts val="0"/>
-              </a:spcAft>
-              <a:defRPr sz="1800" b="1">
-                <a:solidFill>
-                  <a:srgbClr val="0D1117"/>
-                </a:solidFill>
-                <a:latin typeface="Inter"/>
-              </a:defRPr>
-            </a:pPr>
-            <a:r>
-              <a:rPr>
-                <a:latin typeface="Inter"/>
-              </a:rPr>
-              <a:t>Available</a:t>
-            </a:r>
-          </a:p>
-        </p:txBody>
-      </p:sp>
-      <p:sp>
-        <p:nvSpPr>
-          <p:cNvPr id="27" name="TextBox 26"/>
-          <p:cNvSpPr txBox="1"/>
-          <p:nvPr/>
-        </p:nvSpPr>
-        <p:spPr>
-          <a:xfrm>
-            <a:off x="6259068" y="4467405"/>
-            <a:ext cx="2425446" cy="228600"/>
-          </a:xfrm>
-          <a:prstGeom prst="rect">
-            <a:avLst/>
-          </a:prstGeom>
-          <a:noFill/>
-        </p:spPr>
-        <p:txBody>
-          <a:bodyPr wrap="none" lIns="9144" rIns="9144" tIns="9144" bIns="9144" anchor="t">
-            <a:spAutoFit/>
-          </a:bodyPr>
-          <a:lstStyle/>
-          <a:p>
-            <a:pPr algn="l">
-              <a:spcAft>
-                <a:spcPts val="0"/>
-              </a:spcAft>
-              <a:defRPr sz="700" b="0">
-                <a:solidFill>
-                  <a:srgbClr val="4A5563"/>
-                </a:solidFill>
-                <a:latin typeface="Inter"/>
-              </a:defRPr>
-            </a:pPr>
-            <a:r>
-              <a:rPr>
-                <a:latin typeface="Inter"/>
-              </a:rPr>
-              <a:t>1-year simulated · governed scenario [S4]</a:t>
-            </a:r>
-          </a:p>
-        </p:txBody>
-      </p:sp>
-      <p:sp>
-        <p:nvSpPr>
-          <p:cNvPr id="28" name="Rectangle 27"/>
-          <p:cNvSpPr/>
-          <p:nvPr/>
-        </p:nvSpPr>
-        <p:spPr>
-          <a:xfrm>
-            <a:off x="8903970" y="2747210"/>
-            <a:ext cx="2644902" cy="2049378"/>
-          </a:xfrm>
-          <a:prstGeom prst="rect">
-            <a:avLst/>
-          </a:prstGeom>
-          <a:solidFill>
-            <a:srgbClr val="F5F7F9"/>
-          </a:solidFill>
-          <a:ln>
-            <a:solidFill>
-              <a:srgbClr val="E3E7EC"/>
-            </a:solidFill>
-          </a:ln>
-        </p:spPr>
-        <p:style>
-          <a:lnRef idx="1">
-            <a:schemeClr val="accent1"/>
-          </a:lnRef>
-          <a:fillRef idx="3">
-            <a:schemeClr val="accent1"/>
-          </a:fillRef>
-          <a:effectRef idx="2">
-            <a:schemeClr val="accent1"/>
-          </a:effectRef>
-          <a:fontRef idx="minor">
-            <a:schemeClr val="lt1"/>
-          </a:fontRef>
-        </p:style>
-        <p:txBody>
-          <a:bodyPr rtlCol="0" anchor="ctr"/>
-          <a:lstStyle/>
-          <a:p>
-            <a:pPr algn="ctr">
-              <a:defRPr>
-                <a:latin typeface="Inter"/>
-              </a:defRPr>
-            </a:pPr>
-          </a:p>
-        </p:txBody>
-      </p:sp>
-      <p:sp>
-        <p:nvSpPr>
-          <p:cNvPr id="29" name="Rectangle 28"/>
-          <p:cNvSpPr/>
-          <p:nvPr/>
-        </p:nvSpPr>
-        <p:spPr>
-          <a:xfrm>
-            <a:off x="8903970" y="2747210"/>
-            <a:ext cx="2644902" cy="45720"/>
-          </a:xfrm>
-          <a:prstGeom prst="rect">
-            <a:avLst/>
-          </a:prstGeom>
-          <a:solidFill>
-            <a:srgbClr val="9AA5B1"/>
-          </a:solidFill>
-          <a:ln>
-            <a:solidFill>
-              <a:srgbClr val="9AA5B1"/>
-            </a:solidFill>
-          </a:ln>
-        </p:spPr>
-        <p:style>
-          <a:lnRef idx="1">
-            <a:schemeClr val="accent1"/>
-          </a:lnRef>
-          <a:fillRef idx="3">
-            <a:schemeClr val="accent1"/>
-          </a:fillRef>
-          <a:effectRef idx="2">
-            <a:schemeClr val="accent1"/>
-          </a:effectRef>
-          <a:fontRef idx="minor">
-            <a:schemeClr val="lt1"/>
-          </a:fontRef>
-        </p:style>
-        <p:txBody>
-          <a:bodyPr rtlCol="0" anchor="ctr"/>
-          <a:lstStyle/>
-          <a:p>
-            <a:pPr algn="ctr">
-              <a:defRPr>
-                <a:latin typeface="Inter"/>
-              </a:defRPr>
-            </a:pPr>
-          </a:p>
-        </p:txBody>
-      </p:sp>
-      <p:sp>
-        <p:nvSpPr>
-          <p:cNvPr id="30" name="TextBox 29"/>
-          <p:cNvSpPr txBox="1"/>
-          <p:nvPr/>
-        </p:nvSpPr>
-        <p:spPr>
-          <a:xfrm>
-            <a:off x="9013698" y="2875226"/>
-            <a:ext cx="2425446" cy="201168"/>
-          </a:xfrm>
-          <a:prstGeom prst="rect">
-            <a:avLst/>
-          </a:prstGeom>
-          <a:noFill/>
-        </p:spPr>
-        <p:txBody>
-          <a:bodyPr wrap="none" lIns="9144" rIns="9144" tIns="9144" bIns="9144" anchor="t">
-            <a:spAutoFit/>
-          </a:bodyPr>
-          <a:lstStyle/>
-          <a:p>
-            <a:pPr algn="l">
-              <a:spcAft>
-                <a:spcPts val="0"/>
-              </a:spcAft>
-              <a:defRPr sz="650" b="1">
-                <a:solidFill>
-                  <a:srgbClr val="4A5563"/>
-                </a:solidFill>
-                <a:latin typeface="Inter"/>
-              </a:defRPr>
-            </a:pPr>
-            <a:r>
-              <a:rPr>
-                <a:latin typeface="Inter"/>
-              </a:rPr>
-              <a:t>COMPARISON COVERAGE</a:t>
-            </a:r>
-          </a:p>
-        </p:txBody>
-      </p:sp>
-      <p:sp>
-        <p:nvSpPr>
-          <p:cNvPr id="31" name="TextBox 30"/>
-          <p:cNvSpPr txBox="1"/>
-          <p:nvPr/>
-        </p:nvSpPr>
-        <p:spPr>
-          <a:xfrm>
-            <a:off x="9013698" y="3131258"/>
-            <a:ext cx="2425446" cy="475488"/>
-          </a:xfrm>
-          <a:prstGeom prst="rect">
-            <a:avLst/>
-          </a:prstGeom>
-          <a:noFill/>
-        </p:spPr>
-        <p:txBody>
-          <a:bodyPr wrap="none" lIns="9144" rIns="9144" tIns="9144" bIns="9144" anchor="t">
-            <a:spAutoFit/>
-          </a:bodyPr>
-          <a:lstStyle/>
-          <a:p>
-            <a:pPr algn="l">
-              <a:spcAft>
-                <a:spcPts val="0"/>
-              </a:spcAft>
-              <a:defRPr sz="1800" b="1">
-                <a:solidFill>
-                  <a:srgbClr val="0D1117"/>
-                </a:solidFill>
-                <a:latin typeface="Inter"/>
-              </a:defRPr>
-            </a:pPr>
-            <a:r>
-              <a:rPr>
-                <a:latin typeface="Inter"/>
-              </a:rPr>
-              <a:t>Complete</a:t>
-            </a:r>
-          </a:p>
-        </p:txBody>
-      </p:sp>
-      <p:sp>
-        <p:nvSpPr>
-          <p:cNvPr id="32" name="TextBox 31"/>
-          <p:cNvSpPr txBox="1"/>
-          <p:nvPr/>
-        </p:nvSpPr>
-        <p:spPr>
-          <a:xfrm>
-            <a:off x="9013698" y="4467405"/>
-            <a:ext cx="2425446" cy="228600"/>
-          </a:xfrm>
-          <a:prstGeom prst="rect">
-            <a:avLst/>
-          </a:prstGeom>
-          <a:noFill/>
-        </p:spPr>
-        <p:txBody>
-          <a:bodyPr wrap="none" lIns="9144" rIns="9144" tIns="9144" bIns="9144" anchor="t">
-            <a:spAutoFit/>
-          </a:bodyPr>
-          <a:lstStyle/>
-          <a:p>
-            <a:pPr algn="l">
-              <a:spcAft>
-                <a:spcPts val="0"/>
-              </a:spcAft>
-              <a:defRPr sz="700" b="0">
-                <a:solidFill>
-                  <a:srgbClr val="4A5563"/>
-                </a:solidFill>
-                <a:latin typeface="Inter"/>
-              </a:defRPr>
-            </a:pPr>
-            <a:r>
-              <a:rPr>
-                <a:latin typeface="Inter"/>
-              </a:rPr>
-              <a:t>Server-returned comparison · compatible receipts [S5]</a:t>
-            </a:r>
-          </a:p>
-        </p:txBody>
-      </p:sp>
-      <p:sp>
-        <p:nvSpPr>
-          <p:cNvPr id="33" name="Rectangle 32"/>
-          <p:cNvSpPr/>
-          <p:nvPr/>
-        </p:nvSpPr>
-        <p:spPr>
-          <a:xfrm>
-            <a:off x="640080" y="4979469"/>
-            <a:ext cx="73152" cy="1165298"/>
-          </a:xfrm>
-          <a:prstGeom prst="rect">
-            <a:avLst/>
-          </a:prstGeom>
-          <a:solidFill>
-            <a:srgbClr val="C6F432"/>
-          </a:solidFill>
-          <a:ln>
-            <a:solidFill>
-              <a:srgbClr val="C6F432"/>
-            </a:solidFill>
-          </a:ln>
-        </p:spPr>
-        <p:style>
-          <a:lnRef idx="1">
-            <a:schemeClr val="accent1"/>
-          </a:lnRef>
-          <a:fillRef idx="3">
-            <a:schemeClr val="accent1"/>
-          </a:fillRef>
-          <a:effectRef idx="2">
-            <a:schemeClr val="accent1"/>
-          </a:effectRef>
-          <a:fontRef idx="minor">
-            <a:schemeClr val="lt1"/>
-          </a:fontRef>
-        </p:style>
-        <p:txBody>
-          <a:bodyPr rtlCol="0" anchor="ctr"/>
-          <a:lstStyle/>
-          <a:p>
-            <a:pPr algn="ctr">
-              <a:defRPr>
-                <a:latin typeface="Inter"/>
-              </a:defRPr>
-            </a:pPr>
-          </a:p>
-        </p:txBody>
-      </p:sp>
-      <p:sp>
-        <p:nvSpPr>
-          <p:cNvPr id="34" name="TextBox 33"/>
-          <p:cNvSpPr txBox="1"/>
-          <p:nvPr/>
-        </p:nvSpPr>
-        <p:spPr>
-          <a:xfrm>
-            <a:off x="896112" y="4952037"/>
-            <a:ext cx="10588752" cy="760729"/>
-          </a:xfrm>
-          <a:prstGeom prst="rect">
-            <a:avLst/>
-          </a:prstGeom>
-          <a:noFill/>
-        </p:spPr>
-        <p:txBody>
-          <a:bodyPr wrap="none" lIns="9144" rIns="9144" tIns="9144" bIns="9144" anchor="t">
-            <a:spAutoFit/>
-          </a:bodyPr>
-          <a:lstStyle/>
-          <a:p>
-            <a:pPr algn="l">
-              <a:spcAft>
-                <a:spcPts val="0"/>
-              </a:spcAft>
-              <a:defRPr sz="1800" b="1">
-                <a:solidFill>
-                  <a:srgbClr val="0D1117"/>
-                </a:solidFill>
-                <a:latin typeface="Inter"/>
-              </a:defRPr>
-            </a:pPr>
-            <a:r>
-              <a:rPr>
-                <a:latin typeface="Inter"/>
-              </a:rPr>
-              <a:t>Three governed returned lanes and comparison metrics are available [S2][S3][S4][S5].</a:t>
-            </a:r>
-          </a:p>
-        </p:txBody>
-      </p:sp>
-      <p:sp>
-        <p:nvSpPr>
-          <p:cNvPr id="35" name="TextBox 34"/>
-          <p:cNvSpPr txBox="1"/>
-          <p:nvPr/>
-        </p:nvSpPr>
-        <p:spPr>
-          <a:xfrm>
-            <a:off x="896112" y="5693278"/>
-            <a:ext cx="10588752" cy="393480"/>
-          </a:xfrm>
-          <a:prstGeom prst="rect">
-            <a:avLst/>
-          </a:prstGeom>
-          <a:noFill/>
-        </p:spPr>
-        <p:txBody>
-          <a:bodyPr wrap="none" lIns="9144" rIns="9144" tIns="9144" bIns="9144" anchor="t">
-            <a:spAutoFit/>
-          </a:bodyPr>
-          <a:lstStyle/>
-          <a:p>
-            <a:pPr algn="l">
-              <a:spcAft>
-                <a:spcPts val="0"/>
-              </a:spcAft>
-              <a:defRPr sz="900" b="0">
-                <a:solidFill>
-                  <a:srgbClr val="4A5563"/>
-                </a:solidFill>
-                <a:latin typeface="Inter"/>
-              </a:defRPr>
-            </a:pPr>
-            <a:r>
-              <a:rPr>
-                <a:latin typeface="Inter"/>
-              </a:rPr>
-              <a:t>Returned evidence only; no local subtraction or accumulation.</a:t>
-            </a:r>
-          </a:p>
-        </p:txBody>
-      </p:sp>
-      <p:sp>
-        <p:nvSpPr>
-          <p:cNvPr id="36" name="Rectangle 35"/>
-          <p:cNvSpPr/>
-          <p:nvPr/>
-        </p:nvSpPr>
-        <p:spPr>
-          <a:xfrm>
-            <a:off x="640080" y="6446520"/>
-            <a:ext cx="10908792" cy="9144"/>
+            <a:off x="6080760" y="1325880"/>
+            <a:ext cx="9144" cy="4892040"/>
           </a:xfrm>
           <a:prstGeom prst="rect">
             <a:avLst/>
@@ -17064,7 +13909,116 @@
       </p:sp>
       <p:sp>
         <p:nvSpPr>
-          <p:cNvPr id="37" name="TextBox 36"/>
+          <p:cNvPr id="12" name="TextBox 11"/>
+          <p:cNvSpPr txBox="1"/>
+          <p:nvPr/>
+        </p:nvSpPr>
+        <p:spPr>
+          <a:xfrm>
+            <a:off x="6309360" y="1325880"/>
+            <a:ext cx="5239512" cy="201168"/>
+          </a:xfrm>
+          <a:prstGeom prst="rect">
+            <a:avLst/>
+          </a:prstGeom>
+          <a:noFill/>
+        </p:spPr>
+        <p:txBody>
+          <a:bodyPr wrap="none" lIns="9144" rIns="9144" tIns="9144" bIns="9144" anchor="t">
+            <a:spAutoFit/>
+          </a:bodyPr>
+          <a:lstStyle/>
+          <a:p>
+            <a:pPr algn="l">
+              <a:spcAft>
+                <a:spcPts val="0"/>
+              </a:spcAft>
+              <a:defRPr sz="720" b="1">
+                <a:solidFill>
+                  <a:srgbClr val="4A5563"/>
+                </a:solidFill>
+                <a:latin typeface="Inter"/>
+              </a:defRPr>
+            </a:pPr>
+            <a:r>
+              <a:rPr>
+                <a:latin typeface="Inter"/>
+              </a:rPr>
+              <a:t>RETURNED CONCENTRATION</a:t>
+            </a:r>
+          </a:p>
+        </p:txBody>
+      </p:sp>
+      <p:graphicFrame>
+        <p:nvGraphicFramePr>
+          <p:cNvPr id="13" name="Chart 12"/>
+          <p:cNvGraphicFramePr>
+            <a:graphicFrameLocks noGrp="1"/>
+          </p:cNvGraphicFramePr>
+          <p:nvPr/>
+        </p:nvGraphicFramePr>
+        <p:xfrm>
+          <a:off x="6309360" y="1600200"/>
+          <a:ext cx="5239512" cy="4617720"/>
+        </p:xfrm>
+        <a:graphic>
+          <a:graphicData uri="http://schemas.openxmlformats.org/drawingml/2006/chart">
+            <c:chart xmlns:c="http://schemas.openxmlformats.org/drawingml/2006/chart" r:id="rId3"/>
+          </a:graphicData>
+        </a:graphic>
+      </p:graphicFrame>
+      <p:sp>
+        <p:nvSpPr>
+          <p:cNvPr id="14" name="Rectangle 13"/>
+          <p:cNvSpPr/>
+          <p:nvPr/>
+        </p:nvSpPr>
+        <p:spPr>
+          <a:xfrm>
+            <a:off x="640080" y="6446520"/>
+            <a:ext cx="10908792" cy="9144"/>
+          </a:xfrm>
+          <a:prstGeom prst="rect">
+            <a:avLst/>
+          </a:prstGeom>
+          <a:solidFill>
+            <a:srgbClr val="E3E7EC"/>
+          </a:solidFill>
+          <a:ln>
+            <a:solidFill>
+              <a:srgbClr val="E3E7EC"/>
+            </a:solidFill>
+          </a:ln>
+        </p:spPr>
+        <p:style>
+          <a:lnRef idx="1">
+            <a:schemeClr val="accent1"/>
+          </a:lnRef>
+          <a:fillRef idx="3">
+            <a:schemeClr val="accent1"/>
+          </a:fillRef>
+          <a:effectRef idx="2">
+            <a:schemeClr val="accent1"/>
+          </a:effectRef>
+          <a:fontRef idx="minor">
+            <a:schemeClr val="lt1"/>
+          </a:fontRef>
+        </p:style>
+        <p:txBody>
+          <a:bodyPr rtlCol="0" anchor="ctr"/>
+          <a:lstStyle/>
+          <a:p>
+            <a:pPr algn="ctr">
+              <a:defRPr>
+                <a:latin typeface="Inter"/>
+              </a:defRPr>
+            </a:pPr>
+          </a:p>
+        </p:txBody>
+      </p:sp>
+      <p:sp>
+        <p:nvSpPr>
+          <p:cNvPr id="15" name="TextBox 14"/>
           <p:cNvSpPr txBox="1"/>
           <p:nvPr/>
         </p:nvSpPr>
@@ -17099,14 +14053,14 @@
               <a:rPr>
                 <a:latin typeface="Inter"/>
               </a:rPr>
-              <a:t>Sources: S2 · S3 · S4 · S5</a:t>
+              <a:t>Sources: S5</a:t>
             </a:r>
           </a:p>
         </p:txBody>
       </p:sp>
       <p:sp>
         <p:nvSpPr>
-          <p:cNvPr id="38" name="TextBox 37"/>
+          <p:cNvPr id="16" name="TextBox 15"/>
           <p:cNvSpPr txBox="1"/>
           <p:nvPr/>
         </p:nvSpPr>
@@ -17148,7 +14102,7 @@
       </p:sp>
       <p:sp>
         <p:nvSpPr>
-          <p:cNvPr id="39" name="TextBox 38"/>
+          <p:cNvPr id="17" name="TextBox 16"/>
           <p:cNvSpPr txBox="1"/>
           <p:nvPr/>
         </p:nvSpPr>
@@ -17183,7 +14137,7 @@
               <a:rPr>
                 <a:latin typeface="Inter"/>
               </a:rPr>
-              <a:t>2</a:t>
+              <a:t>17</a:t>
             </a:r>
           </a:p>
         </p:txBody>
@@ -17196,7 +14150,7 @@
 </p:sld>
 </file>
 
-<file path=ppt/slides/slide20.xml><?xml version="1.0" encoding="utf-8"?>
+<file path=ppt/slides/slide18.xml><?xml version="1.0" encoding="utf-8"?>
 <p:sld xmlns:a="http://schemas.openxmlformats.org/drawingml/2006/main" xmlns:p="http://schemas.openxmlformats.org/presentationml/2006/main" xmlns:r="http://schemas.openxmlformats.org/officeDocument/2006/relationships">
   <p:cSld>
     <p:spTree>
@@ -17558,1142 +14512,6 @@
               <a:rPr>
                 <a:latin typeface="Inter"/>
               </a:rPr>
-              <a:t>RETURNED LANE DIFFERENCES</a:t>
-            </a:r>
-          </a:p>
-        </p:txBody>
-      </p:sp>
-      <p:graphicFrame>
-        <p:nvGraphicFramePr>
-          <p:cNvPr id="10" name="Chart 9"/>
-          <p:cNvGraphicFramePr>
-            <a:graphicFrameLocks noGrp="1"/>
-          </p:cNvGraphicFramePr>
-          <p:nvPr/>
-        </p:nvGraphicFramePr>
-        <p:xfrm>
-          <a:off x="640080" y="1600200"/>
-          <a:ext cx="10908792" cy="4617720"/>
-        </p:xfrm>
-        <a:graphic>
-          <a:graphicData uri="http://schemas.openxmlformats.org/drawingml/2006/chart">
-            <c:chart xmlns:c="http://schemas.openxmlformats.org/drawingml/2006/chart" r:id="rId2"/>
-          </a:graphicData>
-        </a:graphic>
-      </p:graphicFrame>
-      <p:sp>
-        <p:nvSpPr>
-          <p:cNvPr id="11" name="Rectangle 10"/>
-          <p:cNvSpPr/>
-          <p:nvPr/>
-        </p:nvSpPr>
-        <p:spPr>
-          <a:xfrm>
-            <a:off x="640080" y="6446520"/>
-            <a:ext cx="10908792" cy="9144"/>
-          </a:xfrm>
-          <a:prstGeom prst="rect">
-            <a:avLst/>
-          </a:prstGeom>
-          <a:solidFill>
-            <a:srgbClr val="E3E7EC"/>
-          </a:solidFill>
-          <a:ln>
-            <a:solidFill>
-              <a:srgbClr val="E3E7EC"/>
-            </a:solidFill>
-          </a:ln>
-        </p:spPr>
-        <p:style>
-          <a:lnRef idx="1">
-            <a:schemeClr val="accent1"/>
-          </a:lnRef>
-          <a:fillRef idx="3">
-            <a:schemeClr val="accent1"/>
-          </a:fillRef>
-          <a:effectRef idx="2">
-            <a:schemeClr val="accent1"/>
-          </a:effectRef>
-          <a:fontRef idx="minor">
-            <a:schemeClr val="lt1"/>
-          </a:fontRef>
-        </p:style>
-        <p:txBody>
-          <a:bodyPr rtlCol="0" anchor="ctr"/>
-          <a:lstStyle/>
-          <a:p>
-            <a:pPr algn="ctr">
-              <a:defRPr>
-                <a:latin typeface="Inter"/>
-              </a:defRPr>
-            </a:pPr>
-          </a:p>
-        </p:txBody>
-      </p:sp>
-      <p:sp>
-        <p:nvSpPr>
-          <p:cNvPr id="12" name="TextBox 11"/>
-          <p:cNvSpPr txBox="1"/>
-          <p:nvPr/>
-        </p:nvSpPr>
-        <p:spPr>
-          <a:xfrm>
-            <a:off x="640080" y="6501384"/>
-            <a:ext cx="4297680" cy="146304"/>
-          </a:xfrm>
-          <a:prstGeom prst="rect">
-            <a:avLst/>
-          </a:prstGeom>
-          <a:noFill/>
-        </p:spPr>
-        <p:txBody>
-          <a:bodyPr wrap="none" lIns="9144" rIns="9144" tIns="9144" bIns="9144" anchor="t">
-            <a:spAutoFit/>
-          </a:bodyPr>
-          <a:lstStyle/>
-          <a:p>
-            <a:pPr algn="l">
-              <a:spcAft>
-                <a:spcPts val="0"/>
-              </a:spcAft>
-              <a:defRPr sz="650" b="0">
-                <a:solidFill>
-                  <a:srgbClr val="8A94A1"/>
-                </a:solidFill>
-                <a:latin typeface="Inter"/>
-              </a:defRPr>
-            </a:pPr>
-            <a:r>
-              <a:rPr>
-                <a:latin typeface="Inter"/>
-              </a:rPr>
-              <a:t>Sources: S5</a:t>
-            </a:r>
-          </a:p>
-        </p:txBody>
-      </p:sp>
-      <p:sp>
-        <p:nvSpPr>
-          <p:cNvPr id="13" name="TextBox 12"/>
-          <p:cNvSpPr txBox="1"/>
-          <p:nvPr/>
-        </p:nvSpPr>
-        <p:spPr>
-          <a:xfrm>
-            <a:off x="4480560" y="6501384"/>
-            <a:ext cx="5303520" cy="146304"/>
-          </a:xfrm>
-          <a:prstGeom prst="rect">
-            <a:avLst/>
-          </a:prstGeom>
-          <a:noFill/>
-        </p:spPr>
-        <p:txBody>
-          <a:bodyPr wrap="none" lIns="9144" rIns="9144" tIns="9144" bIns="9144" anchor="t">
-            <a:spAutoFit/>
-          </a:bodyPr>
-          <a:lstStyle/>
-          <a:p>
-            <a:pPr algn="ctr">
-              <a:spcAft>
-                <a:spcPts val="0"/>
-              </a:spcAft>
-              <a:defRPr sz="650" b="0">
-                <a:solidFill>
-                  <a:srgbClr val="8A94A1"/>
-                </a:solidFill>
-                <a:latin typeface="Inter"/>
-              </a:defRPr>
-            </a:pPr>
-            <a:r>
-              <a:rPr>
-                <a:latin typeface="Inter"/>
-              </a:rPr>
-              <a:t>Confidential — Investment Committee · Data as of 2026-06-30</a:t>
-            </a:r>
-          </a:p>
-        </p:txBody>
-      </p:sp>
-      <p:sp>
-        <p:nvSpPr>
-          <p:cNvPr id="14" name="TextBox 13"/>
-          <p:cNvSpPr txBox="1"/>
-          <p:nvPr/>
-        </p:nvSpPr>
-        <p:spPr>
-          <a:xfrm>
-            <a:off x="10287000" y="6501384"/>
-            <a:ext cx="1261872" cy="146304"/>
-          </a:xfrm>
-          <a:prstGeom prst="rect">
-            <a:avLst/>
-          </a:prstGeom>
-          <a:noFill/>
-        </p:spPr>
-        <p:txBody>
-          <a:bodyPr wrap="none" lIns="9144" rIns="9144" tIns="9144" bIns="9144" anchor="t">
-            <a:spAutoFit/>
-          </a:bodyPr>
-          <a:lstStyle/>
-          <a:p>
-            <a:pPr algn="r">
-              <a:spcAft>
-                <a:spcPts val="0"/>
-              </a:spcAft>
-              <a:defRPr sz="650" b="0">
-                <a:solidFill>
-                  <a:srgbClr val="8A94A1"/>
-                </a:solidFill>
-                <a:latin typeface="Inter"/>
-              </a:defRPr>
-            </a:pPr>
-            <a:r>
-              <a:rPr>
-                <a:latin typeface="Inter"/>
-              </a:rPr>
-              <a:t>20</a:t>
-            </a:r>
-          </a:p>
-        </p:txBody>
-      </p:sp>
-    </p:spTree>
-  </p:cSld>
-  <p:clrMapOvr>
-    <a:masterClrMapping/>
-  </p:clrMapOvr>
-</p:sld>
-</file>
-
-<file path=ppt/slides/slide21.xml><?xml version="1.0" encoding="utf-8"?>
-<p:sld xmlns:a="http://schemas.openxmlformats.org/drawingml/2006/main" xmlns:p="http://schemas.openxmlformats.org/presentationml/2006/main" xmlns:r="http://schemas.openxmlformats.org/officeDocument/2006/relationships">
-  <p:cSld>
-    <p:spTree>
-      <p:nvGrpSpPr>
-        <p:cNvPr id="1" name=""/>
-        <p:cNvGrpSpPr/>
-        <p:nvPr/>
-      </p:nvGrpSpPr>
-      <p:grpSpPr/>
-      <p:sp>
-        <p:nvSpPr>
-          <p:cNvPr id="2" name="Rectangle 1"/>
-          <p:cNvSpPr/>
-          <p:nvPr/>
-        </p:nvSpPr>
-        <p:spPr>
-          <a:xfrm>
-            <a:off x="0" y="0"/>
-            <a:ext cx="12191695" cy="6858000"/>
-          </a:xfrm>
-          <a:prstGeom prst="rect">
-            <a:avLst/>
-          </a:prstGeom>
-          <a:solidFill>
-            <a:srgbClr val="FFFFFF"/>
-          </a:solidFill>
-          <a:ln>
-            <a:solidFill>
-              <a:srgbClr val="FFFFFF"/>
-            </a:solidFill>
-          </a:ln>
-        </p:spPr>
-        <p:style>
-          <a:lnRef idx="1">
-            <a:schemeClr val="accent1"/>
-          </a:lnRef>
-          <a:fillRef idx="3">
-            <a:schemeClr val="accent1"/>
-          </a:fillRef>
-          <a:effectRef idx="2">
-            <a:schemeClr val="accent1"/>
-          </a:effectRef>
-          <a:fontRef idx="minor">
-            <a:schemeClr val="lt1"/>
-          </a:fontRef>
-        </p:style>
-        <p:txBody>
-          <a:bodyPr rtlCol="0" anchor="ctr"/>
-          <a:lstStyle/>
-          <a:p>
-            <a:pPr algn="ctr">
-              <a:defRPr>
-                <a:latin typeface="Inter"/>
-              </a:defRPr>
-            </a:pPr>
-          </a:p>
-        </p:txBody>
-      </p:sp>
-      <p:sp>
-        <p:nvSpPr>
-          <p:cNvPr id="3" name="TextBox 2"/>
-          <p:cNvSpPr txBox="1"/>
-          <p:nvPr/>
-        </p:nvSpPr>
-        <p:spPr>
-          <a:xfrm>
-            <a:off x="640080" y="329184"/>
-            <a:ext cx="5303520" cy="182880"/>
-          </a:xfrm>
-          <a:prstGeom prst="rect">
-            <a:avLst/>
-          </a:prstGeom>
-          <a:noFill/>
-        </p:spPr>
-        <p:txBody>
-          <a:bodyPr wrap="none" lIns="9144" rIns="9144" tIns="9144" bIns="9144" anchor="t">
-            <a:spAutoFit/>
-          </a:bodyPr>
-          <a:lstStyle/>
-          <a:p>
-            <a:pPr algn="l">
-              <a:spcAft>
-                <a:spcPts val="0"/>
-              </a:spcAft>
-              <a:defRPr sz="750" b="1">
-                <a:solidFill>
-                  <a:srgbClr val="4F6B00"/>
-                </a:solidFill>
-                <a:latin typeface="Inter"/>
-              </a:defRPr>
-            </a:pPr>
-            <a:r>
-              <a:rPr>
-                <a:latin typeface="Inter"/>
-              </a:rPr>
-              <a:t>GOVERNED COMPARISON RETURNS COMPATIBLE CROSS-LANE METRICS</a:t>
-            </a:r>
-          </a:p>
-        </p:txBody>
-      </p:sp>
-      <p:sp>
-        <p:nvSpPr>
-          <p:cNvPr id="4" name="TextBox 3"/>
-          <p:cNvSpPr txBox="1"/>
-          <p:nvPr/>
-        </p:nvSpPr>
-        <p:spPr>
-          <a:xfrm>
-            <a:off x="5897880" y="310896"/>
-            <a:ext cx="4800600" cy="256032"/>
-          </a:xfrm>
-          <a:prstGeom prst="rect">
-            <a:avLst/>
-          </a:prstGeom>
-          <a:noFill/>
-        </p:spPr>
-        <p:txBody>
-          <a:bodyPr wrap="none" lIns="9144" rIns="9144" tIns="9144" bIns="9144" anchor="t">
-            <a:spAutoFit/>
-          </a:bodyPr>
-          <a:lstStyle/>
-          <a:p>
-            <a:pPr algn="r">
-              <a:spcAft>
-                <a:spcPts val="0"/>
-              </a:spcAft>
-              <a:defRPr sz="680" b="1">
-                <a:solidFill>
-                  <a:srgbClr val="4F6B00"/>
-                </a:solidFill>
-                <a:latin typeface="Inter"/>
-              </a:defRPr>
-            </a:pPr>
-            <a:r>
-              <a:rPr>
-                <a:latin typeface="Inter"/>
-              </a:rPr>
-              <a:t>Illustrative, Gradient Maintained — demo data, not the client's holdings or managers</a:t>
-            </a:r>
-          </a:p>
-        </p:txBody>
-      </p:sp>
-      <p:sp>
-        <p:nvSpPr>
-          <p:cNvPr id="5" name="TextBox 4"/>
-          <p:cNvSpPr txBox="1"/>
-          <p:nvPr/>
-        </p:nvSpPr>
-        <p:spPr>
-          <a:xfrm>
-            <a:off x="640080" y="566928"/>
-            <a:ext cx="10058400" cy="530352"/>
-          </a:xfrm>
-          <a:prstGeom prst="rect">
-            <a:avLst/>
-          </a:prstGeom>
-          <a:noFill/>
-        </p:spPr>
-        <p:txBody>
-          <a:bodyPr wrap="none" lIns="9144" rIns="9144" tIns="9144" bIns="9144" anchor="t">
-            <a:spAutoFit/>
-          </a:bodyPr>
-          <a:lstStyle/>
-          <a:p>
-            <a:pPr algn="l">
-              <a:spcAft>
-                <a:spcPts val="0"/>
-              </a:spcAft>
-              <a:defRPr sz="2300" b="1">
-                <a:solidFill>
-                  <a:srgbClr val="0D1117"/>
-                </a:solidFill>
-                <a:latin typeface="Inter"/>
-              </a:defRPr>
-            </a:pPr>
-            <a:r>
-              <a:rPr>
-                <a:latin typeface="Inter"/>
-              </a:rPr>
-              <a:t>Cross-Lane Comparison — continued</a:t>
-            </a:r>
-          </a:p>
-        </p:txBody>
-      </p:sp>
-      <p:sp>
-        <p:nvSpPr>
-          <p:cNvPr id="6" name="Rectangle 5"/>
-          <p:cNvSpPr/>
-          <p:nvPr/>
-        </p:nvSpPr>
-        <p:spPr>
-          <a:xfrm>
-            <a:off x="640080" y="1115568"/>
-            <a:ext cx="10908792" cy="18288"/>
-          </a:xfrm>
-          <a:prstGeom prst="rect">
-            <a:avLst/>
-          </a:prstGeom>
-          <a:solidFill>
-            <a:srgbClr val="0D1117"/>
-          </a:solidFill>
-          <a:ln>
-            <a:solidFill>
-              <a:srgbClr val="0D1117"/>
-            </a:solidFill>
-          </a:ln>
-        </p:spPr>
-        <p:style>
-          <a:lnRef idx="1">
-            <a:schemeClr val="accent1"/>
-          </a:lnRef>
-          <a:fillRef idx="3">
-            <a:schemeClr val="accent1"/>
-          </a:fillRef>
-          <a:effectRef idx="2">
-            <a:schemeClr val="accent1"/>
-          </a:effectRef>
-          <a:fontRef idx="minor">
-            <a:schemeClr val="lt1"/>
-          </a:fontRef>
-        </p:style>
-        <p:txBody>
-          <a:bodyPr rtlCol="0" anchor="ctr"/>
-          <a:lstStyle/>
-          <a:p>
-            <a:pPr algn="ctr">
-              <a:defRPr>
-                <a:latin typeface="Inter"/>
-              </a:defRPr>
-            </a:pPr>
-          </a:p>
-        </p:txBody>
-      </p:sp>
-      <p:sp>
-        <p:nvSpPr>
-          <p:cNvPr id="7" name="Rectangle 6"/>
-          <p:cNvSpPr/>
-          <p:nvPr/>
-        </p:nvSpPr>
-        <p:spPr>
-          <a:xfrm>
-            <a:off x="11018520" y="502920"/>
-            <a:ext cx="530352" cy="393192"/>
-          </a:xfrm>
-          <a:prstGeom prst="rect">
-            <a:avLst/>
-          </a:prstGeom>
-          <a:solidFill>
-            <a:srgbClr val="C6F432"/>
-          </a:solidFill>
-          <a:ln>
-            <a:solidFill>
-              <a:srgbClr val="C6F432"/>
-            </a:solidFill>
-          </a:ln>
-        </p:spPr>
-        <p:style>
-          <a:lnRef idx="1">
-            <a:schemeClr val="accent1"/>
-          </a:lnRef>
-          <a:fillRef idx="3">
-            <a:schemeClr val="accent1"/>
-          </a:fillRef>
-          <a:effectRef idx="2">
-            <a:schemeClr val="accent1"/>
-          </a:effectRef>
-          <a:fontRef idx="minor">
-            <a:schemeClr val="lt1"/>
-          </a:fontRef>
-        </p:style>
-        <p:txBody>
-          <a:bodyPr rtlCol="0" anchor="ctr"/>
-          <a:lstStyle/>
-          <a:p>
-            <a:pPr algn="ctr">
-              <a:defRPr>
-                <a:latin typeface="Inter"/>
-              </a:defRPr>
-            </a:pPr>
-          </a:p>
-        </p:txBody>
-      </p:sp>
-      <p:sp>
-        <p:nvSpPr>
-          <p:cNvPr id="8" name="TextBox 7"/>
-          <p:cNvSpPr txBox="1"/>
-          <p:nvPr/>
-        </p:nvSpPr>
-        <p:spPr>
-          <a:xfrm>
-            <a:off x="11045952" y="557784"/>
-            <a:ext cx="475488" cy="182880"/>
-          </a:xfrm>
-          <a:prstGeom prst="rect">
-            <a:avLst/>
-          </a:prstGeom>
-          <a:noFill/>
-        </p:spPr>
-        <p:txBody>
-          <a:bodyPr wrap="none" lIns="9144" rIns="9144" tIns="9144" bIns="9144" anchor="t">
-            <a:spAutoFit/>
-          </a:bodyPr>
-          <a:lstStyle/>
-          <a:p>
-            <a:pPr algn="ctr">
-              <a:spcAft>
-                <a:spcPts val="0"/>
-              </a:spcAft>
-              <a:defRPr sz="1000" b="1">
-                <a:solidFill>
-                  <a:srgbClr val="0D1117"/>
-                </a:solidFill>
-                <a:latin typeface="Inter"/>
-              </a:defRPr>
-            </a:pPr>
-            <a:r>
-              <a:rPr>
-                <a:latin typeface="Inter"/>
-              </a:rPr>
-              <a:t>06</a:t>
-            </a:r>
-          </a:p>
-        </p:txBody>
-      </p:sp>
-      <p:sp>
-        <p:nvSpPr>
-          <p:cNvPr id="9" name="TextBox 8"/>
-          <p:cNvSpPr txBox="1"/>
-          <p:nvPr/>
-        </p:nvSpPr>
-        <p:spPr>
-          <a:xfrm>
-            <a:off x="640080" y="1325880"/>
-            <a:ext cx="10908792" cy="201168"/>
-          </a:xfrm>
-          <a:prstGeom prst="rect">
-            <a:avLst/>
-          </a:prstGeom>
-          <a:noFill/>
-        </p:spPr>
-        <p:txBody>
-          <a:bodyPr wrap="none" lIns="9144" rIns="9144" tIns="9144" bIns="9144" anchor="t">
-            <a:spAutoFit/>
-          </a:bodyPr>
-          <a:lstStyle/>
-          <a:p>
-            <a:pPr algn="l">
-              <a:spcAft>
-                <a:spcPts val="0"/>
-              </a:spcAft>
-              <a:defRPr sz="720" b="1">
-                <a:solidFill>
-                  <a:srgbClr val="4A5563"/>
-                </a:solidFill>
-                <a:latin typeface="Inter"/>
-              </a:defRPr>
-            </a:pPr>
-            <a:r>
-              <a:rPr>
-                <a:latin typeface="Inter"/>
-              </a:rPr>
-              <a:t>RETURNED CONCENTRATION</a:t>
-            </a:r>
-          </a:p>
-        </p:txBody>
-      </p:sp>
-      <p:graphicFrame>
-        <p:nvGraphicFramePr>
-          <p:cNvPr id="10" name="Chart 9"/>
-          <p:cNvGraphicFramePr>
-            <a:graphicFrameLocks noGrp="1"/>
-          </p:cNvGraphicFramePr>
-          <p:nvPr/>
-        </p:nvGraphicFramePr>
-        <p:xfrm>
-          <a:off x="640080" y="1600200"/>
-          <a:ext cx="10908792" cy="4617720"/>
-        </p:xfrm>
-        <a:graphic>
-          <a:graphicData uri="http://schemas.openxmlformats.org/drawingml/2006/chart">
-            <c:chart xmlns:c="http://schemas.openxmlformats.org/drawingml/2006/chart" r:id="rId2"/>
-          </a:graphicData>
-        </a:graphic>
-      </p:graphicFrame>
-      <p:sp>
-        <p:nvSpPr>
-          <p:cNvPr id="11" name="Rectangle 10"/>
-          <p:cNvSpPr/>
-          <p:nvPr/>
-        </p:nvSpPr>
-        <p:spPr>
-          <a:xfrm>
-            <a:off x="640080" y="6446520"/>
-            <a:ext cx="10908792" cy="9144"/>
-          </a:xfrm>
-          <a:prstGeom prst="rect">
-            <a:avLst/>
-          </a:prstGeom>
-          <a:solidFill>
-            <a:srgbClr val="E3E7EC"/>
-          </a:solidFill>
-          <a:ln>
-            <a:solidFill>
-              <a:srgbClr val="E3E7EC"/>
-            </a:solidFill>
-          </a:ln>
-        </p:spPr>
-        <p:style>
-          <a:lnRef idx="1">
-            <a:schemeClr val="accent1"/>
-          </a:lnRef>
-          <a:fillRef idx="3">
-            <a:schemeClr val="accent1"/>
-          </a:fillRef>
-          <a:effectRef idx="2">
-            <a:schemeClr val="accent1"/>
-          </a:effectRef>
-          <a:fontRef idx="minor">
-            <a:schemeClr val="lt1"/>
-          </a:fontRef>
-        </p:style>
-        <p:txBody>
-          <a:bodyPr rtlCol="0" anchor="ctr"/>
-          <a:lstStyle/>
-          <a:p>
-            <a:pPr algn="ctr">
-              <a:defRPr>
-                <a:latin typeface="Inter"/>
-              </a:defRPr>
-            </a:pPr>
-          </a:p>
-        </p:txBody>
-      </p:sp>
-      <p:sp>
-        <p:nvSpPr>
-          <p:cNvPr id="12" name="TextBox 11"/>
-          <p:cNvSpPr txBox="1"/>
-          <p:nvPr/>
-        </p:nvSpPr>
-        <p:spPr>
-          <a:xfrm>
-            <a:off x="640080" y="6501384"/>
-            <a:ext cx="4297680" cy="146304"/>
-          </a:xfrm>
-          <a:prstGeom prst="rect">
-            <a:avLst/>
-          </a:prstGeom>
-          <a:noFill/>
-        </p:spPr>
-        <p:txBody>
-          <a:bodyPr wrap="none" lIns="9144" rIns="9144" tIns="9144" bIns="9144" anchor="t">
-            <a:spAutoFit/>
-          </a:bodyPr>
-          <a:lstStyle/>
-          <a:p>
-            <a:pPr algn="l">
-              <a:spcAft>
-                <a:spcPts val="0"/>
-              </a:spcAft>
-              <a:defRPr sz="650" b="0">
-                <a:solidFill>
-                  <a:srgbClr val="8A94A1"/>
-                </a:solidFill>
-                <a:latin typeface="Inter"/>
-              </a:defRPr>
-            </a:pPr>
-            <a:r>
-              <a:rPr>
-                <a:latin typeface="Inter"/>
-              </a:rPr>
-              <a:t>Sources: S5</a:t>
-            </a:r>
-          </a:p>
-        </p:txBody>
-      </p:sp>
-      <p:sp>
-        <p:nvSpPr>
-          <p:cNvPr id="13" name="TextBox 12"/>
-          <p:cNvSpPr txBox="1"/>
-          <p:nvPr/>
-        </p:nvSpPr>
-        <p:spPr>
-          <a:xfrm>
-            <a:off x="4480560" y="6501384"/>
-            <a:ext cx="5303520" cy="146304"/>
-          </a:xfrm>
-          <a:prstGeom prst="rect">
-            <a:avLst/>
-          </a:prstGeom>
-          <a:noFill/>
-        </p:spPr>
-        <p:txBody>
-          <a:bodyPr wrap="none" lIns="9144" rIns="9144" tIns="9144" bIns="9144" anchor="t">
-            <a:spAutoFit/>
-          </a:bodyPr>
-          <a:lstStyle/>
-          <a:p>
-            <a:pPr algn="ctr">
-              <a:spcAft>
-                <a:spcPts val="0"/>
-              </a:spcAft>
-              <a:defRPr sz="650" b="0">
-                <a:solidFill>
-                  <a:srgbClr val="8A94A1"/>
-                </a:solidFill>
-                <a:latin typeface="Inter"/>
-              </a:defRPr>
-            </a:pPr>
-            <a:r>
-              <a:rPr>
-                <a:latin typeface="Inter"/>
-              </a:rPr>
-              <a:t>Confidential — Investment Committee · Data as of 2026-06-30</a:t>
-            </a:r>
-          </a:p>
-        </p:txBody>
-      </p:sp>
-      <p:sp>
-        <p:nvSpPr>
-          <p:cNvPr id="14" name="TextBox 13"/>
-          <p:cNvSpPr txBox="1"/>
-          <p:nvPr/>
-        </p:nvSpPr>
-        <p:spPr>
-          <a:xfrm>
-            <a:off x="10287000" y="6501384"/>
-            <a:ext cx="1261872" cy="146304"/>
-          </a:xfrm>
-          <a:prstGeom prst="rect">
-            <a:avLst/>
-          </a:prstGeom>
-          <a:noFill/>
-        </p:spPr>
-        <p:txBody>
-          <a:bodyPr wrap="none" lIns="9144" rIns="9144" tIns="9144" bIns="9144" anchor="t">
-            <a:spAutoFit/>
-          </a:bodyPr>
-          <a:lstStyle/>
-          <a:p>
-            <a:pPr algn="r">
-              <a:spcAft>
-                <a:spcPts val="0"/>
-              </a:spcAft>
-              <a:defRPr sz="650" b="0">
-                <a:solidFill>
-                  <a:srgbClr val="8A94A1"/>
-                </a:solidFill>
-                <a:latin typeface="Inter"/>
-              </a:defRPr>
-            </a:pPr>
-            <a:r>
-              <a:rPr>
-                <a:latin typeface="Inter"/>
-              </a:rPr>
-              <a:t>21</a:t>
-            </a:r>
-          </a:p>
-        </p:txBody>
-      </p:sp>
-    </p:spTree>
-  </p:cSld>
-  <p:clrMapOvr>
-    <a:masterClrMapping/>
-  </p:clrMapOvr>
-</p:sld>
-</file>
-
-<file path=ppt/slides/slide22.xml><?xml version="1.0" encoding="utf-8"?>
-<p:sld xmlns:a="http://schemas.openxmlformats.org/drawingml/2006/main" xmlns:p="http://schemas.openxmlformats.org/presentationml/2006/main" xmlns:r="http://schemas.openxmlformats.org/officeDocument/2006/relationships">
-  <p:cSld>
-    <p:spTree>
-      <p:nvGrpSpPr>
-        <p:cNvPr id="1" name=""/>
-        <p:cNvGrpSpPr/>
-        <p:nvPr/>
-      </p:nvGrpSpPr>
-      <p:grpSpPr/>
-      <p:sp>
-        <p:nvSpPr>
-          <p:cNvPr id="2" name="Rectangle 1"/>
-          <p:cNvSpPr/>
-          <p:nvPr/>
-        </p:nvSpPr>
-        <p:spPr>
-          <a:xfrm>
-            <a:off x="0" y="0"/>
-            <a:ext cx="12191695" cy="6858000"/>
-          </a:xfrm>
-          <a:prstGeom prst="rect">
-            <a:avLst/>
-          </a:prstGeom>
-          <a:solidFill>
-            <a:srgbClr val="FFFFFF"/>
-          </a:solidFill>
-          <a:ln>
-            <a:solidFill>
-              <a:srgbClr val="FFFFFF"/>
-            </a:solidFill>
-          </a:ln>
-        </p:spPr>
-        <p:style>
-          <a:lnRef idx="1">
-            <a:schemeClr val="accent1"/>
-          </a:lnRef>
-          <a:fillRef idx="3">
-            <a:schemeClr val="accent1"/>
-          </a:fillRef>
-          <a:effectRef idx="2">
-            <a:schemeClr val="accent1"/>
-          </a:effectRef>
-          <a:fontRef idx="minor">
-            <a:schemeClr val="lt1"/>
-          </a:fontRef>
-        </p:style>
-        <p:txBody>
-          <a:bodyPr rtlCol="0" anchor="ctr"/>
-          <a:lstStyle/>
-          <a:p>
-            <a:pPr algn="ctr">
-              <a:defRPr>
-                <a:latin typeface="Inter"/>
-              </a:defRPr>
-            </a:pPr>
-          </a:p>
-        </p:txBody>
-      </p:sp>
-      <p:sp>
-        <p:nvSpPr>
-          <p:cNvPr id="3" name="TextBox 2"/>
-          <p:cNvSpPr txBox="1"/>
-          <p:nvPr/>
-        </p:nvSpPr>
-        <p:spPr>
-          <a:xfrm>
-            <a:off x="640080" y="329184"/>
-            <a:ext cx="5303520" cy="182880"/>
-          </a:xfrm>
-          <a:prstGeom prst="rect">
-            <a:avLst/>
-          </a:prstGeom>
-          <a:noFill/>
-        </p:spPr>
-        <p:txBody>
-          <a:bodyPr wrap="none" lIns="9144" rIns="9144" tIns="9144" bIns="9144" anchor="t">
-            <a:spAutoFit/>
-          </a:bodyPr>
-          <a:lstStyle/>
-          <a:p>
-            <a:pPr algn="l">
-              <a:spcAft>
-                <a:spcPts val="0"/>
-              </a:spcAft>
-              <a:defRPr sz="750" b="1">
-                <a:solidFill>
-                  <a:srgbClr val="4F6B00"/>
-                </a:solidFill>
-                <a:latin typeface="Inter"/>
-              </a:defRPr>
-            </a:pPr>
-            <a:r>
-              <a:rPr>
-                <a:latin typeface="Inter"/>
-              </a:rPr>
-              <a:t>GOVERNED COMPARISON RETURNS COMPATIBLE CROSS-LANE METRICS</a:t>
-            </a:r>
-          </a:p>
-        </p:txBody>
-      </p:sp>
-      <p:sp>
-        <p:nvSpPr>
-          <p:cNvPr id="4" name="TextBox 3"/>
-          <p:cNvSpPr txBox="1"/>
-          <p:nvPr/>
-        </p:nvSpPr>
-        <p:spPr>
-          <a:xfrm>
-            <a:off x="5897880" y="310896"/>
-            <a:ext cx="4800600" cy="256032"/>
-          </a:xfrm>
-          <a:prstGeom prst="rect">
-            <a:avLst/>
-          </a:prstGeom>
-          <a:noFill/>
-        </p:spPr>
-        <p:txBody>
-          <a:bodyPr wrap="none" lIns="9144" rIns="9144" tIns="9144" bIns="9144" anchor="t">
-            <a:spAutoFit/>
-          </a:bodyPr>
-          <a:lstStyle/>
-          <a:p>
-            <a:pPr algn="r">
-              <a:spcAft>
-                <a:spcPts val="0"/>
-              </a:spcAft>
-              <a:defRPr sz="680" b="1">
-                <a:solidFill>
-                  <a:srgbClr val="4F6B00"/>
-                </a:solidFill>
-                <a:latin typeface="Inter"/>
-              </a:defRPr>
-            </a:pPr>
-            <a:r>
-              <a:rPr>
-                <a:latin typeface="Inter"/>
-              </a:rPr>
-              <a:t>Illustrative, Gradient Maintained — demo data, not the client's holdings or managers</a:t>
-            </a:r>
-          </a:p>
-        </p:txBody>
-      </p:sp>
-      <p:sp>
-        <p:nvSpPr>
-          <p:cNvPr id="5" name="TextBox 4"/>
-          <p:cNvSpPr txBox="1"/>
-          <p:nvPr/>
-        </p:nvSpPr>
-        <p:spPr>
-          <a:xfrm>
-            <a:off x="640080" y="566928"/>
-            <a:ext cx="10058400" cy="530352"/>
-          </a:xfrm>
-          <a:prstGeom prst="rect">
-            <a:avLst/>
-          </a:prstGeom>
-          <a:noFill/>
-        </p:spPr>
-        <p:txBody>
-          <a:bodyPr wrap="none" lIns="9144" rIns="9144" tIns="9144" bIns="9144" anchor="t">
-            <a:spAutoFit/>
-          </a:bodyPr>
-          <a:lstStyle/>
-          <a:p>
-            <a:pPr algn="l">
-              <a:spcAft>
-                <a:spcPts val="0"/>
-              </a:spcAft>
-              <a:defRPr sz="2300" b="1">
-                <a:solidFill>
-                  <a:srgbClr val="0D1117"/>
-                </a:solidFill>
-                <a:latin typeface="Inter"/>
-              </a:defRPr>
-            </a:pPr>
-            <a:r>
-              <a:rPr>
-                <a:latin typeface="Inter"/>
-              </a:rPr>
-              <a:t>Cross-Lane Comparison — continued</a:t>
-            </a:r>
-          </a:p>
-        </p:txBody>
-      </p:sp>
-      <p:sp>
-        <p:nvSpPr>
-          <p:cNvPr id="6" name="Rectangle 5"/>
-          <p:cNvSpPr/>
-          <p:nvPr/>
-        </p:nvSpPr>
-        <p:spPr>
-          <a:xfrm>
-            <a:off x="640080" y="1115568"/>
-            <a:ext cx="10908792" cy="18288"/>
-          </a:xfrm>
-          <a:prstGeom prst="rect">
-            <a:avLst/>
-          </a:prstGeom>
-          <a:solidFill>
-            <a:srgbClr val="0D1117"/>
-          </a:solidFill>
-          <a:ln>
-            <a:solidFill>
-              <a:srgbClr val="0D1117"/>
-            </a:solidFill>
-          </a:ln>
-        </p:spPr>
-        <p:style>
-          <a:lnRef idx="1">
-            <a:schemeClr val="accent1"/>
-          </a:lnRef>
-          <a:fillRef idx="3">
-            <a:schemeClr val="accent1"/>
-          </a:fillRef>
-          <a:effectRef idx="2">
-            <a:schemeClr val="accent1"/>
-          </a:effectRef>
-          <a:fontRef idx="minor">
-            <a:schemeClr val="lt1"/>
-          </a:fontRef>
-        </p:style>
-        <p:txBody>
-          <a:bodyPr rtlCol="0" anchor="ctr"/>
-          <a:lstStyle/>
-          <a:p>
-            <a:pPr algn="ctr">
-              <a:defRPr>
-                <a:latin typeface="Inter"/>
-              </a:defRPr>
-            </a:pPr>
-          </a:p>
-        </p:txBody>
-      </p:sp>
-      <p:sp>
-        <p:nvSpPr>
-          <p:cNvPr id="7" name="Rectangle 6"/>
-          <p:cNvSpPr/>
-          <p:nvPr/>
-        </p:nvSpPr>
-        <p:spPr>
-          <a:xfrm>
-            <a:off x="11018520" y="502920"/>
-            <a:ext cx="530352" cy="393192"/>
-          </a:xfrm>
-          <a:prstGeom prst="rect">
-            <a:avLst/>
-          </a:prstGeom>
-          <a:solidFill>
-            <a:srgbClr val="C6F432"/>
-          </a:solidFill>
-          <a:ln>
-            <a:solidFill>
-              <a:srgbClr val="C6F432"/>
-            </a:solidFill>
-          </a:ln>
-        </p:spPr>
-        <p:style>
-          <a:lnRef idx="1">
-            <a:schemeClr val="accent1"/>
-          </a:lnRef>
-          <a:fillRef idx="3">
-            <a:schemeClr val="accent1"/>
-          </a:fillRef>
-          <a:effectRef idx="2">
-            <a:schemeClr val="accent1"/>
-          </a:effectRef>
-          <a:fontRef idx="minor">
-            <a:schemeClr val="lt1"/>
-          </a:fontRef>
-        </p:style>
-        <p:txBody>
-          <a:bodyPr rtlCol="0" anchor="ctr"/>
-          <a:lstStyle/>
-          <a:p>
-            <a:pPr algn="ctr">
-              <a:defRPr>
-                <a:latin typeface="Inter"/>
-              </a:defRPr>
-            </a:pPr>
-          </a:p>
-        </p:txBody>
-      </p:sp>
-      <p:sp>
-        <p:nvSpPr>
-          <p:cNvPr id="8" name="TextBox 7"/>
-          <p:cNvSpPr txBox="1"/>
-          <p:nvPr/>
-        </p:nvSpPr>
-        <p:spPr>
-          <a:xfrm>
-            <a:off x="11045952" y="557784"/>
-            <a:ext cx="475488" cy="182880"/>
-          </a:xfrm>
-          <a:prstGeom prst="rect">
-            <a:avLst/>
-          </a:prstGeom>
-          <a:noFill/>
-        </p:spPr>
-        <p:txBody>
-          <a:bodyPr wrap="none" lIns="9144" rIns="9144" tIns="9144" bIns="9144" anchor="t">
-            <a:spAutoFit/>
-          </a:bodyPr>
-          <a:lstStyle/>
-          <a:p>
-            <a:pPr algn="ctr">
-              <a:spcAft>
-                <a:spcPts val="0"/>
-              </a:spcAft>
-              <a:defRPr sz="1000" b="1">
-                <a:solidFill>
-                  <a:srgbClr val="0D1117"/>
-                </a:solidFill>
-                <a:latin typeface="Inter"/>
-              </a:defRPr>
-            </a:pPr>
-            <a:r>
-              <a:rPr>
-                <a:latin typeface="Inter"/>
-              </a:rPr>
-              <a:t>06</a:t>
-            </a:r>
-          </a:p>
-        </p:txBody>
-      </p:sp>
-      <p:sp>
-        <p:nvSpPr>
-          <p:cNvPr id="9" name="TextBox 8"/>
-          <p:cNvSpPr txBox="1"/>
-          <p:nvPr/>
-        </p:nvSpPr>
-        <p:spPr>
-          <a:xfrm>
-            <a:off x="640080" y="1325880"/>
-            <a:ext cx="10908792" cy="201168"/>
-          </a:xfrm>
-          <a:prstGeom prst="rect">
-            <a:avLst/>
-          </a:prstGeom>
-          <a:noFill/>
-        </p:spPr>
-        <p:txBody>
-          <a:bodyPr wrap="none" lIns="9144" rIns="9144" tIns="9144" bIns="9144" anchor="t">
-            <a:spAutoFit/>
-          </a:bodyPr>
-          <a:lstStyle/>
-          <a:p>
-            <a:pPr algn="l">
-              <a:spcAft>
-                <a:spcPts val="0"/>
-              </a:spcAft>
-              <a:defRPr sz="720" b="1">
-                <a:solidFill>
-                  <a:srgbClr val="4A5563"/>
-                </a:solidFill>
-                <a:latin typeface="Inter"/>
-              </a:defRPr>
-            </a:pPr>
-            <a:r>
-              <a:rPr>
-                <a:latin typeface="Inter"/>
-              </a:rPr>
               <a:t>RETURNED PERSISTENCE</a:t>
             </a:r>
           </a:p>
@@ -18709,7 +14527,7 @@
         </p:nvGraphicFramePr>
         <p:xfrm>
           <a:off x="640080" y="1600200"/>
-          <a:ext cx="10908792" cy="2250202"/>
+          <a:ext cx="10908792" cy="2532817"/>
         </p:xfrm>
         <a:graphic>
           <a:graphicData uri="http://schemas.openxmlformats.org/drawingml/2006/table">
@@ -18722,7 +14540,7 @@
                 <a:gridCol w="4448556"/>
                 <a:gridCol w="4448556"/>
               </a:tblGrid>
-              <a:tr h="562550">
+              <a:tr h="633204">
                 <a:tc>
                   <a:txBody>
                     <a:bodyPr/>
@@ -18805,7 +14623,7 @@
                   </a:tcPr>
                 </a:tc>
               </a:tr>
-              <a:tr h="562550">
+              <a:tr h="633204">
                 <a:tc>
                   <a:txBody>
                     <a:bodyPr/>
@@ -18888,7 +14706,7 @@
                   </a:tcPr>
                 </a:tc>
               </a:tr>
-              <a:tr h="562550">
+              <a:tr h="633204">
                 <a:tc>
                   <a:txBody>
                     <a:bodyPr/>
@@ -18971,7 +14789,7 @@
                   </a:tcPr>
                 </a:tc>
               </a:tr>
-              <a:tr h="562552">
+              <a:tr h="633205">
                 <a:tc>
                   <a:txBody>
                     <a:bodyPr/>
@@ -19066,7 +14884,7 @@
         </p:nvSpPr>
         <p:spPr>
           <a:xfrm>
-            <a:off x="640080" y="3868690"/>
+            <a:off x="640080" y="4151305"/>
             <a:ext cx="10908792" cy="164592"/>
           </a:xfrm>
           <a:prstGeom prst="rect">
@@ -19108,8 +14926,8 @@
         </p:nvSpPr>
         <p:spPr>
           <a:xfrm>
-            <a:off x="640080" y="4161298"/>
-            <a:ext cx="10908792" cy="2056621"/>
+            <a:off x="640080" y="4443913"/>
+            <a:ext cx="10908792" cy="1774006"/>
           </a:xfrm>
           <a:prstGeom prst="rect">
             <a:avLst/>
@@ -19157,8 +14975,8 @@
         </p:nvSpPr>
         <p:spPr>
           <a:xfrm>
-            <a:off x="640080" y="4161298"/>
-            <a:ext cx="54864" cy="2056621"/>
+            <a:off x="640080" y="4443913"/>
+            <a:ext cx="54864" cy="1774006"/>
           </a:xfrm>
           <a:prstGeom prst="rect">
             <a:avLst/>
@@ -19206,7 +15024,7 @@
         </p:nvSpPr>
         <p:spPr>
           <a:xfrm>
-            <a:off x="804671" y="4271026"/>
+            <a:off x="804671" y="4553641"/>
             <a:ext cx="10616184" cy="228600"/>
           </a:xfrm>
           <a:prstGeom prst="rect">
@@ -19248,8 +15066,8 @@
         </p:nvSpPr>
         <p:spPr>
           <a:xfrm>
-            <a:off x="804671" y="4554490"/>
-            <a:ext cx="10616184" cy="1571989"/>
+            <a:off x="804671" y="4837105"/>
+            <a:ext cx="10616184" cy="1289374"/>
           </a:xfrm>
           <a:prstGeom prst="rect">
             <a:avLst/>
@@ -19452,7 +15270,7 @@
               <a:rPr>
                 <a:latin typeface="Inter"/>
               </a:rPr>
-              <a:t>22</a:t>
+              <a:t>18</a:t>
             </a:r>
           </a:p>
         </p:txBody>
@@ -19465,7 +15283,7 @@
 </p:sld>
 </file>
 
-<file path=ppt/slides/slide23.xml><?xml version="1.0" encoding="utf-8"?>
+<file path=ppt/slides/slide19.xml><?xml version="1.0" encoding="utf-8"?>
 <p:sld xmlns:a="http://schemas.openxmlformats.org/drawingml/2006/main" xmlns:p="http://schemas.openxmlformats.org/presentationml/2006/main" xmlns:r="http://schemas.openxmlformats.org/officeDocument/2006/relationships">
   <p:cSld>
     <p:spTree>
@@ -20319,7 +16137,7 @@
               <a:rPr>
                 <a:latin typeface="Inter"/>
               </a:rPr>
-              <a:t>23</a:t>
+              <a:t>19</a:t>
             </a:r>
           </a:p>
         </p:txBody>
@@ -20332,7 +16150,1593 @@
 </p:sld>
 </file>
 
-<file path=ppt/slides/slide24.xml><?xml version="1.0" encoding="utf-8"?>
+<file path=ppt/slides/slide2.xml><?xml version="1.0" encoding="utf-8"?>
+<p:sld xmlns:a="http://schemas.openxmlformats.org/drawingml/2006/main" xmlns:p="http://schemas.openxmlformats.org/presentationml/2006/main" xmlns:r="http://schemas.openxmlformats.org/officeDocument/2006/relationships">
+  <p:cSld>
+    <p:spTree>
+      <p:nvGrpSpPr>
+        <p:cNvPr id="1" name=""/>
+        <p:cNvGrpSpPr/>
+        <p:nvPr/>
+      </p:nvGrpSpPr>
+      <p:grpSpPr/>
+      <p:sp>
+        <p:nvSpPr>
+          <p:cNvPr id="2" name="Rectangle 1"/>
+          <p:cNvSpPr/>
+          <p:nvPr/>
+        </p:nvSpPr>
+        <p:spPr>
+          <a:xfrm>
+            <a:off x="0" y="0"/>
+            <a:ext cx="12191695" cy="6858000"/>
+          </a:xfrm>
+          <a:prstGeom prst="rect">
+            <a:avLst/>
+          </a:prstGeom>
+          <a:solidFill>
+            <a:srgbClr val="FFFFFF"/>
+          </a:solidFill>
+          <a:ln>
+            <a:solidFill>
+              <a:srgbClr val="FFFFFF"/>
+            </a:solidFill>
+          </a:ln>
+        </p:spPr>
+        <p:style>
+          <a:lnRef idx="1">
+            <a:schemeClr val="accent1"/>
+          </a:lnRef>
+          <a:fillRef idx="3">
+            <a:schemeClr val="accent1"/>
+          </a:fillRef>
+          <a:effectRef idx="2">
+            <a:schemeClr val="accent1"/>
+          </a:effectRef>
+          <a:fontRef idx="minor">
+            <a:schemeClr val="lt1"/>
+          </a:fontRef>
+        </p:style>
+        <p:txBody>
+          <a:bodyPr rtlCol="0" anchor="ctr"/>
+          <a:lstStyle/>
+          <a:p>
+            <a:pPr algn="ctr">
+              <a:defRPr>
+                <a:latin typeface="Inter"/>
+              </a:defRPr>
+            </a:pPr>
+          </a:p>
+        </p:txBody>
+      </p:sp>
+      <p:sp>
+        <p:nvSpPr>
+          <p:cNvPr id="3" name="TextBox 2"/>
+          <p:cNvSpPr txBox="1"/>
+          <p:nvPr/>
+        </p:nvSpPr>
+        <p:spPr>
+          <a:xfrm>
+            <a:off x="640080" y="329184"/>
+            <a:ext cx="5303520" cy="182880"/>
+          </a:xfrm>
+          <a:prstGeom prst="rect">
+            <a:avLst/>
+          </a:prstGeom>
+          <a:noFill/>
+        </p:spPr>
+        <p:txBody>
+          <a:bodyPr wrap="none" lIns="9144" rIns="9144" tIns="9144" bIns="9144" anchor="t">
+            <a:spAutoFit/>
+          </a:bodyPr>
+          <a:lstStyle/>
+          <a:p>
+            <a:pPr algn="l">
+              <a:spcAft>
+                <a:spcPts val="0"/>
+              </a:spcAft>
+              <a:defRPr sz="750" b="1">
+                <a:solidFill>
+                  <a:srgbClr val="4F6B00"/>
+                </a:solidFill>
+                <a:latin typeface="Inter"/>
+              </a:defRPr>
+            </a:pPr>
+            <a:r>
+              <a:rPr>
+                <a:latin typeface="Inter"/>
+              </a:rPr>
+              <a:t>THREE COMPATIBLE GOVERNED LANES HAVE SERVER-RETURNED COMPARISON METRICS</a:t>
+            </a:r>
+          </a:p>
+        </p:txBody>
+      </p:sp>
+      <p:sp>
+        <p:nvSpPr>
+          <p:cNvPr id="4" name="TextBox 3"/>
+          <p:cNvSpPr txBox="1"/>
+          <p:nvPr/>
+        </p:nvSpPr>
+        <p:spPr>
+          <a:xfrm>
+            <a:off x="5897880" y="310896"/>
+            <a:ext cx="4800600" cy="256032"/>
+          </a:xfrm>
+          <a:prstGeom prst="rect">
+            <a:avLst/>
+          </a:prstGeom>
+          <a:noFill/>
+        </p:spPr>
+        <p:txBody>
+          <a:bodyPr wrap="none" lIns="9144" rIns="9144" tIns="9144" bIns="9144" anchor="t">
+            <a:spAutoFit/>
+          </a:bodyPr>
+          <a:lstStyle/>
+          <a:p>
+            <a:pPr algn="r">
+              <a:spcAft>
+                <a:spcPts val="0"/>
+              </a:spcAft>
+              <a:defRPr sz="680" b="1">
+                <a:solidFill>
+                  <a:srgbClr val="4F6B00"/>
+                </a:solidFill>
+                <a:latin typeface="Inter"/>
+              </a:defRPr>
+            </a:pPr>
+            <a:r>
+              <a:rPr>
+                <a:latin typeface="Inter"/>
+              </a:rPr>
+              <a:t>Illustrative, Gradient Maintained — demo data, not the client's holdings or managers</a:t>
+            </a:r>
+          </a:p>
+        </p:txBody>
+      </p:sp>
+      <p:sp>
+        <p:nvSpPr>
+          <p:cNvPr id="5" name="TextBox 4"/>
+          <p:cNvSpPr txBox="1"/>
+          <p:nvPr/>
+        </p:nvSpPr>
+        <p:spPr>
+          <a:xfrm>
+            <a:off x="640080" y="566928"/>
+            <a:ext cx="10058400" cy="530352"/>
+          </a:xfrm>
+          <a:prstGeom prst="rect">
+            <a:avLst/>
+          </a:prstGeom>
+          <a:noFill/>
+        </p:spPr>
+        <p:txBody>
+          <a:bodyPr wrap="none" lIns="9144" rIns="9144" tIns="9144" bIns="9144" anchor="t">
+            <a:spAutoFit/>
+          </a:bodyPr>
+          <a:lstStyle/>
+          <a:p>
+            <a:pPr algn="l">
+              <a:spcAft>
+                <a:spcPts val="0"/>
+              </a:spcAft>
+              <a:defRPr sz="2300" b="1">
+                <a:solidFill>
+                  <a:srgbClr val="0D1117"/>
+                </a:solidFill>
+                <a:latin typeface="Inter"/>
+              </a:defRPr>
+            </a:pPr>
+            <a:r>
+              <a:rPr>
+                <a:latin typeface="Inter"/>
+              </a:rPr>
+              <a:t>Executive Comparison</a:t>
+            </a:r>
+          </a:p>
+        </p:txBody>
+      </p:sp>
+      <p:sp>
+        <p:nvSpPr>
+          <p:cNvPr id="6" name="Rectangle 5"/>
+          <p:cNvSpPr/>
+          <p:nvPr/>
+        </p:nvSpPr>
+        <p:spPr>
+          <a:xfrm>
+            <a:off x="640080" y="1115568"/>
+            <a:ext cx="10908792" cy="18288"/>
+          </a:xfrm>
+          <a:prstGeom prst="rect">
+            <a:avLst/>
+          </a:prstGeom>
+          <a:solidFill>
+            <a:srgbClr val="0D1117"/>
+          </a:solidFill>
+          <a:ln>
+            <a:solidFill>
+              <a:srgbClr val="0D1117"/>
+            </a:solidFill>
+          </a:ln>
+        </p:spPr>
+        <p:style>
+          <a:lnRef idx="1">
+            <a:schemeClr val="accent1"/>
+          </a:lnRef>
+          <a:fillRef idx="3">
+            <a:schemeClr val="accent1"/>
+          </a:fillRef>
+          <a:effectRef idx="2">
+            <a:schemeClr val="accent1"/>
+          </a:effectRef>
+          <a:fontRef idx="minor">
+            <a:schemeClr val="lt1"/>
+          </a:fontRef>
+        </p:style>
+        <p:txBody>
+          <a:bodyPr rtlCol="0" anchor="ctr"/>
+          <a:lstStyle/>
+          <a:p>
+            <a:pPr algn="ctr">
+              <a:defRPr>
+                <a:latin typeface="Inter"/>
+              </a:defRPr>
+            </a:pPr>
+          </a:p>
+        </p:txBody>
+      </p:sp>
+      <p:sp>
+        <p:nvSpPr>
+          <p:cNvPr id="7" name="Rectangle 6"/>
+          <p:cNvSpPr/>
+          <p:nvPr/>
+        </p:nvSpPr>
+        <p:spPr>
+          <a:xfrm>
+            <a:off x="11018520" y="502920"/>
+            <a:ext cx="530352" cy="393192"/>
+          </a:xfrm>
+          <a:prstGeom prst="rect">
+            <a:avLst/>
+          </a:prstGeom>
+          <a:solidFill>
+            <a:srgbClr val="C6F432"/>
+          </a:solidFill>
+          <a:ln>
+            <a:solidFill>
+              <a:srgbClr val="C6F432"/>
+            </a:solidFill>
+          </a:ln>
+        </p:spPr>
+        <p:style>
+          <a:lnRef idx="1">
+            <a:schemeClr val="accent1"/>
+          </a:lnRef>
+          <a:fillRef idx="3">
+            <a:schemeClr val="accent1"/>
+          </a:fillRef>
+          <a:effectRef idx="2">
+            <a:schemeClr val="accent1"/>
+          </a:effectRef>
+          <a:fontRef idx="minor">
+            <a:schemeClr val="lt1"/>
+          </a:fontRef>
+        </p:style>
+        <p:txBody>
+          <a:bodyPr rtlCol="0" anchor="ctr"/>
+          <a:lstStyle/>
+          <a:p>
+            <a:pPr algn="ctr">
+              <a:defRPr>
+                <a:latin typeface="Inter"/>
+              </a:defRPr>
+            </a:pPr>
+          </a:p>
+        </p:txBody>
+      </p:sp>
+      <p:sp>
+        <p:nvSpPr>
+          <p:cNvPr id="8" name="TextBox 7"/>
+          <p:cNvSpPr txBox="1"/>
+          <p:nvPr/>
+        </p:nvSpPr>
+        <p:spPr>
+          <a:xfrm>
+            <a:off x="11045952" y="557784"/>
+            <a:ext cx="475488" cy="182880"/>
+          </a:xfrm>
+          <a:prstGeom prst="rect">
+            <a:avLst/>
+          </a:prstGeom>
+          <a:noFill/>
+        </p:spPr>
+        <p:txBody>
+          <a:bodyPr wrap="none" lIns="9144" rIns="9144" tIns="9144" bIns="9144" anchor="t">
+            <a:spAutoFit/>
+          </a:bodyPr>
+          <a:lstStyle/>
+          <a:p>
+            <a:pPr algn="ctr">
+              <a:spcAft>
+                <a:spcPts val="0"/>
+              </a:spcAft>
+              <a:defRPr sz="1000" b="1">
+                <a:solidFill>
+                  <a:srgbClr val="0D1117"/>
+                </a:solidFill>
+                <a:latin typeface="Inter"/>
+              </a:defRPr>
+            </a:pPr>
+            <a:r>
+              <a:rPr>
+                <a:latin typeface="Inter"/>
+              </a:rPr>
+              <a:t>01</a:t>
+            </a:r>
+          </a:p>
+        </p:txBody>
+      </p:sp>
+      <p:sp>
+        <p:nvSpPr>
+          <p:cNvPr id="9" name="Rectangle 8"/>
+          <p:cNvSpPr/>
+          <p:nvPr/>
+        </p:nvSpPr>
+        <p:spPr>
+          <a:xfrm>
+            <a:off x="640080" y="1325880"/>
+            <a:ext cx="10908792" cy="1793366"/>
+          </a:xfrm>
+          <a:prstGeom prst="rect">
+            <a:avLst/>
+          </a:prstGeom>
+          <a:solidFill>
+            <a:srgbClr val="F5F7F9"/>
+          </a:solidFill>
+          <a:ln>
+            <a:solidFill>
+              <a:srgbClr val="E3E7EC"/>
+            </a:solidFill>
+          </a:ln>
+        </p:spPr>
+        <p:style>
+          <a:lnRef idx="1">
+            <a:schemeClr val="accent1"/>
+          </a:lnRef>
+          <a:fillRef idx="3">
+            <a:schemeClr val="accent1"/>
+          </a:fillRef>
+          <a:effectRef idx="2">
+            <a:schemeClr val="accent1"/>
+          </a:effectRef>
+          <a:fontRef idx="minor">
+            <a:schemeClr val="lt1"/>
+          </a:fontRef>
+        </p:style>
+        <p:txBody>
+          <a:bodyPr rtlCol="0" anchor="ctr"/>
+          <a:lstStyle/>
+          <a:p>
+            <a:pPr algn="ctr">
+              <a:defRPr>
+                <a:latin typeface="Inter"/>
+              </a:defRPr>
+            </a:pPr>
+          </a:p>
+        </p:txBody>
+      </p:sp>
+      <p:sp>
+        <p:nvSpPr>
+          <p:cNvPr id="10" name="Rectangle 9"/>
+          <p:cNvSpPr/>
+          <p:nvPr/>
+        </p:nvSpPr>
+        <p:spPr>
+          <a:xfrm>
+            <a:off x="640080" y="1325880"/>
+            <a:ext cx="54864" cy="1793366"/>
+          </a:xfrm>
+          <a:prstGeom prst="rect">
+            <a:avLst/>
+          </a:prstGeom>
+          <a:solidFill>
+            <a:srgbClr val="0D1117"/>
+          </a:solidFill>
+          <a:ln>
+            <a:solidFill>
+              <a:srgbClr val="0D1117"/>
+            </a:solidFill>
+          </a:ln>
+        </p:spPr>
+        <p:style>
+          <a:lnRef idx="1">
+            <a:schemeClr val="accent1"/>
+          </a:lnRef>
+          <a:fillRef idx="3">
+            <a:schemeClr val="accent1"/>
+          </a:fillRef>
+          <a:effectRef idx="2">
+            <a:schemeClr val="accent1"/>
+          </a:effectRef>
+          <a:fontRef idx="minor">
+            <a:schemeClr val="lt1"/>
+          </a:fontRef>
+        </p:style>
+        <p:txBody>
+          <a:bodyPr rtlCol="0" anchor="ctr"/>
+          <a:lstStyle/>
+          <a:p>
+            <a:pPr algn="ctr">
+              <a:defRPr>
+                <a:latin typeface="Inter"/>
+              </a:defRPr>
+            </a:pPr>
+          </a:p>
+        </p:txBody>
+      </p:sp>
+      <p:sp>
+        <p:nvSpPr>
+          <p:cNvPr id="11" name="TextBox 10"/>
+          <p:cNvSpPr txBox="1"/>
+          <p:nvPr/>
+        </p:nvSpPr>
+        <p:spPr>
+          <a:xfrm>
+            <a:off x="804671" y="1435607"/>
+            <a:ext cx="10616184" cy="228600"/>
+          </a:xfrm>
+          <a:prstGeom prst="rect">
+            <a:avLst/>
+          </a:prstGeom>
+          <a:noFill/>
+        </p:spPr>
+        <p:txBody>
+          <a:bodyPr wrap="none" lIns="9144" rIns="9144" tIns="9144" bIns="9144" anchor="t">
+            <a:spAutoFit/>
+          </a:bodyPr>
+          <a:lstStyle/>
+          <a:p>
+            <a:pPr algn="l">
+              <a:spcAft>
+                <a:spcPts val="0"/>
+              </a:spcAft>
+              <a:defRPr sz="1000" b="1">
+                <a:solidFill>
+                  <a:srgbClr val="0D1117"/>
+                </a:solidFill>
+                <a:latin typeface="Inter"/>
+              </a:defRPr>
+            </a:pPr>
+            <a:r>
+              <a:rPr>
+                <a:latin typeface="Inter"/>
+              </a:rPr>
+              <a:t>Bottom line</a:t>
+            </a:r>
+          </a:p>
+        </p:txBody>
+      </p:sp>
+      <p:sp>
+        <p:nvSpPr>
+          <p:cNvPr id="12" name="TextBox 11"/>
+          <p:cNvSpPr txBox="1"/>
+          <p:nvPr/>
+        </p:nvSpPr>
+        <p:spPr>
+          <a:xfrm>
+            <a:off x="804671" y="1719072"/>
+            <a:ext cx="10616184" cy="1308734"/>
+          </a:xfrm>
+          <a:prstGeom prst="rect">
+            <a:avLst/>
+          </a:prstGeom>
+          <a:noFill/>
+        </p:spPr>
+        <p:txBody>
+          <a:bodyPr wrap="none" lIns="9144" rIns="9144" tIns="9144" bIns="9144" anchor="t">
+            <a:spAutoFit/>
+          </a:bodyPr>
+          <a:lstStyle/>
+          <a:p>
+            <a:pPr algn="l">
+              <a:spcAft>
+                <a:spcPts val="0"/>
+              </a:spcAft>
+              <a:defRPr sz="950" b="0">
+                <a:solidFill>
+                  <a:srgbClr val="4A5563"/>
+                </a:solidFill>
+                <a:latin typeface="Inter"/>
+              </a:defRPr>
+            </a:pPr>
+            <a:r>
+              <a:rPr>
+                <a:latin typeface="Inter"/>
+              </a:rPr>
+              <a:t>Historical, ex ante, and simulated effects are compatible, and governed comparison metrics are available [S2][S3][S4][S5].</a:t>
+            </a:r>
+          </a:p>
+        </p:txBody>
+      </p:sp>
+      <p:sp>
+        <p:nvSpPr>
+          <p:cNvPr id="13" name="Rectangle 12"/>
+          <p:cNvSpPr/>
+          <p:nvPr/>
+        </p:nvSpPr>
+        <p:spPr>
+          <a:xfrm>
+            <a:off x="640080" y="3228975"/>
+            <a:ext cx="2644902" cy="2988945"/>
+          </a:xfrm>
+          <a:prstGeom prst="rect">
+            <a:avLst/>
+          </a:prstGeom>
+          <a:solidFill>
+            <a:srgbClr val="F5F7F9"/>
+          </a:solidFill>
+          <a:ln>
+            <a:solidFill>
+              <a:srgbClr val="E3E7EC"/>
+            </a:solidFill>
+          </a:ln>
+        </p:spPr>
+        <p:style>
+          <a:lnRef idx="1">
+            <a:schemeClr val="accent1"/>
+          </a:lnRef>
+          <a:fillRef idx="3">
+            <a:schemeClr val="accent1"/>
+          </a:fillRef>
+          <a:effectRef idx="2">
+            <a:schemeClr val="accent1"/>
+          </a:effectRef>
+          <a:fontRef idx="minor">
+            <a:schemeClr val="lt1"/>
+          </a:fontRef>
+        </p:style>
+        <p:txBody>
+          <a:bodyPr rtlCol="0" anchor="ctr"/>
+          <a:lstStyle/>
+          <a:p>
+            <a:pPr algn="ctr">
+              <a:defRPr>
+                <a:latin typeface="Inter"/>
+              </a:defRPr>
+            </a:pPr>
+          </a:p>
+        </p:txBody>
+      </p:sp>
+      <p:sp>
+        <p:nvSpPr>
+          <p:cNvPr id="14" name="Rectangle 13"/>
+          <p:cNvSpPr/>
+          <p:nvPr/>
+        </p:nvSpPr>
+        <p:spPr>
+          <a:xfrm>
+            <a:off x="640080" y="3228975"/>
+            <a:ext cx="2644902" cy="45720"/>
+          </a:xfrm>
+          <a:prstGeom prst="rect">
+            <a:avLst/>
+          </a:prstGeom>
+          <a:solidFill>
+            <a:srgbClr val="9AA5B1"/>
+          </a:solidFill>
+          <a:ln>
+            <a:solidFill>
+              <a:srgbClr val="9AA5B1"/>
+            </a:solidFill>
+          </a:ln>
+        </p:spPr>
+        <p:style>
+          <a:lnRef idx="1">
+            <a:schemeClr val="accent1"/>
+          </a:lnRef>
+          <a:fillRef idx="3">
+            <a:schemeClr val="accent1"/>
+          </a:fillRef>
+          <a:effectRef idx="2">
+            <a:schemeClr val="accent1"/>
+          </a:effectRef>
+          <a:fontRef idx="minor">
+            <a:schemeClr val="lt1"/>
+          </a:fontRef>
+        </p:style>
+        <p:txBody>
+          <a:bodyPr rtlCol="0" anchor="ctr"/>
+          <a:lstStyle/>
+          <a:p>
+            <a:pPr algn="ctr">
+              <a:defRPr>
+                <a:latin typeface="Inter"/>
+              </a:defRPr>
+            </a:pPr>
+          </a:p>
+        </p:txBody>
+      </p:sp>
+      <p:sp>
+        <p:nvSpPr>
+          <p:cNvPr id="15" name="TextBox 14"/>
+          <p:cNvSpPr txBox="1"/>
+          <p:nvPr/>
+        </p:nvSpPr>
+        <p:spPr>
+          <a:xfrm>
+            <a:off x="749808" y="3356991"/>
+            <a:ext cx="2425446" cy="201168"/>
+          </a:xfrm>
+          <a:prstGeom prst="rect">
+            <a:avLst/>
+          </a:prstGeom>
+          <a:noFill/>
+        </p:spPr>
+        <p:txBody>
+          <a:bodyPr wrap="none" lIns="9144" rIns="9144" tIns="9144" bIns="9144" anchor="t">
+            <a:spAutoFit/>
+          </a:bodyPr>
+          <a:lstStyle/>
+          <a:p>
+            <a:pPr algn="l">
+              <a:spcAft>
+                <a:spcPts val="0"/>
+              </a:spcAft>
+              <a:defRPr sz="650" b="1">
+                <a:solidFill>
+                  <a:srgbClr val="4A5563"/>
+                </a:solidFill>
+                <a:latin typeface="Inter"/>
+              </a:defRPr>
+            </a:pPr>
+            <a:r>
+              <a:rPr>
+                <a:latin typeface="Inter"/>
+              </a:rPr>
+              <a:t>HISTORICAL LANE</a:t>
+            </a:r>
+          </a:p>
+        </p:txBody>
+      </p:sp>
+      <p:sp>
+        <p:nvSpPr>
+          <p:cNvPr id="16" name="TextBox 15"/>
+          <p:cNvSpPr txBox="1"/>
+          <p:nvPr/>
+        </p:nvSpPr>
+        <p:spPr>
+          <a:xfrm>
+            <a:off x="749808" y="3613023"/>
+            <a:ext cx="2425446" cy="475488"/>
+          </a:xfrm>
+          <a:prstGeom prst="rect">
+            <a:avLst/>
+          </a:prstGeom>
+          <a:noFill/>
+        </p:spPr>
+        <p:txBody>
+          <a:bodyPr wrap="none" lIns="9144" rIns="9144" tIns="9144" bIns="9144" anchor="t">
+            <a:spAutoFit/>
+          </a:bodyPr>
+          <a:lstStyle/>
+          <a:p>
+            <a:pPr algn="l">
+              <a:spcAft>
+                <a:spcPts val="0"/>
+              </a:spcAft>
+              <a:defRPr sz="1800" b="1">
+                <a:solidFill>
+                  <a:srgbClr val="0D1117"/>
+                </a:solidFill>
+                <a:latin typeface="Inter"/>
+              </a:defRPr>
+            </a:pPr>
+            <a:r>
+              <a:rPr>
+                <a:latin typeface="Inter"/>
+              </a:rPr>
+              <a:t>Available</a:t>
+            </a:r>
+          </a:p>
+        </p:txBody>
+      </p:sp>
+      <p:sp>
+        <p:nvSpPr>
+          <p:cNvPr id="17" name="TextBox 16"/>
+          <p:cNvSpPr txBox="1"/>
+          <p:nvPr/>
+        </p:nvSpPr>
+        <p:spPr>
+          <a:xfrm>
+            <a:off x="749808" y="5888736"/>
+            <a:ext cx="2425446" cy="228600"/>
+          </a:xfrm>
+          <a:prstGeom prst="rect">
+            <a:avLst/>
+          </a:prstGeom>
+          <a:noFill/>
+        </p:spPr>
+        <p:txBody>
+          <a:bodyPr wrap="none" lIns="9144" rIns="9144" tIns="9144" bIns="9144" anchor="t">
+            <a:spAutoFit/>
+          </a:bodyPr>
+          <a:lstStyle/>
+          <a:p>
+            <a:pPr algn="l">
+              <a:spcAft>
+                <a:spcPts val="0"/>
+              </a:spcAft>
+              <a:defRPr sz="700" b="0">
+                <a:solidFill>
+                  <a:srgbClr val="4A5563"/>
+                </a:solidFill>
+                <a:latin typeface="Inter"/>
+              </a:defRPr>
+            </a:pPr>
+            <a:r>
+              <a:rPr>
+                <a:latin typeface="Inter"/>
+              </a:rPr>
+              <a:t>Realized 12 months · 2025-07-01 to 2026-06-30 [S2]</a:t>
+            </a:r>
+          </a:p>
+        </p:txBody>
+      </p:sp>
+      <p:sp>
+        <p:nvSpPr>
+          <p:cNvPr id="18" name="Rectangle 17"/>
+          <p:cNvSpPr/>
+          <p:nvPr/>
+        </p:nvSpPr>
+        <p:spPr>
+          <a:xfrm>
+            <a:off x="3394710" y="3228975"/>
+            <a:ext cx="2644902" cy="2988945"/>
+          </a:xfrm>
+          <a:prstGeom prst="rect">
+            <a:avLst/>
+          </a:prstGeom>
+          <a:solidFill>
+            <a:srgbClr val="F5F7F9"/>
+          </a:solidFill>
+          <a:ln>
+            <a:solidFill>
+              <a:srgbClr val="E3E7EC"/>
+            </a:solidFill>
+          </a:ln>
+        </p:spPr>
+        <p:style>
+          <a:lnRef idx="1">
+            <a:schemeClr val="accent1"/>
+          </a:lnRef>
+          <a:fillRef idx="3">
+            <a:schemeClr val="accent1"/>
+          </a:fillRef>
+          <a:effectRef idx="2">
+            <a:schemeClr val="accent1"/>
+          </a:effectRef>
+          <a:fontRef idx="minor">
+            <a:schemeClr val="lt1"/>
+          </a:fontRef>
+        </p:style>
+        <p:txBody>
+          <a:bodyPr rtlCol="0" anchor="ctr"/>
+          <a:lstStyle/>
+          <a:p>
+            <a:pPr algn="ctr">
+              <a:defRPr>
+                <a:latin typeface="Inter"/>
+              </a:defRPr>
+            </a:pPr>
+          </a:p>
+        </p:txBody>
+      </p:sp>
+      <p:sp>
+        <p:nvSpPr>
+          <p:cNvPr id="19" name="Rectangle 18"/>
+          <p:cNvSpPr/>
+          <p:nvPr/>
+        </p:nvSpPr>
+        <p:spPr>
+          <a:xfrm>
+            <a:off x="3394710" y="3228975"/>
+            <a:ext cx="2644902" cy="45720"/>
+          </a:xfrm>
+          <a:prstGeom prst="rect">
+            <a:avLst/>
+          </a:prstGeom>
+          <a:solidFill>
+            <a:srgbClr val="9AA5B1"/>
+          </a:solidFill>
+          <a:ln>
+            <a:solidFill>
+              <a:srgbClr val="9AA5B1"/>
+            </a:solidFill>
+          </a:ln>
+        </p:spPr>
+        <p:style>
+          <a:lnRef idx="1">
+            <a:schemeClr val="accent1"/>
+          </a:lnRef>
+          <a:fillRef idx="3">
+            <a:schemeClr val="accent1"/>
+          </a:fillRef>
+          <a:effectRef idx="2">
+            <a:schemeClr val="accent1"/>
+          </a:effectRef>
+          <a:fontRef idx="minor">
+            <a:schemeClr val="lt1"/>
+          </a:fontRef>
+        </p:style>
+        <p:txBody>
+          <a:bodyPr rtlCol="0" anchor="ctr"/>
+          <a:lstStyle/>
+          <a:p>
+            <a:pPr algn="ctr">
+              <a:defRPr>
+                <a:latin typeface="Inter"/>
+              </a:defRPr>
+            </a:pPr>
+          </a:p>
+        </p:txBody>
+      </p:sp>
+      <p:sp>
+        <p:nvSpPr>
+          <p:cNvPr id="20" name="TextBox 19"/>
+          <p:cNvSpPr txBox="1"/>
+          <p:nvPr/>
+        </p:nvSpPr>
+        <p:spPr>
+          <a:xfrm>
+            <a:off x="3504438" y="3356991"/>
+            <a:ext cx="2425446" cy="201168"/>
+          </a:xfrm>
+          <a:prstGeom prst="rect">
+            <a:avLst/>
+          </a:prstGeom>
+          <a:noFill/>
+        </p:spPr>
+        <p:txBody>
+          <a:bodyPr wrap="none" lIns="9144" rIns="9144" tIns="9144" bIns="9144" anchor="t">
+            <a:spAutoFit/>
+          </a:bodyPr>
+          <a:lstStyle/>
+          <a:p>
+            <a:pPr algn="l">
+              <a:spcAft>
+                <a:spcPts val="0"/>
+              </a:spcAft>
+              <a:defRPr sz="650" b="1">
+                <a:solidFill>
+                  <a:srgbClr val="4A5563"/>
+                </a:solidFill>
+                <a:latin typeface="Inter"/>
+              </a:defRPr>
+            </a:pPr>
+            <a:r>
+              <a:rPr>
+                <a:latin typeface="Inter"/>
+              </a:rPr>
+              <a:t>EX ANTE LANE</a:t>
+            </a:r>
+          </a:p>
+        </p:txBody>
+      </p:sp>
+      <p:sp>
+        <p:nvSpPr>
+          <p:cNvPr id="21" name="TextBox 20"/>
+          <p:cNvSpPr txBox="1"/>
+          <p:nvPr/>
+        </p:nvSpPr>
+        <p:spPr>
+          <a:xfrm>
+            <a:off x="3504438" y="3613023"/>
+            <a:ext cx="2425446" cy="475488"/>
+          </a:xfrm>
+          <a:prstGeom prst="rect">
+            <a:avLst/>
+          </a:prstGeom>
+          <a:noFill/>
+        </p:spPr>
+        <p:txBody>
+          <a:bodyPr wrap="none" lIns="9144" rIns="9144" tIns="9144" bIns="9144" anchor="t">
+            <a:spAutoFit/>
+          </a:bodyPr>
+          <a:lstStyle/>
+          <a:p>
+            <a:pPr algn="l">
+              <a:spcAft>
+                <a:spcPts val="0"/>
+              </a:spcAft>
+              <a:defRPr sz="1800" b="1">
+                <a:solidFill>
+                  <a:srgbClr val="0D1117"/>
+                </a:solidFill>
+                <a:latin typeface="Inter"/>
+              </a:defRPr>
+            </a:pPr>
+            <a:r>
+              <a:rPr>
+                <a:latin typeface="Inter"/>
+              </a:rPr>
+              <a:t>Available</a:t>
+            </a:r>
+          </a:p>
+        </p:txBody>
+      </p:sp>
+      <p:sp>
+        <p:nvSpPr>
+          <p:cNvPr id="22" name="TextBox 21"/>
+          <p:cNvSpPr txBox="1"/>
+          <p:nvPr/>
+        </p:nvSpPr>
+        <p:spPr>
+          <a:xfrm>
+            <a:off x="3504438" y="5888736"/>
+            <a:ext cx="2425446" cy="228600"/>
+          </a:xfrm>
+          <a:prstGeom prst="rect">
+            <a:avLst/>
+          </a:prstGeom>
+          <a:noFill/>
+        </p:spPr>
+        <p:txBody>
+          <a:bodyPr wrap="none" lIns="9144" rIns="9144" tIns="9144" bIns="9144" anchor="t">
+            <a:spAutoFit/>
+          </a:bodyPr>
+          <a:lstStyle/>
+          <a:p>
+            <a:pPr algn="l">
+              <a:spcAft>
+                <a:spcPts val="0"/>
+              </a:spcAft>
+              <a:defRPr sz="700" b="0">
+                <a:solidFill>
+                  <a:srgbClr val="4A5563"/>
+                </a:solidFill>
+                <a:latin typeface="Inter"/>
+              </a:defRPr>
+            </a:pPr>
+            <a:r>
+              <a:rPr>
+                <a:latin typeface="Inter"/>
+              </a:rPr>
+              <a:t>1-year expected [S3]</a:t>
+            </a:r>
+          </a:p>
+        </p:txBody>
+      </p:sp>
+      <p:sp>
+        <p:nvSpPr>
+          <p:cNvPr id="23" name="Rectangle 22"/>
+          <p:cNvSpPr/>
+          <p:nvPr/>
+        </p:nvSpPr>
+        <p:spPr>
+          <a:xfrm>
+            <a:off x="6149340" y="3228975"/>
+            <a:ext cx="2644902" cy="2988945"/>
+          </a:xfrm>
+          <a:prstGeom prst="rect">
+            <a:avLst/>
+          </a:prstGeom>
+          <a:solidFill>
+            <a:srgbClr val="F5F7F9"/>
+          </a:solidFill>
+          <a:ln>
+            <a:solidFill>
+              <a:srgbClr val="E3E7EC"/>
+            </a:solidFill>
+          </a:ln>
+        </p:spPr>
+        <p:style>
+          <a:lnRef idx="1">
+            <a:schemeClr val="accent1"/>
+          </a:lnRef>
+          <a:fillRef idx="3">
+            <a:schemeClr val="accent1"/>
+          </a:fillRef>
+          <a:effectRef idx="2">
+            <a:schemeClr val="accent1"/>
+          </a:effectRef>
+          <a:fontRef idx="minor">
+            <a:schemeClr val="lt1"/>
+          </a:fontRef>
+        </p:style>
+        <p:txBody>
+          <a:bodyPr rtlCol="0" anchor="ctr"/>
+          <a:lstStyle/>
+          <a:p>
+            <a:pPr algn="ctr">
+              <a:defRPr>
+                <a:latin typeface="Inter"/>
+              </a:defRPr>
+            </a:pPr>
+          </a:p>
+        </p:txBody>
+      </p:sp>
+      <p:sp>
+        <p:nvSpPr>
+          <p:cNvPr id="24" name="Rectangle 23"/>
+          <p:cNvSpPr/>
+          <p:nvPr/>
+        </p:nvSpPr>
+        <p:spPr>
+          <a:xfrm>
+            <a:off x="6149340" y="3228975"/>
+            <a:ext cx="2644902" cy="45720"/>
+          </a:xfrm>
+          <a:prstGeom prst="rect">
+            <a:avLst/>
+          </a:prstGeom>
+          <a:solidFill>
+            <a:srgbClr val="9AA5B1"/>
+          </a:solidFill>
+          <a:ln>
+            <a:solidFill>
+              <a:srgbClr val="9AA5B1"/>
+            </a:solidFill>
+          </a:ln>
+        </p:spPr>
+        <p:style>
+          <a:lnRef idx="1">
+            <a:schemeClr val="accent1"/>
+          </a:lnRef>
+          <a:fillRef idx="3">
+            <a:schemeClr val="accent1"/>
+          </a:fillRef>
+          <a:effectRef idx="2">
+            <a:schemeClr val="accent1"/>
+          </a:effectRef>
+          <a:fontRef idx="minor">
+            <a:schemeClr val="lt1"/>
+          </a:fontRef>
+        </p:style>
+        <p:txBody>
+          <a:bodyPr rtlCol="0" anchor="ctr"/>
+          <a:lstStyle/>
+          <a:p>
+            <a:pPr algn="ctr">
+              <a:defRPr>
+                <a:latin typeface="Inter"/>
+              </a:defRPr>
+            </a:pPr>
+          </a:p>
+        </p:txBody>
+      </p:sp>
+      <p:sp>
+        <p:nvSpPr>
+          <p:cNvPr id="25" name="TextBox 24"/>
+          <p:cNvSpPr txBox="1"/>
+          <p:nvPr/>
+        </p:nvSpPr>
+        <p:spPr>
+          <a:xfrm>
+            <a:off x="6259068" y="3356991"/>
+            <a:ext cx="2425446" cy="201168"/>
+          </a:xfrm>
+          <a:prstGeom prst="rect">
+            <a:avLst/>
+          </a:prstGeom>
+          <a:noFill/>
+        </p:spPr>
+        <p:txBody>
+          <a:bodyPr wrap="none" lIns="9144" rIns="9144" tIns="9144" bIns="9144" anchor="t">
+            <a:spAutoFit/>
+          </a:bodyPr>
+          <a:lstStyle/>
+          <a:p>
+            <a:pPr algn="l">
+              <a:spcAft>
+                <a:spcPts val="0"/>
+              </a:spcAft>
+              <a:defRPr sz="650" b="1">
+                <a:solidFill>
+                  <a:srgbClr val="4A5563"/>
+                </a:solidFill>
+                <a:latin typeface="Inter"/>
+              </a:defRPr>
+            </a:pPr>
+            <a:r>
+              <a:rPr>
+                <a:latin typeface="Inter"/>
+              </a:rPr>
+              <a:t>SIMULATED LANE</a:t>
+            </a:r>
+          </a:p>
+        </p:txBody>
+      </p:sp>
+      <p:sp>
+        <p:nvSpPr>
+          <p:cNvPr id="26" name="TextBox 25"/>
+          <p:cNvSpPr txBox="1"/>
+          <p:nvPr/>
+        </p:nvSpPr>
+        <p:spPr>
+          <a:xfrm>
+            <a:off x="6259068" y="3613023"/>
+            <a:ext cx="2425446" cy="475488"/>
+          </a:xfrm>
+          <a:prstGeom prst="rect">
+            <a:avLst/>
+          </a:prstGeom>
+          <a:noFill/>
+        </p:spPr>
+        <p:txBody>
+          <a:bodyPr wrap="none" lIns="9144" rIns="9144" tIns="9144" bIns="9144" anchor="t">
+            <a:spAutoFit/>
+          </a:bodyPr>
+          <a:lstStyle/>
+          <a:p>
+            <a:pPr algn="l">
+              <a:spcAft>
+                <a:spcPts val="0"/>
+              </a:spcAft>
+              <a:defRPr sz="1800" b="1">
+                <a:solidFill>
+                  <a:srgbClr val="0D1117"/>
+                </a:solidFill>
+                <a:latin typeface="Inter"/>
+              </a:defRPr>
+            </a:pPr>
+            <a:r>
+              <a:rPr>
+                <a:latin typeface="Inter"/>
+              </a:rPr>
+              <a:t>Available</a:t>
+            </a:r>
+          </a:p>
+        </p:txBody>
+      </p:sp>
+      <p:sp>
+        <p:nvSpPr>
+          <p:cNvPr id="27" name="TextBox 26"/>
+          <p:cNvSpPr txBox="1"/>
+          <p:nvPr/>
+        </p:nvSpPr>
+        <p:spPr>
+          <a:xfrm>
+            <a:off x="6259068" y="5888736"/>
+            <a:ext cx="2425446" cy="228600"/>
+          </a:xfrm>
+          <a:prstGeom prst="rect">
+            <a:avLst/>
+          </a:prstGeom>
+          <a:noFill/>
+        </p:spPr>
+        <p:txBody>
+          <a:bodyPr wrap="none" lIns="9144" rIns="9144" tIns="9144" bIns="9144" anchor="t">
+            <a:spAutoFit/>
+          </a:bodyPr>
+          <a:lstStyle/>
+          <a:p>
+            <a:pPr algn="l">
+              <a:spcAft>
+                <a:spcPts val="0"/>
+              </a:spcAft>
+              <a:defRPr sz="700" b="0">
+                <a:solidFill>
+                  <a:srgbClr val="4A5563"/>
+                </a:solidFill>
+                <a:latin typeface="Inter"/>
+              </a:defRPr>
+            </a:pPr>
+            <a:r>
+              <a:rPr>
+                <a:latin typeface="Inter"/>
+              </a:rPr>
+              <a:t>1-year simulated · governed scenario [S4]</a:t>
+            </a:r>
+          </a:p>
+        </p:txBody>
+      </p:sp>
+      <p:sp>
+        <p:nvSpPr>
+          <p:cNvPr id="28" name="Rectangle 27"/>
+          <p:cNvSpPr/>
+          <p:nvPr/>
+        </p:nvSpPr>
+        <p:spPr>
+          <a:xfrm>
+            <a:off x="8903970" y="3228975"/>
+            <a:ext cx="2644902" cy="2988945"/>
+          </a:xfrm>
+          <a:prstGeom prst="rect">
+            <a:avLst/>
+          </a:prstGeom>
+          <a:solidFill>
+            <a:srgbClr val="F5F7F9"/>
+          </a:solidFill>
+          <a:ln>
+            <a:solidFill>
+              <a:srgbClr val="E3E7EC"/>
+            </a:solidFill>
+          </a:ln>
+        </p:spPr>
+        <p:style>
+          <a:lnRef idx="1">
+            <a:schemeClr val="accent1"/>
+          </a:lnRef>
+          <a:fillRef idx="3">
+            <a:schemeClr val="accent1"/>
+          </a:fillRef>
+          <a:effectRef idx="2">
+            <a:schemeClr val="accent1"/>
+          </a:effectRef>
+          <a:fontRef idx="minor">
+            <a:schemeClr val="lt1"/>
+          </a:fontRef>
+        </p:style>
+        <p:txBody>
+          <a:bodyPr rtlCol="0" anchor="ctr"/>
+          <a:lstStyle/>
+          <a:p>
+            <a:pPr algn="ctr">
+              <a:defRPr>
+                <a:latin typeface="Inter"/>
+              </a:defRPr>
+            </a:pPr>
+          </a:p>
+        </p:txBody>
+      </p:sp>
+      <p:sp>
+        <p:nvSpPr>
+          <p:cNvPr id="29" name="Rectangle 28"/>
+          <p:cNvSpPr/>
+          <p:nvPr/>
+        </p:nvSpPr>
+        <p:spPr>
+          <a:xfrm>
+            <a:off x="8903970" y="3228975"/>
+            <a:ext cx="2644902" cy="45720"/>
+          </a:xfrm>
+          <a:prstGeom prst="rect">
+            <a:avLst/>
+          </a:prstGeom>
+          <a:solidFill>
+            <a:srgbClr val="9AA5B1"/>
+          </a:solidFill>
+          <a:ln>
+            <a:solidFill>
+              <a:srgbClr val="9AA5B1"/>
+            </a:solidFill>
+          </a:ln>
+        </p:spPr>
+        <p:style>
+          <a:lnRef idx="1">
+            <a:schemeClr val="accent1"/>
+          </a:lnRef>
+          <a:fillRef idx="3">
+            <a:schemeClr val="accent1"/>
+          </a:fillRef>
+          <a:effectRef idx="2">
+            <a:schemeClr val="accent1"/>
+          </a:effectRef>
+          <a:fontRef idx="minor">
+            <a:schemeClr val="lt1"/>
+          </a:fontRef>
+        </p:style>
+        <p:txBody>
+          <a:bodyPr rtlCol="0" anchor="ctr"/>
+          <a:lstStyle/>
+          <a:p>
+            <a:pPr algn="ctr">
+              <a:defRPr>
+                <a:latin typeface="Inter"/>
+              </a:defRPr>
+            </a:pPr>
+          </a:p>
+        </p:txBody>
+      </p:sp>
+      <p:sp>
+        <p:nvSpPr>
+          <p:cNvPr id="30" name="TextBox 29"/>
+          <p:cNvSpPr txBox="1"/>
+          <p:nvPr/>
+        </p:nvSpPr>
+        <p:spPr>
+          <a:xfrm>
+            <a:off x="9013698" y="3356991"/>
+            <a:ext cx="2425446" cy="201168"/>
+          </a:xfrm>
+          <a:prstGeom prst="rect">
+            <a:avLst/>
+          </a:prstGeom>
+          <a:noFill/>
+        </p:spPr>
+        <p:txBody>
+          <a:bodyPr wrap="none" lIns="9144" rIns="9144" tIns="9144" bIns="9144" anchor="t">
+            <a:spAutoFit/>
+          </a:bodyPr>
+          <a:lstStyle/>
+          <a:p>
+            <a:pPr algn="l">
+              <a:spcAft>
+                <a:spcPts val="0"/>
+              </a:spcAft>
+              <a:defRPr sz="650" b="1">
+                <a:solidFill>
+                  <a:srgbClr val="4A5563"/>
+                </a:solidFill>
+                <a:latin typeface="Inter"/>
+              </a:defRPr>
+            </a:pPr>
+            <a:r>
+              <a:rPr>
+                <a:latin typeface="Inter"/>
+              </a:rPr>
+              <a:t>COMPARISON COVERAGE</a:t>
+            </a:r>
+          </a:p>
+        </p:txBody>
+      </p:sp>
+      <p:sp>
+        <p:nvSpPr>
+          <p:cNvPr id="31" name="TextBox 30"/>
+          <p:cNvSpPr txBox="1"/>
+          <p:nvPr/>
+        </p:nvSpPr>
+        <p:spPr>
+          <a:xfrm>
+            <a:off x="9013698" y="3613023"/>
+            <a:ext cx="2425446" cy="475488"/>
+          </a:xfrm>
+          <a:prstGeom prst="rect">
+            <a:avLst/>
+          </a:prstGeom>
+          <a:noFill/>
+        </p:spPr>
+        <p:txBody>
+          <a:bodyPr wrap="none" lIns="9144" rIns="9144" tIns="9144" bIns="9144" anchor="t">
+            <a:spAutoFit/>
+          </a:bodyPr>
+          <a:lstStyle/>
+          <a:p>
+            <a:pPr algn="l">
+              <a:spcAft>
+                <a:spcPts val="0"/>
+              </a:spcAft>
+              <a:defRPr sz="1800" b="1">
+                <a:solidFill>
+                  <a:srgbClr val="0D1117"/>
+                </a:solidFill>
+                <a:latin typeface="Inter"/>
+              </a:defRPr>
+            </a:pPr>
+            <a:r>
+              <a:rPr>
+                <a:latin typeface="Inter"/>
+              </a:rPr>
+              <a:t>Complete</a:t>
+            </a:r>
+          </a:p>
+        </p:txBody>
+      </p:sp>
+      <p:sp>
+        <p:nvSpPr>
+          <p:cNvPr id="32" name="TextBox 31"/>
+          <p:cNvSpPr txBox="1"/>
+          <p:nvPr/>
+        </p:nvSpPr>
+        <p:spPr>
+          <a:xfrm>
+            <a:off x="9013698" y="5888736"/>
+            <a:ext cx="2425446" cy="228600"/>
+          </a:xfrm>
+          <a:prstGeom prst="rect">
+            <a:avLst/>
+          </a:prstGeom>
+          <a:noFill/>
+        </p:spPr>
+        <p:txBody>
+          <a:bodyPr wrap="none" lIns="9144" rIns="9144" tIns="9144" bIns="9144" anchor="t">
+            <a:spAutoFit/>
+          </a:bodyPr>
+          <a:lstStyle/>
+          <a:p>
+            <a:pPr algn="l">
+              <a:spcAft>
+                <a:spcPts val="0"/>
+              </a:spcAft>
+              <a:defRPr sz="700" b="0">
+                <a:solidFill>
+                  <a:srgbClr val="4A5563"/>
+                </a:solidFill>
+                <a:latin typeface="Inter"/>
+              </a:defRPr>
+            </a:pPr>
+            <a:r>
+              <a:rPr>
+                <a:latin typeface="Inter"/>
+              </a:rPr>
+              <a:t>Server-returned comparison · compatible receipts [S5]</a:t>
+            </a:r>
+          </a:p>
+        </p:txBody>
+      </p:sp>
+      <p:sp>
+        <p:nvSpPr>
+          <p:cNvPr id="33" name="Rectangle 32"/>
+          <p:cNvSpPr/>
+          <p:nvPr/>
+        </p:nvSpPr>
+        <p:spPr>
+          <a:xfrm>
+            <a:off x="640080" y="6446520"/>
+            <a:ext cx="10908792" cy="9144"/>
+          </a:xfrm>
+          <a:prstGeom prst="rect">
+            <a:avLst/>
+          </a:prstGeom>
+          <a:solidFill>
+            <a:srgbClr val="E3E7EC"/>
+          </a:solidFill>
+          <a:ln>
+            <a:solidFill>
+              <a:srgbClr val="E3E7EC"/>
+            </a:solidFill>
+          </a:ln>
+        </p:spPr>
+        <p:style>
+          <a:lnRef idx="1">
+            <a:schemeClr val="accent1"/>
+          </a:lnRef>
+          <a:fillRef idx="3">
+            <a:schemeClr val="accent1"/>
+          </a:fillRef>
+          <a:effectRef idx="2">
+            <a:schemeClr val="accent1"/>
+          </a:effectRef>
+          <a:fontRef idx="minor">
+            <a:schemeClr val="lt1"/>
+          </a:fontRef>
+        </p:style>
+        <p:txBody>
+          <a:bodyPr rtlCol="0" anchor="ctr"/>
+          <a:lstStyle/>
+          <a:p>
+            <a:pPr algn="ctr">
+              <a:defRPr>
+                <a:latin typeface="Inter"/>
+              </a:defRPr>
+            </a:pPr>
+          </a:p>
+        </p:txBody>
+      </p:sp>
+      <p:sp>
+        <p:nvSpPr>
+          <p:cNvPr id="34" name="TextBox 33"/>
+          <p:cNvSpPr txBox="1"/>
+          <p:nvPr/>
+        </p:nvSpPr>
+        <p:spPr>
+          <a:xfrm>
+            <a:off x="640080" y="6501384"/>
+            <a:ext cx="4297680" cy="146304"/>
+          </a:xfrm>
+          <a:prstGeom prst="rect">
+            <a:avLst/>
+          </a:prstGeom>
+          <a:noFill/>
+        </p:spPr>
+        <p:txBody>
+          <a:bodyPr wrap="none" lIns="9144" rIns="9144" tIns="9144" bIns="9144" anchor="t">
+            <a:spAutoFit/>
+          </a:bodyPr>
+          <a:lstStyle/>
+          <a:p>
+            <a:pPr algn="l">
+              <a:spcAft>
+                <a:spcPts val="0"/>
+              </a:spcAft>
+              <a:defRPr sz="650" b="0">
+                <a:solidFill>
+                  <a:srgbClr val="8A94A1"/>
+                </a:solidFill>
+                <a:latin typeface="Inter"/>
+              </a:defRPr>
+            </a:pPr>
+            <a:r>
+              <a:rPr>
+                <a:latin typeface="Inter"/>
+              </a:rPr>
+              <a:t>Sources: S2 · S3 · S4 · S5</a:t>
+            </a:r>
+          </a:p>
+        </p:txBody>
+      </p:sp>
+      <p:sp>
+        <p:nvSpPr>
+          <p:cNvPr id="35" name="TextBox 34"/>
+          <p:cNvSpPr txBox="1"/>
+          <p:nvPr/>
+        </p:nvSpPr>
+        <p:spPr>
+          <a:xfrm>
+            <a:off x="4480560" y="6501384"/>
+            <a:ext cx="5303520" cy="146304"/>
+          </a:xfrm>
+          <a:prstGeom prst="rect">
+            <a:avLst/>
+          </a:prstGeom>
+          <a:noFill/>
+        </p:spPr>
+        <p:txBody>
+          <a:bodyPr wrap="none" lIns="9144" rIns="9144" tIns="9144" bIns="9144" anchor="t">
+            <a:spAutoFit/>
+          </a:bodyPr>
+          <a:lstStyle/>
+          <a:p>
+            <a:pPr algn="ctr">
+              <a:spcAft>
+                <a:spcPts val="0"/>
+              </a:spcAft>
+              <a:defRPr sz="650" b="0">
+                <a:solidFill>
+                  <a:srgbClr val="8A94A1"/>
+                </a:solidFill>
+                <a:latin typeface="Inter"/>
+              </a:defRPr>
+            </a:pPr>
+            <a:r>
+              <a:rPr>
+                <a:latin typeface="Inter"/>
+              </a:rPr>
+              <a:t>Confidential — Investment Committee · Data as of 2026-06-30</a:t>
+            </a:r>
+          </a:p>
+        </p:txBody>
+      </p:sp>
+      <p:sp>
+        <p:nvSpPr>
+          <p:cNvPr id="36" name="TextBox 35"/>
+          <p:cNvSpPr txBox="1"/>
+          <p:nvPr/>
+        </p:nvSpPr>
+        <p:spPr>
+          <a:xfrm>
+            <a:off x="10287000" y="6501384"/>
+            <a:ext cx="1261872" cy="146304"/>
+          </a:xfrm>
+          <a:prstGeom prst="rect">
+            <a:avLst/>
+          </a:prstGeom>
+          <a:noFill/>
+        </p:spPr>
+        <p:txBody>
+          <a:bodyPr wrap="none" lIns="9144" rIns="9144" tIns="9144" bIns="9144" anchor="t">
+            <a:spAutoFit/>
+          </a:bodyPr>
+          <a:lstStyle/>
+          <a:p>
+            <a:pPr algn="r">
+              <a:spcAft>
+                <a:spcPts val="0"/>
+              </a:spcAft>
+              <a:defRPr sz="650" b="0">
+                <a:solidFill>
+                  <a:srgbClr val="8A94A1"/>
+                </a:solidFill>
+                <a:latin typeface="Inter"/>
+              </a:defRPr>
+            </a:pPr>
+            <a:r>
+              <a:rPr>
+                <a:latin typeface="Inter"/>
+              </a:rPr>
+              <a:t>2</a:t>
+            </a:r>
+          </a:p>
+        </p:txBody>
+      </p:sp>
+    </p:spTree>
+  </p:cSld>
+  <p:clrMapOvr>
+    <a:masterClrMapping/>
+  </p:clrMapOvr>
+</p:sld>
+</file>
+
+<file path=ppt/slides/slide20.xml><?xml version="1.0" encoding="utf-8"?>
 <p:sld xmlns:a="http://schemas.openxmlformats.org/drawingml/2006/main" xmlns:p="http://schemas.openxmlformats.org/presentationml/2006/main" xmlns:r="http://schemas.openxmlformats.org/officeDocument/2006/relationships">
   <p:cSld>
     <p:spTree>
@@ -22617,7 +20021,7 @@
               <a:rPr>
                 <a:latin typeface="Inter"/>
               </a:rPr>
-              <a:t>24</a:t>
+              <a:t>20</a:t>
             </a:r>
           </a:p>
         </p:txBody>
@@ -22630,7 +20034,7 @@
 </p:sld>
 </file>
 
-<file path=ppt/slides/slide25.xml><?xml version="1.0" encoding="utf-8"?>
+<file path=ppt/slides/slide21.xml><?xml version="1.0" encoding="utf-8"?>
 <p:sld xmlns:a="http://schemas.openxmlformats.org/drawingml/2006/main" xmlns:p="http://schemas.openxmlformats.org/presentationml/2006/main" xmlns:r="http://schemas.openxmlformats.org/officeDocument/2006/relationships">
   <p:cSld>
     <p:spTree>
@@ -23007,7 +20411,7 @@
         </p:nvGraphicFramePr>
         <p:xfrm>
           <a:off x="640080" y="1600200"/>
-          <a:ext cx="10908792" cy="1896736"/>
+          <a:ext cx="10908792" cy="2249163"/>
         </p:xfrm>
         <a:graphic>
           <a:graphicData uri="http://schemas.openxmlformats.org/drawingml/2006/table">
@@ -23022,7 +20426,7 @@
                 <a:gridCol w="2224278"/>
                 <a:gridCol w="2224278"/>
               </a:tblGrid>
-              <a:tr h="270962">
+              <a:tr h="321309">
                 <a:tc>
                   <a:txBody>
                     <a:bodyPr/>
@@ -23159,7 +20563,7 @@
                   </a:tcPr>
                 </a:tc>
               </a:tr>
-              <a:tr h="270962">
+              <a:tr h="321309">
                 <a:tc>
                   <a:txBody>
                     <a:bodyPr/>
@@ -23296,7 +20700,7 @@
                   </a:tcPr>
                 </a:tc>
               </a:tr>
-              <a:tr h="270962">
+              <a:tr h="321309">
                 <a:tc>
                   <a:txBody>
                     <a:bodyPr/>
@@ -23433,7 +20837,7 @@
                   </a:tcPr>
                 </a:tc>
               </a:tr>
-              <a:tr h="270962">
+              <a:tr h="321309">
                 <a:tc>
                   <a:txBody>
                     <a:bodyPr/>
@@ -23570,7 +20974,7 @@
                   </a:tcPr>
                 </a:tc>
               </a:tr>
-              <a:tr h="270962">
+              <a:tr h="321309">
                 <a:tc>
                   <a:txBody>
                     <a:bodyPr/>
@@ -23707,7 +21111,7 @@
                   </a:tcPr>
                 </a:tc>
               </a:tr>
-              <a:tr h="270962">
+              <a:tr h="321309">
                 <a:tc>
                   <a:txBody>
                     <a:bodyPr/>
@@ -23844,7 +21248,7 @@
                   </a:tcPr>
                 </a:tc>
               </a:tr>
-              <a:tr h="270964">
+              <a:tr h="321309">
                 <a:tc>
                   <a:txBody>
                     <a:bodyPr/>
@@ -23993,7 +21397,7 @@
         </p:nvSpPr>
         <p:spPr>
           <a:xfrm>
-            <a:off x="640080" y="3515224"/>
+            <a:off x="640080" y="3867651"/>
             <a:ext cx="10908792" cy="164592"/>
           </a:xfrm>
           <a:prstGeom prst="rect">
@@ -24035,8 +21439,8 @@
         </p:nvSpPr>
         <p:spPr>
           <a:xfrm>
-            <a:off x="640080" y="3807832"/>
-            <a:ext cx="10908792" cy="1148418"/>
+            <a:off x="640080" y="4160259"/>
+            <a:ext cx="10908792" cy="973966"/>
           </a:xfrm>
           <a:prstGeom prst="rect">
             <a:avLst/>
@@ -24084,8 +21488,8 @@
         </p:nvSpPr>
         <p:spPr>
           <a:xfrm>
-            <a:off x="640080" y="3807832"/>
-            <a:ext cx="54864" cy="1148418"/>
+            <a:off x="640080" y="4160259"/>
+            <a:ext cx="54864" cy="973966"/>
           </a:xfrm>
           <a:prstGeom prst="rect">
             <a:avLst/>
@@ -24133,7 +21537,7 @@
         </p:nvSpPr>
         <p:spPr>
           <a:xfrm>
-            <a:off x="804671" y="3917560"/>
+            <a:off x="804671" y="4269987"/>
             <a:ext cx="10616184" cy="228600"/>
           </a:xfrm>
           <a:prstGeom prst="rect">
@@ -24175,8 +21579,8 @@
         </p:nvSpPr>
         <p:spPr>
           <a:xfrm>
-            <a:off x="804671" y="4201024"/>
-            <a:ext cx="10616184" cy="663786"/>
+            <a:off x="804671" y="4553451"/>
+            <a:ext cx="10616184" cy="489334"/>
           </a:xfrm>
           <a:prstGeom prst="rect">
             <a:avLst/>
@@ -24217,8 +21621,8 @@
         </p:nvSpPr>
         <p:spPr>
           <a:xfrm>
-            <a:off x="640080" y="5065978"/>
-            <a:ext cx="10908792" cy="1151941"/>
+            <a:off x="640080" y="5243953"/>
+            <a:ext cx="10908792" cy="973966"/>
           </a:xfrm>
           <a:prstGeom prst="rect">
             <a:avLst/>
@@ -24266,8 +21670,8 @@
         </p:nvSpPr>
         <p:spPr>
           <a:xfrm>
-            <a:off x="640080" y="5065978"/>
-            <a:ext cx="54864" cy="1151941"/>
+            <a:off x="640080" y="5243953"/>
+            <a:ext cx="54864" cy="973966"/>
           </a:xfrm>
           <a:prstGeom prst="rect">
             <a:avLst/>
@@ -24315,7 +21719,7 @@
         </p:nvSpPr>
         <p:spPr>
           <a:xfrm>
-            <a:off x="804671" y="5175706"/>
+            <a:off x="804671" y="5353681"/>
             <a:ext cx="10616184" cy="228600"/>
           </a:xfrm>
           <a:prstGeom prst="rect">
@@ -24357,8 +21761,8 @@
         </p:nvSpPr>
         <p:spPr>
           <a:xfrm>
-            <a:off x="804671" y="5459170"/>
-            <a:ext cx="10616184" cy="667309"/>
+            <a:off x="804671" y="5637145"/>
+            <a:ext cx="10616184" cy="489334"/>
           </a:xfrm>
           <a:prstGeom prst="rect">
             <a:avLst/>
@@ -24561,7 +21965,7 @@
               <a:rPr>
                 <a:latin typeface="Inter"/>
               </a:rPr>
-              <a:t>25</a:t>
+              <a:t>21</a:t>
             </a:r>
           </a:p>
         </p:txBody>
@@ -24901,13 +22305,146 @@
       </p:sp>
       <p:sp>
         <p:nvSpPr>
-          <p:cNvPr id="9" name="TextBox 8"/>
+          <p:cNvPr id="9" name="Rectangle 8"/>
+          <p:cNvSpPr/>
+          <p:nvPr/>
+        </p:nvSpPr>
+        <p:spPr>
+          <a:xfrm>
+            <a:off x="640080" y="1399032"/>
+            <a:ext cx="73152" cy="585216"/>
+          </a:xfrm>
+          <a:prstGeom prst="rect">
+            <a:avLst/>
+          </a:prstGeom>
+          <a:solidFill>
+            <a:srgbClr val="C6F432"/>
+          </a:solidFill>
+          <a:ln>
+            <a:solidFill>
+              <a:srgbClr val="C6F432"/>
+            </a:solidFill>
+          </a:ln>
+        </p:spPr>
+        <p:style>
+          <a:lnRef idx="1">
+            <a:schemeClr val="accent1"/>
+          </a:lnRef>
+          <a:fillRef idx="3">
+            <a:schemeClr val="accent1"/>
+          </a:fillRef>
+          <a:effectRef idx="2">
+            <a:schemeClr val="accent1"/>
+          </a:effectRef>
+          <a:fontRef idx="minor">
+            <a:schemeClr val="lt1"/>
+          </a:fontRef>
+        </p:style>
+        <p:txBody>
+          <a:bodyPr rtlCol="0" anchor="ctr"/>
+          <a:lstStyle/>
+          <a:p>
+            <a:pPr algn="ctr">
+              <a:defRPr>
+                <a:latin typeface="Inter"/>
+              </a:defRPr>
+            </a:pPr>
+          </a:p>
+        </p:txBody>
+      </p:sp>
+      <p:sp>
+        <p:nvSpPr>
+          <p:cNvPr id="10" name="TextBox 9"/>
           <p:cNvSpPr txBox="1"/>
           <p:nvPr/>
         </p:nvSpPr>
         <p:spPr>
           <a:xfrm>
-            <a:off x="640080" y="1325880"/>
+            <a:off x="896112" y="1371600"/>
+            <a:ext cx="10588752" cy="424281"/>
+          </a:xfrm>
+          <a:prstGeom prst="rect">
+            <a:avLst/>
+          </a:prstGeom>
+          <a:noFill/>
+        </p:spPr>
+        <p:txBody>
+          <a:bodyPr wrap="none" lIns="9144" rIns="9144" tIns="9144" bIns="9144" anchor="t">
+            <a:spAutoFit/>
+          </a:bodyPr>
+          <a:lstStyle/>
+          <a:p>
+            <a:pPr algn="l">
+              <a:spcAft>
+                <a:spcPts val="0"/>
+              </a:spcAft>
+              <a:defRPr sz="1800" b="1">
+                <a:solidFill>
+                  <a:srgbClr val="0D1117"/>
+                </a:solidFill>
+                <a:latin typeface="Inter"/>
+              </a:defRPr>
+            </a:pPr>
+            <a:r>
+              <a:rPr>
+                <a:latin typeface="Inter"/>
+              </a:rPr>
+              <a:t>Three governed returned lanes and comparison metrics are available [S2][S3][S4][S5].</a:t>
+            </a:r>
+          </a:p>
+        </p:txBody>
+      </p:sp>
+      <p:sp>
+        <p:nvSpPr>
+          <p:cNvPr id="11" name="TextBox 10"/>
+          <p:cNvSpPr txBox="1"/>
+          <p:nvPr/>
+        </p:nvSpPr>
+        <p:spPr>
+          <a:xfrm>
+            <a:off x="896112" y="1764792"/>
+            <a:ext cx="10588752" cy="256032"/>
+          </a:xfrm>
+          <a:prstGeom prst="rect">
+            <a:avLst/>
+          </a:prstGeom>
+          <a:noFill/>
+        </p:spPr>
+        <p:txBody>
+          <a:bodyPr wrap="none" lIns="9144" rIns="9144" tIns="9144" bIns="9144" anchor="t">
+            <a:spAutoFit/>
+          </a:bodyPr>
+          <a:lstStyle/>
+          <a:p>
+            <a:pPr algn="l">
+              <a:spcAft>
+                <a:spcPts val="0"/>
+              </a:spcAft>
+              <a:defRPr sz="900" b="0">
+                <a:solidFill>
+                  <a:srgbClr val="4A5563"/>
+                </a:solidFill>
+                <a:latin typeface="Inter"/>
+              </a:defRPr>
+            </a:pPr>
+            <a:r>
+              <a:rPr>
+                <a:latin typeface="Inter"/>
+              </a:rPr>
+              <a:t>Returned evidence only; no local subtraction or accumulation.</a:t>
+            </a:r>
+          </a:p>
+        </p:txBody>
+      </p:sp>
+      <p:sp>
+        <p:nvSpPr>
+          <p:cNvPr id="12" name="TextBox 11"/>
+          <p:cNvSpPr txBox="1"/>
+          <p:nvPr/>
+        </p:nvSpPr>
+        <p:spPr>
+          <a:xfrm>
+            <a:off x="640080" y="2167128"/>
             <a:ext cx="10908792" cy="201168"/>
           </a:xfrm>
           <a:prstGeom prst="rect">
@@ -24943,15 +22480,15 @@
       </p:sp>
       <p:graphicFrame>
         <p:nvGraphicFramePr>
-          <p:cNvPr id="10" name="Chart 9"/>
+          <p:cNvPr id="13" name="Chart 12"/>
           <p:cNvGraphicFramePr>
             <a:graphicFrameLocks noGrp="1"/>
           </p:cNvGraphicFramePr>
           <p:nvPr/>
         </p:nvGraphicFramePr>
         <p:xfrm>
-          <a:off x="640080" y="1600200"/>
-          <a:ext cx="10908792" cy="4617720"/>
+          <a:off x="640080" y="2441448"/>
+          <a:ext cx="10908792" cy="3776472"/>
         </p:xfrm>
         <a:graphic>
           <a:graphicData uri="http://schemas.openxmlformats.org/drawingml/2006/chart">
@@ -24961,7 +22498,7 @@
       </p:graphicFrame>
       <p:sp>
         <p:nvSpPr>
-          <p:cNvPr id="11" name="Rectangle 10"/>
+          <p:cNvPr id="14" name="Rectangle 13"/>
           <p:cNvSpPr/>
           <p:nvPr/>
         </p:nvSpPr>
@@ -25010,7 +22547,7 @@
       </p:sp>
       <p:sp>
         <p:nvSpPr>
-          <p:cNvPr id="12" name="TextBox 11"/>
+          <p:cNvPr id="15" name="TextBox 14"/>
           <p:cNvSpPr txBox="1"/>
           <p:nvPr/>
         </p:nvSpPr>
@@ -25045,14 +22582,14 @@
               <a:rPr>
                 <a:latin typeface="Inter"/>
               </a:rPr>
-              <a:t>Sources: S2</a:t>
+              <a:t>Sources: S2 · S3 · S4 · S5</a:t>
             </a:r>
           </a:p>
         </p:txBody>
       </p:sp>
       <p:sp>
         <p:nvSpPr>
-          <p:cNvPr id="13" name="TextBox 12"/>
+          <p:cNvPr id="16" name="TextBox 15"/>
           <p:cNvSpPr txBox="1"/>
           <p:nvPr/>
         </p:nvSpPr>
@@ -25094,7 +22631,7 @@
       </p:sp>
       <p:sp>
         <p:nvSpPr>
-          <p:cNvPr id="14" name="TextBox 13"/>
+          <p:cNvPr id="17" name="TextBox 16"/>
           <p:cNvSpPr txBox="1"/>
           <p:nvPr/>
         </p:nvSpPr>
@@ -25519,7 +23056,7 @@
         </p:nvGraphicFramePr>
         <p:xfrm>
           <a:off x="640080" y="1600200"/>
-          <a:ext cx="10908792" cy="4617720"/>
+          <a:ext cx="10908792" cy="2705099"/>
         </p:xfrm>
         <a:graphic>
           <a:graphicData uri="http://schemas.openxmlformats.org/drawingml/2006/chart">
@@ -25530,6 +23067,370 @@
       <p:sp>
         <p:nvSpPr>
           <p:cNvPr id="11" name="Rectangle 10"/>
+          <p:cNvSpPr/>
+          <p:nvPr/>
+        </p:nvSpPr>
+        <p:spPr>
+          <a:xfrm>
+            <a:off x="640080" y="4415028"/>
+            <a:ext cx="10908792" cy="846582"/>
+          </a:xfrm>
+          <a:prstGeom prst="rect">
+            <a:avLst/>
+          </a:prstGeom>
+          <a:solidFill>
+            <a:srgbClr val="F5F7F9"/>
+          </a:solidFill>
+          <a:ln>
+            <a:solidFill>
+              <a:srgbClr val="E3E7EC"/>
+            </a:solidFill>
+          </a:ln>
+        </p:spPr>
+        <p:style>
+          <a:lnRef idx="1">
+            <a:schemeClr val="accent1"/>
+          </a:lnRef>
+          <a:fillRef idx="3">
+            <a:schemeClr val="accent1"/>
+          </a:fillRef>
+          <a:effectRef idx="2">
+            <a:schemeClr val="accent1"/>
+          </a:effectRef>
+          <a:fontRef idx="minor">
+            <a:schemeClr val="lt1"/>
+          </a:fontRef>
+        </p:style>
+        <p:txBody>
+          <a:bodyPr rtlCol="0" anchor="ctr"/>
+          <a:lstStyle/>
+          <a:p>
+            <a:pPr algn="ctr">
+              <a:defRPr>
+                <a:latin typeface="Inter"/>
+              </a:defRPr>
+            </a:pPr>
+          </a:p>
+        </p:txBody>
+      </p:sp>
+      <p:sp>
+        <p:nvSpPr>
+          <p:cNvPr id="12" name="Rectangle 11"/>
+          <p:cNvSpPr/>
+          <p:nvPr/>
+        </p:nvSpPr>
+        <p:spPr>
+          <a:xfrm>
+            <a:off x="640080" y="4415028"/>
+            <a:ext cx="54864" cy="846582"/>
+          </a:xfrm>
+          <a:prstGeom prst="rect">
+            <a:avLst/>
+          </a:prstGeom>
+          <a:solidFill>
+            <a:srgbClr val="F2A93B"/>
+          </a:solidFill>
+          <a:ln>
+            <a:solidFill>
+              <a:srgbClr val="F2A93B"/>
+            </a:solidFill>
+          </a:ln>
+        </p:spPr>
+        <p:style>
+          <a:lnRef idx="1">
+            <a:schemeClr val="accent1"/>
+          </a:lnRef>
+          <a:fillRef idx="3">
+            <a:schemeClr val="accent1"/>
+          </a:fillRef>
+          <a:effectRef idx="2">
+            <a:schemeClr val="accent1"/>
+          </a:effectRef>
+          <a:fontRef idx="minor">
+            <a:schemeClr val="lt1"/>
+          </a:fontRef>
+        </p:style>
+        <p:txBody>
+          <a:bodyPr rtlCol="0" anchor="ctr"/>
+          <a:lstStyle/>
+          <a:p>
+            <a:pPr algn="ctr">
+              <a:defRPr>
+                <a:latin typeface="Inter"/>
+              </a:defRPr>
+            </a:pPr>
+          </a:p>
+        </p:txBody>
+      </p:sp>
+      <p:sp>
+        <p:nvSpPr>
+          <p:cNvPr id="13" name="TextBox 12"/>
+          <p:cNvSpPr txBox="1"/>
+          <p:nvPr/>
+        </p:nvSpPr>
+        <p:spPr>
+          <a:xfrm>
+            <a:off x="804671" y="4524756"/>
+            <a:ext cx="10616184" cy="228600"/>
+          </a:xfrm>
+          <a:prstGeom prst="rect">
+            <a:avLst/>
+          </a:prstGeom>
+          <a:noFill/>
+        </p:spPr>
+        <p:txBody>
+          <a:bodyPr wrap="none" lIns="9144" rIns="9144" tIns="9144" bIns="9144" anchor="t">
+            <a:spAutoFit/>
+          </a:bodyPr>
+          <a:lstStyle/>
+          <a:p>
+            <a:pPr algn="l">
+              <a:spcAft>
+                <a:spcPts val="0"/>
+              </a:spcAft>
+              <a:defRPr sz="1000" b="1">
+                <a:solidFill>
+                  <a:srgbClr val="0D1117"/>
+                </a:solidFill>
+                <a:latin typeface="Inter"/>
+              </a:defRPr>
+            </a:pPr>
+            <a:r>
+              <a:rPr>
+                <a:latin typeface="Inter"/>
+              </a:rPr>
+              <a:t>Key judgment — Historical</a:t>
+            </a:r>
+          </a:p>
+        </p:txBody>
+      </p:sp>
+      <p:sp>
+        <p:nvSpPr>
+          <p:cNvPr id="14" name="TextBox 13"/>
+          <p:cNvSpPr txBox="1"/>
+          <p:nvPr/>
+        </p:nvSpPr>
+        <p:spPr>
+          <a:xfrm>
+            <a:off x="804671" y="4808220"/>
+            <a:ext cx="10616184" cy="361950"/>
+          </a:xfrm>
+          <a:prstGeom prst="rect">
+            <a:avLst/>
+          </a:prstGeom>
+          <a:noFill/>
+        </p:spPr>
+        <p:txBody>
+          <a:bodyPr wrap="none" lIns="9144" rIns="9144" tIns="9144" bIns="9144" anchor="t">
+            <a:spAutoFit/>
+          </a:bodyPr>
+          <a:lstStyle/>
+          <a:p>
+            <a:pPr algn="l">
+              <a:spcAft>
+                <a:spcPts val="0"/>
+              </a:spcAft>
+              <a:defRPr sz="950" b="0">
+                <a:solidFill>
+                  <a:srgbClr val="4A5563"/>
+                </a:solidFill>
+                <a:latin typeface="Inter"/>
+              </a:defRPr>
+            </a:pPr>
+            <a:r>
+              <a:rPr>
+                <a:latin typeface="Inter"/>
+              </a:rPr>
+              <a:t>Observation: Historical effects are returned [S2]. Why it matters: Realized sources can be described. Uncertainty: One period may not persist. What would change the view: A later governed period.</a:t>
+            </a:r>
+          </a:p>
+        </p:txBody>
+      </p:sp>
+      <p:sp>
+        <p:nvSpPr>
+          <p:cNvPr id="15" name="Rectangle 14"/>
+          <p:cNvSpPr/>
+          <p:nvPr/>
+        </p:nvSpPr>
+        <p:spPr>
+          <a:xfrm>
+            <a:off x="640080" y="5371338"/>
+            <a:ext cx="10908792" cy="846582"/>
+          </a:xfrm>
+          <a:prstGeom prst="rect">
+            <a:avLst/>
+          </a:prstGeom>
+          <a:solidFill>
+            <a:srgbClr val="F5F7F9"/>
+          </a:solidFill>
+          <a:ln>
+            <a:solidFill>
+              <a:srgbClr val="E3E7EC"/>
+            </a:solidFill>
+          </a:ln>
+        </p:spPr>
+        <p:style>
+          <a:lnRef idx="1">
+            <a:schemeClr val="accent1"/>
+          </a:lnRef>
+          <a:fillRef idx="3">
+            <a:schemeClr val="accent1"/>
+          </a:fillRef>
+          <a:effectRef idx="2">
+            <a:schemeClr val="accent1"/>
+          </a:effectRef>
+          <a:fontRef idx="minor">
+            <a:schemeClr val="lt1"/>
+          </a:fontRef>
+        </p:style>
+        <p:txBody>
+          <a:bodyPr rtlCol="0" anchor="ctr"/>
+          <a:lstStyle/>
+          <a:p>
+            <a:pPr algn="ctr">
+              <a:defRPr>
+                <a:latin typeface="Inter"/>
+              </a:defRPr>
+            </a:pPr>
+          </a:p>
+        </p:txBody>
+      </p:sp>
+      <p:sp>
+        <p:nvSpPr>
+          <p:cNvPr id="16" name="Rectangle 15"/>
+          <p:cNvSpPr/>
+          <p:nvPr/>
+        </p:nvSpPr>
+        <p:spPr>
+          <a:xfrm>
+            <a:off x="640080" y="5371338"/>
+            <a:ext cx="54864" cy="846582"/>
+          </a:xfrm>
+          <a:prstGeom prst="rect">
+            <a:avLst/>
+          </a:prstGeom>
+          <a:solidFill>
+            <a:srgbClr val="F2A93B"/>
+          </a:solidFill>
+          <a:ln>
+            <a:solidFill>
+              <a:srgbClr val="F2A93B"/>
+            </a:solidFill>
+          </a:ln>
+        </p:spPr>
+        <p:style>
+          <a:lnRef idx="1">
+            <a:schemeClr val="accent1"/>
+          </a:lnRef>
+          <a:fillRef idx="3">
+            <a:schemeClr val="accent1"/>
+          </a:fillRef>
+          <a:effectRef idx="2">
+            <a:schemeClr val="accent1"/>
+          </a:effectRef>
+          <a:fontRef idx="minor">
+            <a:schemeClr val="lt1"/>
+          </a:fontRef>
+        </p:style>
+        <p:txBody>
+          <a:bodyPr rtlCol="0" anchor="ctr"/>
+          <a:lstStyle/>
+          <a:p>
+            <a:pPr algn="ctr">
+              <a:defRPr>
+                <a:latin typeface="Inter"/>
+              </a:defRPr>
+            </a:pPr>
+          </a:p>
+        </p:txBody>
+      </p:sp>
+      <p:sp>
+        <p:nvSpPr>
+          <p:cNvPr id="17" name="TextBox 16"/>
+          <p:cNvSpPr txBox="1"/>
+          <p:nvPr/>
+        </p:nvSpPr>
+        <p:spPr>
+          <a:xfrm>
+            <a:off x="804671" y="5481066"/>
+            <a:ext cx="10616184" cy="228600"/>
+          </a:xfrm>
+          <a:prstGeom prst="rect">
+            <a:avLst/>
+          </a:prstGeom>
+          <a:noFill/>
+        </p:spPr>
+        <p:txBody>
+          <a:bodyPr wrap="none" lIns="9144" rIns="9144" tIns="9144" bIns="9144" anchor="t">
+            <a:spAutoFit/>
+          </a:bodyPr>
+          <a:lstStyle/>
+          <a:p>
+            <a:pPr algn="l">
+              <a:spcAft>
+                <a:spcPts val="0"/>
+              </a:spcAft>
+              <a:defRPr sz="1000" b="1">
+                <a:solidFill>
+                  <a:srgbClr val="0D1117"/>
+                </a:solidFill>
+                <a:latin typeface="Inter"/>
+              </a:defRPr>
+            </a:pPr>
+            <a:r>
+              <a:rPr>
+                <a:latin typeface="Inter"/>
+              </a:rPr>
+              <a:t>Key judgment — Ex ante</a:t>
+            </a:r>
+          </a:p>
+        </p:txBody>
+      </p:sp>
+      <p:sp>
+        <p:nvSpPr>
+          <p:cNvPr id="18" name="TextBox 17"/>
+          <p:cNvSpPr txBox="1"/>
+          <p:nvPr/>
+        </p:nvSpPr>
+        <p:spPr>
+          <a:xfrm>
+            <a:off x="804671" y="5764530"/>
+            <a:ext cx="10616184" cy="361950"/>
+          </a:xfrm>
+          <a:prstGeom prst="rect">
+            <a:avLst/>
+          </a:prstGeom>
+          <a:noFill/>
+        </p:spPr>
+        <p:txBody>
+          <a:bodyPr wrap="none" lIns="9144" rIns="9144" tIns="9144" bIns="9144" anchor="t">
+            <a:spAutoFit/>
+          </a:bodyPr>
+          <a:lstStyle/>
+          <a:p>
+            <a:pPr algn="l">
+              <a:spcAft>
+                <a:spcPts val="0"/>
+              </a:spcAft>
+              <a:defRPr sz="950" b="0">
+                <a:solidFill>
+                  <a:srgbClr val="4A5563"/>
+                </a:solidFill>
+                <a:latin typeface="Inter"/>
+              </a:defRPr>
+            </a:pPr>
+            <a:r>
+              <a:rPr>
+                <a:latin typeface="Inter"/>
+              </a:rPr>
+              <a:t>Observation: Ex ante effects are returned [S3]. Why it matters: Expected sources can be described. Uncertainty: Inputs are assumptions. What would change the view: Refreshed governed inputs.</a:t>
+            </a:r>
+          </a:p>
+        </p:txBody>
+      </p:sp>
+      <p:sp>
+        <p:nvSpPr>
+          <p:cNvPr id="19" name="Rectangle 18"/>
           <p:cNvSpPr/>
           <p:nvPr/>
         </p:nvSpPr>
@@ -25578,7 +23479,7 @@
       </p:sp>
       <p:sp>
         <p:nvSpPr>
-          <p:cNvPr id="12" name="TextBox 11"/>
+          <p:cNvPr id="20" name="TextBox 19"/>
           <p:cNvSpPr txBox="1"/>
           <p:nvPr/>
         </p:nvSpPr>
@@ -25613,14 +23514,14 @@
               <a:rPr>
                 <a:latin typeface="Inter"/>
               </a:rPr>
-              <a:t>Sources: S3</a:t>
+              <a:t>Sources: S2 · S3</a:t>
             </a:r>
           </a:p>
         </p:txBody>
       </p:sp>
       <p:sp>
         <p:nvSpPr>
-          <p:cNvPr id="13" name="TextBox 12"/>
+          <p:cNvPr id="21" name="TextBox 20"/>
           <p:cNvSpPr txBox="1"/>
           <p:nvPr/>
         </p:nvSpPr>
@@ -25662,7 +23563,7 @@
       </p:sp>
       <p:sp>
         <p:nvSpPr>
-          <p:cNvPr id="14" name="TextBox 13"/>
+          <p:cNvPr id="22" name="TextBox 21"/>
           <p:cNvSpPr txBox="1"/>
           <p:nvPr/>
         </p:nvSpPr>
@@ -26044,7 +23945,7 @@
         <p:spPr>
           <a:xfrm>
             <a:off x="640080" y="1325880"/>
-            <a:ext cx="10908792" cy="1400428"/>
+            <a:ext cx="10908792" cy="4892040"/>
           </a:xfrm>
           <a:prstGeom prst="rect">
             <a:avLst/>
@@ -26093,7 +23994,7 @@
         <p:spPr>
           <a:xfrm>
             <a:off x="640080" y="1325880"/>
-            <a:ext cx="54864" cy="1400428"/>
+            <a:ext cx="54864" cy="4892040"/>
           </a:xfrm>
           <a:prstGeom prst="rect">
             <a:avLst/>
@@ -26170,7 +24071,7 @@
               <a:rPr>
                 <a:latin typeface="Inter"/>
               </a:rPr>
-              <a:t>Key judgment — Historical</a:t>
+              <a:t>Key judgment — Comparison</a:t>
             </a:r>
           </a:p>
         </p:txBody>
@@ -26184,7 +24085,7 @@
         <p:spPr>
           <a:xfrm>
             <a:off x="804671" y="1719072"/>
-            <a:ext cx="10616184" cy="915796"/>
+            <a:ext cx="10616184" cy="4407408"/>
           </a:xfrm>
           <a:prstGeom prst="rect">
             <a:avLst/>
@@ -26212,370 +24113,6 @@
               <a:rPr>
                 <a:latin typeface="Inter"/>
               </a:rPr>
-              <a:t>Observation: Historical effects are returned [S2]. Why it matters: Realized sources can be described. Uncertainty: One period may not persist. What would change the view: A later governed period.</a:t>
-            </a:r>
-          </a:p>
-        </p:txBody>
-      </p:sp>
-      <p:sp>
-        <p:nvSpPr>
-          <p:cNvPr id="13" name="Rectangle 12"/>
-          <p:cNvSpPr/>
-          <p:nvPr/>
-        </p:nvSpPr>
-        <p:spPr>
-          <a:xfrm>
-            <a:off x="640080" y="2836036"/>
-            <a:ext cx="10908792" cy="1400428"/>
-          </a:xfrm>
-          <a:prstGeom prst="rect">
-            <a:avLst/>
-          </a:prstGeom>
-          <a:solidFill>
-            <a:srgbClr val="F5F7F9"/>
-          </a:solidFill>
-          <a:ln>
-            <a:solidFill>
-              <a:srgbClr val="E3E7EC"/>
-            </a:solidFill>
-          </a:ln>
-        </p:spPr>
-        <p:style>
-          <a:lnRef idx="1">
-            <a:schemeClr val="accent1"/>
-          </a:lnRef>
-          <a:fillRef idx="3">
-            <a:schemeClr val="accent1"/>
-          </a:fillRef>
-          <a:effectRef idx="2">
-            <a:schemeClr val="accent1"/>
-          </a:effectRef>
-          <a:fontRef idx="minor">
-            <a:schemeClr val="lt1"/>
-          </a:fontRef>
-        </p:style>
-        <p:txBody>
-          <a:bodyPr rtlCol="0" anchor="ctr"/>
-          <a:lstStyle/>
-          <a:p>
-            <a:pPr algn="ctr">
-              <a:defRPr>
-                <a:latin typeface="Inter"/>
-              </a:defRPr>
-            </a:pPr>
-          </a:p>
-        </p:txBody>
-      </p:sp>
-      <p:sp>
-        <p:nvSpPr>
-          <p:cNvPr id="14" name="Rectangle 13"/>
-          <p:cNvSpPr/>
-          <p:nvPr/>
-        </p:nvSpPr>
-        <p:spPr>
-          <a:xfrm>
-            <a:off x="640080" y="2836036"/>
-            <a:ext cx="54864" cy="1400428"/>
-          </a:xfrm>
-          <a:prstGeom prst="rect">
-            <a:avLst/>
-          </a:prstGeom>
-          <a:solidFill>
-            <a:srgbClr val="F2A93B"/>
-          </a:solidFill>
-          <a:ln>
-            <a:solidFill>
-              <a:srgbClr val="F2A93B"/>
-            </a:solidFill>
-          </a:ln>
-        </p:spPr>
-        <p:style>
-          <a:lnRef idx="1">
-            <a:schemeClr val="accent1"/>
-          </a:lnRef>
-          <a:fillRef idx="3">
-            <a:schemeClr val="accent1"/>
-          </a:fillRef>
-          <a:effectRef idx="2">
-            <a:schemeClr val="accent1"/>
-          </a:effectRef>
-          <a:fontRef idx="minor">
-            <a:schemeClr val="lt1"/>
-          </a:fontRef>
-        </p:style>
-        <p:txBody>
-          <a:bodyPr rtlCol="0" anchor="ctr"/>
-          <a:lstStyle/>
-          <a:p>
-            <a:pPr algn="ctr">
-              <a:defRPr>
-                <a:latin typeface="Inter"/>
-              </a:defRPr>
-            </a:pPr>
-          </a:p>
-        </p:txBody>
-      </p:sp>
-      <p:sp>
-        <p:nvSpPr>
-          <p:cNvPr id="15" name="TextBox 14"/>
-          <p:cNvSpPr txBox="1"/>
-          <p:nvPr/>
-        </p:nvSpPr>
-        <p:spPr>
-          <a:xfrm>
-            <a:off x="804671" y="2945764"/>
-            <a:ext cx="10616184" cy="228600"/>
-          </a:xfrm>
-          <a:prstGeom prst="rect">
-            <a:avLst/>
-          </a:prstGeom>
-          <a:noFill/>
-        </p:spPr>
-        <p:txBody>
-          <a:bodyPr wrap="none" lIns="9144" rIns="9144" tIns="9144" bIns="9144" anchor="t">
-            <a:spAutoFit/>
-          </a:bodyPr>
-          <a:lstStyle/>
-          <a:p>
-            <a:pPr algn="l">
-              <a:spcAft>
-                <a:spcPts val="0"/>
-              </a:spcAft>
-              <a:defRPr sz="1000" b="1">
-                <a:solidFill>
-                  <a:srgbClr val="0D1117"/>
-                </a:solidFill>
-                <a:latin typeface="Inter"/>
-              </a:defRPr>
-            </a:pPr>
-            <a:r>
-              <a:rPr>
-                <a:latin typeface="Inter"/>
-              </a:rPr>
-              <a:t>Key judgment — Ex ante</a:t>
-            </a:r>
-          </a:p>
-        </p:txBody>
-      </p:sp>
-      <p:sp>
-        <p:nvSpPr>
-          <p:cNvPr id="16" name="TextBox 15"/>
-          <p:cNvSpPr txBox="1"/>
-          <p:nvPr/>
-        </p:nvSpPr>
-        <p:spPr>
-          <a:xfrm>
-            <a:off x="804671" y="3229228"/>
-            <a:ext cx="10616184" cy="915796"/>
-          </a:xfrm>
-          <a:prstGeom prst="rect">
-            <a:avLst/>
-          </a:prstGeom>
-          <a:noFill/>
-        </p:spPr>
-        <p:txBody>
-          <a:bodyPr wrap="none" lIns="9144" rIns="9144" tIns="9144" bIns="9144" anchor="t">
-            <a:spAutoFit/>
-          </a:bodyPr>
-          <a:lstStyle/>
-          <a:p>
-            <a:pPr algn="l">
-              <a:spcAft>
-                <a:spcPts val="0"/>
-              </a:spcAft>
-              <a:defRPr sz="950" b="0">
-                <a:solidFill>
-                  <a:srgbClr val="4A5563"/>
-                </a:solidFill>
-                <a:latin typeface="Inter"/>
-              </a:defRPr>
-            </a:pPr>
-            <a:r>
-              <a:rPr>
-                <a:latin typeface="Inter"/>
-              </a:rPr>
-              <a:t>Observation: Ex ante effects are returned [S3]. Why it matters: Expected sources can be described. Uncertainty: Inputs are assumptions. What would change the view: Refreshed governed inputs.</a:t>
-            </a:r>
-          </a:p>
-        </p:txBody>
-      </p:sp>
-      <p:sp>
-        <p:nvSpPr>
-          <p:cNvPr id="17" name="Rectangle 16"/>
-          <p:cNvSpPr/>
-          <p:nvPr/>
-        </p:nvSpPr>
-        <p:spPr>
-          <a:xfrm>
-            <a:off x="640080" y="4346193"/>
-            <a:ext cx="10908792" cy="1871726"/>
-          </a:xfrm>
-          <a:prstGeom prst="rect">
-            <a:avLst/>
-          </a:prstGeom>
-          <a:solidFill>
-            <a:srgbClr val="F5F7F9"/>
-          </a:solidFill>
-          <a:ln>
-            <a:solidFill>
-              <a:srgbClr val="E3E7EC"/>
-            </a:solidFill>
-          </a:ln>
-        </p:spPr>
-        <p:style>
-          <a:lnRef idx="1">
-            <a:schemeClr val="accent1"/>
-          </a:lnRef>
-          <a:fillRef idx="3">
-            <a:schemeClr val="accent1"/>
-          </a:fillRef>
-          <a:effectRef idx="2">
-            <a:schemeClr val="accent1"/>
-          </a:effectRef>
-          <a:fontRef idx="minor">
-            <a:schemeClr val="lt1"/>
-          </a:fontRef>
-        </p:style>
-        <p:txBody>
-          <a:bodyPr rtlCol="0" anchor="ctr"/>
-          <a:lstStyle/>
-          <a:p>
-            <a:pPr algn="ctr">
-              <a:defRPr>
-                <a:latin typeface="Inter"/>
-              </a:defRPr>
-            </a:pPr>
-          </a:p>
-        </p:txBody>
-      </p:sp>
-      <p:sp>
-        <p:nvSpPr>
-          <p:cNvPr id="18" name="Rectangle 17"/>
-          <p:cNvSpPr/>
-          <p:nvPr/>
-        </p:nvSpPr>
-        <p:spPr>
-          <a:xfrm>
-            <a:off x="640080" y="4346193"/>
-            <a:ext cx="54864" cy="1871726"/>
-          </a:xfrm>
-          <a:prstGeom prst="rect">
-            <a:avLst/>
-          </a:prstGeom>
-          <a:solidFill>
-            <a:srgbClr val="F2A93B"/>
-          </a:solidFill>
-          <a:ln>
-            <a:solidFill>
-              <a:srgbClr val="F2A93B"/>
-            </a:solidFill>
-          </a:ln>
-        </p:spPr>
-        <p:style>
-          <a:lnRef idx="1">
-            <a:schemeClr val="accent1"/>
-          </a:lnRef>
-          <a:fillRef idx="3">
-            <a:schemeClr val="accent1"/>
-          </a:fillRef>
-          <a:effectRef idx="2">
-            <a:schemeClr val="accent1"/>
-          </a:effectRef>
-          <a:fontRef idx="minor">
-            <a:schemeClr val="lt1"/>
-          </a:fontRef>
-        </p:style>
-        <p:txBody>
-          <a:bodyPr rtlCol="0" anchor="ctr"/>
-          <a:lstStyle/>
-          <a:p>
-            <a:pPr algn="ctr">
-              <a:defRPr>
-                <a:latin typeface="Inter"/>
-              </a:defRPr>
-            </a:pPr>
-          </a:p>
-        </p:txBody>
-      </p:sp>
-      <p:sp>
-        <p:nvSpPr>
-          <p:cNvPr id="19" name="TextBox 18"/>
-          <p:cNvSpPr txBox="1"/>
-          <p:nvPr/>
-        </p:nvSpPr>
-        <p:spPr>
-          <a:xfrm>
-            <a:off x="804671" y="4455921"/>
-            <a:ext cx="10616184" cy="228600"/>
-          </a:xfrm>
-          <a:prstGeom prst="rect">
-            <a:avLst/>
-          </a:prstGeom>
-          <a:noFill/>
-        </p:spPr>
-        <p:txBody>
-          <a:bodyPr wrap="none" lIns="9144" rIns="9144" tIns="9144" bIns="9144" anchor="t">
-            <a:spAutoFit/>
-          </a:bodyPr>
-          <a:lstStyle/>
-          <a:p>
-            <a:pPr algn="l">
-              <a:spcAft>
-                <a:spcPts val="0"/>
-              </a:spcAft>
-              <a:defRPr sz="1000" b="1">
-                <a:solidFill>
-                  <a:srgbClr val="0D1117"/>
-                </a:solidFill>
-                <a:latin typeface="Inter"/>
-              </a:defRPr>
-            </a:pPr>
-            <a:r>
-              <a:rPr>
-                <a:latin typeface="Inter"/>
-              </a:rPr>
-              <a:t>Key judgment — Comparison</a:t>
-            </a:r>
-          </a:p>
-        </p:txBody>
-      </p:sp>
-      <p:sp>
-        <p:nvSpPr>
-          <p:cNvPr id="20" name="TextBox 19"/>
-          <p:cNvSpPr txBox="1"/>
-          <p:nvPr/>
-        </p:nvSpPr>
-        <p:spPr>
-          <a:xfrm>
-            <a:off x="804671" y="4739385"/>
-            <a:ext cx="10616184" cy="1387094"/>
-          </a:xfrm>
-          <a:prstGeom prst="rect">
-            <a:avLst/>
-          </a:prstGeom>
-          <a:noFill/>
-        </p:spPr>
-        <p:txBody>
-          <a:bodyPr wrap="none" lIns="9144" rIns="9144" tIns="9144" bIns="9144" anchor="t">
-            <a:spAutoFit/>
-          </a:bodyPr>
-          <a:lstStyle/>
-          <a:p>
-            <a:pPr algn="l">
-              <a:spcAft>
-                <a:spcPts val="0"/>
-              </a:spcAft>
-              <a:defRPr sz="950" b="0">
-                <a:solidFill>
-                  <a:srgbClr val="4A5563"/>
-                </a:solidFill>
-                <a:latin typeface="Inter"/>
-              </a:defRPr>
-            </a:pPr>
-            <a:r>
-              <a:rPr>
-                <a:latin typeface="Inter"/>
-              </a:rPr>
               <a:t>Observation: Server-returned comparison metrics cover three compatible lanes [S5]. Why it matters: Cross-lane evidence is governed. Uncertainty: One comparison receipt limits time-series interpretation. What would change the view: A later receipt returning different lane signs.</a:t>
             </a:r>
           </a:p>
@@ -26583,7 +24120,7 @@
       </p:sp>
       <p:sp>
         <p:nvSpPr>
-          <p:cNvPr id="21" name="Rectangle 20"/>
+          <p:cNvPr id="13" name="Rectangle 12"/>
           <p:cNvSpPr/>
           <p:nvPr/>
         </p:nvSpPr>
@@ -26632,7 +24169,7 @@
       </p:sp>
       <p:sp>
         <p:nvSpPr>
-          <p:cNvPr id="22" name="TextBox 21"/>
+          <p:cNvPr id="14" name="TextBox 13"/>
           <p:cNvSpPr txBox="1"/>
           <p:nvPr/>
         </p:nvSpPr>
@@ -26667,14 +24204,14 @@
               <a:rPr>
                 <a:latin typeface="Inter"/>
               </a:rPr>
-              <a:t>Sources: S2 · S3 · S5</a:t>
+              <a:t>Sources: S5</a:t>
             </a:r>
           </a:p>
         </p:txBody>
       </p:sp>
       <p:sp>
         <p:nvSpPr>
-          <p:cNvPr id="23" name="TextBox 22"/>
+          <p:cNvPr id="15" name="TextBox 14"/>
           <p:cNvSpPr txBox="1"/>
           <p:nvPr/>
         </p:nvSpPr>
@@ -26716,7 +24253,7 @@
       </p:sp>
       <p:sp>
         <p:nvSpPr>
-          <p:cNvPr id="24" name="TextBox 23"/>
+          <p:cNvPr id="16" name="TextBox 15"/>
           <p:cNvSpPr txBox="1"/>
           <p:nvPr/>
         </p:nvSpPr>
@@ -27932,7 +25469,7 @@
         <p:spPr>
           <a:xfrm>
             <a:off x="640080" y="1325880"/>
-            <a:ext cx="10908792" cy="201168"/>
+            <a:ext cx="5239512" cy="201168"/>
           </a:xfrm>
           <a:prstGeom prst="rect">
             <a:avLst/>
@@ -27975,7 +25512,7 @@
         </p:nvGraphicFramePr>
         <p:xfrm>
           <a:off x="640080" y="1600200"/>
-          <a:ext cx="10908792" cy="4617720"/>
+          <a:ext cx="5239512" cy="4617720"/>
         </p:xfrm>
         <a:graphic>
           <a:graphicData uri="http://schemas.openxmlformats.org/drawingml/2006/chart">
@@ -27991,8 +25528,8 @@
         </p:nvSpPr>
         <p:spPr>
           <a:xfrm>
-            <a:off x="640080" y="6446520"/>
-            <a:ext cx="10908792" cy="9144"/>
+            <a:off x="6080760" y="1325880"/>
+            <a:ext cx="9144" cy="4892040"/>
           </a:xfrm>
           <a:prstGeom prst="rect">
             <a:avLst/>
@@ -28040,6 +25577,115 @@
         </p:nvSpPr>
         <p:spPr>
           <a:xfrm>
+            <a:off x="6309360" y="1325880"/>
+            <a:ext cx="5239512" cy="201168"/>
+          </a:xfrm>
+          <a:prstGeom prst="rect">
+            <a:avLst/>
+          </a:prstGeom>
+          <a:noFill/>
+        </p:spPr>
+        <p:txBody>
+          <a:bodyPr wrap="none" lIns="9144" rIns="9144" tIns="9144" bIns="9144" anchor="t">
+            <a:spAutoFit/>
+          </a:bodyPr>
+          <a:lstStyle/>
+          <a:p>
+            <a:pPr algn="l">
+              <a:spcAft>
+                <a:spcPts val="0"/>
+              </a:spcAft>
+              <a:defRPr sz="720" b="1">
+                <a:solidFill>
+                  <a:srgbClr val="4A5563"/>
+                </a:solidFill>
+                <a:latin typeface="Inter"/>
+              </a:defRPr>
+            </a:pPr>
+            <a:r>
+              <a:rPr>
+                <a:latin typeface="Inter"/>
+              </a:rPr>
+              <a:t>HISTORICAL PORTFOLIO AND BENCHMARK AVERAGE WEIGHTS</a:t>
+            </a:r>
+          </a:p>
+        </p:txBody>
+      </p:sp>
+      <p:graphicFrame>
+        <p:nvGraphicFramePr>
+          <p:cNvPr id="13" name="Chart 12"/>
+          <p:cNvGraphicFramePr>
+            <a:graphicFrameLocks noGrp="1"/>
+          </p:cNvGraphicFramePr>
+          <p:nvPr/>
+        </p:nvGraphicFramePr>
+        <p:xfrm>
+          <a:off x="6309360" y="1600200"/>
+          <a:ext cx="5239512" cy="4617720"/>
+        </p:xfrm>
+        <a:graphic>
+          <a:graphicData uri="http://schemas.openxmlformats.org/drawingml/2006/chart">
+            <c:chart xmlns:c="http://schemas.openxmlformats.org/drawingml/2006/chart" r:id="rId3"/>
+          </a:graphicData>
+        </a:graphic>
+      </p:graphicFrame>
+      <p:sp>
+        <p:nvSpPr>
+          <p:cNvPr id="14" name="Rectangle 13"/>
+          <p:cNvSpPr/>
+          <p:nvPr/>
+        </p:nvSpPr>
+        <p:spPr>
+          <a:xfrm>
+            <a:off x="640080" y="6446520"/>
+            <a:ext cx="10908792" cy="9144"/>
+          </a:xfrm>
+          <a:prstGeom prst="rect">
+            <a:avLst/>
+          </a:prstGeom>
+          <a:solidFill>
+            <a:srgbClr val="E3E7EC"/>
+          </a:solidFill>
+          <a:ln>
+            <a:solidFill>
+              <a:srgbClr val="E3E7EC"/>
+            </a:solidFill>
+          </a:ln>
+        </p:spPr>
+        <p:style>
+          <a:lnRef idx="1">
+            <a:schemeClr val="accent1"/>
+          </a:lnRef>
+          <a:fillRef idx="3">
+            <a:schemeClr val="accent1"/>
+          </a:fillRef>
+          <a:effectRef idx="2">
+            <a:schemeClr val="accent1"/>
+          </a:effectRef>
+          <a:fontRef idx="minor">
+            <a:schemeClr val="lt1"/>
+          </a:fontRef>
+        </p:style>
+        <p:txBody>
+          <a:bodyPr rtlCol="0" anchor="ctr"/>
+          <a:lstStyle/>
+          <a:p>
+            <a:pPr algn="ctr">
+              <a:defRPr>
+                <a:latin typeface="Inter"/>
+              </a:defRPr>
+            </a:pPr>
+          </a:p>
+        </p:txBody>
+      </p:sp>
+      <p:sp>
+        <p:nvSpPr>
+          <p:cNvPr id="15" name="TextBox 14"/>
+          <p:cNvSpPr txBox="1"/>
+          <p:nvPr/>
+        </p:nvSpPr>
+        <p:spPr>
+          <a:xfrm>
             <a:off x="640080" y="6501384"/>
             <a:ext cx="4297680" cy="146304"/>
           </a:xfrm>
@@ -28076,7 +25722,7 @@
       </p:sp>
       <p:sp>
         <p:nvSpPr>
-          <p:cNvPr id="13" name="TextBox 12"/>
+          <p:cNvPr id="16" name="TextBox 15"/>
           <p:cNvSpPr txBox="1"/>
           <p:nvPr/>
         </p:nvSpPr>
@@ -28118,7 +25764,7 @@
       </p:sp>
       <p:sp>
         <p:nvSpPr>
-          <p:cNvPr id="14" name="TextBox 13"/>
+          <p:cNvPr id="17" name="TextBox 16"/>
           <p:cNvSpPr txBox="1"/>
           <p:nvPr/>
         </p:nvSpPr>
@@ -28500,7 +26146,7 @@
         <p:spPr>
           <a:xfrm>
             <a:off x="640080" y="1325880"/>
-            <a:ext cx="10908792" cy="201168"/>
+            <a:ext cx="5239512" cy="201168"/>
           </a:xfrm>
           <a:prstGeom prst="rect">
             <a:avLst/>
@@ -28528,7 +26174,7 @@
               <a:rPr>
                 <a:latin typeface="Inter"/>
               </a:rPr>
-              <a:t>HISTORICAL PORTFOLIO AND BENCHMARK AVERAGE WEIGHTS</a:t>
+              <a:t>CUMULATIVE LINKED EFFECTS</a:t>
             </a:r>
           </a:p>
         </p:txBody>
@@ -28543,7 +26189,7 @@
         </p:nvGraphicFramePr>
         <p:xfrm>
           <a:off x="640080" y="1600200"/>
-          <a:ext cx="10908792" cy="4617720"/>
+          <a:ext cx="5239512" cy="4617720"/>
         </p:xfrm>
         <a:graphic>
           <a:graphicData uri="http://schemas.openxmlformats.org/drawingml/2006/chart">
@@ -28559,8 +26205,8 @@
         </p:nvSpPr>
         <p:spPr>
           <a:xfrm>
-            <a:off x="640080" y="6446520"/>
-            <a:ext cx="10908792" cy="9144"/>
+            <a:off x="6080760" y="1325880"/>
+            <a:ext cx="9144" cy="4892040"/>
           </a:xfrm>
           <a:prstGeom prst="rect">
             <a:avLst/>
@@ -28608,6 +26254,115 @@
         </p:nvSpPr>
         <p:spPr>
           <a:xfrm>
+            <a:off x="6309360" y="1325880"/>
+            <a:ext cx="5239512" cy="201168"/>
+          </a:xfrm>
+          <a:prstGeom prst="rect">
+            <a:avLst/>
+          </a:prstGeom>
+          <a:noFill/>
+        </p:spPr>
+        <p:txBody>
+          <a:bodyPr wrap="none" lIns="9144" rIns="9144" tIns="9144" bIns="9144" anchor="t">
+            <a:spAutoFit/>
+          </a:bodyPr>
+          <a:lstStyle/>
+          <a:p>
+            <a:pPr algn="l">
+              <a:spcAft>
+                <a:spcPts val="0"/>
+              </a:spcAft>
+              <a:defRPr sz="720" b="1">
+                <a:solidFill>
+                  <a:srgbClr val="4A5563"/>
+                </a:solidFill>
+                <a:latin typeface="Inter"/>
+              </a:defRPr>
+            </a:pPr>
+            <a:r>
+              <a:rPr>
+                <a:latin typeface="Inter"/>
+              </a:rPr>
+              <a:t>CUMULATIVE ALTERNATIVES SELECTION</a:t>
+            </a:r>
+          </a:p>
+        </p:txBody>
+      </p:sp>
+      <p:graphicFrame>
+        <p:nvGraphicFramePr>
+          <p:cNvPr id="13" name="Chart 12"/>
+          <p:cNvGraphicFramePr>
+            <a:graphicFrameLocks noGrp="1"/>
+          </p:cNvGraphicFramePr>
+          <p:nvPr/>
+        </p:nvGraphicFramePr>
+        <p:xfrm>
+          <a:off x="6309360" y="1600200"/>
+          <a:ext cx="5239512" cy="4617720"/>
+        </p:xfrm>
+        <a:graphic>
+          <a:graphicData uri="http://schemas.openxmlformats.org/drawingml/2006/chart">
+            <c:chart xmlns:c="http://schemas.openxmlformats.org/drawingml/2006/chart" r:id="rId3"/>
+          </a:graphicData>
+        </a:graphic>
+      </p:graphicFrame>
+      <p:sp>
+        <p:nvSpPr>
+          <p:cNvPr id="14" name="Rectangle 13"/>
+          <p:cNvSpPr/>
+          <p:nvPr/>
+        </p:nvSpPr>
+        <p:spPr>
+          <a:xfrm>
+            <a:off x="640080" y="6446520"/>
+            <a:ext cx="10908792" cy="9144"/>
+          </a:xfrm>
+          <a:prstGeom prst="rect">
+            <a:avLst/>
+          </a:prstGeom>
+          <a:solidFill>
+            <a:srgbClr val="E3E7EC"/>
+          </a:solidFill>
+          <a:ln>
+            <a:solidFill>
+              <a:srgbClr val="E3E7EC"/>
+            </a:solidFill>
+          </a:ln>
+        </p:spPr>
+        <p:style>
+          <a:lnRef idx="1">
+            <a:schemeClr val="accent1"/>
+          </a:lnRef>
+          <a:fillRef idx="3">
+            <a:schemeClr val="accent1"/>
+          </a:fillRef>
+          <a:effectRef idx="2">
+            <a:schemeClr val="accent1"/>
+          </a:effectRef>
+          <a:fontRef idx="minor">
+            <a:schemeClr val="lt1"/>
+          </a:fontRef>
+        </p:style>
+        <p:txBody>
+          <a:bodyPr rtlCol="0" anchor="ctr"/>
+          <a:lstStyle/>
+          <a:p>
+            <a:pPr algn="ctr">
+              <a:defRPr>
+                <a:latin typeface="Inter"/>
+              </a:defRPr>
+            </a:pPr>
+          </a:p>
+        </p:txBody>
+      </p:sp>
+      <p:sp>
+        <p:nvSpPr>
+          <p:cNvPr id="15" name="TextBox 14"/>
+          <p:cNvSpPr txBox="1"/>
+          <p:nvPr/>
+        </p:nvSpPr>
+        <p:spPr>
+          <a:xfrm>
             <a:off x="640080" y="6501384"/>
             <a:ext cx="4297680" cy="146304"/>
           </a:xfrm>
@@ -28644,7 +26399,7 @@
       </p:sp>
       <p:sp>
         <p:nvSpPr>
-          <p:cNvPr id="13" name="TextBox 12"/>
+          <p:cNvPr id="16" name="TextBox 15"/>
           <p:cNvSpPr txBox="1"/>
           <p:nvPr/>
         </p:nvSpPr>
@@ -28686,7 +26441,7 @@
       </p:sp>
       <p:sp>
         <p:nvSpPr>
-          <p:cNvPr id="14" name="TextBox 13"/>
+          <p:cNvPr id="17" name="TextBox 16"/>
           <p:cNvSpPr txBox="1"/>
           <p:nvPr/>
         </p:nvSpPr>
@@ -29096,7 +26851,7 @@
               <a:rPr>
                 <a:latin typeface="Inter"/>
               </a:rPr>
-              <a:t>CUMULATIVE LINKED EFFECTS</a:t>
+              <a:t>RETURNED CUMULATIVE GROWTH CONTEXT</a:t>
             </a:r>
           </a:p>
         </p:txBody>
@@ -29111,7 +26866,7 @@
         </p:nvGraphicFramePr>
         <p:xfrm>
           <a:off x="640080" y="1600200"/>
-          <a:ext cx="10908792" cy="4617720"/>
+          <a:ext cx="10908792" cy="2705099"/>
         </p:xfrm>
         <a:graphic>
           <a:graphicData uri="http://schemas.openxmlformats.org/drawingml/2006/chart">
@@ -29122,6 +26877,370 @@
       <p:sp>
         <p:nvSpPr>
           <p:cNvPr id="11" name="Rectangle 10"/>
+          <p:cNvSpPr/>
+          <p:nvPr/>
+        </p:nvSpPr>
+        <p:spPr>
+          <a:xfrm>
+            <a:off x="640080" y="4415028"/>
+            <a:ext cx="10908792" cy="846582"/>
+          </a:xfrm>
+          <a:prstGeom prst="rect">
+            <a:avLst/>
+          </a:prstGeom>
+          <a:solidFill>
+            <a:srgbClr val="F5F7F9"/>
+          </a:solidFill>
+          <a:ln>
+            <a:solidFill>
+              <a:srgbClr val="E3E7EC"/>
+            </a:solidFill>
+          </a:ln>
+        </p:spPr>
+        <p:style>
+          <a:lnRef idx="1">
+            <a:schemeClr val="accent1"/>
+          </a:lnRef>
+          <a:fillRef idx="3">
+            <a:schemeClr val="accent1"/>
+          </a:fillRef>
+          <a:effectRef idx="2">
+            <a:schemeClr val="accent1"/>
+          </a:effectRef>
+          <a:fontRef idx="minor">
+            <a:schemeClr val="lt1"/>
+          </a:fontRef>
+        </p:style>
+        <p:txBody>
+          <a:bodyPr rtlCol="0" anchor="ctr"/>
+          <a:lstStyle/>
+          <a:p>
+            <a:pPr algn="ctr">
+              <a:defRPr>
+                <a:latin typeface="Inter"/>
+              </a:defRPr>
+            </a:pPr>
+          </a:p>
+        </p:txBody>
+      </p:sp>
+      <p:sp>
+        <p:nvSpPr>
+          <p:cNvPr id="12" name="Rectangle 11"/>
+          <p:cNvSpPr/>
+          <p:nvPr/>
+        </p:nvSpPr>
+        <p:spPr>
+          <a:xfrm>
+            <a:off x="640080" y="4415028"/>
+            <a:ext cx="54864" cy="846582"/>
+          </a:xfrm>
+          <a:prstGeom prst="rect">
+            <a:avLst/>
+          </a:prstGeom>
+          <a:solidFill>
+            <a:srgbClr val="0D1117"/>
+          </a:solidFill>
+          <a:ln>
+            <a:solidFill>
+              <a:srgbClr val="0D1117"/>
+            </a:solidFill>
+          </a:ln>
+        </p:spPr>
+        <p:style>
+          <a:lnRef idx="1">
+            <a:schemeClr val="accent1"/>
+          </a:lnRef>
+          <a:fillRef idx="3">
+            <a:schemeClr val="accent1"/>
+          </a:fillRef>
+          <a:effectRef idx="2">
+            <a:schemeClr val="accent1"/>
+          </a:effectRef>
+          <a:fontRef idx="minor">
+            <a:schemeClr val="lt1"/>
+          </a:fontRef>
+        </p:style>
+        <p:txBody>
+          <a:bodyPr rtlCol="0" anchor="ctr"/>
+          <a:lstStyle/>
+          <a:p>
+            <a:pPr algn="ctr">
+              <a:defRPr>
+                <a:latin typeface="Inter"/>
+              </a:defRPr>
+            </a:pPr>
+          </a:p>
+        </p:txBody>
+      </p:sp>
+      <p:sp>
+        <p:nvSpPr>
+          <p:cNvPr id="13" name="TextBox 12"/>
+          <p:cNvSpPr txBox="1"/>
+          <p:nvPr/>
+        </p:nvSpPr>
+        <p:spPr>
+          <a:xfrm>
+            <a:off x="804671" y="4524756"/>
+            <a:ext cx="10616184" cy="228600"/>
+          </a:xfrm>
+          <a:prstGeom prst="rect">
+            <a:avLst/>
+          </a:prstGeom>
+          <a:noFill/>
+        </p:spPr>
+        <p:txBody>
+          <a:bodyPr wrap="none" lIns="9144" rIns="9144" tIns="9144" bIns="9144" anchor="t">
+            <a:spAutoFit/>
+          </a:bodyPr>
+          <a:lstStyle/>
+          <a:p>
+            <a:pPr algn="l">
+              <a:spcAft>
+                <a:spcPts val="0"/>
+              </a:spcAft>
+              <a:defRPr sz="1000" b="1">
+                <a:solidFill>
+                  <a:srgbClr val="0D1117"/>
+                </a:solidFill>
+                <a:latin typeface="Inter"/>
+              </a:defRPr>
+            </a:pPr>
+            <a:r>
+              <a:rPr>
+                <a:latin typeface="Inter"/>
+              </a:rPr>
+              <a:t>Analysis — Selection leads detractors</a:t>
+            </a:r>
+          </a:p>
+        </p:txBody>
+      </p:sp>
+      <p:sp>
+        <p:nvSpPr>
+          <p:cNvPr id="14" name="TextBox 13"/>
+          <p:cNvSpPr txBox="1"/>
+          <p:nvPr/>
+        </p:nvSpPr>
+        <p:spPr>
+          <a:xfrm>
+            <a:off x="804671" y="4808220"/>
+            <a:ext cx="10616184" cy="361950"/>
+          </a:xfrm>
+          <a:prstGeom prst="rect">
+            <a:avLst/>
+          </a:prstGeom>
+          <a:noFill/>
+        </p:spPr>
+        <p:txBody>
+          <a:bodyPr wrap="none" lIns="9144" rIns="9144" tIns="9144" bIns="9144" anchor="t">
+            <a:spAutoFit/>
+          </a:bodyPr>
+          <a:lstStyle/>
+          <a:p>
+            <a:pPr algn="l">
+              <a:spcAft>
+                <a:spcPts val="0"/>
+              </a:spcAft>
+              <a:defRPr sz="950" b="0">
+                <a:solidFill>
+                  <a:srgbClr val="4A5563"/>
+                </a:solidFill>
+                <a:latin typeface="Inter"/>
+              </a:defRPr>
+            </a:pPr>
+            <a:r>
+              <a:rPr>
+                <a:latin typeface="Inter"/>
+              </a:rPr>
+              <a:t>Observation: Returned selection is negative [S2]. Why it matters: Selection leads realized detractors. Uncertainty: The evidence covers one linked period. What would change the view: A later historical…</a:t>
+            </a:r>
+          </a:p>
+        </p:txBody>
+      </p:sp>
+      <p:sp>
+        <p:nvSpPr>
+          <p:cNvPr id="15" name="Rectangle 14"/>
+          <p:cNvSpPr/>
+          <p:nvPr/>
+        </p:nvSpPr>
+        <p:spPr>
+          <a:xfrm>
+            <a:off x="640080" y="5371338"/>
+            <a:ext cx="10908792" cy="846582"/>
+          </a:xfrm>
+          <a:prstGeom prst="rect">
+            <a:avLst/>
+          </a:prstGeom>
+          <a:solidFill>
+            <a:srgbClr val="F5F7F9"/>
+          </a:solidFill>
+          <a:ln>
+            <a:solidFill>
+              <a:srgbClr val="E3E7EC"/>
+            </a:solidFill>
+          </a:ln>
+        </p:spPr>
+        <p:style>
+          <a:lnRef idx="1">
+            <a:schemeClr val="accent1"/>
+          </a:lnRef>
+          <a:fillRef idx="3">
+            <a:schemeClr val="accent1"/>
+          </a:fillRef>
+          <a:effectRef idx="2">
+            <a:schemeClr val="accent1"/>
+          </a:effectRef>
+          <a:fontRef idx="minor">
+            <a:schemeClr val="lt1"/>
+          </a:fontRef>
+        </p:style>
+        <p:txBody>
+          <a:bodyPr rtlCol="0" anchor="ctr"/>
+          <a:lstStyle/>
+          <a:p>
+            <a:pPr algn="ctr">
+              <a:defRPr>
+                <a:latin typeface="Inter"/>
+              </a:defRPr>
+            </a:pPr>
+          </a:p>
+        </p:txBody>
+      </p:sp>
+      <p:sp>
+        <p:nvSpPr>
+          <p:cNvPr id="16" name="Rectangle 15"/>
+          <p:cNvSpPr/>
+          <p:nvPr/>
+        </p:nvSpPr>
+        <p:spPr>
+          <a:xfrm>
+            <a:off x="640080" y="5371338"/>
+            <a:ext cx="54864" cy="846582"/>
+          </a:xfrm>
+          <a:prstGeom prst="rect">
+            <a:avLst/>
+          </a:prstGeom>
+          <a:solidFill>
+            <a:srgbClr val="0D1117"/>
+          </a:solidFill>
+          <a:ln>
+            <a:solidFill>
+              <a:srgbClr val="0D1117"/>
+            </a:solidFill>
+          </a:ln>
+        </p:spPr>
+        <p:style>
+          <a:lnRef idx="1">
+            <a:schemeClr val="accent1"/>
+          </a:lnRef>
+          <a:fillRef idx="3">
+            <a:schemeClr val="accent1"/>
+          </a:fillRef>
+          <a:effectRef idx="2">
+            <a:schemeClr val="accent1"/>
+          </a:effectRef>
+          <a:fontRef idx="minor">
+            <a:schemeClr val="lt1"/>
+          </a:fontRef>
+        </p:style>
+        <p:txBody>
+          <a:bodyPr rtlCol="0" anchor="ctr"/>
+          <a:lstStyle/>
+          <a:p>
+            <a:pPr algn="ctr">
+              <a:defRPr>
+                <a:latin typeface="Inter"/>
+              </a:defRPr>
+            </a:pPr>
+          </a:p>
+        </p:txBody>
+      </p:sp>
+      <p:sp>
+        <p:nvSpPr>
+          <p:cNvPr id="17" name="TextBox 16"/>
+          <p:cNvSpPr txBox="1"/>
+          <p:nvPr/>
+        </p:nvSpPr>
+        <p:spPr>
+          <a:xfrm>
+            <a:off x="804671" y="5481066"/>
+            <a:ext cx="10616184" cy="228600"/>
+          </a:xfrm>
+          <a:prstGeom prst="rect">
+            <a:avLst/>
+          </a:prstGeom>
+          <a:noFill/>
+        </p:spPr>
+        <p:txBody>
+          <a:bodyPr wrap="none" lIns="9144" rIns="9144" tIns="9144" bIns="9144" anchor="t">
+            <a:spAutoFit/>
+          </a:bodyPr>
+          <a:lstStyle/>
+          <a:p>
+            <a:pPr algn="l">
+              <a:spcAft>
+                <a:spcPts val="0"/>
+              </a:spcAft>
+              <a:defRPr sz="1000" b="1">
+                <a:solidFill>
+                  <a:srgbClr val="0D1117"/>
+                </a:solidFill>
+                <a:latin typeface="Inter"/>
+              </a:defRPr>
+            </a:pPr>
+            <a:r>
+              <a:rPr>
+                <a:latin typeface="Inter"/>
+              </a:rPr>
+              <a:t>Benchmark and excess boundary</a:t>
+            </a:r>
+          </a:p>
+        </p:txBody>
+      </p:sp>
+      <p:sp>
+        <p:nvSpPr>
+          <p:cNvPr id="18" name="TextBox 17"/>
+          <p:cNvSpPr txBox="1"/>
+          <p:nvPr/>
+        </p:nvSpPr>
+        <p:spPr>
+          <a:xfrm>
+            <a:off x="804671" y="5764530"/>
+            <a:ext cx="10616184" cy="361950"/>
+          </a:xfrm>
+          <a:prstGeom prst="rect">
+            <a:avLst/>
+          </a:prstGeom>
+          <a:noFill/>
+        </p:spPr>
+        <p:txBody>
+          <a:bodyPr wrap="none" lIns="9144" rIns="9144" tIns="9144" bIns="9144" anchor="t">
+            <a:spAutoFit/>
+          </a:bodyPr>
+          <a:lstStyle/>
+          <a:p>
+            <a:pPr algn="l">
+              <a:spcAft>
+                <a:spcPts val="0"/>
+              </a:spcAft>
+              <a:defRPr sz="950" b="0">
+                <a:solidFill>
+                  <a:srgbClr val="4A5563"/>
+                </a:solidFill>
+                <a:latin typeface="Inter"/>
+              </a:defRPr>
+            </a:pPr>
+            <a:r>
+              <a:rPr>
+                <a:latin typeface="Inter"/>
+              </a:rPr>
+              <a:t>Returned diagnostics.entity_return_reconciliation keeps attribution-summary excess against the linked segment benchmark composite separate from historical-return excess against the policy benchmark entity [S2].</a:t>
+            </a:r>
+          </a:p>
+        </p:txBody>
+      </p:sp>
+      <p:sp>
+        <p:nvSpPr>
+          <p:cNvPr id="19" name="Rectangle 18"/>
           <p:cNvSpPr/>
           <p:nvPr/>
         </p:nvSpPr>
@@ -29170,7 +27289,7 @@
       </p:sp>
       <p:sp>
         <p:nvSpPr>
-          <p:cNvPr id="12" name="TextBox 11"/>
+          <p:cNvPr id="20" name="TextBox 19"/>
           <p:cNvSpPr txBox="1"/>
           <p:nvPr/>
         </p:nvSpPr>
@@ -29205,14 +27324,14 @@
               <a:rPr>
                 <a:latin typeface="Inter"/>
               </a:rPr>
-              <a:t>Sources: S2</a:t>
+              <a:t>Sources: S2 · S6</a:t>
             </a:r>
           </a:p>
         </p:txBody>
       </p:sp>
       <p:sp>
         <p:nvSpPr>
-          <p:cNvPr id="13" name="TextBox 12"/>
+          <p:cNvPr id="21" name="TextBox 20"/>
           <p:cNvSpPr txBox="1"/>
           <p:nvPr/>
         </p:nvSpPr>
@@ -29254,7 +27373,7 @@
       </p:sp>
       <p:sp>
         <p:nvSpPr>
-          <p:cNvPr id="14" name="TextBox 13"/>
+          <p:cNvPr id="22" name="TextBox 21"/>
           <p:cNvSpPr txBox="1"/>
           <p:nvPr/>
         </p:nvSpPr>

--- a/plugins/gradient-cio/assets/examples/gradient-portfolio-attribution-lanes-three-lane.pptx
+++ b/plugins/gradient-cio/assets/examples/gradient-portfolio-attribution-lanes-three-lane.pptx
@@ -26,6 +26,7 @@
     <ns0:sldId id="274" ns1:id="rId25"/>
     <ns0:sldId id="275" ns1:id="rId26"/>
     <ns0:sldId id="276" ns1:id="rId27"/>
+    <ns0:sldId id="277" ns1:id="rId28"/>
   </ns0:sldIdLst>
   <ns0:sldSz cx="12191695" cy="6858000" type="screen16x9"/>
   <ns0:notesSz cx="6858000" cy="9144000"/>
@@ -6527,7 +6528,7 @@
               <a:rPr>
                 <a:latin typeface="Inter"/>
               </a:rPr>
-              <a:t>AUDIENCE</a:t>
+              <a:t>PREPARED FOR</a:t>
             </a:r>
           </a:p>
         </p:txBody>
@@ -6660,224 +6661,7 @@
       </p:sp>
       <p:sp>
         <p:nvSpPr>
-          <p:cNvPr id="17" name="Rectangle 16"/>
-          <p:cNvSpPr/>
-          <p:nvPr/>
-        </p:nvSpPr>
-        <p:spPr>
-          <a:xfrm>
-            <a:off x="685800" y="5687568"/>
-            <a:ext cx="3337560" cy="530352"/>
-          </a:xfrm>
-          <a:prstGeom prst="rect">
-            <a:avLst/>
-          </a:prstGeom>
-          <a:solidFill>
-            <a:srgbClr val="C6F432"/>
-          </a:solidFill>
-          <a:ln>
-            <a:solidFill>
-              <a:srgbClr val="C6F432"/>
-            </a:solidFill>
-          </a:ln>
-        </p:spPr>
-        <p:style>
-          <a:lnRef idx="1">
-            <a:schemeClr val="accent1"/>
-          </a:lnRef>
-          <a:fillRef idx="3">
-            <a:schemeClr val="accent1"/>
-          </a:fillRef>
-          <a:effectRef idx="2">
-            <a:schemeClr val="accent1"/>
-          </a:effectRef>
-          <a:fontRef idx="minor">
-            <a:schemeClr val="lt1"/>
-          </a:fontRef>
-        </p:style>
-        <p:txBody>
-          <a:bodyPr rtlCol="0" anchor="ctr"/>
-          <a:lstStyle/>
-          <a:p>
-            <a:pPr algn="ctr">
-              <a:defRPr>
-                <a:latin typeface="Inter"/>
-              </a:defRPr>
-            </a:pPr>
-          </a:p>
-        </p:txBody>
-      </p:sp>
-      <p:sp>
-        <p:nvSpPr>
-          <p:cNvPr id="18" name="TextBox 17"/>
-          <p:cNvSpPr txBox="1"/>
-          <p:nvPr/>
-        </p:nvSpPr>
-        <p:spPr>
-          <a:xfrm>
-            <a:off x="822960" y="5760720"/>
-            <a:ext cx="3063240" cy="128016"/>
-          </a:xfrm>
-          <a:prstGeom prst="rect">
-            <a:avLst/>
-          </a:prstGeom>
-          <a:noFill/>
-        </p:spPr>
-        <p:txBody>
-          <a:bodyPr wrap="none" lIns="9144" rIns="9144" tIns="9144" bIns="9144" anchor="t">
-            <a:spAutoFit/>
-          </a:bodyPr>
-          <a:lstStyle/>
-          <a:p>
-            <a:pPr algn="l">
-              <a:spcAft>
-                <a:spcPts val="0"/>
-              </a:spcAft>
-              <a:defRPr sz="620" b="1">
-                <a:solidFill>
-                  <a:srgbClr val="0D1117"/>
-                </a:solidFill>
-                <a:latin typeface="Inter"/>
-              </a:defRPr>
-            </a:pPr>
-            <a:r>
-              <a:rPr>
-                <a:latin typeface="Inter"/>
-              </a:rPr>
-              <a:t>OVERALL VIEW</a:t>
-            </a:r>
-          </a:p>
-        </p:txBody>
-      </p:sp>
-      <p:sp>
-        <p:nvSpPr>
-          <p:cNvPr id="19" name="TextBox 18"/>
-          <p:cNvSpPr txBox="1"/>
-          <p:nvPr/>
-        </p:nvSpPr>
-        <p:spPr>
-          <a:xfrm>
-            <a:off x="822960" y="5916168"/>
-            <a:ext cx="3063240" cy="182880"/>
-          </a:xfrm>
-          <a:prstGeom prst="rect">
-            <a:avLst/>
-          </a:prstGeom>
-          <a:noFill/>
-        </p:spPr>
-        <p:txBody>
-          <a:bodyPr wrap="none" lIns="9144" rIns="9144" tIns="9144" bIns="9144" anchor="t">
-            <a:spAutoFit/>
-          </a:bodyPr>
-          <a:lstStyle/>
-          <a:p>
-            <a:pPr algn="l">
-              <a:spcAft>
-                <a:spcPts val="0"/>
-              </a:spcAft>
-              <a:defRPr sz="900" b="1">
-                <a:solidFill>
-                  <a:srgbClr val="0D1117"/>
-                </a:solidFill>
-                <a:latin typeface="Inter"/>
-              </a:defRPr>
-            </a:pPr>
-            <a:r>
-              <a:rPr>
-                <a:latin typeface="Inter"/>
-              </a:rPr>
-              <a:t>Three compatible lanes compared</a:t>
-            </a:r>
-          </a:p>
-        </p:txBody>
-      </p:sp>
-      <p:sp>
-        <p:nvSpPr>
-          <p:cNvPr id="20" name="TextBox 19"/>
-          <p:cNvSpPr txBox="1"/>
-          <p:nvPr/>
-        </p:nvSpPr>
-        <p:spPr>
-          <a:xfrm>
-            <a:off x="4297680" y="5733288"/>
-            <a:ext cx="3108960" cy="164592"/>
-          </a:xfrm>
-          <a:prstGeom prst="rect">
-            <a:avLst/>
-          </a:prstGeom>
-          <a:noFill/>
-        </p:spPr>
-        <p:txBody>
-          <a:bodyPr wrap="none" lIns="9144" rIns="9144" tIns="9144" bIns="9144" anchor="t">
-            <a:spAutoFit/>
-          </a:bodyPr>
-          <a:lstStyle/>
-          <a:p>
-            <a:pPr algn="l">
-              <a:spcAft>
-                <a:spcPts val="0"/>
-              </a:spcAft>
-              <a:defRPr sz="650" b="1">
-                <a:solidFill>
-                  <a:srgbClr val="8A94A1"/>
-                </a:solidFill>
-                <a:latin typeface="Inter"/>
-              </a:defRPr>
-            </a:pPr>
-            <a:r>
-              <a:rPr>
-                <a:latin typeface="Inter"/>
-              </a:rPr>
-              <a:t>SCOPE REVIEWED</a:t>
-            </a:r>
-          </a:p>
-        </p:txBody>
-      </p:sp>
-      <p:sp>
-        <p:nvSpPr>
-          <p:cNvPr id="21" name="TextBox 20"/>
-          <p:cNvSpPr txBox="1"/>
-          <p:nvPr/>
-        </p:nvSpPr>
-        <p:spPr>
-          <a:xfrm>
-            <a:off x="4297680" y="5934456"/>
-            <a:ext cx="3108960" cy="201168"/>
-          </a:xfrm>
-          <a:prstGeom prst="rect">
-            <a:avLst/>
-          </a:prstGeom>
-          <a:noFill/>
-        </p:spPr>
-        <p:txBody>
-          <a:bodyPr wrap="none" lIns="9144" rIns="9144" tIns="9144" bIns="9144" anchor="t">
-            <a:spAutoFit/>
-          </a:bodyPr>
-          <a:lstStyle/>
-          <a:p>
-            <a:pPr algn="l">
-              <a:spcAft>
-                <a:spcPts val="0"/>
-              </a:spcAft>
-              <a:defRPr sz="800" b="1">
-                <a:solidFill>
-                  <a:srgbClr val="FFFFFF"/>
-                </a:solidFill>
-                <a:latin typeface="Inter"/>
-              </a:defRPr>
-            </a:pPr>
-            <a:r>
-              <a:rPr>
-                <a:latin typeface="Inter"/>
-              </a:rPr>
-              <a:t>4 of 4 · Complete</a:t>
-            </a:r>
-          </a:p>
-        </p:txBody>
-      </p:sp>
-      <p:sp>
-        <p:nvSpPr>
-          <p:cNvPr id="22" name="TextBox 21"/>
+          <p:cNvPr id="17" name="TextBox 16"/>
           <p:cNvSpPr txBox="1"/>
           <p:nvPr/>
         </p:nvSpPr>
@@ -6919,7 +6703,7 @@
       </p:sp>
       <p:sp>
         <p:nvSpPr>
-          <p:cNvPr id="23" name="TextBox 22"/>
+          <p:cNvPr id="18" name="TextBox 17"/>
           <p:cNvSpPr txBox="1"/>
           <p:nvPr/>
         </p:nvSpPr>
@@ -6961,7 +6745,7 @@
       </p:sp>
       <p:sp>
         <p:nvSpPr>
-          <p:cNvPr id="24" name="TextBox 23"/>
+          <p:cNvPr id="19" name="TextBox 18"/>
           <p:cNvSpPr txBox="1"/>
           <p:nvPr/>
         </p:nvSpPr>
@@ -7077,7 +6861,7 @@
         <p:spPr>
           <a:xfrm>
             <a:off x="640080" y="329184"/>
-            <a:ext cx="5303520" cy="182880"/>
+            <a:ext cx="9875520" cy="182880"/>
           </a:xfrm>
           <a:prstGeom prst="rect">
             <a:avLst/>
@@ -7118,48 +6902,6 @@
         </p:nvSpPr>
         <p:spPr>
           <a:xfrm>
-            <a:off x="5897880" y="310896"/>
-            <a:ext cx="4800600" cy="256032"/>
-          </a:xfrm>
-          <a:prstGeom prst="rect">
-            <a:avLst/>
-          </a:prstGeom>
-          <a:noFill/>
-        </p:spPr>
-        <p:txBody>
-          <a:bodyPr wrap="none" lIns="9144" rIns="9144" tIns="9144" bIns="9144" anchor="t">
-            <a:spAutoFit/>
-          </a:bodyPr>
-          <a:lstStyle/>
-          <a:p>
-            <a:pPr algn="r">
-              <a:spcAft>
-                <a:spcPts val="0"/>
-              </a:spcAft>
-              <a:defRPr sz="680" b="1">
-                <a:solidFill>
-                  <a:srgbClr val="4F6B00"/>
-                </a:solidFill>
-                <a:latin typeface="Inter"/>
-              </a:defRPr>
-            </a:pPr>
-            <a:r>
-              <a:rPr>
-                <a:latin typeface="Inter"/>
-              </a:rPr>
-              <a:t>Illustrative, Gradient Maintained — demo data, not the client's holdings or managers</a:t>
-            </a:r>
-          </a:p>
-        </p:txBody>
-      </p:sp>
-      <p:sp>
-        <p:nvSpPr>
-          <p:cNvPr id="5" name="TextBox 4"/>
-          <p:cNvSpPr txBox="1"/>
-          <p:nvPr/>
-        </p:nvSpPr>
-        <p:spPr>
-          <a:xfrm>
             <a:off x="640080" y="566928"/>
             <a:ext cx="10058400" cy="530352"/>
           </a:xfrm>
@@ -7196,7 +6938,7 @@
       </p:sp>
       <p:sp>
         <p:nvSpPr>
-          <p:cNvPr id="6" name="Rectangle 5"/>
+          <p:cNvPr id="5" name="Rectangle 4"/>
           <p:cNvSpPr/>
           <p:nvPr/>
         </p:nvSpPr>
@@ -7245,7 +6987,7 @@
       </p:sp>
       <p:sp>
         <p:nvSpPr>
-          <p:cNvPr id="7" name="Rectangle 6"/>
+          <p:cNvPr id="6" name="Rectangle 5"/>
           <p:cNvSpPr/>
           <p:nvPr/>
         </p:nvSpPr>
@@ -7294,7 +7036,7 @@
       </p:sp>
       <p:sp>
         <p:nvSpPr>
-          <p:cNvPr id="8" name="TextBox 7"/>
+          <p:cNvPr id="7" name="TextBox 6"/>
           <p:cNvSpPr txBox="1"/>
           <p:nvPr/>
         </p:nvSpPr>
@@ -7336,7 +7078,7 @@
       </p:sp>
       <p:sp>
         <p:nvSpPr>
-          <p:cNvPr id="9" name="TextBox 8"/>
+          <p:cNvPr id="8" name="TextBox 7"/>
           <p:cNvSpPr txBox="1"/>
           <p:nvPr/>
         </p:nvSpPr>
@@ -7378,7 +7120,7 @@
       </p:sp>
       <p:graphicFrame>
         <p:nvGraphicFramePr>
-          <p:cNvPr id="10" name="Chart 9"/>
+          <p:cNvPr id="9" name="Chart 8"/>
           <p:cNvGraphicFramePr>
             <a:graphicFrameLocks noGrp="1"/>
           </p:cNvGraphicFramePr>
@@ -7396,7 +7138,7 @@
       </p:graphicFrame>
       <p:sp>
         <p:nvSpPr>
-          <p:cNvPr id="11" name="Rectangle 10"/>
+          <p:cNvPr id="10" name="Rectangle 9"/>
           <p:cNvSpPr/>
           <p:nvPr/>
         </p:nvSpPr>
@@ -7445,7 +7187,7 @@
       </p:sp>
       <p:sp>
         <p:nvSpPr>
-          <p:cNvPr id="12" name="TextBox 11"/>
+          <p:cNvPr id="11" name="TextBox 10"/>
           <p:cNvSpPr txBox="1"/>
           <p:nvPr/>
         </p:nvSpPr>
@@ -7487,7 +7229,7 @@
       </p:sp>
       <p:sp>
         <p:nvSpPr>
-          <p:cNvPr id="13" name="TextBox 12"/>
+          <p:cNvPr id="12" name="TextBox 11"/>
           <p:cNvSpPr txBox="1"/>
           <p:nvPr/>
         </p:nvSpPr>
@@ -7529,7 +7271,7 @@
       </p:sp>
       <p:sp>
         <p:nvSpPr>
-          <p:cNvPr id="14" name="TextBox 13"/>
+          <p:cNvPr id="13" name="TextBox 12"/>
           <p:cNvSpPr txBox="1"/>
           <p:nvPr/>
         </p:nvSpPr>
@@ -7645,7 +7387,7 @@
         <p:spPr>
           <a:xfrm>
             <a:off x="640080" y="329184"/>
-            <a:ext cx="5303520" cy="182880"/>
+            <a:ext cx="9875520" cy="182880"/>
           </a:xfrm>
           <a:prstGeom prst="rect">
             <a:avLst/>
@@ -7686,48 +7428,6 @@
         </p:nvSpPr>
         <p:spPr>
           <a:xfrm>
-            <a:off x="5897880" y="310896"/>
-            <a:ext cx="4800600" cy="256032"/>
-          </a:xfrm>
-          <a:prstGeom prst="rect">
-            <a:avLst/>
-          </a:prstGeom>
-          <a:noFill/>
-        </p:spPr>
-        <p:txBody>
-          <a:bodyPr wrap="none" lIns="9144" rIns="9144" tIns="9144" bIns="9144" anchor="t">
-            <a:spAutoFit/>
-          </a:bodyPr>
-          <a:lstStyle/>
-          <a:p>
-            <a:pPr algn="r">
-              <a:spcAft>
-                <a:spcPts val="0"/>
-              </a:spcAft>
-              <a:defRPr sz="680" b="1">
-                <a:solidFill>
-                  <a:srgbClr val="4F6B00"/>
-                </a:solidFill>
-                <a:latin typeface="Inter"/>
-              </a:defRPr>
-            </a:pPr>
-            <a:r>
-              <a:rPr>
-                <a:latin typeface="Inter"/>
-              </a:rPr>
-              <a:t>Illustrative, Gradient Maintained — demo data, not the client's holdings or managers</a:t>
-            </a:r>
-          </a:p>
-        </p:txBody>
-      </p:sp>
-      <p:sp>
-        <p:nvSpPr>
-          <p:cNvPr id="5" name="TextBox 4"/>
-          <p:cNvSpPr txBox="1"/>
-          <p:nvPr/>
-        </p:nvSpPr>
-        <p:spPr>
-          <a:xfrm>
             <a:off x="640080" y="566928"/>
             <a:ext cx="10058400" cy="530352"/>
           </a:xfrm>
@@ -7764,7 +7464,7 @@
       </p:sp>
       <p:sp>
         <p:nvSpPr>
-          <p:cNvPr id="6" name="Rectangle 5"/>
+          <p:cNvPr id="5" name="Rectangle 4"/>
           <p:cNvSpPr/>
           <p:nvPr/>
         </p:nvSpPr>
@@ -7813,7 +7513,7 @@
       </p:sp>
       <p:sp>
         <p:nvSpPr>
-          <p:cNvPr id="7" name="Rectangle 6"/>
+          <p:cNvPr id="6" name="Rectangle 5"/>
           <p:cNvSpPr/>
           <p:nvPr/>
         </p:nvSpPr>
@@ -7862,7 +7562,7 @@
       </p:sp>
       <p:sp>
         <p:nvSpPr>
-          <p:cNvPr id="8" name="TextBox 7"/>
+          <p:cNvPr id="7" name="TextBox 6"/>
           <p:cNvSpPr txBox="1"/>
           <p:nvPr/>
         </p:nvSpPr>
@@ -7904,7 +7604,7 @@
       </p:sp>
       <p:sp>
         <p:nvSpPr>
-          <p:cNvPr id="9" name="TextBox 8"/>
+          <p:cNvPr id="8" name="TextBox 7"/>
           <p:cNvSpPr txBox="1"/>
           <p:nvPr/>
         </p:nvSpPr>
@@ -7946,7 +7646,7 @@
       </p:sp>
       <p:graphicFrame>
         <p:nvGraphicFramePr>
-          <p:cNvPr id="10" name="Table 9"/>
+          <p:cNvPr id="9" name="Table 8"/>
           <p:cNvGraphicFramePr>
             <a:graphicFrameLocks noGrp="1"/>
           </p:cNvGraphicFramePr>
@@ -7984,7 +7684,7 @@
                         <a:rPr>
                           <a:latin typeface="Inter"/>
                         </a:rPr>
-                        <a:t>assumption_set_name</a:t>
+                        <a:t>Assumption set</a:t>
                       </a:r>
                     </a:p>
                   </a:txBody>
@@ -8040,7 +7740,7 @@
                         <a:rPr>
                           <a:latin typeface="Inter"/>
                         </a:rPr>
-                        <a:t>regime_name</a:t>
+                        <a:t>Regime</a:t>
                       </a:r>
                     </a:p>
                   </a:txBody>
@@ -8067,7 +7767,7 @@
                         <a:rPr>
                           <a:latin typeface="Inter"/>
                         </a:rPr>
-                        <a:t>user-defined regime [S3]</a:t>
+                        <a:t>User-defined regime [S3]</a:t>
                       </a:r>
                     </a:p>
                   </a:txBody>
@@ -8096,7 +7796,7 @@
                         <a:rPr>
                           <a:latin typeface="Inter"/>
                         </a:rPr>
-                        <a:t>horizon</a:t>
+                        <a:t>Horizon</a:t>
                       </a:r>
                     </a:p>
                   </a:txBody>
@@ -8152,7 +7852,7 @@
                         <a:rPr>
                           <a:latin typeface="Inter"/>
                         </a:rPr>
-                        <a:t>portfolio_return_source</a:t>
+                        <a:t>Portfolio return basis</a:t>
                       </a:r>
                     </a:p>
                   </a:txBody>
@@ -8179,7 +7879,7 @@
                         <a:rPr>
                           <a:latin typeface="Inter"/>
                         </a:rPr>
-                        <a:t>allocation_expected_return_base [S3]</a:t>
+                        <a:t>Base-case expected return by allocation [S3]</a:t>
                       </a:r>
                     </a:p>
                   </a:txBody>
@@ -8208,7 +7908,7 @@
                         <a:rPr>
                           <a:latin typeface="Inter"/>
                         </a:rPr>
-                        <a:t>benchmark_return_source</a:t>
+                        <a:t>Benchmark return basis</a:t>
                       </a:r>
                     </a:p>
                   </a:txBody>
@@ -8235,7 +7935,7 @@
                         <a:rPr>
                           <a:latin typeface="Inter"/>
                         </a:rPr>
-                        <a:t>benchmark_expected_return_base [S3]</a:t>
+                        <a:t>Base-case expected return by benchmark segment [S3]</a:t>
                       </a:r>
                     </a:p>
                   </a:txBody>
@@ -8252,7 +7952,7 @@
       </p:graphicFrame>
       <p:sp>
         <p:nvSpPr>
-          <p:cNvPr id="11" name="Rectangle 10"/>
+          <p:cNvPr id="10" name="Rectangle 9"/>
           <p:cNvSpPr/>
           <p:nvPr/>
         </p:nvSpPr>
@@ -8301,7 +8001,7 @@
       </p:sp>
       <p:sp>
         <p:nvSpPr>
-          <p:cNvPr id="12" name="TextBox 11"/>
+          <p:cNvPr id="11" name="TextBox 10"/>
           <p:cNvSpPr txBox="1"/>
           <p:nvPr/>
         </p:nvSpPr>
@@ -8343,7 +8043,7 @@
       </p:sp>
       <p:graphicFrame>
         <p:nvGraphicFramePr>
-          <p:cNvPr id="13" name="Chart 12"/>
+          <p:cNvPr id="12" name="Chart 11"/>
           <p:cNvGraphicFramePr>
             <a:graphicFrameLocks noGrp="1"/>
           </p:cNvGraphicFramePr>
@@ -8361,7 +8061,7 @@
       </p:graphicFrame>
       <p:sp>
         <p:nvSpPr>
-          <p:cNvPr id="14" name="Rectangle 13"/>
+          <p:cNvPr id="13" name="Rectangle 12"/>
           <p:cNvSpPr/>
           <p:nvPr/>
         </p:nvSpPr>
@@ -8410,7 +8110,7 @@
       </p:sp>
       <p:sp>
         <p:nvSpPr>
-          <p:cNvPr id="15" name="TextBox 14"/>
+          <p:cNvPr id="14" name="TextBox 13"/>
           <p:cNvSpPr txBox="1"/>
           <p:nvPr/>
         </p:nvSpPr>
@@ -8452,7 +8152,7 @@
       </p:sp>
       <p:sp>
         <p:nvSpPr>
-          <p:cNvPr id="16" name="TextBox 15"/>
+          <p:cNvPr id="15" name="TextBox 14"/>
           <p:cNvSpPr txBox="1"/>
           <p:nvPr/>
         </p:nvSpPr>
@@ -8494,7 +8194,7 @@
       </p:sp>
       <p:sp>
         <p:nvSpPr>
-          <p:cNvPr id="17" name="TextBox 16"/>
+          <p:cNvPr id="16" name="TextBox 15"/>
           <p:cNvSpPr txBox="1"/>
           <p:nvPr/>
         </p:nvSpPr>
@@ -8610,7 +8310,7 @@
         <p:spPr>
           <a:xfrm>
             <a:off x="640080" y="329184"/>
-            <a:ext cx="5303520" cy="182880"/>
+            <a:ext cx="9875520" cy="182880"/>
           </a:xfrm>
           <a:prstGeom prst="rect">
             <a:avLst/>
@@ -8651,48 +8351,6 @@
         </p:nvSpPr>
         <p:spPr>
           <a:xfrm>
-            <a:off x="5897880" y="310896"/>
-            <a:ext cx="4800600" cy="256032"/>
-          </a:xfrm>
-          <a:prstGeom prst="rect">
-            <a:avLst/>
-          </a:prstGeom>
-          <a:noFill/>
-        </p:spPr>
-        <p:txBody>
-          <a:bodyPr wrap="none" lIns="9144" rIns="9144" tIns="9144" bIns="9144" anchor="t">
-            <a:spAutoFit/>
-          </a:bodyPr>
-          <a:lstStyle/>
-          <a:p>
-            <a:pPr algn="r">
-              <a:spcAft>
-                <a:spcPts val="0"/>
-              </a:spcAft>
-              <a:defRPr sz="680" b="1">
-                <a:solidFill>
-                  <a:srgbClr val="4F6B00"/>
-                </a:solidFill>
-                <a:latin typeface="Inter"/>
-              </a:defRPr>
-            </a:pPr>
-            <a:r>
-              <a:rPr>
-                <a:latin typeface="Inter"/>
-              </a:rPr>
-              <a:t>Illustrative, Gradient Maintained — demo data, not the client's holdings or managers</a:t>
-            </a:r>
-          </a:p>
-        </p:txBody>
-      </p:sp>
-      <p:sp>
-        <p:nvSpPr>
-          <p:cNvPr id="5" name="TextBox 4"/>
-          <p:cNvSpPr txBox="1"/>
-          <p:nvPr/>
-        </p:nvSpPr>
-        <p:spPr>
-          <a:xfrm>
             <a:off x="640080" y="566928"/>
             <a:ext cx="10058400" cy="530352"/>
           </a:xfrm>
@@ -8729,7 +8387,7 @@
       </p:sp>
       <p:sp>
         <p:nvSpPr>
-          <p:cNvPr id="6" name="Rectangle 5"/>
+          <p:cNvPr id="5" name="Rectangle 4"/>
           <p:cNvSpPr/>
           <p:nvPr/>
         </p:nvSpPr>
@@ -8778,7 +8436,7 @@
       </p:sp>
       <p:sp>
         <p:nvSpPr>
-          <p:cNvPr id="7" name="Rectangle 6"/>
+          <p:cNvPr id="6" name="Rectangle 5"/>
           <p:cNvSpPr/>
           <p:nvPr/>
         </p:nvSpPr>
@@ -8827,7 +8485,7 @@
       </p:sp>
       <p:sp>
         <p:nvSpPr>
-          <p:cNvPr id="8" name="TextBox 7"/>
+          <p:cNvPr id="7" name="TextBox 6"/>
           <p:cNvSpPr txBox="1"/>
           <p:nvPr/>
         </p:nvSpPr>
@@ -8869,7 +8527,7 @@
       </p:sp>
       <p:sp>
         <p:nvSpPr>
-          <p:cNvPr id="9" name="Rectangle 8"/>
+          <p:cNvPr id="8" name="Rectangle 7"/>
           <p:cNvSpPr/>
           <p:nvPr/>
         </p:nvSpPr>
@@ -8918,7 +8576,7 @@
       </p:sp>
       <p:sp>
         <p:nvSpPr>
-          <p:cNvPr id="10" name="Rectangle 9"/>
+          <p:cNvPr id="9" name="Rectangle 8"/>
           <p:cNvSpPr/>
           <p:nvPr/>
         </p:nvSpPr>
@@ -8967,7 +8625,7 @@
       </p:sp>
       <p:sp>
         <p:nvSpPr>
-          <p:cNvPr id="11" name="TextBox 10"/>
+          <p:cNvPr id="10" name="TextBox 9"/>
           <p:cNvSpPr txBox="1"/>
           <p:nvPr/>
         </p:nvSpPr>
@@ -9009,7 +8667,7 @@
       </p:sp>
       <p:sp>
         <p:nvSpPr>
-          <p:cNvPr id="12" name="TextBox 11"/>
+          <p:cNvPr id="11" name="TextBox 10"/>
           <p:cNvSpPr txBox="1"/>
           <p:nvPr/>
         </p:nvSpPr>
@@ -9051,7 +8709,7 @@
       </p:sp>
       <p:sp>
         <p:nvSpPr>
-          <p:cNvPr id="13" name="Rectangle 12"/>
+          <p:cNvPr id="12" name="Rectangle 11"/>
           <p:cNvSpPr/>
           <p:nvPr/>
         </p:nvSpPr>
@@ -9100,7 +8758,7 @@
       </p:sp>
       <p:sp>
         <p:nvSpPr>
-          <p:cNvPr id="14" name="TextBox 13"/>
+          <p:cNvPr id="13" name="TextBox 12"/>
           <p:cNvSpPr txBox="1"/>
           <p:nvPr/>
         </p:nvSpPr>
@@ -9142,7 +8800,7 @@
       </p:sp>
       <p:sp>
         <p:nvSpPr>
-          <p:cNvPr id="15" name="TextBox 14"/>
+          <p:cNvPr id="14" name="TextBox 13"/>
           <p:cNvSpPr txBox="1"/>
           <p:nvPr/>
         </p:nvSpPr>
@@ -9184,7 +8842,7 @@
       </p:sp>
       <p:sp>
         <p:nvSpPr>
-          <p:cNvPr id="16" name="TextBox 15"/>
+          <p:cNvPr id="15" name="TextBox 14"/>
           <p:cNvSpPr txBox="1"/>
           <p:nvPr/>
         </p:nvSpPr>
@@ -9300,7 +8958,7 @@
         <p:spPr>
           <a:xfrm>
             <a:off x="640080" y="329184"/>
-            <a:ext cx="5303520" cy="182880"/>
+            <a:ext cx="9875520" cy="182880"/>
           </a:xfrm>
           <a:prstGeom prst="rect">
             <a:avLst/>
@@ -9341,48 +8999,6 @@
         </p:nvSpPr>
         <p:spPr>
           <a:xfrm>
-            <a:off x="5897880" y="310896"/>
-            <a:ext cx="4800600" cy="256032"/>
-          </a:xfrm>
-          <a:prstGeom prst="rect">
-            <a:avLst/>
-          </a:prstGeom>
-          <a:noFill/>
-        </p:spPr>
-        <p:txBody>
-          <a:bodyPr wrap="none" lIns="9144" rIns="9144" tIns="9144" bIns="9144" anchor="t">
-            <a:spAutoFit/>
-          </a:bodyPr>
-          <a:lstStyle/>
-          <a:p>
-            <a:pPr algn="r">
-              <a:spcAft>
-                <a:spcPts val="0"/>
-              </a:spcAft>
-              <a:defRPr sz="680" b="1">
-                <a:solidFill>
-                  <a:srgbClr val="4F6B00"/>
-                </a:solidFill>
-                <a:latin typeface="Inter"/>
-              </a:defRPr>
-            </a:pPr>
-            <a:r>
-              <a:rPr>
-                <a:latin typeface="Inter"/>
-              </a:rPr>
-              <a:t>Illustrative, Gradient Maintained — demo data, not the client's holdings or managers</a:t>
-            </a:r>
-          </a:p>
-        </p:txBody>
-      </p:sp>
-      <p:sp>
-        <p:nvSpPr>
-          <p:cNvPr id="5" name="TextBox 4"/>
-          <p:cNvSpPr txBox="1"/>
-          <p:nvPr/>
-        </p:nvSpPr>
-        <p:spPr>
-          <a:xfrm>
             <a:off x="640080" y="566928"/>
             <a:ext cx="10058400" cy="530352"/>
           </a:xfrm>
@@ -9419,7 +9035,7 @@
       </p:sp>
       <p:sp>
         <p:nvSpPr>
-          <p:cNvPr id="6" name="Rectangle 5"/>
+          <p:cNvPr id="5" name="Rectangle 4"/>
           <p:cNvSpPr/>
           <p:nvPr/>
         </p:nvSpPr>
@@ -9468,7 +9084,7 @@
       </p:sp>
       <p:sp>
         <p:nvSpPr>
-          <p:cNvPr id="7" name="Rectangle 6"/>
+          <p:cNvPr id="6" name="Rectangle 5"/>
           <p:cNvSpPr/>
           <p:nvPr/>
         </p:nvSpPr>
@@ -9517,7 +9133,7 @@
       </p:sp>
       <p:sp>
         <p:nvSpPr>
-          <p:cNvPr id="8" name="TextBox 7"/>
+          <p:cNvPr id="7" name="TextBox 6"/>
           <p:cNvSpPr txBox="1"/>
           <p:nvPr/>
         </p:nvSpPr>
@@ -9559,7 +9175,7 @@
       </p:sp>
       <p:sp>
         <p:nvSpPr>
-          <p:cNvPr id="9" name="TextBox 8"/>
+          <p:cNvPr id="8" name="TextBox 7"/>
           <p:cNvSpPr txBox="1"/>
           <p:nvPr/>
         </p:nvSpPr>
@@ -9601,7 +9217,7 @@
       </p:sp>
       <p:sp>
         <p:nvSpPr>
-          <p:cNvPr id="10" name="TextBox 9"/>
+          <p:cNvPr id="9" name="TextBox 8"/>
           <p:cNvSpPr txBox="1"/>
           <p:nvPr/>
         </p:nvSpPr>
@@ -9643,7 +9259,7 @@
       </p:sp>
       <p:sp>
         <p:nvSpPr>
-          <p:cNvPr id="11" name="Rectangle 10"/>
+          <p:cNvPr id="10" name="Rectangle 9"/>
           <p:cNvSpPr/>
           <p:nvPr/>
         </p:nvSpPr>
@@ -9692,7 +9308,7 @@
       </p:sp>
       <p:sp>
         <p:nvSpPr>
-          <p:cNvPr id="12" name="Oval 11"/>
+          <p:cNvPr id="11" name="Oval 10"/>
           <p:cNvSpPr/>
           <p:nvPr/>
         </p:nvSpPr>
@@ -9741,7 +9357,7 @@
       </p:sp>
       <p:sp>
         <p:nvSpPr>
-          <p:cNvPr id="13" name="Rectangle 12"/>
+          <p:cNvPr id="12" name="Rectangle 11"/>
           <p:cNvSpPr/>
           <p:nvPr/>
         </p:nvSpPr>
@@ -9790,7 +9406,7 @@
       </p:sp>
       <p:sp>
         <p:nvSpPr>
-          <p:cNvPr id="14" name="TextBox 13"/>
+          <p:cNvPr id="13" name="TextBox 12"/>
           <p:cNvSpPr txBox="1"/>
           <p:nvPr/>
         </p:nvSpPr>
@@ -9832,7 +9448,7 @@
       </p:sp>
       <p:sp>
         <p:nvSpPr>
-          <p:cNvPr id="15" name="Rectangle 14"/>
+          <p:cNvPr id="14" name="Rectangle 13"/>
           <p:cNvSpPr/>
           <p:nvPr/>
         </p:nvSpPr>
@@ -9881,7 +9497,7 @@
       </p:sp>
       <p:sp>
         <p:nvSpPr>
-          <p:cNvPr id="16" name="Oval 15"/>
+          <p:cNvPr id="15" name="Oval 14"/>
           <p:cNvSpPr/>
           <p:nvPr/>
         </p:nvSpPr>
@@ -9930,7 +9546,7 @@
       </p:sp>
       <p:sp>
         <p:nvSpPr>
-          <p:cNvPr id="17" name="Rectangle 16"/>
+          <p:cNvPr id="16" name="Rectangle 15"/>
           <p:cNvSpPr/>
           <p:nvPr/>
         </p:nvSpPr>
@@ -9979,7 +9595,7 @@
       </p:sp>
       <p:sp>
         <p:nvSpPr>
-          <p:cNvPr id="18" name="TextBox 17"/>
+          <p:cNvPr id="17" name="TextBox 16"/>
           <p:cNvSpPr txBox="1"/>
           <p:nvPr/>
         </p:nvSpPr>
@@ -10021,7 +9637,7 @@
       </p:sp>
       <p:sp>
         <p:nvSpPr>
-          <p:cNvPr id="19" name="Rectangle 18"/>
+          <p:cNvPr id="18" name="Rectangle 17"/>
           <p:cNvSpPr/>
           <p:nvPr/>
         </p:nvSpPr>
@@ -10070,7 +9686,7 @@
       </p:sp>
       <p:sp>
         <p:nvSpPr>
-          <p:cNvPr id="20" name="Oval 19"/>
+          <p:cNvPr id="19" name="Oval 18"/>
           <p:cNvSpPr/>
           <p:nvPr/>
         </p:nvSpPr>
@@ -10119,7 +9735,7 @@
       </p:sp>
       <p:sp>
         <p:nvSpPr>
-          <p:cNvPr id="21" name="Rectangle 20"/>
+          <p:cNvPr id="20" name="Rectangle 19"/>
           <p:cNvSpPr/>
           <p:nvPr/>
         </p:nvSpPr>
@@ -10168,7 +9784,7 @@
       </p:sp>
       <p:sp>
         <p:nvSpPr>
-          <p:cNvPr id="22" name="Rectangle 21"/>
+          <p:cNvPr id="21" name="Rectangle 20"/>
           <p:cNvSpPr/>
           <p:nvPr/>
         </p:nvSpPr>
@@ -10217,7 +9833,7 @@
       </p:sp>
       <p:sp>
         <p:nvSpPr>
-          <p:cNvPr id="23" name="TextBox 22"/>
+          <p:cNvPr id="22" name="TextBox 21"/>
           <p:cNvSpPr txBox="1"/>
           <p:nvPr/>
         </p:nvSpPr>
@@ -10259,7 +9875,7 @@
       </p:sp>
       <p:sp>
         <p:nvSpPr>
-          <p:cNvPr id="24" name="TextBox 23"/>
+          <p:cNvPr id="23" name="TextBox 22"/>
           <p:cNvSpPr txBox="1"/>
           <p:nvPr/>
         </p:nvSpPr>
@@ -10301,7 +9917,7 @@
       </p:sp>
       <p:sp>
         <p:nvSpPr>
-          <p:cNvPr id="25" name="TextBox 24"/>
+          <p:cNvPr id="24" name="TextBox 23"/>
           <p:cNvSpPr txBox="1"/>
           <p:nvPr/>
         </p:nvSpPr>
@@ -10417,7 +10033,7 @@
         <p:spPr>
           <a:xfrm>
             <a:off x="640080" y="329184"/>
-            <a:ext cx="5303520" cy="182880"/>
+            <a:ext cx="9875520" cy="182880"/>
           </a:xfrm>
           <a:prstGeom prst="rect">
             <a:avLst/>
@@ -10458,48 +10074,6 @@
         </p:nvSpPr>
         <p:spPr>
           <a:xfrm>
-            <a:off x="5897880" y="310896"/>
-            <a:ext cx="4800600" cy="256032"/>
-          </a:xfrm>
-          <a:prstGeom prst="rect">
-            <a:avLst/>
-          </a:prstGeom>
-          <a:noFill/>
-        </p:spPr>
-        <p:txBody>
-          <a:bodyPr wrap="none" lIns="9144" rIns="9144" tIns="9144" bIns="9144" anchor="t">
-            <a:spAutoFit/>
-          </a:bodyPr>
-          <a:lstStyle/>
-          <a:p>
-            <a:pPr algn="r">
-              <a:spcAft>
-                <a:spcPts val="0"/>
-              </a:spcAft>
-              <a:defRPr sz="680" b="1">
-                <a:solidFill>
-                  <a:srgbClr val="4F6B00"/>
-                </a:solidFill>
-                <a:latin typeface="Inter"/>
-              </a:defRPr>
-            </a:pPr>
-            <a:r>
-              <a:rPr>
-                <a:latin typeface="Inter"/>
-              </a:rPr>
-              <a:t>Illustrative, Gradient Maintained — demo data, not the client's holdings or managers</a:t>
-            </a:r>
-          </a:p>
-        </p:txBody>
-      </p:sp>
-      <p:sp>
-        <p:nvSpPr>
-          <p:cNvPr id="5" name="TextBox 4"/>
-          <p:cNvSpPr txBox="1"/>
-          <p:nvPr/>
-        </p:nvSpPr>
-        <p:spPr>
-          <a:xfrm>
             <a:off x="640080" y="566928"/>
             <a:ext cx="10058400" cy="530352"/>
           </a:xfrm>
@@ -10536,7 +10110,7 @@
       </p:sp>
       <p:sp>
         <p:nvSpPr>
-          <p:cNvPr id="6" name="Rectangle 5"/>
+          <p:cNvPr id="5" name="Rectangle 4"/>
           <p:cNvSpPr/>
           <p:nvPr/>
         </p:nvSpPr>
@@ -10585,7 +10159,7 @@
       </p:sp>
       <p:sp>
         <p:nvSpPr>
-          <p:cNvPr id="7" name="Rectangle 6"/>
+          <p:cNvPr id="6" name="Rectangle 5"/>
           <p:cNvSpPr/>
           <p:nvPr/>
         </p:nvSpPr>
@@ -10634,7 +10208,7 @@
       </p:sp>
       <p:sp>
         <p:nvSpPr>
-          <p:cNvPr id="8" name="TextBox 7"/>
+          <p:cNvPr id="7" name="TextBox 6"/>
           <p:cNvSpPr txBox="1"/>
           <p:nvPr/>
         </p:nvSpPr>
@@ -10676,7 +10250,7 @@
       </p:sp>
       <p:sp>
         <p:nvSpPr>
-          <p:cNvPr id="9" name="TextBox 8"/>
+          <p:cNvPr id="8" name="TextBox 7"/>
           <p:cNvSpPr txBox="1"/>
           <p:nvPr/>
         </p:nvSpPr>
@@ -10718,7 +10292,7 @@
       </p:sp>
       <p:graphicFrame>
         <p:nvGraphicFramePr>
-          <p:cNvPr id="10" name="Table 9"/>
+          <p:cNvPr id="9" name="Table 8"/>
           <p:cNvGraphicFramePr>
             <a:graphicFrameLocks noGrp="1"/>
           </p:cNvGraphicFramePr>
@@ -11186,7 +10760,7 @@
       </p:graphicFrame>
       <p:sp>
         <p:nvSpPr>
-          <p:cNvPr id="11" name="TextBox 10"/>
+          <p:cNvPr id="10" name="TextBox 9"/>
           <p:cNvSpPr txBox="1"/>
           <p:nvPr/>
         </p:nvSpPr>
@@ -11228,7 +10802,7 @@
       </p:sp>
       <p:graphicFrame>
         <p:nvGraphicFramePr>
-          <p:cNvPr id="12" name="Table 11"/>
+          <p:cNvPr id="11" name="Table 10"/>
           <p:cNvGraphicFramePr>
             <a:graphicFrameLocks noGrp="1"/>
           </p:cNvGraphicFramePr>
@@ -11377,7 +10951,7 @@
                         <a:rPr>
                           <a:latin typeface="Inter"/>
                         </a:rPr>
-                        <a:t>● available</a:t>
+                        <a:t>● Available</a:t>
                       </a:r>
                     </a:p>
                   </a:txBody>
@@ -11421,7 +10995,7 @@
       </p:graphicFrame>
       <p:sp>
         <p:nvSpPr>
-          <p:cNvPr id="13" name="Rectangle 12"/>
+          <p:cNvPr id="12" name="Rectangle 11"/>
           <p:cNvSpPr/>
           <p:nvPr/>
         </p:nvSpPr>
@@ -11470,7 +11044,7 @@
       </p:sp>
       <p:sp>
         <p:nvSpPr>
-          <p:cNvPr id="14" name="Rectangle 13"/>
+          <p:cNvPr id="13" name="Rectangle 12"/>
           <p:cNvSpPr/>
           <p:nvPr/>
         </p:nvSpPr>
@@ -11519,7 +11093,7 @@
       </p:sp>
       <p:sp>
         <p:nvSpPr>
-          <p:cNvPr id="15" name="TextBox 14"/>
+          <p:cNvPr id="14" name="TextBox 13"/>
           <p:cNvSpPr txBox="1"/>
           <p:nvPr/>
         </p:nvSpPr>
@@ -11561,7 +11135,7 @@
       </p:sp>
       <p:sp>
         <p:nvSpPr>
-          <p:cNvPr id="16" name="TextBox 15"/>
+          <p:cNvPr id="15" name="TextBox 14"/>
           <p:cNvSpPr txBox="1"/>
           <p:nvPr/>
         </p:nvSpPr>
@@ -11603,7 +11177,7 @@
       </p:sp>
       <p:sp>
         <p:nvSpPr>
-          <p:cNvPr id="17" name="Rectangle 16"/>
+          <p:cNvPr id="16" name="Rectangle 15"/>
           <p:cNvSpPr/>
           <p:nvPr/>
         </p:nvSpPr>
@@ -11652,7 +11226,7 @@
       </p:sp>
       <p:sp>
         <p:nvSpPr>
-          <p:cNvPr id="18" name="TextBox 17"/>
+          <p:cNvPr id="17" name="TextBox 16"/>
           <p:cNvSpPr txBox="1"/>
           <p:nvPr/>
         </p:nvSpPr>
@@ -11694,7 +11268,7 @@
       </p:sp>
       <p:sp>
         <p:nvSpPr>
-          <p:cNvPr id="19" name="TextBox 18"/>
+          <p:cNvPr id="18" name="TextBox 17"/>
           <p:cNvSpPr txBox="1"/>
           <p:nvPr/>
         </p:nvSpPr>
@@ -11736,7 +11310,7 @@
       </p:sp>
       <p:sp>
         <p:nvSpPr>
-          <p:cNvPr id="20" name="TextBox 19"/>
+          <p:cNvPr id="19" name="TextBox 18"/>
           <p:cNvSpPr txBox="1"/>
           <p:nvPr/>
         </p:nvSpPr>
@@ -11852,7 +11426,7 @@
         <p:spPr>
           <a:xfrm>
             <a:off x="640080" y="329184"/>
-            <a:ext cx="5303520" cy="182880"/>
+            <a:ext cx="9875520" cy="182880"/>
           </a:xfrm>
           <a:prstGeom prst="rect">
             <a:avLst/>
@@ -11893,48 +11467,6 @@
         </p:nvSpPr>
         <p:spPr>
           <a:xfrm>
-            <a:off x="5897880" y="310896"/>
-            <a:ext cx="4800600" cy="256032"/>
-          </a:xfrm>
-          <a:prstGeom prst="rect">
-            <a:avLst/>
-          </a:prstGeom>
-          <a:noFill/>
-        </p:spPr>
-        <p:txBody>
-          <a:bodyPr wrap="none" lIns="9144" rIns="9144" tIns="9144" bIns="9144" anchor="t">
-            <a:spAutoFit/>
-          </a:bodyPr>
-          <a:lstStyle/>
-          <a:p>
-            <a:pPr algn="r">
-              <a:spcAft>
-                <a:spcPts val="0"/>
-              </a:spcAft>
-              <a:defRPr sz="680" b="1">
-                <a:solidFill>
-                  <a:srgbClr val="4F6B00"/>
-                </a:solidFill>
-                <a:latin typeface="Inter"/>
-              </a:defRPr>
-            </a:pPr>
-            <a:r>
-              <a:rPr>
-                <a:latin typeface="Inter"/>
-              </a:rPr>
-              <a:t>Illustrative, Gradient Maintained — demo data, not the client's holdings or managers</a:t>
-            </a:r>
-          </a:p>
-        </p:txBody>
-      </p:sp>
-      <p:sp>
-        <p:nvSpPr>
-          <p:cNvPr id="5" name="TextBox 4"/>
-          <p:cNvSpPr txBox="1"/>
-          <p:nvPr/>
-        </p:nvSpPr>
-        <p:spPr>
-          <a:xfrm>
             <a:off x="640080" y="566928"/>
             <a:ext cx="10058400" cy="530352"/>
           </a:xfrm>
@@ -11971,7 +11503,7 @@
       </p:sp>
       <p:sp>
         <p:nvSpPr>
-          <p:cNvPr id="6" name="Rectangle 5"/>
+          <p:cNvPr id="5" name="Rectangle 4"/>
           <p:cNvSpPr/>
           <p:nvPr/>
         </p:nvSpPr>
@@ -12020,7 +11552,7 @@
       </p:sp>
       <p:sp>
         <p:nvSpPr>
-          <p:cNvPr id="7" name="Rectangle 6"/>
+          <p:cNvPr id="6" name="Rectangle 5"/>
           <p:cNvSpPr/>
           <p:nvPr/>
         </p:nvSpPr>
@@ -12069,7 +11601,7 @@
       </p:sp>
       <p:sp>
         <p:nvSpPr>
-          <p:cNvPr id="8" name="TextBox 7"/>
+          <p:cNvPr id="7" name="TextBox 6"/>
           <p:cNvSpPr txBox="1"/>
           <p:nvPr/>
         </p:nvSpPr>
@@ -12111,7 +11643,7 @@
       </p:sp>
       <p:sp>
         <p:nvSpPr>
-          <p:cNvPr id="9" name="TextBox 8"/>
+          <p:cNvPr id="8" name="TextBox 7"/>
           <p:cNvSpPr txBox="1"/>
           <p:nvPr/>
         </p:nvSpPr>
@@ -12153,7 +11685,7 @@
       </p:sp>
       <p:graphicFrame>
         <p:nvGraphicFramePr>
-          <p:cNvPr id="10" name="Table 9"/>
+          <p:cNvPr id="9" name="Table 8"/>
           <p:cNvGraphicFramePr>
             <a:graphicFrameLocks noGrp="1"/>
           </p:cNvGraphicFramePr>
@@ -12615,7 +12147,7 @@
       </p:graphicFrame>
       <p:sp>
         <p:nvSpPr>
-          <p:cNvPr id="11" name="Rectangle 10"/>
+          <p:cNvPr id="10" name="Rectangle 9"/>
           <p:cNvSpPr/>
           <p:nvPr/>
         </p:nvSpPr>
@@ -12664,7 +12196,7 @@
       </p:sp>
       <p:sp>
         <p:nvSpPr>
-          <p:cNvPr id="12" name="TextBox 11"/>
+          <p:cNvPr id="11" name="TextBox 10"/>
           <p:cNvSpPr txBox="1"/>
           <p:nvPr/>
         </p:nvSpPr>
@@ -12706,7 +12238,7 @@
       </p:sp>
       <p:sp>
         <p:nvSpPr>
-          <p:cNvPr id="13" name="TextBox 12"/>
+          <p:cNvPr id="12" name="TextBox 11"/>
           <p:cNvSpPr txBox="1"/>
           <p:nvPr/>
         </p:nvSpPr>
@@ -12748,7 +12280,7 @@
       </p:sp>
       <p:sp>
         <p:nvSpPr>
-          <p:cNvPr id="14" name="TextBox 13"/>
+          <p:cNvPr id="13" name="TextBox 12"/>
           <p:cNvSpPr txBox="1"/>
           <p:nvPr/>
         </p:nvSpPr>
@@ -12864,7 +12396,7 @@
         <p:spPr>
           <a:xfrm>
             <a:off x="640080" y="329184"/>
-            <a:ext cx="5303520" cy="182880"/>
+            <a:ext cx="9875520" cy="182880"/>
           </a:xfrm>
           <a:prstGeom prst="rect">
             <a:avLst/>
@@ -12905,48 +12437,6 @@
         </p:nvSpPr>
         <p:spPr>
           <a:xfrm>
-            <a:off x="5897880" y="310896"/>
-            <a:ext cx="4800600" cy="256032"/>
-          </a:xfrm>
-          <a:prstGeom prst="rect">
-            <a:avLst/>
-          </a:prstGeom>
-          <a:noFill/>
-        </p:spPr>
-        <p:txBody>
-          <a:bodyPr wrap="none" lIns="9144" rIns="9144" tIns="9144" bIns="9144" anchor="t">
-            <a:spAutoFit/>
-          </a:bodyPr>
-          <a:lstStyle/>
-          <a:p>
-            <a:pPr algn="r">
-              <a:spcAft>
-                <a:spcPts val="0"/>
-              </a:spcAft>
-              <a:defRPr sz="680" b="1">
-                <a:solidFill>
-                  <a:srgbClr val="4F6B00"/>
-                </a:solidFill>
-                <a:latin typeface="Inter"/>
-              </a:defRPr>
-            </a:pPr>
-            <a:r>
-              <a:rPr>
-                <a:latin typeface="Inter"/>
-              </a:rPr>
-              <a:t>Illustrative, Gradient Maintained — demo data, not the client's holdings or managers</a:t>
-            </a:r>
-          </a:p>
-        </p:txBody>
-      </p:sp>
-      <p:sp>
-        <p:nvSpPr>
-          <p:cNvPr id="5" name="TextBox 4"/>
-          <p:cNvSpPr txBox="1"/>
-          <p:nvPr/>
-        </p:nvSpPr>
-        <p:spPr>
-          <a:xfrm>
             <a:off x="640080" y="566928"/>
             <a:ext cx="10058400" cy="530352"/>
           </a:xfrm>
@@ -12983,7 +12473,7 @@
       </p:sp>
       <p:sp>
         <p:nvSpPr>
-          <p:cNvPr id="6" name="Rectangle 5"/>
+          <p:cNvPr id="5" name="Rectangle 4"/>
           <p:cNvSpPr/>
           <p:nvPr/>
         </p:nvSpPr>
@@ -13032,7 +12522,7 @@
       </p:sp>
       <p:sp>
         <p:nvSpPr>
-          <p:cNvPr id="7" name="Rectangle 6"/>
+          <p:cNvPr id="6" name="Rectangle 5"/>
           <p:cNvSpPr/>
           <p:nvPr/>
         </p:nvSpPr>
@@ -13081,7 +12571,7 @@
       </p:sp>
       <p:sp>
         <p:nvSpPr>
-          <p:cNvPr id="8" name="TextBox 7"/>
+          <p:cNvPr id="7" name="TextBox 6"/>
           <p:cNvSpPr txBox="1"/>
           <p:nvPr/>
         </p:nvSpPr>
@@ -13123,7 +12613,7 @@
       </p:sp>
       <p:sp>
         <p:nvSpPr>
-          <p:cNvPr id="9" name="TextBox 8"/>
+          <p:cNvPr id="8" name="TextBox 7"/>
           <p:cNvSpPr txBox="1"/>
           <p:nvPr/>
         </p:nvSpPr>
@@ -13165,7 +12655,7 @@
       </p:sp>
       <p:graphicFrame>
         <p:nvGraphicFramePr>
-          <p:cNvPr id="10" name="Chart 9"/>
+          <p:cNvPr id="9" name="Chart 8"/>
           <p:cNvGraphicFramePr>
             <a:graphicFrameLocks noGrp="1"/>
           </p:cNvGraphicFramePr>
@@ -13183,7 +12673,7 @@
       </p:graphicFrame>
       <p:sp>
         <p:nvSpPr>
-          <p:cNvPr id="11" name="Rectangle 10"/>
+          <p:cNvPr id="10" name="Rectangle 9"/>
           <p:cNvSpPr/>
           <p:nvPr/>
         </p:nvSpPr>
@@ -13232,7 +12722,7 @@
       </p:sp>
       <p:sp>
         <p:nvSpPr>
-          <p:cNvPr id="12" name="TextBox 11"/>
+          <p:cNvPr id="11" name="TextBox 10"/>
           <p:cNvSpPr txBox="1"/>
           <p:nvPr/>
         </p:nvSpPr>
@@ -13274,7 +12764,7 @@
       </p:sp>
       <p:graphicFrame>
         <p:nvGraphicFramePr>
-          <p:cNvPr id="13" name="Chart 12"/>
+          <p:cNvPr id="12" name="Chart 11"/>
           <p:cNvGraphicFramePr>
             <a:graphicFrameLocks noGrp="1"/>
           </p:cNvGraphicFramePr>
@@ -13292,7 +12782,7 @@
       </p:graphicFrame>
       <p:sp>
         <p:nvSpPr>
-          <p:cNvPr id="14" name="Rectangle 13"/>
+          <p:cNvPr id="13" name="Rectangle 12"/>
           <p:cNvSpPr/>
           <p:nvPr/>
         </p:nvSpPr>
@@ -13341,7 +12831,7 @@
       </p:sp>
       <p:sp>
         <p:nvSpPr>
-          <p:cNvPr id="15" name="TextBox 14"/>
+          <p:cNvPr id="14" name="TextBox 13"/>
           <p:cNvSpPr txBox="1"/>
           <p:nvPr/>
         </p:nvSpPr>
@@ -13383,7 +12873,7 @@
       </p:sp>
       <p:sp>
         <p:nvSpPr>
-          <p:cNvPr id="16" name="TextBox 15"/>
+          <p:cNvPr id="15" name="TextBox 14"/>
           <p:cNvSpPr txBox="1"/>
           <p:nvPr/>
         </p:nvSpPr>
@@ -13425,7 +12915,7 @@
       </p:sp>
       <p:sp>
         <p:nvSpPr>
-          <p:cNvPr id="17" name="TextBox 16"/>
+          <p:cNvPr id="16" name="TextBox 15"/>
           <p:cNvSpPr txBox="1"/>
           <p:nvPr/>
         </p:nvSpPr>
@@ -13541,7 +13031,7 @@
         <p:spPr>
           <a:xfrm>
             <a:off x="640080" y="329184"/>
-            <a:ext cx="5303520" cy="182880"/>
+            <a:ext cx="9875520" cy="182880"/>
           </a:xfrm>
           <a:prstGeom prst="rect">
             <a:avLst/>
@@ -13582,48 +13072,6 @@
         </p:nvSpPr>
         <p:spPr>
           <a:xfrm>
-            <a:off x="5897880" y="310896"/>
-            <a:ext cx="4800600" cy="256032"/>
-          </a:xfrm>
-          <a:prstGeom prst="rect">
-            <a:avLst/>
-          </a:prstGeom>
-          <a:noFill/>
-        </p:spPr>
-        <p:txBody>
-          <a:bodyPr wrap="none" lIns="9144" rIns="9144" tIns="9144" bIns="9144" anchor="t">
-            <a:spAutoFit/>
-          </a:bodyPr>
-          <a:lstStyle/>
-          <a:p>
-            <a:pPr algn="r">
-              <a:spcAft>
-                <a:spcPts val="0"/>
-              </a:spcAft>
-              <a:defRPr sz="680" b="1">
-                <a:solidFill>
-                  <a:srgbClr val="4F6B00"/>
-                </a:solidFill>
-                <a:latin typeface="Inter"/>
-              </a:defRPr>
-            </a:pPr>
-            <a:r>
-              <a:rPr>
-                <a:latin typeface="Inter"/>
-              </a:rPr>
-              <a:t>Illustrative, Gradient Maintained — demo data, not the client's holdings or managers</a:t>
-            </a:r>
-          </a:p>
-        </p:txBody>
-      </p:sp>
-      <p:sp>
-        <p:nvSpPr>
-          <p:cNvPr id="5" name="TextBox 4"/>
-          <p:cNvSpPr txBox="1"/>
-          <p:nvPr/>
-        </p:nvSpPr>
-        <p:spPr>
-          <a:xfrm>
             <a:off x="640080" y="566928"/>
             <a:ext cx="10058400" cy="530352"/>
           </a:xfrm>
@@ -13660,7 +13108,7 @@
       </p:sp>
       <p:sp>
         <p:nvSpPr>
-          <p:cNvPr id="6" name="Rectangle 5"/>
+          <p:cNvPr id="5" name="Rectangle 4"/>
           <p:cNvSpPr/>
           <p:nvPr/>
         </p:nvSpPr>
@@ -13709,7 +13157,7 @@
       </p:sp>
       <p:sp>
         <p:nvSpPr>
-          <p:cNvPr id="7" name="Rectangle 6"/>
+          <p:cNvPr id="6" name="Rectangle 5"/>
           <p:cNvSpPr/>
           <p:nvPr/>
         </p:nvSpPr>
@@ -13758,7 +13206,7 @@
       </p:sp>
       <p:sp>
         <p:nvSpPr>
-          <p:cNvPr id="8" name="TextBox 7"/>
+          <p:cNvPr id="7" name="TextBox 6"/>
           <p:cNvSpPr txBox="1"/>
           <p:nvPr/>
         </p:nvSpPr>
@@ -13800,7 +13248,7 @@
       </p:sp>
       <p:sp>
         <p:nvSpPr>
-          <p:cNvPr id="9" name="TextBox 8"/>
+          <p:cNvPr id="8" name="TextBox 7"/>
           <p:cNvSpPr txBox="1"/>
           <p:nvPr/>
         </p:nvSpPr>
@@ -13842,7 +13290,7 @@
       </p:sp>
       <p:graphicFrame>
         <p:nvGraphicFramePr>
-          <p:cNvPr id="10" name="Chart 9"/>
+          <p:cNvPr id="9" name="Chart 8"/>
           <p:cNvGraphicFramePr>
             <a:graphicFrameLocks noGrp="1"/>
           </p:cNvGraphicFramePr>
@@ -13860,7 +13308,7 @@
       </p:graphicFrame>
       <p:sp>
         <p:nvSpPr>
-          <p:cNvPr id="11" name="Rectangle 10"/>
+          <p:cNvPr id="10" name="Rectangle 9"/>
           <p:cNvSpPr/>
           <p:nvPr/>
         </p:nvSpPr>
@@ -13909,7 +13357,7 @@
       </p:sp>
       <p:sp>
         <p:nvSpPr>
-          <p:cNvPr id="12" name="TextBox 11"/>
+          <p:cNvPr id="11" name="TextBox 10"/>
           <p:cNvSpPr txBox="1"/>
           <p:nvPr/>
         </p:nvSpPr>
@@ -13951,7 +13399,7 @@
       </p:sp>
       <p:graphicFrame>
         <p:nvGraphicFramePr>
-          <p:cNvPr id="13" name="Chart 12"/>
+          <p:cNvPr id="12" name="Chart 11"/>
           <p:cNvGraphicFramePr>
             <a:graphicFrameLocks noGrp="1"/>
           </p:cNvGraphicFramePr>
@@ -13969,7 +13417,7 @@
       </p:graphicFrame>
       <p:sp>
         <p:nvSpPr>
-          <p:cNvPr id="14" name="Rectangle 13"/>
+          <p:cNvPr id="13" name="Rectangle 12"/>
           <p:cNvSpPr/>
           <p:nvPr/>
         </p:nvSpPr>
@@ -14018,7 +13466,7 @@
       </p:sp>
       <p:sp>
         <p:nvSpPr>
-          <p:cNvPr id="15" name="TextBox 14"/>
+          <p:cNvPr id="14" name="TextBox 13"/>
           <p:cNvSpPr txBox="1"/>
           <p:nvPr/>
         </p:nvSpPr>
@@ -14060,7 +13508,7 @@
       </p:sp>
       <p:sp>
         <p:nvSpPr>
-          <p:cNvPr id="16" name="TextBox 15"/>
+          <p:cNvPr id="15" name="TextBox 14"/>
           <p:cNvSpPr txBox="1"/>
           <p:nvPr/>
         </p:nvSpPr>
@@ -14102,7 +13550,7 @@
       </p:sp>
       <p:sp>
         <p:nvSpPr>
-          <p:cNvPr id="17" name="TextBox 16"/>
+          <p:cNvPr id="16" name="TextBox 15"/>
           <p:cNvSpPr txBox="1"/>
           <p:nvPr/>
         </p:nvSpPr>
@@ -14218,7 +13666,7 @@
         <p:spPr>
           <a:xfrm>
             <a:off x="640080" y="329184"/>
-            <a:ext cx="5303520" cy="182880"/>
+            <a:ext cx="9875520" cy="182880"/>
           </a:xfrm>
           <a:prstGeom prst="rect">
             <a:avLst/>
@@ -14259,48 +13707,6 @@
         </p:nvSpPr>
         <p:spPr>
           <a:xfrm>
-            <a:off x="5897880" y="310896"/>
-            <a:ext cx="4800600" cy="256032"/>
-          </a:xfrm>
-          <a:prstGeom prst="rect">
-            <a:avLst/>
-          </a:prstGeom>
-          <a:noFill/>
-        </p:spPr>
-        <p:txBody>
-          <a:bodyPr wrap="none" lIns="9144" rIns="9144" tIns="9144" bIns="9144" anchor="t">
-            <a:spAutoFit/>
-          </a:bodyPr>
-          <a:lstStyle/>
-          <a:p>
-            <a:pPr algn="r">
-              <a:spcAft>
-                <a:spcPts val="0"/>
-              </a:spcAft>
-              <a:defRPr sz="680" b="1">
-                <a:solidFill>
-                  <a:srgbClr val="4F6B00"/>
-                </a:solidFill>
-                <a:latin typeface="Inter"/>
-              </a:defRPr>
-            </a:pPr>
-            <a:r>
-              <a:rPr>
-                <a:latin typeface="Inter"/>
-              </a:rPr>
-              <a:t>Illustrative, Gradient Maintained — demo data, not the client's holdings or managers</a:t>
-            </a:r>
-          </a:p>
-        </p:txBody>
-      </p:sp>
-      <p:sp>
-        <p:nvSpPr>
-          <p:cNvPr id="5" name="TextBox 4"/>
-          <p:cNvSpPr txBox="1"/>
-          <p:nvPr/>
-        </p:nvSpPr>
-        <p:spPr>
-          <a:xfrm>
             <a:off x="640080" y="566928"/>
             <a:ext cx="10058400" cy="530352"/>
           </a:xfrm>
@@ -14337,7 +13743,7 @@
       </p:sp>
       <p:sp>
         <p:nvSpPr>
-          <p:cNvPr id="6" name="Rectangle 5"/>
+          <p:cNvPr id="5" name="Rectangle 4"/>
           <p:cNvSpPr/>
           <p:nvPr/>
         </p:nvSpPr>
@@ -14386,7 +13792,7 @@
       </p:sp>
       <p:sp>
         <p:nvSpPr>
-          <p:cNvPr id="7" name="Rectangle 6"/>
+          <p:cNvPr id="6" name="Rectangle 5"/>
           <p:cNvSpPr/>
           <p:nvPr/>
         </p:nvSpPr>
@@ -14435,7 +13841,7 @@
       </p:sp>
       <p:sp>
         <p:nvSpPr>
-          <p:cNvPr id="8" name="TextBox 7"/>
+          <p:cNvPr id="7" name="TextBox 6"/>
           <p:cNvSpPr txBox="1"/>
           <p:nvPr/>
         </p:nvSpPr>
@@ -14477,7 +13883,7 @@
       </p:sp>
       <p:sp>
         <p:nvSpPr>
-          <p:cNvPr id="9" name="TextBox 8"/>
+          <p:cNvPr id="8" name="TextBox 7"/>
           <p:cNvSpPr txBox="1"/>
           <p:nvPr/>
         </p:nvSpPr>
@@ -14519,7 +13925,7 @@
       </p:sp>
       <p:graphicFrame>
         <p:nvGraphicFramePr>
-          <p:cNvPr id="10" name="Table 9"/>
+          <p:cNvPr id="9" name="Table 8"/>
           <p:cNvGraphicFramePr>
             <a:graphicFrameLocks noGrp="1"/>
           </p:cNvGraphicFramePr>
@@ -14861,7 +14267,7 @@
                         <a:rPr>
                           <a:latin typeface="Inter"/>
                         </a:rPr>
-                        <a:t>Partial</a:t>
+                        <a:t>Persistent in two lanes</a:t>
                       </a:r>
                     </a:p>
                   </a:txBody>
@@ -14878,7 +14284,7 @@
       </p:graphicFrame>
       <p:sp>
         <p:nvSpPr>
-          <p:cNvPr id="11" name="TextBox 10"/>
+          <p:cNvPr id="10" name="TextBox 9"/>
           <p:cNvSpPr txBox="1"/>
           <p:nvPr/>
         </p:nvSpPr>
@@ -14920,7 +14326,7 @@
       </p:sp>
       <p:sp>
         <p:nvSpPr>
-          <p:cNvPr id="12" name="Rectangle 11"/>
+          <p:cNvPr id="11" name="Rectangle 10"/>
           <p:cNvSpPr/>
           <p:nvPr/>
         </p:nvSpPr>
@@ -14969,7 +14375,7 @@
       </p:sp>
       <p:sp>
         <p:nvSpPr>
-          <p:cNvPr id="13" name="Rectangle 12"/>
+          <p:cNvPr id="12" name="Rectangle 11"/>
           <p:cNvSpPr/>
           <p:nvPr/>
         </p:nvSpPr>
@@ -15018,7 +14424,7 @@
       </p:sp>
       <p:sp>
         <p:nvSpPr>
-          <p:cNvPr id="14" name="TextBox 13"/>
+          <p:cNvPr id="13" name="TextBox 12"/>
           <p:cNvSpPr txBox="1"/>
           <p:nvPr/>
         </p:nvSpPr>
@@ -15060,7 +14466,7 @@
       </p:sp>
       <p:sp>
         <p:nvSpPr>
-          <p:cNvPr id="15" name="TextBox 14"/>
+          <p:cNvPr id="14" name="TextBox 13"/>
           <p:cNvSpPr txBox="1"/>
           <p:nvPr/>
         </p:nvSpPr>
@@ -15102,7 +14508,7 @@
       </p:sp>
       <p:sp>
         <p:nvSpPr>
-          <p:cNvPr id="16" name="Rectangle 15"/>
+          <p:cNvPr id="15" name="Rectangle 14"/>
           <p:cNvSpPr/>
           <p:nvPr/>
         </p:nvSpPr>
@@ -15151,7 +14557,7 @@
       </p:sp>
       <p:sp>
         <p:nvSpPr>
-          <p:cNvPr id="17" name="TextBox 16"/>
+          <p:cNvPr id="16" name="TextBox 15"/>
           <p:cNvSpPr txBox="1"/>
           <p:nvPr/>
         </p:nvSpPr>
@@ -15193,7 +14599,7 @@
       </p:sp>
       <p:sp>
         <p:nvSpPr>
-          <p:cNvPr id="18" name="TextBox 17"/>
+          <p:cNvPr id="17" name="TextBox 16"/>
           <p:cNvSpPr txBox="1"/>
           <p:nvPr/>
         </p:nvSpPr>
@@ -15235,7 +14641,7 @@
       </p:sp>
       <p:sp>
         <p:nvSpPr>
-          <p:cNvPr id="19" name="TextBox 18"/>
+          <p:cNvPr id="18" name="TextBox 17"/>
           <p:cNvSpPr txBox="1"/>
           <p:nvPr/>
         </p:nvSpPr>
@@ -15351,7 +14757,7 @@
         <p:spPr>
           <a:xfrm>
             <a:off x="640080" y="329184"/>
-            <a:ext cx="5303520" cy="182880"/>
+            <a:ext cx="9875520" cy="182880"/>
           </a:xfrm>
           <a:prstGeom prst="rect">
             <a:avLst/>
@@ -15379,7 +14785,7 @@
               <a:rPr>
                 <a:latin typeface="Inter"/>
               </a:rPr>
-              <a:t>TWO LIVE LANES AND TWO CAPABILITY GAPS DEFINE COVERAGE</a:t>
+              <a:t>ALL THREE LANES AND THE CROSS-LANE COMPARISON RETURNED RESULTS</a:t>
             </a:r>
           </a:p>
         </p:txBody>
@@ -15387,48 +14793,6 @@
       <p:sp>
         <p:nvSpPr>
           <p:cNvPr id="4" name="TextBox 3"/>
-          <p:cNvSpPr txBox="1"/>
-          <p:nvPr/>
-        </p:nvSpPr>
-        <p:spPr>
-          <a:xfrm>
-            <a:off x="5897880" y="310896"/>
-            <a:ext cx="4800600" cy="256032"/>
-          </a:xfrm>
-          <a:prstGeom prst="rect">
-            <a:avLst/>
-          </a:prstGeom>
-          <a:noFill/>
-        </p:spPr>
-        <p:txBody>
-          <a:bodyPr wrap="none" lIns="9144" rIns="9144" tIns="9144" bIns="9144" anchor="t">
-            <a:spAutoFit/>
-          </a:bodyPr>
-          <a:lstStyle/>
-          <a:p>
-            <a:pPr algn="r">
-              <a:spcAft>
-                <a:spcPts val="0"/>
-              </a:spcAft>
-              <a:defRPr sz="680" b="1">
-                <a:solidFill>
-                  <a:srgbClr val="4F6B00"/>
-                </a:solidFill>
-                <a:latin typeface="Inter"/>
-              </a:defRPr>
-            </a:pPr>
-            <a:r>
-              <a:rPr>
-                <a:latin typeface="Inter"/>
-              </a:rPr>
-              <a:t>Illustrative, Gradient Maintained — demo data, not the client's holdings or managers</a:t>
-            </a:r>
-          </a:p>
-        </p:txBody>
-      </p:sp>
-      <p:sp>
-        <p:nvSpPr>
-          <p:cNvPr id="5" name="TextBox 4"/>
           <p:cNvSpPr txBox="1"/>
           <p:nvPr/>
         </p:nvSpPr>
@@ -15470,7 +14834,7 @@
       </p:sp>
       <p:sp>
         <p:nvSpPr>
-          <p:cNvPr id="6" name="Rectangle 5"/>
+          <p:cNvPr id="5" name="Rectangle 4"/>
           <p:cNvSpPr/>
           <p:nvPr/>
         </p:nvSpPr>
@@ -15519,7 +14883,7 @@
       </p:sp>
       <p:sp>
         <p:nvSpPr>
-          <p:cNvPr id="7" name="Rectangle 6"/>
+          <p:cNvPr id="6" name="Rectangle 5"/>
           <p:cNvSpPr/>
           <p:nvPr/>
         </p:nvSpPr>
@@ -15568,7 +14932,7 @@
       </p:sp>
       <p:sp>
         <p:nvSpPr>
-          <p:cNvPr id="8" name="TextBox 7"/>
+          <p:cNvPr id="7" name="TextBox 6"/>
           <p:cNvSpPr txBox="1"/>
           <p:nvPr/>
         </p:nvSpPr>
@@ -15610,7 +14974,7 @@
       </p:sp>
       <p:graphicFrame>
         <p:nvGraphicFramePr>
-          <p:cNvPr id="9" name="Table 8"/>
+          <p:cNvPr id="8" name="Table 7"/>
           <p:cNvGraphicFramePr>
             <a:graphicFrameLocks noGrp="1"/>
           </p:cNvGraphicFramePr>
@@ -15759,7 +15123,7 @@
                         <a:rPr>
                           <a:latin typeface="Inter"/>
                         </a:rPr>
-                        <a:t>● available</a:t>
+                        <a:t>● Available</a:t>
                       </a:r>
                     </a:p>
                   </a:txBody>
@@ -15786,7 +15150,7 @@
                         <a:rPr>
                           <a:latin typeface="Inter"/>
                         </a:rPr>
-                        <a:t>Governed result [S2]</a:t>
+                        <a:t>Realized attribution returned [S2]</a:t>
                       </a:r>
                     </a:p>
                   </a:txBody>
@@ -15842,7 +15206,7 @@
                         <a:rPr>
                           <a:latin typeface="Inter"/>
                         </a:rPr>
-                        <a:t>● available</a:t>
+                        <a:t>● Available</a:t>
                       </a:r>
                     </a:p>
                   </a:txBody>
@@ -15869,7 +15233,7 @@
                         <a:rPr>
                           <a:latin typeface="Inter"/>
                         </a:rPr>
-                        <a:t>Governed result [S3]</a:t>
+                        <a:t>Expected attribution returned [S3]</a:t>
                       </a:r>
                     </a:p>
                   </a:txBody>
@@ -15898,7 +15262,7 @@
                         <a:rPr>
                           <a:latin typeface="Inter"/>
                         </a:rPr>
-                        <a:t>Planned tools</a:t>
+                        <a:t>Simulation and comparison</a:t>
                       </a:r>
                     </a:p>
                   </a:txBody>
@@ -15925,7 +15289,7 @@
                         <a:rPr>
                           <a:latin typeface="Inter"/>
                         </a:rPr>
-                        <a:t>● available</a:t>
+                        <a:t>● Available</a:t>
                       </a:r>
                     </a:p>
                   </a:txBody>
@@ -15952,7 +15316,7 @@
                         <a:rPr>
                           <a:latin typeface="Inter"/>
                         </a:rPr>
-                        <a:t>Capability-gated results [S4][S5]</a:t>
+                        <a:t>Scenario and cross-lane results returned [S4][S5]</a:t>
                       </a:r>
                     </a:p>
                   </a:txBody>
@@ -15969,7 +15333,7 @@
       </p:graphicFrame>
       <p:sp>
         <p:nvSpPr>
-          <p:cNvPr id="10" name="Rectangle 9"/>
+          <p:cNvPr id="9" name="Rectangle 8"/>
           <p:cNvSpPr/>
           <p:nvPr/>
         </p:nvSpPr>
@@ -16018,7 +15382,7 @@
       </p:sp>
       <p:sp>
         <p:nvSpPr>
-          <p:cNvPr id="11" name="TextBox 10"/>
+          <p:cNvPr id="10" name="TextBox 9"/>
           <p:cNvSpPr txBox="1"/>
           <p:nvPr/>
         </p:nvSpPr>
@@ -16060,7 +15424,7 @@
       </p:sp>
       <p:sp>
         <p:nvSpPr>
-          <p:cNvPr id="12" name="TextBox 11"/>
+          <p:cNvPr id="11" name="TextBox 10"/>
           <p:cNvSpPr txBox="1"/>
           <p:nvPr/>
         </p:nvSpPr>
@@ -16102,7 +15466,7 @@
       </p:sp>
       <p:sp>
         <p:nvSpPr>
-          <p:cNvPr id="13" name="TextBox 12"/>
+          <p:cNvPr id="12" name="TextBox 11"/>
           <p:cNvSpPr txBox="1"/>
           <p:nvPr/>
         </p:nvSpPr>
@@ -16218,7 +15582,7 @@
         <p:spPr>
           <a:xfrm>
             <a:off x="640080" y="329184"/>
-            <a:ext cx="5303520" cy="182880"/>
+            <a:ext cx="9875520" cy="182880"/>
           </a:xfrm>
           <a:prstGeom prst="rect">
             <a:avLst/>
@@ -16259,48 +15623,6 @@
         </p:nvSpPr>
         <p:spPr>
           <a:xfrm>
-            <a:off x="5897880" y="310896"/>
-            <a:ext cx="4800600" cy="256032"/>
-          </a:xfrm>
-          <a:prstGeom prst="rect">
-            <a:avLst/>
-          </a:prstGeom>
-          <a:noFill/>
-        </p:spPr>
-        <p:txBody>
-          <a:bodyPr wrap="none" lIns="9144" rIns="9144" tIns="9144" bIns="9144" anchor="t">
-            <a:spAutoFit/>
-          </a:bodyPr>
-          <a:lstStyle/>
-          <a:p>
-            <a:pPr algn="r">
-              <a:spcAft>
-                <a:spcPts val="0"/>
-              </a:spcAft>
-              <a:defRPr sz="680" b="1">
-                <a:solidFill>
-                  <a:srgbClr val="4F6B00"/>
-                </a:solidFill>
-                <a:latin typeface="Inter"/>
-              </a:defRPr>
-            </a:pPr>
-            <a:r>
-              <a:rPr>
-                <a:latin typeface="Inter"/>
-              </a:rPr>
-              <a:t>Illustrative, Gradient Maintained — demo data, not the client's holdings or managers</a:t>
-            </a:r>
-          </a:p>
-        </p:txBody>
-      </p:sp>
-      <p:sp>
-        <p:nvSpPr>
-          <p:cNvPr id="5" name="TextBox 4"/>
-          <p:cNvSpPr txBox="1"/>
-          <p:nvPr/>
-        </p:nvSpPr>
-        <p:spPr>
-          <a:xfrm>
             <a:off x="640080" y="566928"/>
             <a:ext cx="10058400" cy="530352"/>
           </a:xfrm>
@@ -16337,7 +15659,7 @@
       </p:sp>
       <p:sp>
         <p:nvSpPr>
-          <p:cNvPr id="6" name="Rectangle 5"/>
+          <p:cNvPr id="5" name="Rectangle 4"/>
           <p:cNvSpPr/>
           <p:nvPr/>
         </p:nvSpPr>
@@ -16386,7 +15708,7 @@
       </p:sp>
       <p:sp>
         <p:nvSpPr>
-          <p:cNvPr id="7" name="Rectangle 6"/>
+          <p:cNvPr id="6" name="Rectangle 5"/>
           <p:cNvSpPr/>
           <p:nvPr/>
         </p:nvSpPr>
@@ -16435,7 +15757,7 @@
       </p:sp>
       <p:sp>
         <p:nvSpPr>
-          <p:cNvPr id="8" name="TextBox 7"/>
+          <p:cNvPr id="7" name="TextBox 6"/>
           <p:cNvSpPr txBox="1"/>
           <p:nvPr/>
         </p:nvSpPr>
@@ -16477,14 +15799,105 @@
       </p:sp>
       <p:sp>
         <p:nvSpPr>
-          <p:cNvPr id="9" name="Rectangle 8"/>
+          <p:cNvPr id="8" name="Rectangle 7"/>
           <p:cNvSpPr/>
           <p:nvPr/>
         </p:nvSpPr>
         <p:spPr>
           <a:xfrm>
-            <a:off x="640080" y="1325880"/>
-            <a:ext cx="10908792" cy="1793366"/>
+            <a:off x="640080" y="1399032"/>
+            <a:ext cx="73152" cy="1188720"/>
+          </a:xfrm>
+          <a:prstGeom prst="rect">
+            <a:avLst/>
+          </a:prstGeom>
+          <a:solidFill>
+            <a:srgbClr val="C6F432"/>
+          </a:solidFill>
+          <a:ln>
+            <a:solidFill>
+              <a:srgbClr val="C6F432"/>
+            </a:solidFill>
+          </a:ln>
+        </p:spPr>
+        <p:style>
+          <a:lnRef idx="1">
+            <a:schemeClr val="accent1"/>
+          </a:lnRef>
+          <a:fillRef idx="3">
+            <a:schemeClr val="accent1"/>
+          </a:fillRef>
+          <a:effectRef idx="2">
+            <a:schemeClr val="accent1"/>
+          </a:effectRef>
+          <a:fontRef idx="minor">
+            <a:schemeClr val="lt1"/>
+          </a:fontRef>
+        </p:style>
+        <p:txBody>
+          <a:bodyPr rtlCol="0" anchor="ctr"/>
+          <a:lstStyle/>
+          <a:p>
+            <a:pPr algn="ctr">
+              <a:defRPr>
+                <a:latin typeface="Inter"/>
+              </a:defRPr>
+            </a:pPr>
+          </a:p>
+        </p:txBody>
+      </p:sp>
+      <p:sp>
+        <p:nvSpPr>
+          <p:cNvPr id="9" name="TextBox 8"/>
+          <p:cNvSpPr txBox="1"/>
+          <p:nvPr/>
+        </p:nvSpPr>
+        <p:spPr>
+          <a:xfrm>
+            <a:off x="896112" y="1371600"/>
+            <a:ext cx="10588752" cy="774313"/>
+          </a:xfrm>
+          <a:prstGeom prst="rect">
+            <a:avLst/>
+          </a:prstGeom>
+          <a:noFill/>
+        </p:spPr>
+        <p:txBody>
+          <a:bodyPr wrap="none" lIns="9144" rIns="9144" tIns="9144" bIns="9144" anchor="t">
+            <a:spAutoFit/>
+          </a:bodyPr>
+          <a:lstStyle/>
+          <a:p>
+            <a:pPr algn="l">
+              <a:spcAft>
+                <a:spcPts val="0"/>
+              </a:spcAft>
+              <a:defRPr sz="1800" b="1">
+                <a:solidFill>
+                  <a:srgbClr val="0D1117"/>
+                </a:solidFill>
+                <a:latin typeface="Inter"/>
+              </a:defRPr>
+            </a:pPr>
+            <a:r>
+              <a:rPr>
+                <a:latin typeface="Inter"/>
+              </a:rPr>
+              <a:t>Three compatible attribution views compared</a:t>
+            </a:r>
+          </a:p>
+        </p:txBody>
+      </p:sp>
+      <p:sp>
+        <p:nvSpPr>
+          <p:cNvPr id="10" name="Rectangle 9"/>
+          <p:cNvSpPr/>
+          <p:nvPr/>
+        </p:nvSpPr>
+        <p:spPr>
+          <a:xfrm>
+            <a:off x="640080" y="2770632"/>
+            <a:ext cx="10908792" cy="1251585"/>
           </a:xfrm>
           <a:prstGeom prst="rect">
             <a:avLst/>
@@ -16526,14 +15939,14 @@
       </p:sp>
       <p:sp>
         <p:nvSpPr>
-          <p:cNvPr id="10" name="Rectangle 9"/>
+          <p:cNvPr id="11" name="Rectangle 10"/>
           <p:cNvSpPr/>
           <p:nvPr/>
         </p:nvSpPr>
         <p:spPr>
           <a:xfrm>
-            <a:off x="640080" y="1325880"/>
-            <a:ext cx="54864" cy="1793366"/>
+            <a:off x="640080" y="2770632"/>
+            <a:ext cx="54864" cy="1251585"/>
           </a:xfrm>
           <a:prstGeom prst="rect">
             <a:avLst/>
@@ -16575,13 +15988,13 @@
       </p:sp>
       <p:sp>
         <p:nvSpPr>
-          <p:cNvPr id="11" name="TextBox 10"/>
+          <p:cNvPr id="12" name="TextBox 11"/>
           <p:cNvSpPr txBox="1"/>
           <p:nvPr/>
         </p:nvSpPr>
         <p:spPr>
           <a:xfrm>
-            <a:off x="804671" y="1435607"/>
+            <a:off x="804671" y="2880360"/>
             <a:ext cx="10616184" cy="228600"/>
           </a:xfrm>
           <a:prstGeom prst="rect">
@@ -16617,14 +16030,14 @@
       </p:sp>
       <p:sp>
         <p:nvSpPr>
-          <p:cNvPr id="12" name="TextBox 11"/>
+          <p:cNvPr id="13" name="TextBox 12"/>
           <p:cNvSpPr txBox="1"/>
           <p:nvPr/>
         </p:nvSpPr>
         <p:spPr>
           <a:xfrm>
-            <a:off x="804671" y="1719072"/>
-            <a:ext cx="10616184" cy="1308734"/>
+            <a:off x="804671" y="3163824"/>
+            <a:ext cx="10616184" cy="766952"/>
           </a:xfrm>
           <a:prstGeom prst="rect">
             <a:avLst/>
@@ -16659,14 +16072,14 @@
       </p:sp>
       <p:sp>
         <p:nvSpPr>
-          <p:cNvPr id="13" name="Rectangle 12"/>
+          <p:cNvPr id="14" name="Rectangle 13"/>
           <p:cNvSpPr/>
           <p:nvPr/>
         </p:nvSpPr>
         <p:spPr>
           <a:xfrm>
-            <a:off x="640080" y="3228975"/>
-            <a:ext cx="2644902" cy="2988945"/>
+            <a:off x="640080" y="4131945"/>
+            <a:ext cx="2644902" cy="2085975"/>
           </a:xfrm>
           <a:prstGeom prst="rect">
             <a:avLst/>
@@ -16708,13 +16121,13 @@
       </p:sp>
       <p:sp>
         <p:nvSpPr>
-          <p:cNvPr id="14" name="Rectangle 13"/>
+          <p:cNvPr id="15" name="Rectangle 14"/>
           <p:cNvSpPr/>
           <p:nvPr/>
         </p:nvSpPr>
         <p:spPr>
           <a:xfrm>
-            <a:off x="640080" y="3228975"/>
+            <a:off x="640080" y="4131945"/>
             <a:ext cx="2644902" cy="45720"/>
           </a:xfrm>
           <a:prstGeom prst="rect">
@@ -16757,13 +16170,13 @@
       </p:sp>
       <p:sp>
         <p:nvSpPr>
-          <p:cNvPr id="15" name="TextBox 14"/>
+          <p:cNvPr id="16" name="TextBox 15"/>
           <p:cNvSpPr txBox="1"/>
           <p:nvPr/>
         </p:nvSpPr>
         <p:spPr>
           <a:xfrm>
-            <a:off x="749808" y="3356991"/>
+            <a:off x="749808" y="4259961"/>
             <a:ext cx="2425446" cy="201168"/>
           </a:xfrm>
           <a:prstGeom prst="rect">
@@ -16799,13 +16212,13 @@
       </p:sp>
       <p:sp>
         <p:nvSpPr>
-          <p:cNvPr id="16" name="TextBox 15"/>
+          <p:cNvPr id="17" name="TextBox 16"/>
           <p:cNvSpPr txBox="1"/>
           <p:nvPr/>
         </p:nvSpPr>
         <p:spPr>
           <a:xfrm>
-            <a:off x="749808" y="3613023"/>
+            <a:off x="749808" y="4515993"/>
             <a:ext cx="2425446" cy="475488"/>
           </a:xfrm>
           <a:prstGeom prst="rect">
@@ -16841,7 +16254,7 @@
       </p:sp>
       <p:sp>
         <p:nvSpPr>
-          <p:cNvPr id="17" name="TextBox 16"/>
+          <p:cNvPr id="18" name="TextBox 17"/>
           <p:cNvSpPr txBox="1"/>
           <p:nvPr/>
         </p:nvSpPr>
@@ -16883,14 +16296,14 @@
       </p:sp>
       <p:sp>
         <p:nvSpPr>
-          <p:cNvPr id="18" name="Rectangle 17"/>
+          <p:cNvPr id="19" name="Rectangle 18"/>
           <p:cNvSpPr/>
           <p:nvPr/>
         </p:nvSpPr>
         <p:spPr>
           <a:xfrm>
-            <a:off x="3394710" y="3228975"/>
-            <a:ext cx="2644902" cy="2988945"/>
+            <a:off x="3394710" y="4131945"/>
+            <a:ext cx="2644902" cy="2085975"/>
           </a:xfrm>
           <a:prstGeom prst="rect">
             <a:avLst/>
@@ -16932,13 +16345,13 @@
       </p:sp>
       <p:sp>
         <p:nvSpPr>
-          <p:cNvPr id="19" name="Rectangle 18"/>
+          <p:cNvPr id="20" name="Rectangle 19"/>
           <p:cNvSpPr/>
           <p:nvPr/>
         </p:nvSpPr>
         <p:spPr>
           <a:xfrm>
-            <a:off x="3394710" y="3228975"/>
+            <a:off x="3394710" y="4131945"/>
             <a:ext cx="2644902" cy="45720"/>
           </a:xfrm>
           <a:prstGeom prst="rect">
@@ -16981,13 +16394,13 @@
       </p:sp>
       <p:sp>
         <p:nvSpPr>
-          <p:cNvPr id="20" name="TextBox 19"/>
+          <p:cNvPr id="21" name="TextBox 20"/>
           <p:cNvSpPr txBox="1"/>
           <p:nvPr/>
         </p:nvSpPr>
         <p:spPr>
           <a:xfrm>
-            <a:off x="3504438" y="3356991"/>
+            <a:off x="3504438" y="4259961"/>
             <a:ext cx="2425446" cy="201168"/>
           </a:xfrm>
           <a:prstGeom prst="rect">
@@ -17023,13 +16436,13 @@
       </p:sp>
       <p:sp>
         <p:nvSpPr>
-          <p:cNvPr id="21" name="TextBox 20"/>
+          <p:cNvPr id="22" name="TextBox 21"/>
           <p:cNvSpPr txBox="1"/>
           <p:nvPr/>
         </p:nvSpPr>
         <p:spPr>
           <a:xfrm>
-            <a:off x="3504438" y="3613023"/>
+            <a:off x="3504438" y="4515993"/>
             <a:ext cx="2425446" cy="475488"/>
           </a:xfrm>
           <a:prstGeom prst="rect">
@@ -17065,7 +16478,7 @@
       </p:sp>
       <p:sp>
         <p:nvSpPr>
-          <p:cNvPr id="22" name="TextBox 21"/>
+          <p:cNvPr id="23" name="TextBox 22"/>
           <p:cNvSpPr txBox="1"/>
           <p:nvPr/>
         </p:nvSpPr>
@@ -17107,14 +16520,14 @@
       </p:sp>
       <p:sp>
         <p:nvSpPr>
-          <p:cNvPr id="23" name="Rectangle 22"/>
+          <p:cNvPr id="24" name="Rectangle 23"/>
           <p:cNvSpPr/>
           <p:nvPr/>
         </p:nvSpPr>
         <p:spPr>
           <a:xfrm>
-            <a:off x="6149340" y="3228975"/>
-            <a:ext cx="2644902" cy="2988945"/>
+            <a:off x="6149340" y="4131945"/>
+            <a:ext cx="2644902" cy="2085975"/>
           </a:xfrm>
           <a:prstGeom prst="rect">
             <a:avLst/>
@@ -17156,13 +16569,13 @@
       </p:sp>
       <p:sp>
         <p:nvSpPr>
-          <p:cNvPr id="24" name="Rectangle 23"/>
+          <p:cNvPr id="25" name="Rectangle 24"/>
           <p:cNvSpPr/>
           <p:nvPr/>
         </p:nvSpPr>
         <p:spPr>
           <a:xfrm>
-            <a:off x="6149340" y="3228975"/>
+            <a:off x="6149340" y="4131945"/>
             <a:ext cx="2644902" cy="45720"/>
           </a:xfrm>
           <a:prstGeom prst="rect">
@@ -17205,13 +16618,13 @@
       </p:sp>
       <p:sp>
         <p:nvSpPr>
-          <p:cNvPr id="25" name="TextBox 24"/>
+          <p:cNvPr id="26" name="TextBox 25"/>
           <p:cNvSpPr txBox="1"/>
           <p:nvPr/>
         </p:nvSpPr>
         <p:spPr>
           <a:xfrm>
-            <a:off x="6259068" y="3356991"/>
+            <a:off x="6259068" y="4259961"/>
             <a:ext cx="2425446" cy="201168"/>
           </a:xfrm>
           <a:prstGeom prst="rect">
@@ -17247,13 +16660,13 @@
       </p:sp>
       <p:sp>
         <p:nvSpPr>
-          <p:cNvPr id="26" name="TextBox 25"/>
+          <p:cNvPr id="27" name="TextBox 26"/>
           <p:cNvSpPr txBox="1"/>
           <p:nvPr/>
         </p:nvSpPr>
         <p:spPr>
           <a:xfrm>
-            <a:off x="6259068" y="3613023"/>
+            <a:off x="6259068" y="4515993"/>
             <a:ext cx="2425446" cy="475488"/>
           </a:xfrm>
           <a:prstGeom prst="rect">
@@ -17289,7 +16702,7 @@
       </p:sp>
       <p:sp>
         <p:nvSpPr>
-          <p:cNvPr id="27" name="TextBox 26"/>
+          <p:cNvPr id="28" name="TextBox 27"/>
           <p:cNvSpPr txBox="1"/>
           <p:nvPr/>
         </p:nvSpPr>
@@ -17331,14 +16744,14 @@
       </p:sp>
       <p:sp>
         <p:nvSpPr>
-          <p:cNvPr id="28" name="Rectangle 27"/>
+          <p:cNvPr id="29" name="Rectangle 28"/>
           <p:cNvSpPr/>
           <p:nvPr/>
         </p:nvSpPr>
         <p:spPr>
           <a:xfrm>
-            <a:off x="8903970" y="3228975"/>
-            <a:ext cx="2644902" cy="2988945"/>
+            <a:off x="8903970" y="4131945"/>
+            <a:ext cx="2644902" cy="2085975"/>
           </a:xfrm>
           <a:prstGeom prst="rect">
             <a:avLst/>
@@ -17380,13 +16793,13 @@
       </p:sp>
       <p:sp>
         <p:nvSpPr>
-          <p:cNvPr id="29" name="Rectangle 28"/>
+          <p:cNvPr id="30" name="Rectangle 29"/>
           <p:cNvSpPr/>
           <p:nvPr/>
         </p:nvSpPr>
         <p:spPr>
           <a:xfrm>
-            <a:off x="8903970" y="3228975"/>
+            <a:off x="8903970" y="4131945"/>
             <a:ext cx="2644902" cy="45720"/>
           </a:xfrm>
           <a:prstGeom prst="rect">
@@ -17429,13 +16842,13 @@
       </p:sp>
       <p:sp>
         <p:nvSpPr>
-          <p:cNvPr id="30" name="TextBox 29"/>
+          <p:cNvPr id="31" name="TextBox 30"/>
           <p:cNvSpPr txBox="1"/>
           <p:nvPr/>
         </p:nvSpPr>
         <p:spPr>
           <a:xfrm>
-            <a:off x="9013698" y="3356991"/>
+            <a:off x="9013698" y="4259961"/>
             <a:ext cx="2425446" cy="201168"/>
           </a:xfrm>
           <a:prstGeom prst="rect">
@@ -17471,13 +16884,13 @@
       </p:sp>
       <p:sp>
         <p:nvSpPr>
-          <p:cNvPr id="31" name="TextBox 30"/>
+          <p:cNvPr id="32" name="TextBox 31"/>
           <p:cNvSpPr txBox="1"/>
           <p:nvPr/>
         </p:nvSpPr>
         <p:spPr>
           <a:xfrm>
-            <a:off x="9013698" y="3613023"/>
+            <a:off x="9013698" y="4515993"/>
             <a:ext cx="2425446" cy="475488"/>
           </a:xfrm>
           <a:prstGeom prst="rect">
@@ -17513,7 +16926,7 @@
       </p:sp>
       <p:sp>
         <p:nvSpPr>
-          <p:cNvPr id="32" name="TextBox 31"/>
+          <p:cNvPr id="33" name="TextBox 32"/>
           <p:cNvSpPr txBox="1"/>
           <p:nvPr/>
         </p:nvSpPr>
@@ -17555,7 +16968,7 @@
       </p:sp>
       <p:sp>
         <p:nvSpPr>
-          <p:cNvPr id="33" name="Rectangle 32"/>
+          <p:cNvPr id="34" name="Rectangle 33"/>
           <p:cNvSpPr/>
           <p:nvPr/>
         </p:nvSpPr>
@@ -17604,7 +17017,7 @@
       </p:sp>
       <p:sp>
         <p:nvSpPr>
-          <p:cNvPr id="34" name="TextBox 33"/>
+          <p:cNvPr id="35" name="TextBox 34"/>
           <p:cNvSpPr txBox="1"/>
           <p:nvPr/>
         </p:nvSpPr>
@@ -17646,7 +17059,7 @@
       </p:sp>
       <p:sp>
         <p:nvSpPr>
-          <p:cNvPr id="35" name="TextBox 34"/>
+          <p:cNvPr id="36" name="TextBox 35"/>
           <p:cNvSpPr txBox="1"/>
           <p:nvPr/>
         </p:nvSpPr>
@@ -17688,7 +17101,7 @@
       </p:sp>
       <p:sp>
         <p:nvSpPr>
-          <p:cNvPr id="36" name="TextBox 35"/>
+          <p:cNvPr id="37" name="TextBox 36"/>
           <p:cNvSpPr txBox="1"/>
           <p:nvPr/>
         </p:nvSpPr>
@@ -17804,7 +17217,7 @@
         <p:spPr>
           <a:xfrm>
             <a:off x="640080" y="329184"/>
-            <a:ext cx="5303520" cy="182880"/>
+            <a:ext cx="9875520" cy="182880"/>
           </a:xfrm>
           <a:prstGeom prst="rect">
             <a:avLst/>
@@ -17845,48 +17258,6 @@
         </p:nvSpPr>
         <p:spPr>
           <a:xfrm>
-            <a:off x="5897880" y="310896"/>
-            <a:ext cx="4800600" cy="256032"/>
-          </a:xfrm>
-          <a:prstGeom prst="rect">
-            <a:avLst/>
-          </a:prstGeom>
-          <a:noFill/>
-        </p:spPr>
-        <p:txBody>
-          <a:bodyPr wrap="none" lIns="9144" rIns="9144" tIns="9144" bIns="9144" anchor="t">
-            <a:spAutoFit/>
-          </a:bodyPr>
-          <a:lstStyle/>
-          <a:p>
-            <a:pPr algn="r">
-              <a:spcAft>
-                <a:spcPts val="0"/>
-              </a:spcAft>
-              <a:defRPr sz="680" b="1">
-                <a:solidFill>
-                  <a:srgbClr val="4F6B00"/>
-                </a:solidFill>
-                <a:latin typeface="Inter"/>
-              </a:defRPr>
-            </a:pPr>
-            <a:r>
-              <a:rPr>
-                <a:latin typeface="Inter"/>
-              </a:rPr>
-              <a:t>Illustrative, Gradient Maintained — demo data, not the client's holdings or managers</a:t>
-            </a:r>
-          </a:p>
-        </p:txBody>
-      </p:sp>
-      <p:sp>
-        <p:nvSpPr>
-          <p:cNvPr id="5" name="TextBox 4"/>
-          <p:cNvSpPr txBox="1"/>
-          <p:nvPr/>
-        </p:nvSpPr>
-        <p:spPr>
-          <a:xfrm>
             <a:off x="640080" y="566928"/>
             <a:ext cx="10058400" cy="530352"/>
           </a:xfrm>
@@ -17923,7 +17294,7 @@
       </p:sp>
       <p:sp>
         <p:nvSpPr>
-          <p:cNvPr id="6" name="Rectangle 5"/>
+          <p:cNvPr id="5" name="Rectangle 4"/>
           <p:cNvSpPr/>
           <p:nvPr/>
         </p:nvSpPr>
@@ -17972,7 +17343,7 @@
       </p:sp>
       <p:sp>
         <p:nvSpPr>
-          <p:cNvPr id="7" name="Rectangle 6"/>
+          <p:cNvPr id="6" name="Rectangle 5"/>
           <p:cNvSpPr/>
           <p:nvPr/>
         </p:nvSpPr>
@@ -18021,7 +17392,7 @@
       </p:sp>
       <p:sp>
         <p:nvSpPr>
-          <p:cNvPr id="8" name="TextBox 7"/>
+          <p:cNvPr id="7" name="TextBox 6"/>
           <p:cNvSpPr txBox="1"/>
           <p:nvPr/>
         </p:nvSpPr>
@@ -18063,7 +17434,7 @@
       </p:sp>
       <p:graphicFrame>
         <p:nvGraphicFramePr>
-          <p:cNvPr id="9" name="Table 8"/>
+          <p:cNvPr id="8" name="Table 7"/>
           <p:cNvGraphicFramePr>
             <a:graphicFrameLocks noGrp="1"/>
           </p:cNvGraphicFramePr>
@@ -18081,14 +17452,10 @@
               </a:tblPr>
               <a:tblGrid>
                 <a:gridCol w="2011680"/>
-                <a:gridCol w="1112139"/>
-                <a:gridCol w="1112139"/>
-                <a:gridCol w="1112139"/>
-                <a:gridCol w="1112139"/>
-                <a:gridCol w="1112139"/>
-                <a:gridCol w="1112139"/>
-                <a:gridCol w="1112139"/>
-                <a:gridCol w="1112139"/>
+                <a:gridCol w="2224278"/>
+                <a:gridCol w="2224278"/>
+                <a:gridCol w="2224278"/>
+                <a:gridCol w="2224278"/>
               </a:tblGrid>
               <a:tr h="670124">
                 <a:tc>
@@ -18162,7 +17529,7 @@
                         <a:rPr>
                           <a:latin typeface="Inter"/>
                         </a:rPr>
-                        <a:t>Basis</a:t>
+                        <a:t>Source</a:t>
                       </a:r>
                     </a:p>
                   </a:txBody>
@@ -18189,7 +17556,1462 @@
                         <a:rPr>
                           <a:latin typeface="Inter"/>
                         </a:rPr>
-                        <a:t>Tool / view</a:t>
+                        <a:t>As of</a:t>
+                      </a:r>
+                    </a:p>
+                  </a:txBody>
+                  <a:tcPr marL="54864" marR="54864" marT="27432" marB="27432" anchor="ctr">
+                    <a:solidFill>
+                      <a:srgbClr val="0D1117"/>
+                    </a:solidFill>
+                  </a:tcPr>
+                </a:tc>
+                <a:tc>
+                  <a:txBody>
+                    <a:bodyPr/>
+                    <a:lstStyle/>
+                    <a:p>
+                      <a:pPr>
+                        <a:defRPr sz="750" b="1">
+                          <a:solidFill>
+                            <a:srgbClr val="FFFFFF"/>
+                          </a:solidFill>
+                          <a:latin typeface="Inter"/>
+                        </a:defRPr>
+                      </a:pPr>
+                      <a:r>
+                        <a:rPr>
+                          <a:latin typeface="Inter"/>
+                        </a:rPr>
+                        <a:t>Check</a:t>
+                      </a:r>
+                    </a:p>
+                  </a:txBody>
+                  <a:tcPr marL="54864" marR="54864" marT="27432" marB="27432" anchor="ctr">
+                    <a:solidFill>
+                      <a:srgbClr val="0D1117"/>
+                    </a:solidFill>
+                  </a:tcPr>
+                </a:tc>
+              </a:tr>
+              <a:tr h="670124">
+                <a:tc>
+                  <a:txBody>
+                    <a:bodyPr/>
+                    <a:lstStyle/>
+                    <a:p>
+                      <a:pPr>
+                        <a:defRPr sz="720" b="1">
+                          <a:solidFill>
+                            <a:srgbClr val="0D1117"/>
+                          </a:solidFill>
+                          <a:latin typeface="Inter"/>
+                        </a:defRPr>
+                      </a:pPr>
+                      <a:r>
+                        <a:rPr>
+                          <a:latin typeface="Inter"/>
+                        </a:rPr>
+                        <a:t>S1</a:t>
+                      </a:r>
+                    </a:p>
+                  </a:txBody>
+                  <a:tcPr marL="54864" marR="54864" marT="27432" marB="27432" anchor="ctr">
+                    <a:solidFill>
+                      <a:srgbClr val="FFFFFF"/>
+                    </a:solidFill>
+                  </a:tcPr>
+                </a:tc>
+                <a:tc>
+                  <a:txBody>
+                    <a:bodyPr/>
+                    <a:lstStyle/>
+                    <a:p>
+                      <a:pPr>
+                        <a:defRPr sz="720" b="0">
+                          <a:solidFill>
+                            <a:srgbClr val="0D1117"/>
+                          </a:solidFill>
+                          <a:latin typeface="Inter"/>
+                        </a:defRPr>
+                      </a:pPr>
+                      <a:r>
+                        <a:rPr>
+                          <a:latin typeface="Inter"/>
+                        </a:rPr>
+                        <a:t>Capability gate</a:t>
+                      </a:r>
+                    </a:p>
+                  </a:txBody>
+                  <a:tcPr marL="54864" marR="54864" marT="27432" marB="27432" anchor="ctr">
+                    <a:solidFill>
+                      <a:srgbClr val="FFFFFF"/>
+                    </a:solidFill>
+                  </a:tcPr>
+                </a:tc>
+                <a:tc>
+                  <a:txBody>
+                    <a:bodyPr/>
+                    <a:lstStyle/>
+                    <a:p>
+                      <a:pPr>
+                        <a:defRPr sz="720" b="0">
+                          <a:solidFill>
+                            <a:srgbClr val="0D1117"/>
+                          </a:solidFill>
+                          <a:latin typeface="Inter"/>
+                        </a:defRPr>
+                      </a:pPr>
+                      <a:r>
+                        <a:rPr>
+                          <a:latin typeface="Inter"/>
+                        </a:rPr>
+                        <a:t>get_gradient_capabilities</a:t>
+                      </a:r>
+                    </a:p>
+                  </a:txBody>
+                  <a:tcPr marL="54864" marR="54864" marT="27432" marB="27432" anchor="ctr">
+                    <a:solidFill>
+                      <a:srgbClr val="FFFFFF"/>
+                    </a:solidFill>
+                  </a:tcPr>
+                </a:tc>
+                <a:tc>
+                  <a:txBody>
+                    <a:bodyPr/>
+                    <a:lstStyle/>
+                    <a:p>
+                      <a:pPr>
+                        <a:defRPr sz="720" b="0">
+                          <a:solidFill>
+                            <a:srgbClr val="0D1117"/>
+                          </a:solidFill>
+                          <a:latin typeface="Inter"/>
+                        </a:defRPr>
+                      </a:pPr>
+                      <a:r>
+                        <a:rPr>
+                          <a:latin typeface="Inter"/>
+                        </a:rPr>
+                        <a:t>2026-06-30</a:t>
+                      </a:r>
+                    </a:p>
+                  </a:txBody>
+                  <a:tcPr marL="54864" marR="54864" marT="27432" marB="27432" anchor="ctr">
+                    <a:solidFill>
+                      <a:srgbClr val="FFFFFF"/>
+                    </a:solidFill>
+                  </a:tcPr>
+                </a:tc>
+                <a:tc>
+                  <a:txBody>
+                    <a:bodyPr/>
+                    <a:lstStyle/>
+                    <a:p>
+                      <a:pPr>
+                        <a:defRPr sz="720" b="1">
+                          <a:solidFill>
+                            <a:srgbClr val="C6F432"/>
+                          </a:solidFill>
+                          <a:latin typeface="Inter"/>
+                        </a:defRPr>
+                      </a:pPr>
+                      <a:r>
+                        <a:rPr>
+                          <a:latin typeface="Inter"/>
+                        </a:rPr>
+                        <a:t>● Passed</a:t>
+                      </a:r>
+                    </a:p>
+                  </a:txBody>
+                  <a:tcPr marL="54864" marR="54864" marT="27432" marB="27432" anchor="ctr">
+                    <a:solidFill>
+                      <a:srgbClr val="F5F7F9"/>
+                    </a:solidFill>
+                  </a:tcPr>
+                </a:tc>
+              </a:tr>
+              <a:tr h="670124">
+                <a:tc>
+                  <a:txBody>
+                    <a:bodyPr/>
+                    <a:lstStyle/>
+                    <a:p>
+                      <a:pPr>
+                        <a:defRPr sz="720" b="1">
+                          <a:solidFill>
+                            <a:srgbClr val="0D1117"/>
+                          </a:solidFill>
+                          <a:latin typeface="Inter"/>
+                        </a:defRPr>
+                      </a:pPr>
+                      <a:r>
+                        <a:rPr>
+                          <a:latin typeface="Inter"/>
+                        </a:rPr>
+                        <a:t>S2</a:t>
+                      </a:r>
+                    </a:p>
+                  </a:txBody>
+                  <a:tcPr marL="54864" marR="54864" marT="27432" marB="27432" anchor="ctr">
+                    <a:solidFill>
+                      <a:srgbClr val="F5F7F9"/>
+                    </a:solidFill>
+                  </a:tcPr>
+                </a:tc>
+                <a:tc>
+                  <a:txBody>
+                    <a:bodyPr/>
+                    <a:lstStyle/>
+                    <a:p>
+                      <a:pPr>
+                        <a:defRPr sz="720" b="0">
+                          <a:solidFill>
+                            <a:srgbClr val="0D1117"/>
+                          </a:solidFill>
+                          <a:latin typeface="Inter"/>
+                        </a:defRPr>
+                      </a:pPr>
+                      <a:r>
+                        <a:rPr>
+                          <a:latin typeface="Inter"/>
+                        </a:rPr>
+                        <a:t>Historical attribution</a:t>
+                      </a:r>
+                    </a:p>
+                  </a:txBody>
+                  <a:tcPr marL="54864" marR="54864" marT="27432" marB="27432" anchor="ctr">
+                    <a:solidFill>
+                      <a:srgbClr val="F5F7F9"/>
+                    </a:solidFill>
+                  </a:tcPr>
+                </a:tc>
+                <a:tc>
+                  <a:txBody>
+                    <a:bodyPr/>
+                    <a:lstStyle/>
+                    <a:p>
+                      <a:pPr>
+                        <a:defRPr sz="720" b="0">
+                          <a:solidFill>
+                            <a:srgbClr val="0D1117"/>
+                          </a:solidFill>
+                          <a:latin typeface="Inter"/>
+                        </a:defRPr>
+                      </a:pPr>
+                      <a:r>
+                        <a:rPr>
+                          <a:latin typeface="Inter"/>
+                        </a:rPr>
+                        <a:t>get_portfolio_attribution</a:t>
+                      </a:r>
+                    </a:p>
+                  </a:txBody>
+                  <a:tcPr marL="54864" marR="54864" marT="27432" marB="27432" anchor="ctr">
+                    <a:solidFill>
+                      <a:srgbClr val="F5F7F9"/>
+                    </a:solidFill>
+                  </a:tcPr>
+                </a:tc>
+                <a:tc>
+                  <a:txBody>
+                    <a:bodyPr/>
+                    <a:lstStyle/>
+                    <a:p>
+                      <a:pPr>
+                        <a:defRPr sz="720" b="0">
+                          <a:solidFill>
+                            <a:srgbClr val="0D1117"/>
+                          </a:solidFill>
+                          <a:latin typeface="Inter"/>
+                        </a:defRPr>
+                      </a:pPr>
+                      <a:r>
+                        <a:rPr>
+                          <a:latin typeface="Inter"/>
+                        </a:rPr>
+                        <a:t>2026-06-30</a:t>
+                      </a:r>
+                    </a:p>
+                  </a:txBody>
+                  <a:tcPr marL="54864" marR="54864" marT="27432" marB="27432" anchor="ctr">
+                    <a:solidFill>
+                      <a:srgbClr val="F5F7F9"/>
+                    </a:solidFill>
+                  </a:tcPr>
+                </a:tc>
+                <a:tc>
+                  <a:txBody>
+                    <a:bodyPr/>
+                    <a:lstStyle/>
+                    <a:p>
+                      <a:pPr>
+                        <a:defRPr sz="720" b="1">
+                          <a:solidFill>
+                            <a:srgbClr val="C6F432"/>
+                          </a:solidFill>
+                          <a:latin typeface="Inter"/>
+                        </a:defRPr>
+                      </a:pPr>
+                      <a:r>
+                        <a:rPr>
+                          <a:latin typeface="Inter"/>
+                        </a:rPr>
+                        <a:t>● Passed</a:t>
+                      </a:r>
+                    </a:p>
+                  </a:txBody>
+                  <a:tcPr marL="54864" marR="54864" marT="27432" marB="27432" anchor="ctr">
+                    <a:solidFill>
+                      <a:srgbClr val="F5F7F9"/>
+                    </a:solidFill>
+                  </a:tcPr>
+                </a:tc>
+              </a:tr>
+              <a:tr h="670124">
+                <a:tc>
+                  <a:txBody>
+                    <a:bodyPr/>
+                    <a:lstStyle/>
+                    <a:p>
+                      <a:pPr>
+                        <a:defRPr sz="720" b="1">
+                          <a:solidFill>
+                            <a:srgbClr val="0D1117"/>
+                          </a:solidFill>
+                          <a:latin typeface="Inter"/>
+                        </a:defRPr>
+                      </a:pPr>
+                      <a:r>
+                        <a:rPr>
+                          <a:latin typeface="Inter"/>
+                        </a:rPr>
+                        <a:t>S3</a:t>
+                      </a:r>
+                    </a:p>
+                  </a:txBody>
+                  <a:tcPr marL="54864" marR="54864" marT="27432" marB="27432" anchor="ctr">
+                    <a:solidFill>
+                      <a:srgbClr val="FFFFFF"/>
+                    </a:solidFill>
+                  </a:tcPr>
+                </a:tc>
+                <a:tc>
+                  <a:txBody>
+                    <a:bodyPr/>
+                    <a:lstStyle/>
+                    <a:p>
+                      <a:pPr>
+                        <a:defRPr sz="720" b="0">
+                          <a:solidFill>
+                            <a:srgbClr val="0D1117"/>
+                          </a:solidFill>
+                          <a:latin typeface="Inter"/>
+                        </a:defRPr>
+                      </a:pPr>
+                      <a:r>
+                        <a:rPr>
+                          <a:latin typeface="Inter"/>
+                        </a:rPr>
+                        <a:t>Ex ante attribution</a:t>
+                      </a:r>
+                    </a:p>
+                  </a:txBody>
+                  <a:tcPr marL="54864" marR="54864" marT="27432" marB="27432" anchor="ctr">
+                    <a:solidFill>
+                      <a:srgbClr val="FFFFFF"/>
+                    </a:solidFill>
+                  </a:tcPr>
+                </a:tc>
+                <a:tc>
+                  <a:txBody>
+                    <a:bodyPr/>
+                    <a:lstStyle/>
+                    <a:p>
+                      <a:pPr>
+                        <a:defRPr sz="720" b="0">
+                          <a:solidFill>
+                            <a:srgbClr val="0D1117"/>
+                          </a:solidFill>
+                          <a:latin typeface="Inter"/>
+                        </a:defRPr>
+                      </a:pPr>
+                      <a:r>
+                        <a:rPr>
+                          <a:latin typeface="Inter"/>
+                        </a:rPr>
+                        <a:t>get_portfolio_ex_ante_attribution</a:t>
+                      </a:r>
+                    </a:p>
+                  </a:txBody>
+                  <a:tcPr marL="54864" marR="54864" marT="27432" marB="27432" anchor="ctr">
+                    <a:solidFill>
+                      <a:srgbClr val="FFFFFF"/>
+                    </a:solidFill>
+                  </a:tcPr>
+                </a:tc>
+                <a:tc>
+                  <a:txBody>
+                    <a:bodyPr/>
+                    <a:lstStyle/>
+                    <a:p>
+                      <a:pPr>
+                        <a:defRPr sz="720" b="0">
+                          <a:solidFill>
+                            <a:srgbClr val="0D1117"/>
+                          </a:solidFill>
+                          <a:latin typeface="Inter"/>
+                        </a:defRPr>
+                      </a:pPr>
+                      <a:r>
+                        <a:rPr>
+                          <a:latin typeface="Inter"/>
+                        </a:rPr>
+                        <a:t>2026-06-30</a:t>
+                      </a:r>
+                    </a:p>
+                  </a:txBody>
+                  <a:tcPr marL="54864" marR="54864" marT="27432" marB="27432" anchor="ctr">
+                    <a:solidFill>
+                      <a:srgbClr val="FFFFFF"/>
+                    </a:solidFill>
+                  </a:tcPr>
+                </a:tc>
+                <a:tc>
+                  <a:txBody>
+                    <a:bodyPr/>
+                    <a:lstStyle/>
+                    <a:p>
+                      <a:pPr>
+                        <a:defRPr sz="720" b="1">
+                          <a:solidFill>
+                            <a:srgbClr val="C6F432"/>
+                          </a:solidFill>
+                          <a:latin typeface="Inter"/>
+                        </a:defRPr>
+                      </a:pPr>
+                      <a:r>
+                        <a:rPr>
+                          <a:latin typeface="Inter"/>
+                        </a:rPr>
+                        <a:t>● Passed</a:t>
+                      </a:r>
+                    </a:p>
+                  </a:txBody>
+                  <a:tcPr marL="54864" marR="54864" marT="27432" marB="27432" anchor="ctr">
+                    <a:solidFill>
+                      <a:srgbClr val="F5F7F9"/>
+                    </a:solidFill>
+                  </a:tcPr>
+                </a:tc>
+              </a:tr>
+              <a:tr h="670124">
+                <a:tc>
+                  <a:txBody>
+                    <a:bodyPr/>
+                    <a:lstStyle/>
+                    <a:p>
+                      <a:pPr>
+                        <a:defRPr sz="720" b="1">
+                          <a:solidFill>
+                            <a:srgbClr val="0D1117"/>
+                          </a:solidFill>
+                          <a:latin typeface="Inter"/>
+                        </a:defRPr>
+                      </a:pPr>
+                      <a:r>
+                        <a:rPr>
+                          <a:latin typeface="Inter"/>
+                        </a:rPr>
+                        <a:t>S4</a:t>
+                      </a:r>
+                    </a:p>
+                  </a:txBody>
+                  <a:tcPr marL="54864" marR="54864" marT="27432" marB="27432" anchor="ctr">
+                    <a:solidFill>
+                      <a:srgbClr val="F5F7F9"/>
+                    </a:solidFill>
+                  </a:tcPr>
+                </a:tc>
+                <a:tc>
+                  <a:txBody>
+                    <a:bodyPr/>
+                    <a:lstStyle/>
+                    <a:p>
+                      <a:pPr>
+                        <a:defRPr sz="720" b="0">
+                          <a:solidFill>
+                            <a:srgbClr val="0D1117"/>
+                          </a:solidFill>
+                          <a:latin typeface="Inter"/>
+                        </a:defRPr>
+                      </a:pPr>
+                      <a:r>
+                        <a:rPr>
+                          <a:latin typeface="Inter"/>
+                        </a:rPr>
+                        <a:t>Simulated attribution</a:t>
+                      </a:r>
+                    </a:p>
+                  </a:txBody>
+                  <a:tcPr marL="54864" marR="54864" marT="27432" marB="27432" anchor="ctr">
+                    <a:solidFill>
+                      <a:srgbClr val="F5F7F9"/>
+                    </a:solidFill>
+                  </a:tcPr>
+                </a:tc>
+                <a:tc>
+                  <a:txBody>
+                    <a:bodyPr/>
+                    <a:lstStyle/>
+                    <a:p>
+                      <a:pPr>
+                        <a:defRPr sz="720" b="0">
+                          <a:solidFill>
+                            <a:srgbClr val="0D1117"/>
+                          </a:solidFill>
+                          <a:latin typeface="Inter"/>
+                        </a:defRPr>
+                      </a:pPr>
+                      <a:r>
+                        <a:rPr>
+                          <a:latin typeface="Inter"/>
+                        </a:rPr>
+                        <a:t>get_gradient_capabilities</a:t>
+                      </a:r>
+                    </a:p>
+                  </a:txBody>
+                  <a:tcPr marL="54864" marR="54864" marT="27432" marB="27432" anchor="ctr">
+                    <a:solidFill>
+                      <a:srgbClr val="F5F7F9"/>
+                    </a:solidFill>
+                  </a:tcPr>
+                </a:tc>
+                <a:tc>
+                  <a:txBody>
+                    <a:bodyPr/>
+                    <a:lstStyle/>
+                    <a:p>
+                      <a:pPr>
+                        <a:defRPr sz="720" b="0">
+                          <a:solidFill>
+                            <a:srgbClr val="0D1117"/>
+                          </a:solidFill>
+                          <a:latin typeface="Inter"/>
+                        </a:defRPr>
+                      </a:pPr>
+                      <a:r>
+                        <a:rPr>
+                          <a:latin typeface="Inter"/>
+                        </a:rPr>
+                        <a:t>2026-06-30</a:t>
+                      </a:r>
+                    </a:p>
+                  </a:txBody>
+                  <a:tcPr marL="54864" marR="54864" marT="27432" marB="27432" anchor="ctr">
+                    <a:solidFill>
+                      <a:srgbClr val="F5F7F9"/>
+                    </a:solidFill>
+                  </a:tcPr>
+                </a:tc>
+                <a:tc>
+                  <a:txBody>
+                    <a:bodyPr/>
+                    <a:lstStyle/>
+                    <a:p>
+                      <a:pPr>
+                        <a:defRPr sz="720" b="1">
+                          <a:solidFill>
+                            <a:srgbClr val="C6F432"/>
+                          </a:solidFill>
+                          <a:latin typeface="Inter"/>
+                        </a:defRPr>
+                      </a:pPr>
+                      <a:r>
+                        <a:rPr>
+                          <a:latin typeface="Inter"/>
+                        </a:rPr>
+                        <a:t>● Passed</a:t>
+                      </a:r>
+                    </a:p>
+                  </a:txBody>
+                  <a:tcPr marL="54864" marR="54864" marT="27432" marB="27432" anchor="ctr">
+                    <a:solidFill>
+                      <a:srgbClr val="F5F7F9"/>
+                    </a:solidFill>
+                  </a:tcPr>
+                </a:tc>
+              </a:tr>
+              <a:tr h="670124">
+                <a:tc>
+                  <a:txBody>
+                    <a:bodyPr/>
+                    <a:lstStyle/>
+                    <a:p>
+                      <a:pPr>
+                        <a:defRPr sz="720" b="1">
+                          <a:solidFill>
+                            <a:srgbClr val="0D1117"/>
+                          </a:solidFill>
+                          <a:latin typeface="Inter"/>
+                        </a:defRPr>
+                      </a:pPr>
+                      <a:r>
+                        <a:rPr>
+                          <a:latin typeface="Inter"/>
+                        </a:rPr>
+                        <a:t>S5</a:t>
+                      </a:r>
+                    </a:p>
+                  </a:txBody>
+                  <a:tcPr marL="54864" marR="54864" marT="27432" marB="27432" anchor="ctr">
+                    <a:solidFill>
+                      <a:srgbClr val="FFFFFF"/>
+                    </a:solidFill>
+                  </a:tcPr>
+                </a:tc>
+                <a:tc>
+                  <a:txBody>
+                    <a:bodyPr/>
+                    <a:lstStyle/>
+                    <a:p>
+                      <a:pPr>
+                        <a:defRPr sz="720" b="0">
+                          <a:solidFill>
+                            <a:srgbClr val="0D1117"/>
+                          </a:solidFill>
+                          <a:latin typeface="Inter"/>
+                        </a:defRPr>
+                      </a:pPr>
+                      <a:r>
+                        <a:rPr>
+                          <a:latin typeface="Inter"/>
+                        </a:rPr>
+                        <a:t>Cross-lane comparison</a:t>
+                      </a:r>
+                    </a:p>
+                  </a:txBody>
+                  <a:tcPr marL="54864" marR="54864" marT="27432" marB="27432" anchor="ctr">
+                    <a:solidFill>
+                      <a:srgbClr val="FFFFFF"/>
+                    </a:solidFill>
+                  </a:tcPr>
+                </a:tc>
+                <a:tc>
+                  <a:txBody>
+                    <a:bodyPr/>
+                    <a:lstStyle/>
+                    <a:p>
+                      <a:pPr>
+                        <a:defRPr sz="720" b="0">
+                          <a:solidFill>
+                            <a:srgbClr val="0D1117"/>
+                          </a:solidFill>
+                          <a:latin typeface="Inter"/>
+                        </a:defRPr>
+                      </a:pPr>
+                      <a:r>
+                        <a:rPr>
+                          <a:latin typeface="Inter"/>
+                        </a:rPr>
+                        <a:t>get_gradient_capabilities</a:t>
+                      </a:r>
+                    </a:p>
+                  </a:txBody>
+                  <a:tcPr marL="54864" marR="54864" marT="27432" marB="27432" anchor="ctr">
+                    <a:solidFill>
+                      <a:srgbClr val="FFFFFF"/>
+                    </a:solidFill>
+                  </a:tcPr>
+                </a:tc>
+                <a:tc>
+                  <a:txBody>
+                    <a:bodyPr/>
+                    <a:lstStyle/>
+                    <a:p>
+                      <a:pPr>
+                        <a:defRPr sz="720" b="0">
+                          <a:solidFill>
+                            <a:srgbClr val="0D1117"/>
+                          </a:solidFill>
+                          <a:latin typeface="Inter"/>
+                        </a:defRPr>
+                      </a:pPr>
+                      <a:r>
+                        <a:rPr>
+                          <a:latin typeface="Inter"/>
+                        </a:rPr>
+                        <a:t>2026-06-30</a:t>
+                      </a:r>
+                    </a:p>
+                  </a:txBody>
+                  <a:tcPr marL="54864" marR="54864" marT="27432" marB="27432" anchor="ctr">
+                    <a:solidFill>
+                      <a:srgbClr val="FFFFFF"/>
+                    </a:solidFill>
+                  </a:tcPr>
+                </a:tc>
+                <a:tc>
+                  <a:txBody>
+                    <a:bodyPr/>
+                    <a:lstStyle/>
+                    <a:p>
+                      <a:pPr>
+                        <a:defRPr sz="720" b="1">
+                          <a:solidFill>
+                            <a:srgbClr val="C6F432"/>
+                          </a:solidFill>
+                          <a:latin typeface="Inter"/>
+                        </a:defRPr>
+                      </a:pPr>
+                      <a:r>
+                        <a:rPr>
+                          <a:latin typeface="Inter"/>
+                        </a:rPr>
+                        <a:t>● Passed</a:t>
+                      </a:r>
+                    </a:p>
+                  </a:txBody>
+                  <a:tcPr marL="54864" marR="54864" marT="27432" marB="27432" anchor="ctr">
+                    <a:solidFill>
+                      <a:srgbClr val="F5F7F9"/>
+                    </a:solidFill>
+                  </a:tcPr>
+                </a:tc>
+              </a:tr>
+              <a:tr h="670128">
+                <a:tc>
+                  <a:txBody>
+                    <a:bodyPr/>
+                    <a:lstStyle/>
+                    <a:p>
+                      <a:pPr>
+                        <a:defRPr sz="720" b="1">
+                          <a:solidFill>
+                            <a:srgbClr val="0D1117"/>
+                          </a:solidFill>
+                          <a:latin typeface="Inter"/>
+                        </a:defRPr>
+                      </a:pPr>
+                      <a:r>
+                        <a:rPr>
+                          <a:latin typeface="Inter"/>
+                        </a:rPr>
+                        <a:t>S6</a:t>
+                      </a:r>
+                    </a:p>
+                  </a:txBody>
+                  <a:tcPr marL="54864" marR="54864" marT="27432" marB="27432" anchor="ctr">
+                    <a:solidFill>
+                      <a:srgbClr val="F5F7F9"/>
+                    </a:solidFill>
+                  </a:tcPr>
+                </a:tc>
+                <a:tc>
+                  <a:txBody>
+                    <a:bodyPr/>
+                    <a:lstStyle/>
+                    <a:p>
+                      <a:pPr>
+                        <a:defRPr sz="720" b="0">
+                          <a:solidFill>
+                            <a:srgbClr val="0D1117"/>
+                          </a:solidFill>
+                          <a:latin typeface="Inter"/>
+                        </a:defRPr>
+                      </a:pPr>
+                      <a:r>
+                        <a:rPr>
+                          <a:latin typeface="Inter"/>
+                        </a:rPr>
+                        <a:t>Historical return context</a:t>
+                      </a:r>
+                    </a:p>
+                  </a:txBody>
+                  <a:tcPr marL="54864" marR="54864" marT="27432" marB="27432" anchor="ctr">
+                    <a:solidFill>
+                      <a:srgbClr val="F5F7F9"/>
+                    </a:solidFill>
+                  </a:tcPr>
+                </a:tc>
+                <a:tc>
+                  <a:txBody>
+                    <a:bodyPr/>
+                    <a:lstStyle/>
+                    <a:p>
+                      <a:pPr>
+                        <a:defRPr sz="720" b="0">
+                          <a:solidFill>
+                            <a:srgbClr val="0D1117"/>
+                          </a:solidFill>
+                          <a:latin typeface="Inter"/>
+                        </a:defRPr>
+                      </a:pPr>
+                      <a:r>
+                        <a:rPr>
+                          <a:latin typeface="Inter"/>
+                        </a:rPr>
+                        <a:t>get_portfolio_historical_returns</a:t>
+                      </a:r>
+                    </a:p>
+                  </a:txBody>
+                  <a:tcPr marL="54864" marR="54864" marT="27432" marB="27432" anchor="ctr">
+                    <a:solidFill>
+                      <a:srgbClr val="F5F7F9"/>
+                    </a:solidFill>
+                  </a:tcPr>
+                </a:tc>
+                <a:tc>
+                  <a:txBody>
+                    <a:bodyPr/>
+                    <a:lstStyle/>
+                    <a:p>
+                      <a:pPr>
+                        <a:defRPr sz="720" b="0">
+                          <a:solidFill>
+                            <a:srgbClr val="0D1117"/>
+                          </a:solidFill>
+                          <a:latin typeface="Inter"/>
+                        </a:defRPr>
+                      </a:pPr>
+                      <a:r>
+                        <a:rPr>
+                          <a:latin typeface="Inter"/>
+                        </a:rPr>
+                        <a:t>2026-06-30</a:t>
+                      </a:r>
+                    </a:p>
+                  </a:txBody>
+                  <a:tcPr marL="54864" marR="54864" marT="27432" marB="27432" anchor="ctr">
+                    <a:solidFill>
+                      <a:srgbClr val="F5F7F9"/>
+                    </a:solidFill>
+                  </a:tcPr>
+                </a:tc>
+                <a:tc>
+                  <a:txBody>
+                    <a:bodyPr/>
+                    <a:lstStyle/>
+                    <a:p>
+                      <a:pPr>
+                        <a:defRPr sz="720" b="1">
+                          <a:solidFill>
+                            <a:srgbClr val="C6F432"/>
+                          </a:solidFill>
+                          <a:latin typeface="Inter"/>
+                        </a:defRPr>
+                      </a:pPr>
+                      <a:r>
+                        <a:rPr>
+                          <a:latin typeface="Inter"/>
+                        </a:rPr>
+                        <a:t>● Passed</a:t>
+                      </a:r>
+                    </a:p>
+                  </a:txBody>
+                  <a:tcPr marL="54864" marR="54864" marT="27432" marB="27432" anchor="ctr">
+                    <a:solidFill>
+                      <a:srgbClr val="F5F7F9"/>
+                    </a:solidFill>
+                  </a:tcPr>
+                </a:tc>
+              </a:tr>
+            </a:tbl>
+          </a:graphicData>
+        </a:graphic>
+      </p:graphicFrame>
+      <p:sp>
+        <p:nvSpPr>
+          <p:cNvPr id="9" name="TextBox 8"/>
+          <p:cNvSpPr txBox="1"/>
+          <p:nvPr/>
+        </p:nvSpPr>
+        <p:spPr>
+          <a:xfrm>
+            <a:off x="640080" y="6035040"/>
+            <a:ext cx="10908792" cy="164592"/>
+          </a:xfrm>
+          <a:prstGeom prst="rect">
+            <a:avLst/>
+          </a:prstGeom>
+          <a:noFill/>
+        </p:spPr>
+        <p:txBody>
+          <a:bodyPr wrap="none" lIns="9144" rIns="9144" tIns="9144" bIns="9144" anchor="t">
+            <a:spAutoFit/>
+          </a:bodyPr>
+          <a:lstStyle/>
+          <a:p>
+            <a:pPr algn="l">
+              <a:spcAft>
+                <a:spcPts val="0"/>
+              </a:spcAft>
+              <a:defRPr sz="680" b="0">
+                <a:solidFill>
+                  <a:srgbClr val="8A94A1"/>
+                </a:solidFill>
+                <a:latin typeface="Inter"/>
+              </a:defRPr>
+            </a:pPr>
+            <a:r>
+              <a:rPr>
+                <a:latin typeface="Inter"/>
+              </a:rPr>
+              <a:t>Illustrative, Gradient Maintained — demo data, not the client's holdings or managers. All organizations, portfolios, managers and results in this public example are illustrative.</a:t>
+            </a:r>
+          </a:p>
+        </p:txBody>
+      </p:sp>
+      <p:sp>
+        <p:nvSpPr>
+          <p:cNvPr id="10" name="Rectangle 9"/>
+          <p:cNvSpPr/>
+          <p:nvPr/>
+        </p:nvSpPr>
+        <p:spPr>
+          <a:xfrm>
+            <a:off x="640080" y="6446520"/>
+            <a:ext cx="10908792" cy="9144"/>
+          </a:xfrm>
+          <a:prstGeom prst="rect">
+            <a:avLst/>
+          </a:prstGeom>
+          <a:solidFill>
+            <a:srgbClr val="E3E7EC"/>
+          </a:solidFill>
+          <a:ln>
+            <a:solidFill>
+              <a:srgbClr val="E3E7EC"/>
+            </a:solidFill>
+          </a:ln>
+        </p:spPr>
+        <p:style>
+          <a:lnRef idx="1">
+            <a:schemeClr val="accent1"/>
+          </a:lnRef>
+          <a:fillRef idx="3">
+            <a:schemeClr val="accent1"/>
+          </a:fillRef>
+          <a:effectRef idx="2">
+            <a:schemeClr val="accent1"/>
+          </a:effectRef>
+          <a:fontRef idx="minor">
+            <a:schemeClr val="lt1"/>
+          </a:fontRef>
+        </p:style>
+        <p:txBody>
+          <a:bodyPr rtlCol="0" anchor="ctr"/>
+          <a:lstStyle/>
+          <a:p>
+            <a:pPr algn="ctr">
+              <a:defRPr>
+                <a:latin typeface="Inter"/>
+              </a:defRPr>
+            </a:pPr>
+          </a:p>
+        </p:txBody>
+      </p:sp>
+      <p:sp>
+        <p:nvSpPr>
+          <p:cNvPr id="11" name="TextBox 10"/>
+          <p:cNvSpPr txBox="1"/>
+          <p:nvPr/>
+        </p:nvSpPr>
+        <p:spPr>
+          <a:xfrm>
+            <a:off x="640080" y="6501384"/>
+            <a:ext cx="4297680" cy="146304"/>
+          </a:xfrm>
+          <a:prstGeom prst="rect">
+            <a:avLst/>
+          </a:prstGeom>
+          <a:noFill/>
+        </p:spPr>
+        <p:txBody>
+          <a:bodyPr wrap="none" lIns="9144" rIns="9144" tIns="9144" bIns="9144" anchor="t">
+            <a:spAutoFit/>
+          </a:bodyPr>
+          <a:lstStyle/>
+          <a:p>
+            <a:pPr algn="l">
+              <a:spcAft>
+                <a:spcPts val="0"/>
+              </a:spcAft>
+              <a:defRPr sz="650" b="0">
+                <a:solidFill>
+                  <a:srgbClr val="8A94A1"/>
+                </a:solidFill>
+                <a:latin typeface="Inter"/>
+              </a:defRPr>
+            </a:pPr>
+            <a:r>
+              <a:rPr>
+                <a:latin typeface="Inter"/>
+              </a:rPr>
+              <a:t>Sources: S1 · S2 · S3 · S4 · S5 · S6</a:t>
+            </a:r>
+          </a:p>
+        </p:txBody>
+      </p:sp>
+      <p:sp>
+        <p:nvSpPr>
+          <p:cNvPr id="12" name="TextBox 11"/>
+          <p:cNvSpPr txBox="1"/>
+          <p:nvPr/>
+        </p:nvSpPr>
+        <p:spPr>
+          <a:xfrm>
+            <a:off x="4480560" y="6501384"/>
+            <a:ext cx="5303520" cy="146304"/>
+          </a:xfrm>
+          <a:prstGeom prst="rect">
+            <a:avLst/>
+          </a:prstGeom>
+          <a:noFill/>
+        </p:spPr>
+        <p:txBody>
+          <a:bodyPr wrap="none" lIns="9144" rIns="9144" tIns="9144" bIns="9144" anchor="t">
+            <a:spAutoFit/>
+          </a:bodyPr>
+          <a:lstStyle/>
+          <a:p>
+            <a:pPr algn="ctr">
+              <a:spcAft>
+                <a:spcPts val="0"/>
+              </a:spcAft>
+              <a:defRPr sz="650" b="0">
+                <a:solidFill>
+                  <a:srgbClr val="8A94A1"/>
+                </a:solidFill>
+                <a:latin typeface="Inter"/>
+              </a:defRPr>
+            </a:pPr>
+            <a:r>
+              <a:rPr>
+                <a:latin typeface="Inter"/>
+              </a:rPr>
+              <a:t>Confidential — Investment Committee · Data as of 2026-06-30</a:t>
+            </a:r>
+          </a:p>
+        </p:txBody>
+      </p:sp>
+      <p:sp>
+        <p:nvSpPr>
+          <p:cNvPr id="13" name="TextBox 12"/>
+          <p:cNvSpPr txBox="1"/>
+          <p:nvPr/>
+        </p:nvSpPr>
+        <p:spPr>
+          <a:xfrm>
+            <a:off x="10287000" y="6501384"/>
+            <a:ext cx="1261872" cy="146304"/>
+          </a:xfrm>
+          <a:prstGeom prst="rect">
+            <a:avLst/>
+          </a:prstGeom>
+          <a:noFill/>
+        </p:spPr>
+        <p:txBody>
+          <a:bodyPr wrap="none" lIns="9144" rIns="9144" tIns="9144" bIns="9144" anchor="t">
+            <a:spAutoFit/>
+          </a:bodyPr>
+          <a:lstStyle/>
+          <a:p>
+            <a:pPr algn="r">
+              <a:spcAft>
+                <a:spcPts val="0"/>
+              </a:spcAft>
+              <a:defRPr sz="650" b="0">
+                <a:solidFill>
+                  <a:srgbClr val="8A94A1"/>
+                </a:solidFill>
+                <a:latin typeface="Inter"/>
+              </a:defRPr>
+            </a:pPr>
+            <a:r>
+              <a:rPr>
+                <a:latin typeface="Inter"/>
+              </a:rPr>
+              <a:t>20</a:t>
+            </a:r>
+          </a:p>
+        </p:txBody>
+      </p:sp>
+    </p:spTree>
+  </p:cSld>
+  <p:clrMapOvr>
+    <a:masterClrMapping/>
+  </p:clrMapOvr>
+</p:sld>
+</file>
+
+<file path=ppt/slides/slide21.xml><?xml version="1.0" encoding="utf-8"?>
+<p:sld xmlns:a="http://schemas.openxmlformats.org/drawingml/2006/main" xmlns:p="http://schemas.openxmlformats.org/presentationml/2006/main" xmlns:r="http://schemas.openxmlformats.org/officeDocument/2006/relationships">
+  <p:cSld>
+    <p:spTree>
+      <p:nvGrpSpPr>
+        <p:cNvPr id="1" name=""/>
+        <p:cNvGrpSpPr/>
+        <p:nvPr/>
+      </p:nvGrpSpPr>
+      <p:grpSpPr/>
+      <p:sp>
+        <p:nvSpPr>
+          <p:cNvPr id="2" name="Rectangle 1"/>
+          <p:cNvSpPr/>
+          <p:nvPr/>
+        </p:nvSpPr>
+        <p:spPr>
+          <a:xfrm>
+            <a:off x="0" y="0"/>
+            <a:ext cx="12191695" cy="6858000"/>
+          </a:xfrm>
+          <a:prstGeom prst="rect">
+            <a:avLst/>
+          </a:prstGeom>
+          <a:solidFill>
+            <a:srgbClr val="FFFFFF"/>
+          </a:solidFill>
+          <a:ln>
+            <a:solidFill>
+              <a:srgbClr val="FFFFFF"/>
+            </a:solidFill>
+          </a:ln>
+        </p:spPr>
+        <p:style>
+          <a:lnRef idx="1">
+            <a:schemeClr val="accent1"/>
+          </a:lnRef>
+          <a:fillRef idx="3">
+            <a:schemeClr val="accent1"/>
+          </a:fillRef>
+          <a:effectRef idx="2">
+            <a:schemeClr val="accent1"/>
+          </a:effectRef>
+          <a:fontRef idx="minor">
+            <a:schemeClr val="lt1"/>
+          </a:fontRef>
+        </p:style>
+        <p:txBody>
+          <a:bodyPr rtlCol="0" anchor="ctr"/>
+          <a:lstStyle/>
+          <a:p>
+            <a:pPr algn="ctr">
+              <a:defRPr>
+                <a:latin typeface="Inter"/>
+              </a:defRPr>
+            </a:pPr>
+          </a:p>
+        </p:txBody>
+      </p:sp>
+      <p:sp>
+        <p:nvSpPr>
+          <p:cNvPr id="3" name="TextBox 2"/>
+          <p:cNvSpPr txBox="1"/>
+          <p:nvPr/>
+        </p:nvSpPr>
+        <p:spPr>
+          <a:xfrm>
+            <a:off x="640080" y="329184"/>
+            <a:ext cx="9875520" cy="182880"/>
+          </a:xfrm>
+          <a:prstGeom prst="rect">
+            <a:avLst/>
+          </a:prstGeom>
+          <a:noFill/>
+        </p:spPr>
+        <p:txBody>
+          <a:bodyPr wrap="none" lIns="9144" rIns="9144" tIns="9144" bIns="9144" anchor="t">
+            <a:spAutoFit/>
+          </a:bodyPr>
+          <a:lstStyle/>
+          <a:p>
+            <a:pPr algn="l">
+              <a:spcAft>
+                <a:spcPts val="0"/>
+              </a:spcAft>
+              <a:defRPr sz="750" b="1">
+                <a:solidFill>
+                  <a:srgbClr val="4F6B00"/>
+                </a:solidFill>
+                <a:latin typeface="Inter"/>
+              </a:defRPr>
+            </a:pPr>
+            <a:r>
+              <a:rPr>
+                <a:latin typeface="Inter"/>
+              </a:rPr>
+              <a:t>GOVERNED SOURCE INVENTORY</a:t>
+            </a:r>
+          </a:p>
+        </p:txBody>
+      </p:sp>
+      <p:sp>
+        <p:nvSpPr>
+          <p:cNvPr id="4" name="TextBox 3"/>
+          <p:cNvSpPr txBox="1"/>
+          <p:nvPr/>
+        </p:nvSpPr>
+        <p:spPr>
+          <a:xfrm>
+            <a:off x="640080" y="566928"/>
+            <a:ext cx="10058400" cy="530352"/>
+          </a:xfrm>
+          <a:prstGeom prst="rect">
+            <a:avLst/>
+          </a:prstGeom>
+          <a:noFill/>
+        </p:spPr>
+        <p:txBody>
+          <a:bodyPr wrap="none" lIns="9144" rIns="9144" tIns="9144" bIns="9144" anchor="t">
+            <a:spAutoFit/>
+          </a:bodyPr>
+          <a:lstStyle/>
+          <a:p>
+            <a:pPr algn="l">
+              <a:spcAft>
+                <a:spcPts val="0"/>
+              </a:spcAft>
+              <a:defRPr sz="2300" b="1">
+                <a:solidFill>
+                  <a:srgbClr val="0D1117"/>
+                </a:solidFill>
+                <a:latin typeface="Inter"/>
+              </a:defRPr>
+            </a:pPr>
+            <a:r>
+              <a:rPr>
+                <a:latin typeface="Inter"/>
+              </a:rPr>
+              <a:t>Appendix — Sources and methods — continued</a:t>
+            </a:r>
+          </a:p>
+        </p:txBody>
+      </p:sp>
+      <p:sp>
+        <p:nvSpPr>
+          <p:cNvPr id="5" name="Rectangle 4"/>
+          <p:cNvSpPr/>
+          <p:nvPr/>
+        </p:nvSpPr>
+        <p:spPr>
+          <a:xfrm>
+            <a:off x="640080" y="1115568"/>
+            <a:ext cx="10908792" cy="18288"/>
+          </a:xfrm>
+          <a:prstGeom prst="rect">
+            <a:avLst/>
+          </a:prstGeom>
+          <a:solidFill>
+            <a:srgbClr val="0D1117"/>
+          </a:solidFill>
+          <a:ln>
+            <a:solidFill>
+              <a:srgbClr val="0D1117"/>
+            </a:solidFill>
+          </a:ln>
+        </p:spPr>
+        <p:style>
+          <a:lnRef idx="1">
+            <a:schemeClr val="accent1"/>
+          </a:lnRef>
+          <a:fillRef idx="3">
+            <a:schemeClr val="accent1"/>
+          </a:fillRef>
+          <a:effectRef idx="2">
+            <a:schemeClr val="accent1"/>
+          </a:effectRef>
+          <a:fontRef idx="minor">
+            <a:schemeClr val="lt1"/>
+          </a:fontRef>
+        </p:style>
+        <p:txBody>
+          <a:bodyPr rtlCol="0" anchor="ctr"/>
+          <a:lstStyle/>
+          <a:p>
+            <a:pPr algn="ctr">
+              <a:defRPr>
+                <a:latin typeface="Inter"/>
+              </a:defRPr>
+            </a:pPr>
+          </a:p>
+        </p:txBody>
+      </p:sp>
+      <p:sp>
+        <p:nvSpPr>
+          <p:cNvPr id="6" name="Rectangle 5"/>
+          <p:cNvSpPr/>
+          <p:nvPr/>
+        </p:nvSpPr>
+        <p:spPr>
+          <a:xfrm>
+            <a:off x="11018520" y="502920"/>
+            <a:ext cx="530352" cy="393192"/>
+          </a:xfrm>
+          <a:prstGeom prst="rect">
+            <a:avLst/>
+          </a:prstGeom>
+          <a:solidFill>
+            <a:srgbClr val="9AA5B1"/>
+          </a:solidFill>
+          <a:ln>
+            <a:solidFill>
+              <a:srgbClr val="9AA5B1"/>
+            </a:solidFill>
+          </a:ln>
+        </p:spPr>
+        <p:style>
+          <a:lnRef idx="1">
+            <a:schemeClr val="accent1"/>
+          </a:lnRef>
+          <a:fillRef idx="3">
+            <a:schemeClr val="accent1"/>
+          </a:fillRef>
+          <a:effectRef idx="2">
+            <a:schemeClr val="accent1"/>
+          </a:effectRef>
+          <a:fontRef idx="minor">
+            <a:schemeClr val="lt1"/>
+          </a:fontRef>
+        </p:style>
+        <p:txBody>
+          <a:bodyPr rtlCol="0" anchor="ctr"/>
+          <a:lstStyle/>
+          <a:p>
+            <a:pPr algn="ctr">
+              <a:defRPr>
+                <a:latin typeface="Inter"/>
+              </a:defRPr>
+            </a:pPr>
+          </a:p>
+        </p:txBody>
+      </p:sp>
+      <p:sp>
+        <p:nvSpPr>
+          <p:cNvPr id="7" name="TextBox 6"/>
+          <p:cNvSpPr txBox="1"/>
+          <p:nvPr/>
+        </p:nvSpPr>
+        <p:spPr>
+          <a:xfrm>
+            <a:off x="11045952" y="557784"/>
+            <a:ext cx="475488" cy="182880"/>
+          </a:xfrm>
+          <a:prstGeom prst="rect">
+            <a:avLst/>
+          </a:prstGeom>
+          <a:noFill/>
+        </p:spPr>
+        <p:txBody>
+          <a:bodyPr wrap="none" lIns="9144" rIns="9144" tIns="9144" bIns="9144" anchor="t">
+            <a:spAutoFit/>
+          </a:bodyPr>
+          <a:lstStyle/>
+          <a:p>
+            <a:pPr algn="ctr">
+              <a:spcAft>
+                <a:spcPts val="0"/>
+              </a:spcAft>
+              <a:defRPr sz="1000" b="1">
+                <a:solidFill>
+                  <a:srgbClr val="0D1117"/>
+                </a:solidFill>
+                <a:latin typeface="Inter"/>
+              </a:defRPr>
+            </a:pPr>
+            <a:r>
+              <a:rPr>
+                <a:latin typeface="Inter"/>
+              </a:rPr>
+              <a:t>A</a:t>
+            </a:r>
+          </a:p>
+        </p:txBody>
+      </p:sp>
+      <p:sp>
+        <p:nvSpPr>
+          <p:cNvPr id="8" name="TextBox 7"/>
+          <p:cNvSpPr txBox="1"/>
+          <p:nvPr/>
+        </p:nvSpPr>
+        <p:spPr>
+          <a:xfrm>
+            <a:off x="640080" y="1325880"/>
+            <a:ext cx="10908792" cy="201168"/>
+          </a:xfrm>
+          <a:prstGeom prst="rect">
+            <a:avLst/>
+          </a:prstGeom>
+          <a:noFill/>
+        </p:spPr>
+        <p:txBody>
+          <a:bodyPr wrap="none" lIns="9144" rIns="9144" tIns="9144" bIns="9144" anchor="t">
+            <a:spAutoFit/>
+          </a:bodyPr>
+          <a:lstStyle/>
+          <a:p>
+            <a:pPr algn="l">
+              <a:spcAft>
+                <a:spcPts val="0"/>
+              </a:spcAft>
+              <a:defRPr sz="720" b="1">
+                <a:solidFill>
+                  <a:srgbClr val="4A5563"/>
+                </a:solidFill>
+                <a:latin typeface="Inter"/>
+              </a:defRPr>
+            </a:pPr>
+            <a:r>
+              <a:rPr>
+                <a:latin typeface="Inter"/>
+              </a:rPr>
+              <a:t>SOURCE AUDIT TRAIL</a:t>
+            </a:r>
+          </a:p>
+        </p:txBody>
+      </p:sp>
+      <p:graphicFrame>
+        <p:nvGraphicFramePr>
+          <p:cNvPr id="9" name="Table 8"/>
+          <p:cNvGraphicFramePr>
+            <a:graphicFrameLocks noGrp="1"/>
+          </p:cNvGraphicFramePr>
+          <p:nvPr/>
+        </p:nvGraphicFramePr>
+        <p:xfrm>
+          <a:off x="640080" y="1600200"/>
+          <a:ext cx="10908792" cy="4416552"/>
+        </p:xfrm>
+        <a:graphic>
+          <a:graphicData uri="http://schemas.openxmlformats.org/drawingml/2006/table">
+            <a:tbl>
+              <a:tblPr firstRow="1" bandRow="1">
+                <a:tableStyleId>{5C22544A-7EE6-4342-B048-85BDC9FD1C3A}</a:tableStyleId>
+              </a:tblPr>
+              <a:tblGrid>
+                <a:gridCol w="2011680"/>
+                <a:gridCol w="4448556"/>
+                <a:gridCol w="4448556"/>
+              </a:tblGrid>
+              <a:tr h="630936">
+                <a:tc>
+                  <a:txBody>
+                    <a:bodyPr/>
+                    <a:lstStyle/>
+                    <a:p>
+                      <a:pPr>
+                        <a:defRPr sz="750" b="1">
+                          <a:solidFill>
+                            <a:srgbClr val="FFFFFF"/>
+                          </a:solidFill>
+                          <a:latin typeface="Inter"/>
+                        </a:defRPr>
+                      </a:pPr>
+                      <a:r>
+                        <a:rPr>
+                          <a:latin typeface="Inter"/>
+                        </a:rPr>
+                        <a:t>Tag</a:t>
                       </a:r>
                     </a:p>
                   </a:txBody>
@@ -18243,87 +19065,6 @@
                         <a:rPr>
                           <a:latin typeface="Inter"/>
                         </a:rPr>
-                        <a:t>As of</a:t>
-                      </a:r>
-                    </a:p>
-                  </a:txBody>
-                  <a:tcPr marL="54864" marR="54864" marT="27432" marB="27432" anchor="ctr">
-                    <a:solidFill>
-                      <a:srgbClr val="0D1117"/>
-                    </a:solidFill>
-                  </a:tcPr>
-                </a:tc>
-                <a:tc>
-                  <a:txBody>
-                    <a:bodyPr/>
-                    <a:lstStyle/>
-                    <a:p>
-                      <a:pPr>
-                        <a:defRPr sz="750" b="1">
-                          <a:solidFill>
-                            <a:srgbClr val="FFFFFF"/>
-                          </a:solidFill>
-                          <a:latin typeface="Inter"/>
-                        </a:defRPr>
-                      </a:pPr>
-                      <a:r>
-                        <a:rPr>
-                          <a:latin typeface="Inter"/>
-                        </a:rPr>
-                        <a:t>Data scope</a:t>
-                      </a:r>
-                    </a:p>
-                  </a:txBody>
-                  <a:tcPr marL="54864" marR="54864" marT="27432" marB="27432" anchor="ctr">
-                    <a:solidFill>
-                      <a:srgbClr val="0D1117"/>
-                    </a:solidFill>
-                  </a:tcPr>
-                </a:tc>
-                <a:tc>
-                  <a:txBody>
-                    <a:bodyPr/>
-                    <a:lstStyle/>
-                    <a:p>
-                      <a:pPr>
-                        <a:defRPr sz="750" b="1">
-                          <a:solidFill>
-                            <a:srgbClr val="FFFFFF"/>
-                          </a:solidFill>
-                          <a:latin typeface="Inter"/>
-                        </a:defRPr>
-                      </a:pPr>
-                      <a:r>
-                        <a:rPr>
-                          <a:latin typeface="Inter"/>
-                        </a:rPr>
-                        <a:t>Validation</a:t>
-                      </a:r>
-                    </a:p>
-                  </a:txBody>
-                  <a:tcPr marL="54864" marR="54864" marT="27432" marB="27432" anchor="ctr">
-                    <a:solidFill>
-                      <a:srgbClr val="0D1117"/>
-                    </a:solidFill>
-                  </a:tcPr>
-                </a:tc>
-                <a:tc>
-                  <a:txBody>
-                    <a:bodyPr/>
-                    <a:lstStyle/>
-                    <a:p>
-                      <a:pPr>
-                        <a:defRPr sz="750" b="1">
-                          <a:solidFill>
-                            <a:srgbClr val="FFFFFF"/>
-                          </a:solidFill>
-                          <a:latin typeface="Inter"/>
-                        </a:defRPr>
-                      </a:pPr>
-                      <a:r>
-                        <a:rPr>
-                          <a:latin typeface="Inter"/>
-                        </a:rPr>
                         <a:t>Digest</a:t>
                       </a:r>
                     </a:p>
@@ -18335,14 +19076,14 @@
                   </a:tcPr>
                 </a:tc>
               </a:tr>
-              <a:tr h="670124">
+              <a:tr h="630936">
                 <a:tc>
                   <a:txBody>
                     <a:bodyPr/>
                     <a:lstStyle/>
                     <a:p>
                       <a:pPr>
-                        <a:defRPr sz="650" b="1">
+                        <a:defRPr sz="800" b="1">
                           <a:solidFill>
                             <a:srgbClr val="0D1117"/>
                           </a:solidFill>
@@ -18369,88 +19110,7 @@
                     <a:lstStyle/>
                     <a:p>
                       <a:pPr>
-                        <a:defRPr sz="650" b="0">
-                          <a:solidFill>
-                            <a:srgbClr val="0D1117"/>
-                          </a:solidFill>
-                          <a:latin typeface="Inter"/>
-                        </a:defRPr>
-                      </a:pPr>
-                      <a:r>
-                        <a:rPr>
-                          <a:latin typeface="Inter"/>
-                        </a:rPr>
-                        <a:t>Capability gate</a:t>
-                      </a:r>
-                    </a:p>
-                  </a:txBody>
-                  <a:tcPr marL="54864" marR="54864" marT="27432" marB="27432" anchor="ctr">
-                    <a:solidFill>
-                      <a:srgbClr val="FFFFFF"/>
-                    </a:solidFill>
-                  </a:tcPr>
-                </a:tc>
-                <a:tc>
-                  <a:txBody>
-                    <a:bodyPr/>
-                    <a:lstStyle/>
-                    <a:p>
-                      <a:pPr>
-                        <a:defRPr sz="650" b="0">
-                          <a:solidFill>
-                            <a:srgbClr val="0D1117"/>
-                          </a:solidFill>
-                          <a:latin typeface="Inter"/>
-                        </a:defRPr>
-                      </a:pPr>
-                      <a:r>
-                        <a:rPr>
-                          <a:latin typeface="Inter"/>
-                        </a:rPr>
-                        <a:t>gradient_tool</a:t>
-                      </a:r>
-                    </a:p>
-                  </a:txBody>
-                  <a:tcPr marL="54864" marR="54864" marT="27432" marB="27432" anchor="ctr">
-                    <a:solidFill>
-                      <a:srgbClr val="FFFFFF"/>
-                    </a:solidFill>
-                  </a:tcPr>
-                </a:tc>
-                <a:tc>
-                  <a:txBody>
-                    <a:bodyPr/>
-                    <a:lstStyle/>
-                    <a:p>
-                      <a:pPr>
-                        <a:defRPr sz="650" b="0">
-                          <a:solidFill>
-                            <a:srgbClr val="0D1117"/>
-                          </a:solidFill>
-                          <a:latin typeface="Inter"/>
-                        </a:defRPr>
-                      </a:pPr>
-                      <a:r>
-                        <a:rPr>
-                          <a:latin typeface="Inter"/>
-                        </a:rPr>
-                        <a:t>get_gradient_capabilities</a:t>
-                      </a:r>
-                    </a:p>
-                  </a:txBody>
-                  <a:tcPr marL="54864" marR="54864" marT="27432" marB="27432" anchor="ctr">
-                    <a:solidFill>
-                      <a:srgbClr val="FFFFFF"/>
-                    </a:solidFill>
-                  </a:tcPr>
-                </a:tc>
-                <a:tc>
-                  <a:txBody>
-                    <a:bodyPr/>
-                    <a:lstStyle/>
-                    <a:p>
-                      <a:pPr>
-                        <a:defRPr sz="650" b="0">
+                        <a:defRPr sz="800" b="0">
                           <a:solidFill>
                             <a:srgbClr val="0D1117"/>
                           </a:solidFill>
@@ -18477,88 +19137,7 @@
                     <a:lstStyle/>
                     <a:p>
                       <a:pPr>
-                        <a:defRPr sz="650" b="0">
-                          <a:solidFill>
-                            <a:srgbClr val="0D1117"/>
-                          </a:solidFill>
-                          <a:latin typeface="Inter"/>
-                        </a:defRPr>
-                      </a:pPr>
-                      <a:r>
-                        <a:rPr>
-                          <a:latin typeface="Inter"/>
-                        </a:rPr>
-                        <a:t>2026-06-30</a:t>
-                      </a:r>
-                    </a:p>
-                  </a:txBody>
-                  <a:tcPr marL="54864" marR="54864" marT="27432" marB="27432" anchor="ctr">
-                    <a:solidFill>
-                      <a:srgbClr val="FFFFFF"/>
-                    </a:solidFill>
-                  </a:tcPr>
-                </a:tc>
-                <a:tc>
-                  <a:txBody>
-                    <a:bodyPr/>
-                    <a:lstStyle/>
-                    <a:p>
-                      <a:pPr>
-                        <a:defRPr sz="650" b="0">
-                          <a:solidFill>
-                            <a:srgbClr val="0D1117"/>
-                          </a:solidFill>
-                          <a:latin typeface="Inter"/>
-                        </a:defRPr>
-                      </a:pPr>
-                      <a:r>
-                        <a:rPr>
-                          <a:latin typeface="Inter"/>
-                        </a:rPr>
-                        <a:t>Gradient-governed review evidence</a:t>
-                      </a:r>
-                    </a:p>
-                  </a:txBody>
-                  <a:tcPr marL="54864" marR="54864" marT="27432" marB="27432" anchor="ctr">
-                    <a:solidFill>
-                      <a:srgbClr val="FFFFFF"/>
-                    </a:solidFill>
-                  </a:tcPr>
-                </a:tc>
-                <a:tc>
-                  <a:txBody>
-                    <a:bodyPr/>
-                    <a:lstStyle/>
-                    <a:p>
-                      <a:pPr>
-                        <a:defRPr sz="650" b="0">
-                          <a:solidFill>
-                            <a:srgbClr val="0D1117"/>
-                          </a:solidFill>
-                          <a:latin typeface="Inter"/>
-                        </a:defRPr>
-                      </a:pPr>
-                      <a:r>
-                        <a:rPr>
-                          <a:latin typeface="Inter"/>
-                        </a:rPr>
-                        <a:t>passed</a:t>
-                      </a:r>
-                    </a:p>
-                  </a:txBody>
-                  <a:tcPr marL="54864" marR="54864" marT="27432" marB="27432" anchor="ctr">
-                    <a:solidFill>
-                      <a:srgbClr val="FFFFFF"/>
-                    </a:solidFill>
-                  </a:tcPr>
-                </a:tc>
-                <a:tc>
-                  <a:txBody>
-                    <a:bodyPr/>
-                    <a:lstStyle/>
-                    <a:p>
-                      <a:pPr>
-                        <a:defRPr sz="650" b="0">
+                        <a:defRPr sz="800" b="0">
                           <a:solidFill>
                             <a:srgbClr val="0D1117"/>
                           </a:solidFill>
@@ -18580,14 +19159,14 @@
                   </a:tcPr>
                 </a:tc>
               </a:tr>
-              <a:tr h="670124">
+              <a:tr h="630936">
                 <a:tc>
                   <a:txBody>
                     <a:bodyPr/>
                     <a:lstStyle/>
                     <a:p>
                       <a:pPr>
-                        <a:defRPr sz="650" b="1">
+                        <a:defRPr sz="800" b="1">
                           <a:solidFill>
                             <a:srgbClr val="0D1117"/>
                           </a:solidFill>
@@ -18614,88 +19193,7 @@
                     <a:lstStyle/>
                     <a:p>
                       <a:pPr>
-                        <a:defRPr sz="650" b="0">
-                          <a:solidFill>
-                            <a:srgbClr val="0D1117"/>
-                          </a:solidFill>
-                          <a:latin typeface="Inter"/>
-                        </a:defRPr>
-                      </a:pPr>
-                      <a:r>
-                        <a:rPr>
-                          <a:latin typeface="Inter"/>
-                        </a:rPr>
-                        <a:t>Historical attribution</a:t>
-                      </a:r>
-                    </a:p>
-                  </a:txBody>
-                  <a:tcPr marL="54864" marR="54864" marT="27432" marB="27432" anchor="ctr">
-                    <a:solidFill>
-                      <a:srgbClr val="F5F7F9"/>
-                    </a:solidFill>
-                  </a:tcPr>
-                </a:tc>
-                <a:tc>
-                  <a:txBody>
-                    <a:bodyPr/>
-                    <a:lstStyle/>
-                    <a:p>
-                      <a:pPr>
-                        <a:defRPr sz="650" b="0">
-                          <a:solidFill>
-                            <a:srgbClr val="0D1117"/>
-                          </a:solidFill>
-                          <a:latin typeface="Inter"/>
-                        </a:defRPr>
-                      </a:pPr>
-                      <a:r>
-                        <a:rPr>
-                          <a:latin typeface="Inter"/>
-                        </a:rPr>
-                        <a:t>gradient_tool</a:t>
-                      </a:r>
-                    </a:p>
-                  </a:txBody>
-                  <a:tcPr marL="54864" marR="54864" marT="27432" marB="27432" anchor="ctr">
-                    <a:solidFill>
-                      <a:srgbClr val="F5F7F9"/>
-                    </a:solidFill>
-                  </a:tcPr>
-                </a:tc>
-                <a:tc>
-                  <a:txBody>
-                    <a:bodyPr/>
-                    <a:lstStyle/>
-                    <a:p>
-                      <a:pPr>
-                        <a:defRPr sz="650" b="0">
-                          <a:solidFill>
-                            <a:srgbClr val="0D1117"/>
-                          </a:solidFill>
-                          <a:latin typeface="Inter"/>
-                        </a:defRPr>
-                      </a:pPr>
-                      <a:r>
-                        <a:rPr>
-                          <a:latin typeface="Inter"/>
-                        </a:rPr>
-                        <a:t>get_portfolio_attribution</a:t>
-                      </a:r>
-                    </a:p>
-                  </a:txBody>
-                  <a:tcPr marL="54864" marR="54864" marT="27432" marB="27432" anchor="ctr">
-                    <a:solidFill>
-                      <a:srgbClr val="F5F7F9"/>
-                    </a:solidFill>
-                  </a:tcPr>
-                </a:tc>
-                <a:tc>
-                  <a:txBody>
-                    <a:bodyPr/>
-                    <a:lstStyle/>
-                    <a:p>
-                      <a:pPr>
-                        <a:defRPr sz="650" b="0">
+                        <a:defRPr sz="800" b="0">
                           <a:solidFill>
                             <a:srgbClr val="0D1117"/>
                           </a:solidFill>
@@ -18722,88 +19220,7 @@
                     <a:lstStyle/>
                     <a:p>
                       <a:pPr>
-                        <a:defRPr sz="650" b="0">
-                          <a:solidFill>
-                            <a:srgbClr val="0D1117"/>
-                          </a:solidFill>
-                          <a:latin typeface="Inter"/>
-                        </a:defRPr>
-                      </a:pPr>
-                      <a:r>
-                        <a:rPr>
-                          <a:latin typeface="Inter"/>
-                        </a:rPr>
-                        <a:t>2026-06-30</a:t>
-                      </a:r>
-                    </a:p>
-                  </a:txBody>
-                  <a:tcPr marL="54864" marR="54864" marT="27432" marB="27432" anchor="ctr">
-                    <a:solidFill>
-                      <a:srgbClr val="F5F7F9"/>
-                    </a:solidFill>
-                  </a:tcPr>
-                </a:tc>
-                <a:tc>
-                  <a:txBody>
-                    <a:bodyPr/>
-                    <a:lstStyle/>
-                    <a:p>
-                      <a:pPr>
-                        <a:defRPr sz="650" b="0">
-                          <a:solidFill>
-                            <a:srgbClr val="0D1117"/>
-                          </a:solidFill>
-                          <a:latin typeface="Inter"/>
-                        </a:defRPr>
-                      </a:pPr>
-                      <a:r>
-                        <a:rPr>
-                          <a:latin typeface="Inter"/>
-                        </a:rPr>
-                        <a:t>Gradient-governed review evidence</a:t>
-                      </a:r>
-                    </a:p>
-                  </a:txBody>
-                  <a:tcPr marL="54864" marR="54864" marT="27432" marB="27432" anchor="ctr">
-                    <a:solidFill>
-                      <a:srgbClr val="F5F7F9"/>
-                    </a:solidFill>
-                  </a:tcPr>
-                </a:tc>
-                <a:tc>
-                  <a:txBody>
-                    <a:bodyPr/>
-                    <a:lstStyle/>
-                    <a:p>
-                      <a:pPr>
-                        <a:defRPr sz="650" b="0">
-                          <a:solidFill>
-                            <a:srgbClr val="0D1117"/>
-                          </a:solidFill>
-                          <a:latin typeface="Inter"/>
-                        </a:defRPr>
-                      </a:pPr>
-                      <a:r>
-                        <a:rPr>
-                          <a:latin typeface="Inter"/>
-                        </a:rPr>
-                        <a:t>passed</a:t>
-                      </a:r>
-                    </a:p>
-                  </a:txBody>
-                  <a:tcPr marL="54864" marR="54864" marT="27432" marB="27432" anchor="ctr">
-                    <a:solidFill>
-                      <a:srgbClr val="F5F7F9"/>
-                    </a:solidFill>
-                  </a:tcPr>
-                </a:tc>
-                <a:tc>
-                  <a:txBody>
-                    <a:bodyPr/>
-                    <a:lstStyle/>
-                    <a:p>
-                      <a:pPr>
-                        <a:defRPr sz="650" b="0">
+                        <a:defRPr sz="800" b="0">
                           <a:solidFill>
                             <a:srgbClr val="0D1117"/>
                           </a:solidFill>
@@ -18825,14 +19242,14 @@
                   </a:tcPr>
                 </a:tc>
               </a:tr>
-              <a:tr h="670124">
+              <a:tr h="630936">
                 <a:tc>
                   <a:txBody>
                     <a:bodyPr/>
                     <a:lstStyle/>
                     <a:p>
                       <a:pPr>
-                        <a:defRPr sz="650" b="1">
+                        <a:defRPr sz="800" b="1">
                           <a:solidFill>
                             <a:srgbClr val="0D1117"/>
                           </a:solidFill>
@@ -18859,88 +19276,7 @@
                     <a:lstStyle/>
                     <a:p>
                       <a:pPr>
-                        <a:defRPr sz="650" b="0">
-                          <a:solidFill>
-                            <a:srgbClr val="0D1117"/>
-                          </a:solidFill>
-                          <a:latin typeface="Inter"/>
-                        </a:defRPr>
-                      </a:pPr>
-                      <a:r>
-                        <a:rPr>
-                          <a:latin typeface="Inter"/>
-                        </a:rPr>
-                        <a:t>Ex ante attribution</a:t>
-                      </a:r>
-                    </a:p>
-                  </a:txBody>
-                  <a:tcPr marL="54864" marR="54864" marT="27432" marB="27432" anchor="ctr">
-                    <a:solidFill>
-                      <a:srgbClr val="FFFFFF"/>
-                    </a:solidFill>
-                  </a:tcPr>
-                </a:tc>
-                <a:tc>
-                  <a:txBody>
-                    <a:bodyPr/>
-                    <a:lstStyle/>
-                    <a:p>
-                      <a:pPr>
-                        <a:defRPr sz="650" b="0">
-                          <a:solidFill>
-                            <a:srgbClr val="0D1117"/>
-                          </a:solidFill>
-                          <a:latin typeface="Inter"/>
-                        </a:defRPr>
-                      </a:pPr>
-                      <a:r>
-                        <a:rPr>
-                          <a:latin typeface="Inter"/>
-                        </a:rPr>
-                        <a:t>gradient_tool</a:t>
-                      </a:r>
-                    </a:p>
-                  </a:txBody>
-                  <a:tcPr marL="54864" marR="54864" marT="27432" marB="27432" anchor="ctr">
-                    <a:solidFill>
-                      <a:srgbClr val="FFFFFF"/>
-                    </a:solidFill>
-                  </a:tcPr>
-                </a:tc>
-                <a:tc>
-                  <a:txBody>
-                    <a:bodyPr/>
-                    <a:lstStyle/>
-                    <a:p>
-                      <a:pPr>
-                        <a:defRPr sz="650" b="0">
-                          <a:solidFill>
-                            <a:srgbClr val="0D1117"/>
-                          </a:solidFill>
-                          <a:latin typeface="Inter"/>
-                        </a:defRPr>
-                      </a:pPr>
-                      <a:r>
-                        <a:rPr>
-                          <a:latin typeface="Inter"/>
-                        </a:rPr>
-                        <a:t>get_portfolio_ex_ante_attribution</a:t>
-                      </a:r>
-                    </a:p>
-                  </a:txBody>
-                  <a:tcPr marL="54864" marR="54864" marT="27432" marB="27432" anchor="ctr">
-                    <a:solidFill>
-                      <a:srgbClr val="FFFFFF"/>
-                    </a:solidFill>
-                  </a:tcPr>
-                </a:tc>
-                <a:tc>
-                  <a:txBody>
-                    <a:bodyPr/>
-                    <a:lstStyle/>
-                    <a:p>
-                      <a:pPr>
-                        <a:defRPr sz="650" b="0">
+                        <a:defRPr sz="800" b="0">
                           <a:solidFill>
                             <a:srgbClr val="0D1117"/>
                           </a:solidFill>
@@ -18967,88 +19303,7 @@
                     <a:lstStyle/>
                     <a:p>
                       <a:pPr>
-                        <a:defRPr sz="650" b="0">
-                          <a:solidFill>
-                            <a:srgbClr val="0D1117"/>
-                          </a:solidFill>
-                          <a:latin typeface="Inter"/>
-                        </a:defRPr>
-                      </a:pPr>
-                      <a:r>
-                        <a:rPr>
-                          <a:latin typeface="Inter"/>
-                        </a:rPr>
-                        <a:t>2026-06-30</a:t>
-                      </a:r>
-                    </a:p>
-                  </a:txBody>
-                  <a:tcPr marL="54864" marR="54864" marT="27432" marB="27432" anchor="ctr">
-                    <a:solidFill>
-                      <a:srgbClr val="FFFFFF"/>
-                    </a:solidFill>
-                  </a:tcPr>
-                </a:tc>
-                <a:tc>
-                  <a:txBody>
-                    <a:bodyPr/>
-                    <a:lstStyle/>
-                    <a:p>
-                      <a:pPr>
-                        <a:defRPr sz="650" b="0">
-                          <a:solidFill>
-                            <a:srgbClr val="0D1117"/>
-                          </a:solidFill>
-                          <a:latin typeface="Inter"/>
-                        </a:defRPr>
-                      </a:pPr>
-                      <a:r>
-                        <a:rPr>
-                          <a:latin typeface="Inter"/>
-                        </a:rPr>
-                        <a:t>Gradient-governed review evidence</a:t>
-                      </a:r>
-                    </a:p>
-                  </a:txBody>
-                  <a:tcPr marL="54864" marR="54864" marT="27432" marB="27432" anchor="ctr">
-                    <a:solidFill>
-                      <a:srgbClr val="FFFFFF"/>
-                    </a:solidFill>
-                  </a:tcPr>
-                </a:tc>
-                <a:tc>
-                  <a:txBody>
-                    <a:bodyPr/>
-                    <a:lstStyle/>
-                    <a:p>
-                      <a:pPr>
-                        <a:defRPr sz="650" b="0">
-                          <a:solidFill>
-                            <a:srgbClr val="0D1117"/>
-                          </a:solidFill>
-                          <a:latin typeface="Inter"/>
-                        </a:defRPr>
-                      </a:pPr>
-                      <a:r>
-                        <a:rPr>
-                          <a:latin typeface="Inter"/>
-                        </a:rPr>
-                        <a:t>passed</a:t>
-                      </a:r>
-                    </a:p>
-                  </a:txBody>
-                  <a:tcPr marL="54864" marR="54864" marT="27432" marB="27432" anchor="ctr">
-                    <a:solidFill>
-                      <a:srgbClr val="FFFFFF"/>
-                    </a:solidFill>
-                  </a:tcPr>
-                </a:tc>
-                <a:tc>
-                  <a:txBody>
-                    <a:bodyPr/>
-                    <a:lstStyle/>
-                    <a:p>
-                      <a:pPr>
-                        <a:defRPr sz="650" b="0">
+                        <a:defRPr sz="800" b="0">
                           <a:solidFill>
                             <a:srgbClr val="0D1117"/>
                           </a:solidFill>
@@ -19070,14 +19325,14 @@
                   </a:tcPr>
                 </a:tc>
               </a:tr>
-              <a:tr h="670124">
+              <a:tr h="630936">
                 <a:tc>
                   <a:txBody>
                     <a:bodyPr/>
                     <a:lstStyle/>
                     <a:p>
                       <a:pPr>
-                        <a:defRPr sz="650" b="1">
+                        <a:defRPr sz="800" b="1">
                           <a:solidFill>
                             <a:srgbClr val="0D1117"/>
                           </a:solidFill>
@@ -19104,88 +19359,7 @@
                     <a:lstStyle/>
                     <a:p>
                       <a:pPr>
-                        <a:defRPr sz="650" b="0">
-                          <a:solidFill>
-                            <a:srgbClr val="0D1117"/>
-                          </a:solidFill>
-                          <a:latin typeface="Inter"/>
-                        </a:defRPr>
-                      </a:pPr>
-                      <a:r>
-                        <a:rPr>
-                          <a:latin typeface="Inter"/>
-                        </a:rPr>
-                        <a:t>Simulated attribution</a:t>
-                      </a:r>
-                    </a:p>
-                  </a:txBody>
-                  <a:tcPr marL="54864" marR="54864" marT="27432" marB="27432" anchor="ctr">
-                    <a:solidFill>
-                      <a:srgbClr val="F5F7F9"/>
-                    </a:solidFill>
-                  </a:tcPr>
-                </a:tc>
-                <a:tc>
-                  <a:txBody>
-                    <a:bodyPr/>
-                    <a:lstStyle/>
-                    <a:p>
-                      <a:pPr>
-                        <a:defRPr sz="650" b="0">
-                          <a:solidFill>
-                            <a:srgbClr val="0D1117"/>
-                          </a:solidFill>
-                          <a:latin typeface="Inter"/>
-                        </a:defRPr>
-                      </a:pPr>
-                      <a:r>
-                        <a:rPr>
-                          <a:latin typeface="Inter"/>
-                        </a:rPr>
-                        <a:t>gradient_tool</a:t>
-                      </a:r>
-                    </a:p>
-                  </a:txBody>
-                  <a:tcPr marL="54864" marR="54864" marT="27432" marB="27432" anchor="ctr">
-                    <a:solidFill>
-                      <a:srgbClr val="F5F7F9"/>
-                    </a:solidFill>
-                  </a:tcPr>
-                </a:tc>
-                <a:tc>
-                  <a:txBody>
-                    <a:bodyPr/>
-                    <a:lstStyle/>
-                    <a:p>
-                      <a:pPr>
-                        <a:defRPr sz="650" b="0">
-                          <a:solidFill>
-                            <a:srgbClr val="0D1117"/>
-                          </a:solidFill>
-                          <a:latin typeface="Inter"/>
-                        </a:defRPr>
-                      </a:pPr>
-                      <a:r>
-                        <a:rPr>
-                          <a:latin typeface="Inter"/>
-                        </a:rPr>
-                        <a:t>get_gradient_capabilities</a:t>
-                      </a:r>
-                    </a:p>
-                  </a:txBody>
-                  <a:tcPr marL="54864" marR="54864" marT="27432" marB="27432" anchor="ctr">
-                    <a:solidFill>
-                      <a:srgbClr val="F5F7F9"/>
-                    </a:solidFill>
-                  </a:tcPr>
-                </a:tc>
-                <a:tc>
-                  <a:txBody>
-                    <a:bodyPr/>
-                    <a:lstStyle/>
-                    <a:p>
-                      <a:pPr>
-                        <a:defRPr sz="650" b="0">
+                        <a:defRPr sz="800" b="0">
                           <a:solidFill>
                             <a:srgbClr val="0D1117"/>
                           </a:solidFill>
@@ -19212,88 +19386,7 @@
                     <a:lstStyle/>
                     <a:p>
                       <a:pPr>
-                        <a:defRPr sz="650" b="0">
-                          <a:solidFill>
-                            <a:srgbClr val="0D1117"/>
-                          </a:solidFill>
-                          <a:latin typeface="Inter"/>
-                        </a:defRPr>
-                      </a:pPr>
-                      <a:r>
-                        <a:rPr>
-                          <a:latin typeface="Inter"/>
-                        </a:rPr>
-                        <a:t>2026-06-30</a:t>
-                      </a:r>
-                    </a:p>
-                  </a:txBody>
-                  <a:tcPr marL="54864" marR="54864" marT="27432" marB="27432" anchor="ctr">
-                    <a:solidFill>
-                      <a:srgbClr val="F5F7F9"/>
-                    </a:solidFill>
-                  </a:tcPr>
-                </a:tc>
-                <a:tc>
-                  <a:txBody>
-                    <a:bodyPr/>
-                    <a:lstStyle/>
-                    <a:p>
-                      <a:pPr>
-                        <a:defRPr sz="650" b="0">
-                          <a:solidFill>
-                            <a:srgbClr val="0D1117"/>
-                          </a:solidFill>
-                          <a:latin typeface="Inter"/>
-                        </a:defRPr>
-                      </a:pPr>
-                      <a:r>
-                        <a:rPr>
-                          <a:latin typeface="Inter"/>
-                        </a:rPr>
-                        <a:t>Gradient-governed review evidence</a:t>
-                      </a:r>
-                    </a:p>
-                  </a:txBody>
-                  <a:tcPr marL="54864" marR="54864" marT="27432" marB="27432" anchor="ctr">
-                    <a:solidFill>
-                      <a:srgbClr val="F5F7F9"/>
-                    </a:solidFill>
-                  </a:tcPr>
-                </a:tc>
-                <a:tc>
-                  <a:txBody>
-                    <a:bodyPr/>
-                    <a:lstStyle/>
-                    <a:p>
-                      <a:pPr>
-                        <a:defRPr sz="650" b="0">
-                          <a:solidFill>
-                            <a:srgbClr val="0D1117"/>
-                          </a:solidFill>
-                          <a:latin typeface="Inter"/>
-                        </a:defRPr>
-                      </a:pPr>
-                      <a:r>
-                        <a:rPr>
-                          <a:latin typeface="Inter"/>
-                        </a:rPr>
-                        <a:t>passed</a:t>
-                      </a:r>
-                    </a:p>
-                  </a:txBody>
-                  <a:tcPr marL="54864" marR="54864" marT="27432" marB="27432" anchor="ctr">
-                    <a:solidFill>
-                      <a:srgbClr val="F5F7F9"/>
-                    </a:solidFill>
-                  </a:tcPr>
-                </a:tc>
-                <a:tc>
-                  <a:txBody>
-                    <a:bodyPr/>
-                    <a:lstStyle/>
-                    <a:p>
-                      <a:pPr>
-                        <a:defRPr sz="650" b="0">
+                        <a:defRPr sz="800" b="0">
                           <a:solidFill>
                             <a:srgbClr val="0D1117"/>
                           </a:solidFill>
@@ -19315,14 +19408,14 @@
                   </a:tcPr>
                 </a:tc>
               </a:tr>
-              <a:tr h="670124">
+              <a:tr h="630936">
                 <a:tc>
                   <a:txBody>
                     <a:bodyPr/>
                     <a:lstStyle/>
                     <a:p>
                       <a:pPr>
-                        <a:defRPr sz="650" b="1">
+                        <a:defRPr sz="800" b="1">
                           <a:solidFill>
                             <a:srgbClr val="0D1117"/>
                           </a:solidFill>
@@ -19349,88 +19442,7 @@
                     <a:lstStyle/>
                     <a:p>
                       <a:pPr>
-                        <a:defRPr sz="650" b="0">
-                          <a:solidFill>
-                            <a:srgbClr val="0D1117"/>
-                          </a:solidFill>
-                          <a:latin typeface="Inter"/>
-                        </a:defRPr>
-                      </a:pPr>
-                      <a:r>
-                        <a:rPr>
-                          <a:latin typeface="Inter"/>
-                        </a:rPr>
-                        <a:t>Cross-lane comparison</a:t>
-                      </a:r>
-                    </a:p>
-                  </a:txBody>
-                  <a:tcPr marL="54864" marR="54864" marT="27432" marB="27432" anchor="ctr">
-                    <a:solidFill>
-                      <a:srgbClr val="FFFFFF"/>
-                    </a:solidFill>
-                  </a:tcPr>
-                </a:tc>
-                <a:tc>
-                  <a:txBody>
-                    <a:bodyPr/>
-                    <a:lstStyle/>
-                    <a:p>
-                      <a:pPr>
-                        <a:defRPr sz="650" b="0">
-                          <a:solidFill>
-                            <a:srgbClr val="0D1117"/>
-                          </a:solidFill>
-                          <a:latin typeface="Inter"/>
-                        </a:defRPr>
-                      </a:pPr>
-                      <a:r>
-                        <a:rPr>
-                          <a:latin typeface="Inter"/>
-                        </a:rPr>
-                        <a:t>gradient_tool</a:t>
-                      </a:r>
-                    </a:p>
-                  </a:txBody>
-                  <a:tcPr marL="54864" marR="54864" marT="27432" marB="27432" anchor="ctr">
-                    <a:solidFill>
-                      <a:srgbClr val="FFFFFF"/>
-                    </a:solidFill>
-                  </a:tcPr>
-                </a:tc>
-                <a:tc>
-                  <a:txBody>
-                    <a:bodyPr/>
-                    <a:lstStyle/>
-                    <a:p>
-                      <a:pPr>
-                        <a:defRPr sz="650" b="0">
-                          <a:solidFill>
-                            <a:srgbClr val="0D1117"/>
-                          </a:solidFill>
-                          <a:latin typeface="Inter"/>
-                        </a:defRPr>
-                      </a:pPr>
-                      <a:r>
-                        <a:rPr>
-                          <a:latin typeface="Inter"/>
-                        </a:rPr>
-                        <a:t>get_gradient_capabilities</a:t>
-                      </a:r>
-                    </a:p>
-                  </a:txBody>
-                  <a:tcPr marL="54864" marR="54864" marT="27432" marB="27432" anchor="ctr">
-                    <a:solidFill>
-                      <a:srgbClr val="FFFFFF"/>
-                    </a:solidFill>
-                  </a:tcPr>
-                </a:tc>
-                <a:tc>
-                  <a:txBody>
-                    <a:bodyPr/>
-                    <a:lstStyle/>
-                    <a:p>
-                      <a:pPr>
-                        <a:defRPr sz="650" b="0">
+                        <a:defRPr sz="800" b="0">
                           <a:solidFill>
                             <a:srgbClr val="0D1117"/>
                           </a:solidFill>
@@ -19457,88 +19469,7 @@
                     <a:lstStyle/>
                     <a:p>
                       <a:pPr>
-                        <a:defRPr sz="650" b="0">
-                          <a:solidFill>
-                            <a:srgbClr val="0D1117"/>
-                          </a:solidFill>
-                          <a:latin typeface="Inter"/>
-                        </a:defRPr>
-                      </a:pPr>
-                      <a:r>
-                        <a:rPr>
-                          <a:latin typeface="Inter"/>
-                        </a:rPr>
-                        <a:t>2026-06-30</a:t>
-                      </a:r>
-                    </a:p>
-                  </a:txBody>
-                  <a:tcPr marL="54864" marR="54864" marT="27432" marB="27432" anchor="ctr">
-                    <a:solidFill>
-                      <a:srgbClr val="FFFFFF"/>
-                    </a:solidFill>
-                  </a:tcPr>
-                </a:tc>
-                <a:tc>
-                  <a:txBody>
-                    <a:bodyPr/>
-                    <a:lstStyle/>
-                    <a:p>
-                      <a:pPr>
-                        <a:defRPr sz="650" b="0">
-                          <a:solidFill>
-                            <a:srgbClr val="0D1117"/>
-                          </a:solidFill>
-                          <a:latin typeface="Inter"/>
-                        </a:defRPr>
-                      </a:pPr>
-                      <a:r>
-                        <a:rPr>
-                          <a:latin typeface="Inter"/>
-                        </a:rPr>
-                        <a:t>Gradient-governed review evidence</a:t>
-                      </a:r>
-                    </a:p>
-                  </a:txBody>
-                  <a:tcPr marL="54864" marR="54864" marT="27432" marB="27432" anchor="ctr">
-                    <a:solidFill>
-                      <a:srgbClr val="FFFFFF"/>
-                    </a:solidFill>
-                  </a:tcPr>
-                </a:tc>
-                <a:tc>
-                  <a:txBody>
-                    <a:bodyPr/>
-                    <a:lstStyle/>
-                    <a:p>
-                      <a:pPr>
-                        <a:defRPr sz="650" b="0">
-                          <a:solidFill>
-                            <a:srgbClr val="0D1117"/>
-                          </a:solidFill>
-                          <a:latin typeface="Inter"/>
-                        </a:defRPr>
-                      </a:pPr>
-                      <a:r>
-                        <a:rPr>
-                          <a:latin typeface="Inter"/>
-                        </a:rPr>
-                        <a:t>passed</a:t>
-                      </a:r>
-                    </a:p>
-                  </a:txBody>
-                  <a:tcPr marL="54864" marR="54864" marT="27432" marB="27432" anchor="ctr">
-                    <a:solidFill>
-                      <a:srgbClr val="FFFFFF"/>
-                    </a:solidFill>
-                  </a:tcPr>
-                </a:tc>
-                <a:tc>
-                  <a:txBody>
-                    <a:bodyPr/>
-                    <a:lstStyle/>
-                    <a:p>
-                      <a:pPr>
-                        <a:defRPr sz="650" b="0">
+                        <a:defRPr sz="800" b="0">
                           <a:solidFill>
                             <a:srgbClr val="0D1117"/>
                           </a:solidFill>
@@ -19560,14 +19491,14 @@
                   </a:tcPr>
                 </a:tc>
               </a:tr>
-              <a:tr h="670128">
+              <a:tr h="630936">
                 <a:tc>
                   <a:txBody>
                     <a:bodyPr/>
                     <a:lstStyle/>
                     <a:p>
                       <a:pPr>
-                        <a:defRPr sz="650" b="1">
+                        <a:defRPr sz="800" b="1">
                           <a:solidFill>
                             <a:srgbClr val="0D1117"/>
                           </a:solidFill>
@@ -19594,88 +19525,7 @@
                     <a:lstStyle/>
                     <a:p>
                       <a:pPr>
-                        <a:defRPr sz="650" b="0">
-                          <a:solidFill>
-                            <a:srgbClr val="0D1117"/>
-                          </a:solidFill>
-                          <a:latin typeface="Inter"/>
-                        </a:defRPr>
-                      </a:pPr>
-                      <a:r>
-                        <a:rPr>
-                          <a:latin typeface="Inter"/>
-                        </a:rPr>
-                        <a:t>Historical return context</a:t>
-                      </a:r>
-                    </a:p>
-                  </a:txBody>
-                  <a:tcPr marL="54864" marR="54864" marT="27432" marB="27432" anchor="ctr">
-                    <a:solidFill>
-                      <a:srgbClr val="F5F7F9"/>
-                    </a:solidFill>
-                  </a:tcPr>
-                </a:tc>
-                <a:tc>
-                  <a:txBody>
-                    <a:bodyPr/>
-                    <a:lstStyle/>
-                    <a:p>
-                      <a:pPr>
-                        <a:defRPr sz="650" b="0">
-                          <a:solidFill>
-                            <a:srgbClr val="0D1117"/>
-                          </a:solidFill>
-                          <a:latin typeface="Inter"/>
-                        </a:defRPr>
-                      </a:pPr>
-                      <a:r>
-                        <a:rPr>
-                          <a:latin typeface="Inter"/>
-                        </a:rPr>
-                        <a:t>gradient_tool</a:t>
-                      </a:r>
-                    </a:p>
-                  </a:txBody>
-                  <a:tcPr marL="54864" marR="54864" marT="27432" marB="27432" anchor="ctr">
-                    <a:solidFill>
-                      <a:srgbClr val="F5F7F9"/>
-                    </a:solidFill>
-                  </a:tcPr>
-                </a:tc>
-                <a:tc>
-                  <a:txBody>
-                    <a:bodyPr/>
-                    <a:lstStyle/>
-                    <a:p>
-                      <a:pPr>
-                        <a:defRPr sz="650" b="0">
-                          <a:solidFill>
-                            <a:srgbClr val="0D1117"/>
-                          </a:solidFill>
-                          <a:latin typeface="Inter"/>
-                        </a:defRPr>
-                      </a:pPr>
-                      <a:r>
-                        <a:rPr>
-                          <a:latin typeface="Inter"/>
-                        </a:rPr>
-                        <a:t>get_portfolio_historical_returns</a:t>
-                      </a:r>
-                    </a:p>
-                  </a:txBody>
-                  <a:tcPr marL="54864" marR="54864" marT="27432" marB="27432" anchor="ctr">
-                    <a:solidFill>
-                      <a:srgbClr val="F5F7F9"/>
-                    </a:solidFill>
-                  </a:tcPr>
-                </a:tc>
-                <a:tc>
-                  <a:txBody>
-                    <a:bodyPr/>
-                    <a:lstStyle/>
-                    <a:p>
-                      <a:pPr>
-                        <a:defRPr sz="650" b="0">
+                        <a:defRPr sz="800" b="0">
                           <a:solidFill>
                             <a:srgbClr val="0D1117"/>
                           </a:solidFill>
@@ -19702,88 +19552,7 @@
                     <a:lstStyle/>
                     <a:p>
                       <a:pPr>
-                        <a:defRPr sz="650" b="0">
-                          <a:solidFill>
-                            <a:srgbClr val="0D1117"/>
-                          </a:solidFill>
-                          <a:latin typeface="Inter"/>
-                        </a:defRPr>
-                      </a:pPr>
-                      <a:r>
-                        <a:rPr>
-                          <a:latin typeface="Inter"/>
-                        </a:rPr>
-                        <a:t>2026-06-30</a:t>
-                      </a:r>
-                    </a:p>
-                  </a:txBody>
-                  <a:tcPr marL="54864" marR="54864" marT="27432" marB="27432" anchor="ctr">
-                    <a:solidFill>
-                      <a:srgbClr val="F5F7F9"/>
-                    </a:solidFill>
-                  </a:tcPr>
-                </a:tc>
-                <a:tc>
-                  <a:txBody>
-                    <a:bodyPr/>
-                    <a:lstStyle/>
-                    <a:p>
-                      <a:pPr>
-                        <a:defRPr sz="650" b="0">
-                          <a:solidFill>
-                            <a:srgbClr val="0D1117"/>
-                          </a:solidFill>
-                          <a:latin typeface="Inter"/>
-                        </a:defRPr>
-                      </a:pPr>
-                      <a:r>
-                        <a:rPr>
-                          <a:latin typeface="Inter"/>
-                        </a:rPr>
-                        <a:t>Gradient-governed review evidence</a:t>
-                      </a:r>
-                    </a:p>
-                  </a:txBody>
-                  <a:tcPr marL="54864" marR="54864" marT="27432" marB="27432" anchor="ctr">
-                    <a:solidFill>
-                      <a:srgbClr val="F5F7F9"/>
-                    </a:solidFill>
-                  </a:tcPr>
-                </a:tc>
-                <a:tc>
-                  <a:txBody>
-                    <a:bodyPr/>
-                    <a:lstStyle/>
-                    <a:p>
-                      <a:pPr>
-                        <a:defRPr sz="650" b="0">
-                          <a:solidFill>
-                            <a:srgbClr val="0D1117"/>
-                          </a:solidFill>
-                          <a:latin typeface="Inter"/>
-                        </a:defRPr>
-                      </a:pPr>
-                      <a:r>
-                        <a:rPr>
-                          <a:latin typeface="Inter"/>
-                        </a:rPr>
-                        <a:t>passed</a:t>
-                      </a:r>
-                    </a:p>
-                  </a:txBody>
-                  <a:tcPr marL="54864" marR="54864" marT="27432" marB="27432" anchor="ctr">
-                    <a:solidFill>
-                      <a:srgbClr val="F5F7F9"/>
-                    </a:solidFill>
-                  </a:tcPr>
-                </a:tc>
-                <a:tc>
-                  <a:txBody>
-                    <a:bodyPr/>
-                    <a:lstStyle/>
-                    <a:p>
-                      <a:pPr>
-                        <a:defRPr sz="650" b="0">
+                        <a:defRPr sz="800" b="0">
                           <a:solidFill>
                             <a:srgbClr val="0D1117"/>
                           </a:solidFill>
@@ -19846,7 +19615,7 @@
               <a:rPr>
                 <a:latin typeface="Inter"/>
               </a:rPr>
-              <a:t>Illustrative, Gradient Maintained — demo data, not the client's holdings or managers. All organizations, portfolios, managers and results in this public example are illustrative.</a:t>
+              <a:t>Data scope for every source: Illustrative sample data. Each digest is the SHA-256 fingerprint of the exact data the report used.</a:t>
             </a:r>
           </a:p>
         </p:txBody>
@@ -20021,7 +19790,7 @@
               <a:rPr>
                 <a:latin typeface="Inter"/>
               </a:rPr>
-              <a:t>20</a:t>
+              <a:t>21</a:t>
             </a:r>
           </a:p>
         </p:txBody>
@@ -20034,7 +19803,7 @@
 </p:sld>
 </file>
 
-<file path=ppt/slides/slide21.xml><?xml version="1.0" encoding="utf-8"?>
+<file path=ppt/slides/slide22.xml><?xml version="1.0" encoding="utf-8"?>
 <p:sld xmlns:a="http://schemas.openxmlformats.org/drawingml/2006/main" xmlns:p="http://schemas.openxmlformats.org/presentationml/2006/main" xmlns:r="http://schemas.openxmlformats.org/officeDocument/2006/relationships">
   <p:cSld>
     <p:spTree>
@@ -20102,7 +19871,7 @@
         <p:spPr>
           <a:xfrm>
             <a:off x="640080" y="329184"/>
-            <a:ext cx="5303520" cy="182880"/>
+            <a:ext cx="9875520" cy="182880"/>
           </a:xfrm>
           <a:prstGeom prst="rect">
             <a:avLst/>
@@ -20143,48 +19912,6 @@
         </p:nvSpPr>
         <p:spPr>
           <a:xfrm>
-            <a:off x="5897880" y="310896"/>
-            <a:ext cx="4800600" cy="256032"/>
-          </a:xfrm>
-          <a:prstGeom prst="rect">
-            <a:avLst/>
-          </a:prstGeom>
-          <a:noFill/>
-        </p:spPr>
-        <p:txBody>
-          <a:bodyPr wrap="none" lIns="9144" rIns="9144" tIns="9144" bIns="9144" anchor="t">
-            <a:spAutoFit/>
-          </a:bodyPr>
-          <a:lstStyle/>
-          <a:p>
-            <a:pPr algn="r">
-              <a:spcAft>
-                <a:spcPts val="0"/>
-              </a:spcAft>
-              <a:defRPr sz="680" b="1">
-                <a:solidFill>
-                  <a:srgbClr val="4F6B00"/>
-                </a:solidFill>
-                <a:latin typeface="Inter"/>
-              </a:defRPr>
-            </a:pPr>
-            <a:r>
-              <a:rPr>
-                <a:latin typeface="Inter"/>
-              </a:rPr>
-              <a:t>Illustrative, Gradient Maintained — demo data, not the client's holdings or managers</a:t>
-            </a:r>
-          </a:p>
-        </p:txBody>
-      </p:sp>
-      <p:sp>
-        <p:nvSpPr>
-          <p:cNvPr id="5" name="TextBox 4"/>
-          <p:cNvSpPr txBox="1"/>
-          <p:nvPr/>
-        </p:nvSpPr>
-        <p:spPr>
-          <a:xfrm>
             <a:off x="640080" y="566928"/>
             <a:ext cx="10058400" cy="530352"/>
           </a:xfrm>
@@ -20221,7 +19948,7 @@
       </p:sp>
       <p:sp>
         <p:nvSpPr>
-          <p:cNvPr id="6" name="Rectangle 5"/>
+          <p:cNvPr id="5" name="Rectangle 4"/>
           <p:cNvSpPr/>
           <p:nvPr/>
         </p:nvSpPr>
@@ -20270,7 +19997,7 @@
       </p:sp>
       <p:sp>
         <p:nvSpPr>
-          <p:cNvPr id="7" name="Rectangle 6"/>
+          <p:cNvPr id="6" name="Rectangle 5"/>
           <p:cNvSpPr/>
           <p:nvPr/>
         </p:nvSpPr>
@@ -20319,7 +20046,7 @@
       </p:sp>
       <p:sp>
         <p:nvSpPr>
-          <p:cNvPr id="8" name="TextBox 7"/>
+          <p:cNvPr id="7" name="TextBox 6"/>
           <p:cNvSpPr txBox="1"/>
           <p:nvPr/>
         </p:nvSpPr>
@@ -20361,7 +20088,7 @@
       </p:sp>
       <p:sp>
         <p:nvSpPr>
-          <p:cNvPr id="9" name="TextBox 8"/>
+          <p:cNvPr id="8" name="TextBox 7"/>
           <p:cNvSpPr txBox="1"/>
           <p:nvPr/>
         </p:nvSpPr>
@@ -20403,7 +20130,7 @@
       </p:sp>
       <p:graphicFrame>
         <p:nvGraphicFramePr>
-          <p:cNvPr id="10" name="Table 9"/>
+          <p:cNvPr id="9" name="Table 8"/>
           <p:cNvGraphicFramePr>
             <a:graphicFrameLocks noGrp="1"/>
           </p:cNvGraphicFramePr>
@@ -20411,7 +20138,7 @@
         </p:nvGraphicFramePr>
         <p:xfrm>
           <a:off x="640080" y="1600200"/>
-          <a:ext cx="10908792" cy="2249163"/>
+          <a:ext cx="10908792" cy="3047485"/>
         </p:xfrm>
         <a:graphic>
           <a:graphicData uri="http://schemas.openxmlformats.org/drawingml/2006/table">
@@ -20426,7 +20153,7 @@
                 <a:gridCol w="2224278"/>
                 <a:gridCol w="2224278"/>
               </a:tblGrid>
-              <a:tr h="321309">
+              <a:tr h="435355">
                 <a:tc>
                   <a:txBody>
                     <a:bodyPr/>
@@ -20563,7 +20290,7 @@
                   </a:tcPr>
                 </a:tc>
               </a:tr>
-              <a:tr h="321309">
+              <a:tr h="435355">
                 <a:tc>
                   <a:txBody>
                     <a:bodyPr/>
@@ -20700,7 +20427,7 @@
                   </a:tcPr>
                 </a:tc>
               </a:tr>
-              <a:tr h="321309">
+              <a:tr h="435355">
                 <a:tc>
                   <a:txBody>
                     <a:bodyPr/>
@@ -20837,7 +20564,7 @@
                   </a:tcPr>
                 </a:tc>
               </a:tr>
-              <a:tr h="321309">
+              <a:tr h="435355">
                 <a:tc>
                   <a:txBody>
                     <a:bodyPr/>
@@ -20974,7 +20701,7 @@
                   </a:tcPr>
                 </a:tc>
               </a:tr>
-              <a:tr h="321309">
+              <a:tr h="435355">
                 <a:tc>
                   <a:txBody>
                     <a:bodyPr/>
@@ -21111,7 +20838,7 @@
                   </a:tcPr>
                 </a:tc>
               </a:tr>
-              <a:tr h="321309">
+              <a:tr h="435355">
                 <a:tc>
                   <a:txBody>
                     <a:bodyPr/>
@@ -21248,7 +20975,7 @@
                   </a:tcPr>
                 </a:tc>
               </a:tr>
-              <a:tr h="321309">
+              <a:tr h="435355">
                 <a:tc>
                   <a:txBody>
                     <a:bodyPr/>
@@ -21391,13 +21118,13 @@
       </p:graphicFrame>
       <p:sp>
         <p:nvSpPr>
-          <p:cNvPr id="11" name="TextBox 10"/>
+          <p:cNvPr id="10" name="TextBox 9"/>
           <p:cNvSpPr txBox="1"/>
           <p:nvPr/>
         </p:nvSpPr>
         <p:spPr>
           <a:xfrm>
-            <a:off x="640080" y="3867651"/>
+            <a:off x="640080" y="4665973"/>
             <a:ext cx="10908792" cy="164592"/>
           </a:xfrm>
           <a:prstGeom prst="rect">
@@ -21433,14 +21160,14 @@
       </p:sp>
       <p:sp>
         <p:nvSpPr>
-          <p:cNvPr id="12" name="Rectangle 11"/>
+          <p:cNvPr id="11" name="Rectangle 10"/>
           <p:cNvSpPr/>
           <p:nvPr/>
         </p:nvSpPr>
         <p:spPr>
           <a:xfrm>
-            <a:off x="640080" y="4160259"/>
-            <a:ext cx="10908792" cy="973966"/>
+            <a:off x="640080" y="4958581"/>
+            <a:ext cx="10908792" cy="1259338"/>
           </a:xfrm>
           <a:prstGeom prst="rect">
             <a:avLst/>
@@ -21482,14 +21209,14 @@
       </p:sp>
       <p:sp>
         <p:nvSpPr>
-          <p:cNvPr id="13" name="Rectangle 12"/>
+          <p:cNvPr id="12" name="Rectangle 11"/>
           <p:cNvSpPr/>
           <p:nvPr/>
         </p:nvSpPr>
         <p:spPr>
           <a:xfrm>
-            <a:off x="640080" y="4160259"/>
-            <a:ext cx="54864" cy="973966"/>
+            <a:off x="640080" y="4958581"/>
+            <a:ext cx="54864" cy="1259338"/>
           </a:xfrm>
           <a:prstGeom prst="rect">
             <a:avLst/>
@@ -21531,13 +21258,13 @@
       </p:sp>
       <p:sp>
         <p:nvSpPr>
-          <p:cNvPr id="14" name="TextBox 13"/>
+          <p:cNvPr id="13" name="TextBox 12"/>
           <p:cNvSpPr txBox="1"/>
           <p:nvPr/>
         </p:nvSpPr>
         <p:spPr>
           <a:xfrm>
-            <a:off x="804671" y="4269987"/>
+            <a:off x="804671" y="5068309"/>
             <a:ext cx="10616184" cy="228600"/>
           </a:xfrm>
           <a:prstGeom prst="rect">
@@ -21573,14 +21300,14 @@
       </p:sp>
       <p:sp>
         <p:nvSpPr>
-          <p:cNvPr id="15" name="TextBox 14"/>
+          <p:cNvPr id="14" name="TextBox 13"/>
           <p:cNvSpPr txBox="1"/>
           <p:nvPr/>
         </p:nvSpPr>
         <p:spPr>
           <a:xfrm>
-            <a:off x="804671" y="4553451"/>
-            <a:ext cx="10616184" cy="489334"/>
+            <a:off x="804671" y="5351773"/>
+            <a:ext cx="10616184" cy="774706"/>
           </a:xfrm>
           <a:prstGeom prst="rect">
             <a:avLst/>
@@ -21608,196 +21335,14 @@
               <a:rPr>
                 <a:latin typeface="Inter"/>
               </a:rPr>
-              <a:t>Each lane remains on its returned method, period or horizon, benchmark role, parent cohort and calculation currency. Historical evidence is realized, ex ante evidence is expected, and simulated evidence is scenario-based. Values are displayed without local reconciliation, attribution arithmetic or substitutions [S1][S2][S3].</a:t>
+              <a:t>Each lane keeps its own method, period, benchmark role and currency, and values are shown as returned; cross-lane results appear only where the comparison tool returned them [S1][S2][S3].</a:t>
             </a:r>
           </a:p>
         </p:txBody>
       </p:sp>
       <p:sp>
         <p:nvSpPr>
-          <p:cNvPr id="16" name="Rectangle 15"/>
-          <p:cNvSpPr/>
-          <p:nvPr/>
-        </p:nvSpPr>
-        <p:spPr>
-          <a:xfrm>
-            <a:off x="640080" y="5243953"/>
-            <a:ext cx="10908792" cy="973966"/>
-          </a:xfrm>
-          <a:prstGeom prst="rect">
-            <a:avLst/>
-          </a:prstGeom>
-          <a:solidFill>
-            <a:srgbClr val="F5F7F9"/>
-          </a:solidFill>
-          <a:ln>
-            <a:solidFill>
-              <a:srgbClr val="E3E7EC"/>
-            </a:solidFill>
-          </a:ln>
-        </p:spPr>
-        <p:style>
-          <a:lnRef idx="1">
-            <a:schemeClr val="accent1"/>
-          </a:lnRef>
-          <a:fillRef idx="3">
-            <a:schemeClr val="accent1"/>
-          </a:fillRef>
-          <a:effectRef idx="2">
-            <a:schemeClr val="accent1"/>
-          </a:effectRef>
-          <a:fontRef idx="minor">
-            <a:schemeClr val="lt1"/>
-          </a:fontRef>
-        </p:style>
-        <p:txBody>
-          <a:bodyPr rtlCol="0" anchor="ctr"/>
-          <a:lstStyle/>
-          <a:p>
-            <a:pPr algn="ctr">
-              <a:defRPr>
-                <a:latin typeface="Inter"/>
-              </a:defRPr>
-            </a:pPr>
-          </a:p>
-        </p:txBody>
-      </p:sp>
-      <p:sp>
-        <p:nvSpPr>
-          <p:cNvPr id="17" name="Rectangle 16"/>
-          <p:cNvSpPr/>
-          <p:nvPr/>
-        </p:nvSpPr>
-        <p:spPr>
-          <a:xfrm>
-            <a:off x="640080" y="5243953"/>
-            <a:ext cx="54864" cy="973966"/>
-          </a:xfrm>
-          <a:prstGeom prst="rect">
-            <a:avLst/>
-          </a:prstGeom>
-          <a:solidFill>
-            <a:srgbClr val="0D1117"/>
-          </a:solidFill>
-          <a:ln>
-            <a:solidFill>
-              <a:srgbClr val="0D1117"/>
-            </a:solidFill>
-          </a:ln>
-        </p:spPr>
-        <p:style>
-          <a:lnRef idx="1">
-            <a:schemeClr val="accent1"/>
-          </a:lnRef>
-          <a:fillRef idx="3">
-            <a:schemeClr val="accent1"/>
-          </a:fillRef>
-          <a:effectRef idx="2">
-            <a:schemeClr val="accent1"/>
-          </a:effectRef>
-          <a:fontRef idx="minor">
-            <a:schemeClr val="lt1"/>
-          </a:fontRef>
-        </p:style>
-        <p:txBody>
-          <a:bodyPr rtlCol="0" anchor="ctr"/>
-          <a:lstStyle/>
-          <a:p>
-            <a:pPr algn="ctr">
-              <a:defRPr>
-                <a:latin typeface="Inter"/>
-              </a:defRPr>
-            </a:pPr>
-          </a:p>
-        </p:txBody>
-      </p:sp>
-      <p:sp>
-        <p:nvSpPr>
-          <p:cNvPr id="18" name="TextBox 17"/>
-          <p:cNvSpPr txBox="1"/>
-          <p:nvPr/>
-        </p:nvSpPr>
-        <p:spPr>
-          <a:xfrm>
-            <a:off x="804671" y="5353681"/>
-            <a:ext cx="10616184" cy="228600"/>
-          </a:xfrm>
-          <a:prstGeom prst="rect">
-            <a:avLst/>
-          </a:prstGeom>
-          <a:noFill/>
-        </p:spPr>
-        <p:txBody>
-          <a:bodyPr wrap="none" lIns="9144" rIns="9144" tIns="9144" bIns="9144" anchor="t">
-            <a:spAutoFit/>
-          </a:bodyPr>
-          <a:lstStyle/>
-          <a:p>
-            <a:pPr algn="l">
-              <a:spcAft>
-                <a:spcPts val="0"/>
-              </a:spcAft>
-              <a:defRPr sz="1000" b="1">
-                <a:solidFill>
-                  <a:srgbClr val="0D1117"/>
-                </a:solidFill>
-                <a:latin typeface="Inter"/>
-              </a:defRPr>
-            </a:pPr>
-            <a:r>
-              <a:rPr>
-                <a:latin typeface="Inter"/>
-              </a:rPr>
-              <a:t>Comparison boundary</a:t>
-            </a:r>
-          </a:p>
-        </p:txBody>
-      </p:sp>
-      <p:sp>
-        <p:nvSpPr>
-          <p:cNvPr id="19" name="TextBox 18"/>
-          <p:cNvSpPr txBox="1"/>
-          <p:nvPr/>
-        </p:nvSpPr>
-        <p:spPr>
-          <a:xfrm>
-            <a:off x="804671" y="5637145"/>
-            <a:ext cx="10616184" cy="489334"/>
-          </a:xfrm>
-          <a:prstGeom prst="rect">
-            <a:avLst/>
-          </a:prstGeom>
-          <a:noFill/>
-        </p:spPr>
-        <p:txBody>
-          <a:bodyPr wrap="none" lIns="9144" rIns="9144" tIns="9144" bIns="9144" anchor="t">
-            <a:spAutoFit/>
-          </a:bodyPr>
-          <a:lstStyle/>
-          <a:p>
-            <a:pPr algn="l">
-              <a:spcAft>
-                <a:spcPts val="0"/>
-              </a:spcAft>
-              <a:defRPr sz="950" b="0">
-                <a:solidFill>
-                  <a:srgbClr val="4A5563"/>
-                </a:solidFill>
-                <a:latin typeface="Inter"/>
-              </a:defRPr>
-            </a:pPr>
-            <a:r>
-              <a:rPr>
-                <a:latin typeface="Inter"/>
-              </a:rPr>
-              <a:t>Cross-lane differences, concentration, overlap, reconciliation and persistence are reported only when the governed comparison capability returns them. Capability absence is an evidence limitation, not a zero value or a failed lane. Request IDs, diagnostics, residuals and coverage remain attached to their source payloads [S1].</a:t>
-            </a:r>
-          </a:p>
-        </p:txBody>
-      </p:sp>
-      <p:sp>
-        <p:nvSpPr>
-          <p:cNvPr id="20" name="Rectangle 19"/>
+          <p:cNvPr id="15" name="Rectangle 14"/>
           <p:cNvSpPr/>
           <p:nvPr/>
         </p:nvSpPr>
@@ -21846,7 +21391,7 @@
       </p:sp>
       <p:sp>
         <p:nvSpPr>
-          <p:cNvPr id="21" name="TextBox 20"/>
+          <p:cNvPr id="16" name="TextBox 15"/>
           <p:cNvSpPr txBox="1"/>
           <p:nvPr/>
         </p:nvSpPr>
@@ -21888,7 +21433,7 @@
       </p:sp>
       <p:sp>
         <p:nvSpPr>
-          <p:cNvPr id="22" name="TextBox 21"/>
+          <p:cNvPr id="17" name="TextBox 16"/>
           <p:cNvSpPr txBox="1"/>
           <p:nvPr/>
         </p:nvSpPr>
@@ -21930,7 +21475,7 @@
       </p:sp>
       <p:sp>
         <p:nvSpPr>
-          <p:cNvPr id="23" name="TextBox 22"/>
+          <p:cNvPr id="18" name="TextBox 17"/>
           <p:cNvSpPr txBox="1"/>
           <p:nvPr/>
         </p:nvSpPr>
@@ -21965,7 +21510,7 @@
               <a:rPr>
                 <a:latin typeface="Inter"/>
               </a:rPr>
-              <a:t>21</a:t>
+              <a:t>22</a:t>
             </a:r>
           </a:p>
         </p:txBody>
@@ -22046,7 +21591,7 @@
         <p:spPr>
           <a:xfrm>
             <a:off x="640080" y="329184"/>
-            <a:ext cx="5303520" cy="182880"/>
+            <a:ext cx="9875520" cy="182880"/>
           </a:xfrm>
           <a:prstGeom prst="rect">
             <a:avLst/>
@@ -22087,48 +21632,6 @@
         </p:nvSpPr>
         <p:spPr>
           <a:xfrm>
-            <a:off x="5897880" y="310896"/>
-            <a:ext cx="4800600" cy="256032"/>
-          </a:xfrm>
-          <a:prstGeom prst="rect">
-            <a:avLst/>
-          </a:prstGeom>
-          <a:noFill/>
-        </p:spPr>
-        <p:txBody>
-          <a:bodyPr wrap="none" lIns="9144" rIns="9144" tIns="9144" bIns="9144" anchor="t">
-            <a:spAutoFit/>
-          </a:bodyPr>
-          <a:lstStyle/>
-          <a:p>
-            <a:pPr algn="r">
-              <a:spcAft>
-                <a:spcPts val="0"/>
-              </a:spcAft>
-              <a:defRPr sz="680" b="1">
-                <a:solidFill>
-                  <a:srgbClr val="4F6B00"/>
-                </a:solidFill>
-                <a:latin typeface="Inter"/>
-              </a:defRPr>
-            </a:pPr>
-            <a:r>
-              <a:rPr>
-                <a:latin typeface="Inter"/>
-              </a:rPr>
-              <a:t>Illustrative, Gradient Maintained — demo data, not the client's holdings or managers</a:t>
-            </a:r>
-          </a:p>
-        </p:txBody>
-      </p:sp>
-      <p:sp>
-        <p:nvSpPr>
-          <p:cNvPr id="5" name="TextBox 4"/>
-          <p:cNvSpPr txBox="1"/>
-          <p:nvPr/>
-        </p:nvSpPr>
-        <p:spPr>
-          <a:xfrm>
             <a:off x="640080" y="566928"/>
             <a:ext cx="10058400" cy="530352"/>
           </a:xfrm>
@@ -22165,7 +21668,7 @@
       </p:sp>
       <p:sp>
         <p:nvSpPr>
-          <p:cNvPr id="6" name="Rectangle 5"/>
+          <p:cNvPr id="5" name="Rectangle 4"/>
           <p:cNvSpPr/>
           <p:nvPr/>
         </p:nvSpPr>
@@ -22214,7 +21717,7 @@
       </p:sp>
       <p:sp>
         <p:nvSpPr>
-          <p:cNvPr id="7" name="Rectangle 6"/>
+          <p:cNvPr id="6" name="Rectangle 5"/>
           <p:cNvSpPr/>
           <p:nvPr/>
         </p:nvSpPr>
@@ -22263,7 +21766,7 @@
       </p:sp>
       <p:sp>
         <p:nvSpPr>
-          <p:cNvPr id="8" name="TextBox 7"/>
+          <p:cNvPr id="7" name="TextBox 6"/>
           <p:cNvSpPr txBox="1"/>
           <p:nvPr/>
         </p:nvSpPr>
@@ -22305,7 +21808,7 @@
       </p:sp>
       <p:sp>
         <p:nvSpPr>
-          <p:cNvPr id="9" name="Rectangle 8"/>
+          <p:cNvPr id="8" name="Rectangle 7"/>
           <p:cNvSpPr/>
           <p:nvPr/>
         </p:nvSpPr>
@@ -22354,7 +21857,7 @@
       </p:sp>
       <p:sp>
         <p:nvSpPr>
-          <p:cNvPr id="10" name="TextBox 9"/>
+          <p:cNvPr id="9" name="TextBox 8"/>
           <p:cNvSpPr txBox="1"/>
           <p:nvPr/>
         </p:nvSpPr>
@@ -22396,7 +21899,7 @@
       </p:sp>
       <p:sp>
         <p:nvSpPr>
-          <p:cNvPr id="11" name="TextBox 10"/>
+          <p:cNvPr id="10" name="TextBox 9"/>
           <p:cNvSpPr txBox="1"/>
           <p:nvPr/>
         </p:nvSpPr>
@@ -22438,7 +21941,7 @@
       </p:sp>
       <p:sp>
         <p:nvSpPr>
-          <p:cNvPr id="12" name="TextBox 11"/>
+          <p:cNvPr id="11" name="TextBox 10"/>
           <p:cNvSpPr txBox="1"/>
           <p:nvPr/>
         </p:nvSpPr>
@@ -22480,7 +21983,7 @@
       </p:sp>
       <p:graphicFrame>
         <p:nvGraphicFramePr>
-          <p:cNvPr id="13" name="Chart 12"/>
+          <p:cNvPr id="12" name="Chart 11"/>
           <p:cNvGraphicFramePr>
             <a:graphicFrameLocks noGrp="1"/>
           </p:cNvGraphicFramePr>
@@ -22498,7 +22001,7 @@
       </p:graphicFrame>
       <p:sp>
         <p:nvSpPr>
-          <p:cNvPr id="14" name="Rectangle 13"/>
+          <p:cNvPr id="13" name="Rectangle 12"/>
           <p:cNvSpPr/>
           <p:nvPr/>
         </p:nvSpPr>
@@ -22547,7 +22050,7 @@
       </p:sp>
       <p:sp>
         <p:nvSpPr>
-          <p:cNvPr id="15" name="TextBox 14"/>
+          <p:cNvPr id="14" name="TextBox 13"/>
           <p:cNvSpPr txBox="1"/>
           <p:nvPr/>
         </p:nvSpPr>
@@ -22589,7 +22092,7 @@
       </p:sp>
       <p:sp>
         <p:nvSpPr>
-          <p:cNvPr id="16" name="TextBox 15"/>
+          <p:cNvPr id="15" name="TextBox 14"/>
           <p:cNvSpPr txBox="1"/>
           <p:nvPr/>
         </p:nvSpPr>
@@ -22631,7 +22134,7 @@
       </p:sp>
       <p:sp>
         <p:nvSpPr>
-          <p:cNvPr id="17" name="TextBox 16"/>
+          <p:cNvPr id="16" name="TextBox 15"/>
           <p:cNvSpPr txBox="1"/>
           <p:nvPr/>
         </p:nvSpPr>
@@ -22747,7 +22250,7 @@
         <p:spPr>
           <a:xfrm>
             <a:off x="640080" y="329184"/>
-            <a:ext cx="5303520" cy="182880"/>
+            <a:ext cx="9875520" cy="182880"/>
           </a:xfrm>
           <a:prstGeom prst="rect">
             <a:avLst/>
@@ -22788,48 +22291,6 @@
         </p:nvSpPr>
         <p:spPr>
           <a:xfrm>
-            <a:off x="5897880" y="310896"/>
-            <a:ext cx="4800600" cy="256032"/>
-          </a:xfrm>
-          <a:prstGeom prst="rect">
-            <a:avLst/>
-          </a:prstGeom>
-          <a:noFill/>
-        </p:spPr>
-        <p:txBody>
-          <a:bodyPr wrap="none" lIns="9144" rIns="9144" tIns="9144" bIns="9144" anchor="t">
-            <a:spAutoFit/>
-          </a:bodyPr>
-          <a:lstStyle/>
-          <a:p>
-            <a:pPr algn="r">
-              <a:spcAft>
-                <a:spcPts val="0"/>
-              </a:spcAft>
-              <a:defRPr sz="680" b="1">
-                <a:solidFill>
-                  <a:srgbClr val="4F6B00"/>
-                </a:solidFill>
-                <a:latin typeface="Inter"/>
-              </a:defRPr>
-            </a:pPr>
-            <a:r>
-              <a:rPr>
-                <a:latin typeface="Inter"/>
-              </a:rPr>
-              <a:t>Illustrative, Gradient Maintained — demo data, not the client's holdings or managers</a:t>
-            </a:r>
-          </a:p>
-        </p:txBody>
-      </p:sp>
-      <p:sp>
-        <p:nvSpPr>
-          <p:cNvPr id="5" name="TextBox 4"/>
-          <p:cNvSpPr txBox="1"/>
-          <p:nvPr/>
-        </p:nvSpPr>
-        <p:spPr>
-          <a:xfrm>
             <a:off x="640080" y="566928"/>
             <a:ext cx="10058400" cy="530352"/>
           </a:xfrm>
@@ -22866,7 +22327,7 @@
       </p:sp>
       <p:sp>
         <p:nvSpPr>
-          <p:cNvPr id="6" name="Rectangle 5"/>
+          <p:cNvPr id="5" name="Rectangle 4"/>
           <p:cNvSpPr/>
           <p:nvPr/>
         </p:nvSpPr>
@@ -22915,7 +22376,7 @@
       </p:sp>
       <p:sp>
         <p:nvSpPr>
-          <p:cNvPr id="7" name="Rectangle 6"/>
+          <p:cNvPr id="6" name="Rectangle 5"/>
           <p:cNvSpPr/>
           <p:nvPr/>
         </p:nvSpPr>
@@ -22964,7 +22425,7 @@
       </p:sp>
       <p:sp>
         <p:nvSpPr>
-          <p:cNvPr id="8" name="TextBox 7"/>
+          <p:cNvPr id="7" name="TextBox 6"/>
           <p:cNvSpPr txBox="1"/>
           <p:nvPr/>
         </p:nvSpPr>
@@ -23006,7 +22467,7 @@
       </p:sp>
       <p:sp>
         <p:nvSpPr>
-          <p:cNvPr id="9" name="TextBox 8"/>
+          <p:cNvPr id="8" name="TextBox 7"/>
           <p:cNvSpPr txBox="1"/>
           <p:nvPr/>
         </p:nvSpPr>
@@ -23048,7 +22509,7 @@
       </p:sp>
       <p:graphicFrame>
         <p:nvGraphicFramePr>
-          <p:cNvPr id="10" name="Chart 9"/>
+          <p:cNvPr id="9" name="Chart 8"/>
           <p:cNvGraphicFramePr>
             <a:graphicFrameLocks noGrp="1"/>
           </p:cNvGraphicFramePr>
@@ -23066,7 +22527,7 @@
       </p:graphicFrame>
       <p:sp>
         <p:nvSpPr>
-          <p:cNvPr id="11" name="Rectangle 10"/>
+          <p:cNvPr id="10" name="Rectangle 9"/>
           <p:cNvSpPr/>
           <p:nvPr/>
         </p:nvSpPr>
@@ -23115,7 +22576,7 @@
       </p:sp>
       <p:sp>
         <p:nvSpPr>
-          <p:cNvPr id="12" name="Rectangle 11"/>
+          <p:cNvPr id="11" name="Rectangle 10"/>
           <p:cNvSpPr/>
           <p:nvPr/>
         </p:nvSpPr>
@@ -23164,7 +22625,7 @@
       </p:sp>
       <p:sp>
         <p:nvSpPr>
-          <p:cNvPr id="13" name="TextBox 12"/>
+          <p:cNvPr id="12" name="TextBox 11"/>
           <p:cNvSpPr txBox="1"/>
           <p:nvPr/>
         </p:nvSpPr>
@@ -23206,7 +22667,7 @@
       </p:sp>
       <p:sp>
         <p:nvSpPr>
-          <p:cNvPr id="14" name="TextBox 13"/>
+          <p:cNvPr id="13" name="TextBox 12"/>
           <p:cNvSpPr txBox="1"/>
           <p:nvPr/>
         </p:nvSpPr>
@@ -23248,7 +22709,7 @@
       </p:sp>
       <p:sp>
         <p:nvSpPr>
-          <p:cNvPr id="15" name="Rectangle 14"/>
+          <p:cNvPr id="14" name="Rectangle 13"/>
           <p:cNvSpPr/>
           <p:nvPr/>
         </p:nvSpPr>
@@ -23297,7 +22758,7 @@
       </p:sp>
       <p:sp>
         <p:nvSpPr>
-          <p:cNvPr id="16" name="Rectangle 15"/>
+          <p:cNvPr id="15" name="Rectangle 14"/>
           <p:cNvSpPr/>
           <p:nvPr/>
         </p:nvSpPr>
@@ -23346,7 +22807,7 @@
       </p:sp>
       <p:sp>
         <p:nvSpPr>
-          <p:cNvPr id="17" name="TextBox 16"/>
+          <p:cNvPr id="16" name="TextBox 15"/>
           <p:cNvSpPr txBox="1"/>
           <p:nvPr/>
         </p:nvSpPr>
@@ -23388,7 +22849,7 @@
       </p:sp>
       <p:sp>
         <p:nvSpPr>
-          <p:cNvPr id="18" name="TextBox 17"/>
+          <p:cNvPr id="17" name="TextBox 16"/>
           <p:cNvSpPr txBox="1"/>
           <p:nvPr/>
         </p:nvSpPr>
@@ -23430,7 +22891,7 @@
       </p:sp>
       <p:sp>
         <p:nvSpPr>
-          <p:cNvPr id="19" name="Rectangle 18"/>
+          <p:cNvPr id="18" name="Rectangle 17"/>
           <p:cNvSpPr/>
           <p:nvPr/>
         </p:nvSpPr>
@@ -23479,7 +22940,7 @@
       </p:sp>
       <p:sp>
         <p:nvSpPr>
-          <p:cNvPr id="20" name="TextBox 19"/>
+          <p:cNvPr id="19" name="TextBox 18"/>
           <p:cNvSpPr txBox="1"/>
           <p:nvPr/>
         </p:nvSpPr>
@@ -23521,7 +22982,7 @@
       </p:sp>
       <p:sp>
         <p:nvSpPr>
-          <p:cNvPr id="21" name="TextBox 20"/>
+          <p:cNvPr id="20" name="TextBox 19"/>
           <p:cNvSpPr txBox="1"/>
           <p:nvPr/>
         </p:nvSpPr>
@@ -23563,7 +23024,7 @@
       </p:sp>
       <p:sp>
         <p:nvSpPr>
-          <p:cNvPr id="22" name="TextBox 21"/>
+          <p:cNvPr id="21" name="TextBox 20"/>
           <p:cNvSpPr txBox="1"/>
           <p:nvPr/>
         </p:nvSpPr>
@@ -23679,7 +23140,7 @@
         <p:spPr>
           <a:xfrm>
             <a:off x="640080" y="329184"/>
-            <a:ext cx="5303520" cy="182880"/>
+            <a:ext cx="9875520" cy="182880"/>
           </a:xfrm>
           <a:prstGeom prst="rect">
             <a:avLst/>
@@ -23720,48 +23181,6 @@
         </p:nvSpPr>
         <p:spPr>
           <a:xfrm>
-            <a:off x="5897880" y="310896"/>
-            <a:ext cx="4800600" cy="256032"/>
-          </a:xfrm>
-          <a:prstGeom prst="rect">
-            <a:avLst/>
-          </a:prstGeom>
-          <a:noFill/>
-        </p:spPr>
-        <p:txBody>
-          <a:bodyPr wrap="none" lIns="9144" rIns="9144" tIns="9144" bIns="9144" anchor="t">
-            <a:spAutoFit/>
-          </a:bodyPr>
-          <a:lstStyle/>
-          <a:p>
-            <a:pPr algn="r">
-              <a:spcAft>
-                <a:spcPts val="0"/>
-              </a:spcAft>
-              <a:defRPr sz="680" b="1">
-                <a:solidFill>
-                  <a:srgbClr val="4F6B00"/>
-                </a:solidFill>
-                <a:latin typeface="Inter"/>
-              </a:defRPr>
-            </a:pPr>
-            <a:r>
-              <a:rPr>
-                <a:latin typeface="Inter"/>
-              </a:rPr>
-              <a:t>Illustrative, Gradient Maintained — demo data, not the client's holdings or managers</a:t>
-            </a:r>
-          </a:p>
-        </p:txBody>
-      </p:sp>
-      <p:sp>
-        <p:nvSpPr>
-          <p:cNvPr id="5" name="TextBox 4"/>
-          <p:cNvSpPr txBox="1"/>
-          <p:nvPr/>
-        </p:nvSpPr>
-        <p:spPr>
-          <a:xfrm>
             <a:off x="640080" y="566928"/>
             <a:ext cx="10058400" cy="530352"/>
           </a:xfrm>
@@ -23798,7 +23217,7 @@
       </p:sp>
       <p:sp>
         <p:nvSpPr>
-          <p:cNvPr id="6" name="Rectangle 5"/>
+          <p:cNvPr id="5" name="Rectangle 4"/>
           <p:cNvSpPr/>
           <p:nvPr/>
         </p:nvSpPr>
@@ -23847,7 +23266,7 @@
       </p:sp>
       <p:sp>
         <p:nvSpPr>
-          <p:cNvPr id="7" name="Rectangle 6"/>
+          <p:cNvPr id="6" name="Rectangle 5"/>
           <p:cNvSpPr/>
           <p:nvPr/>
         </p:nvSpPr>
@@ -23896,7 +23315,7 @@
       </p:sp>
       <p:sp>
         <p:nvSpPr>
-          <p:cNvPr id="8" name="TextBox 7"/>
+          <p:cNvPr id="7" name="TextBox 6"/>
           <p:cNvSpPr txBox="1"/>
           <p:nvPr/>
         </p:nvSpPr>
@@ -23938,7 +23357,7 @@
       </p:sp>
       <p:sp>
         <p:nvSpPr>
-          <p:cNvPr id="9" name="Rectangle 8"/>
+          <p:cNvPr id="8" name="Rectangle 7"/>
           <p:cNvSpPr/>
           <p:nvPr/>
         </p:nvSpPr>
@@ -23987,7 +23406,7 @@
       </p:sp>
       <p:sp>
         <p:nvSpPr>
-          <p:cNvPr id="10" name="Rectangle 9"/>
+          <p:cNvPr id="9" name="Rectangle 8"/>
           <p:cNvSpPr/>
           <p:nvPr/>
         </p:nvSpPr>
@@ -24036,7 +23455,7 @@
       </p:sp>
       <p:sp>
         <p:nvSpPr>
-          <p:cNvPr id="11" name="TextBox 10"/>
+          <p:cNvPr id="10" name="TextBox 9"/>
           <p:cNvSpPr txBox="1"/>
           <p:nvPr/>
         </p:nvSpPr>
@@ -24078,7 +23497,7 @@
       </p:sp>
       <p:sp>
         <p:nvSpPr>
-          <p:cNvPr id="12" name="TextBox 11"/>
+          <p:cNvPr id="11" name="TextBox 10"/>
           <p:cNvSpPr txBox="1"/>
           <p:nvPr/>
         </p:nvSpPr>
@@ -24120,7 +23539,7 @@
       </p:sp>
       <p:sp>
         <p:nvSpPr>
-          <p:cNvPr id="13" name="Rectangle 12"/>
+          <p:cNvPr id="12" name="Rectangle 11"/>
           <p:cNvSpPr/>
           <p:nvPr/>
         </p:nvSpPr>
@@ -24169,7 +23588,7 @@
       </p:sp>
       <p:sp>
         <p:nvSpPr>
-          <p:cNvPr id="14" name="TextBox 13"/>
+          <p:cNvPr id="13" name="TextBox 12"/>
           <p:cNvSpPr txBox="1"/>
           <p:nvPr/>
         </p:nvSpPr>
@@ -24211,7 +23630,7 @@
       </p:sp>
       <p:sp>
         <p:nvSpPr>
-          <p:cNvPr id="15" name="TextBox 14"/>
+          <p:cNvPr id="14" name="TextBox 13"/>
           <p:cNvSpPr txBox="1"/>
           <p:nvPr/>
         </p:nvSpPr>
@@ -24253,7 +23672,7 @@
       </p:sp>
       <p:sp>
         <p:nvSpPr>
-          <p:cNvPr id="16" name="TextBox 15"/>
+          <p:cNvPr id="15" name="TextBox 14"/>
           <p:cNvSpPr txBox="1"/>
           <p:nvPr/>
         </p:nvSpPr>
@@ -24369,7 +23788,7 @@
         <p:spPr>
           <a:xfrm>
             <a:off x="640080" y="329184"/>
-            <a:ext cx="5303520" cy="182880"/>
+            <a:ext cx="9875520" cy="182880"/>
           </a:xfrm>
           <a:prstGeom prst="rect">
             <a:avLst/>
@@ -24410,48 +23829,6 @@
         </p:nvSpPr>
         <p:spPr>
           <a:xfrm>
-            <a:off x="5897880" y="310896"/>
-            <a:ext cx="4800600" cy="256032"/>
-          </a:xfrm>
-          <a:prstGeom prst="rect">
-            <a:avLst/>
-          </a:prstGeom>
-          <a:noFill/>
-        </p:spPr>
-        <p:txBody>
-          <a:bodyPr wrap="none" lIns="9144" rIns="9144" tIns="9144" bIns="9144" anchor="t">
-            <a:spAutoFit/>
-          </a:bodyPr>
-          <a:lstStyle/>
-          <a:p>
-            <a:pPr algn="r">
-              <a:spcAft>
-                <a:spcPts val="0"/>
-              </a:spcAft>
-              <a:defRPr sz="680" b="1">
-                <a:solidFill>
-                  <a:srgbClr val="4F6B00"/>
-                </a:solidFill>
-                <a:latin typeface="Inter"/>
-              </a:defRPr>
-            </a:pPr>
-            <a:r>
-              <a:rPr>
-                <a:latin typeface="Inter"/>
-              </a:rPr>
-              <a:t>Illustrative, Gradient Maintained — demo data, not the client's holdings or managers</a:t>
-            </a:r>
-          </a:p>
-        </p:txBody>
-      </p:sp>
-      <p:sp>
-        <p:nvSpPr>
-          <p:cNvPr id="5" name="TextBox 4"/>
-          <p:cNvSpPr txBox="1"/>
-          <p:nvPr/>
-        </p:nvSpPr>
-        <p:spPr>
-          <a:xfrm>
             <a:off x="640080" y="566928"/>
             <a:ext cx="10058400" cy="530352"/>
           </a:xfrm>
@@ -24488,7 +23865,7 @@
       </p:sp>
       <p:sp>
         <p:nvSpPr>
-          <p:cNvPr id="6" name="Rectangle 5"/>
+          <p:cNvPr id="5" name="Rectangle 4"/>
           <p:cNvSpPr/>
           <p:nvPr/>
         </p:nvSpPr>
@@ -24537,7 +23914,7 @@
       </p:sp>
       <p:sp>
         <p:nvSpPr>
-          <p:cNvPr id="7" name="Rectangle 6"/>
+          <p:cNvPr id="6" name="Rectangle 5"/>
           <p:cNvSpPr/>
           <p:nvPr/>
         </p:nvSpPr>
@@ -24586,7 +23963,7 @@
       </p:sp>
       <p:sp>
         <p:nvSpPr>
-          <p:cNvPr id="8" name="TextBox 7"/>
+          <p:cNvPr id="7" name="TextBox 6"/>
           <p:cNvSpPr txBox="1"/>
           <p:nvPr/>
         </p:nvSpPr>
@@ -24628,7 +24005,7 @@
       </p:sp>
       <p:sp>
         <p:nvSpPr>
-          <p:cNvPr id="9" name="Rectangle 8"/>
+          <p:cNvPr id="8" name="Rectangle 7"/>
           <p:cNvSpPr/>
           <p:nvPr/>
         </p:nvSpPr>
@@ -24677,7 +24054,7 @@
       </p:sp>
       <p:sp>
         <p:nvSpPr>
-          <p:cNvPr id="10" name="TextBox 9"/>
+          <p:cNvPr id="9" name="TextBox 8"/>
           <p:cNvSpPr txBox="1"/>
           <p:nvPr/>
         </p:nvSpPr>
@@ -24719,7 +24096,7 @@
       </p:sp>
       <p:sp>
         <p:nvSpPr>
-          <p:cNvPr id="11" name="TextBox 10"/>
+          <p:cNvPr id="10" name="TextBox 9"/>
           <p:cNvSpPr txBox="1"/>
           <p:nvPr/>
         </p:nvSpPr>
@@ -24761,7 +24138,7 @@
       </p:sp>
       <p:graphicFrame>
         <p:nvGraphicFramePr>
-          <p:cNvPr id="12" name="Table 11"/>
+          <p:cNvPr id="11" name="Table 10"/>
           <p:cNvGraphicFramePr>
             <a:graphicFrameLocks noGrp="1"/>
           </p:cNvGraphicFramePr>
@@ -24910,7 +24287,7 @@
                         <a:rPr>
                           <a:latin typeface="Inter"/>
                         </a:rPr>
-                        <a:t>● available</a:t>
+                        <a:t>● Available</a:t>
                       </a:r>
                     </a:p>
                   </a:txBody>
@@ -24954,7 +24331,7 @@
       </p:graphicFrame>
       <p:sp>
         <p:nvSpPr>
-          <p:cNvPr id="13" name="Rectangle 12"/>
+          <p:cNvPr id="12" name="Rectangle 11"/>
           <p:cNvSpPr/>
           <p:nvPr/>
         </p:nvSpPr>
@@ -25003,7 +24380,7 @@
       </p:sp>
       <p:sp>
         <p:nvSpPr>
-          <p:cNvPr id="14" name="TextBox 13"/>
+          <p:cNvPr id="13" name="TextBox 12"/>
           <p:cNvSpPr txBox="1"/>
           <p:nvPr/>
         </p:nvSpPr>
@@ -25045,7 +24422,7 @@
       </p:sp>
       <p:sp>
         <p:nvSpPr>
-          <p:cNvPr id="15" name="TextBox 14"/>
+          <p:cNvPr id="14" name="TextBox 13"/>
           <p:cNvSpPr txBox="1"/>
           <p:nvPr/>
         </p:nvSpPr>
@@ -25087,7 +24464,7 @@
       </p:sp>
       <p:sp>
         <p:nvSpPr>
-          <p:cNvPr id="16" name="TextBox 15"/>
+          <p:cNvPr id="15" name="TextBox 14"/>
           <p:cNvSpPr txBox="1"/>
           <p:nvPr/>
         </p:nvSpPr>
@@ -25203,7 +24580,7 @@
         <p:spPr>
           <a:xfrm>
             <a:off x="640080" y="329184"/>
-            <a:ext cx="5303520" cy="182880"/>
+            <a:ext cx="9875520" cy="182880"/>
           </a:xfrm>
           <a:prstGeom prst="rect">
             <a:avLst/>
@@ -25244,48 +24621,6 @@
         </p:nvSpPr>
         <p:spPr>
           <a:xfrm>
-            <a:off x="5897880" y="310896"/>
-            <a:ext cx="4800600" cy="256032"/>
-          </a:xfrm>
-          <a:prstGeom prst="rect">
-            <a:avLst/>
-          </a:prstGeom>
-          <a:noFill/>
-        </p:spPr>
-        <p:txBody>
-          <a:bodyPr wrap="none" lIns="9144" rIns="9144" tIns="9144" bIns="9144" anchor="t">
-            <a:spAutoFit/>
-          </a:bodyPr>
-          <a:lstStyle/>
-          <a:p>
-            <a:pPr algn="r">
-              <a:spcAft>
-                <a:spcPts val="0"/>
-              </a:spcAft>
-              <a:defRPr sz="680" b="1">
-                <a:solidFill>
-                  <a:srgbClr val="4F6B00"/>
-                </a:solidFill>
-                <a:latin typeface="Inter"/>
-              </a:defRPr>
-            </a:pPr>
-            <a:r>
-              <a:rPr>
-                <a:latin typeface="Inter"/>
-              </a:rPr>
-              <a:t>Illustrative, Gradient Maintained — demo data, not the client's holdings or managers</a:t>
-            </a:r>
-          </a:p>
-        </p:txBody>
-      </p:sp>
-      <p:sp>
-        <p:nvSpPr>
-          <p:cNvPr id="5" name="TextBox 4"/>
-          <p:cNvSpPr txBox="1"/>
-          <p:nvPr/>
-        </p:nvSpPr>
-        <p:spPr>
-          <a:xfrm>
             <a:off x="640080" y="566928"/>
             <a:ext cx="10058400" cy="530352"/>
           </a:xfrm>
@@ -25322,7 +24657,7 @@
       </p:sp>
       <p:sp>
         <p:nvSpPr>
-          <p:cNvPr id="6" name="Rectangle 5"/>
+          <p:cNvPr id="5" name="Rectangle 4"/>
           <p:cNvSpPr/>
           <p:nvPr/>
         </p:nvSpPr>
@@ -25371,7 +24706,7 @@
       </p:sp>
       <p:sp>
         <p:nvSpPr>
-          <p:cNvPr id="7" name="Rectangle 6"/>
+          <p:cNvPr id="6" name="Rectangle 5"/>
           <p:cNvSpPr/>
           <p:nvPr/>
         </p:nvSpPr>
@@ -25420,7 +24755,7 @@
       </p:sp>
       <p:sp>
         <p:nvSpPr>
-          <p:cNvPr id="8" name="TextBox 7"/>
+          <p:cNvPr id="7" name="TextBox 6"/>
           <p:cNvSpPr txBox="1"/>
           <p:nvPr/>
         </p:nvSpPr>
@@ -25462,7 +24797,7 @@
       </p:sp>
       <p:sp>
         <p:nvSpPr>
-          <p:cNvPr id="9" name="TextBox 8"/>
+          <p:cNvPr id="8" name="TextBox 7"/>
           <p:cNvSpPr txBox="1"/>
           <p:nvPr/>
         </p:nvSpPr>
@@ -25504,7 +24839,7 @@
       </p:sp>
       <p:graphicFrame>
         <p:nvGraphicFramePr>
-          <p:cNvPr id="10" name="Chart 9"/>
+          <p:cNvPr id="9" name="Chart 8"/>
           <p:cNvGraphicFramePr>
             <a:graphicFrameLocks noGrp="1"/>
           </p:cNvGraphicFramePr>
@@ -25522,7 +24857,7 @@
       </p:graphicFrame>
       <p:sp>
         <p:nvSpPr>
-          <p:cNvPr id="11" name="Rectangle 10"/>
+          <p:cNvPr id="10" name="Rectangle 9"/>
           <p:cNvSpPr/>
           <p:nvPr/>
         </p:nvSpPr>
@@ -25571,7 +24906,7 @@
       </p:sp>
       <p:sp>
         <p:nvSpPr>
-          <p:cNvPr id="12" name="TextBox 11"/>
+          <p:cNvPr id="11" name="TextBox 10"/>
           <p:cNvSpPr txBox="1"/>
           <p:nvPr/>
         </p:nvSpPr>
@@ -25613,7 +24948,7 @@
       </p:sp>
       <p:graphicFrame>
         <p:nvGraphicFramePr>
-          <p:cNvPr id="13" name="Chart 12"/>
+          <p:cNvPr id="12" name="Chart 11"/>
           <p:cNvGraphicFramePr>
             <a:graphicFrameLocks noGrp="1"/>
           </p:cNvGraphicFramePr>
@@ -25631,7 +24966,7 @@
       </p:graphicFrame>
       <p:sp>
         <p:nvSpPr>
-          <p:cNvPr id="14" name="Rectangle 13"/>
+          <p:cNvPr id="13" name="Rectangle 12"/>
           <p:cNvSpPr/>
           <p:nvPr/>
         </p:nvSpPr>
@@ -25680,7 +25015,7 @@
       </p:sp>
       <p:sp>
         <p:nvSpPr>
-          <p:cNvPr id="15" name="TextBox 14"/>
+          <p:cNvPr id="14" name="TextBox 13"/>
           <p:cNvSpPr txBox="1"/>
           <p:nvPr/>
         </p:nvSpPr>
@@ -25722,7 +25057,7 @@
       </p:sp>
       <p:sp>
         <p:nvSpPr>
-          <p:cNvPr id="16" name="TextBox 15"/>
+          <p:cNvPr id="15" name="TextBox 14"/>
           <p:cNvSpPr txBox="1"/>
           <p:nvPr/>
         </p:nvSpPr>
@@ -25764,7 +25099,7 @@
       </p:sp>
       <p:sp>
         <p:nvSpPr>
-          <p:cNvPr id="17" name="TextBox 16"/>
+          <p:cNvPr id="16" name="TextBox 15"/>
           <p:cNvSpPr txBox="1"/>
           <p:nvPr/>
         </p:nvSpPr>
@@ -25880,7 +25215,7 @@
         <p:spPr>
           <a:xfrm>
             <a:off x="640080" y="329184"/>
-            <a:ext cx="5303520" cy="182880"/>
+            <a:ext cx="9875520" cy="182880"/>
           </a:xfrm>
           <a:prstGeom prst="rect">
             <a:avLst/>
@@ -25921,48 +25256,6 @@
         </p:nvSpPr>
         <p:spPr>
           <a:xfrm>
-            <a:off x="5897880" y="310896"/>
-            <a:ext cx="4800600" cy="256032"/>
-          </a:xfrm>
-          <a:prstGeom prst="rect">
-            <a:avLst/>
-          </a:prstGeom>
-          <a:noFill/>
-        </p:spPr>
-        <p:txBody>
-          <a:bodyPr wrap="none" lIns="9144" rIns="9144" tIns="9144" bIns="9144" anchor="t">
-            <a:spAutoFit/>
-          </a:bodyPr>
-          <a:lstStyle/>
-          <a:p>
-            <a:pPr algn="r">
-              <a:spcAft>
-                <a:spcPts val="0"/>
-              </a:spcAft>
-              <a:defRPr sz="680" b="1">
-                <a:solidFill>
-                  <a:srgbClr val="4F6B00"/>
-                </a:solidFill>
-                <a:latin typeface="Inter"/>
-              </a:defRPr>
-            </a:pPr>
-            <a:r>
-              <a:rPr>
-                <a:latin typeface="Inter"/>
-              </a:rPr>
-              <a:t>Illustrative, Gradient Maintained — demo data, not the client's holdings or managers</a:t>
-            </a:r>
-          </a:p>
-        </p:txBody>
-      </p:sp>
-      <p:sp>
-        <p:nvSpPr>
-          <p:cNvPr id="5" name="TextBox 4"/>
-          <p:cNvSpPr txBox="1"/>
-          <p:nvPr/>
-        </p:nvSpPr>
-        <p:spPr>
-          <a:xfrm>
             <a:off x="640080" y="566928"/>
             <a:ext cx="10058400" cy="530352"/>
           </a:xfrm>
@@ -25999,7 +25292,7 @@
       </p:sp>
       <p:sp>
         <p:nvSpPr>
-          <p:cNvPr id="6" name="Rectangle 5"/>
+          <p:cNvPr id="5" name="Rectangle 4"/>
           <p:cNvSpPr/>
           <p:nvPr/>
         </p:nvSpPr>
@@ -26048,7 +25341,7 @@
       </p:sp>
       <p:sp>
         <p:nvSpPr>
-          <p:cNvPr id="7" name="Rectangle 6"/>
+          <p:cNvPr id="6" name="Rectangle 5"/>
           <p:cNvSpPr/>
           <p:nvPr/>
         </p:nvSpPr>
@@ -26097,7 +25390,7 @@
       </p:sp>
       <p:sp>
         <p:nvSpPr>
-          <p:cNvPr id="8" name="TextBox 7"/>
+          <p:cNvPr id="7" name="TextBox 6"/>
           <p:cNvSpPr txBox="1"/>
           <p:nvPr/>
         </p:nvSpPr>
@@ -26139,7 +25432,7 @@
       </p:sp>
       <p:sp>
         <p:nvSpPr>
-          <p:cNvPr id="9" name="TextBox 8"/>
+          <p:cNvPr id="8" name="TextBox 7"/>
           <p:cNvSpPr txBox="1"/>
           <p:nvPr/>
         </p:nvSpPr>
@@ -26181,7 +25474,7 @@
       </p:sp>
       <p:graphicFrame>
         <p:nvGraphicFramePr>
-          <p:cNvPr id="10" name="Chart 9"/>
+          <p:cNvPr id="9" name="Chart 8"/>
           <p:cNvGraphicFramePr>
             <a:graphicFrameLocks noGrp="1"/>
           </p:cNvGraphicFramePr>
@@ -26199,7 +25492,7 @@
       </p:graphicFrame>
       <p:sp>
         <p:nvSpPr>
-          <p:cNvPr id="11" name="Rectangle 10"/>
+          <p:cNvPr id="10" name="Rectangle 9"/>
           <p:cNvSpPr/>
           <p:nvPr/>
         </p:nvSpPr>
@@ -26248,7 +25541,7 @@
       </p:sp>
       <p:sp>
         <p:nvSpPr>
-          <p:cNvPr id="12" name="TextBox 11"/>
+          <p:cNvPr id="11" name="TextBox 10"/>
           <p:cNvSpPr txBox="1"/>
           <p:nvPr/>
         </p:nvSpPr>
@@ -26290,7 +25583,7 @@
       </p:sp>
       <p:graphicFrame>
         <p:nvGraphicFramePr>
-          <p:cNvPr id="13" name="Chart 12"/>
+          <p:cNvPr id="12" name="Chart 11"/>
           <p:cNvGraphicFramePr>
             <a:graphicFrameLocks noGrp="1"/>
           </p:cNvGraphicFramePr>
@@ -26308,7 +25601,7 @@
       </p:graphicFrame>
       <p:sp>
         <p:nvSpPr>
-          <p:cNvPr id="14" name="Rectangle 13"/>
+          <p:cNvPr id="13" name="Rectangle 12"/>
           <p:cNvSpPr/>
           <p:nvPr/>
         </p:nvSpPr>
@@ -26357,7 +25650,7 @@
       </p:sp>
       <p:sp>
         <p:nvSpPr>
-          <p:cNvPr id="15" name="TextBox 14"/>
+          <p:cNvPr id="14" name="TextBox 13"/>
           <p:cNvSpPr txBox="1"/>
           <p:nvPr/>
         </p:nvSpPr>
@@ -26399,7 +25692,7 @@
       </p:sp>
       <p:sp>
         <p:nvSpPr>
-          <p:cNvPr id="16" name="TextBox 15"/>
+          <p:cNvPr id="15" name="TextBox 14"/>
           <p:cNvSpPr txBox="1"/>
           <p:nvPr/>
         </p:nvSpPr>
@@ -26441,7 +25734,7 @@
       </p:sp>
       <p:sp>
         <p:nvSpPr>
-          <p:cNvPr id="17" name="TextBox 16"/>
+          <p:cNvPr id="16" name="TextBox 15"/>
           <p:cNvSpPr txBox="1"/>
           <p:nvPr/>
         </p:nvSpPr>
@@ -26557,7 +25850,7 @@
         <p:spPr>
           <a:xfrm>
             <a:off x="640080" y="329184"/>
-            <a:ext cx="5303520" cy="182880"/>
+            <a:ext cx="9875520" cy="182880"/>
           </a:xfrm>
           <a:prstGeom prst="rect">
             <a:avLst/>
@@ -26598,48 +25891,6 @@
         </p:nvSpPr>
         <p:spPr>
           <a:xfrm>
-            <a:off x="5897880" y="310896"/>
-            <a:ext cx="4800600" cy="256032"/>
-          </a:xfrm>
-          <a:prstGeom prst="rect">
-            <a:avLst/>
-          </a:prstGeom>
-          <a:noFill/>
-        </p:spPr>
-        <p:txBody>
-          <a:bodyPr wrap="none" lIns="9144" rIns="9144" tIns="9144" bIns="9144" anchor="t">
-            <a:spAutoFit/>
-          </a:bodyPr>
-          <a:lstStyle/>
-          <a:p>
-            <a:pPr algn="r">
-              <a:spcAft>
-                <a:spcPts val="0"/>
-              </a:spcAft>
-              <a:defRPr sz="680" b="1">
-                <a:solidFill>
-                  <a:srgbClr val="4F6B00"/>
-                </a:solidFill>
-                <a:latin typeface="Inter"/>
-              </a:defRPr>
-            </a:pPr>
-            <a:r>
-              <a:rPr>
-                <a:latin typeface="Inter"/>
-              </a:rPr>
-              <a:t>Illustrative, Gradient Maintained — demo data, not the client's holdings or managers</a:t>
-            </a:r>
-          </a:p>
-        </p:txBody>
-      </p:sp>
-      <p:sp>
-        <p:nvSpPr>
-          <p:cNvPr id="5" name="TextBox 4"/>
-          <p:cNvSpPr txBox="1"/>
-          <p:nvPr/>
-        </p:nvSpPr>
-        <p:spPr>
-          <a:xfrm>
             <a:off x="640080" y="566928"/>
             <a:ext cx="10058400" cy="530352"/>
           </a:xfrm>
@@ -26676,7 +25927,7 @@
       </p:sp>
       <p:sp>
         <p:nvSpPr>
-          <p:cNvPr id="6" name="Rectangle 5"/>
+          <p:cNvPr id="5" name="Rectangle 4"/>
           <p:cNvSpPr/>
           <p:nvPr/>
         </p:nvSpPr>
@@ -26725,7 +25976,7 @@
       </p:sp>
       <p:sp>
         <p:nvSpPr>
-          <p:cNvPr id="7" name="Rectangle 6"/>
+          <p:cNvPr id="6" name="Rectangle 5"/>
           <p:cNvSpPr/>
           <p:nvPr/>
         </p:nvSpPr>
@@ -26774,7 +26025,7 @@
       </p:sp>
       <p:sp>
         <p:nvSpPr>
-          <p:cNvPr id="8" name="TextBox 7"/>
+          <p:cNvPr id="7" name="TextBox 6"/>
           <p:cNvSpPr txBox="1"/>
           <p:nvPr/>
         </p:nvSpPr>
@@ -26816,7 +26067,7 @@
       </p:sp>
       <p:sp>
         <p:nvSpPr>
-          <p:cNvPr id="9" name="TextBox 8"/>
+          <p:cNvPr id="8" name="TextBox 7"/>
           <p:cNvSpPr txBox="1"/>
           <p:nvPr/>
         </p:nvSpPr>
@@ -26858,7 +26109,7 @@
       </p:sp>
       <p:graphicFrame>
         <p:nvGraphicFramePr>
-          <p:cNvPr id="10" name="Chart 9"/>
+          <p:cNvPr id="9" name="Chart 8"/>
           <p:cNvGraphicFramePr>
             <a:graphicFrameLocks noGrp="1"/>
           </p:cNvGraphicFramePr>
@@ -26876,7 +26127,7 @@
       </p:graphicFrame>
       <p:sp>
         <p:nvSpPr>
-          <p:cNvPr id="11" name="Rectangle 10"/>
+          <p:cNvPr id="10" name="Rectangle 9"/>
           <p:cNvSpPr/>
           <p:nvPr/>
         </p:nvSpPr>
@@ -26925,7 +26176,7 @@
       </p:sp>
       <p:sp>
         <p:nvSpPr>
-          <p:cNvPr id="12" name="Rectangle 11"/>
+          <p:cNvPr id="11" name="Rectangle 10"/>
           <p:cNvSpPr/>
           <p:nvPr/>
         </p:nvSpPr>
@@ -26974,7 +26225,7 @@
       </p:sp>
       <p:sp>
         <p:nvSpPr>
-          <p:cNvPr id="13" name="TextBox 12"/>
+          <p:cNvPr id="12" name="TextBox 11"/>
           <p:cNvSpPr txBox="1"/>
           <p:nvPr/>
         </p:nvSpPr>
@@ -27016,7 +26267,7 @@
       </p:sp>
       <p:sp>
         <p:nvSpPr>
-          <p:cNvPr id="14" name="TextBox 13"/>
+          <p:cNvPr id="13" name="TextBox 12"/>
           <p:cNvSpPr txBox="1"/>
           <p:nvPr/>
         </p:nvSpPr>
@@ -27058,7 +26309,7 @@
       </p:sp>
       <p:sp>
         <p:nvSpPr>
-          <p:cNvPr id="15" name="Rectangle 14"/>
+          <p:cNvPr id="14" name="Rectangle 13"/>
           <p:cNvSpPr/>
           <p:nvPr/>
         </p:nvSpPr>
@@ -27107,7 +26358,7 @@
       </p:sp>
       <p:sp>
         <p:nvSpPr>
-          <p:cNvPr id="16" name="Rectangle 15"/>
+          <p:cNvPr id="15" name="Rectangle 14"/>
           <p:cNvSpPr/>
           <p:nvPr/>
         </p:nvSpPr>
@@ -27156,7 +26407,7 @@
       </p:sp>
       <p:sp>
         <p:nvSpPr>
-          <p:cNvPr id="17" name="TextBox 16"/>
+          <p:cNvPr id="16" name="TextBox 15"/>
           <p:cNvSpPr txBox="1"/>
           <p:nvPr/>
         </p:nvSpPr>
@@ -27198,7 +26449,7 @@
       </p:sp>
       <p:sp>
         <p:nvSpPr>
-          <p:cNvPr id="18" name="TextBox 17"/>
+          <p:cNvPr id="17" name="TextBox 16"/>
           <p:cNvSpPr txBox="1"/>
           <p:nvPr/>
         </p:nvSpPr>
@@ -27233,14 +26484,14 @@
               <a:rPr>
                 <a:latin typeface="Inter"/>
               </a:rPr>
-              <a:t>Returned diagnostics.entity_return_reconciliation keeps attribution-summary excess against the linked segment benchmark composite separate from historical-return excess against the policy benchmark entity [S2].</a:t>
+              <a:t>Attribution excess is measured against the linked segment benchmark, not the policy benchmark used for historical returns, so the two excess figures are not directly comparable [S2].</a:t>
             </a:r>
           </a:p>
         </p:txBody>
       </p:sp>
       <p:sp>
         <p:nvSpPr>
-          <p:cNvPr id="19" name="Rectangle 18"/>
+          <p:cNvPr id="18" name="Rectangle 17"/>
           <p:cNvSpPr/>
           <p:nvPr/>
         </p:nvSpPr>
@@ -27289,7 +26540,7 @@
       </p:sp>
       <p:sp>
         <p:nvSpPr>
-          <p:cNvPr id="20" name="TextBox 19"/>
+          <p:cNvPr id="19" name="TextBox 18"/>
           <p:cNvSpPr txBox="1"/>
           <p:nvPr/>
         </p:nvSpPr>
@@ -27331,7 +26582,7 @@
       </p:sp>
       <p:sp>
         <p:nvSpPr>
-          <p:cNvPr id="21" name="TextBox 20"/>
+          <p:cNvPr id="20" name="TextBox 19"/>
           <p:cNvSpPr txBox="1"/>
           <p:nvPr/>
         </p:nvSpPr>
@@ -27373,7 +26624,7 @@
       </p:sp>
       <p:sp>
         <p:nvSpPr>
-          <p:cNvPr id="22" name="TextBox 21"/>
+          <p:cNvPr id="21" name="TextBox 20"/>
           <p:cNvSpPr txBox="1"/>
           <p:nvPr/>
         </p:nvSpPr>
